--- a/ufwl-timeline/UFWL_Presentation_EN.pptx
+++ b/ufwl-timeline/UFWL_Presentation_EN.pptx
@@ -8121,7 +8121,7 @@
         <p:spPr>
           <a:xfrm>
             <a:off x="6044184" y="1965960"/>
-            <a:ext cx="0" cy="3429000"/>
+            <a:ext cx="0" cy="3502152"/>
           </a:xfrm>
           <a:prstGeom prst="line">
             <a:avLst/>
@@ -8786,7 +8786,7 @@
         <p:spPr>
           <a:xfrm>
             <a:off x="6766903" y="1965960"/>
-            <a:ext cx="120453" cy="3429000"/>
+            <a:ext cx="120453" cy="3502152"/>
           </a:xfrm>
           <a:prstGeom prst="rect">
             <a:avLst/>
@@ -8922,7 +8922,7 @@
         <p:spPr>
           <a:xfrm>
             <a:off x="6887356" y="1965960"/>
-            <a:ext cx="0" cy="3429000"/>
+            <a:ext cx="0" cy="3502152"/>
           </a:xfrm>
           <a:prstGeom prst="line">
             <a:avLst/>
@@ -9587,7 +9587,7 @@
         <p:spPr>
           <a:xfrm>
             <a:off x="7610075" y="1965960"/>
-            <a:ext cx="120453" cy="3429000"/>
+            <a:ext cx="120453" cy="3502152"/>
           </a:xfrm>
           <a:prstGeom prst="rect">
             <a:avLst/>
@@ -9723,7 +9723,7 @@
         <p:spPr>
           <a:xfrm>
             <a:off x="7730528" y="1965960"/>
-            <a:ext cx="0" cy="3429000"/>
+            <a:ext cx="0" cy="3502152"/>
           </a:xfrm>
           <a:prstGeom prst="line">
             <a:avLst/>
@@ -10388,7 +10388,7 @@
         <p:spPr>
           <a:xfrm>
             <a:off x="8453247" y="1965960"/>
-            <a:ext cx="120453" cy="3429000"/>
+            <a:ext cx="120453" cy="3502152"/>
           </a:xfrm>
           <a:prstGeom prst="rect">
             <a:avLst/>
@@ -10524,7 +10524,7 @@
         <p:spPr>
           <a:xfrm>
             <a:off x="8573700" y="1965960"/>
-            <a:ext cx="0" cy="3429000"/>
+            <a:ext cx="0" cy="3502152"/>
           </a:xfrm>
           <a:prstGeom prst="line">
             <a:avLst/>
@@ -11189,7 +11189,7 @@
         <p:spPr>
           <a:xfrm>
             <a:off x="9296419" y="1965960"/>
-            <a:ext cx="120453" cy="3429000"/>
+            <a:ext cx="120453" cy="3502152"/>
           </a:xfrm>
           <a:prstGeom prst="rect">
             <a:avLst/>
@@ -11325,7 +11325,7 @@
         <p:spPr>
           <a:xfrm>
             <a:off x="9416872" y="1965960"/>
-            <a:ext cx="0" cy="3429000"/>
+            <a:ext cx="0" cy="3502152"/>
           </a:xfrm>
           <a:prstGeom prst="line">
             <a:avLst/>
@@ -11990,7 +11990,7 @@
         <p:spPr>
           <a:xfrm>
             <a:off x="10139591" y="1965960"/>
-            <a:ext cx="120453" cy="3429000"/>
+            <a:ext cx="120453" cy="3502152"/>
           </a:xfrm>
           <a:prstGeom prst="rect">
             <a:avLst/>
@@ -12126,7 +12126,7 @@
         <p:spPr>
           <a:xfrm>
             <a:off x="10260044" y="1965960"/>
-            <a:ext cx="0" cy="3429000"/>
+            <a:ext cx="0" cy="3502152"/>
           </a:xfrm>
           <a:prstGeom prst="line">
             <a:avLst/>
@@ -12791,7 +12791,7 @@
         <p:spPr>
           <a:xfrm>
             <a:off x="10982763" y="1965960"/>
-            <a:ext cx="120453" cy="3429000"/>
+            <a:ext cx="120453" cy="3502152"/>
           </a:xfrm>
           <a:prstGeom prst="rect">
             <a:avLst/>
@@ -12927,7 +12927,7 @@
         <p:spPr>
           <a:xfrm>
             <a:off x="11103216" y="1965960"/>
-            <a:ext cx="0" cy="3429000"/>
+            <a:ext cx="0" cy="3502152"/>
           </a:xfrm>
           <a:prstGeom prst="line">
             <a:avLst/>
@@ -13485,13 +13485,13 @@
         <p:spPr>
           <a:xfrm>
             <a:off x="365760" y="1965960"/>
-            <a:ext cx="5678424" cy="603504"/>
-          </a:xfrm>
-          <a:prstGeom prst="rect">
-            <a:avLst/>
-          </a:prstGeom>
-          <a:solidFill>
-            <a:srgbClr val="FBFDFD"/>
+            <a:ext cx="11460175" cy="274320"/>
+          </a:xfrm>
+          <a:prstGeom prst="rect">
+            <a:avLst/>
+          </a:prstGeom>
+          <a:solidFill>
+            <a:srgbClr val="FFFFFF"/>
           </a:solidFill>
           <a:ln w="6350">
             <a:solidFill>
@@ -13503,14 +13503,80 @@
       </p:sp>
       <p:sp>
         <p:nvSpPr>
-          <p:cNvPr id="198" name="Text 196"/>
-          <p:cNvSpPr/>
-          <p:nvPr/>
-        </p:nvSpPr>
-        <p:spPr>
-          <a:xfrm>
-            <a:off x="457200" y="1965960"/>
-            <a:ext cx="5495544" cy="603504"/>
+          <p:cNvPr id="198" name="Shape 196"/>
+          <p:cNvSpPr/>
+          <p:nvPr/>
+        </p:nvSpPr>
+        <p:spPr>
+          <a:xfrm>
+            <a:off x="438912" y="1984248"/>
+            <a:ext cx="237744" cy="237744"/>
+          </a:xfrm>
+          <a:prstGeom prst="ellipse">
+            <a:avLst/>
+          </a:prstGeom>
+          <a:solidFill>
+            <a:srgbClr val="3D3935"/>
+          </a:solidFill>
+          <a:ln w="12700">
+            <a:solidFill>
+              <a:srgbClr val="3D3935"/>
+            </a:solidFill>
+            <a:prstDash val="solid"/>
+          </a:ln>
+        </p:spPr>
+      </p:sp>
+      <p:sp>
+        <p:nvSpPr>
+          <p:cNvPr id="199" name="Text 197"/>
+          <p:cNvSpPr/>
+          <p:nvPr/>
+        </p:nvSpPr>
+        <p:spPr>
+          <a:xfrm>
+            <a:off x="365760" y="1965960"/>
+            <a:ext cx="384048" cy="274320"/>
+          </a:xfrm>
+          <a:prstGeom prst="rect">
+            <a:avLst/>
+          </a:prstGeom>
+          <a:noFill/>
+          <a:ln/>
+        </p:spPr>
+        <p:txBody>
+          <a:bodyPr wrap="square" lIns="0" tIns="0" rIns="0" bIns="0" rtlCol="0" anchor="ctr">
+            <a:normAutofit/>
+          </a:bodyPr>
+          <a:lstStyle/>
+          <a:p>
+            <a:pPr algn="ctr" indent="0" marL="0">
+              <a:buNone/>
+            </a:pPr>
+            <a:r>
+              <a:rPr lang="en-US" altLang="en-US" sz="900" b="1" dirty="0">
+                <a:solidFill>
+                  <a:srgbClr val="FFFFFF"/>
+                </a:solidFill>
+                <a:latin typeface="Calibri" pitchFamily="34" charset="0"/>
+                <a:ea typeface="Calibri" pitchFamily="34" charset="-122"/>
+                <a:cs typeface="Calibri" pitchFamily="34" charset="-120"/>
+              </a:rPr>
+              <a:t>Σ</a:t>
+            </a:r>
+            <a:endParaRPr lang="en-US" sz="900" dirty="0"/>
+          </a:p>
+        </p:txBody>
+      </p:sp>
+      <p:sp>
+        <p:nvSpPr>
+          <p:cNvPr id="200" name="Text 198"/>
+          <p:cNvSpPr/>
+          <p:nvPr/>
+        </p:nvSpPr>
+        <p:spPr>
+          <a:xfrm>
+            <a:off x="822960" y="1965960"/>
+            <a:ext cx="2606040" cy="274320"/>
           </a:xfrm>
           <a:prstGeom prst="rect">
             <a:avLst/>
@@ -13536,7 +13602,7 @@
                 <a:ea typeface="Calibri" pitchFamily="34" charset="-122"/>
                 <a:cs typeface="Calibri" pitchFamily="34" charset="-120"/>
               </a:rPr>
-              <a:t>◆  Milestone</a:t>
+              <a:t>Overall project duration</a:t>
             </a:r>
             <a:endParaRPr lang="en-US" sz="1000" dirty="0"/>
           </a:p>
@@ -13544,48 +13610,23 @@
       </p:sp>
       <p:sp>
         <p:nvSpPr>
-          <p:cNvPr id="199" name="Shape 197"/>
-          <p:cNvSpPr/>
-          <p:nvPr/>
-        </p:nvSpPr>
-        <p:spPr>
-          <a:xfrm>
-            <a:off x="6383474" y="2039112"/>
-            <a:ext cx="164592" cy="164592"/>
-          </a:xfrm>
-          <a:prstGeom prst="diamond">
-            <a:avLst/>
-          </a:prstGeom>
-          <a:solidFill>
-            <a:srgbClr val="3D3935"/>
-          </a:solidFill>
-          <a:ln w="19050">
-            <a:solidFill>
-              <a:srgbClr val="FFFFFF"/>
-            </a:solidFill>
-            <a:prstDash val="solid"/>
-          </a:ln>
-        </p:spPr>
-      </p:sp>
-      <p:sp>
-        <p:nvSpPr>
-          <p:cNvPr id="200" name="Text 198"/>
-          <p:cNvSpPr/>
-          <p:nvPr/>
-        </p:nvSpPr>
-        <p:spPr>
-          <a:xfrm>
-            <a:off x="6036002" y="2212848"/>
-            <a:ext cx="859536" cy="182880"/>
-          </a:xfrm>
-          <a:prstGeom prst="rect">
-            <a:avLst/>
-          </a:prstGeom>
-          <a:noFill/>
-          <a:ln/>
-        </p:spPr>
-        <p:txBody>
-          <a:bodyPr wrap="square" lIns="0" tIns="0" rIns="0" bIns="0" rtlCol="0" anchor="t">
+          <p:cNvPr id="201" name="Text 199"/>
+          <p:cNvSpPr/>
+          <p:nvPr/>
+        </p:nvSpPr>
+        <p:spPr>
+          <a:xfrm>
+            <a:off x="4224528" y="1965960"/>
+            <a:ext cx="502920" cy="274320"/>
+          </a:xfrm>
+          <a:prstGeom prst="rect">
+            <a:avLst/>
+          </a:prstGeom>
+          <a:noFill/>
+          <a:ln/>
+        </p:spPr>
+        <p:txBody>
+          <a:bodyPr wrap="square" lIns="0" tIns="0" rIns="0" bIns="0" rtlCol="0" anchor="ctr">
             <a:normAutofit/>
           </a:bodyPr>
           <a:lstStyle/>
@@ -13594,30 +13635,30 @@
               <a:buNone/>
             </a:pPr>
             <a:r>
-              <a:rPr lang="en-US" altLang="en-US" sz="550" dirty="0">
-                <a:solidFill>
-                  <a:srgbClr val="556070"/>
-                </a:solidFill>
-                <a:latin typeface="Calibri" pitchFamily="34" charset="0"/>
-                <a:ea typeface="Calibri" pitchFamily="34" charset="-122"/>
-                <a:cs typeface="Calibri" pitchFamily="34" charset="-120"/>
-              </a:rPr>
-              <a:t>Commencement</a:t>
-            </a:r>
-            <a:endParaRPr lang="en-US" sz="550" dirty="0"/>
-          </a:p>
-        </p:txBody>
-      </p:sp>
-      <p:sp>
-        <p:nvSpPr>
-          <p:cNvPr id="201" name="Text 199"/>
-          <p:cNvSpPr/>
-          <p:nvPr/>
-        </p:nvSpPr>
-        <p:spPr>
-          <a:xfrm>
-            <a:off x="5898842" y="2368296"/>
-            <a:ext cx="1133856" cy="164592"/>
+              <a:rPr lang="en-US" altLang="en-US" sz="1100" b="1" dirty="0">
+                <a:solidFill>
+                  <a:srgbClr val="222222"/>
+                </a:solidFill>
+                <a:latin typeface="Calibri" pitchFamily="34" charset="0"/>
+                <a:ea typeface="Calibri" pitchFamily="34" charset="-122"/>
+                <a:cs typeface="Calibri" pitchFamily="34" charset="-120"/>
+              </a:rPr>
+              <a:t>37</a:t>
+            </a:r>
+            <a:endParaRPr lang="en-US" sz="1100" dirty="0"/>
+          </a:p>
+        </p:txBody>
+      </p:sp>
+      <p:sp>
+        <p:nvSpPr>
+          <p:cNvPr id="202" name="Text 200"/>
+          <p:cNvSpPr/>
+          <p:nvPr/>
+        </p:nvSpPr>
+        <p:spPr>
+          <a:xfrm>
+            <a:off x="4727448" y="1965960"/>
+            <a:ext cx="658368" cy="274320"/>
           </a:xfrm>
           <a:prstGeom prst="rect">
             <a:avLst/>
@@ -13635,9 +13676,9 @@
               <a:buNone/>
             </a:pPr>
             <a:r>
-              <a:rPr lang="en-US" altLang="en-US" sz="750" b="1" dirty="0">
-                <a:solidFill>
-                  <a:srgbClr val="3D3935"/>
+              <a:rPr lang="en-US" altLang="en-US" sz="850" b="1" dirty="0">
+                <a:solidFill>
+                  <a:srgbClr val="222222"/>
                 </a:solidFill>
                 <a:latin typeface="Calibri" pitchFamily="34" charset="0"/>
                 <a:ea typeface="Calibri" pitchFamily="34" charset="-122"/>
@@ -13645,34 +13686,9 @@
               </a:rPr>
               <a:t>13 Oct</a:t>
             </a:r>
-            <a:endParaRPr lang="en-US" sz="750" dirty="0"/>
-          </a:p>
-        </p:txBody>
-      </p:sp>
-      <p:sp>
-        <p:nvSpPr>
-          <p:cNvPr id="202" name="Shape 200"/>
-          <p:cNvSpPr/>
-          <p:nvPr/>
-        </p:nvSpPr>
-        <p:spPr>
-          <a:xfrm>
-            <a:off x="7106193" y="2039112"/>
-            <a:ext cx="164592" cy="164592"/>
-          </a:xfrm>
-          <a:prstGeom prst="diamond">
-            <a:avLst/>
-          </a:prstGeom>
-          <a:solidFill>
-            <a:srgbClr val="3D3935"/>
-          </a:solidFill>
-          <a:ln w="19050">
-            <a:solidFill>
-              <a:srgbClr val="FFFFFF"/>
-            </a:solidFill>
-            <a:prstDash val="solid"/>
-          </a:ln>
-        </p:spPr>
+            <a:endParaRPr lang="en-US" sz="850" dirty="0"/>
+          </a:p>
+        </p:txBody>
       </p:sp>
       <p:sp>
         <p:nvSpPr>
@@ -13682,17 +13698,17 @@
         </p:nvSpPr>
         <p:spPr>
           <a:xfrm>
-            <a:off x="6758721" y="2212848"/>
-            <a:ext cx="859536" cy="182880"/>
-          </a:xfrm>
-          <a:prstGeom prst="rect">
-            <a:avLst/>
-          </a:prstGeom>
-          <a:noFill/>
-          <a:ln/>
-        </p:spPr>
-        <p:txBody>
-          <a:bodyPr wrap="square" lIns="0" tIns="0" rIns="0" bIns="0" rtlCol="0" anchor="t">
+            <a:off x="5385816" y="1965960"/>
+            <a:ext cx="658368" cy="274320"/>
+          </a:xfrm>
+          <a:prstGeom prst="rect">
+            <a:avLst/>
+          </a:prstGeom>
+          <a:noFill/>
+          <a:ln/>
+        </p:spPr>
+        <p:txBody>
+          <a:bodyPr wrap="square" lIns="0" tIns="0" rIns="0" bIns="0" rtlCol="0" anchor="ctr">
             <a:normAutofit/>
           </a:bodyPr>
           <a:lstStyle/>
@@ -13701,371 +13717,9 @@
               <a:buNone/>
             </a:pPr>
             <a:r>
-              <a:rPr lang="en-US" altLang="en-US" sz="550" dirty="0">
-                <a:solidFill>
-                  <a:srgbClr val="556070"/>
-                </a:solidFill>
-                <a:latin typeface="Calibri" pitchFamily="34" charset="0"/>
-                <a:ea typeface="Calibri" pitchFamily="34" charset="-122"/>
-                <a:cs typeface="Calibri" pitchFamily="34" charset="-120"/>
-              </a:rPr>
-              <a:t>Shoring installation complete</a:t>
-            </a:r>
-            <a:endParaRPr lang="en-US" sz="550" dirty="0"/>
-          </a:p>
-        </p:txBody>
-      </p:sp>
-      <p:sp>
-        <p:nvSpPr>
-          <p:cNvPr id="204" name="Text 202"/>
-          <p:cNvSpPr/>
-          <p:nvPr/>
-        </p:nvSpPr>
-        <p:spPr>
-          <a:xfrm>
-            <a:off x="6621561" y="2368296"/>
-            <a:ext cx="1133856" cy="164592"/>
-          </a:xfrm>
-          <a:prstGeom prst="rect">
-            <a:avLst/>
-          </a:prstGeom>
-          <a:noFill/>
-          <a:ln/>
-        </p:spPr>
-        <p:txBody>
-          <a:bodyPr wrap="square" lIns="0" tIns="0" rIns="0" bIns="0" rtlCol="0" anchor="ctr">
-            <a:normAutofit/>
-          </a:bodyPr>
-          <a:lstStyle/>
-          <a:p>
-            <a:pPr algn="ctr" indent="0" marL="0">
-              <a:buNone/>
-            </a:pPr>
-            <a:r>
-              <a:rPr lang="en-US" altLang="en-US" sz="750" b="1" dirty="0">
-                <a:solidFill>
-                  <a:srgbClr val="3D3935"/>
-                </a:solidFill>
-                <a:latin typeface="Calibri" pitchFamily="34" charset="0"/>
-                <a:ea typeface="Calibri" pitchFamily="34" charset="-122"/>
-                <a:cs typeface="Calibri" pitchFamily="34" charset="-120"/>
-              </a:rPr>
-              <a:t>19 Oct</a:t>
-            </a:r>
-            <a:endParaRPr lang="en-US" sz="750" dirty="0"/>
-          </a:p>
-        </p:txBody>
-      </p:sp>
-      <p:sp>
-        <p:nvSpPr>
-          <p:cNvPr id="205" name="Shape 203"/>
-          <p:cNvSpPr/>
-          <p:nvPr/>
-        </p:nvSpPr>
-        <p:spPr>
-          <a:xfrm>
-            <a:off x="9876615" y="2039112"/>
-            <a:ext cx="164592" cy="164592"/>
-          </a:xfrm>
-          <a:prstGeom prst="diamond">
-            <a:avLst/>
-          </a:prstGeom>
-          <a:solidFill>
-            <a:srgbClr val="3D3935"/>
-          </a:solidFill>
-          <a:ln w="19050">
-            <a:solidFill>
-              <a:srgbClr val="FFFFFF"/>
-            </a:solidFill>
-            <a:prstDash val="solid"/>
-          </a:ln>
-        </p:spPr>
-      </p:sp>
-      <p:sp>
-        <p:nvSpPr>
-          <p:cNvPr id="206" name="Text 204"/>
-          <p:cNvSpPr/>
-          <p:nvPr/>
-        </p:nvSpPr>
-        <p:spPr>
-          <a:xfrm>
-            <a:off x="9529143" y="2212848"/>
-            <a:ext cx="859536" cy="182880"/>
-          </a:xfrm>
-          <a:prstGeom prst="rect">
-            <a:avLst/>
-          </a:prstGeom>
-          <a:noFill/>
-          <a:ln/>
-        </p:spPr>
-        <p:txBody>
-          <a:bodyPr wrap="square" lIns="0" tIns="0" rIns="0" bIns="0" rtlCol="0" anchor="t">
-            <a:normAutofit/>
-          </a:bodyPr>
-          <a:lstStyle/>
-          <a:p>
-            <a:pPr algn="ctr" indent="0" marL="0">
-              <a:buNone/>
-            </a:pPr>
-            <a:r>
-              <a:rPr lang="en-US" altLang="en-US" sz="550" dirty="0">
-                <a:solidFill>
-                  <a:srgbClr val="556070"/>
-                </a:solidFill>
-                <a:latin typeface="Calibri" pitchFamily="34" charset="0"/>
-                <a:ea typeface="Calibri" pitchFamily="34" charset="-122"/>
-                <a:cs typeface="Calibri" pitchFamily="34" charset="-120"/>
-              </a:rPr>
-              <a:t>Pit works complete (pit wall)</a:t>
-            </a:r>
-            <a:endParaRPr lang="en-US" sz="550" dirty="0"/>
-          </a:p>
-        </p:txBody>
-      </p:sp>
-      <p:sp>
-        <p:nvSpPr>
-          <p:cNvPr id="207" name="Text 205"/>
-          <p:cNvSpPr/>
-          <p:nvPr/>
-        </p:nvSpPr>
-        <p:spPr>
-          <a:xfrm>
-            <a:off x="9391983" y="2368296"/>
-            <a:ext cx="1133856" cy="164592"/>
-          </a:xfrm>
-          <a:prstGeom prst="rect">
-            <a:avLst/>
-          </a:prstGeom>
-          <a:noFill/>
-          <a:ln/>
-        </p:spPr>
-        <p:txBody>
-          <a:bodyPr wrap="square" lIns="0" tIns="0" rIns="0" bIns="0" rtlCol="0" anchor="ctr">
-            <a:normAutofit/>
-          </a:bodyPr>
-          <a:lstStyle/>
-          <a:p>
-            <a:pPr algn="ctr" indent="0" marL="0">
-              <a:buNone/>
-            </a:pPr>
-            <a:r>
-              <a:rPr lang="en-US" altLang="en-US" sz="750" b="1" dirty="0">
-                <a:solidFill>
-                  <a:srgbClr val="3D3935"/>
-                </a:solidFill>
-                <a:latin typeface="Calibri" pitchFamily="34" charset="0"/>
-                <a:ea typeface="Calibri" pitchFamily="34" charset="-122"/>
-                <a:cs typeface="Calibri" pitchFamily="34" charset="-120"/>
-              </a:rPr>
-              <a:t>11 Nov</a:t>
-            </a:r>
-            <a:endParaRPr lang="en-US" sz="750" dirty="0"/>
-          </a:p>
-        </p:txBody>
-      </p:sp>
-      <p:sp>
-        <p:nvSpPr>
-          <p:cNvPr id="208" name="Shape 206"/>
-          <p:cNvSpPr/>
-          <p:nvPr/>
-        </p:nvSpPr>
-        <p:spPr>
-          <a:xfrm>
-            <a:off x="10719787" y="2039112"/>
-            <a:ext cx="164592" cy="164592"/>
-          </a:xfrm>
-          <a:prstGeom prst="diamond">
-            <a:avLst/>
-          </a:prstGeom>
-          <a:solidFill>
-            <a:srgbClr val="3D3935"/>
-          </a:solidFill>
-          <a:ln w="19050">
-            <a:solidFill>
-              <a:srgbClr val="FFFFFF"/>
-            </a:solidFill>
-            <a:prstDash val="solid"/>
-          </a:ln>
-        </p:spPr>
-      </p:sp>
-      <p:sp>
-        <p:nvSpPr>
-          <p:cNvPr id="209" name="Text 207"/>
-          <p:cNvSpPr/>
-          <p:nvPr/>
-        </p:nvSpPr>
-        <p:spPr>
-          <a:xfrm>
-            <a:off x="10372315" y="2212848"/>
-            <a:ext cx="859536" cy="182880"/>
-          </a:xfrm>
-          <a:prstGeom prst="rect">
-            <a:avLst/>
-          </a:prstGeom>
-          <a:noFill/>
-          <a:ln/>
-        </p:spPr>
-        <p:txBody>
-          <a:bodyPr wrap="square" lIns="0" tIns="0" rIns="0" bIns="0" rtlCol="0" anchor="t">
-            <a:normAutofit/>
-          </a:bodyPr>
-          <a:lstStyle/>
-          <a:p>
-            <a:pPr algn="ctr" indent="0" marL="0">
-              <a:buNone/>
-            </a:pPr>
-            <a:r>
-              <a:rPr lang="en-US" altLang="en-US" sz="550" dirty="0">
-                <a:solidFill>
-                  <a:srgbClr val="556070"/>
-                </a:solidFill>
-                <a:latin typeface="Calibri" pitchFamily="34" charset="0"/>
-                <a:ea typeface="Calibri" pitchFamily="34" charset="-122"/>
-                <a:cs typeface="Calibri" pitchFamily="34" charset="-120"/>
-              </a:rPr>
-              <a:t>Building foundation complete</a:t>
-            </a:r>
-            <a:endParaRPr lang="en-US" sz="550" dirty="0"/>
-          </a:p>
-        </p:txBody>
-      </p:sp>
-      <p:sp>
-        <p:nvSpPr>
-          <p:cNvPr id="210" name="Text 208"/>
-          <p:cNvSpPr/>
-          <p:nvPr/>
-        </p:nvSpPr>
-        <p:spPr>
-          <a:xfrm>
-            <a:off x="10235155" y="2368296"/>
-            <a:ext cx="1133856" cy="164592"/>
-          </a:xfrm>
-          <a:prstGeom prst="rect">
-            <a:avLst/>
-          </a:prstGeom>
-          <a:noFill/>
-          <a:ln/>
-        </p:spPr>
-        <p:txBody>
-          <a:bodyPr wrap="square" lIns="0" tIns="0" rIns="0" bIns="0" rtlCol="0" anchor="ctr">
-            <a:normAutofit/>
-          </a:bodyPr>
-          <a:lstStyle/>
-          <a:p>
-            <a:pPr algn="ctr" indent="0" marL="0">
-              <a:buNone/>
-            </a:pPr>
-            <a:r>
-              <a:rPr lang="en-US" altLang="en-US" sz="750" b="1" dirty="0">
-                <a:solidFill>
-                  <a:srgbClr val="3D3935"/>
-                </a:solidFill>
-                <a:latin typeface="Calibri" pitchFamily="34" charset="0"/>
-                <a:ea typeface="Calibri" pitchFamily="34" charset="-122"/>
-                <a:cs typeface="Calibri" pitchFamily="34" charset="-120"/>
-              </a:rPr>
-              <a:t>18 Nov</a:t>
-            </a:r>
-            <a:endParaRPr lang="en-US" sz="750" dirty="0"/>
-          </a:p>
-        </p:txBody>
-      </p:sp>
-      <p:sp>
-        <p:nvSpPr>
-          <p:cNvPr id="211" name="Shape 209"/>
-          <p:cNvSpPr/>
-          <p:nvPr/>
-        </p:nvSpPr>
-        <p:spPr>
-          <a:xfrm>
-            <a:off x="11442506" y="2039112"/>
-            <a:ext cx="164592" cy="164592"/>
-          </a:xfrm>
-          <a:prstGeom prst="diamond">
-            <a:avLst/>
-          </a:prstGeom>
-          <a:solidFill>
-            <a:srgbClr val="3D3935"/>
-          </a:solidFill>
-          <a:ln w="19050">
-            <a:solidFill>
-              <a:srgbClr val="FFFFFF"/>
-            </a:solidFill>
-            <a:prstDash val="solid"/>
-          </a:ln>
-        </p:spPr>
-      </p:sp>
-      <p:sp>
-        <p:nvSpPr>
-          <p:cNvPr id="212" name="Text 210"/>
-          <p:cNvSpPr/>
-          <p:nvPr/>
-        </p:nvSpPr>
-        <p:spPr>
-          <a:xfrm>
-            <a:off x="11095034" y="2212848"/>
-            <a:ext cx="859536" cy="182880"/>
-          </a:xfrm>
-          <a:prstGeom prst="rect">
-            <a:avLst/>
-          </a:prstGeom>
-          <a:noFill/>
-          <a:ln/>
-        </p:spPr>
-        <p:txBody>
-          <a:bodyPr wrap="square" lIns="0" tIns="0" rIns="0" bIns="0" rtlCol="0" anchor="t">
-            <a:normAutofit/>
-          </a:bodyPr>
-          <a:lstStyle/>
-          <a:p>
-            <a:pPr algn="ctr" indent="0" marL="0">
-              <a:buNone/>
-            </a:pPr>
-            <a:r>
-              <a:rPr lang="en-US" altLang="en-US" sz="550" dirty="0">
-                <a:solidFill>
-                  <a:srgbClr val="556070"/>
-                </a:solidFill>
-                <a:latin typeface="Calibri" pitchFamily="34" charset="0"/>
-                <a:ea typeface="Calibri" pitchFamily="34" charset="-122"/>
-                <a:cs typeface="Calibri" pitchFamily="34" charset="-120"/>
-              </a:rPr>
-              <a:t>Overall completion</a:t>
-            </a:r>
-            <a:endParaRPr lang="en-US" sz="550" dirty="0"/>
-          </a:p>
-        </p:txBody>
-      </p:sp>
-      <p:sp>
-        <p:nvSpPr>
-          <p:cNvPr id="213" name="Text 211"/>
-          <p:cNvSpPr/>
-          <p:nvPr/>
-        </p:nvSpPr>
-        <p:spPr>
-          <a:xfrm>
-            <a:off x="10957874" y="2368296"/>
-            <a:ext cx="1133856" cy="164592"/>
-          </a:xfrm>
-          <a:prstGeom prst="rect">
-            <a:avLst/>
-          </a:prstGeom>
-          <a:noFill/>
-          <a:ln/>
-        </p:spPr>
-        <p:txBody>
-          <a:bodyPr wrap="square" lIns="0" tIns="0" rIns="0" bIns="0" rtlCol="0" anchor="ctr">
-            <a:normAutofit/>
-          </a:bodyPr>
-          <a:lstStyle/>
-          <a:p>
-            <a:pPr algn="ctr" indent="0" marL="0">
-              <a:buNone/>
-            </a:pPr>
-            <a:r>
-              <a:rPr lang="en-US" altLang="en-US" sz="750" b="1" dirty="0">
-                <a:solidFill>
-                  <a:srgbClr val="3D3935"/>
+              <a:rPr lang="en-US" altLang="en-US" sz="850" b="1" dirty="0">
+                <a:solidFill>
+                  <a:srgbClr val="222222"/>
                 </a:solidFill>
                 <a:latin typeface="Calibri" pitchFamily="34" charset="0"/>
                 <a:ea typeface="Calibri" pitchFamily="34" charset="-122"/>
@@ -14073,326 +13727,1411 @@
               </a:rPr>
               <a:t>24 Nov</a:t>
             </a:r>
-            <a:endParaRPr lang="en-US" sz="750" dirty="0"/>
-          </a:p>
-        </p:txBody>
-      </p:sp>
-      <p:sp>
-        <p:nvSpPr>
-          <p:cNvPr id="214" name="Shape 212"/>
-          <p:cNvSpPr/>
-          <p:nvPr/>
-        </p:nvSpPr>
-        <p:spPr>
-          <a:xfrm>
-            <a:off x="365760" y="2569464"/>
-            <a:ext cx="11460175" cy="403642"/>
-          </a:xfrm>
-          <a:prstGeom prst="rect">
-            <a:avLst/>
-          </a:prstGeom>
-          <a:solidFill>
-            <a:srgbClr val="FFFFFF"/>
-          </a:solidFill>
-          <a:ln w="6350">
-            <a:solidFill>
-              <a:srgbClr val="DFE6EA"/>
-            </a:solidFill>
-            <a:prstDash val="solid"/>
-          </a:ln>
-        </p:spPr>
-      </p:sp>
-      <p:sp>
-        <p:nvSpPr>
-          <p:cNvPr id="215" name="Shape 213"/>
-          <p:cNvSpPr/>
-          <p:nvPr/>
-        </p:nvSpPr>
-        <p:spPr>
-          <a:xfrm>
-            <a:off x="420624" y="2634125"/>
-            <a:ext cx="274320" cy="274320"/>
-          </a:xfrm>
-          <a:prstGeom prst="ellipse">
-            <a:avLst/>
-          </a:prstGeom>
-          <a:solidFill>
-            <a:srgbClr val="C8503F"/>
-          </a:solidFill>
-          <a:ln w="25400">
-            <a:solidFill>
-              <a:srgbClr val="222222"/>
-            </a:solidFill>
-            <a:prstDash val="solid"/>
-          </a:ln>
-        </p:spPr>
-      </p:sp>
-      <p:sp>
-        <p:nvSpPr>
-          <p:cNvPr id="216" name="Text 214"/>
-          <p:cNvSpPr/>
-          <p:nvPr/>
-        </p:nvSpPr>
-        <p:spPr>
-          <a:xfrm>
-            <a:off x="365760" y="2569464"/>
-            <a:ext cx="384048" cy="403642"/>
-          </a:xfrm>
-          <a:prstGeom prst="rect">
-            <a:avLst/>
-          </a:prstGeom>
-          <a:noFill/>
-          <a:ln/>
-        </p:spPr>
-        <p:txBody>
-          <a:bodyPr wrap="square" lIns="0" tIns="0" rIns="0" bIns="0" rtlCol="0" anchor="ctr">
-            <a:normAutofit/>
-          </a:bodyPr>
-          <a:lstStyle/>
-          <a:p>
-            <a:pPr algn="ctr" indent="0" marL="0">
-              <a:buNone/>
-            </a:pPr>
-            <a:r>
-              <a:rPr lang="en-US" altLang="en-US" sz="900" b="1" dirty="0">
-                <a:solidFill>
-                  <a:srgbClr val="FFFFFF"/>
-                </a:solidFill>
-                <a:latin typeface="Calibri" pitchFamily="34" charset="0"/>
-                <a:ea typeface="Calibri" pitchFamily="34" charset="-122"/>
-                <a:cs typeface="Calibri" pitchFamily="34" charset="-120"/>
-              </a:rPr>
-              <a:t>A</a:t>
-            </a:r>
-            <a:endParaRPr lang="en-US" sz="900" dirty="0"/>
-          </a:p>
-        </p:txBody>
-      </p:sp>
-      <p:sp>
-        <p:nvSpPr>
-          <p:cNvPr id="217" name="Text 215"/>
-          <p:cNvSpPr/>
-          <p:nvPr/>
-        </p:nvSpPr>
-        <p:spPr>
-          <a:xfrm>
-            <a:off x="822960" y="2569464"/>
-            <a:ext cx="2606040" cy="403642"/>
-          </a:xfrm>
-          <a:prstGeom prst="rect">
-            <a:avLst/>
-          </a:prstGeom>
-          <a:noFill/>
-          <a:ln/>
-        </p:spPr>
-        <p:txBody>
-          <a:bodyPr wrap="square" lIns="0" tIns="0" rIns="0" bIns="0" rtlCol="0" anchor="ctr">
-            <a:normAutofit/>
-          </a:bodyPr>
-          <a:lstStyle/>
-          <a:p>
-            <a:pPr algn="l" indent="0" marL="0">
-              <a:buNone/>
-            </a:pPr>
-            <a:r>
-              <a:rPr lang="en-US" altLang="en-US" sz="900" dirty="0">
-                <a:solidFill>
-                  <a:srgbClr val="222222"/>
-                </a:solidFill>
-                <a:latin typeface="Calibri" pitchFamily="34" charset="0"/>
-                <a:ea typeface="Calibri" pitchFamily="34" charset="-122"/>
-                <a:cs typeface="Calibri" pitchFamily="34" charset="-120"/>
-              </a:rPr>
-              <a:t>Shoring system installation</a:t>
-            </a:r>
-            <a:endParaRPr lang="en-US" sz="900" dirty="0"/>
-          </a:p>
-        </p:txBody>
-      </p:sp>
-      <p:sp>
-        <p:nvSpPr>
-          <p:cNvPr id="218" name="Text 216"/>
-          <p:cNvSpPr/>
-          <p:nvPr/>
-        </p:nvSpPr>
-        <p:spPr>
-          <a:xfrm>
-            <a:off x="3447288" y="2569464"/>
-            <a:ext cx="777240" cy="403642"/>
-          </a:xfrm>
-          <a:prstGeom prst="rect">
-            <a:avLst/>
-          </a:prstGeom>
-          <a:noFill/>
-          <a:ln/>
-        </p:spPr>
-        <p:txBody>
-          <a:bodyPr wrap="square" lIns="0" tIns="0" rIns="0" bIns="0" rtlCol="0" anchor="ctr">
-            <a:normAutofit/>
-          </a:bodyPr>
-          <a:lstStyle/>
-          <a:p>
-            <a:pPr algn="ctr" indent="0" marL="0">
-              <a:buNone/>
-            </a:pPr>
-            <a:r>
-              <a:rPr lang="en-US" altLang="en-US" sz="850" dirty="0">
-                <a:solidFill>
-                  <a:srgbClr val="444444"/>
-                </a:solidFill>
-                <a:latin typeface="Calibri" pitchFamily="34" charset="0"/>
-                <a:ea typeface="Calibri" pitchFamily="34" charset="-122"/>
-                <a:cs typeface="Calibri" pitchFamily="34" charset="-120"/>
-              </a:rPr>
-              <a:t>—</a:t>
-            </a:r>
             <a:endParaRPr lang="en-US" sz="850" dirty="0"/>
           </a:p>
         </p:txBody>
       </p:sp>
       <p:sp>
         <p:nvSpPr>
-          <p:cNvPr id="219" name="Text 217"/>
-          <p:cNvSpPr/>
-          <p:nvPr/>
-        </p:nvSpPr>
-        <p:spPr>
-          <a:xfrm>
-            <a:off x="4224528" y="2569464"/>
-            <a:ext cx="502920" cy="403642"/>
-          </a:xfrm>
-          <a:prstGeom prst="rect">
-            <a:avLst/>
-          </a:prstGeom>
-          <a:noFill/>
-          <a:ln/>
-        </p:spPr>
-        <p:txBody>
-          <a:bodyPr wrap="square" lIns="0" tIns="0" rIns="0" bIns="0" rtlCol="0" anchor="ctr">
-            <a:normAutofit/>
-          </a:bodyPr>
-          <a:lstStyle/>
-          <a:p>
-            <a:pPr algn="ctr" indent="0" marL="0">
-              <a:buNone/>
-            </a:pPr>
-            <a:r>
-              <a:rPr lang="en-US" altLang="en-US" sz="1100" b="1" dirty="0">
-                <a:solidFill>
-                  <a:srgbClr val="222222"/>
-                </a:solidFill>
-                <a:latin typeface="Calibri" pitchFamily="34" charset="0"/>
-                <a:ea typeface="Calibri" pitchFamily="34" charset="-122"/>
-                <a:cs typeface="Calibri" pitchFamily="34" charset="-120"/>
-              </a:rPr>
-              <a:t>6</a:t>
-            </a:r>
-            <a:endParaRPr lang="en-US" sz="1100" dirty="0"/>
-          </a:p>
-        </p:txBody>
-      </p:sp>
-      <p:sp>
-        <p:nvSpPr>
-          <p:cNvPr id="220" name="Text 218"/>
-          <p:cNvSpPr/>
-          <p:nvPr/>
-        </p:nvSpPr>
-        <p:spPr>
-          <a:xfrm>
-            <a:off x="4727448" y="2569464"/>
-            <a:ext cx="658368" cy="403642"/>
-          </a:xfrm>
-          <a:prstGeom prst="rect">
-            <a:avLst/>
-          </a:prstGeom>
-          <a:noFill/>
-          <a:ln/>
-        </p:spPr>
-        <p:txBody>
-          <a:bodyPr wrap="square" lIns="0" tIns="0" rIns="0" bIns="0" rtlCol="0" anchor="ctr">
-            <a:normAutofit/>
-          </a:bodyPr>
-          <a:lstStyle/>
-          <a:p>
-            <a:pPr algn="ctr" indent="0" marL="0">
-              <a:buNone/>
-            </a:pPr>
-            <a:r>
-              <a:rPr lang="en-US" altLang="en-US" sz="850" b="1" dirty="0">
-                <a:solidFill>
-                  <a:srgbClr val="222222"/>
-                </a:solidFill>
-                <a:latin typeface="Calibri" pitchFamily="34" charset="0"/>
-                <a:ea typeface="Calibri" pitchFamily="34" charset="-122"/>
-                <a:cs typeface="Calibri" pitchFamily="34" charset="-120"/>
-              </a:rPr>
-              <a:t>13 Oct</a:t>
-            </a:r>
-            <a:endParaRPr lang="en-US" sz="850" dirty="0"/>
-          </a:p>
-        </p:txBody>
-      </p:sp>
-      <p:sp>
-        <p:nvSpPr>
-          <p:cNvPr id="221" name="Text 219"/>
-          <p:cNvSpPr/>
-          <p:nvPr/>
-        </p:nvSpPr>
-        <p:spPr>
-          <a:xfrm>
-            <a:off x="5385816" y="2569464"/>
-            <a:ext cx="658368" cy="403642"/>
-          </a:xfrm>
-          <a:prstGeom prst="rect">
-            <a:avLst/>
-          </a:prstGeom>
-          <a:noFill/>
-          <a:ln/>
-        </p:spPr>
-        <p:txBody>
-          <a:bodyPr wrap="square" lIns="0" tIns="0" rIns="0" bIns="0" rtlCol="0" anchor="ctr">
-            <a:normAutofit/>
-          </a:bodyPr>
-          <a:lstStyle/>
-          <a:p>
-            <a:pPr algn="ctr" indent="0" marL="0">
-              <a:buNone/>
-            </a:pPr>
-            <a:r>
-              <a:rPr lang="en-US" altLang="en-US" sz="850" b="1" dirty="0">
-                <a:solidFill>
-                  <a:srgbClr val="222222"/>
-                </a:solidFill>
-                <a:latin typeface="Calibri" pitchFamily="34" charset="0"/>
-                <a:ea typeface="Calibri" pitchFamily="34" charset="-122"/>
-                <a:cs typeface="Calibri" pitchFamily="34" charset="-120"/>
-              </a:rPr>
-              <a:t>19 Oct</a:t>
-            </a:r>
-            <a:endParaRPr lang="en-US" sz="850" dirty="0"/>
-          </a:p>
-        </p:txBody>
-      </p:sp>
-      <p:sp>
-        <p:nvSpPr>
-          <p:cNvPr id="222" name="Shape 220"/>
-          <p:cNvSpPr/>
-          <p:nvPr/>
-        </p:nvSpPr>
-        <p:spPr>
-          <a:xfrm>
-            <a:off x="6405543" y="2660284"/>
-            <a:ext cx="843172" cy="222003"/>
+          <p:cNvPr id="204" name="Shape 202"/>
+          <p:cNvSpPr/>
+          <p:nvPr/>
+        </p:nvSpPr>
+        <p:spPr>
+          <a:xfrm>
+            <a:off x="6405543" y="2011680"/>
+            <a:ext cx="5179485" cy="182880"/>
           </a:xfrm>
           <a:prstGeom prst="roundRect">
             <a:avLst>
-              <a:gd name="adj" fmla="val 20594"/>
+              <a:gd name="adj" fmla="val 25000"/>
             </a:avLst>
           </a:prstGeom>
           <a:solidFill>
+            <a:srgbClr val="3D3935"/>
+          </a:solidFill>
+          <a:ln w="12700">
+            <a:solidFill>
+              <a:srgbClr val="3D3935"/>
+            </a:solidFill>
+            <a:prstDash val="solid"/>
+          </a:ln>
+        </p:spPr>
+      </p:sp>
+      <p:sp>
+        <p:nvSpPr>
+          <p:cNvPr id="205" name="Text 203"/>
+          <p:cNvSpPr/>
+          <p:nvPr/>
+        </p:nvSpPr>
+        <p:spPr>
+          <a:xfrm>
+            <a:off x="6405543" y="2011680"/>
+            <a:ext cx="5179485" cy="182880"/>
+          </a:xfrm>
+          <a:prstGeom prst="rect">
+            <a:avLst/>
+          </a:prstGeom>
+          <a:noFill/>
+          <a:ln/>
+        </p:spPr>
+        <p:txBody>
+          <a:bodyPr wrap="square" lIns="0" tIns="0" rIns="0" bIns="0" rtlCol="0" anchor="ctr">
+            <a:normAutofit/>
+          </a:bodyPr>
+          <a:lstStyle/>
+          <a:p>
+            <a:pPr algn="ctr" indent="0" marL="0">
+              <a:buNone/>
+            </a:pPr>
+            <a:r>
+              <a:rPr lang="en-US" altLang="en-US" sz="850" b="1" dirty="0">
+                <a:solidFill>
+                  <a:srgbClr val="FFFFFF"/>
+                </a:solidFill>
+                <a:latin typeface="Calibri" pitchFamily="34" charset="0"/>
+                <a:ea typeface="Calibri" pitchFamily="34" charset="-122"/>
+                <a:cs typeface="Calibri" pitchFamily="34" charset="-120"/>
+              </a:rPr>
+              <a:t>37 working days · 13 Oct → 24 Nov</a:t>
+            </a:r>
+            <a:endParaRPr lang="en-US" sz="850" dirty="0"/>
+          </a:p>
+        </p:txBody>
+      </p:sp>
+      <p:sp>
+        <p:nvSpPr>
+          <p:cNvPr id="206" name="Shape 204"/>
+          <p:cNvSpPr/>
+          <p:nvPr/>
+        </p:nvSpPr>
+        <p:spPr>
+          <a:xfrm>
+            <a:off x="365760" y="2240280"/>
+            <a:ext cx="5678424" cy="640080"/>
+          </a:xfrm>
+          <a:prstGeom prst="rect">
+            <a:avLst/>
+          </a:prstGeom>
+          <a:solidFill>
+            <a:srgbClr val="FBFDFD"/>
+          </a:solidFill>
+          <a:ln w="6350">
+            <a:solidFill>
+              <a:srgbClr val="DFE6EA"/>
+            </a:solidFill>
+            <a:prstDash val="solid"/>
+          </a:ln>
+        </p:spPr>
+      </p:sp>
+      <p:sp>
+        <p:nvSpPr>
+          <p:cNvPr id="207" name="Text 205"/>
+          <p:cNvSpPr/>
+          <p:nvPr/>
+        </p:nvSpPr>
+        <p:spPr>
+          <a:xfrm>
+            <a:off x="457200" y="2240280"/>
+            <a:ext cx="5495544" cy="640080"/>
+          </a:xfrm>
+          <a:prstGeom prst="rect">
+            <a:avLst/>
+          </a:prstGeom>
+          <a:noFill/>
+          <a:ln/>
+        </p:spPr>
+        <p:txBody>
+          <a:bodyPr wrap="square" lIns="0" tIns="0" rIns="0" bIns="0" rtlCol="0" anchor="ctr">
+            <a:normAutofit/>
+          </a:bodyPr>
+          <a:lstStyle/>
+          <a:p>
+            <a:pPr algn="l" indent="0" marL="0">
+              <a:buNone/>
+            </a:pPr>
+            <a:r>
+              <a:rPr lang="en-US" altLang="en-US" sz="1000" b="1" dirty="0">
+                <a:solidFill>
+                  <a:srgbClr val="3D3935"/>
+                </a:solidFill>
+                <a:latin typeface="Calibri" pitchFamily="34" charset="0"/>
+                <a:ea typeface="Calibri" pitchFamily="34" charset="-122"/>
+                <a:cs typeface="Calibri" pitchFamily="34" charset="-120"/>
+              </a:rPr>
+              <a:t>◆  Milestone</a:t>
+            </a:r>
+            <a:endParaRPr lang="en-US" sz="1000" dirty="0"/>
+          </a:p>
+        </p:txBody>
+      </p:sp>
+      <p:sp>
+        <p:nvSpPr>
+          <p:cNvPr id="208" name="Shape 206"/>
+          <p:cNvSpPr/>
+          <p:nvPr/>
+        </p:nvSpPr>
+        <p:spPr>
+          <a:xfrm>
+            <a:off x="6383474" y="2313432"/>
+            <a:ext cx="164592" cy="164592"/>
+          </a:xfrm>
+          <a:prstGeom prst="diamond">
+            <a:avLst/>
+          </a:prstGeom>
+          <a:solidFill>
+            <a:srgbClr val="3D3935"/>
+          </a:solidFill>
+          <a:ln w="19050">
+            <a:solidFill>
+              <a:srgbClr val="FFFFFF"/>
+            </a:solidFill>
+            <a:prstDash val="solid"/>
+          </a:ln>
+        </p:spPr>
+      </p:sp>
+      <p:sp>
+        <p:nvSpPr>
+          <p:cNvPr id="209" name="Text 207"/>
+          <p:cNvSpPr/>
+          <p:nvPr/>
+        </p:nvSpPr>
+        <p:spPr>
+          <a:xfrm>
+            <a:off x="6036002" y="2487168"/>
+            <a:ext cx="859536" cy="201168"/>
+          </a:xfrm>
+          <a:prstGeom prst="rect">
+            <a:avLst/>
+          </a:prstGeom>
+          <a:noFill/>
+          <a:ln/>
+        </p:spPr>
+        <p:txBody>
+          <a:bodyPr wrap="square" lIns="0" tIns="0" rIns="0" bIns="0" rtlCol="0" anchor="t">
+            <a:normAutofit/>
+          </a:bodyPr>
+          <a:lstStyle/>
+          <a:p>
+            <a:pPr algn="ctr" indent="0" marL="0">
+              <a:buNone/>
+            </a:pPr>
+            <a:r>
+              <a:rPr lang="en-US" altLang="en-US" sz="550" dirty="0">
+                <a:solidFill>
+                  <a:srgbClr val="556070"/>
+                </a:solidFill>
+                <a:latin typeface="Calibri" pitchFamily="34" charset="0"/>
+                <a:ea typeface="Calibri" pitchFamily="34" charset="-122"/>
+                <a:cs typeface="Calibri" pitchFamily="34" charset="-120"/>
+              </a:rPr>
+              <a:t>Commencement</a:t>
+            </a:r>
+            <a:endParaRPr lang="en-US" sz="550" dirty="0"/>
+          </a:p>
+        </p:txBody>
+      </p:sp>
+      <p:sp>
+        <p:nvSpPr>
+          <p:cNvPr id="210" name="Text 208"/>
+          <p:cNvSpPr/>
+          <p:nvPr/>
+        </p:nvSpPr>
+        <p:spPr>
+          <a:xfrm>
+            <a:off x="5898842" y="2697480"/>
+            <a:ext cx="1133856" cy="164592"/>
+          </a:xfrm>
+          <a:prstGeom prst="rect">
+            <a:avLst/>
+          </a:prstGeom>
+          <a:noFill/>
+          <a:ln/>
+        </p:spPr>
+        <p:txBody>
+          <a:bodyPr wrap="square" lIns="0" tIns="0" rIns="0" bIns="0" rtlCol="0" anchor="ctr">
+            <a:normAutofit/>
+          </a:bodyPr>
+          <a:lstStyle/>
+          <a:p>
+            <a:pPr algn="ctr" indent="0" marL="0">
+              <a:buNone/>
+            </a:pPr>
+            <a:r>
+              <a:rPr lang="en-US" altLang="en-US" sz="750" b="1" dirty="0">
+                <a:solidFill>
+                  <a:srgbClr val="3D3935"/>
+                </a:solidFill>
+                <a:latin typeface="Calibri" pitchFamily="34" charset="0"/>
+                <a:ea typeface="Calibri" pitchFamily="34" charset="-122"/>
+                <a:cs typeface="Calibri" pitchFamily="34" charset="-120"/>
+              </a:rPr>
+              <a:t>13 Oct</a:t>
+            </a:r>
+            <a:endParaRPr lang="en-US" sz="750" dirty="0"/>
+          </a:p>
+        </p:txBody>
+      </p:sp>
+      <p:sp>
+        <p:nvSpPr>
+          <p:cNvPr id="211" name="Shape 209"/>
+          <p:cNvSpPr/>
+          <p:nvPr/>
+        </p:nvSpPr>
+        <p:spPr>
+          <a:xfrm>
+            <a:off x="7106193" y="2313432"/>
+            <a:ext cx="164592" cy="164592"/>
+          </a:xfrm>
+          <a:prstGeom prst="diamond">
+            <a:avLst/>
+          </a:prstGeom>
+          <a:solidFill>
+            <a:srgbClr val="3D3935"/>
+          </a:solidFill>
+          <a:ln w="19050">
+            <a:solidFill>
+              <a:srgbClr val="FFFFFF"/>
+            </a:solidFill>
+            <a:prstDash val="solid"/>
+          </a:ln>
+        </p:spPr>
+      </p:sp>
+      <p:sp>
+        <p:nvSpPr>
+          <p:cNvPr id="212" name="Text 210"/>
+          <p:cNvSpPr/>
+          <p:nvPr/>
+        </p:nvSpPr>
+        <p:spPr>
+          <a:xfrm>
+            <a:off x="6758721" y="2487168"/>
+            <a:ext cx="859536" cy="201168"/>
+          </a:xfrm>
+          <a:prstGeom prst="rect">
+            <a:avLst/>
+          </a:prstGeom>
+          <a:noFill/>
+          <a:ln/>
+        </p:spPr>
+        <p:txBody>
+          <a:bodyPr wrap="square" lIns="0" tIns="0" rIns="0" bIns="0" rtlCol="0" anchor="t">
+            <a:normAutofit/>
+          </a:bodyPr>
+          <a:lstStyle/>
+          <a:p>
+            <a:pPr algn="ctr" indent="0" marL="0">
+              <a:buNone/>
+            </a:pPr>
+            <a:r>
+              <a:rPr lang="en-US" altLang="en-US" sz="550" dirty="0">
+                <a:solidFill>
+                  <a:srgbClr val="556070"/>
+                </a:solidFill>
+                <a:latin typeface="Calibri" pitchFamily="34" charset="0"/>
+                <a:ea typeface="Calibri" pitchFamily="34" charset="-122"/>
+                <a:cs typeface="Calibri" pitchFamily="34" charset="-120"/>
+              </a:rPr>
+              <a:t>Shoring installation complete</a:t>
+            </a:r>
+            <a:endParaRPr lang="en-US" sz="550" dirty="0"/>
+          </a:p>
+        </p:txBody>
+      </p:sp>
+      <p:sp>
+        <p:nvSpPr>
+          <p:cNvPr id="213" name="Text 211"/>
+          <p:cNvSpPr/>
+          <p:nvPr/>
+        </p:nvSpPr>
+        <p:spPr>
+          <a:xfrm>
+            <a:off x="6621561" y="2697480"/>
+            <a:ext cx="1133856" cy="164592"/>
+          </a:xfrm>
+          <a:prstGeom prst="rect">
+            <a:avLst/>
+          </a:prstGeom>
+          <a:noFill/>
+          <a:ln/>
+        </p:spPr>
+        <p:txBody>
+          <a:bodyPr wrap="square" lIns="0" tIns="0" rIns="0" bIns="0" rtlCol="0" anchor="ctr">
+            <a:normAutofit/>
+          </a:bodyPr>
+          <a:lstStyle/>
+          <a:p>
+            <a:pPr algn="ctr" indent="0" marL="0">
+              <a:buNone/>
+            </a:pPr>
+            <a:r>
+              <a:rPr lang="en-US" altLang="en-US" sz="750" b="1" dirty="0">
+                <a:solidFill>
+                  <a:srgbClr val="3D3935"/>
+                </a:solidFill>
+                <a:latin typeface="Calibri" pitchFamily="34" charset="0"/>
+                <a:ea typeface="Calibri" pitchFamily="34" charset="-122"/>
+                <a:cs typeface="Calibri" pitchFamily="34" charset="-120"/>
+              </a:rPr>
+              <a:t>19 Oct</a:t>
+            </a:r>
+            <a:endParaRPr lang="en-US" sz="750" dirty="0"/>
+          </a:p>
+        </p:txBody>
+      </p:sp>
+      <p:sp>
+        <p:nvSpPr>
+          <p:cNvPr id="214" name="Shape 212"/>
+          <p:cNvSpPr/>
+          <p:nvPr/>
+        </p:nvSpPr>
+        <p:spPr>
+          <a:xfrm>
+            <a:off x="9876615" y="2313432"/>
+            <a:ext cx="164592" cy="164592"/>
+          </a:xfrm>
+          <a:prstGeom prst="diamond">
+            <a:avLst/>
+          </a:prstGeom>
+          <a:solidFill>
+            <a:srgbClr val="3D3935"/>
+          </a:solidFill>
+          <a:ln w="19050">
+            <a:solidFill>
+              <a:srgbClr val="FFFFFF"/>
+            </a:solidFill>
+            <a:prstDash val="solid"/>
+          </a:ln>
+        </p:spPr>
+      </p:sp>
+      <p:sp>
+        <p:nvSpPr>
+          <p:cNvPr id="215" name="Text 213"/>
+          <p:cNvSpPr/>
+          <p:nvPr/>
+        </p:nvSpPr>
+        <p:spPr>
+          <a:xfrm>
+            <a:off x="9529143" y="2487168"/>
+            <a:ext cx="859536" cy="201168"/>
+          </a:xfrm>
+          <a:prstGeom prst="rect">
+            <a:avLst/>
+          </a:prstGeom>
+          <a:noFill/>
+          <a:ln/>
+        </p:spPr>
+        <p:txBody>
+          <a:bodyPr wrap="square" lIns="0" tIns="0" rIns="0" bIns="0" rtlCol="0" anchor="t">
+            <a:normAutofit/>
+          </a:bodyPr>
+          <a:lstStyle/>
+          <a:p>
+            <a:pPr algn="ctr" indent="0" marL="0">
+              <a:buNone/>
+            </a:pPr>
+            <a:r>
+              <a:rPr lang="en-US" altLang="en-US" sz="550" dirty="0">
+                <a:solidFill>
+                  <a:srgbClr val="556070"/>
+                </a:solidFill>
+                <a:latin typeface="Calibri" pitchFamily="34" charset="0"/>
+                <a:ea typeface="Calibri" pitchFamily="34" charset="-122"/>
+                <a:cs typeface="Calibri" pitchFamily="34" charset="-120"/>
+              </a:rPr>
+              <a:t>Pit works complete (pit wall)</a:t>
+            </a:r>
+            <a:endParaRPr lang="en-US" sz="550" dirty="0"/>
+          </a:p>
+        </p:txBody>
+      </p:sp>
+      <p:sp>
+        <p:nvSpPr>
+          <p:cNvPr id="216" name="Text 214"/>
+          <p:cNvSpPr/>
+          <p:nvPr/>
+        </p:nvSpPr>
+        <p:spPr>
+          <a:xfrm>
+            <a:off x="9391983" y="2697480"/>
+            <a:ext cx="1133856" cy="164592"/>
+          </a:xfrm>
+          <a:prstGeom prst="rect">
+            <a:avLst/>
+          </a:prstGeom>
+          <a:noFill/>
+          <a:ln/>
+        </p:spPr>
+        <p:txBody>
+          <a:bodyPr wrap="square" lIns="0" tIns="0" rIns="0" bIns="0" rtlCol="0" anchor="ctr">
+            <a:normAutofit/>
+          </a:bodyPr>
+          <a:lstStyle/>
+          <a:p>
+            <a:pPr algn="ctr" indent="0" marL="0">
+              <a:buNone/>
+            </a:pPr>
+            <a:r>
+              <a:rPr lang="en-US" altLang="en-US" sz="750" b="1" dirty="0">
+                <a:solidFill>
+                  <a:srgbClr val="3D3935"/>
+                </a:solidFill>
+                <a:latin typeface="Calibri" pitchFamily="34" charset="0"/>
+                <a:ea typeface="Calibri" pitchFamily="34" charset="-122"/>
+                <a:cs typeface="Calibri" pitchFamily="34" charset="-120"/>
+              </a:rPr>
+              <a:t>11 Nov</a:t>
+            </a:r>
+            <a:endParaRPr lang="en-US" sz="750" dirty="0"/>
+          </a:p>
+        </p:txBody>
+      </p:sp>
+      <p:sp>
+        <p:nvSpPr>
+          <p:cNvPr id="217" name="Shape 215"/>
+          <p:cNvSpPr/>
+          <p:nvPr/>
+        </p:nvSpPr>
+        <p:spPr>
+          <a:xfrm>
+            <a:off x="10719787" y="2313432"/>
+            <a:ext cx="164592" cy="164592"/>
+          </a:xfrm>
+          <a:prstGeom prst="diamond">
+            <a:avLst/>
+          </a:prstGeom>
+          <a:solidFill>
+            <a:srgbClr val="3D3935"/>
+          </a:solidFill>
+          <a:ln w="19050">
+            <a:solidFill>
+              <a:srgbClr val="FFFFFF"/>
+            </a:solidFill>
+            <a:prstDash val="solid"/>
+          </a:ln>
+        </p:spPr>
+      </p:sp>
+      <p:sp>
+        <p:nvSpPr>
+          <p:cNvPr id="218" name="Text 216"/>
+          <p:cNvSpPr/>
+          <p:nvPr/>
+        </p:nvSpPr>
+        <p:spPr>
+          <a:xfrm>
+            <a:off x="10372315" y="2487168"/>
+            <a:ext cx="859536" cy="201168"/>
+          </a:xfrm>
+          <a:prstGeom prst="rect">
+            <a:avLst/>
+          </a:prstGeom>
+          <a:noFill/>
+          <a:ln/>
+        </p:spPr>
+        <p:txBody>
+          <a:bodyPr wrap="square" lIns="0" tIns="0" rIns="0" bIns="0" rtlCol="0" anchor="t">
+            <a:normAutofit/>
+          </a:bodyPr>
+          <a:lstStyle/>
+          <a:p>
+            <a:pPr algn="ctr" indent="0" marL="0">
+              <a:buNone/>
+            </a:pPr>
+            <a:r>
+              <a:rPr lang="en-US" altLang="en-US" sz="550" dirty="0">
+                <a:solidFill>
+                  <a:srgbClr val="556070"/>
+                </a:solidFill>
+                <a:latin typeface="Calibri" pitchFamily="34" charset="0"/>
+                <a:ea typeface="Calibri" pitchFamily="34" charset="-122"/>
+                <a:cs typeface="Calibri" pitchFamily="34" charset="-120"/>
+              </a:rPr>
+              <a:t>Building foundation complete</a:t>
+            </a:r>
+            <a:endParaRPr lang="en-US" sz="550" dirty="0"/>
+          </a:p>
+        </p:txBody>
+      </p:sp>
+      <p:sp>
+        <p:nvSpPr>
+          <p:cNvPr id="219" name="Text 217"/>
+          <p:cNvSpPr/>
+          <p:nvPr/>
+        </p:nvSpPr>
+        <p:spPr>
+          <a:xfrm>
+            <a:off x="10235155" y="2697480"/>
+            <a:ext cx="1133856" cy="164592"/>
+          </a:xfrm>
+          <a:prstGeom prst="rect">
+            <a:avLst/>
+          </a:prstGeom>
+          <a:noFill/>
+          <a:ln/>
+        </p:spPr>
+        <p:txBody>
+          <a:bodyPr wrap="square" lIns="0" tIns="0" rIns="0" bIns="0" rtlCol="0" anchor="ctr">
+            <a:normAutofit/>
+          </a:bodyPr>
+          <a:lstStyle/>
+          <a:p>
+            <a:pPr algn="ctr" indent="0" marL="0">
+              <a:buNone/>
+            </a:pPr>
+            <a:r>
+              <a:rPr lang="en-US" altLang="en-US" sz="750" b="1" dirty="0">
+                <a:solidFill>
+                  <a:srgbClr val="3D3935"/>
+                </a:solidFill>
+                <a:latin typeface="Calibri" pitchFamily="34" charset="0"/>
+                <a:ea typeface="Calibri" pitchFamily="34" charset="-122"/>
+                <a:cs typeface="Calibri" pitchFamily="34" charset="-120"/>
+              </a:rPr>
+              <a:t>18 Nov</a:t>
+            </a:r>
+            <a:endParaRPr lang="en-US" sz="750" dirty="0"/>
+          </a:p>
+        </p:txBody>
+      </p:sp>
+      <p:sp>
+        <p:nvSpPr>
+          <p:cNvPr id="220" name="Shape 218"/>
+          <p:cNvSpPr/>
+          <p:nvPr/>
+        </p:nvSpPr>
+        <p:spPr>
+          <a:xfrm>
+            <a:off x="11442506" y="2313432"/>
+            <a:ext cx="164592" cy="164592"/>
+          </a:xfrm>
+          <a:prstGeom prst="diamond">
+            <a:avLst/>
+          </a:prstGeom>
+          <a:solidFill>
+            <a:srgbClr val="3D3935"/>
+          </a:solidFill>
+          <a:ln w="19050">
+            <a:solidFill>
+              <a:srgbClr val="FFFFFF"/>
+            </a:solidFill>
+            <a:prstDash val="solid"/>
+          </a:ln>
+        </p:spPr>
+      </p:sp>
+      <p:sp>
+        <p:nvSpPr>
+          <p:cNvPr id="221" name="Text 219"/>
+          <p:cNvSpPr/>
+          <p:nvPr/>
+        </p:nvSpPr>
+        <p:spPr>
+          <a:xfrm>
+            <a:off x="11095034" y="2487168"/>
+            <a:ext cx="859536" cy="201168"/>
+          </a:xfrm>
+          <a:prstGeom prst="rect">
+            <a:avLst/>
+          </a:prstGeom>
+          <a:noFill/>
+          <a:ln/>
+        </p:spPr>
+        <p:txBody>
+          <a:bodyPr wrap="square" lIns="0" tIns="0" rIns="0" bIns="0" rtlCol="0" anchor="t">
+            <a:normAutofit/>
+          </a:bodyPr>
+          <a:lstStyle/>
+          <a:p>
+            <a:pPr algn="ctr" indent="0" marL="0">
+              <a:buNone/>
+            </a:pPr>
+            <a:r>
+              <a:rPr lang="en-US" altLang="en-US" sz="550" dirty="0">
+                <a:solidFill>
+                  <a:srgbClr val="556070"/>
+                </a:solidFill>
+                <a:latin typeface="Calibri" pitchFamily="34" charset="0"/>
+                <a:ea typeface="Calibri" pitchFamily="34" charset="-122"/>
+                <a:cs typeface="Calibri" pitchFamily="34" charset="-120"/>
+              </a:rPr>
+              <a:t>Overall completion</a:t>
+            </a:r>
+            <a:endParaRPr lang="en-US" sz="550" dirty="0"/>
+          </a:p>
+        </p:txBody>
+      </p:sp>
+      <p:sp>
+        <p:nvSpPr>
+          <p:cNvPr id="222" name="Text 220"/>
+          <p:cNvSpPr/>
+          <p:nvPr/>
+        </p:nvSpPr>
+        <p:spPr>
+          <a:xfrm>
+            <a:off x="10957874" y="2697480"/>
+            <a:ext cx="1133856" cy="164592"/>
+          </a:xfrm>
+          <a:prstGeom prst="rect">
+            <a:avLst/>
+          </a:prstGeom>
+          <a:noFill/>
+          <a:ln/>
+        </p:spPr>
+        <p:txBody>
+          <a:bodyPr wrap="square" lIns="0" tIns="0" rIns="0" bIns="0" rtlCol="0" anchor="ctr">
+            <a:normAutofit/>
+          </a:bodyPr>
+          <a:lstStyle/>
+          <a:p>
+            <a:pPr algn="ctr" indent="0" marL="0">
+              <a:buNone/>
+            </a:pPr>
+            <a:r>
+              <a:rPr lang="en-US" altLang="en-US" sz="750" b="1" dirty="0">
+                <a:solidFill>
+                  <a:srgbClr val="3D3935"/>
+                </a:solidFill>
+                <a:latin typeface="Calibri" pitchFamily="34" charset="0"/>
+                <a:ea typeface="Calibri" pitchFamily="34" charset="-122"/>
+                <a:cs typeface="Calibri" pitchFamily="34" charset="-120"/>
+              </a:rPr>
+              <a:t>24 Nov</a:t>
+            </a:r>
+            <a:endParaRPr lang="en-US" sz="750" dirty="0"/>
+          </a:p>
+        </p:txBody>
+      </p:sp>
+      <p:sp>
+        <p:nvSpPr>
+          <p:cNvPr id="223" name="Shape 221"/>
+          <p:cNvSpPr/>
+          <p:nvPr/>
+        </p:nvSpPr>
+        <p:spPr>
+          <a:xfrm>
+            <a:off x="365760" y="2880360"/>
+            <a:ext cx="11460175" cy="215646"/>
+          </a:xfrm>
+          <a:prstGeom prst="rect">
+            <a:avLst/>
+          </a:prstGeom>
+          <a:solidFill>
+            <a:srgbClr val="FFFFFF"/>
+          </a:solidFill>
+          <a:ln w="6350">
+            <a:solidFill>
+              <a:srgbClr val="DFE6EA"/>
+            </a:solidFill>
+            <a:prstDash val="solid"/>
+          </a:ln>
+        </p:spPr>
+      </p:sp>
+      <p:sp>
+        <p:nvSpPr>
+          <p:cNvPr id="224" name="Shape 222"/>
+          <p:cNvSpPr/>
+          <p:nvPr/>
+        </p:nvSpPr>
+        <p:spPr>
+          <a:xfrm>
+            <a:off x="438912" y="2869311"/>
+            <a:ext cx="237744" cy="237744"/>
+          </a:xfrm>
+          <a:prstGeom prst="ellipse">
+            <a:avLst>
+              <a:gd name="adj" fmla="val 32692"/>
+            </a:avLst>
+          </a:prstGeom>
+          <a:solidFill>
             <a:srgbClr val="C8503F"/>
           </a:solidFill>
-          <a:ln w="22225">
+          <a:ln w="19050">
+            <a:solidFill>
+              <a:srgbClr val="222222"/>
+            </a:solidFill>
+            <a:prstDash val="solid"/>
+          </a:ln>
+        </p:spPr>
+      </p:sp>
+      <p:sp>
+        <p:nvSpPr>
+          <p:cNvPr id="225" name="Text 223"/>
+          <p:cNvSpPr/>
+          <p:nvPr/>
+        </p:nvSpPr>
+        <p:spPr>
+          <a:xfrm>
+            <a:off x="365760" y="2880360"/>
+            <a:ext cx="384048" cy="215646"/>
+          </a:xfrm>
+          <a:prstGeom prst="rect">
+            <a:avLst/>
+          </a:prstGeom>
+          <a:noFill/>
+          <a:ln/>
+        </p:spPr>
+        <p:txBody>
+          <a:bodyPr wrap="square" lIns="0" tIns="0" rIns="0" bIns="0" rtlCol="0" anchor="ctr">
+            <a:normAutofit/>
+          </a:bodyPr>
+          <a:lstStyle/>
+          <a:p>
+            <a:pPr algn="ctr" indent="0" marL="0">
+              <a:buNone/>
+            </a:pPr>
+            <a:r>
+              <a:rPr lang="en-US" altLang="en-US" sz="850" b="1" dirty="0">
+                <a:solidFill>
+                  <a:srgbClr val="FFFFFF"/>
+                </a:solidFill>
+                <a:latin typeface="Calibri" pitchFamily="34" charset="0"/>
+                <a:ea typeface="Calibri" pitchFamily="34" charset="-122"/>
+                <a:cs typeface="Calibri" pitchFamily="34" charset="-120"/>
+              </a:rPr>
+              <a:t>A</a:t>
+            </a:r>
+            <a:endParaRPr lang="en-US" sz="850" dirty="0"/>
+          </a:p>
+        </p:txBody>
+      </p:sp>
+      <p:sp>
+        <p:nvSpPr>
+          <p:cNvPr id="226" name="Text 224"/>
+          <p:cNvSpPr/>
+          <p:nvPr/>
+        </p:nvSpPr>
+        <p:spPr>
+          <a:xfrm>
+            <a:off x="822960" y="2880360"/>
+            <a:ext cx="2606040" cy="215646"/>
+          </a:xfrm>
+          <a:prstGeom prst="rect">
+            <a:avLst/>
+          </a:prstGeom>
+          <a:noFill/>
+          <a:ln/>
+        </p:spPr>
+        <p:txBody>
+          <a:bodyPr wrap="square" lIns="0" tIns="0" rIns="0" bIns="0" rtlCol="0" anchor="ctr">
+            <a:normAutofit/>
+          </a:bodyPr>
+          <a:lstStyle/>
+          <a:p>
+            <a:pPr algn="l" indent="0" marL="0">
+              <a:buNone/>
+            </a:pPr>
+            <a:r>
+              <a:rPr lang="en-US" altLang="en-US" sz="750" b="1" dirty="0">
+                <a:solidFill>
+                  <a:srgbClr val="222222"/>
+                </a:solidFill>
+                <a:latin typeface="Calibri" pitchFamily="34" charset="0"/>
+                <a:ea typeface="Calibri" pitchFamily="34" charset="-122"/>
+                <a:cs typeface="Calibri" pitchFamily="34" charset="-120"/>
+              </a:rPr>
+              <a:t>Shoring system installation</a:t>
+            </a:r>
+            <a:endParaRPr lang="en-US" sz="750" dirty="0"/>
+          </a:p>
+        </p:txBody>
+      </p:sp>
+      <p:sp>
+        <p:nvSpPr>
+          <p:cNvPr id="227" name="Text 225"/>
+          <p:cNvSpPr/>
+          <p:nvPr/>
+        </p:nvSpPr>
+        <p:spPr>
+          <a:xfrm>
+            <a:off x="3447288" y="2880360"/>
+            <a:ext cx="777240" cy="215646"/>
+          </a:xfrm>
+          <a:prstGeom prst="rect">
+            <a:avLst/>
+          </a:prstGeom>
+          <a:noFill/>
+          <a:ln/>
+        </p:spPr>
+        <p:txBody>
+          <a:bodyPr wrap="square" lIns="0" tIns="0" rIns="0" bIns="0" rtlCol="0" anchor="ctr">
+            <a:normAutofit/>
+          </a:bodyPr>
+          <a:lstStyle/>
+          <a:p>
+            <a:pPr algn="ctr" indent="0" marL="0">
+              <a:buNone/>
+            </a:pPr>
+            <a:r>
+              <a:rPr lang="en-US" altLang="en-US" sz="700" dirty="0">
+                <a:solidFill>
+                  <a:srgbClr val="444444"/>
+                </a:solidFill>
+                <a:latin typeface="Calibri" pitchFamily="34" charset="0"/>
+                <a:ea typeface="Calibri" pitchFamily="34" charset="-122"/>
+                <a:cs typeface="Calibri" pitchFamily="34" charset="-120"/>
+              </a:rPr>
+              <a:t>—</a:t>
+            </a:r>
+            <a:endParaRPr lang="en-US" sz="700" dirty="0"/>
+          </a:p>
+        </p:txBody>
+      </p:sp>
+      <p:sp>
+        <p:nvSpPr>
+          <p:cNvPr id="228" name="Text 226"/>
+          <p:cNvSpPr/>
+          <p:nvPr/>
+        </p:nvSpPr>
+        <p:spPr>
+          <a:xfrm>
+            <a:off x="4224528" y="2880360"/>
+            <a:ext cx="502920" cy="215646"/>
+          </a:xfrm>
+          <a:prstGeom prst="rect">
+            <a:avLst/>
+          </a:prstGeom>
+          <a:noFill/>
+          <a:ln/>
+        </p:spPr>
+        <p:txBody>
+          <a:bodyPr wrap="square" lIns="0" tIns="0" rIns="0" bIns="0" rtlCol="0" anchor="ctr">
+            <a:normAutofit/>
+          </a:bodyPr>
+          <a:lstStyle/>
+          <a:p>
+            <a:pPr algn="ctr" indent="0" marL="0">
+              <a:buNone/>
+            </a:pPr>
+            <a:r>
+              <a:rPr lang="en-US" altLang="en-US" sz="900" b="1" dirty="0">
+                <a:solidFill>
+                  <a:srgbClr val="222222"/>
+                </a:solidFill>
+                <a:latin typeface="Calibri" pitchFamily="34" charset="0"/>
+                <a:ea typeface="Calibri" pitchFamily="34" charset="-122"/>
+                <a:cs typeface="Calibri" pitchFamily="34" charset="-120"/>
+              </a:rPr>
+              <a:t>6</a:t>
+            </a:r>
+            <a:endParaRPr lang="en-US" sz="900" dirty="0"/>
+          </a:p>
+        </p:txBody>
+      </p:sp>
+      <p:sp>
+        <p:nvSpPr>
+          <p:cNvPr id="229" name="Text 227"/>
+          <p:cNvSpPr/>
+          <p:nvPr/>
+        </p:nvSpPr>
+        <p:spPr>
+          <a:xfrm>
+            <a:off x="4727448" y="2880360"/>
+            <a:ext cx="658368" cy="215646"/>
+          </a:xfrm>
+          <a:prstGeom prst="rect">
+            <a:avLst/>
+          </a:prstGeom>
+          <a:noFill/>
+          <a:ln/>
+        </p:spPr>
+        <p:txBody>
+          <a:bodyPr wrap="square" lIns="0" tIns="0" rIns="0" bIns="0" rtlCol="0" anchor="ctr">
+            <a:normAutofit/>
+          </a:bodyPr>
+          <a:lstStyle/>
+          <a:p>
+            <a:pPr algn="ctr" indent="0" marL="0">
+              <a:buNone/>
+            </a:pPr>
+            <a:r>
+              <a:rPr lang="en-US" altLang="en-US" sz="700" b="1" dirty="0">
+                <a:solidFill>
+                  <a:srgbClr val="222222"/>
+                </a:solidFill>
+                <a:latin typeface="Calibri" pitchFamily="34" charset="0"/>
+                <a:ea typeface="Calibri" pitchFamily="34" charset="-122"/>
+                <a:cs typeface="Calibri" pitchFamily="34" charset="-120"/>
+              </a:rPr>
+              <a:t>13 Oct</a:t>
+            </a:r>
+            <a:endParaRPr lang="en-US" sz="700" dirty="0"/>
+          </a:p>
+        </p:txBody>
+      </p:sp>
+      <p:sp>
+        <p:nvSpPr>
+          <p:cNvPr id="230" name="Text 228"/>
+          <p:cNvSpPr/>
+          <p:nvPr/>
+        </p:nvSpPr>
+        <p:spPr>
+          <a:xfrm>
+            <a:off x="5385816" y="2880360"/>
+            <a:ext cx="658368" cy="215646"/>
+          </a:xfrm>
+          <a:prstGeom prst="rect">
+            <a:avLst/>
+          </a:prstGeom>
+          <a:noFill/>
+          <a:ln/>
+        </p:spPr>
+        <p:txBody>
+          <a:bodyPr wrap="square" lIns="0" tIns="0" rIns="0" bIns="0" rtlCol="0" anchor="ctr">
+            <a:normAutofit/>
+          </a:bodyPr>
+          <a:lstStyle/>
+          <a:p>
+            <a:pPr algn="ctr" indent="0" marL="0">
+              <a:buNone/>
+            </a:pPr>
+            <a:r>
+              <a:rPr lang="en-US" altLang="en-US" sz="700" b="1" dirty="0">
+                <a:solidFill>
+                  <a:srgbClr val="222222"/>
+                </a:solidFill>
+                <a:latin typeface="Calibri" pitchFamily="34" charset="0"/>
+                <a:ea typeface="Calibri" pitchFamily="34" charset="-122"/>
+                <a:cs typeface="Calibri" pitchFamily="34" charset="-120"/>
+              </a:rPr>
+              <a:t>19 Oct</a:t>
+            </a:r>
+            <a:endParaRPr lang="en-US" sz="700" dirty="0"/>
+          </a:p>
+        </p:txBody>
+      </p:sp>
+      <p:sp>
+        <p:nvSpPr>
+          <p:cNvPr id="231" name="Shape 229"/>
+          <p:cNvSpPr/>
+          <p:nvPr/>
+        </p:nvSpPr>
+        <p:spPr>
+          <a:xfrm>
+            <a:off x="6405543" y="2928747"/>
+            <a:ext cx="843172" cy="64008"/>
+          </a:xfrm>
+          <a:prstGeom prst="rect">
+            <a:avLst/>
+          </a:prstGeom>
+          <a:solidFill>
+            <a:srgbClr val="C8503F"/>
+          </a:solidFill>
+          <a:ln w="12700">
+            <a:solidFill>
+              <a:srgbClr val="C8503F"/>
+            </a:solidFill>
+            <a:prstDash val="solid"/>
+          </a:ln>
+        </p:spPr>
+      </p:sp>
+      <p:sp>
+        <p:nvSpPr>
+          <p:cNvPr id="232" name="Shape 230"/>
+          <p:cNvSpPr/>
+          <p:nvPr/>
+        </p:nvSpPr>
+        <p:spPr>
+          <a:xfrm flipV="1">
+            <a:off x="6405543" y="2992755"/>
+            <a:ext cx="64008" cy="54864"/>
+          </a:xfrm>
+          <a:prstGeom prst="triangle">
+            <a:avLst/>
+          </a:prstGeom>
+          <a:solidFill>
+            <a:srgbClr val="C8503F"/>
+          </a:solidFill>
+          <a:ln w="12700">
+            <a:solidFill>
+              <a:srgbClr val="C8503F"/>
+            </a:solidFill>
+            <a:prstDash val="solid"/>
+          </a:ln>
+        </p:spPr>
+      </p:sp>
+      <p:sp>
+        <p:nvSpPr>
+          <p:cNvPr id="233" name="Shape 231"/>
+          <p:cNvSpPr/>
+          <p:nvPr/>
+        </p:nvSpPr>
+        <p:spPr>
+          <a:xfrm flipV="1">
+            <a:off x="7184707" y="2992755"/>
+            <a:ext cx="64008" cy="54864"/>
+          </a:xfrm>
+          <a:prstGeom prst="triangle">
+            <a:avLst/>
+          </a:prstGeom>
+          <a:solidFill>
+            <a:srgbClr val="C8503F"/>
+          </a:solidFill>
+          <a:ln w="12700">
+            <a:solidFill>
+              <a:srgbClr val="C8503F"/>
+            </a:solidFill>
+            <a:prstDash val="solid"/>
+          </a:ln>
+        </p:spPr>
+      </p:sp>
+      <p:sp>
+        <p:nvSpPr>
+          <p:cNvPr id="234" name="Text 232"/>
+          <p:cNvSpPr/>
+          <p:nvPr/>
+        </p:nvSpPr>
+        <p:spPr>
+          <a:xfrm>
+            <a:off x="7294435" y="2880360"/>
+            <a:ext cx="548640" cy="215646"/>
+          </a:xfrm>
+          <a:prstGeom prst="rect">
+            <a:avLst/>
+          </a:prstGeom>
+          <a:noFill/>
+          <a:ln/>
+        </p:spPr>
+        <p:txBody>
+          <a:bodyPr wrap="square" lIns="0" tIns="0" rIns="0" bIns="0" rtlCol="0" anchor="ctr">
+            <a:normAutofit/>
+          </a:bodyPr>
+          <a:lstStyle/>
+          <a:p>
+            <a:pPr algn="l" indent="0" marL="0">
+              <a:buNone/>
+            </a:pPr>
+            <a:r>
+              <a:rPr lang="en-US" altLang="en-US" sz="750" b="1" dirty="0">
+                <a:solidFill>
+                  <a:srgbClr val="3D3935"/>
+                </a:solidFill>
+                <a:latin typeface="Calibri" pitchFamily="34" charset="0"/>
+                <a:ea typeface="Calibri" pitchFamily="34" charset="-122"/>
+                <a:cs typeface="Calibri" pitchFamily="34" charset="-120"/>
+              </a:rPr>
+              <a:t>6 d</a:t>
+            </a:r>
+            <a:endParaRPr lang="en-US" sz="750" dirty="0"/>
+          </a:p>
+        </p:txBody>
+      </p:sp>
+      <p:sp>
+        <p:nvSpPr>
+          <p:cNvPr id="235" name="Shape 233"/>
+          <p:cNvSpPr/>
+          <p:nvPr/>
+        </p:nvSpPr>
+        <p:spPr>
+          <a:xfrm>
+            <a:off x="365760" y="3096006"/>
+            <a:ext cx="11460175" cy="215646"/>
+          </a:xfrm>
+          <a:prstGeom prst="rect">
+            <a:avLst/>
+          </a:prstGeom>
+          <a:solidFill>
+            <a:srgbClr val="F6F9FA"/>
+          </a:solidFill>
+          <a:ln w="6350">
+            <a:solidFill>
+              <a:srgbClr val="DFE6EA"/>
+            </a:solidFill>
+            <a:prstDash val="solid"/>
+          </a:ln>
+        </p:spPr>
+      </p:sp>
+      <p:sp>
+        <p:nvSpPr>
+          <p:cNvPr id="236" name="Shape 234"/>
+          <p:cNvSpPr/>
+          <p:nvPr/>
+        </p:nvSpPr>
+        <p:spPr>
+          <a:xfrm>
+            <a:off x="420624" y="3126105"/>
+            <a:ext cx="329184" cy="155448"/>
+          </a:xfrm>
+          <a:prstGeom prst="roundRect">
+            <a:avLst>
+              <a:gd name="adj" fmla="val 50000"/>
+            </a:avLst>
+          </a:prstGeom>
+          <a:solidFill>
+            <a:srgbClr val="D9695A"/>
+          </a:solidFill>
+          <a:ln w="19050">
+            <a:solidFill>
+              <a:srgbClr val="222222"/>
+            </a:solidFill>
+            <a:prstDash val="solid"/>
+          </a:ln>
+        </p:spPr>
+      </p:sp>
+      <p:sp>
+        <p:nvSpPr>
+          <p:cNvPr id="237" name="Text 235"/>
+          <p:cNvSpPr/>
+          <p:nvPr/>
+        </p:nvSpPr>
+        <p:spPr>
+          <a:xfrm>
+            <a:off x="393192" y="3096006"/>
+            <a:ext cx="384048" cy="215646"/>
+          </a:xfrm>
+          <a:prstGeom prst="rect">
+            <a:avLst/>
+          </a:prstGeom>
+          <a:noFill/>
+          <a:ln/>
+        </p:spPr>
+        <p:txBody>
+          <a:bodyPr wrap="square" lIns="0" tIns="0" rIns="0" bIns="0" rtlCol="0" anchor="ctr">
+            <a:normAutofit/>
+          </a:bodyPr>
+          <a:lstStyle/>
+          <a:p>
+            <a:pPr algn="ctr" indent="0" marL="0">
+              <a:buNone/>
+            </a:pPr>
+            <a:r>
+              <a:rPr lang="en-US" altLang="en-US" sz="650" b="1" dirty="0">
+                <a:solidFill>
+                  <a:srgbClr val="FFFFFF"/>
+                </a:solidFill>
+                <a:latin typeface="Calibri" pitchFamily="34" charset="0"/>
+                <a:ea typeface="Calibri" pitchFamily="34" charset="-122"/>
+                <a:cs typeface="Calibri" pitchFamily="34" charset="-120"/>
+              </a:rPr>
+              <a:t>A.1</a:t>
+            </a:r>
+            <a:endParaRPr lang="en-US" sz="650" dirty="0"/>
+          </a:p>
+        </p:txBody>
+      </p:sp>
+      <p:sp>
+        <p:nvSpPr>
+          <p:cNvPr id="238" name="Text 236"/>
+          <p:cNvSpPr/>
+          <p:nvPr/>
+        </p:nvSpPr>
+        <p:spPr>
+          <a:xfrm>
+            <a:off x="987552" y="3096006"/>
+            <a:ext cx="2441448" cy="215646"/>
+          </a:xfrm>
+          <a:prstGeom prst="rect">
+            <a:avLst/>
+          </a:prstGeom>
+          <a:noFill/>
+          <a:ln/>
+        </p:spPr>
+        <p:txBody>
+          <a:bodyPr wrap="square" lIns="0" tIns="0" rIns="0" bIns="0" rtlCol="0" anchor="ctr">
+            <a:normAutofit/>
+          </a:bodyPr>
+          <a:lstStyle/>
+          <a:p>
+            <a:pPr algn="l" indent="0" marL="0">
+              <a:buNone/>
+            </a:pPr>
+            <a:r>
+              <a:rPr lang="en-US" altLang="en-US" sz="700" dirty="0">
+                <a:solidFill>
+                  <a:srgbClr val="222222"/>
+                </a:solidFill>
+                <a:latin typeface="Calibri" pitchFamily="34" charset="0"/>
+                <a:ea typeface="Calibri" pitchFamily="34" charset="-122"/>
+                <a:cs typeface="Calibri" pitchFamily="34" charset="-120"/>
+              </a:rPr>
+              <a:t>Excavation / digging for H-Beam</a:t>
+            </a:r>
+            <a:endParaRPr lang="en-US" sz="700" dirty="0"/>
+          </a:p>
+        </p:txBody>
+      </p:sp>
+      <p:sp>
+        <p:nvSpPr>
+          <p:cNvPr id="239" name="Text 237"/>
+          <p:cNvSpPr/>
+          <p:nvPr/>
+        </p:nvSpPr>
+        <p:spPr>
+          <a:xfrm>
+            <a:off x="3447288" y="3096006"/>
+            <a:ext cx="777240" cy="215646"/>
+          </a:xfrm>
+          <a:prstGeom prst="rect">
+            <a:avLst/>
+          </a:prstGeom>
+          <a:noFill/>
+          <a:ln/>
+        </p:spPr>
+        <p:txBody>
+          <a:bodyPr wrap="square" lIns="0" tIns="0" rIns="0" bIns="0" rtlCol="0" anchor="ctr">
+            <a:normAutofit/>
+          </a:bodyPr>
+          <a:lstStyle/>
+          <a:p>
+            <a:pPr algn="ctr" indent="0" marL="0">
+              <a:buNone/>
+            </a:pPr>
+            <a:r>
+              <a:rPr lang="en-US" altLang="en-US" sz="700" dirty="0">
+                <a:solidFill>
+                  <a:srgbClr val="444444"/>
+                </a:solidFill>
+                <a:latin typeface="Calibri" pitchFamily="34" charset="0"/>
+                <a:ea typeface="Calibri" pitchFamily="34" charset="-122"/>
+                <a:cs typeface="Calibri" pitchFamily="34" charset="-120"/>
+              </a:rPr>
+              <a:t>—</a:t>
+            </a:r>
+            <a:endParaRPr lang="en-US" sz="700" dirty="0"/>
+          </a:p>
+        </p:txBody>
+      </p:sp>
+      <p:sp>
+        <p:nvSpPr>
+          <p:cNvPr id="240" name="Text 238"/>
+          <p:cNvSpPr/>
+          <p:nvPr/>
+        </p:nvSpPr>
+        <p:spPr>
+          <a:xfrm>
+            <a:off x="4224528" y="3096006"/>
+            <a:ext cx="502920" cy="215646"/>
+          </a:xfrm>
+          <a:prstGeom prst="rect">
+            <a:avLst/>
+          </a:prstGeom>
+          <a:noFill/>
+          <a:ln/>
+        </p:spPr>
+        <p:txBody>
+          <a:bodyPr wrap="square" lIns="0" tIns="0" rIns="0" bIns="0" rtlCol="0" anchor="ctr">
+            <a:normAutofit/>
+          </a:bodyPr>
+          <a:lstStyle/>
+          <a:p>
+            <a:pPr algn="ctr" indent="0" marL="0">
+              <a:buNone/>
+            </a:pPr>
+            <a:r>
+              <a:rPr lang="en-US" altLang="en-US" sz="900" b="1" dirty="0">
+                <a:solidFill>
+                  <a:srgbClr val="222222"/>
+                </a:solidFill>
+                <a:latin typeface="Calibri" pitchFamily="34" charset="0"/>
+                <a:ea typeface="Calibri" pitchFamily="34" charset="-122"/>
+                <a:cs typeface="Calibri" pitchFamily="34" charset="-120"/>
+              </a:rPr>
+              <a:t>2</a:t>
+            </a:r>
+            <a:endParaRPr lang="en-US" sz="900" dirty="0"/>
+          </a:p>
+        </p:txBody>
+      </p:sp>
+      <p:sp>
+        <p:nvSpPr>
+          <p:cNvPr id="241" name="Text 239"/>
+          <p:cNvSpPr/>
+          <p:nvPr/>
+        </p:nvSpPr>
+        <p:spPr>
+          <a:xfrm>
+            <a:off x="4727448" y="3096006"/>
+            <a:ext cx="658368" cy="215646"/>
+          </a:xfrm>
+          <a:prstGeom prst="rect">
+            <a:avLst/>
+          </a:prstGeom>
+          <a:noFill/>
+          <a:ln/>
+        </p:spPr>
+        <p:txBody>
+          <a:bodyPr wrap="square" lIns="0" tIns="0" rIns="0" bIns="0" rtlCol="0" anchor="ctr">
+            <a:normAutofit/>
+          </a:bodyPr>
+          <a:lstStyle/>
+          <a:p>
+            <a:pPr algn="ctr" indent="0" marL="0">
+              <a:buNone/>
+            </a:pPr>
+            <a:r>
+              <a:rPr lang="en-US" altLang="en-US" sz="700" b="1" dirty="0">
+                <a:solidFill>
+                  <a:srgbClr val="222222"/>
+                </a:solidFill>
+                <a:latin typeface="Calibri" pitchFamily="34" charset="0"/>
+                <a:ea typeface="Calibri" pitchFamily="34" charset="-122"/>
+                <a:cs typeface="Calibri" pitchFamily="34" charset="-120"/>
+              </a:rPr>
+              <a:t>13 Oct</a:t>
+            </a:r>
+            <a:endParaRPr lang="en-US" sz="700" dirty="0"/>
+          </a:p>
+        </p:txBody>
+      </p:sp>
+      <p:sp>
+        <p:nvSpPr>
+          <p:cNvPr id="242" name="Text 240"/>
+          <p:cNvSpPr/>
+          <p:nvPr/>
+        </p:nvSpPr>
+        <p:spPr>
+          <a:xfrm>
+            <a:off x="5385816" y="3096006"/>
+            <a:ext cx="658368" cy="215646"/>
+          </a:xfrm>
+          <a:prstGeom prst="rect">
+            <a:avLst/>
+          </a:prstGeom>
+          <a:noFill/>
+          <a:ln/>
+        </p:spPr>
+        <p:txBody>
+          <a:bodyPr wrap="square" lIns="0" tIns="0" rIns="0" bIns="0" rtlCol="0" anchor="ctr">
+            <a:normAutofit/>
+          </a:bodyPr>
+          <a:lstStyle/>
+          <a:p>
+            <a:pPr algn="ctr" indent="0" marL="0">
+              <a:buNone/>
+            </a:pPr>
+            <a:r>
+              <a:rPr lang="en-US" altLang="en-US" sz="700" b="1" dirty="0">
+                <a:solidFill>
+                  <a:srgbClr val="222222"/>
+                </a:solidFill>
+                <a:latin typeface="Calibri" pitchFamily="34" charset="0"/>
+                <a:ea typeface="Calibri" pitchFamily="34" charset="-122"/>
+                <a:cs typeface="Calibri" pitchFamily="34" charset="-120"/>
+              </a:rPr>
+              <a:t>14 Oct</a:t>
+            </a:r>
+            <a:endParaRPr lang="en-US" sz="700" dirty="0"/>
+          </a:p>
+        </p:txBody>
+      </p:sp>
+      <p:sp>
+        <p:nvSpPr>
+          <p:cNvPr id="243" name="Shape 241"/>
+          <p:cNvSpPr/>
+          <p:nvPr/>
+        </p:nvSpPr>
+        <p:spPr>
+          <a:xfrm>
+            <a:off x="6405543" y="3141292"/>
+            <a:ext cx="240906" cy="125075"/>
+          </a:xfrm>
+          <a:prstGeom prst="roundRect">
+            <a:avLst>
+              <a:gd name="adj" fmla="val 29243"/>
+            </a:avLst>
+          </a:prstGeom>
+          <a:solidFill>
+            <a:srgbClr val="D9695A"/>
+          </a:solidFill>
+          <a:ln w="19050">
             <a:solidFill>
               <a:srgbClr val="222222"/>
             </a:solidFill>
@@ -14409,61 +15148,20 @@
       </p:sp>
       <p:sp>
         <p:nvSpPr>
-          <p:cNvPr id="223" name="Text 221"/>
-          <p:cNvSpPr/>
-          <p:nvPr/>
-        </p:nvSpPr>
-        <p:spPr>
-          <a:xfrm>
-            <a:off x="6405543" y="2660284"/>
-            <a:ext cx="843172" cy="222003"/>
-          </a:xfrm>
-          <a:prstGeom prst="rect">
-            <a:avLst/>
-          </a:prstGeom>
-          <a:noFill/>
-          <a:ln/>
-        </p:spPr>
-        <p:txBody>
-          <a:bodyPr wrap="square" lIns="0" tIns="0" rIns="0" bIns="0" rtlCol="0" anchor="ctr">
-            <a:normAutofit/>
-          </a:bodyPr>
-          <a:lstStyle/>
-          <a:p>
-            <a:pPr algn="ctr" indent="0" marL="0">
-              <a:buNone/>
-            </a:pPr>
-            <a:r>
-              <a:rPr lang="en-US" altLang="en-US" sz="800" b="1" dirty="0">
-                <a:solidFill>
-                  <a:srgbClr val="FFFFFF"/>
-                </a:solidFill>
-                <a:latin typeface="Calibri" pitchFamily="34" charset="0"/>
-                <a:ea typeface="Calibri" pitchFamily="34" charset="-122"/>
-                <a:cs typeface="Calibri" pitchFamily="34" charset="-120"/>
-              </a:rPr>
-              <a:t>6 d</a:t>
-            </a:r>
-            <a:endParaRPr lang="en-US" sz="800" dirty="0"/>
-          </a:p>
-        </p:txBody>
-      </p:sp>
-      <p:sp>
-        <p:nvSpPr>
-          <p:cNvPr id="224" name="Shape 222"/>
-          <p:cNvSpPr/>
-          <p:nvPr/>
-        </p:nvSpPr>
-        <p:spPr>
-          <a:xfrm>
-            <a:off x="365760" y="2973106"/>
-            <a:ext cx="11460175" cy="403642"/>
-          </a:xfrm>
-          <a:prstGeom prst="rect">
-            <a:avLst/>
-          </a:prstGeom>
-          <a:solidFill>
-            <a:srgbClr val="F6F9FA"/>
+          <p:cNvPr id="244" name="Shape 242"/>
+          <p:cNvSpPr/>
+          <p:nvPr/>
+        </p:nvSpPr>
+        <p:spPr>
+          <a:xfrm>
+            <a:off x="365760" y="3311652"/>
+            <a:ext cx="11460175" cy="215646"/>
+          </a:xfrm>
+          <a:prstGeom prst="rect">
+            <a:avLst/>
+          </a:prstGeom>
+          <a:solidFill>
+            <a:srgbClr val="FFFFFF"/>
           </a:solidFill>
           <a:ln w="6350">
             <a:solidFill>
@@ -14475,297 +15173,299 @@
       </p:sp>
       <p:sp>
         <p:nvSpPr>
-          <p:cNvPr id="225" name="Shape 223"/>
-          <p:cNvSpPr/>
-          <p:nvPr/>
-        </p:nvSpPr>
-        <p:spPr>
-          <a:xfrm>
-            <a:off x="420624" y="3037767"/>
-            <a:ext cx="274320" cy="274320"/>
-          </a:xfrm>
-          <a:prstGeom prst="ellipse">
-            <a:avLst/>
-          </a:prstGeom>
-          <a:solidFill>
-            <a:srgbClr val="00778B"/>
-          </a:solidFill>
-          <a:ln w="6350">
-            <a:solidFill>
-              <a:srgbClr val="00778B"/>
-            </a:solidFill>
-            <a:prstDash val="solid"/>
-          </a:ln>
-        </p:spPr>
-      </p:sp>
-      <p:sp>
-        <p:nvSpPr>
-          <p:cNvPr id="226" name="Text 224"/>
-          <p:cNvSpPr/>
-          <p:nvPr/>
-        </p:nvSpPr>
-        <p:spPr>
-          <a:xfrm>
-            <a:off x="365760" y="2973106"/>
-            <a:ext cx="384048" cy="403642"/>
-          </a:xfrm>
-          <a:prstGeom prst="rect">
-            <a:avLst/>
-          </a:prstGeom>
-          <a:noFill/>
-          <a:ln/>
-        </p:spPr>
-        <p:txBody>
-          <a:bodyPr wrap="square" lIns="0" tIns="0" rIns="0" bIns="0" rtlCol="0" anchor="ctr">
-            <a:normAutofit/>
-          </a:bodyPr>
-          <a:lstStyle/>
-          <a:p>
-            <a:pPr algn="ctr" indent="0" marL="0">
-              <a:buNone/>
-            </a:pPr>
-            <a:r>
-              <a:rPr lang="en-US" altLang="en-US" sz="900" b="1" dirty="0">
-                <a:solidFill>
-                  <a:srgbClr val="FFFFFF"/>
-                </a:solidFill>
-                <a:latin typeface="Calibri" pitchFamily="34" charset="0"/>
-                <a:ea typeface="Calibri" pitchFamily="34" charset="-122"/>
-                <a:cs typeface="Calibri" pitchFamily="34" charset="-120"/>
-              </a:rPr>
-              <a:t>B</a:t>
-            </a:r>
-            <a:endParaRPr lang="en-US" sz="900" dirty="0"/>
-          </a:p>
-        </p:txBody>
-      </p:sp>
-      <p:sp>
-        <p:nvSpPr>
-          <p:cNvPr id="227" name="Text 225"/>
-          <p:cNvSpPr/>
-          <p:nvPr/>
-        </p:nvSpPr>
-        <p:spPr>
-          <a:xfrm>
-            <a:off x="822960" y="2973106"/>
-            <a:ext cx="2606040" cy="403642"/>
-          </a:xfrm>
-          <a:prstGeom prst="rect">
-            <a:avLst/>
-          </a:prstGeom>
-          <a:noFill/>
-          <a:ln/>
-        </p:spPr>
-        <p:txBody>
-          <a:bodyPr wrap="square" lIns="0" tIns="0" rIns="0" bIns="0" rtlCol="0" anchor="ctr">
-            <a:normAutofit/>
-          </a:bodyPr>
-          <a:lstStyle/>
-          <a:p>
-            <a:pPr algn="l" indent="0" marL="0">
-              <a:buNone/>
-            </a:pPr>
-            <a:r>
-              <a:rPr lang="en-US" altLang="en-US" sz="900" dirty="0">
-                <a:solidFill>
-                  <a:srgbClr val="222222"/>
-                </a:solidFill>
-                <a:latin typeface="Calibri" pitchFamily="34" charset="0"/>
-                <a:ea typeface="Calibri" pitchFamily="34" charset="-122"/>
-                <a:cs typeface="Calibri" pitchFamily="34" charset="-120"/>
-              </a:rPr>
-              <a:t>Lean concrete</a:t>
-            </a:r>
-            <a:endParaRPr lang="en-US" sz="900" dirty="0"/>
-          </a:p>
-        </p:txBody>
-      </p:sp>
-      <p:sp>
-        <p:nvSpPr>
-          <p:cNvPr id="228" name="Text 226"/>
-          <p:cNvSpPr/>
-          <p:nvPr/>
-        </p:nvSpPr>
-        <p:spPr>
-          <a:xfrm>
-            <a:off x="3447288" y="2973106"/>
-            <a:ext cx="777240" cy="403642"/>
-          </a:xfrm>
-          <a:prstGeom prst="rect">
-            <a:avLst/>
-          </a:prstGeom>
-          <a:noFill/>
-          <a:ln/>
-        </p:spPr>
-        <p:txBody>
-          <a:bodyPr wrap="square" lIns="0" tIns="0" rIns="0" bIns="0" rtlCol="0" anchor="ctr">
-            <a:normAutofit/>
-          </a:bodyPr>
-          <a:lstStyle/>
-          <a:p>
-            <a:pPr algn="ctr" indent="0" marL="0">
-              <a:buNone/>
-            </a:pPr>
-            <a:r>
-              <a:rPr lang="en-US" altLang="en-US" sz="850" dirty="0">
-                <a:solidFill>
-                  <a:srgbClr val="444444"/>
-                </a:solidFill>
-                <a:latin typeface="Calibri" pitchFamily="34" charset="0"/>
-                <a:ea typeface="Calibri" pitchFamily="34" charset="-122"/>
-                <a:cs typeface="Calibri" pitchFamily="34" charset="-120"/>
-              </a:rPr>
-              <a:t>A · SS +6</a:t>
-            </a:r>
-            <a:endParaRPr lang="en-US" sz="850" dirty="0"/>
-          </a:p>
-        </p:txBody>
-      </p:sp>
-      <p:sp>
-        <p:nvSpPr>
-          <p:cNvPr id="229" name="Text 227"/>
-          <p:cNvSpPr/>
-          <p:nvPr/>
-        </p:nvSpPr>
-        <p:spPr>
-          <a:xfrm>
-            <a:off x="4224528" y="2973106"/>
-            <a:ext cx="502920" cy="403642"/>
-          </a:xfrm>
-          <a:prstGeom prst="rect">
-            <a:avLst/>
-          </a:prstGeom>
-          <a:noFill/>
-          <a:ln/>
-        </p:spPr>
-        <p:txBody>
-          <a:bodyPr wrap="square" lIns="0" tIns="0" rIns="0" bIns="0" rtlCol="0" anchor="ctr">
-            <a:normAutofit/>
-          </a:bodyPr>
-          <a:lstStyle/>
-          <a:p>
-            <a:pPr algn="ctr" indent="0" marL="0">
-              <a:buNone/>
-            </a:pPr>
-            <a:r>
-              <a:rPr lang="en-US" altLang="en-US" sz="1100" b="1" dirty="0">
-                <a:solidFill>
-                  <a:srgbClr val="222222"/>
-                </a:solidFill>
-                <a:latin typeface="Calibri" pitchFamily="34" charset="0"/>
-                <a:ea typeface="Calibri" pitchFamily="34" charset="-122"/>
-                <a:cs typeface="Calibri" pitchFamily="34" charset="-120"/>
-              </a:rPr>
-              <a:t>2</a:t>
-            </a:r>
-            <a:endParaRPr lang="en-US" sz="1100" dirty="0"/>
-          </a:p>
-        </p:txBody>
-      </p:sp>
-      <p:sp>
-        <p:nvSpPr>
-          <p:cNvPr id="230" name="Text 228"/>
-          <p:cNvSpPr/>
-          <p:nvPr/>
-        </p:nvSpPr>
-        <p:spPr>
-          <a:xfrm>
-            <a:off x="4727448" y="2973106"/>
-            <a:ext cx="658368" cy="403642"/>
-          </a:xfrm>
-          <a:prstGeom prst="rect">
-            <a:avLst/>
-          </a:prstGeom>
-          <a:noFill/>
-          <a:ln/>
-        </p:spPr>
-        <p:txBody>
-          <a:bodyPr wrap="square" lIns="0" tIns="0" rIns="0" bIns="0" rtlCol="0" anchor="ctr">
-            <a:normAutofit/>
-          </a:bodyPr>
-          <a:lstStyle/>
-          <a:p>
-            <a:pPr algn="ctr" indent="0" marL="0">
-              <a:buNone/>
-            </a:pPr>
-            <a:r>
-              <a:rPr lang="en-US" altLang="en-US" sz="850" b="1" dirty="0">
-                <a:solidFill>
-                  <a:srgbClr val="222222"/>
-                </a:solidFill>
-                <a:latin typeface="Calibri" pitchFamily="34" charset="0"/>
-                <a:ea typeface="Calibri" pitchFamily="34" charset="-122"/>
-                <a:cs typeface="Calibri" pitchFamily="34" charset="-120"/>
-              </a:rPr>
-              <a:t>20 Oct</a:t>
-            </a:r>
-            <a:endParaRPr lang="en-US" sz="850" dirty="0"/>
-          </a:p>
-        </p:txBody>
-      </p:sp>
-      <p:sp>
-        <p:nvSpPr>
-          <p:cNvPr id="231" name="Text 229"/>
-          <p:cNvSpPr/>
-          <p:nvPr/>
-        </p:nvSpPr>
-        <p:spPr>
-          <a:xfrm>
-            <a:off x="5385816" y="2973106"/>
-            <a:ext cx="658368" cy="403642"/>
-          </a:xfrm>
-          <a:prstGeom prst="rect">
-            <a:avLst/>
-          </a:prstGeom>
-          <a:noFill/>
-          <a:ln/>
-        </p:spPr>
-        <p:txBody>
-          <a:bodyPr wrap="square" lIns="0" tIns="0" rIns="0" bIns="0" rtlCol="0" anchor="ctr">
-            <a:normAutofit/>
-          </a:bodyPr>
-          <a:lstStyle/>
-          <a:p>
-            <a:pPr algn="ctr" indent="0" marL="0">
-              <a:buNone/>
-            </a:pPr>
-            <a:r>
-              <a:rPr lang="en-US" altLang="en-US" sz="850" b="1" dirty="0">
-                <a:solidFill>
-                  <a:srgbClr val="222222"/>
-                </a:solidFill>
-                <a:latin typeface="Calibri" pitchFamily="34" charset="0"/>
-                <a:ea typeface="Calibri" pitchFamily="34" charset="-122"/>
-                <a:cs typeface="Calibri" pitchFamily="34" charset="-120"/>
-              </a:rPr>
-              <a:t>21 Oct</a:t>
-            </a:r>
-            <a:endParaRPr lang="en-US" sz="850" dirty="0"/>
-          </a:p>
-        </p:txBody>
-      </p:sp>
-      <p:sp>
-        <p:nvSpPr>
-          <p:cNvPr id="232" name="Shape 230"/>
-          <p:cNvSpPr/>
-          <p:nvPr/>
-        </p:nvSpPr>
-        <p:spPr>
-          <a:xfrm>
-            <a:off x="7248716" y="3063926"/>
-            <a:ext cx="240906" cy="222003"/>
+          <p:cNvPr id="245" name="Shape 243"/>
+          <p:cNvSpPr/>
+          <p:nvPr/>
+        </p:nvSpPr>
+        <p:spPr>
+          <a:xfrm>
+            <a:off x="420624" y="3341751"/>
+            <a:ext cx="329184" cy="155448"/>
           </a:xfrm>
           <a:prstGeom prst="roundRect">
             <a:avLst>
-              <a:gd name="adj" fmla="val 20594"/>
+              <a:gd name="adj" fmla="val 50000"/>
             </a:avLst>
           </a:prstGeom>
           <a:solidFill>
-            <a:srgbClr val="00778B"/>
-          </a:solidFill>
-          <a:ln w="6350">
-            <a:solidFill>
-              <a:srgbClr val="00778B"/>
+            <a:srgbClr val="D9695A"/>
+          </a:solidFill>
+          <a:ln w="19050">
+            <a:solidFill>
+              <a:srgbClr val="222222"/>
+            </a:solidFill>
+            <a:prstDash val="solid"/>
+          </a:ln>
+        </p:spPr>
+      </p:sp>
+      <p:sp>
+        <p:nvSpPr>
+          <p:cNvPr id="246" name="Text 244"/>
+          <p:cNvSpPr/>
+          <p:nvPr/>
+        </p:nvSpPr>
+        <p:spPr>
+          <a:xfrm>
+            <a:off x="393192" y="3311652"/>
+            <a:ext cx="384048" cy="215646"/>
+          </a:xfrm>
+          <a:prstGeom prst="rect">
+            <a:avLst/>
+          </a:prstGeom>
+          <a:noFill/>
+          <a:ln/>
+        </p:spPr>
+        <p:txBody>
+          <a:bodyPr wrap="square" lIns="0" tIns="0" rIns="0" bIns="0" rtlCol="0" anchor="ctr">
+            <a:normAutofit/>
+          </a:bodyPr>
+          <a:lstStyle/>
+          <a:p>
+            <a:pPr algn="ctr" indent="0" marL="0">
+              <a:buNone/>
+            </a:pPr>
+            <a:r>
+              <a:rPr lang="en-US" altLang="en-US" sz="650" b="1" dirty="0">
+                <a:solidFill>
+                  <a:srgbClr val="FFFFFF"/>
+                </a:solidFill>
+                <a:latin typeface="Calibri" pitchFamily="34" charset="0"/>
+                <a:ea typeface="Calibri" pitchFamily="34" charset="-122"/>
+                <a:cs typeface="Calibri" pitchFamily="34" charset="-120"/>
+              </a:rPr>
+              <a:t>A.2</a:t>
+            </a:r>
+            <a:endParaRPr lang="en-US" sz="650" dirty="0"/>
+          </a:p>
+        </p:txBody>
+      </p:sp>
+      <p:sp>
+        <p:nvSpPr>
+          <p:cNvPr id="247" name="Text 245"/>
+          <p:cNvSpPr/>
+          <p:nvPr/>
+        </p:nvSpPr>
+        <p:spPr>
+          <a:xfrm>
+            <a:off x="987552" y="3311652"/>
+            <a:ext cx="2441448" cy="215646"/>
+          </a:xfrm>
+          <a:prstGeom prst="rect">
+            <a:avLst/>
+          </a:prstGeom>
+          <a:noFill/>
+          <a:ln/>
+        </p:spPr>
+        <p:txBody>
+          <a:bodyPr wrap="square" lIns="0" tIns="0" rIns="0" bIns="0" rtlCol="0" anchor="ctr">
+            <a:normAutofit/>
+          </a:bodyPr>
+          <a:lstStyle/>
+          <a:p>
+            <a:pPr algn="l" indent="0" marL="0">
+              <a:buNone/>
+            </a:pPr>
+            <a:r>
+              <a:rPr lang="en-US" altLang="en-US" sz="700" dirty="0">
+                <a:solidFill>
+                  <a:srgbClr val="222222"/>
+                </a:solidFill>
+                <a:latin typeface="Calibri" pitchFamily="34" charset="0"/>
+                <a:ea typeface="Calibri" pitchFamily="34" charset="-122"/>
+                <a:cs typeface="Calibri" pitchFamily="34" charset="-120"/>
+              </a:rPr>
+              <a:t>Installation of H-Beam</a:t>
+            </a:r>
+            <a:endParaRPr lang="en-US" sz="700" dirty="0"/>
+          </a:p>
+        </p:txBody>
+      </p:sp>
+      <p:sp>
+        <p:nvSpPr>
+          <p:cNvPr id="248" name="Text 246"/>
+          <p:cNvSpPr/>
+          <p:nvPr/>
+        </p:nvSpPr>
+        <p:spPr>
+          <a:xfrm>
+            <a:off x="3447288" y="3311652"/>
+            <a:ext cx="777240" cy="215646"/>
+          </a:xfrm>
+          <a:prstGeom prst="rect">
+            <a:avLst/>
+          </a:prstGeom>
+          <a:noFill/>
+          <a:ln/>
+        </p:spPr>
+        <p:txBody>
+          <a:bodyPr wrap="square" lIns="0" tIns="0" rIns="0" bIns="0" rtlCol="0" anchor="ctr">
+            <a:normAutofit/>
+          </a:bodyPr>
+          <a:lstStyle/>
+          <a:p>
+            <a:pPr algn="ctr" indent="0" marL="0">
+              <a:buNone/>
+            </a:pPr>
+            <a:r>
+              <a:rPr lang="en-US" altLang="en-US" sz="700" dirty="0">
+                <a:solidFill>
+                  <a:srgbClr val="444444"/>
+                </a:solidFill>
+                <a:latin typeface="Calibri" pitchFamily="34" charset="0"/>
+                <a:ea typeface="Calibri" pitchFamily="34" charset="-122"/>
+                <a:cs typeface="Calibri" pitchFamily="34" charset="-120"/>
+              </a:rPr>
+              <a:t>A1 · SS +1</a:t>
+            </a:r>
+            <a:endParaRPr lang="en-US" sz="700" dirty="0"/>
+          </a:p>
+        </p:txBody>
+      </p:sp>
+      <p:sp>
+        <p:nvSpPr>
+          <p:cNvPr id="249" name="Text 247"/>
+          <p:cNvSpPr/>
+          <p:nvPr/>
+        </p:nvSpPr>
+        <p:spPr>
+          <a:xfrm>
+            <a:off x="4224528" y="3311652"/>
+            <a:ext cx="502920" cy="215646"/>
+          </a:xfrm>
+          <a:prstGeom prst="rect">
+            <a:avLst/>
+          </a:prstGeom>
+          <a:noFill/>
+          <a:ln/>
+        </p:spPr>
+        <p:txBody>
+          <a:bodyPr wrap="square" lIns="0" tIns="0" rIns="0" bIns="0" rtlCol="0" anchor="ctr">
+            <a:normAutofit/>
+          </a:bodyPr>
+          <a:lstStyle/>
+          <a:p>
+            <a:pPr algn="ctr" indent="0" marL="0">
+              <a:buNone/>
+            </a:pPr>
+            <a:r>
+              <a:rPr lang="en-US" altLang="en-US" sz="900" b="1" dirty="0">
+                <a:solidFill>
+                  <a:srgbClr val="222222"/>
+                </a:solidFill>
+                <a:latin typeface="Calibri" pitchFamily="34" charset="0"/>
+                <a:ea typeface="Calibri" pitchFamily="34" charset="-122"/>
+                <a:cs typeface="Calibri" pitchFamily="34" charset="-120"/>
+              </a:rPr>
+              <a:t>3</a:t>
+            </a:r>
+            <a:endParaRPr lang="en-US" sz="900" dirty="0"/>
+          </a:p>
+        </p:txBody>
+      </p:sp>
+      <p:sp>
+        <p:nvSpPr>
+          <p:cNvPr id="250" name="Text 248"/>
+          <p:cNvSpPr/>
+          <p:nvPr/>
+        </p:nvSpPr>
+        <p:spPr>
+          <a:xfrm>
+            <a:off x="4727448" y="3311652"/>
+            <a:ext cx="658368" cy="215646"/>
+          </a:xfrm>
+          <a:prstGeom prst="rect">
+            <a:avLst/>
+          </a:prstGeom>
+          <a:noFill/>
+          <a:ln/>
+        </p:spPr>
+        <p:txBody>
+          <a:bodyPr wrap="square" lIns="0" tIns="0" rIns="0" bIns="0" rtlCol="0" anchor="ctr">
+            <a:normAutofit/>
+          </a:bodyPr>
+          <a:lstStyle/>
+          <a:p>
+            <a:pPr algn="ctr" indent="0" marL="0">
+              <a:buNone/>
+            </a:pPr>
+            <a:r>
+              <a:rPr lang="en-US" altLang="en-US" sz="700" b="1" dirty="0">
+                <a:solidFill>
+                  <a:srgbClr val="222222"/>
+                </a:solidFill>
+                <a:latin typeface="Calibri" pitchFamily="34" charset="0"/>
+                <a:ea typeface="Calibri" pitchFamily="34" charset="-122"/>
+                <a:cs typeface="Calibri" pitchFamily="34" charset="-120"/>
+              </a:rPr>
+              <a:t>14 Oct</a:t>
+            </a:r>
+            <a:endParaRPr lang="en-US" sz="700" dirty="0"/>
+          </a:p>
+        </p:txBody>
+      </p:sp>
+      <p:sp>
+        <p:nvSpPr>
+          <p:cNvPr id="251" name="Text 249"/>
+          <p:cNvSpPr/>
+          <p:nvPr/>
+        </p:nvSpPr>
+        <p:spPr>
+          <a:xfrm>
+            <a:off x="5385816" y="3311652"/>
+            <a:ext cx="658368" cy="215646"/>
+          </a:xfrm>
+          <a:prstGeom prst="rect">
+            <a:avLst/>
+          </a:prstGeom>
+          <a:noFill/>
+          <a:ln/>
+        </p:spPr>
+        <p:txBody>
+          <a:bodyPr wrap="square" lIns="0" tIns="0" rIns="0" bIns="0" rtlCol="0" anchor="ctr">
+            <a:normAutofit/>
+          </a:bodyPr>
+          <a:lstStyle/>
+          <a:p>
+            <a:pPr algn="ctr" indent="0" marL="0">
+              <a:buNone/>
+            </a:pPr>
+            <a:r>
+              <a:rPr lang="en-US" altLang="en-US" sz="700" b="1" dirty="0">
+                <a:solidFill>
+                  <a:srgbClr val="222222"/>
+                </a:solidFill>
+                <a:latin typeface="Calibri" pitchFamily="34" charset="0"/>
+                <a:ea typeface="Calibri" pitchFamily="34" charset="-122"/>
+                <a:cs typeface="Calibri" pitchFamily="34" charset="-120"/>
+              </a:rPr>
+              <a:t>17 Oct</a:t>
+            </a:r>
+            <a:endParaRPr lang="en-US" sz="700" dirty="0"/>
+          </a:p>
+        </p:txBody>
+      </p:sp>
+      <p:sp>
+        <p:nvSpPr>
+          <p:cNvPr id="252" name="Shape 250"/>
+          <p:cNvSpPr/>
+          <p:nvPr/>
+        </p:nvSpPr>
+        <p:spPr>
+          <a:xfrm>
+            <a:off x="6525997" y="3356938"/>
+            <a:ext cx="481813" cy="125075"/>
+          </a:xfrm>
+          <a:prstGeom prst="roundRect">
+            <a:avLst>
+              <a:gd name="adj" fmla="val 29243"/>
+            </a:avLst>
+          </a:prstGeom>
+          <a:solidFill>
+            <a:srgbClr val="D9695A"/>
+          </a:solidFill>
+          <a:ln w="19050">
+            <a:solidFill>
+              <a:srgbClr val="222222"/>
             </a:solidFill>
             <a:prstDash val="solid"/>
           </a:ln>
@@ -14780,20 +15480,61 @@
       </p:sp>
       <p:sp>
         <p:nvSpPr>
-          <p:cNvPr id="233" name="Shape 231"/>
-          <p:cNvSpPr/>
-          <p:nvPr/>
-        </p:nvSpPr>
-        <p:spPr>
-          <a:xfrm>
-            <a:off x="365760" y="3376749"/>
-            <a:ext cx="11460175" cy="403642"/>
-          </a:xfrm>
-          <a:prstGeom prst="rect">
-            <a:avLst/>
-          </a:prstGeom>
-          <a:solidFill>
-            <a:srgbClr val="FFFFFF"/>
+          <p:cNvPr id="253" name="Text 251"/>
+          <p:cNvSpPr/>
+          <p:nvPr/>
+        </p:nvSpPr>
+        <p:spPr>
+          <a:xfrm>
+            <a:off x="6525997" y="3356938"/>
+            <a:ext cx="481813" cy="125075"/>
+          </a:xfrm>
+          <a:prstGeom prst="rect">
+            <a:avLst/>
+          </a:prstGeom>
+          <a:noFill/>
+          <a:ln/>
+        </p:spPr>
+        <p:txBody>
+          <a:bodyPr wrap="square" lIns="0" tIns="0" rIns="0" bIns="0" rtlCol="0" anchor="ctr">
+            <a:normAutofit/>
+          </a:bodyPr>
+          <a:lstStyle/>
+          <a:p>
+            <a:pPr algn="ctr" indent="0" marL="0">
+              <a:buNone/>
+            </a:pPr>
+            <a:r>
+              <a:rPr lang="en-US" altLang="en-US" sz="700" b="1" dirty="0">
+                <a:solidFill>
+                  <a:srgbClr val="FFFFFF"/>
+                </a:solidFill>
+                <a:latin typeface="Calibri" pitchFamily="34" charset="0"/>
+                <a:ea typeface="Calibri" pitchFamily="34" charset="-122"/>
+                <a:cs typeface="Calibri" pitchFamily="34" charset="-120"/>
+              </a:rPr>
+              <a:t>3 d</a:t>
+            </a:r>
+            <a:endParaRPr lang="en-US" sz="700" dirty="0"/>
+          </a:p>
+        </p:txBody>
+      </p:sp>
+      <p:sp>
+        <p:nvSpPr>
+          <p:cNvPr id="254" name="Shape 252"/>
+          <p:cNvSpPr/>
+          <p:nvPr/>
+        </p:nvSpPr>
+        <p:spPr>
+          <a:xfrm>
+            <a:off x="365760" y="3527298"/>
+            <a:ext cx="11460175" cy="215646"/>
+          </a:xfrm>
+          <a:prstGeom prst="rect">
+            <a:avLst/>
+          </a:prstGeom>
+          <a:solidFill>
+            <a:srgbClr val="F6F9FA"/>
           </a:solidFill>
           <a:ln w="6350">
             <a:solidFill>
@@ -14805,295 +15546,297 @@
       </p:sp>
       <p:sp>
         <p:nvSpPr>
-          <p:cNvPr id="234" name="Shape 232"/>
-          <p:cNvSpPr/>
-          <p:nvPr/>
-        </p:nvSpPr>
-        <p:spPr>
-          <a:xfrm>
-            <a:off x="420624" y="3441410"/>
-            <a:ext cx="274320" cy="274320"/>
-          </a:xfrm>
-          <a:prstGeom prst="ellipse">
-            <a:avLst/>
-          </a:prstGeom>
-          <a:solidFill>
-            <a:srgbClr val="00778B"/>
-          </a:solidFill>
-          <a:ln w="25400">
-            <a:solidFill>
-              <a:srgbClr val="222222"/>
-            </a:solidFill>
-            <a:prstDash val="solid"/>
-          </a:ln>
-        </p:spPr>
-      </p:sp>
-      <p:sp>
-        <p:nvSpPr>
-          <p:cNvPr id="235" name="Text 233"/>
-          <p:cNvSpPr/>
-          <p:nvPr/>
-        </p:nvSpPr>
-        <p:spPr>
-          <a:xfrm>
-            <a:off x="365760" y="3376749"/>
-            <a:ext cx="384048" cy="403642"/>
-          </a:xfrm>
-          <a:prstGeom prst="rect">
-            <a:avLst/>
-          </a:prstGeom>
-          <a:noFill/>
-          <a:ln/>
-        </p:spPr>
-        <p:txBody>
-          <a:bodyPr wrap="square" lIns="0" tIns="0" rIns="0" bIns="0" rtlCol="0" anchor="ctr">
-            <a:normAutofit/>
-          </a:bodyPr>
-          <a:lstStyle/>
-          <a:p>
-            <a:pPr algn="ctr" indent="0" marL="0">
-              <a:buNone/>
-            </a:pPr>
-            <a:r>
-              <a:rPr lang="en-US" altLang="en-US" sz="900" b="1" dirty="0">
-                <a:solidFill>
-                  <a:srgbClr val="FFFFFF"/>
-                </a:solidFill>
-                <a:latin typeface="Calibri" pitchFamily="34" charset="0"/>
-                <a:ea typeface="Calibri" pitchFamily="34" charset="-122"/>
-                <a:cs typeface="Calibri" pitchFamily="34" charset="-120"/>
-              </a:rPr>
-              <a:t>C</a:t>
-            </a:r>
-            <a:endParaRPr lang="en-US" sz="900" dirty="0"/>
-          </a:p>
-        </p:txBody>
-      </p:sp>
-      <p:sp>
-        <p:nvSpPr>
-          <p:cNvPr id="236" name="Text 234"/>
-          <p:cNvSpPr/>
-          <p:nvPr/>
-        </p:nvSpPr>
-        <p:spPr>
-          <a:xfrm>
-            <a:off x="822960" y="3376749"/>
-            <a:ext cx="2606040" cy="403642"/>
-          </a:xfrm>
-          <a:prstGeom prst="rect">
-            <a:avLst/>
-          </a:prstGeom>
-          <a:noFill/>
-          <a:ln/>
-        </p:spPr>
-        <p:txBody>
-          <a:bodyPr wrap="square" lIns="0" tIns="0" rIns="0" bIns="0" rtlCol="0" anchor="ctr">
-            <a:normAutofit/>
-          </a:bodyPr>
-          <a:lstStyle/>
-          <a:p>
-            <a:pPr algn="l" indent="0" marL="0">
-              <a:buNone/>
-            </a:pPr>
-            <a:r>
-              <a:rPr lang="en-US" altLang="en-US" sz="900" dirty="0">
-                <a:solidFill>
-                  <a:srgbClr val="222222"/>
-                </a:solidFill>
-                <a:latin typeface="Calibri" pitchFamily="34" charset="0"/>
-                <a:ea typeface="Calibri" pitchFamily="34" charset="-122"/>
-                <a:cs typeface="Calibri" pitchFamily="34" charset="-120"/>
-              </a:rPr>
-              <a:t>Pit trench – reinforcement, formwork &amp; concrete</a:t>
-            </a:r>
-            <a:endParaRPr lang="en-US" sz="900" dirty="0"/>
-          </a:p>
-        </p:txBody>
-      </p:sp>
-      <p:sp>
-        <p:nvSpPr>
-          <p:cNvPr id="237" name="Text 235"/>
-          <p:cNvSpPr/>
-          <p:nvPr/>
-        </p:nvSpPr>
-        <p:spPr>
-          <a:xfrm>
-            <a:off x="3447288" y="3376749"/>
-            <a:ext cx="777240" cy="403642"/>
-          </a:xfrm>
-          <a:prstGeom prst="rect">
-            <a:avLst/>
-          </a:prstGeom>
-          <a:noFill/>
-          <a:ln/>
-        </p:spPr>
-        <p:txBody>
-          <a:bodyPr wrap="square" lIns="0" tIns="0" rIns="0" bIns="0" rtlCol="0" anchor="ctr">
-            <a:normAutofit/>
-          </a:bodyPr>
-          <a:lstStyle/>
-          <a:p>
-            <a:pPr algn="ctr" indent="0" marL="0">
-              <a:buNone/>
-            </a:pPr>
-            <a:r>
-              <a:rPr lang="en-US" altLang="en-US" sz="850" dirty="0">
-                <a:solidFill>
-                  <a:srgbClr val="444444"/>
-                </a:solidFill>
-                <a:latin typeface="Calibri" pitchFamily="34" charset="0"/>
-                <a:ea typeface="Calibri" pitchFamily="34" charset="-122"/>
-                <a:cs typeface="Calibri" pitchFamily="34" charset="-120"/>
-              </a:rPr>
-              <a:t>A · FS</a:t>
-            </a:r>
-            <a:endParaRPr lang="en-US" sz="850" dirty="0"/>
-          </a:p>
-        </p:txBody>
-      </p:sp>
-      <p:sp>
-        <p:nvSpPr>
-          <p:cNvPr id="238" name="Text 236"/>
-          <p:cNvSpPr/>
-          <p:nvPr/>
-        </p:nvSpPr>
-        <p:spPr>
-          <a:xfrm>
-            <a:off x="4224528" y="3376749"/>
-            <a:ext cx="502920" cy="403642"/>
-          </a:xfrm>
-          <a:prstGeom prst="rect">
-            <a:avLst/>
-          </a:prstGeom>
-          <a:noFill/>
-          <a:ln/>
-        </p:spPr>
-        <p:txBody>
-          <a:bodyPr wrap="square" lIns="0" tIns="0" rIns="0" bIns="0" rtlCol="0" anchor="ctr">
-            <a:normAutofit/>
-          </a:bodyPr>
-          <a:lstStyle/>
-          <a:p>
-            <a:pPr algn="ctr" indent="0" marL="0">
-              <a:buNone/>
-            </a:pPr>
-            <a:r>
-              <a:rPr lang="en-US" altLang="en-US" sz="1100" b="1" dirty="0">
-                <a:solidFill>
-                  <a:srgbClr val="222222"/>
-                </a:solidFill>
-                <a:latin typeface="Calibri" pitchFamily="34" charset="0"/>
-                <a:ea typeface="Calibri" pitchFamily="34" charset="-122"/>
-                <a:cs typeface="Calibri" pitchFamily="34" charset="-120"/>
-              </a:rPr>
-              <a:t>4</a:t>
-            </a:r>
-            <a:endParaRPr lang="en-US" sz="1100" dirty="0"/>
-          </a:p>
-        </p:txBody>
-      </p:sp>
-      <p:sp>
-        <p:nvSpPr>
-          <p:cNvPr id="239" name="Text 237"/>
-          <p:cNvSpPr/>
-          <p:nvPr/>
-        </p:nvSpPr>
-        <p:spPr>
-          <a:xfrm>
-            <a:off x="4727448" y="3376749"/>
-            <a:ext cx="658368" cy="403642"/>
-          </a:xfrm>
-          <a:prstGeom prst="rect">
-            <a:avLst/>
-          </a:prstGeom>
-          <a:noFill/>
-          <a:ln/>
-        </p:spPr>
-        <p:txBody>
-          <a:bodyPr wrap="square" lIns="0" tIns="0" rIns="0" bIns="0" rtlCol="0" anchor="ctr">
-            <a:normAutofit/>
-          </a:bodyPr>
-          <a:lstStyle/>
-          <a:p>
-            <a:pPr algn="ctr" indent="0" marL="0">
-              <a:buNone/>
-            </a:pPr>
-            <a:r>
-              <a:rPr lang="en-US" altLang="en-US" sz="850" b="1" dirty="0">
-                <a:solidFill>
-                  <a:srgbClr val="222222"/>
-                </a:solidFill>
-                <a:latin typeface="Calibri" pitchFamily="34" charset="0"/>
-                <a:ea typeface="Calibri" pitchFamily="34" charset="-122"/>
-                <a:cs typeface="Calibri" pitchFamily="34" charset="-120"/>
-              </a:rPr>
-              <a:t>20 Oct</a:t>
-            </a:r>
-            <a:endParaRPr lang="en-US" sz="850" dirty="0"/>
-          </a:p>
-        </p:txBody>
-      </p:sp>
-      <p:sp>
-        <p:nvSpPr>
-          <p:cNvPr id="240" name="Text 238"/>
-          <p:cNvSpPr/>
-          <p:nvPr/>
-        </p:nvSpPr>
-        <p:spPr>
-          <a:xfrm>
-            <a:off x="5385816" y="3376749"/>
-            <a:ext cx="658368" cy="403642"/>
-          </a:xfrm>
-          <a:prstGeom prst="rect">
-            <a:avLst/>
-          </a:prstGeom>
-          <a:noFill/>
-          <a:ln/>
-        </p:spPr>
-        <p:txBody>
-          <a:bodyPr wrap="square" lIns="0" tIns="0" rIns="0" bIns="0" rtlCol="0" anchor="ctr">
-            <a:normAutofit/>
-          </a:bodyPr>
-          <a:lstStyle/>
-          <a:p>
-            <a:pPr algn="ctr" indent="0" marL="0">
-              <a:buNone/>
-            </a:pPr>
-            <a:r>
-              <a:rPr lang="en-US" altLang="en-US" sz="850" b="1" dirty="0">
-                <a:solidFill>
-                  <a:srgbClr val="222222"/>
-                </a:solidFill>
-                <a:latin typeface="Calibri" pitchFamily="34" charset="0"/>
-                <a:ea typeface="Calibri" pitchFamily="34" charset="-122"/>
-                <a:cs typeface="Calibri" pitchFamily="34" charset="-120"/>
-              </a:rPr>
-              <a:t>24 Oct</a:t>
-            </a:r>
-            <a:endParaRPr lang="en-US" sz="850" dirty="0"/>
-          </a:p>
-        </p:txBody>
-      </p:sp>
-      <p:sp>
-        <p:nvSpPr>
-          <p:cNvPr id="241" name="Shape 239"/>
-          <p:cNvSpPr/>
-          <p:nvPr/>
-        </p:nvSpPr>
-        <p:spPr>
-          <a:xfrm>
-            <a:off x="7248716" y="3467568"/>
-            <a:ext cx="602266" cy="222003"/>
+          <p:cNvPr id="255" name="Shape 253"/>
+          <p:cNvSpPr/>
+          <p:nvPr/>
+        </p:nvSpPr>
+        <p:spPr>
+          <a:xfrm>
+            <a:off x="420624" y="3557397"/>
+            <a:ext cx="329184" cy="155448"/>
           </a:xfrm>
           <a:prstGeom prst="roundRect">
             <a:avLst>
-              <a:gd name="adj" fmla="val 20594"/>
+              <a:gd name="adj" fmla="val 50000"/>
             </a:avLst>
           </a:prstGeom>
           <a:solidFill>
-            <a:srgbClr val="00778B"/>
-          </a:solidFill>
-          <a:ln w="22225">
+            <a:srgbClr val="D9695A"/>
+          </a:solidFill>
+          <a:ln w="19050">
+            <a:solidFill>
+              <a:srgbClr val="222222"/>
+            </a:solidFill>
+            <a:prstDash val="solid"/>
+          </a:ln>
+        </p:spPr>
+      </p:sp>
+      <p:sp>
+        <p:nvSpPr>
+          <p:cNvPr id="256" name="Text 254"/>
+          <p:cNvSpPr/>
+          <p:nvPr/>
+        </p:nvSpPr>
+        <p:spPr>
+          <a:xfrm>
+            <a:off x="393192" y="3527298"/>
+            <a:ext cx="384048" cy="215646"/>
+          </a:xfrm>
+          <a:prstGeom prst="rect">
+            <a:avLst/>
+          </a:prstGeom>
+          <a:noFill/>
+          <a:ln/>
+        </p:spPr>
+        <p:txBody>
+          <a:bodyPr wrap="square" lIns="0" tIns="0" rIns="0" bIns="0" rtlCol="0" anchor="ctr">
+            <a:normAutofit/>
+          </a:bodyPr>
+          <a:lstStyle/>
+          <a:p>
+            <a:pPr algn="ctr" indent="0" marL="0">
+              <a:buNone/>
+            </a:pPr>
+            <a:r>
+              <a:rPr lang="en-US" altLang="en-US" sz="650" b="1" dirty="0">
+                <a:solidFill>
+                  <a:srgbClr val="FFFFFF"/>
+                </a:solidFill>
+                <a:latin typeface="Calibri" pitchFamily="34" charset="0"/>
+                <a:ea typeface="Calibri" pitchFamily="34" charset="-122"/>
+                <a:cs typeface="Calibri" pitchFamily="34" charset="-120"/>
+              </a:rPr>
+              <a:t>A.3</a:t>
+            </a:r>
+            <a:endParaRPr lang="en-US" sz="650" dirty="0"/>
+          </a:p>
+        </p:txBody>
+      </p:sp>
+      <p:sp>
+        <p:nvSpPr>
+          <p:cNvPr id="257" name="Text 255"/>
+          <p:cNvSpPr/>
+          <p:nvPr/>
+        </p:nvSpPr>
+        <p:spPr>
+          <a:xfrm>
+            <a:off x="987552" y="3527298"/>
+            <a:ext cx="2441448" cy="215646"/>
+          </a:xfrm>
+          <a:prstGeom prst="rect">
+            <a:avLst/>
+          </a:prstGeom>
+          <a:noFill/>
+          <a:ln/>
+        </p:spPr>
+        <p:txBody>
+          <a:bodyPr wrap="square" lIns="0" tIns="0" rIns="0" bIns="0" rtlCol="0" anchor="ctr">
+            <a:normAutofit/>
+          </a:bodyPr>
+          <a:lstStyle/>
+          <a:p>
+            <a:pPr algn="l" indent="0" marL="0">
+              <a:buNone/>
+            </a:pPr>
+            <a:r>
+              <a:rPr lang="en-US" altLang="en-US" sz="700" dirty="0">
+                <a:solidFill>
+                  <a:srgbClr val="222222"/>
+                </a:solidFill>
+                <a:latin typeface="Calibri" pitchFamily="34" charset="0"/>
+                <a:ea typeface="Calibri" pitchFamily="34" charset="-122"/>
+                <a:cs typeface="Calibri" pitchFamily="34" charset="-120"/>
+              </a:rPr>
+              <a:t>Concrete work for H-Beam</a:t>
+            </a:r>
+            <a:endParaRPr lang="en-US" sz="700" dirty="0"/>
+          </a:p>
+        </p:txBody>
+      </p:sp>
+      <p:sp>
+        <p:nvSpPr>
+          <p:cNvPr id="258" name="Text 256"/>
+          <p:cNvSpPr/>
+          <p:nvPr/>
+        </p:nvSpPr>
+        <p:spPr>
+          <a:xfrm>
+            <a:off x="3447288" y="3527298"/>
+            <a:ext cx="777240" cy="215646"/>
+          </a:xfrm>
+          <a:prstGeom prst="rect">
+            <a:avLst/>
+          </a:prstGeom>
+          <a:noFill/>
+          <a:ln/>
+        </p:spPr>
+        <p:txBody>
+          <a:bodyPr wrap="square" lIns="0" tIns="0" rIns="0" bIns="0" rtlCol="0" anchor="ctr">
+            <a:normAutofit/>
+          </a:bodyPr>
+          <a:lstStyle/>
+          <a:p>
+            <a:pPr algn="ctr" indent="0" marL="0">
+              <a:buNone/>
+            </a:pPr>
+            <a:r>
+              <a:rPr lang="en-US" altLang="en-US" sz="700" dirty="0">
+                <a:solidFill>
+                  <a:srgbClr val="444444"/>
+                </a:solidFill>
+                <a:latin typeface="Calibri" pitchFamily="34" charset="0"/>
+                <a:ea typeface="Calibri" pitchFamily="34" charset="-122"/>
+                <a:cs typeface="Calibri" pitchFamily="34" charset="-120"/>
+              </a:rPr>
+              <a:t>A2 · SS +1</a:t>
+            </a:r>
+            <a:endParaRPr lang="en-US" sz="700" dirty="0"/>
+          </a:p>
+        </p:txBody>
+      </p:sp>
+      <p:sp>
+        <p:nvSpPr>
+          <p:cNvPr id="259" name="Text 257"/>
+          <p:cNvSpPr/>
+          <p:nvPr/>
+        </p:nvSpPr>
+        <p:spPr>
+          <a:xfrm>
+            <a:off x="4224528" y="3527298"/>
+            <a:ext cx="502920" cy="215646"/>
+          </a:xfrm>
+          <a:prstGeom prst="rect">
+            <a:avLst/>
+          </a:prstGeom>
+          <a:noFill/>
+          <a:ln/>
+        </p:spPr>
+        <p:txBody>
+          <a:bodyPr wrap="square" lIns="0" tIns="0" rIns="0" bIns="0" rtlCol="0" anchor="ctr">
+            <a:normAutofit/>
+          </a:bodyPr>
+          <a:lstStyle/>
+          <a:p>
+            <a:pPr algn="ctr" indent="0" marL="0">
+              <a:buNone/>
+            </a:pPr>
+            <a:r>
+              <a:rPr lang="en-US" altLang="en-US" sz="900" b="1" dirty="0">
+                <a:solidFill>
+                  <a:srgbClr val="222222"/>
+                </a:solidFill>
+                <a:latin typeface="Calibri" pitchFamily="34" charset="0"/>
+                <a:ea typeface="Calibri" pitchFamily="34" charset="-122"/>
+                <a:cs typeface="Calibri" pitchFamily="34" charset="-120"/>
+              </a:rPr>
+              <a:t>3</a:t>
+            </a:r>
+            <a:endParaRPr lang="en-US" sz="900" dirty="0"/>
+          </a:p>
+        </p:txBody>
+      </p:sp>
+      <p:sp>
+        <p:nvSpPr>
+          <p:cNvPr id="260" name="Text 258"/>
+          <p:cNvSpPr/>
+          <p:nvPr/>
+        </p:nvSpPr>
+        <p:spPr>
+          <a:xfrm>
+            <a:off x="4727448" y="3527298"/>
+            <a:ext cx="658368" cy="215646"/>
+          </a:xfrm>
+          <a:prstGeom prst="rect">
+            <a:avLst/>
+          </a:prstGeom>
+          <a:noFill/>
+          <a:ln/>
+        </p:spPr>
+        <p:txBody>
+          <a:bodyPr wrap="square" lIns="0" tIns="0" rIns="0" bIns="0" rtlCol="0" anchor="ctr">
+            <a:normAutofit/>
+          </a:bodyPr>
+          <a:lstStyle/>
+          <a:p>
+            <a:pPr algn="ctr" indent="0" marL="0">
+              <a:buNone/>
+            </a:pPr>
+            <a:r>
+              <a:rPr lang="en-US" altLang="en-US" sz="700" b="1" dirty="0">
+                <a:solidFill>
+                  <a:srgbClr val="222222"/>
+                </a:solidFill>
+                <a:latin typeface="Calibri" pitchFamily="34" charset="0"/>
+                <a:ea typeface="Calibri" pitchFamily="34" charset="-122"/>
+                <a:cs typeface="Calibri" pitchFamily="34" charset="-120"/>
+              </a:rPr>
+              <a:t>15 Oct</a:t>
+            </a:r>
+            <a:endParaRPr lang="en-US" sz="700" dirty="0"/>
+          </a:p>
+        </p:txBody>
+      </p:sp>
+      <p:sp>
+        <p:nvSpPr>
+          <p:cNvPr id="261" name="Text 259"/>
+          <p:cNvSpPr/>
+          <p:nvPr/>
+        </p:nvSpPr>
+        <p:spPr>
+          <a:xfrm>
+            <a:off x="5385816" y="3527298"/>
+            <a:ext cx="658368" cy="215646"/>
+          </a:xfrm>
+          <a:prstGeom prst="rect">
+            <a:avLst/>
+          </a:prstGeom>
+          <a:noFill/>
+          <a:ln/>
+        </p:spPr>
+        <p:txBody>
+          <a:bodyPr wrap="square" lIns="0" tIns="0" rIns="0" bIns="0" rtlCol="0" anchor="ctr">
+            <a:normAutofit/>
+          </a:bodyPr>
+          <a:lstStyle/>
+          <a:p>
+            <a:pPr algn="ctr" indent="0" marL="0">
+              <a:buNone/>
+            </a:pPr>
+            <a:r>
+              <a:rPr lang="en-US" altLang="en-US" sz="700" b="1" dirty="0">
+                <a:solidFill>
+                  <a:srgbClr val="222222"/>
+                </a:solidFill>
+                <a:latin typeface="Calibri" pitchFamily="34" charset="0"/>
+                <a:ea typeface="Calibri" pitchFamily="34" charset="-122"/>
+                <a:cs typeface="Calibri" pitchFamily="34" charset="-120"/>
+              </a:rPr>
+              <a:t>18 Oct</a:t>
+            </a:r>
+            <a:endParaRPr lang="en-US" sz="700" dirty="0"/>
+          </a:p>
+        </p:txBody>
+      </p:sp>
+      <p:sp>
+        <p:nvSpPr>
+          <p:cNvPr id="262" name="Shape 260"/>
+          <p:cNvSpPr/>
+          <p:nvPr/>
+        </p:nvSpPr>
+        <p:spPr>
+          <a:xfrm>
+            <a:off x="6646450" y="3572584"/>
+            <a:ext cx="481813" cy="125075"/>
+          </a:xfrm>
+          <a:prstGeom prst="roundRect">
+            <a:avLst>
+              <a:gd name="adj" fmla="val 29243"/>
+            </a:avLst>
+          </a:prstGeom>
+          <a:solidFill>
+            <a:srgbClr val="D9695A"/>
+          </a:solidFill>
+          <a:ln w="19050">
             <a:solidFill>
               <a:srgbClr val="222222"/>
             </a:solidFill>
@@ -15110,14 +15853,14 @@
       </p:sp>
       <p:sp>
         <p:nvSpPr>
-          <p:cNvPr id="242" name="Text 240"/>
-          <p:cNvSpPr/>
-          <p:nvPr/>
-        </p:nvSpPr>
-        <p:spPr>
-          <a:xfrm>
-            <a:off x="7248716" y="3467568"/>
-            <a:ext cx="602266" cy="222003"/>
+          <p:cNvPr id="263" name="Text 261"/>
+          <p:cNvSpPr/>
+          <p:nvPr/>
+        </p:nvSpPr>
+        <p:spPr>
+          <a:xfrm>
+            <a:off x="6646450" y="3572584"/>
+            <a:ext cx="481813" cy="125075"/>
           </a:xfrm>
           <a:prstGeom prst="rect">
             <a:avLst/>
@@ -15135,7 +15878,7 @@
               <a:buNone/>
             </a:pPr>
             <a:r>
-              <a:rPr lang="en-US" altLang="en-US" sz="800" b="1" dirty="0">
+              <a:rPr lang="en-US" altLang="en-US" sz="700" b="1" dirty="0">
                 <a:solidFill>
                   <a:srgbClr val="FFFFFF"/>
                 </a:solidFill>
@@ -15143,28 +15886,28 @@
                 <a:ea typeface="Calibri" pitchFamily="34" charset="-122"/>
                 <a:cs typeface="Calibri" pitchFamily="34" charset="-120"/>
               </a:rPr>
-              <a:t>4 d</a:t>
-            </a:r>
-            <a:endParaRPr lang="en-US" sz="800" dirty="0"/>
-          </a:p>
-        </p:txBody>
-      </p:sp>
-      <p:sp>
-        <p:nvSpPr>
-          <p:cNvPr id="243" name="Shape 241"/>
-          <p:cNvSpPr/>
-          <p:nvPr/>
-        </p:nvSpPr>
-        <p:spPr>
-          <a:xfrm>
-            <a:off x="365760" y="3780391"/>
-            <a:ext cx="11460175" cy="403642"/>
-          </a:xfrm>
-          <a:prstGeom prst="rect">
-            <a:avLst/>
-          </a:prstGeom>
-          <a:solidFill>
-            <a:srgbClr val="F6F9FA"/>
+              <a:t>3 d</a:t>
+            </a:r>
+            <a:endParaRPr lang="en-US" sz="700" dirty="0"/>
+          </a:p>
+        </p:txBody>
+      </p:sp>
+      <p:sp>
+        <p:nvSpPr>
+          <p:cNvPr id="264" name="Shape 262"/>
+          <p:cNvSpPr/>
+          <p:nvPr/>
+        </p:nvSpPr>
+        <p:spPr>
+          <a:xfrm>
+            <a:off x="365760" y="3742944"/>
+            <a:ext cx="11460175" cy="215646"/>
+          </a:xfrm>
+          <a:prstGeom prst="rect">
+            <a:avLst/>
+          </a:prstGeom>
+          <a:solidFill>
+            <a:srgbClr val="FFFFFF"/>
           </a:solidFill>
           <a:ln w="6350">
             <a:solidFill>
@@ -15176,295 +15919,297 @@
       </p:sp>
       <p:sp>
         <p:nvSpPr>
-          <p:cNvPr id="244" name="Shape 242"/>
-          <p:cNvSpPr/>
-          <p:nvPr/>
-        </p:nvSpPr>
-        <p:spPr>
-          <a:xfrm>
-            <a:off x="420624" y="3845052"/>
-            <a:ext cx="274320" cy="274320"/>
-          </a:xfrm>
-          <a:prstGeom prst="ellipse">
-            <a:avLst/>
-          </a:prstGeom>
-          <a:solidFill>
-            <a:srgbClr val="00778B"/>
-          </a:solidFill>
-          <a:ln w="25400">
-            <a:solidFill>
-              <a:srgbClr val="222222"/>
-            </a:solidFill>
-            <a:prstDash val="solid"/>
-          </a:ln>
-        </p:spPr>
-      </p:sp>
-      <p:sp>
-        <p:nvSpPr>
-          <p:cNvPr id="245" name="Text 243"/>
-          <p:cNvSpPr/>
-          <p:nvPr/>
-        </p:nvSpPr>
-        <p:spPr>
-          <a:xfrm>
-            <a:off x="365760" y="3780391"/>
-            <a:ext cx="384048" cy="403642"/>
-          </a:xfrm>
-          <a:prstGeom prst="rect">
-            <a:avLst/>
-          </a:prstGeom>
-          <a:noFill/>
-          <a:ln/>
-        </p:spPr>
-        <p:txBody>
-          <a:bodyPr wrap="square" lIns="0" tIns="0" rIns="0" bIns="0" rtlCol="0" anchor="ctr">
-            <a:normAutofit/>
-          </a:bodyPr>
-          <a:lstStyle/>
-          <a:p>
-            <a:pPr algn="ctr" indent="0" marL="0">
-              <a:buNone/>
-            </a:pPr>
-            <a:r>
-              <a:rPr lang="en-US" altLang="en-US" sz="900" b="1" dirty="0">
-                <a:solidFill>
-                  <a:srgbClr val="FFFFFF"/>
-                </a:solidFill>
-                <a:latin typeface="Calibri" pitchFamily="34" charset="0"/>
-                <a:ea typeface="Calibri" pitchFamily="34" charset="-122"/>
-                <a:cs typeface="Calibri" pitchFamily="34" charset="-120"/>
-              </a:rPr>
-              <a:t>D</a:t>
-            </a:r>
-            <a:endParaRPr lang="en-US" sz="900" dirty="0"/>
-          </a:p>
-        </p:txBody>
-      </p:sp>
-      <p:sp>
-        <p:nvSpPr>
-          <p:cNvPr id="246" name="Text 244"/>
-          <p:cNvSpPr/>
-          <p:nvPr/>
-        </p:nvSpPr>
-        <p:spPr>
-          <a:xfrm>
-            <a:off x="822960" y="3780391"/>
-            <a:ext cx="2606040" cy="403642"/>
-          </a:xfrm>
-          <a:prstGeom prst="rect">
-            <a:avLst/>
-          </a:prstGeom>
-          <a:noFill/>
-          <a:ln/>
-        </p:spPr>
-        <p:txBody>
-          <a:bodyPr wrap="square" lIns="0" tIns="0" rIns="0" bIns="0" rtlCol="0" anchor="ctr">
-            <a:normAutofit/>
-          </a:bodyPr>
-          <a:lstStyle/>
-          <a:p>
-            <a:pPr algn="l" indent="0" marL="0">
-              <a:buNone/>
-            </a:pPr>
-            <a:r>
-              <a:rPr lang="en-US" altLang="en-US" sz="900" dirty="0">
-                <a:solidFill>
-                  <a:srgbClr val="222222"/>
-                </a:solidFill>
-                <a:latin typeface="Calibri" pitchFamily="34" charset="0"/>
-                <a:ea typeface="Calibri" pitchFamily="34" charset="-122"/>
-                <a:cs typeface="Calibri" pitchFamily="34" charset="-120"/>
-              </a:rPr>
-              <a:t>Pit slab / raft – reinforcement, formwork &amp; concrete</a:t>
-            </a:r>
-            <a:endParaRPr lang="en-US" sz="900" dirty="0"/>
-          </a:p>
-        </p:txBody>
-      </p:sp>
-      <p:sp>
-        <p:nvSpPr>
-          <p:cNvPr id="247" name="Text 245"/>
-          <p:cNvSpPr/>
-          <p:nvPr/>
-        </p:nvSpPr>
-        <p:spPr>
-          <a:xfrm>
-            <a:off x="3447288" y="3780391"/>
-            <a:ext cx="777240" cy="403642"/>
-          </a:xfrm>
-          <a:prstGeom prst="rect">
-            <a:avLst/>
-          </a:prstGeom>
-          <a:noFill/>
-          <a:ln/>
-        </p:spPr>
-        <p:txBody>
-          <a:bodyPr wrap="square" lIns="0" tIns="0" rIns="0" bIns="0" rtlCol="0" anchor="ctr">
-            <a:normAutofit/>
-          </a:bodyPr>
-          <a:lstStyle/>
-          <a:p>
-            <a:pPr algn="ctr" indent="0" marL="0">
-              <a:buNone/>
-            </a:pPr>
-            <a:r>
-              <a:rPr lang="en-US" altLang="en-US" sz="850" dirty="0">
-                <a:solidFill>
-                  <a:srgbClr val="444444"/>
-                </a:solidFill>
-                <a:latin typeface="Calibri" pitchFamily="34" charset="0"/>
-                <a:ea typeface="Calibri" pitchFamily="34" charset="-122"/>
-                <a:cs typeface="Calibri" pitchFamily="34" charset="-120"/>
-              </a:rPr>
-              <a:t>C · FS</a:t>
-            </a:r>
-            <a:endParaRPr lang="en-US" sz="850" dirty="0"/>
-          </a:p>
-        </p:txBody>
-      </p:sp>
-      <p:sp>
-        <p:nvSpPr>
-          <p:cNvPr id="248" name="Text 246"/>
-          <p:cNvSpPr/>
-          <p:nvPr/>
-        </p:nvSpPr>
-        <p:spPr>
-          <a:xfrm>
-            <a:off x="4224528" y="3780391"/>
-            <a:ext cx="502920" cy="403642"/>
-          </a:xfrm>
-          <a:prstGeom prst="rect">
-            <a:avLst/>
-          </a:prstGeom>
-          <a:noFill/>
-          <a:ln/>
-        </p:spPr>
-        <p:txBody>
-          <a:bodyPr wrap="square" lIns="0" tIns="0" rIns="0" bIns="0" rtlCol="0" anchor="ctr">
-            <a:normAutofit/>
-          </a:bodyPr>
-          <a:lstStyle/>
-          <a:p>
-            <a:pPr algn="ctr" indent="0" marL="0">
-              <a:buNone/>
-            </a:pPr>
-            <a:r>
-              <a:rPr lang="en-US" altLang="en-US" sz="1100" b="1" dirty="0">
-                <a:solidFill>
-                  <a:srgbClr val="222222"/>
-                </a:solidFill>
-                <a:latin typeface="Calibri" pitchFamily="34" charset="0"/>
-                <a:ea typeface="Calibri" pitchFamily="34" charset="-122"/>
-                <a:cs typeface="Calibri" pitchFamily="34" charset="-120"/>
-              </a:rPr>
-              <a:t>10</a:t>
-            </a:r>
-            <a:endParaRPr lang="en-US" sz="1100" dirty="0"/>
-          </a:p>
-        </p:txBody>
-      </p:sp>
-      <p:sp>
-        <p:nvSpPr>
-          <p:cNvPr id="249" name="Text 247"/>
-          <p:cNvSpPr/>
-          <p:nvPr/>
-        </p:nvSpPr>
-        <p:spPr>
-          <a:xfrm>
-            <a:off x="4727448" y="3780391"/>
-            <a:ext cx="658368" cy="403642"/>
-          </a:xfrm>
-          <a:prstGeom prst="rect">
-            <a:avLst/>
-          </a:prstGeom>
-          <a:noFill/>
-          <a:ln/>
-        </p:spPr>
-        <p:txBody>
-          <a:bodyPr wrap="square" lIns="0" tIns="0" rIns="0" bIns="0" rtlCol="0" anchor="ctr">
-            <a:normAutofit/>
-          </a:bodyPr>
-          <a:lstStyle/>
-          <a:p>
-            <a:pPr algn="ctr" indent="0" marL="0">
-              <a:buNone/>
-            </a:pPr>
-            <a:r>
-              <a:rPr lang="en-US" altLang="en-US" sz="850" b="1" dirty="0">
-                <a:solidFill>
-                  <a:srgbClr val="222222"/>
-                </a:solidFill>
-                <a:latin typeface="Calibri" pitchFamily="34" charset="0"/>
-                <a:ea typeface="Calibri" pitchFamily="34" charset="-122"/>
-                <a:cs typeface="Calibri" pitchFamily="34" charset="-120"/>
-              </a:rPr>
-              <a:t>25 Oct</a:t>
-            </a:r>
-            <a:endParaRPr lang="en-US" sz="850" dirty="0"/>
-          </a:p>
-        </p:txBody>
-      </p:sp>
-      <p:sp>
-        <p:nvSpPr>
-          <p:cNvPr id="250" name="Text 248"/>
-          <p:cNvSpPr/>
-          <p:nvPr/>
-        </p:nvSpPr>
-        <p:spPr>
-          <a:xfrm>
-            <a:off x="5385816" y="3780391"/>
-            <a:ext cx="658368" cy="403642"/>
-          </a:xfrm>
-          <a:prstGeom prst="rect">
-            <a:avLst/>
-          </a:prstGeom>
-          <a:noFill/>
-          <a:ln/>
-        </p:spPr>
-        <p:txBody>
-          <a:bodyPr wrap="square" lIns="0" tIns="0" rIns="0" bIns="0" rtlCol="0" anchor="ctr">
-            <a:normAutofit/>
-          </a:bodyPr>
-          <a:lstStyle/>
-          <a:p>
-            <a:pPr algn="ctr" indent="0" marL="0">
-              <a:buNone/>
-            </a:pPr>
-            <a:r>
-              <a:rPr lang="en-US" altLang="en-US" sz="850" b="1" dirty="0">
-                <a:solidFill>
-                  <a:srgbClr val="222222"/>
-                </a:solidFill>
-                <a:latin typeface="Calibri" pitchFamily="34" charset="0"/>
-                <a:ea typeface="Calibri" pitchFamily="34" charset="-122"/>
-                <a:cs typeface="Calibri" pitchFamily="34" charset="-120"/>
-              </a:rPr>
-              <a:t>4 Nov</a:t>
-            </a:r>
-            <a:endParaRPr lang="en-US" sz="850" dirty="0"/>
-          </a:p>
-        </p:txBody>
-      </p:sp>
-      <p:sp>
-        <p:nvSpPr>
-          <p:cNvPr id="251" name="Shape 249"/>
-          <p:cNvSpPr/>
-          <p:nvPr/>
-        </p:nvSpPr>
-        <p:spPr>
-          <a:xfrm>
-            <a:off x="7850981" y="3871210"/>
-            <a:ext cx="1324985" cy="222003"/>
+          <p:cNvPr id="265" name="Shape 263"/>
+          <p:cNvSpPr/>
+          <p:nvPr/>
+        </p:nvSpPr>
+        <p:spPr>
+          <a:xfrm>
+            <a:off x="420624" y="3773043"/>
+            <a:ext cx="329184" cy="155448"/>
           </a:xfrm>
           <a:prstGeom prst="roundRect">
             <a:avLst>
-              <a:gd name="adj" fmla="val 20594"/>
+              <a:gd name="adj" fmla="val 50000"/>
             </a:avLst>
           </a:prstGeom>
           <a:solidFill>
-            <a:srgbClr val="00778B"/>
-          </a:solidFill>
-          <a:ln w="22225">
+            <a:srgbClr val="D9695A"/>
+          </a:solidFill>
+          <a:ln w="19050">
+            <a:solidFill>
+              <a:srgbClr val="222222"/>
+            </a:solidFill>
+            <a:prstDash val="solid"/>
+          </a:ln>
+        </p:spPr>
+      </p:sp>
+      <p:sp>
+        <p:nvSpPr>
+          <p:cNvPr id="266" name="Text 264"/>
+          <p:cNvSpPr/>
+          <p:nvPr/>
+        </p:nvSpPr>
+        <p:spPr>
+          <a:xfrm>
+            <a:off x="393192" y="3742944"/>
+            <a:ext cx="384048" cy="215646"/>
+          </a:xfrm>
+          <a:prstGeom prst="rect">
+            <a:avLst/>
+          </a:prstGeom>
+          <a:noFill/>
+          <a:ln/>
+        </p:spPr>
+        <p:txBody>
+          <a:bodyPr wrap="square" lIns="0" tIns="0" rIns="0" bIns="0" rtlCol="0" anchor="ctr">
+            <a:normAutofit/>
+          </a:bodyPr>
+          <a:lstStyle/>
+          <a:p>
+            <a:pPr algn="ctr" indent="0" marL="0">
+              <a:buNone/>
+            </a:pPr>
+            <a:r>
+              <a:rPr lang="en-US" altLang="en-US" sz="650" b="1" dirty="0">
+                <a:solidFill>
+                  <a:srgbClr val="FFFFFF"/>
+                </a:solidFill>
+                <a:latin typeface="Calibri" pitchFamily="34" charset="0"/>
+                <a:ea typeface="Calibri" pitchFamily="34" charset="-122"/>
+                <a:cs typeface="Calibri" pitchFamily="34" charset="-120"/>
+              </a:rPr>
+              <a:t>A.4</a:t>
+            </a:r>
+            <a:endParaRPr lang="en-US" sz="650" dirty="0"/>
+          </a:p>
+        </p:txBody>
+      </p:sp>
+      <p:sp>
+        <p:nvSpPr>
+          <p:cNvPr id="267" name="Text 265"/>
+          <p:cNvSpPr/>
+          <p:nvPr/>
+        </p:nvSpPr>
+        <p:spPr>
+          <a:xfrm>
+            <a:off x="987552" y="3742944"/>
+            <a:ext cx="2441448" cy="215646"/>
+          </a:xfrm>
+          <a:prstGeom prst="rect">
+            <a:avLst/>
+          </a:prstGeom>
+          <a:noFill/>
+          <a:ln/>
+        </p:spPr>
+        <p:txBody>
+          <a:bodyPr wrap="square" lIns="0" tIns="0" rIns="0" bIns="0" rtlCol="0" anchor="ctr">
+            <a:normAutofit/>
+          </a:bodyPr>
+          <a:lstStyle/>
+          <a:p>
+            <a:pPr algn="l" indent="0" marL="0">
+              <a:buNone/>
+            </a:pPr>
+            <a:r>
+              <a:rPr lang="en-US" altLang="en-US" sz="700" dirty="0">
+                <a:solidFill>
+                  <a:srgbClr val="222222"/>
+                </a:solidFill>
+                <a:latin typeface="Calibri" pitchFamily="34" charset="0"/>
+                <a:ea typeface="Calibri" pitchFamily="34" charset="-122"/>
+                <a:cs typeface="Calibri" pitchFamily="34" charset="-120"/>
+              </a:rPr>
+              <a:t>Bracing for shoring</a:t>
+            </a:r>
+            <a:endParaRPr lang="en-US" sz="700" dirty="0"/>
+          </a:p>
+        </p:txBody>
+      </p:sp>
+      <p:sp>
+        <p:nvSpPr>
+          <p:cNvPr id="268" name="Text 266"/>
+          <p:cNvSpPr/>
+          <p:nvPr/>
+        </p:nvSpPr>
+        <p:spPr>
+          <a:xfrm>
+            <a:off x="3447288" y="3742944"/>
+            <a:ext cx="777240" cy="215646"/>
+          </a:xfrm>
+          <a:prstGeom prst="rect">
+            <a:avLst/>
+          </a:prstGeom>
+          <a:noFill/>
+          <a:ln/>
+        </p:spPr>
+        <p:txBody>
+          <a:bodyPr wrap="square" lIns="0" tIns="0" rIns="0" bIns="0" rtlCol="0" anchor="ctr">
+            <a:normAutofit/>
+          </a:bodyPr>
+          <a:lstStyle/>
+          <a:p>
+            <a:pPr algn="ctr" indent="0" marL="0">
+              <a:buNone/>
+            </a:pPr>
+            <a:r>
+              <a:rPr lang="en-US" altLang="en-US" sz="700" dirty="0">
+                <a:solidFill>
+                  <a:srgbClr val="444444"/>
+                </a:solidFill>
+                <a:latin typeface="Calibri" pitchFamily="34" charset="0"/>
+                <a:ea typeface="Calibri" pitchFamily="34" charset="-122"/>
+                <a:cs typeface="Calibri" pitchFamily="34" charset="-120"/>
+              </a:rPr>
+              <a:t>A3 · SS +1</a:t>
+            </a:r>
+            <a:endParaRPr lang="en-US" sz="700" dirty="0"/>
+          </a:p>
+        </p:txBody>
+      </p:sp>
+      <p:sp>
+        <p:nvSpPr>
+          <p:cNvPr id="269" name="Text 267"/>
+          <p:cNvSpPr/>
+          <p:nvPr/>
+        </p:nvSpPr>
+        <p:spPr>
+          <a:xfrm>
+            <a:off x="4224528" y="3742944"/>
+            <a:ext cx="502920" cy="215646"/>
+          </a:xfrm>
+          <a:prstGeom prst="rect">
+            <a:avLst/>
+          </a:prstGeom>
+          <a:noFill/>
+          <a:ln/>
+        </p:spPr>
+        <p:txBody>
+          <a:bodyPr wrap="square" lIns="0" tIns="0" rIns="0" bIns="0" rtlCol="0" anchor="ctr">
+            <a:normAutofit/>
+          </a:bodyPr>
+          <a:lstStyle/>
+          <a:p>
+            <a:pPr algn="ctr" indent="0" marL="0">
+              <a:buNone/>
+            </a:pPr>
+            <a:r>
+              <a:rPr lang="en-US" altLang="en-US" sz="900" b="1" dirty="0">
+                <a:solidFill>
+                  <a:srgbClr val="222222"/>
+                </a:solidFill>
+                <a:latin typeface="Calibri" pitchFamily="34" charset="0"/>
+                <a:ea typeface="Calibri" pitchFamily="34" charset="-122"/>
+                <a:cs typeface="Calibri" pitchFamily="34" charset="-120"/>
+              </a:rPr>
+              <a:t>3</a:t>
+            </a:r>
+            <a:endParaRPr lang="en-US" sz="900" dirty="0"/>
+          </a:p>
+        </p:txBody>
+      </p:sp>
+      <p:sp>
+        <p:nvSpPr>
+          <p:cNvPr id="270" name="Text 268"/>
+          <p:cNvSpPr/>
+          <p:nvPr/>
+        </p:nvSpPr>
+        <p:spPr>
+          <a:xfrm>
+            <a:off x="4727448" y="3742944"/>
+            <a:ext cx="658368" cy="215646"/>
+          </a:xfrm>
+          <a:prstGeom prst="rect">
+            <a:avLst/>
+          </a:prstGeom>
+          <a:noFill/>
+          <a:ln/>
+        </p:spPr>
+        <p:txBody>
+          <a:bodyPr wrap="square" lIns="0" tIns="0" rIns="0" bIns="0" rtlCol="0" anchor="ctr">
+            <a:normAutofit/>
+          </a:bodyPr>
+          <a:lstStyle/>
+          <a:p>
+            <a:pPr algn="ctr" indent="0" marL="0">
+              <a:buNone/>
+            </a:pPr>
+            <a:r>
+              <a:rPr lang="en-US" altLang="en-US" sz="700" b="1" dirty="0">
+                <a:solidFill>
+                  <a:srgbClr val="222222"/>
+                </a:solidFill>
+                <a:latin typeface="Calibri" pitchFamily="34" charset="0"/>
+                <a:ea typeface="Calibri" pitchFamily="34" charset="-122"/>
+                <a:cs typeface="Calibri" pitchFamily="34" charset="-120"/>
+              </a:rPr>
+              <a:t>17 Oct</a:t>
+            </a:r>
+            <a:endParaRPr lang="en-US" sz="700" dirty="0"/>
+          </a:p>
+        </p:txBody>
+      </p:sp>
+      <p:sp>
+        <p:nvSpPr>
+          <p:cNvPr id="271" name="Text 269"/>
+          <p:cNvSpPr/>
+          <p:nvPr/>
+        </p:nvSpPr>
+        <p:spPr>
+          <a:xfrm>
+            <a:off x="5385816" y="3742944"/>
+            <a:ext cx="658368" cy="215646"/>
+          </a:xfrm>
+          <a:prstGeom prst="rect">
+            <a:avLst/>
+          </a:prstGeom>
+          <a:noFill/>
+          <a:ln/>
+        </p:spPr>
+        <p:txBody>
+          <a:bodyPr wrap="square" lIns="0" tIns="0" rIns="0" bIns="0" rtlCol="0" anchor="ctr">
+            <a:normAutofit/>
+          </a:bodyPr>
+          <a:lstStyle/>
+          <a:p>
+            <a:pPr algn="ctr" indent="0" marL="0">
+              <a:buNone/>
+            </a:pPr>
+            <a:r>
+              <a:rPr lang="en-US" altLang="en-US" sz="700" b="1" dirty="0">
+                <a:solidFill>
+                  <a:srgbClr val="222222"/>
+                </a:solidFill>
+                <a:latin typeface="Calibri" pitchFamily="34" charset="0"/>
+                <a:ea typeface="Calibri" pitchFamily="34" charset="-122"/>
+                <a:cs typeface="Calibri" pitchFamily="34" charset="-120"/>
+              </a:rPr>
+              <a:t>19 Oct</a:t>
+            </a:r>
+            <a:endParaRPr lang="en-US" sz="700" dirty="0"/>
+          </a:p>
+        </p:txBody>
+      </p:sp>
+      <p:sp>
+        <p:nvSpPr>
+          <p:cNvPr id="272" name="Shape 270"/>
+          <p:cNvSpPr/>
+          <p:nvPr/>
+        </p:nvSpPr>
+        <p:spPr>
+          <a:xfrm>
+            <a:off x="6887356" y="3788230"/>
+            <a:ext cx="361359" cy="125075"/>
+          </a:xfrm>
+          <a:prstGeom prst="roundRect">
+            <a:avLst>
+              <a:gd name="adj" fmla="val 29243"/>
+            </a:avLst>
+          </a:prstGeom>
+          <a:solidFill>
+            <a:srgbClr val="D9695A"/>
+          </a:solidFill>
+          <a:ln w="19050">
             <a:solidFill>
               <a:srgbClr val="222222"/>
             </a:solidFill>
@@ -15481,14 +16226,14 @@
       </p:sp>
       <p:sp>
         <p:nvSpPr>
-          <p:cNvPr id="252" name="Text 250"/>
-          <p:cNvSpPr/>
-          <p:nvPr/>
-        </p:nvSpPr>
-        <p:spPr>
-          <a:xfrm>
-            <a:off x="7850981" y="3871210"/>
-            <a:ext cx="1324985" cy="222003"/>
+          <p:cNvPr id="273" name="Text 271"/>
+          <p:cNvSpPr/>
+          <p:nvPr/>
+        </p:nvSpPr>
+        <p:spPr>
+          <a:xfrm>
+            <a:off x="6887356" y="3788230"/>
+            <a:ext cx="361359" cy="125075"/>
           </a:xfrm>
           <a:prstGeom prst="rect">
             <a:avLst/>
@@ -15506,7 +16251,7 @@
               <a:buNone/>
             </a:pPr>
             <a:r>
-              <a:rPr lang="en-US" altLang="en-US" sz="800" b="1" dirty="0">
+              <a:rPr lang="en-US" altLang="en-US" sz="700" b="1" dirty="0">
                 <a:solidFill>
                   <a:srgbClr val="FFFFFF"/>
                 </a:solidFill>
@@ -15514,28 +16259,28 @@
                 <a:ea typeface="Calibri" pitchFamily="34" charset="-122"/>
                 <a:cs typeface="Calibri" pitchFamily="34" charset="-120"/>
               </a:rPr>
-              <a:t>10 d</a:t>
-            </a:r>
-            <a:endParaRPr lang="en-US" sz="800" dirty="0"/>
-          </a:p>
-        </p:txBody>
-      </p:sp>
-      <p:sp>
-        <p:nvSpPr>
-          <p:cNvPr id="253" name="Shape 251"/>
-          <p:cNvSpPr/>
-          <p:nvPr/>
-        </p:nvSpPr>
-        <p:spPr>
-          <a:xfrm>
-            <a:off x="365760" y="4184033"/>
-            <a:ext cx="11460175" cy="403642"/>
-          </a:xfrm>
-          <a:prstGeom prst="rect">
-            <a:avLst/>
-          </a:prstGeom>
-          <a:solidFill>
-            <a:srgbClr val="FFFFFF"/>
+              <a:t>3 d</a:t>
+            </a:r>
+            <a:endParaRPr lang="en-US" sz="700" dirty="0"/>
+          </a:p>
+        </p:txBody>
+      </p:sp>
+      <p:sp>
+        <p:nvSpPr>
+          <p:cNvPr id="274" name="Shape 272"/>
+          <p:cNvSpPr/>
+          <p:nvPr/>
+        </p:nvSpPr>
+        <p:spPr>
+          <a:xfrm>
+            <a:off x="365760" y="3958590"/>
+            <a:ext cx="11460175" cy="215646"/>
+          </a:xfrm>
+          <a:prstGeom prst="rect">
+            <a:avLst/>
+          </a:prstGeom>
+          <a:solidFill>
+            <a:srgbClr val="F6F9FA"/>
           </a:solidFill>
           <a:ln w="6350">
             <a:solidFill>
@@ -15547,297 +16292,299 @@
       </p:sp>
       <p:sp>
         <p:nvSpPr>
-          <p:cNvPr id="254" name="Shape 252"/>
-          <p:cNvSpPr/>
-          <p:nvPr/>
-        </p:nvSpPr>
-        <p:spPr>
-          <a:xfrm>
-            <a:off x="420624" y="4248694"/>
-            <a:ext cx="274320" cy="274320"/>
-          </a:xfrm>
-          <a:prstGeom prst="ellipse">
-            <a:avLst/>
-          </a:prstGeom>
-          <a:solidFill>
-            <a:srgbClr val="00778B"/>
-          </a:solidFill>
-          <a:ln w="6350">
-            <a:solidFill>
-              <a:srgbClr val="00778B"/>
-            </a:solidFill>
-            <a:prstDash val="solid"/>
-          </a:ln>
-        </p:spPr>
-      </p:sp>
-      <p:sp>
-        <p:nvSpPr>
-          <p:cNvPr id="255" name="Text 253"/>
-          <p:cNvSpPr/>
-          <p:nvPr/>
-        </p:nvSpPr>
-        <p:spPr>
-          <a:xfrm>
-            <a:off x="365760" y="4184033"/>
-            <a:ext cx="384048" cy="403642"/>
-          </a:xfrm>
-          <a:prstGeom prst="rect">
-            <a:avLst/>
-          </a:prstGeom>
-          <a:noFill/>
-          <a:ln/>
-        </p:spPr>
-        <p:txBody>
-          <a:bodyPr wrap="square" lIns="0" tIns="0" rIns="0" bIns="0" rtlCol="0" anchor="ctr">
-            <a:normAutofit/>
-          </a:bodyPr>
-          <a:lstStyle/>
-          <a:p>
-            <a:pPr algn="ctr" indent="0" marL="0">
-              <a:buNone/>
-            </a:pPr>
-            <a:r>
-              <a:rPr lang="en-US" altLang="en-US" sz="900" b="1" dirty="0">
-                <a:solidFill>
-                  <a:srgbClr val="FFFFFF"/>
-                </a:solidFill>
-                <a:latin typeface="Calibri" pitchFamily="34" charset="0"/>
-                <a:ea typeface="Calibri" pitchFamily="34" charset="-122"/>
-                <a:cs typeface="Calibri" pitchFamily="34" charset="-120"/>
-              </a:rPr>
-              <a:t>E</a:t>
-            </a:r>
-            <a:endParaRPr lang="en-US" sz="900" dirty="0"/>
-          </a:p>
-        </p:txBody>
-      </p:sp>
-      <p:sp>
-        <p:nvSpPr>
-          <p:cNvPr id="256" name="Text 254"/>
-          <p:cNvSpPr/>
-          <p:nvPr/>
-        </p:nvSpPr>
-        <p:spPr>
-          <a:xfrm>
-            <a:off x="822960" y="4184033"/>
-            <a:ext cx="2606040" cy="403642"/>
-          </a:xfrm>
-          <a:prstGeom prst="rect">
-            <a:avLst/>
-          </a:prstGeom>
-          <a:noFill/>
-          <a:ln/>
-        </p:spPr>
-        <p:txBody>
-          <a:bodyPr wrap="square" lIns="0" tIns="0" rIns="0" bIns="0" rtlCol="0" anchor="ctr">
-            <a:normAutofit/>
-          </a:bodyPr>
-          <a:lstStyle/>
-          <a:p>
-            <a:pPr algn="l" indent="0" marL="0">
-              <a:buNone/>
-            </a:pPr>
-            <a:r>
-              <a:rPr lang="en-US" altLang="en-US" sz="900" dirty="0">
-                <a:solidFill>
-                  <a:srgbClr val="222222"/>
-                </a:solidFill>
-                <a:latin typeface="Calibri" pitchFamily="34" charset="0"/>
-                <a:ea typeface="Calibri" pitchFamily="34" charset="-122"/>
-                <a:cs typeface="Calibri" pitchFamily="34" charset="-120"/>
-              </a:rPr>
-              <a:t>Pit wall – reinforcement, formwork &amp; concrete</a:t>
-            </a:r>
-            <a:endParaRPr lang="en-US" sz="900" dirty="0"/>
-          </a:p>
-        </p:txBody>
-      </p:sp>
-      <p:sp>
-        <p:nvSpPr>
-          <p:cNvPr id="257" name="Text 255"/>
-          <p:cNvSpPr/>
-          <p:nvPr/>
-        </p:nvSpPr>
-        <p:spPr>
-          <a:xfrm>
-            <a:off x="3447288" y="4184033"/>
-            <a:ext cx="777240" cy="403642"/>
-          </a:xfrm>
-          <a:prstGeom prst="rect">
-            <a:avLst/>
-          </a:prstGeom>
-          <a:noFill/>
-          <a:ln/>
-        </p:spPr>
-        <p:txBody>
-          <a:bodyPr wrap="square" lIns="0" tIns="0" rIns="0" bIns="0" rtlCol="0" anchor="ctr">
-            <a:normAutofit/>
-          </a:bodyPr>
-          <a:lstStyle/>
-          <a:p>
-            <a:pPr algn="ctr" indent="0" marL="0">
-              <a:buNone/>
-            </a:pPr>
-            <a:r>
-              <a:rPr lang="en-US" altLang="en-US" sz="850" dirty="0">
-                <a:solidFill>
-                  <a:srgbClr val="444444"/>
-                </a:solidFill>
-                <a:latin typeface="Calibri" pitchFamily="34" charset="0"/>
-                <a:ea typeface="Calibri" pitchFamily="34" charset="-122"/>
-                <a:cs typeface="Calibri" pitchFamily="34" charset="-120"/>
-              </a:rPr>
-              <a:t>D · FS</a:t>
-            </a:r>
-            <a:endParaRPr lang="en-US" sz="850" dirty="0"/>
-          </a:p>
-        </p:txBody>
-      </p:sp>
-      <p:sp>
-        <p:nvSpPr>
-          <p:cNvPr id="258" name="Text 256"/>
-          <p:cNvSpPr/>
-          <p:nvPr/>
-        </p:nvSpPr>
-        <p:spPr>
-          <a:xfrm>
-            <a:off x="4224528" y="4184033"/>
-            <a:ext cx="502920" cy="403642"/>
-          </a:xfrm>
-          <a:prstGeom prst="rect">
-            <a:avLst/>
-          </a:prstGeom>
-          <a:noFill/>
-          <a:ln/>
-        </p:spPr>
-        <p:txBody>
-          <a:bodyPr wrap="square" lIns="0" tIns="0" rIns="0" bIns="0" rtlCol="0" anchor="ctr">
-            <a:normAutofit/>
-          </a:bodyPr>
-          <a:lstStyle/>
-          <a:p>
-            <a:pPr algn="ctr" indent="0" marL="0">
-              <a:buNone/>
-            </a:pPr>
-            <a:r>
-              <a:rPr lang="en-US" altLang="en-US" sz="1100" b="1" dirty="0">
-                <a:solidFill>
-                  <a:srgbClr val="222222"/>
-                </a:solidFill>
-                <a:latin typeface="Calibri" pitchFamily="34" charset="0"/>
-                <a:ea typeface="Calibri" pitchFamily="34" charset="-122"/>
-                <a:cs typeface="Calibri" pitchFamily="34" charset="-120"/>
-              </a:rPr>
-              <a:t>6</a:t>
-            </a:r>
-            <a:endParaRPr lang="en-US" sz="1100" dirty="0"/>
-          </a:p>
-        </p:txBody>
-      </p:sp>
-      <p:sp>
-        <p:nvSpPr>
-          <p:cNvPr id="259" name="Text 257"/>
-          <p:cNvSpPr/>
-          <p:nvPr/>
-        </p:nvSpPr>
-        <p:spPr>
-          <a:xfrm>
-            <a:off x="4727448" y="4184033"/>
-            <a:ext cx="658368" cy="403642"/>
-          </a:xfrm>
-          <a:prstGeom prst="rect">
-            <a:avLst/>
-          </a:prstGeom>
-          <a:noFill/>
-          <a:ln/>
-        </p:spPr>
-        <p:txBody>
-          <a:bodyPr wrap="square" lIns="0" tIns="0" rIns="0" bIns="0" rtlCol="0" anchor="ctr">
-            <a:normAutofit/>
-          </a:bodyPr>
-          <a:lstStyle/>
-          <a:p>
-            <a:pPr algn="ctr" indent="0" marL="0">
-              <a:buNone/>
-            </a:pPr>
-            <a:r>
-              <a:rPr lang="en-US" altLang="en-US" sz="850" b="1" dirty="0">
-                <a:solidFill>
-                  <a:srgbClr val="222222"/>
-                </a:solidFill>
-                <a:latin typeface="Calibri" pitchFamily="34" charset="0"/>
-                <a:ea typeface="Calibri" pitchFamily="34" charset="-122"/>
-                <a:cs typeface="Calibri" pitchFamily="34" charset="-120"/>
-              </a:rPr>
-              <a:t>5 Nov</a:t>
-            </a:r>
-            <a:endParaRPr lang="en-US" sz="850" dirty="0"/>
-          </a:p>
-        </p:txBody>
-      </p:sp>
-      <p:sp>
-        <p:nvSpPr>
-          <p:cNvPr id="260" name="Text 258"/>
-          <p:cNvSpPr/>
-          <p:nvPr/>
-        </p:nvSpPr>
-        <p:spPr>
-          <a:xfrm>
-            <a:off x="5385816" y="4184033"/>
-            <a:ext cx="658368" cy="403642"/>
-          </a:xfrm>
-          <a:prstGeom prst="rect">
-            <a:avLst/>
-          </a:prstGeom>
-          <a:noFill/>
-          <a:ln/>
-        </p:spPr>
-        <p:txBody>
-          <a:bodyPr wrap="square" lIns="0" tIns="0" rIns="0" bIns="0" rtlCol="0" anchor="ctr">
-            <a:normAutofit/>
-          </a:bodyPr>
-          <a:lstStyle/>
-          <a:p>
-            <a:pPr algn="ctr" indent="0" marL="0">
-              <a:buNone/>
-            </a:pPr>
-            <a:r>
-              <a:rPr lang="en-US" altLang="en-US" sz="850" b="1" dirty="0">
-                <a:solidFill>
-                  <a:srgbClr val="222222"/>
-                </a:solidFill>
-                <a:latin typeface="Calibri" pitchFamily="34" charset="0"/>
-                <a:ea typeface="Calibri" pitchFamily="34" charset="-122"/>
-                <a:cs typeface="Calibri" pitchFamily="34" charset="-120"/>
-              </a:rPr>
-              <a:t>11 Nov</a:t>
-            </a:r>
-            <a:endParaRPr lang="en-US" sz="850" dirty="0"/>
-          </a:p>
-        </p:txBody>
-      </p:sp>
-      <p:sp>
-        <p:nvSpPr>
-          <p:cNvPr id="261" name="Shape 259"/>
-          <p:cNvSpPr/>
-          <p:nvPr/>
-        </p:nvSpPr>
-        <p:spPr>
-          <a:xfrm>
-            <a:off x="9175966" y="4274853"/>
-            <a:ext cx="843172" cy="222003"/>
+          <p:cNvPr id="275" name="Shape 273"/>
+          <p:cNvSpPr/>
+          <p:nvPr/>
+        </p:nvSpPr>
+        <p:spPr>
+          <a:xfrm>
+            <a:off x="420624" y="3988689"/>
+            <a:ext cx="329184" cy="155448"/>
           </a:xfrm>
           <a:prstGeom prst="roundRect">
             <a:avLst>
-              <a:gd name="adj" fmla="val 20594"/>
+              <a:gd name="adj" fmla="val 50000"/>
             </a:avLst>
           </a:prstGeom>
           <a:solidFill>
-            <a:srgbClr val="00778B"/>
-          </a:solidFill>
-          <a:ln w="6350">
-            <a:solidFill>
-              <a:srgbClr val="00778B"/>
+            <a:srgbClr val="D9695A"/>
+          </a:solidFill>
+          <a:ln w="19050">
+            <a:solidFill>
+              <a:srgbClr val="222222"/>
+            </a:solidFill>
+            <a:prstDash val="solid"/>
+          </a:ln>
+        </p:spPr>
+      </p:sp>
+      <p:sp>
+        <p:nvSpPr>
+          <p:cNvPr id="276" name="Text 274"/>
+          <p:cNvSpPr/>
+          <p:nvPr/>
+        </p:nvSpPr>
+        <p:spPr>
+          <a:xfrm>
+            <a:off x="393192" y="3958590"/>
+            <a:ext cx="384048" cy="215646"/>
+          </a:xfrm>
+          <a:prstGeom prst="rect">
+            <a:avLst/>
+          </a:prstGeom>
+          <a:noFill/>
+          <a:ln/>
+        </p:spPr>
+        <p:txBody>
+          <a:bodyPr wrap="square" lIns="0" tIns="0" rIns="0" bIns="0" rtlCol="0" anchor="ctr">
+            <a:normAutofit/>
+          </a:bodyPr>
+          <a:lstStyle/>
+          <a:p>
+            <a:pPr algn="ctr" indent="0" marL="0">
+              <a:buNone/>
+            </a:pPr>
+            <a:r>
+              <a:rPr lang="en-US" altLang="en-US" sz="650" b="1" dirty="0">
+                <a:solidFill>
+                  <a:srgbClr val="FFFFFF"/>
+                </a:solidFill>
+                <a:latin typeface="Calibri" pitchFamily="34" charset="0"/>
+                <a:ea typeface="Calibri" pitchFamily="34" charset="-122"/>
+                <a:cs typeface="Calibri" pitchFamily="34" charset="-120"/>
+              </a:rPr>
+              <a:t>A.5</a:t>
+            </a:r>
+            <a:endParaRPr lang="en-US" sz="650" dirty="0"/>
+          </a:p>
+        </p:txBody>
+      </p:sp>
+      <p:sp>
+        <p:nvSpPr>
+          <p:cNvPr id="277" name="Text 275"/>
+          <p:cNvSpPr/>
+          <p:nvPr/>
+        </p:nvSpPr>
+        <p:spPr>
+          <a:xfrm>
+            <a:off x="987552" y="3958590"/>
+            <a:ext cx="2441448" cy="215646"/>
+          </a:xfrm>
+          <a:prstGeom prst="rect">
+            <a:avLst/>
+          </a:prstGeom>
+          <a:noFill/>
+          <a:ln/>
+        </p:spPr>
+        <p:txBody>
+          <a:bodyPr wrap="square" lIns="0" tIns="0" rIns="0" bIns="0" rtlCol="0" anchor="ctr">
+            <a:normAutofit/>
+          </a:bodyPr>
+          <a:lstStyle/>
+          <a:p>
+            <a:pPr algn="l" indent="0" marL="0">
+              <a:buNone/>
+            </a:pPr>
+            <a:r>
+              <a:rPr lang="en-US" altLang="en-US" sz="700" dirty="0">
+                <a:solidFill>
+                  <a:srgbClr val="222222"/>
+                </a:solidFill>
+                <a:latin typeface="Calibri" pitchFamily="34" charset="0"/>
+                <a:ea typeface="Calibri" pitchFamily="34" charset="-122"/>
+                <a:cs typeface="Calibri" pitchFamily="34" charset="-120"/>
+              </a:rPr>
+              <a:t>Corrugated sheets installation / insertion</a:t>
+            </a:r>
+            <a:endParaRPr lang="en-US" sz="700" dirty="0"/>
+          </a:p>
+        </p:txBody>
+      </p:sp>
+      <p:sp>
+        <p:nvSpPr>
+          <p:cNvPr id="278" name="Text 276"/>
+          <p:cNvSpPr/>
+          <p:nvPr/>
+        </p:nvSpPr>
+        <p:spPr>
+          <a:xfrm>
+            <a:off x="3447288" y="3958590"/>
+            <a:ext cx="777240" cy="215646"/>
+          </a:xfrm>
+          <a:prstGeom prst="rect">
+            <a:avLst/>
+          </a:prstGeom>
+          <a:noFill/>
+          <a:ln/>
+        </p:spPr>
+        <p:txBody>
+          <a:bodyPr wrap="square" lIns="0" tIns="0" rIns="0" bIns="0" rtlCol="0" anchor="ctr">
+            <a:normAutofit/>
+          </a:bodyPr>
+          <a:lstStyle/>
+          <a:p>
+            <a:pPr algn="ctr" indent="0" marL="0">
+              <a:buNone/>
+            </a:pPr>
+            <a:r>
+              <a:rPr lang="en-US" altLang="en-US" sz="700" dirty="0">
+                <a:solidFill>
+                  <a:srgbClr val="444444"/>
+                </a:solidFill>
+                <a:latin typeface="Calibri" pitchFamily="34" charset="0"/>
+                <a:ea typeface="Calibri" pitchFamily="34" charset="-122"/>
+                <a:cs typeface="Calibri" pitchFamily="34" charset="-120"/>
+              </a:rPr>
+              <a:t>A4 · SS +1</a:t>
+            </a:r>
+            <a:endParaRPr lang="en-US" sz="700" dirty="0"/>
+          </a:p>
+        </p:txBody>
+      </p:sp>
+      <p:sp>
+        <p:nvSpPr>
+          <p:cNvPr id="279" name="Text 277"/>
+          <p:cNvSpPr/>
+          <p:nvPr/>
+        </p:nvSpPr>
+        <p:spPr>
+          <a:xfrm>
+            <a:off x="4224528" y="3958590"/>
+            <a:ext cx="502920" cy="215646"/>
+          </a:xfrm>
+          <a:prstGeom prst="rect">
+            <a:avLst/>
+          </a:prstGeom>
+          <a:noFill/>
+          <a:ln/>
+        </p:spPr>
+        <p:txBody>
+          <a:bodyPr wrap="square" lIns="0" tIns="0" rIns="0" bIns="0" rtlCol="0" anchor="ctr">
+            <a:normAutofit/>
+          </a:bodyPr>
+          <a:lstStyle/>
+          <a:p>
+            <a:pPr algn="ctr" indent="0" marL="0">
+              <a:buNone/>
+            </a:pPr>
+            <a:r>
+              <a:rPr lang="en-US" altLang="en-US" sz="900" b="1" dirty="0">
+                <a:solidFill>
+                  <a:srgbClr val="222222"/>
+                </a:solidFill>
+                <a:latin typeface="Calibri" pitchFamily="34" charset="0"/>
+                <a:ea typeface="Calibri" pitchFamily="34" charset="-122"/>
+                <a:cs typeface="Calibri" pitchFamily="34" charset="-120"/>
+              </a:rPr>
+              <a:t>2</a:t>
+            </a:r>
+            <a:endParaRPr lang="en-US" sz="900" dirty="0"/>
+          </a:p>
+        </p:txBody>
+      </p:sp>
+      <p:sp>
+        <p:nvSpPr>
+          <p:cNvPr id="280" name="Text 278"/>
+          <p:cNvSpPr/>
+          <p:nvPr/>
+        </p:nvSpPr>
+        <p:spPr>
+          <a:xfrm>
+            <a:off x="4727448" y="3958590"/>
+            <a:ext cx="658368" cy="215646"/>
+          </a:xfrm>
+          <a:prstGeom prst="rect">
+            <a:avLst/>
+          </a:prstGeom>
+          <a:noFill/>
+          <a:ln/>
+        </p:spPr>
+        <p:txBody>
+          <a:bodyPr wrap="square" lIns="0" tIns="0" rIns="0" bIns="0" rtlCol="0" anchor="ctr">
+            <a:normAutofit/>
+          </a:bodyPr>
+          <a:lstStyle/>
+          <a:p>
+            <a:pPr algn="ctr" indent="0" marL="0">
+              <a:buNone/>
+            </a:pPr>
+            <a:r>
+              <a:rPr lang="en-US" altLang="en-US" sz="700" b="1" dirty="0">
+                <a:solidFill>
+                  <a:srgbClr val="222222"/>
+                </a:solidFill>
+                <a:latin typeface="Calibri" pitchFamily="34" charset="0"/>
+                <a:ea typeface="Calibri" pitchFamily="34" charset="-122"/>
+                <a:cs typeface="Calibri" pitchFamily="34" charset="-120"/>
+              </a:rPr>
+              <a:t>18 Oct</a:t>
+            </a:r>
+            <a:endParaRPr lang="en-US" sz="700" dirty="0"/>
+          </a:p>
+        </p:txBody>
+      </p:sp>
+      <p:sp>
+        <p:nvSpPr>
+          <p:cNvPr id="281" name="Text 279"/>
+          <p:cNvSpPr/>
+          <p:nvPr/>
+        </p:nvSpPr>
+        <p:spPr>
+          <a:xfrm>
+            <a:off x="5385816" y="3958590"/>
+            <a:ext cx="658368" cy="215646"/>
+          </a:xfrm>
+          <a:prstGeom prst="rect">
+            <a:avLst/>
+          </a:prstGeom>
+          <a:noFill/>
+          <a:ln/>
+        </p:spPr>
+        <p:txBody>
+          <a:bodyPr wrap="square" lIns="0" tIns="0" rIns="0" bIns="0" rtlCol="0" anchor="ctr">
+            <a:normAutofit/>
+          </a:bodyPr>
+          <a:lstStyle/>
+          <a:p>
+            <a:pPr algn="ctr" indent="0" marL="0">
+              <a:buNone/>
+            </a:pPr>
+            <a:r>
+              <a:rPr lang="en-US" altLang="en-US" sz="700" b="1" dirty="0">
+                <a:solidFill>
+                  <a:srgbClr val="222222"/>
+                </a:solidFill>
+                <a:latin typeface="Calibri" pitchFamily="34" charset="0"/>
+                <a:ea typeface="Calibri" pitchFamily="34" charset="-122"/>
+                <a:cs typeface="Calibri" pitchFamily="34" charset="-120"/>
+              </a:rPr>
+              <a:t>19 Oct</a:t>
+            </a:r>
+            <a:endParaRPr lang="en-US" sz="700" dirty="0"/>
+          </a:p>
+        </p:txBody>
+      </p:sp>
+      <p:sp>
+        <p:nvSpPr>
+          <p:cNvPr id="282" name="Shape 280"/>
+          <p:cNvSpPr/>
+          <p:nvPr/>
+        </p:nvSpPr>
+        <p:spPr>
+          <a:xfrm>
+            <a:off x="7007809" y="4003876"/>
+            <a:ext cx="240906" cy="125075"/>
+          </a:xfrm>
+          <a:prstGeom prst="roundRect">
+            <a:avLst>
+              <a:gd name="adj" fmla="val 29243"/>
+            </a:avLst>
+          </a:prstGeom>
+          <a:solidFill>
+            <a:srgbClr val="D9695A"/>
+          </a:solidFill>
+          <a:ln w="19050">
+            <a:solidFill>
+              <a:srgbClr val="222222"/>
             </a:solidFill>
             <a:prstDash val="solid"/>
           </a:ln>
@@ -15852,14 +16599,66 @@
       </p:sp>
       <p:sp>
         <p:nvSpPr>
-          <p:cNvPr id="262" name="Text 260"/>
-          <p:cNvSpPr/>
-          <p:nvPr/>
-        </p:nvSpPr>
-        <p:spPr>
-          <a:xfrm>
-            <a:off x="9175966" y="4274853"/>
-            <a:ext cx="843172" cy="222003"/>
+          <p:cNvPr id="283" name="Shape 281"/>
+          <p:cNvSpPr/>
+          <p:nvPr/>
+        </p:nvSpPr>
+        <p:spPr>
+          <a:xfrm>
+            <a:off x="365760" y="4174236"/>
+            <a:ext cx="11460175" cy="215646"/>
+          </a:xfrm>
+          <a:prstGeom prst="rect">
+            <a:avLst/>
+          </a:prstGeom>
+          <a:solidFill>
+            <a:srgbClr val="FFFFFF"/>
+          </a:solidFill>
+          <a:ln w="6350">
+            <a:solidFill>
+              <a:srgbClr val="DFE6EA"/>
+            </a:solidFill>
+            <a:prstDash val="solid"/>
+          </a:ln>
+        </p:spPr>
+      </p:sp>
+      <p:sp>
+        <p:nvSpPr>
+          <p:cNvPr id="284" name="Shape 282"/>
+          <p:cNvSpPr/>
+          <p:nvPr/>
+        </p:nvSpPr>
+        <p:spPr>
+          <a:xfrm>
+            <a:off x="438912" y="4163187"/>
+            <a:ext cx="237744" cy="237744"/>
+          </a:xfrm>
+          <a:prstGeom prst="ellipse">
+            <a:avLst>
+              <a:gd name="adj" fmla="val 32692"/>
+            </a:avLst>
+          </a:prstGeom>
+          <a:solidFill>
+            <a:srgbClr val="00778B"/>
+          </a:solidFill>
+          <a:ln w="6350">
+            <a:solidFill>
+              <a:srgbClr val="00778B"/>
+            </a:solidFill>
+            <a:prstDash val="solid"/>
+          </a:ln>
+        </p:spPr>
+      </p:sp>
+      <p:sp>
+        <p:nvSpPr>
+          <p:cNvPr id="285" name="Text 283"/>
+          <p:cNvSpPr/>
+          <p:nvPr/>
+        </p:nvSpPr>
+        <p:spPr>
+          <a:xfrm>
+            <a:off x="365760" y="4174236"/>
+            <a:ext cx="384048" cy="215646"/>
           </a:xfrm>
           <a:prstGeom prst="rect">
             <a:avLst/>
@@ -15877,7 +16676,7 @@
               <a:buNone/>
             </a:pPr>
             <a:r>
-              <a:rPr lang="en-US" altLang="en-US" sz="800" b="1" dirty="0">
+              <a:rPr lang="en-US" altLang="en-US" sz="850" b="1" dirty="0">
                 <a:solidFill>
                   <a:srgbClr val="FFFFFF"/>
                 </a:solidFill>
@@ -15885,72 +16684,63 @@
                 <a:ea typeface="Calibri" pitchFamily="34" charset="-122"/>
                 <a:cs typeface="Calibri" pitchFamily="34" charset="-120"/>
               </a:rPr>
-              <a:t>6 d</a:t>
-            </a:r>
-            <a:endParaRPr lang="en-US" sz="800" dirty="0"/>
-          </a:p>
-        </p:txBody>
-      </p:sp>
-      <p:sp>
-        <p:nvSpPr>
-          <p:cNvPr id="263" name="Shape 261"/>
-          <p:cNvSpPr/>
-          <p:nvPr/>
-        </p:nvSpPr>
-        <p:spPr>
-          <a:xfrm>
-            <a:off x="365760" y="4587675"/>
-            <a:ext cx="11460175" cy="403642"/>
-          </a:xfrm>
-          <a:prstGeom prst="rect">
-            <a:avLst/>
-          </a:prstGeom>
-          <a:solidFill>
-            <a:srgbClr val="F6F9FA"/>
-          </a:solidFill>
-          <a:ln w="6350">
-            <a:solidFill>
-              <a:srgbClr val="DFE6EA"/>
-            </a:solidFill>
-            <a:prstDash val="solid"/>
-          </a:ln>
-        </p:spPr>
-      </p:sp>
-      <p:sp>
-        <p:nvSpPr>
-          <p:cNvPr id="264" name="Shape 262"/>
-          <p:cNvSpPr/>
-          <p:nvPr/>
-        </p:nvSpPr>
-        <p:spPr>
-          <a:xfrm>
-            <a:off x="420624" y="4652337"/>
-            <a:ext cx="274320" cy="274320"/>
-          </a:xfrm>
-          <a:prstGeom prst="ellipse">
-            <a:avLst/>
-          </a:prstGeom>
-          <a:solidFill>
-            <a:srgbClr val="2E9E6B"/>
-          </a:solidFill>
-          <a:ln w="25400">
-            <a:solidFill>
-              <a:srgbClr val="222222"/>
-            </a:solidFill>
-            <a:prstDash val="solid"/>
-          </a:ln>
-        </p:spPr>
-      </p:sp>
-      <p:sp>
-        <p:nvSpPr>
-          <p:cNvPr id="265" name="Text 263"/>
-          <p:cNvSpPr/>
-          <p:nvPr/>
-        </p:nvSpPr>
-        <p:spPr>
-          <a:xfrm>
-            <a:off x="365760" y="4587675"/>
-            <a:ext cx="384048" cy="403642"/>
+              <a:t>B</a:t>
+            </a:r>
+            <a:endParaRPr lang="en-US" sz="850" dirty="0"/>
+          </a:p>
+        </p:txBody>
+      </p:sp>
+      <p:sp>
+        <p:nvSpPr>
+          <p:cNvPr id="286" name="Text 284"/>
+          <p:cNvSpPr/>
+          <p:nvPr/>
+        </p:nvSpPr>
+        <p:spPr>
+          <a:xfrm>
+            <a:off x="822960" y="4174236"/>
+            <a:ext cx="2606040" cy="215646"/>
+          </a:xfrm>
+          <a:prstGeom prst="rect">
+            <a:avLst/>
+          </a:prstGeom>
+          <a:noFill/>
+          <a:ln/>
+        </p:spPr>
+        <p:txBody>
+          <a:bodyPr wrap="square" lIns="0" tIns="0" rIns="0" bIns="0" rtlCol="0" anchor="ctr">
+            <a:normAutofit/>
+          </a:bodyPr>
+          <a:lstStyle/>
+          <a:p>
+            <a:pPr algn="l" indent="0" marL="0">
+              <a:buNone/>
+            </a:pPr>
+            <a:r>
+              <a:rPr lang="en-US" altLang="en-US" sz="750" b="1" dirty="0">
+                <a:solidFill>
+                  <a:srgbClr val="222222"/>
+                </a:solidFill>
+                <a:latin typeface="Calibri" pitchFamily="34" charset="0"/>
+                <a:ea typeface="Calibri" pitchFamily="34" charset="-122"/>
+                <a:cs typeface="Calibri" pitchFamily="34" charset="-120"/>
+              </a:rPr>
+              <a:t>Lean concrete</a:t>
+            </a:r>
+            <a:endParaRPr lang="en-US" sz="750" dirty="0"/>
+          </a:p>
+        </p:txBody>
+      </p:sp>
+      <p:sp>
+        <p:nvSpPr>
+          <p:cNvPr id="287" name="Text 285"/>
+          <p:cNvSpPr/>
+          <p:nvPr/>
+        </p:nvSpPr>
+        <p:spPr>
+          <a:xfrm>
+            <a:off x="3447288" y="4174236"/>
+            <a:ext cx="777240" cy="215646"/>
           </a:xfrm>
           <a:prstGeom prst="rect">
             <a:avLst/>
@@ -15968,15 +16758,56 @@
               <a:buNone/>
             </a:pPr>
             <a:r>
+              <a:rPr lang="en-US" altLang="en-US" sz="700" dirty="0">
+                <a:solidFill>
+                  <a:srgbClr val="444444"/>
+                </a:solidFill>
+                <a:latin typeface="Calibri" pitchFamily="34" charset="0"/>
+                <a:ea typeface="Calibri" pitchFamily="34" charset="-122"/>
+                <a:cs typeface="Calibri" pitchFamily="34" charset="-120"/>
+              </a:rPr>
+              <a:t>A · SS +6</a:t>
+            </a:r>
+            <a:endParaRPr lang="en-US" sz="700" dirty="0"/>
+          </a:p>
+        </p:txBody>
+      </p:sp>
+      <p:sp>
+        <p:nvSpPr>
+          <p:cNvPr id="288" name="Text 286"/>
+          <p:cNvSpPr/>
+          <p:nvPr/>
+        </p:nvSpPr>
+        <p:spPr>
+          <a:xfrm>
+            <a:off x="4224528" y="4174236"/>
+            <a:ext cx="502920" cy="215646"/>
+          </a:xfrm>
+          <a:prstGeom prst="rect">
+            <a:avLst/>
+          </a:prstGeom>
+          <a:noFill/>
+          <a:ln/>
+        </p:spPr>
+        <p:txBody>
+          <a:bodyPr wrap="square" lIns="0" tIns="0" rIns="0" bIns="0" rtlCol="0" anchor="ctr">
+            <a:normAutofit/>
+          </a:bodyPr>
+          <a:lstStyle/>
+          <a:p>
+            <a:pPr algn="ctr" indent="0" marL="0">
+              <a:buNone/>
+            </a:pPr>
+            <a:r>
               <a:rPr lang="en-US" altLang="en-US" sz="900" b="1" dirty="0">
                 <a:solidFill>
-                  <a:srgbClr val="FFFFFF"/>
-                </a:solidFill>
-                <a:latin typeface="Calibri" pitchFamily="34" charset="0"/>
-                <a:ea typeface="Calibri" pitchFamily="34" charset="-122"/>
-                <a:cs typeface="Calibri" pitchFamily="34" charset="-120"/>
-              </a:rPr>
-              <a:t>F</a:t>
+                  <a:srgbClr val="222222"/>
+                </a:solidFill>
+                <a:latin typeface="Calibri" pitchFamily="34" charset="0"/>
+                <a:ea typeface="Calibri" pitchFamily="34" charset="-122"/>
+                <a:cs typeface="Calibri" pitchFamily="34" charset="-120"/>
+              </a:rPr>
+              <a:t>2</a:t>
             </a:r>
             <a:endParaRPr lang="en-US" sz="900" dirty="0"/>
           </a:p>
@@ -15984,32 +16815,32 @@
       </p:sp>
       <p:sp>
         <p:nvSpPr>
-          <p:cNvPr id="266" name="Text 264"/>
-          <p:cNvSpPr/>
-          <p:nvPr/>
-        </p:nvSpPr>
-        <p:spPr>
-          <a:xfrm>
-            <a:off x="822960" y="4587675"/>
-            <a:ext cx="2606040" cy="403642"/>
-          </a:xfrm>
-          <a:prstGeom prst="rect">
-            <a:avLst/>
-          </a:prstGeom>
-          <a:noFill/>
-          <a:ln/>
-        </p:spPr>
-        <p:txBody>
-          <a:bodyPr wrap="square" lIns="0" tIns="0" rIns="0" bIns="0" rtlCol="0" anchor="ctr">
-            <a:normAutofit/>
-          </a:bodyPr>
-          <a:lstStyle/>
-          <a:p>
-            <a:pPr algn="l" indent="0" marL="0">
-              <a:buNone/>
-            </a:pPr>
-            <a:r>
-              <a:rPr lang="en-US" altLang="en-US" sz="900" dirty="0">
+          <p:cNvPr id="289" name="Text 287"/>
+          <p:cNvSpPr/>
+          <p:nvPr/>
+        </p:nvSpPr>
+        <p:spPr>
+          <a:xfrm>
+            <a:off x="4727448" y="4174236"/>
+            <a:ext cx="658368" cy="215646"/>
+          </a:xfrm>
+          <a:prstGeom prst="rect">
+            <a:avLst/>
+          </a:prstGeom>
+          <a:noFill/>
+          <a:ln/>
+        </p:spPr>
+        <p:txBody>
+          <a:bodyPr wrap="square" lIns="0" tIns="0" rIns="0" bIns="0" rtlCol="0" anchor="ctr">
+            <a:normAutofit/>
+          </a:bodyPr>
+          <a:lstStyle/>
+          <a:p>
+            <a:pPr algn="ctr" indent="0" marL="0">
+              <a:buNone/>
+            </a:pPr>
+            <a:r>
+              <a:rPr lang="en-US" altLang="en-US" sz="700" b="1" dirty="0">
                 <a:solidFill>
                   <a:srgbClr val="222222"/>
                 </a:solidFill>
@@ -16017,22 +16848,22 @@
                 <a:ea typeface="Calibri" pitchFamily="34" charset="-122"/>
                 <a:cs typeface="Calibri" pitchFamily="34" charset="-120"/>
               </a:rPr>
-              <a:t>Building foundation – excavation, compaction / testing, reinforcement &amp; concrete</a:t>
-            </a:r>
-            <a:endParaRPr lang="en-US" sz="900" dirty="0"/>
-          </a:p>
-        </p:txBody>
-      </p:sp>
-      <p:sp>
-        <p:nvSpPr>
-          <p:cNvPr id="267" name="Text 265"/>
-          <p:cNvSpPr/>
-          <p:nvPr/>
-        </p:nvSpPr>
-        <p:spPr>
-          <a:xfrm>
-            <a:off x="3447288" y="4587675"/>
-            <a:ext cx="777240" cy="403642"/>
+              <a:t>20 Oct</a:t>
+            </a:r>
+            <a:endParaRPr lang="en-US" sz="700" dirty="0"/>
+          </a:p>
+        </p:txBody>
+      </p:sp>
+      <p:sp>
+        <p:nvSpPr>
+          <p:cNvPr id="290" name="Text 288"/>
+          <p:cNvSpPr/>
+          <p:nvPr/>
+        </p:nvSpPr>
+        <p:spPr>
+          <a:xfrm>
+            <a:off x="5385816" y="4174236"/>
+            <a:ext cx="658368" cy="215646"/>
           </a:xfrm>
           <a:prstGeom prst="rect">
             <a:avLst/>
@@ -16050,48 +16881,7 @@
               <a:buNone/>
             </a:pPr>
             <a:r>
-              <a:rPr lang="en-US" altLang="en-US" sz="850" dirty="0">
-                <a:solidFill>
-                  <a:srgbClr val="444444"/>
-                </a:solidFill>
-                <a:latin typeface="Calibri" pitchFamily="34" charset="0"/>
-                <a:ea typeface="Calibri" pitchFamily="34" charset="-122"/>
-                <a:cs typeface="Calibri" pitchFamily="34" charset="-120"/>
-              </a:rPr>
-              <a:t>D · FS</a:t>
-            </a:r>
-            <a:endParaRPr lang="en-US" sz="850" dirty="0"/>
-          </a:p>
-        </p:txBody>
-      </p:sp>
-      <p:sp>
-        <p:nvSpPr>
-          <p:cNvPr id="268" name="Text 266"/>
-          <p:cNvSpPr/>
-          <p:nvPr/>
-        </p:nvSpPr>
-        <p:spPr>
-          <a:xfrm>
-            <a:off x="4224528" y="4587675"/>
-            <a:ext cx="502920" cy="403642"/>
-          </a:xfrm>
-          <a:prstGeom prst="rect">
-            <a:avLst/>
-          </a:prstGeom>
-          <a:noFill/>
-          <a:ln/>
-        </p:spPr>
-        <p:txBody>
-          <a:bodyPr wrap="square" lIns="0" tIns="0" rIns="0" bIns="0" rtlCol="0" anchor="ctr">
-            <a:normAutofit/>
-          </a:bodyPr>
-          <a:lstStyle/>
-          <a:p>
-            <a:pPr algn="ctr" indent="0" marL="0">
-              <a:buNone/>
-            </a:pPr>
-            <a:r>
-              <a:rPr lang="en-US" altLang="en-US" sz="1100" b="1" dirty="0">
+              <a:rPr lang="en-US" altLang="en-US" sz="700" b="1" dirty="0">
                 <a:solidFill>
                   <a:srgbClr val="222222"/>
                 </a:solidFill>
@@ -16099,116 +16889,34 @@
                 <a:ea typeface="Calibri" pitchFamily="34" charset="-122"/>
                 <a:cs typeface="Calibri" pitchFamily="34" charset="-120"/>
               </a:rPr>
-              <a:t>12</a:t>
-            </a:r>
-            <a:endParaRPr lang="en-US" sz="1100" dirty="0"/>
-          </a:p>
-        </p:txBody>
-      </p:sp>
-      <p:sp>
-        <p:nvSpPr>
-          <p:cNvPr id="269" name="Text 267"/>
-          <p:cNvSpPr/>
-          <p:nvPr/>
-        </p:nvSpPr>
-        <p:spPr>
-          <a:xfrm>
-            <a:off x="4727448" y="4587675"/>
-            <a:ext cx="658368" cy="403642"/>
-          </a:xfrm>
-          <a:prstGeom prst="rect">
-            <a:avLst/>
-          </a:prstGeom>
-          <a:noFill/>
-          <a:ln/>
-        </p:spPr>
-        <p:txBody>
-          <a:bodyPr wrap="square" lIns="0" tIns="0" rIns="0" bIns="0" rtlCol="0" anchor="ctr">
-            <a:normAutofit/>
-          </a:bodyPr>
-          <a:lstStyle/>
-          <a:p>
-            <a:pPr algn="ctr" indent="0" marL="0">
-              <a:buNone/>
-            </a:pPr>
-            <a:r>
-              <a:rPr lang="en-US" altLang="en-US" sz="850" b="1" dirty="0">
-                <a:solidFill>
-                  <a:srgbClr val="222222"/>
-                </a:solidFill>
-                <a:latin typeface="Calibri" pitchFamily="34" charset="0"/>
-                <a:ea typeface="Calibri" pitchFamily="34" charset="-122"/>
-                <a:cs typeface="Calibri" pitchFamily="34" charset="-120"/>
-              </a:rPr>
-              <a:t>5 Nov</a:t>
-            </a:r>
-            <a:endParaRPr lang="en-US" sz="850" dirty="0"/>
-          </a:p>
-        </p:txBody>
-      </p:sp>
-      <p:sp>
-        <p:nvSpPr>
-          <p:cNvPr id="270" name="Text 268"/>
-          <p:cNvSpPr/>
-          <p:nvPr/>
-        </p:nvSpPr>
-        <p:spPr>
-          <a:xfrm>
-            <a:off x="5385816" y="4587675"/>
-            <a:ext cx="658368" cy="403642"/>
-          </a:xfrm>
-          <a:prstGeom prst="rect">
-            <a:avLst/>
-          </a:prstGeom>
-          <a:noFill/>
-          <a:ln/>
-        </p:spPr>
-        <p:txBody>
-          <a:bodyPr wrap="square" lIns="0" tIns="0" rIns="0" bIns="0" rtlCol="0" anchor="ctr">
-            <a:normAutofit/>
-          </a:bodyPr>
-          <a:lstStyle/>
-          <a:p>
-            <a:pPr algn="ctr" indent="0" marL="0">
-              <a:buNone/>
-            </a:pPr>
-            <a:r>
-              <a:rPr lang="en-US" altLang="en-US" sz="850" b="1" dirty="0">
-                <a:solidFill>
-                  <a:srgbClr val="222222"/>
-                </a:solidFill>
-                <a:latin typeface="Calibri" pitchFamily="34" charset="0"/>
-                <a:ea typeface="Calibri" pitchFamily="34" charset="-122"/>
-                <a:cs typeface="Calibri" pitchFamily="34" charset="-120"/>
-              </a:rPr>
-              <a:t>18 Nov</a:t>
-            </a:r>
-            <a:endParaRPr lang="en-US" sz="850" dirty="0"/>
-          </a:p>
-        </p:txBody>
-      </p:sp>
-      <p:sp>
-        <p:nvSpPr>
-          <p:cNvPr id="271" name="Shape 269"/>
-          <p:cNvSpPr/>
-          <p:nvPr/>
-        </p:nvSpPr>
-        <p:spPr>
-          <a:xfrm>
-            <a:off x="9175966" y="4678495"/>
-            <a:ext cx="1686344" cy="222003"/>
+              <a:t>21 Oct</a:t>
+            </a:r>
+            <a:endParaRPr lang="en-US" sz="700" dirty="0"/>
+          </a:p>
+        </p:txBody>
+      </p:sp>
+      <p:sp>
+        <p:nvSpPr>
+          <p:cNvPr id="291" name="Shape 289"/>
+          <p:cNvSpPr/>
+          <p:nvPr/>
+        </p:nvSpPr>
+        <p:spPr>
+          <a:xfrm>
+            <a:off x="7248716" y="4219522"/>
+            <a:ext cx="240906" cy="125075"/>
           </a:xfrm>
           <a:prstGeom prst="roundRect">
             <a:avLst>
-              <a:gd name="adj" fmla="val 20594"/>
+              <a:gd name="adj" fmla="val 29243"/>
             </a:avLst>
           </a:prstGeom>
           <a:solidFill>
-            <a:srgbClr val="2E9E6B"/>
-          </a:solidFill>
-          <a:ln w="22225">
-            <a:solidFill>
-              <a:srgbClr val="222222"/>
+            <a:srgbClr val="00778B"/>
+          </a:solidFill>
+          <a:ln w="6350">
+            <a:solidFill>
+              <a:srgbClr val="00778B"/>
             </a:solidFill>
             <a:prstDash val="solid"/>
           </a:ln>
@@ -16223,14 +16931,66 @@
       </p:sp>
       <p:sp>
         <p:nvSpPr>
-          <p:cNvPr id="272" name="Text 270"/>
-          <p:cNvSpPr/>
-          <p:nvPr/>
-        </p:nvSpPr>
-        <p:spPr>
-          <a:xfrm>
-            <a:off x="9175966" y="4678495"/>
-            <a:ext cx="1686344" cy="222003"/>
+          <p:cNvPr id="292" name="Shape 290"/>
+          <p:cNvSpPr/>
+          <p:nvPr/>
+        </p:nvSpPr>
+        <p:spPr>
+          <a:xfrm>
+            <a:off x="365760" y="4389882"/>
+            <a:ext cx="11460175" cy="215646"/>
+          </a:xfrm>
+          <a:prstGeom prst="rect">
+            <a:avLst/>
+          </a:prstGeom>
+          <a:solidFill>
+            <a:srgbClr val="F6F9FA"/>
+          </a:solidFill>
+          <a:ln w="6350">
+            <a:solidFill>
+              <a:srgbClr val="DFE6EA"/>
+            </a:solidFill>
+            <a:prstDash val="solid"/>
+          </a:ln>
+        </p:spPr>
+      </p:sp>
+      <p:sp>
+        <p:nvSpPr>
+          <p:cNvPr id="293" name="Shape 291"/>
+          <p:cNvSpPr/>
+          <p:nvPr/>
+        </p:nvSpPr>
+        <p:spPr>
+          <a:xfrm>
+            <a:off x="438912" y="4378833"/>
+            <a:ext cx="237744" cy="237744"/>
+          </a:xfrm>
+          <a:prstGeom prst="ellipse">
+            <a:avLst>
+              <a:gd name="adj" fmla="val 32692"/>
+            </a:avLst>
+          </a:prstGeom>
+          <a:solidFill>
+            <a:srgbClr val="00778B"/>
+          </a:solidFill>
+          <a:ln w="19050">
+            <a:solidFill>
+              <a:srgbClr val="222222"/>
+            </a:solidFill>
+            <a:prstDash val="solid"/>
+          </a:ln>
+        </p:spPr>
+      </p:sp>
+      <p:sp>
+        <p:nvSpPr>
+          <p:cNvPr id="294" name="Text 292"/>
+          <p:cNvSpPr/>
+          <p:nvPr/>
+        </p:nvSpPr>
+        <p:spPr>
+          <a:xfrm>
+            <a:off x="365760" y="4389882"/>
+            <a:ext cx="384048" cy="215646"/>
           </a:xfrm>
           <a:prstGeom prst="rect">
             <a:avLst/>
@@ -16248,7 +17008,7 @@
               <a:buNone/>
             </a:pPr>
             <a:r>
-              <a:rPr lang="en-US" altLang="en-US" sz="800" b="1" dirty="0">
+              <a:rPr lang="en-US" altLang="en-US" sz="850" b="1" dirty="0">
                 <a:solidFill>
                   <a:srgbClr val="FFFFFF"/>
                 </a:solidFill>
@@ -16256,72 +17016,63 @@
                 <a:ea typeface="Calibri" pitchFamily="34" charset="-122"/>
                 <a:cs typeface="Calibri" pitchFamily="34" charset="-120"/>
               </a:rPr>
-              <a:t>12 d</a:t>
-            </a:r>
-            <a:endParaRPr lang="en-US" sz="800" dirty="0"/>
-          </a:p>
-        </p:txBody>
-      </p:sp>
-      <p:sp>
-        <p:nvSpPr>
-          <p:cNvPr id="273" name="Shape 271"/>
-          <p:cNvSpPr/>
-          <p:nvPr/>
-        </p:nvSpPr>
-        <p:spPr>
-          <a:xfrm>
-            <a:off x="365760" y="4991318"/>
-            <a:ext cx="11460175" cy="403642"/>
-          </a:xfrm>
-          <a:prstGeom prst="rect">
-            <a:avLst/>
-          </a:prstGeom>
-          <a:solidFill>
-            <a:srgbClr val="FFFFFF"/>
-          </a:solidFill>
-          <a:ln w="6350">
-            <a:solidFill>
-              <a:srgbClr val="DFE6EA"/>
-            </a:solidFill>
-            <a:prstDash val="solid"/>
-          </a:ln>
-        </p:spPr>
-      </p:sp>
-      <p:sp>
-        <p:nvSpPr>
-          <p:cNvPr id="274" name="Shape 272"/>
-          <p:cNvSpPr/>
-          <p:nvPr/>
-        </p:nvSpPr>
-        <p:spPr>
-          <a:xfrm>
-            <a:off x="420624" y="5055979"/>
-            <a:ext cx="274320" cy="274320"/>
-          </a:xfrm>
-          <a:prstGeom prst="ellipse">
-            <a:avLst/>
-          </a:prstGeom>
-          <a:solidFill>
-            <a:srgbClr val="D68A00"/>
-          </a:solidFill>
-          <a:ln w="25400">
-            <a:solidFill>
-              <a:srgbClr val="222222"/>
-            </a:solidFill>
-            <a:prstDash val="solid"/>
-          </a:ln>
-        </p:spPr>
-      </p:sp>
-      <p:sp>
-        <p:nvSpPr>
-          <p:cNvPr id="275" name="Text 273"/>
-          <p:cNvSpPr/>
-          <p:nvPr/>
-        </p:nvSpPr>
-        <p:spPr>
-          <a:xfrm>
-            <a:off x="365760" y="4991318"/>
-            <a:ext cx="384048" cy="403642"/>
+              <a:t>C</a:t>
+            </a:r>
+            <a:endParaRPr lang="en-US" sz="850" dirty="0"/>
+          </a:p>
+        </p:txBody>
+      </p:sp>
+      <p:sp>
+        <p:nvSpPr>
+          <p:cNvPr id="295" name="Text 293"/>
+          <p:cNvSpPr/>
+          <p:nvPr/>
+        </p:nvSpPr>
+        <p:spPr>
+          <a:xfrm>
+            <a:off x="822960" y="4389882"/>
+            <a:ext cx="2606040" cy="215646"/>
+          </a:xfrm>
+          <a:prstGeom prst="rect">
+            <a:avLst/>
+          </a:prstGeom>
+          <a:noFill/>
+          <a:ln/>
+        </p:spPr>
+        <p:txBody>
+          <a:bodyPr wrap="square" lIns="0" tIns="0" rIns="0" bIns="0" rtlCol="0" anchor="ctr">
+            <a:normAutofit/>
+          </a:bodyPr>
+          <a:lstStyle/>
+          <a:p>
+            <a:pPr algn="l" indent="0" marL="0">
+              <a:buNone/>
+            </a:pPr>
+            <a:r>
+              <a:rPr lang="en-US" altLang="en-US" sz="750" b="1" dirty="0">
+                <a:solidFill>
+                  <a:srgbClr val="222222"/>
+                </a:solidFill>
+                <a:latin typeface="Calibri" pitchFamily="34" charset="0"/>
+                <a:ea typeface="Calibri" pitchFamily="34" charset="-122"/>
+                <a:cs typeface="Calibri" pitchFamily="34" charset="-120"/>
+              </a:rPr>
+              <a:t>Pit trench – reinforcement, formwork &amp; concrete</a:t>
+            </a:r>
+            <a:endParaRPr lang="en-US" sz="750" dirty="0"/>
+          </a:p>
+        </p:txBody>
+      </p:sp>
+      <p:sp>
+        <p:nvSpPr>
+          <p:cNvPr id="296" name="Text 294"/>
+          <p:cNvSpPr/>
+          <p:nvPr/>
+        </p:nvSpPr>
+        <p:spPr>
+          <a:xfrm>
+            <a:off x="3447288" y="4389882"/>
+            <a:ext cx="777240" cy="215646"/>
           </a:xfrm>
           <a:prstGeom prst="rect">
             <a:avLst/>
@@ -16339,15 +17090,56 @@
               <a:buNone/>
             </a:pPr>
             <a:r>
+              <a:rPr lang="en-US" altLang="en-US" sz="700" dirty="0">
+                <a:solidFill>
+                  <a:srgbClr val="444444"/>
+                </a:solidFill>
+                <a:latin typeface="Calibri" pitchFamily="34" charset="0"/>
+                <a:ea typeface="Calibri" pitchFamily="34" charset="-122"/>
+                <a:cs typeface="Calibri" pitchFamily="34" charset="-120"/>
+              </a:rPr>
+              <a:t>A · FS</a:t>
+            </a:r>
+            <a:endParaRPr lang="en-US" sz="700" dirty="0"/>
+          </a:p>
+        </p:txBody>
+      </p:sp>
+      <p:sp>
+        <p:nvSpPr>
+          <p:cNvPr id="297" name="Text 295"/>
+          <p:cNvSpPr/>
+          <p:nvPr/>
+        </p:nvSpPr>
+        <p:spPr>
+          <a:xfrm>
+            <a:off x="4224528" y="4389882"/>
+            <a:ext cx="502920" cy="215646"/>
+          </a:xfrm>
+          <a:prstGeom prst="rect">
+            <a:avLst/>
+          </a:prstGeom>
+          <a:noFill/>
+          <a:ln/>
+        </p:spPr>
+        <p:txBody>
+          <a:bodyPr wrap="square" lIns="0" tIns="0" rIns="0" bIns="0" rtlCol="0" anchor="ctr">
+            <a:normAutofit/>
+          </a:bodyPr>
+          <a:lstStyle/>
+          <a:p>
+            <a:pPr algn="ctr" indent="0" marL="0">
+              <a:buNone/>
+            </a:pPr>
+            <a:r>
               <a:rPr lang="en-US" altLang="en-US" sz="900" b="1" dirty="0">
                 <a:solidFill>
-                  <a:srgbClr val="FFFFFF"/>
-                </a:solidFill>
-                <a:latin typeface="Calibri" pitchFamily="34" charset="0"/>
-                <a:ea typeface="Calibri" pitchFamily="34" charset="-122"/>
-                <a:cs typeface="Calibri" pitchFamily="34" charset="-120"/>
-              </a:rPr>
-              <a:t>G</a:t>
+                  <a:srgbClr val="222222"/>
+                </a:solidFill>
+                <a:latin typeface="Calibri" pitchFamily="34" charset="0"/>
+                <a:ea typeface="Calibri" pitchFamily="34" charset="-122"/>
+                <a:cs typeface="Calibri" pitchFamily="34" charset="-120"/>
+              </a:rPr>
+              <a:t>4</a:t>
             </a:r>
             <a:endParaRPr lang="en-US" sz="900" dirty="0"/>
           </a:p>
@@ -16355,32 +17147,32 @@
       </p:sp>
       <p:sp>
         <p:nvSpPr>
-          <p:cNvPr id="276" name="Text 274"/>
-          <p:cNvSpPr/>
-          <p:nvPr/>
-        </p:nvSpPr>
-        <p:spPr>
-          <a:xfrm>
-            <a:off x="822960" y="4991318"/>
-            <a:ext cx="2606040" cy="403642"/>
-          </a:xfrm>
-          <a:prstGeom prst="rect">
-            <a:avLst/>
-          </a:prstGeom>
-          <a:noFill/>
-          <a:ln/>
-        </p:spPr>
-        <p:txBody>
-          <a:bodyPr wrap="square" lIns="0" tIns="0" rIns="0" bIns="0" rtlCol="0" anchor="ctr">
-            <a:normAutofit/>
-          </a:bodyPr>
-          <a:lstStyle/>
-          <a:p>
-            <a:pPr algn="l" indent="0" marL="0">
-              <a:buNone/>
-            </a:pPr>
-            <a:r>
-              <a:rPr lang="en-US" altLang="en-US" sz="900" dirty="0">
+          <p:cNvPr id="298" name="Text 296"/>
+          <p:cNvSpPr/>
+          <p:nvPr/>
+        </p:nvSpPr>
+        <p:spPr>
+          <a:xfrm>
+            <a:off x="4727448" y="4389882"/>
+            <a:ext cx="658368" cy="215646"/>
+          </a:xfrm>
+          <a:prstGeom prst="rect">
+            <a:avLst/>
+          </a:prstGeom>
+          <a:noFill/>
+          <a:ln/>
+        </p:spPr>
+        <p:txBody>
+          <a:bodyPr wrap="square" lIns="0" tIns="0" rIns="0" bIns="0" rtlCol="0" anchor="ctr">
+            <a:normAutofit/>
+          </a:bodyPr>
+          <a:lstStyle/>
+          <a:p>
+            <a:pPr algn="ctr" indent="0" marL="0">
+              <a:buNone/>
+            </a:pPr>
+            <a:r>
+              <a:rPr lang="en-US" altLang="en-US" sz="700" b="1" dirty="0">
                 <a:solidFill>
                   <a:srgbClr val="222222"/>
                 </a:solidFill>
@@ -16388,22 +17180,22 @@
                 <a:ea typeface="Calibri" pitchFamily="34" charset="-122"/>
                 <a:cs typeface="Calibri" pitchFamily="34" charset="-120"/>
               </a:rPr>
-              <a:t>Backfilling works for the building</a:t>
-            </a:r>
-            <a:endParaRPr lang="en-US" sz="900" dirty="0"/>
-          </a:p>
-        </p:txBody>
-      </p:sp>
-      <p:sp>
-        <p:nvSpPr>
-          <p:cNvPr id="277" name="Text 275"/>
-          <p:cNvSpPr/>
-          <p:nvPr/>
-        </p:nvSpPr>
-        <p:spPr>
-          <a:xfrm>
-            <a:off x="3447288" y="4991318"/>
-            <a:ext cx="777240" cy="403642"/>
+              <a:t>20 Oct</a:t>
+            </a:r>
+            <a:endParaRPr lang="en-US" sz="700" dirty="0"/>
+          </a:p>
+        </p:txBody>
+      </p:sp>
+      <p:sp>
+        <p:nvSpPr>
+          <p:cNvPr id="299" name="Text 297"/>
+          <p:cNvSpPr/>
+          <p:nvPr/>
+        </p:nvSpPr>
+        <p:spPr>
+          <a:xfrm>
+            <a:off x="5385816" y="4389882"/>
+            <a:ext cx="658368" cy="215646"/>
           </a:xfrm>
           <a:prstGeom prst="rect">
             <a:avLst/>
@@ -16421,48 +17213,7 @@
               <a:buNone/>
             </a:pPr>
             <a:r>
-              <a:rPr lang="en-US" altLang="en-US" sz="850" dirty="0">
-                <a:solidFill>
-                  <a:srgbClr val="444444"/>
-                </a:solidFill>
-                <a:latin typeface="Calibri" pitchFamily="34" charset="0"/>
-                <a:ea typeface="Calibri" pitchFamily="34" charset="-122"/>
-                <a:cs typeface="Calibri" pitchFamily="34" charset="-120"/>
-              </a:rPr>
-              <a:t>F · FS</a:t>
-            </a:r>
-            <a:endParaRPr lang="en-US" sz="850" dirty="0"/>
-          </a:p>
-        </p:txBody>
-      </p:sp>
-      <p:sp>
-        <p:nvSpPr>
-          <p:cNvPr id="278" name="Text 276"/>
-          <p:cNvSpPr/>
-          <p:nvPr/>
-        </p:nvSpPr>
-        <p:spPr>
-          <a:xfrm>
-            <a:off x="4224528" y="4991318"/>
-            <a:ext cx="502920" cy="403642"/>
-          </a:xfrm>
-          <a:prstGeom prst="rect">
-            <a:avLst/>
-          </a:prstGeom>
-          <a:noFill/>
-          <a:ln/>
-        </p:spPr>
-        <p:txBody>
-          <a:bodyPr wrap="square" lIns="0" tIns="0" rIns="0" bIns="0" rtlCol="0" anchor="ctr">
-            <a:normAutofit/>
-          </a:bodyPr>
-          <a:lstStyle/>
-          <a:p>
-            <a:pPr algn="ctr" indent="0" marL="0">
-              <a:buNone/>
-            </a:pPr>
-            <a:r>
-              <a:rPr lang="en-US" altLang="en-US" sz="1100" b="1" dirty="0">
+              <a:rPr lang="en-US" altLang="en-US" sz="700" b="1" dirty="0">
                 <a:solidFill>
                   <a:srgbClr val="222222"/>
                 </a:solidFill>
@@ -16470,114 +17221,32 @@
                 <a:ea typeface="Calibri" pitchFamily="34" charset="-122"/>
                 <a:cs typeface="Calibri" pitchFamily="34" charset="-120"/>
               </a:rPr>
-              <a:t>5</a:t>
-            </a:r>
-            <a:endParaRPr lang="en-US" sz="1100" dirty="0"/>
-          </a:p>
-        </p:txBody>
-      </p:sp>
-      <p:sp>
-        <p:nvSpPr>
-          <p:cNvPr id="279" name="Text 277"/>
-          <p:cNvSpPr/>
-          <p:nvPr/>
-        </p:nvSpPr>
-        <p:spPr>
-          <a:xfrm>
-            <a:off x="4727448" y="4991318"/>
-            <a:ext cx="658368" cy="403642"/>
-          </a:xfrm>
-          <a:prstGeom prst="rect">
-            <a:avLst/>
-          </a:prstGeom>
-          <a:noFill/>
-          <a:ln/>
-        </p:spPr>
-        <p:txBody>
-          <a:bodyPr wrap="square" lIns="0" tIns="0" rIns="0" bIns="0" rtlCol="0" anchor="ctr">
-            <a:normAutofit/>
-          </a:bodyPr>
-          <a:lstStyle/>
-          <a:p>
-            <a:pPr algn="ctr" indent="0" marL="0">
-              <a:buNone/>
-            </a:pPr>
-            <a:r>
-              <a:rPr lang="en-US" altLang="en-US" sz="850" b="1" dirty="0">
-                <a:solidFill>
-                  <a:srgbClr val="222222"/>
-                </a:solidFill>
-                <a:latin typeface="Calibri" pitchFamily="34" charset="0"/>
-                <a:ea typeface="Calibri" pitchFamily="34" charset="-122"/>
-                <a:cs typeface="Calibri" pitchFamily="34" charset="-120"/>
-              </a:rPr>
-              <a:t>19 Nov</a:t>
-            </a:r>
-            <a:endParaRPr lang="en-US" sz="850" dirty="0"/>
-          </a:p>
-        </p:txBody>
-      </p:sp>
-      <p:sp>
-        <p:nvSpPr>
-          <p:cNvPr id="280" name="Text 278"/>
-          <p:cNvSpPr/>
-          <p:nvPr/>
-        </p:nvSpPr>
-        <p:spPr>
-          <a:xfrm>
-            <a:off x="5385816" y="4991318"/>
-            <a:ext cx="658368" cy="403642"/>
-          </a:xfrm>
-          <a:prstGeom prst="rect">
-            <a:avLst/>
-          </a:prstGeom>
-          <a:noFill/>
-          <a:ln/>
-        </p:spPr>
-        <p:txBody>
-          <a:bodyPr wrap="square" lIns="0" tIns="0" rIns="0" bIns="0" rtlCol="0" anchor="ctr">
-            <a:normAutofit/>
-          </a:bodyPr>
-          <a:lstStyle/>
-          <a:p>
-            <a:pPr algn="ctr" indent="0" marL="0">
-              <a:buNone/>
-            </a:pPr>
-            <a:r>
-              <a:rPr lang="en-US" altLang="en-US" sz="850" b="1" dirty="0">
-                <a:solidFill>
-                  <a:srgbClr val="222222"/>
-                </a:solidFill>
-                <a:latin typeface="Calibri" pitchFamily="34" charset="0"/>
-                <a:ea typeface="Calibri" pitchFamily="34" charset="-122"/>
-                <a:cs typeface="Calibri" pitchFamily="34" charset="-120"/>
-              </a:rPr>
-              <a:t>24 Nov</a:t>
-            </a:r>
-            <a:endParaRPr lang="en-US" sz="850" dirty="0"/>
-          </a:p>
-        </p:txBody>
-      </p:sp>
-      <p:sp>
-        <p:nvSpPr>
-          <p:cNvPr id="281" name="Shape 279"/>
-          <p:cNvSpPr/>
-          <p:nvPr/>
-        </p:nvSpPr>
-        <p:spPr>
-          <a:xfrm>
-            <a:off x="10862310" y="5082137"/>
-            <a:ext cx="722719" cy="222003"/>
+              <a:t>24 Oct</a:t>
+            </a:r>
+            <a:endParaRPr lang="en-US" sz="700" dirty="0"/>
+          </a:p>
+        </p:txBody>
+      </p:sp>
+      <p:sp>
+        <p:nvSpPr>
+          <p:cNvPr id="300" name="Shape 298"/>
+          <p:cNvSpPr/>
+          <p:nvPr/>
+        </p:nvSpPr>
+        <p:spPr>
+          <a:xfrm>
+            <a:off x="7248716" y="4435168"/>
+            <a:ext cx="602266" cy="125075"/>
           </a:xfrm>
           <a:prstGeom prst="roundRect">
             <a:avLst>
-              <a:gd name="adj" fmla="val 20594"/>
+              <a:gd name="adj" fmla="val 29243"/>
             </a:avLst>
           </a:prstGeom>
           <a:solidFill>
-            <a:srgbClr val="D68A00"/>
-          </a:solidFill>
-          <a:ln w="22225">
+            <a:srgbClr val="00778B"/>
+          </a:solidFill>
+          <a:ln w="19050">
             <a:solidFill>
               <a:srgbClr val="222222"/>
             </a:solidFill>
@@ -16594,14 +17263,14 @@
       </p:sp>
       <p:sp>
         <p:nvSpPr>
-          <p:cNvPr id="282" name="Text 280"/>
-          <p:cNvSpPr/>
-          <p:nvPr/>
-        </p:nvSpPr>
-        <p:spPr>
-          <a:xfrm>
-            <a:off x="10862310" y="5082137"/>
-            <a:ext cx="722719" cy="222003"/>
+          <p:cNvPr id="301" name="Text 299"/>
+          <p:cNvSpPr/>
+          <p:nvPr/>
+        </p:nvSpPr>
+        <p:spPr>
+          <a:xfrm>
+            <a:off x="7248716" y="4435168"/>
+            <a:ext cx="602266" cy="125075"/>
           </a:xfrm>
           <a:prstGeom prst="rect">
             <a:avLst/>
@@ -16619,7 +17288,7 @@
               <a:buNone/>
             </a:pPr>
             <a:r>
-              <a:rPr lang="en-US" altLang="en-US" sz="800" b="1" dirty="0">
+              <a:rPr lang="en-US" altLang="en-US" sz="700" b="1" dirty="0">
                 <a:solidFill>
                   <a:srgbClr val="FFFFFF"/>
                 </a:solidFill>
@@ -16627,22 +17296,1514 @@
                 <a:ea typeface="Calibri" pitchFamily="34" charset="-122"/>
                 <a:cs typeface="Calibri" pitchFamily="34" charset="-120"/>
               </a:rPr>
+              <a:t>4 d</a:t>
+            </a:r>
+            <a:endParaRPr lang="en-US" sz="700" dirty="0"/>
+          </a:p>
+        </p:txBody>
+      </p:sp>
+      <p:sp>
+        <p:nvSpPr>
+          <p:cNvPr id="302" name="Shape 300"/>
+          <p:cNvSpPr/>
+          <p:nvPr/>
+        </p:nvSpPr>
+        <p:spPr>
+          <a:xfrm>
+            <a:off x="365760" y="4605528"/>
+            <a:ext cx="11460175" cy="215646"/>
+          </a:xfrm>
+          <a:prstGeom prst="rect">
+            <a:avLst/>
+          </a:prstGeom>
+          <a:solidFill>
+            <a:srgbClr val="FFFFFF"/>
+          </a:solidFill>
+          <a:ln w="6350">
+            <a:solidFill>
+              <a:srgbClr val="DFE6EA"/>
+            </a:solidFill>
+            <a:prstDash val="solid"/>
+          </a:ln>
+        </p:spPr>
+      </p:sp>
+      <p:sp>
+        <p:nvSpPr>
+          <p:cNvPr id="303" name="Shape 301"/>
+          <p:cNvSpPr/>
+          <p:nvPr/>
+        </p:nvSpPr>
+        <p:spPr>
+          <a:xfrm>
+            <a:off x="438912" y="4594479"/>
+            <a:ext cx="237744" cy="237744"/>
+          </a:xfrm>
+          <a:prstGeom prst="ellipse">
+            <a:avLst>
+              <a:gd name="adj" fmla="val 32692"/>
+            </a:avLst>
+          </a:prstGeom>
+          <a:solidFill>
+            <a:srgbClr val="00778B"/>
+          </a:solidFill>
+          <a:ln w="19050">
+            <a:solidFill>
+              <a:srgbClr val="222222"/>
+            </a:solidFill>
+            <a:prstDash val="solid"/>
+          </a:ln>
+        </p:spPr>
+      </p:sp>
+      <p:sp>
+        <p:nvSpPr>
+          <p:cNvPr id="304" name="Text 302"/>
+          <p:cNvSpPr/>
+          <p:nvPr/>
+        </p:nvSpPr>
+        <p:spPr>
+          <a:xfrm>
+            <a:off x="365760" y="4605528"/>
+            <a:ext cx="384048" cy="215646"/>
+          </a:xfrm>
+          <a:prstGeom prst="rect">
+            <a:avLst/>
+          </a:prstGeom>
+          <a:noFill/>
+          <a:ln/>
+        </p:spPr>
+        <p:txBody>
+          <a:bodyPr wrap="square" lIns="0" tIns="0" rIns="0" bIns="0" rtlCol="0" anchor="ctr">
+            <a:normAutofit/>
+          </a:bodyPr>
+          <a:lstStyle/>
+          <a:p>
+            <a:pPr algn="ctr" indent="0" marL="0">
+              <a:buNone/>
+            </a:pPr>
+            <a:r>
+              <a:rPr lang="en-US" altLang="en-US" sz="850" b="1" dirty="0">
+                <a:solidFill>
+                  <a:srgbClr val="FFFFFF"/>
+                </a:solidFill>
+                <a:latin typeface="Calibri" pitchFamily="34" charset="0"/>
+                <a:ea typeface="Calibri" pitchFamily="34" charset="-122"/>
+                <a:cs typeface="Calibri" pitchFamily="34" charset="-120"/>
+              </a:rPr>
+              <a:t>D</a:t>
+            </a:r>
+            <a:endParaRPr lang="en-US" sz="850" dirty="0"/>
+          </a:p>
+        </p:txBody>
+      </p:sp>
+      <p:sp>
+        <p:nvSpPr>
+          <p:cNvPr id="305" name="Text 303"/>
+          <p:cNvSpPr/>
+          <p:nvPr/>
+        </p:nvSpPr>
+        <p:spPr>
+          <a:xfrm>
+            <a:off x="822960" y="4605528"/>
+            <a:ext cx="2606040" cy="215646"/>
+          </a:xfrm>
+          <a:prstGeom prst="rect">
+            <a:avLst/>
+          </a:prstGeom>
+          <a:noFill/>
+          <a:ln/>
+        </p:spPr>
+        <p:txBody>
+          <a:bodyPr wrap="square" lIns="0" tIns="0" rIns="0" bIns="0" rtlCol="0" anchor="ctr">
+            <a:normAutofit/>
+          </a:bodyPr>
+          <a:lstStyle/>
+          <a:p>
+            <a:pPr algn="l" indent="0" marL="0">
+              <a:buNone/>
+            </a:pPr>
+            <a:r>
+              <a:rPr lang="en-US" altLang="en-US" sz="750" b="1" dirty="0">
+                <a:solidFill>
+                  <a:srgbClr val="222222"/>
+                </a:solidFill>
+                <a:latin typeface="Calibri" pitchFamily="34" charset="0"/>
+                <a:ea typeface="Calibri" pitchFamily="34" charset="-122"/>
+                <a:cs typeface="Calibri" pitchFamily="34" charset="-120"/>
+              </a:rPr>
+              <a:t>Pit slab / raft – reinforcement, formwork &amp; concrete</a:t>
+            </a:r>
+            <a:endParaRPr lang="en-US" sz="750" dirty="0"/>
+          </a:p>
+        </p:txBody>
+      </p:sp>
+      <p:sp>
+        <p:nvSpPr>
+          <p:cNvPr id="306" name="Text 304"/>
+          <p:cNvSpPr/>
+          <p:nvPr/>
+        </p:nvSpPr>
+        <p:spPr>
+          <a:xfrm>
+            <a:off x="3447288" y="4605528"/>
+            <a:ext cx="777240" cy="215646"/>
+          </a:xfrm>
+          <a:prstGeom prst="rect">
+            <a:avLst/>
+          </a:prstGeom>
+          <a:noFill/>
+          <a:ln/>
+        </p:spPr>
+        <p:txBody>
+          <a:bodyPr wrap="square" lIns="0" tIns="0" rIns="0" bIns="0" rtlCol="0" anchor="ctr">
+            <a:normAutofit/>
+          </a:bodyPr>
+          <a:lstStyle/>
+          <a:p>
+            <a:pPr algn="ctr" indent="0" marL="0">
+              <a:buNone/>
+            </a:pPr>
+            <a:r>
+              <a:rPr lang="en-US" altLang="en-US" sz="700" dirty="0">
+                <a:solidFill>
+                  <a:srgbClr val="444444"/>
+                </a:solidFill>
+                <a:latin typeface="Calibri" pitchFamily="34" charset="0"/>
+                <a:ea typeface="Calibri" pitchFamily="34" charset="-122"/>
+                <a:cs typeface="Calibri" pitchFamily="34" charset="-120"/>
+              </a:rPr>
+              <a:t>C · FS</a:t>
+            </a:r>
+            <a:endParaRPr lang="en-US" sz="700" dirty="0"/>
+          </a:p>
+        </p:txBody>
+      </p:sp>
+      <p:sp>
+        <p:nvSpPr>
+          <p:cNvPr id="307" name="Text 305"/>
+          <p:cNvSpPr/>
+          <p:nvPr/>
+        </p:nvSpPr>
+        <p:spPr>
+          <a:xfrm>
+            <a:off x="4224528" y="4605528"/>
+            <a:ext cx="502920" cy="215646"/>
+          </a:xfrm>
+          <a:prstGeom prst="rect">
+            <a:avLst/>
+          </a:prstGeom>
+          <a:noFill/>
+          <a:ln/>
+        </p:spPr>
+        <p:txBody>
+          <a:bodyPr wrap="square" lIns="0" tIns="0" rIns="0" bIns="0" rtlCol="0" anchor="ctr">
+            <a:normAutofit/>
+          </a:bodyPr>
+          <a:lstStyle/>
+          <a:p>
+            <a:pPr algn="ctr" indent="0" marL="0">
+              <a:buNone/>
+            </a:pPr>
+            <a:r>
+              <a:rPr lang="en-US" altLang="en-US" sz="900" b="1" dirty="0">
+                <a:solidFill>
+                  <a:srgbClr val="222222"/>
+                </a:solidFill>
+                <a:latin typeface="Calibri" pitchFamily="34" charset="0"/>
+                <a:ea typeface="Calibri" pitchFamily="34" charset="-122"/>
+                <a:cs typeface="Calibri" pitchFamily="34" charset="-120"/>
+              </a:rPr>
+              <a:t>10</a:t>
+            </a:r>
+            <a:endParaRPr lang="en-US" sz="900" dirty="0"/>
+          </a:p>
+        </p:txBody>
+      </p:sp>
+      <p:sp>
+        <p:nvSpPr>
+          <p:cNvPr id="308" name="Text 306"/>
+          <p:cNvSpPr/>
+          <p:nvPr/>
+        </p:nvSpPr>
+        <p:spPr>
+          <a:xfrm>
+            <a:off x="4727448" y="4605528"/>
+            <a:ext cx="658368" cy="215646"/>
+          </a:xfrm>
+          <a:prstGeom prst="rect">
+            <a:avLst/>
+          </a:prstGeom>
+          <a:noFill/>
+          <a:ln/>
+        </p:spPr>
+        <p:txBody>
+          <a:bodyPr wrap="square" lIns="0" tIns="0" rIns="0" bIns="0" rtlCol="0" anchor="ctr">
+            <a:normAutofit/>
+          </a:bodyPr>
+          <a:lstStyle/>
+          <a:p>
+            <a:pPr algn="ctr" indent="0" marL="0">
+              <a:buNone/>
+            </a:pPr>
+            <a:r>
+              <a:rPr lang="en-US" altLang="en-US" sz="700" b="1" dirty="0">
+                <a:solidFill>
+                  <a:srgbClr val="222222"/>
+                </a:solidFill>
+                <a:latin typeface="Calibri" pitchFamily="34" charset="0"/>
+                <a:ea typeface="Calibri" pitchFamily="34" charset="-122"/>
+                <a:cs typeface="Calibri" pitchFamily="34" charset="-120"/>
+              </a:rPr>
+              <a:t>25 Oct</a:t>
+            </a:r>
+            <a:endParaRPr lang="en-US" sz="700" dirty="0"/>
+          </a:p>
+        </p:txBody>
+      </p:sp>
+      <p:sp>
+        <p:nvSpPr>
+          <p:cNvPr id="309" name="Text 307"/>
+          <p:cNvSpPr/>
+          <p:nvPr/>
+        </p:nvSpPr>
+        <p:spPr>
+          <a:xfrm>
+            <a:off x="5385816" y="4605528"/>
+            <a:ext cx="658368" cy="215646"/>
+          </a:xfrm>
+          <a:prstGeom prst="rect">
+            <a:avLst/>
+          </a:prstGeom>
+          <a:noFill/>
+          <a:ln/>
+        </p:spPr>
+        <p:txBody>
+          <a:bodyPr wrap="square" lIns="0" tIns="0" rIns="0" bIns="0" rtlCol="0" anchor="ctr">
+            <a:normAutofit/>
+          </a:bodyPr>
+          <a:lstStyle/>
+          <a:p>
+            <a:pPr algn="ctr" indent="0" marL="0">
+              <a:buNone/>
+            </a:pPr>
+            <a:r>
+              <a:rPr lang="en-US" altLang="en-US" sz="700" b="1" dirty="0">
+                <a:solidFill>
+                  <a:srgbClr val="222222"/>
+                </a:solidFill>
+                <a:latin typeface="Calibri" pitchFamily="34" charset="0"/>
+                <a:ea typeface="Calibri" pitchFamily="34" charset="-122"/>
+                <a:cs typeface="Calibri" pitchFamily="34" charset="-120"/>
+              </a:rPr>
+              <a:t>4 Nov</a:t>
+            </a:r>
+            <a:endParaRPr lang="en-US" sz="700" dirty="0"/>
+          </a:p>
+        </p:txBody>
+      </p:sp>
+      <p:sp>
+        <p:nvSpPr>
+          <p:cNvPr id="310" name="Shape 308"/>
+          <p:cNvSpPr/>
+          <p:nvPr/>
+        </p:nvSpPr>
+        <p:spPr>
+          <a:xfrm>
+            <a:off x="7850981" y="4650814"/>
+            <a:ext cx="1324985" cy="125075"/>
+          </a:xfrm>
+          <a:prstGeom prst="roundRect">
+            <a:avLst>
+              <a:gd name="adj" fmla="val 29243"/>
+            </a:avLst>
+          </a:prstGeom>
+          <a:solidFill>
+            <a:srgbClr val="00778B"/>
+          </a:solidFill>
+          <a:ln w="19050">
+            <a:solidFill>
+              <a:srgbClr val="222222"/>
+            </a:solidFill>
+            <a:prstDash val="solid"/>
+          </a:ln>
+          <a:effectLst>
+            <a:outerShdw sx="100000" sy="100000" kx="0" ky="0" algn="bl" rotWithShape="0" blurRad="38100" dist="12700" dir="5400000">
+              <a:srgbClr val="000000">
+                <a:alpha val="20000"/>
+              </a:srgbClr>
+            </a:outerShdw>
+          </a:effectLst>
+        </p:spPr>
+      </p:sp>
+      <p:sp>
+        <p:nvSpPr>
+          <p:cNvPr id="311" name="Text 309"/>
+          <p:cNvSpPr/>
+          <p:nvPr/>
+        </p:nvSpPr>
+        <p:spPr>
+          <a:xfrm>
+            <a:off x="7850981" y="4650814"/>
+            <a:ext cx="1324985" cy="125075"/>
+          </a:xfrm>
+          <a:prstGeom prst="rect">
+            <a:avLst/>
+          </a:prstGeom>
+          <a:noFill/>
+          <a:ln/>
+        </p:spPr>
+        <p:txBody>
+          <a:bodyPr wrap="square" lIns="0" tIns="0" rIns="0" bIns="0" rtlCol="0" anchor="ctr">
+            <a:normAutofit/>
+          </a:bodyPr>
+          <a:lstStyle/>
+          <a:p>
+            <a:pPr algn="ctr" indent="0" marL="0">
+              <a:buNone/>
+            </a:pPr>
+            <a:r>
+              <a:rPr lang="en-US" altLang="en-US" sz="700" b="1" dirty="0">
+                <a:solidFill>
+                  <a:srgbClr val="FFFFFF"/>
+                </a:solidFill>
+                <a:latin typeface="Calibri" pitchFamily="34" charset="0"/>
+                <a:ea typeface="Calibri" pitchFamily="34" charset="-122"/>
+                <a:cs typeface="Calibri" pitchFamily="34" charset="-120"/>
+              </a:rPr>
+              <a:t>10 d</a:t>
+            </a:r>
+            <a:endParaRPr lang="en-US" sz="700" dirty="0"/>
+          </a:p>
+        </p:txBody>
+      </p:sp>
+      <p:sp>
+        <p:nvSpPr>
+          <p:cNvPr id="312" name="Shape 310"/>
+          <p:cNvSpPr/>
+          <p:nvPr/>
+        </p:nvSpPr>
+        <p:spPr>
+          <a:xfrm>
+            <a:off x="365760" y="4821174"/>
+            <a:ext cx="11460175" cy="215646"/>
+          </a:xfrm>
+          <a:prstGeom prst="rect">
+            <a:avLst/>
+          </a:prstGeom>
+          <a:solidFill>
+            <a:srgbClr val="F6F9FA"/>
+          </a:solidFill>
+          <a:ln w="6350">
+            <a:solidFill>
+              <a:srgbClr val="DFE6EA"/>
+            </a:solidFill>
+            <a:prstDash val="solid"/>
+          </a:ln>
+        </p:spPr>
+      </p:sp>
+      <p:sp>
+        <p:nvSpPr>
+          <p:cNvPr id="313" name="Shape 311"/>
+          <p:cNvSpPr/>
+          <p:nvPr/>
+        </p:nvSpPr>
+        <p:spPr>
+          <a:xfrm>
+            <a:off x="438912" y="4810125"/>
+            <a:ext cx="237744" cy="237744"/>
+          </a:xfrm>
+          <a:prstGeom prst="ellipse">
+            <a:avLst>
+              <a:gd name="adj" fmla="val 32692"/>
+            </a:avLst>
+          </a:prstGeom>
+          <a:solidFill>
+            <a:srgbClr val="00778B"/>
+          </a:solidFill>
+          <a:ln w="6350">
+            <a:solidFill>
+              <a:srgbClr val="00778B"/>
+            </a:solidFill>
+            <a:prstDash val="solid"/>
+          </a:ln>
+        </p:spPr>
+      </p:sp>
+      <p:sp>
+        <p:nvSpPr>
+          <p:cNvPr id="314" name="Text 312"/>
+          <p:cNvSpPr/>
+          <p:nvPr/>
+        </p:nvSpPr>
+        <p:spPr>
+          <a:xfrm>
+            <a:off x="365760" y="4821174"/>
+            <a:ext cx="384048" cy="215646"/>
+          </a:xfrm>
+          <a:prstGeom prst="rect">
+            <a:avLst/>
+          </a:prstGeom>
+          <a:noFill/>
+          <a:ln/>
+        </p:spPr>
+        <p:txBody>
+          <a:bodyPr wrap="square" lIns="0" tIns="0" rIns="0" bIns="0" rtlCol="0" anchor="ctr">
+            <a:normAutofit/>
+          </a:bodyPr>
+          <a:lstStyle/>
+          <a:p>
+            <a:pPr algn="ctr" indent="0" marL="0">
+              <a:buNone/>
+            </a:pPr>
+            <a:r>
+              <a:rPr lang="en-US" altLang="en-US" sz="850" b="1" dirty="0">
+                <a:solidFill>
+                  <a:srgbClr val="FFFFFF"/>
+                </a:solidFill>
+                <a:latin typeface="Calibri" pitchFamily="34" charset="0"/>
+                <a:ea typeface="Calibri" pitchFamily="34" charset="-122"/>
+                <a:cs typeface="Calibri" pitchFamily="34" charset="-120"/>
+              </a:rPr>
+              <a:t>E</a:t>
+            </a:r>
+            <a:endParaRPr lang="en-US" sz="850" dirty="0"/>
+          </a:p>
+        </p:txBody>
+      </p:sp>
+      <p:sp>
+        <p:nvSpPr>
+          <p:cNvPr id="315" name="Text 313"/>
+          <p:cNvSpPr/>
+          <p:nvPr/>
+        </p:nvSpPr>
+        <p:spPr>
+          <a:xfrm>
+            <a:off x="822960" y="4821174"/>
+            <a:ext cx="2606040" cy="215646"/>
+          </a:xfrm>
+          <a:prstGeom prst="rect">
+            <a:avLst/>
+          </a:prstGeom>
+          <a:noFill/>
+          <a:ln/>
+        </p:spPr>
+        <p:txBody>
+          <a:bodyPr wrap="square" lIns="0" tIns="0" rIns="0" bIns="0" rtlCol="0" anchor="ctr">
+            <a:normAutofit/>
+          </a:bodyPr>
+          <a:lstStyle/>
+          <a:p>
+            <a:pPr algn="l" indent="0" marL="0">
+              <a:buNone/>
+            </a:pPr>
+            <a:r>
+              <a:rPr lang="en-US" altLang="en-US" sz="750" b="1" dirty="0">
+                <a:solidFill>
+                  <a:srgbClr val="222222"/>
+                </a:solidFill>
+                <a:latin typeface="Calibri" pitchFamily="34" charset="0"/>
+                <a:ea typeface="Calibri" pitchFamily="34" charset="-122"/>
+                <a:cs typeface="Calibri" pitchFamily="34" charset="-120"/>
+              </a:rPr>
+              <a:t>Pit wall – reinforcement, formwork &amp; concrete</a:t>
+            </a:r>
+            <a:endParaRPr lang="en-US" sz="750" dirty="0"/>
+          </a:p>
+        </p:txBody>
+      </p:sp>
+      <p:sp>
+        <p:nvSpPr>
+          <p:cNvPr id="316" name="Text 314"/>
+          <p:cNvSpPr/>
+          <p:nvPr/>
+        </p:nvSpPr>
+        <p:spPr>
+          <a:xfrm>
+            <a:off x="3447288" y="4821174"/>
+            <a:ext cx="777240" cy="215646"/>
+          </a:xfrm>
+          <a:prstGeom prst="rect">
+            <a:avLst/>
+          </a:prstGeom>
+          <a:noFill/>
+          <a:ln/>
+        </p:spPr>
+        <p:txBody>
+          <a:bodyPr wrap="square" lIns="0" tIns="0" rIns="0" bIns="0" rtlCol="0" anchor="ctr">
+            <a:normAutofit/>
+          </a:bodyPr>
+          <a:lstStyle/>
+          <a:p>
+            <a:pPr algn="ctr" indent="0" marL="0">
+              <a:buNone/>
+            </a:pPr>
+            <a:r>
+              <a:rPr lang="en-US" altLang="en-US" sz="700" dirty="0">
+                <a:solidFill>
+                  <a:srgbClr val="444444"/>
+                </a:solidFill>
+                <a:latin typeface="Calibri" pitchFamily="34" charset="0"/>
+                <a:ea typeface="Calibri" pitchFamily="34" charset="-122"/>
+                <a:cs typeface="Calibri" pitchFamily="34" charset="-120"/>
+              </a:rPr>
+              <a:t>D · FS</a:t>
+            </a:r>
+            <a:endParaRPr lang="en-US" sz="700" dirty="0"/>
+          </a:p>
+        </p:txBody>
+      </p:sp>
+      <p:sp>
+        <p:nvSpPr>
+          <p:cNvPr id="317" name="Text 315"/>
+          <p:cNvSpPr/>
+          <p:nvPr/>
+        </p:nvSpPr>
+        <p:spPr>
+          <a:xfrm>
+            <a:off x="4224528" y="4821174"/>
+            <a:ext cx="502920" cy="215646"/>
+          </a:xfrm>
+          <a:prstGeom prst="rect">
+            <a:avLst/>
+          </a:prstGeom>
+          <a:noFill/>
+          <a:ln/>
+        </p:spPr>
+        <p:txBody>
+          <a:bodyPr wrap="square" lIns="0" tIns="0" rIns="0" bIns="0" rtlCol="0" anchor="ctr">
+            <a:normAutofit/>
+          </a:bodyPr>
+          <a:lstStyle/>
+          <a:p>
+            <a:pPr algn="ctr" indent="0" marL="0">
+              <a:buNone/>
+            </a:pPr>
+            <a:r>
+              <a:rPr lang="en-US" altLang="en-US" sz="900" b="1" dirty="0">
+                <a:solidFill>
+                  <a:srgbClr val="222222"/>
+                </a:solidFill>
+                <a:latin typeface="Calibri" pitchFamily="34" charset="0"/>
+                <a:ea typeface="Calibri" pitchFamily="34" charset="-122"/>
+                <a:cs typeface="Calibri" pitchFamily="34" charset="-120"/>
+              </a:rPr>
+              <a:t>6</a:t>
+            </a:r>
+            <a:endParaRPr lang="en-US" sz="900" dirty="0"/>
+          </a:p>
+        </p:txBody>
+      </p:sp>
+      <p:sp>
+        <p:nvSpPr>
+          <p:cNvPr id="318" name="Text 316"/>
+          <p:cNvSpPr/>
+          <p:nvPr/>
+        </p:nvSpPr>
+        <p:spPr>
+          <a:xfrm>
+            <a:off x="4727448" y="4821174"/>
+            <a:ext cx="658368" cy="215646"/>
+          </a:xfrm>
+          <a:prstGeom prst="rect">
+            <a:avLst/>
+          </a:prstGeom>
+          <a:noFill/>
+          <a:ln/>
+        </p:spPr>
+        <p:txBody>
+          <a:bodyPr wrap="square" lIns="0" tIns="0" rIns="0" bIns="0" rtlCol="0" anchor="ctr">
+            <a:normAutofit/>
+          </a:bodyPr>
+          <a:lstStyle/>
+          <a:p>
+            <a:pPr algn="ctr" indent="0" marL="0">
+              <a:buNone/>
+            </a:pPr>
+            <a:r>
+              <a:rPr lang="en-US" altLang="en-US" sz="700" b="1" dirty="0">
+                <a:solidFill>
+                  <a:srgbClr val="222222"/>
+                </a:solidFill>
+                <a:latin typeface="Calibri" pitchFamily="34" charset="0"/>
+                <a:ea typeface="Calibri" pitchFamily="34" charset="-122"/>
+                <a:cs typeface="Calibri" pitchFamily="34" charset="-120"/>
+              </a:rPr>
+              <a:t>5 Nov</a:t>
+            </a:r>
+            <a:endParaRPr lang="en-US" sz="700" dirty="0"/>
+          </a:p>
+        </p:txBody>
+      </p:sp>
+      <p:sp>
+        <p:nvSpPr>
+          <p:cNvPr id="319" name="Text 317"/>
+          <p:cNvSpPr/>
+          <p:nvPr/>
+        </p:nvSpPr>
+        <p:spPr>
+          <a:xfrm>
+            <a:off x="5385816" y="4821174"/>
+            <a:ext cx="658368" cy="215646"/>
+          </a:xfrm>
+          <a:prstGeom prst="rect">
+            <a:avLst/>
+          </a:prstGeom>
+          <a:noFill/>
+          <a:ln/>
+        </p:spPr>
+        <p:txBody>
+          <a:bodyPr wrap="square" lIns="0" tIns="0" rIns="0" bIns="0" rtlCol="0" anchor="ctr">
+            <a:normAutofit/>
+          </a:bodyPr>
+          <a:lstStyle/>
+          <a:p>
+            <a:pPr algn="ctr" indent="0" marL="0">
+              <a:buNone/>
+            </a:pPr>
+            <a:r>
+              <a:rPr lang="en-US" altLang="en-US" sz="700" b="1" dirty="0">
+                <a:solidFill>
+                  <a:srgbClr val="222222"/>
+                </a:solidFill>
+                <a:latin typeface="Calibri" pitchFamily="34" charset="0"/>
+                <a:ea typeface="Calibri" pitchFamily="34" charset="-122"/>
+                <a:cs typeface="Calibri" pitchFamily="34" charset="-120"/>
+              </a:rPr>
+              <a:t>11 Nov</a:t>
+            </a:r>
+            <a:endParaRPr lang="en-US" sz="700" dirty="0"/>
+          </a:p>
+        </p:txBody>
+      </p:sp>
+      <p:sp>
+        <p:nvSpPr>
+          <p:cNvPr id="320" name="Shape 318"/>
+          <p:cNvSpPr/>
+          <p:nvPr/>
+        </p:nvSpPr>
+        <p:spPr>
+          <a:xfrm>
+            <a:off x="9175966" y="4866460"/>
+            <a:ext cx="843172" cy="125075"/>
+          </a:xfrm>
+          <a:prstGeom prst="roundRect">
+            <a:avLst>
+              <a:gd name="adj" fmla="val 29243"/>
+            </a:avLst>
+          </a:prstGeom>
+          <a:solidFill>
+            <a:srgbClr val="00778B"/>
+          </a:solidFill>
+          <a:ln w="6350">
+            <a:solidFill>
+              <a:srgbClr val="00778B"/>
+            </a:solidFill>
+            <a:prstDash val="solid"/>
+          </a:ln>
+          <a:effectLst>
+            <a:outerShdw sx="100000" sy="100000" kx="0" ky="0" algn="bl" rotWithShape="0" blurRad="38100" dist="12700" dir="5400000">
+              <a:srgbClr val="000000">
+                <a:alpha val="20000"/>
+              </a:srgbClr>
+            </a:outerShdw>
+          </a:effectLst>
+        </p:spPr>
+      </p:sp>
+      <p:sp>
+        <p:nvSpPr>
+          <p:cNvPr id="321" name="Text 319"/>
+          <p:cNvSpPr/>
+          <p:nvPr/>
+        </p:nvSpPr>
+        <p:spPr>
+          <a:xfrm>
+            <a:off x="9175966" y="4866460"/>
+            <a:ext cx="843172" cy="125075"/>
+          </a:xfrm>
+          <a:prstGeom prst="rect">
+            <a:avLst/>
+          </a:prstGeom>
+          <a:noFill/>
+          <a:ln/>
+        </p:spPr>
+        <p:txBody>
+          <a:bodyPr wrap="square" lIns="0" tIns="0" rIns="0" bIns="0" rtlCol="0" anchor="ctr">
+            <a:normAutofit/>
+          </a:bodyPr>
+          <a:lstStyle/>
+          <a:p>
+            <a:pPr algn="ctr" indent="0" marL="0">
+              <a:buNone/>
+            </a:pPr>
+            <a:r>
+              <a:rPr lang="en-US" altLang="en-US" sz="700" b="1" dirty="0">
+                <a:solidFill>
+                  <a:srgbClr val="FFFFFF"/>
+                </a:solidFill>
+                <a:latin typeface="Calibri" pitchFamily="34" charset="0"/>
+                <a:ea typeface="Calibri" pitchFamily="34" charset="-122"/>
+                <a:cs typeface="Calibri" pitchFamily="34" charset="-120"/>
+              </a:rPr>
+              <a:t>6 d</a:t>
+            </a:r>
+            <a:endParaRPr lang="en-US" sz="700" dirty="0"/>
+          </a:p>
+        </p:txBody>
+      </p:sp>
+      <p:sp>
+        <p:nvSpPr>
+          <p:cNvPr id="322" name="Shape 320"/>
+          <p:cNvSpPr/>
+          <p:nvPr/>
+        </p:nvSpPr>
+        <p:spPr>
+          <a:xfrm>
+            <a:off x="365760" y="5036820"/>
+            <a:ext cx="11460175" cy="215646"/>
+          </a:xfrm>
+          <a:prstGeom prst="rect">
+            <a:avLst/>
+          </a:prstGeom>
+          <a:solidFill>
+            <a:srgbClr val="FFFFFF"/>
+          </a:solidFill>
+          <a:ln w="6350">
+            <a:solidFill>
+              <a:srgbClr val="DFE6EA"/>
+            </a:solidFill>
+            <a:prstDash val="solid"/>
+          </a:ln>
+        </p:spPr>
+      </p:sp>
+      <p:sp>
+        <p:nvSpPr>
+          <p:cNvPr id="323" name="Shape 321"/>
+          <p:cNvSpPr/>
+          <p:nvPr/>
+        </p:nvSpPr>
+        <p:spPr>
+          <a:xfrm>
+            <a:off x="438912" y="5025771"/>
+            <a:ext cx="237744" cy="237744"/>
+          </a:xfrm>
+          <a:prstGeom prst="ellipse">
+            <a:avLst>
+              <a:gd name="adj" fmla="val 32692"/>
+            </a:avLst>
+          </a:prstGeom>
+          <a:solidFill>
+            <a:srgbClr val="2E9E6B"/>
+          </a:solidFill>
+          <a:ln w="19050">
+            <a:solidFill>
+              <a:srgbClr val="222222"/>
+            </a:solidFill>
+            <a:prstDash val="solid"/>
+          </a:ln>
+        </p:spPr>
+      </p:sp>
+      <p:sp>
+        <p:nvSpPr>
+          <p:cNvPr id="324" name="Text 322"/>
+          <p:cNvSpPr/>
+          <p:nvPr/>
+        </p:nvSpPr>
+        <p:spPr>
+          <a:xfrm>
+            <a:off x="365760" y="5036820"/>
+            <a:ext cx="384048" cy="215646"/>
+          </a:xfrm>
+          <a:prstGeom prst="rect">
+            <a:avLst/>
+          </a:prstGeom>
+          <a:noFill/>
+          <a:ln/>
+        </p:spPr>
+        <p:txBody>
+          <a:bodyPr wrap="square" lIns="0" tIns="0" rIns="0" bIns="0" rtlCol="0" anchor="ctr">
+            <a:normAutofit/>
+          </a:bodyPr>
+          <a:lstStyle/>
+          <a:p>
+            <a:pPr algn="ctr" indent="0" marL="0">
+              <a:buNone/>
+            </a:pPr>
+            <a:r>
+              <a:rPr lang="en-US" altLang="en-US" sz="850" b="1" dirty="0">
+                <a:solidFill>
+                  <a:srgbClr val="FFFFFF"/>
+                </a:solidFill>
+                <a:latin typeface="Calibri" pitchFamily="34" charset="0"/>
+                <a:ea typeface="Calibri" pitchFamily="34" charset="-122"/>
+                <a:cs typeface="Calibri" pitchFamily="34" charset="-120"/>
+              </a:rPr>
+              <a:t>F</a:t>
+            </a:r>
+            <a:endParaRPr lang="en-US" sz="850" dirty="0"/>
+          </a:p>
+        </p:txBody>
+      </p:sp>
+      <p:sp>
+        <p:nvSpPr>
+          <p:cNvPr id="325" name="Text 323"/>
+          <p:cNvSpPr/>
+          <p:nvPr/>
+        </p:nvSpPr>
+        <p:spPr>
+          <a:xfrm>
+            <a:off x="822960" y="5036820"/>
+            <a:ext cx="2606040" cy="215646"/>
+          </a:xfrm>
+          <a:prstGeom prst="rect">
+            <a:avLst/>
+          </a:prstGeom>
+          <a:noFill/>
+          <a:ln/>
+        </p:spPr>
+        <p:txBody>
+          <a:bodyPr wrap="square" lIns="0" tIns="0" rIns="0" bIns="0" rtlCol="0" anchor="ctr">
+            <a:normAutofit/>
+          </a:bodyPr>
+          <a:lstStyle/>
+          <a:p>
+            <a:pPr algn="l" indent="0" marL="0">
+              <a:buNone/>
+            </a:pPr>
+            <a:r>
+              <a:rPr lang="en-US" altLang="en-US" sz="750" b="1" dirty="0">
+                <a:solidFill>
+                  <a:srgbClr val="222222"/>
+                </a:solidFill>
+                <a:latin typeface="Calibri" pitchFamily="34" charset="0"/>
+                <a:ea typeface="Calibri" pitchFamily="34" charset="-122"/>
+                <a:cs typeface="Calibri" pitchFamily="34" charset="-120"/>
+              </a:rPr>
+              <a:t>Building foundation – excavation, compaction / testing, reinforcement &amp; concrete</a:t>
+            </a:r>
+            <a:endParaRPr lang="en-US" sz="750" dirty="0"/>
+          </a:p>
+        </p:txBody>
+      </p:sp>
+      <p:sp>
+        <p:nvSpPr>
+          <p:cNvPr id="326" name="Text 324"/>
+          <p:cNvSpPr/>
+          <p:nvPr/>
+        </p:nvSpPr>
+        <p:spPr>
+          <a:xfrm>
+            <a:off x="3447288" y="5036820"/>
+            <a:ext cx="777240" cy="215646"/>
+          </a:xfrm>
+          <a:prstGeom prst="rect">
+            <a:avLst/>
+          </a:prstGeom>
+          <a:noFill/>
+          <a:ln/>
+        </p:spPr>
+        <p:txBody>
+          <a:bodyPr wrap="square" lIns="0" tIns="0" rIns="0" bIns="0" rtlCol="0" anchor="ctr">
+            <a:normAutofit/>
+          </a:bodyPr>
+          <a:lstStyle/>
+          <a:p>
+            <a:pPr algn="ctr" indent="0" marL="0">
+              <a:buNone/>
+            </a:pPr>
+            <a:r>
+              <a:rPr lang="en-US" altLang="en-US" sz="700" dirty="0">
+                <a:solidFill>
+                  <a:srgbClr val="444444"/>
+                </a:solidFill>
+                <a:latin typeface="Calibri" pitchFamily="34" charset="0"/>
+                <a:ea typeface="Calibri" pitchFamily="34" charset="-122"/>
+                <a:cs typeface="Calibri" pitchFamily="34" charset="-120"/>
+              </a:rPr>
+              <a:t>D · FS</a:t>
+            </a:r>
+            <a:endParaRPr lang="en-US" sz="700" dirty="0"/>
+          </a:p>
+        </p:txBody>
+      </p:sp>
+      <p:sp>
+        <p:nvSpPr>
+          <p:cNvPr id="327" name="Text 325"/>
+          <p:cNvSpPr/>
+          <p:nvPr/>
+        </p:nvSpPr>
+        <p:spPr>
+          <a:xfrm>
+            <a:off x="4224528" y="5036820"/>
+            <a:ext cx="502920" cy="215646"/>
+          </a:xfrm>
+          <a:prstGeom prst="rect">
+            <a:avLst/>
+          </a:prstGeom>
+          <a:noFill/>
+          <a:ln/>
+        </p:spPr>
+        <p:txBody>
+          <a:bodyPr wrap="square" lIns="0" tIns="0" rIns="0" bIns="0" rtlCol="0" anchor="ctr">
+            <a:normAutofit/>
+          </a:bodyPr>
+          <a:lstStyle/>
+          <a:p>
+            <a:pPr algn="ctr" indent="0" marL="0">
+              <a:buNone/>
+            </a:pPr>
+            <a:r>
+              <a:rPr lang="en-US" altLang="en-US" sz="900" b="1" dirty="0">
+                <a:solidFill>
+                  <a:srgbClr val="222222"/>
+                </a:solidFill>
+                <a:latin typeface="Calibri" pitchFamily="34" charset="0"/>
+                <a:ea typeface="Calibri" pitchFamily="34" charset="-122"/>
+                <a:cs typeface="Calibri" pitchFamily="34" charset="-120"/>
+              </a:rPr>
+              <a:t>12</a:t>
+            </a:r>
+            <a:endParaRPr lang="en-US" sz="900" dirty="0"/>
+          </a:p>
+        </p:txBody>
+      </p:sp>
+      <p:sp>
+        <p:nvSpPr>
+          <p:cNvPr id="328" name="Text 326"/>
+          <p:cNvSpPr/>
+          <p:nvPr/>
+        </p:nvSpPr>
+        <p:spPr>
+          <a:xfrm>
+            <a:off x="4727448" y="5036820"/>
+            <a:ext cx="658368" cy="215646"/>
+          </a:xfrm>
+          <a:prstGeom prst="rect">
+            <a:avLst/>
+          </a:prstGeom>
+          <a:noFill/>
+          <a:ln/>
+        </p:spPr>
+        <p:txBody>
+          <a:bodyPr wrap="square" lIns="0" tIns="0" rIns="0" bIns="0" rtlCol="0" anchor="ctr">
+            <a:normAutofit/>
+          </a:bodyPr>
+          <a:lstStyle/>
+          <a:p>
+            <a:pPr algn="ctr" indent="0" marL="0">
+              <a:buNone/>
+            </a:pPr>
+            <a:r>
+              <a:rPr lang="en-US" altLang="en-US" sz="700" b="1" dirty="0">
+                <a:solidFill>
+                  <a:srgbClr val="222222"/>
+                </a:solidFill>
+                <a:latin typeface="Calibri" pitchFamily="34" charset="0"/>
+                <a:ea typeface="Calibri" pitchFamily="34" charset="-122"/>
+                <a:cs typeface="Calibri" pitchFamily="34" charset="-120"/>
+              </a:rPr>
+              <a:t>5 Nov</a:t>
+            </a:r>
+            <a:endParaRPr lang="en-US" sz="700" dirty="0"/>
+          </a:p>
+        </p:txBody>
+      </p:sp>
+      <p:sp>
+        <p:nvSpPr>
+          <p:cNvPr id="329" name="Text 327"/>
+          <p:cNvSpPr/>
+          <p:nvPr/>
+        </p:nvSpPr>
+        <p:spPr>
+          <a:xfrm>
+            <a:off x="5385816" y="5036820"/>
+            <a:ext cx="658368" cy="215646"/>
+          </a:xfrm>
+          <a:prstGeom prst="rect">
+            <a:avLst/>
+          </a:prstGeom>
+          <a:noFill/>
+          <a:ln/>
+        </p:spPr>
+        <p:txBody>
+          <a:bodyPr wrap="square" lIns="0" tIns="0" rIns="0" bIns="0" rtlCol="0" anchor="ctr">
+            <a:normAutofit/>
+          </a:bodyPr>
+          <a:lstStyle/>
+          <a:p>
+            <a:pPr algn="ctr" indent="0" marL="0">
+              <a:buNone/>
+            </a:pPr>
+            <a:r>
+              <a:rPr lang="en-US" altLang="en-US" sz="700" b="1" dirty="0">
+                <a:solidFill>
+                  <a:srgbClr val="222222"/>
+                </a:solidFill>
+                <a:latin typeface="Calibri" pitchFamily="34" charset="0"/>
+                <a:ea typeface="Calibri" pitchFamily="34" charset="-122"/>
+                <a:cs typeface="Calibri" pitchFamily="34" charset="-120"/>
+              </a:rPr>
+              <a:t>18 Nov</a:t>
+            </a:r>
+            <a:endParaRPr lang="en-US" sz="700" dirty="0"/>
+          </a:p>
+        </p:txBody>
+      </p:sp>
+      <p:sp>
+        <p:nvSpPr>
+          <p:cNvPr id="330" name="Shape 328"/>
+          <p:cNvSpPr/>
+          <p:nvPr/>
+        </p:nvSpPr>
+        <p:spPr>
+          <a:xfrm>
+            <a:off x="9175966" y="5082106"/>
+            <a:ext cx="1686344" cy="125075"/>
+          </a:xfrm>
+          <a:prstGeom prst="roundRect">
+            <a:avLst>
+              <a:gd name="adj" fmla="val 29243"/>
+            </a:avLst>
+          </a:prstGeom>
+          <a:solidFill>
+            <a:srgbClr val="2E9E6B"/>
+          </a:solidFill>
+          <a:ln w="19050">
+            <a:solidFill>
+              <a:srgbClr val="222222"/>
+            </a:solidFill>
+            <a:prstDash val="solid"/>
+          </a:ln>
+          <a:effectLst>
+            <a:outerShdw sx="100000" sy="100000" kx="0" ky="0" algn="bl" rotWithShape="0" blurRad="38100" dist="12700" dir="5400000">
+              <a:srgbClr val="000000">
+                <a:alpha val="20000"/>
+              </a:srgbClr>
+            </a:outerShdw>
+          </a:effectLst>
+        </p:spPr>
+      </p:sp>
+      <p:sp>
+        <p:nvSpPr>
+          <p:cNvPr id="331" name="Text 329"/>
+          <p:cNvSpPr/>
+          <p:nvPr/>
+        </p:nvSpPr>
+        <p:spPr>
+          <a:xfrm>
+            <a:off x="9175966" y="5082106"/>
+            <a:ext cx="1686344" cy="125075"/>
+          </a:xfrm>
+          <a:prstGeom prst="rect">
+            <a:avLst/>
+          </a:prstGeom>
+          <a:noFill/>
+          <a:ln/>
+        </p:spPr>
+        <p:txBody>
+          <a:bodyPr wrap="square" lIns="0" tIns="0" rIns="0" bIns="0" rtlCol="0" anchor="ctr">
+            <a:normAutofit/>
+          </a:bodyPr>
+          <a:lstStyle/>
+          <a:p>
+            <a:pPr algn="ctr" indent="0" marL="0">
+              <a:buNone/>
+            </a:pPr>
+            <a:r>
+              <a:rPr lang="en-US" altLang="en-US" sz="700" b="1" dirty="0">
+                <a:solidFill>
+                  <a:srgbClr val="FFFFFF"/>
+                </a:solidFill>
+                <a:latin typeface="Calibri" pitchFamily="34" charset="0"/>
+                <a:ea typeface="Calibri" pitchFamily="34" charset="-122"/>
+                <a:cs typeface="Calibri" pitchFamily="34" charset="-120"/>
+              </a:rPr>
+              <a:t>12 d</a:t>
+            </a:r>
+            <a:endParaRPr lang="en-US" sz="700" dirty="0"/>
+          </a:p>
+        </p:txBody>
+      </p:sp>
+      <p:sp>
+        <p:nvSpPr>
+          <p:cNvPr id="332" name="Shape 330"/>
+          <p:cNvSpPr/>
+          <p:nvPr/>
+        </p:nvSpPr>
+        <p:spPr>
+          <a:xfrm>
+            <a:off x="365760" y="5252466"/>
+            <a:ext cx="11460175" cy="215646"/>
+          </a:xfrm>
+          <a:prstGeom prst="rect">
+            <a:avLst/>
+          </a:prstGeom>
+          <a:solidFill>
+            <a:srgbClr val="F6F9FA"/>
+          </a:solidFill>
+          <a:ln w="6350">
+            <a:solidFill>
+              <a:srgbClr val="DFE6EA"/>
+            </a:solidFill>
+            <a:prstDash val="solid"/>
+          </a:ln>
+        </p:spPr>
+      </p:sp>
+      <p:sp>
+        <p:nvSpPr>
+          <p:cNvPr id="333" name="Shape 331"/>
+          <p:cNvSpPr/>
+          <p:nvPr/>
+        </p:nvSpPr>
+        <p:spPr>
+          <a:xfrm>
+            <a:off x="438912" y="5241417"/>
+            <a:ext cx="237744" cy="237744"/>
+          </a:xfrm>
+          <a:prstGeom prst="ellipse">
+            <a:avLst>
+              <a:gd name="adj" fmla="val 32692"/>
+            </a:avLst>
+          </a:prstGeom>
+          <a:solidFill>
+            <a:srgbClr val="D68A00"/>
+          </a:solidFill>
+          <a:ln w="19050">
+            <a:solidFill>
+              <a:srgbClr val="222222"/>
+            </a:solidFill>
+            <a:prstDash val="solid"/>
+          </a:ln>
+        </p:spPr>
+      </p:sp>
+      <p:sp>
+        <p:nvSpPr>
+          <p:cNvPr id="334" name="Text 332"/>
+          <p:cNvSpPr/>
+          <p:nvPr/>
+        </p:nvSpPr>
+        <p:spPr>
+          <a:xfrm>
+            <a:off x="365760" y="5252466"/>
+            <a:ext cx="384048" cy="215646"/>
+          </a:xfrm>
+          <a:prstGeom prst="rect">
+            <a:avLst/>
+          </a:prstGeom>
+          <a:noFill/>
+          <a:ln/>
+        </p:spPr>
+        <p:txBody>
+          <a:bodyPr wrap="square" lIns="0" tIns="0" rIns="0" bIns="0" rtlCol="0" anchor="ctr">
+            <a:normAutofit/>
+          </a:bodyPr>
+          <a:lstStyle/>
+          <a:p>
+            <a:pPr algn="ctr" indent="0" marL="0">
+              <a:buNone/>
+            </a:pPr>
+            <a:r>
+              <a:rPr lang="en-US" altLang="en-US" sz="850" b="1" dirty="0">
+                <a:solidFill>
+                  <a:srgbClr val="FFFFFF"/>
+                </a:solidFill>
+                <a:latin typeface="Calibri" pitchFamily="34" charset="0"/>
+                <a:ea typeface="Calibri" pitchFamily="34" charset="-122"/>
+                <a:cs typeface="Calibri" pitchFamily="34" charset="-120"/>
+              </a:rPr>
+              <a:t>G</a:t>
+            </a:r>
+            <a:endParaRPr lang="en-US" sz="850" dirty="0"/>
+          </a:p>
+        </p:txBody>
+      </p:sp>
+      <p:sp>
+        <p:nvSpPr>
+          <p:cNvPr id="335" name="Text 333"/>
+          <p:cNvSpPr/>
+          <p:nvPr/>
+        </p:nvSpPr>
+        <p:spPr>
+          <a:xfrm>
+            <a:off x="822960" y="5252466"/>
+            <a:ext cx="2606040" cy="215646"/>
+          </a:xfrm>
+          <a:prstGeom prst="rect">
+            <a:avLst/>
+          </a:prstGeom>
+          <a:noFill/>
+          <a:ln/>
+        </p:spPr>
+        <p:txBody>
+          <a:bodyPr wrap="square" lIns="0" tIns="0" rIns="0" bIns="0" rtlCol="0" anchor="ctr">
+            <a:normAutofit/>
+          </a:bodyPr>
+          <a:lstStyle/>
+          <a:p>
+            <a:pPr algn="l" indent="0" marL="0">
+              <a:buNone/>
+            </a:pPr>
+            <a:r>
+              <a:rPr lang="en-US" altLang="en-US" sz="750" b="1" dirty="0">
+                <a:solidFill>
+                  <a:srgbClr val="222222"/>
+                </a:solidFill>
+                <a:latin typeface="Calibri" pitchFamily="34" charset="0"/>
+                <a:ea typeface="Calibri" pitchFamily="34" charset="-122"/>
+                <a:cs typeface="Calibri" pitchFamily="34" charset="-120"/>
+              </a:rPr>
+              <a:t>Backfilling works for the building</a:t>
+            </a:r>
+            <a:endParaRPr lang="en-US" sz="750" dirty="0"/>
+          </a:p>
+        </p:txBody>
+      </p:sp>
+      <p:sp>
+        <p:nvSpPr>
+          <p:cNvPr id="336" name="Text 334"/>
+          <p:cNvSpPr/>
+          <p:nvPr/>
+        </p:nvSpPr>
+        <p:spPr>
+          <a:xfrm>
+            <a:off x="3447288" y="5252466"/>
+            <a:ext cx="777240" cy="215646"/>
+          </a:xfrm>
+          <a:prstGeom prst="rect">
+            <a:avLst/>
+          </a:prstGeom>
+          <a:noFill/>
+          <a:ln/>
+        </p:spPr>
+        <p:txBody>
+          <a:bodyPr wrap="square" lIns="0" tIns="0" rIns="0" bIns="0" rtlCol="0" anchor="ctr">
+            <a:normAutofit/>
+          </a:bodyPr>
+          <a:lstStyle/>
+          <a:p>
+            <a:pPr algn="ctr" indent="0" marL="0">
+              <a:buNone/>
+            </a:pPr>
+            <a:r>
+              <a:rPr lang="en-US" altLang="en-US" sz="700" dirty="0">
+                <a:solidFill>
+                  <a:srgbClr val="444444"/>
+                </a:solidFill>
+                <a:latin typeface="Calibri" pitchFamily="34" charset="0"/>
+                <a:ea typeface="Calibri" pitchFamily="34" charset="-122"/>
+                <a:cs typeface="Calibri" pitchFamily="34" charset="-120"/>
+              </a:rPr>
+              <a:t>F · FS</a:t>
+            </a:r>
+            <a:endParaRPr lang="en-US" sz="700" dirty="0"/>
+          </a:p>
+        </p:txBody>
+      </p:sp>
+      <p:sp>
+        <p:nvSpPr>
+          <p:cNvPr id="337" name="Text 335"/>
+          <p:cNvSpPr/>
+          <p:nvPr/>
+        </p:nvSpPr>
+        <p:spPr>
+          <a:xfrm>
+            <a:off x="4224528" y="5252466"/>
+            <a:ext cx="502920" cy="215646"/>
+          </a:xfrm>
+          <a:prstGeom prst="rect">
+            <a:avLst/>
+          </a:prstGeom>
+          <a:noFill/>
+          <a:ln/>
+        </p:spPr>
+        <p:txBody>
+          <a:bodyPr wrap="square" lIns="0" tIns="0" rIns="0" bIns="0" rtlCol="0" anchor="ctr">
+            <a:normAutofit/>
+          </a:bodyPr>
+          <a:lstStyle/>
+          <a:p>
+            <a:pPr algn="ctr" indent="0" marL="0">
+              <a:buNone/>
+            </a:pPr>
+            <a:r>
+              <a:rPr lang="en-US" altLang="en-US" sz="900" b="1" dirty="0">
+                <a:solidFill>
+                  <a:srgbClr val="222222"/>
+                </a:solidFill>
+                <a:latin typeface="Calibri" pitchFamily="34" charset="0"/>
+                <a:ea typeface="Calibri" pitchFamily="34" charset="-122"/>
+                <a:cs typeface="Calibri" pitchFamily="34" charset="-120"/>
+              </a:rPr>
+              <a:t>5</a:t>
+            </a:r>
+            <a:endParaRPr lang="en-US" sz="900" dirty="0"/>
+          </a:p>
+        </p:txBody>
+      </p:sp>
+      <p:sp>
+        <p:nvSpPr>
+          <p:cNvPr id="338" name="Text 336"/>
+          <p:cNvSpPr/>
+          <p:nvPr/>
+        </p:nvSpPr>
+        <p:spPr>
+          <a:xfrm>
+            <a:off x="4727448" y="5252466"/>
+            <a:ext cx="658368" cy="215646"/>
+          </a:xfrm>
+          <a:prstGeom prst="rect">
+            <a:avLst/>
+          </a:prstGeom>
+          <a:noFill/>
+          <a:ln/>
+        </p:spPr>
+        <p:txBody>
+          <a:bodyPr wrap="square" lIns="0" tIns="0" rIns="0" bIns="0" rtlCol="0" anchor="ctr">
+            <a:normAutofit/>
+          </a:bodyPr>
+          <a:lstStyle/>
+          <a:p>
+            <a:pPr algn="ctr" indent="0" marL="0">
+              <a:buNone/>
+            </a:pPr>
+            <a:r>
+              <a:rPr lang="en-US" altLang="en-US" sz="700" b="1" dirty="0">
+                <a:solidFill>
+                  <a:srgbClr val="222222"/>
+                </a:solidFill>
+                <a:latin typeface="Calibri" pitchFamily="34" charset="0"/>
+                <a:ea typeface="Calibri" pitchFamily="34" charset="-122"/>
+                <a:cs typeface="Calibri" pitchFamily="34" charset="-120"/>
+              </a:rPr>
+              <a:t>19 Nov</a:t>
+            </a:r>
+            <a:endParaRPr lang="en-US" sz="700" dirty="0"/>
+          </a:p>
+        </p:txBody>
+      </p:sp>
+      <p:sp>
+        <p:nvSpPr>
+          <p:cNvPr id="339" name="Text 337"/>
+          <p:cNvSpPr/>
+          <p:nvPr/>
+        </p:nvSpPr>
+        <p:spPr>
+          <a:xfrm>
+            <a:off x="5385816" y="5252466"/>
+            <a:ext cx="658368" cy="215646"/>
+          </a:xfrm>
+          <a:prstGeom prst="rect">
+            <a:avLst/>
+          </a:prstGeom>
+          <a:noFill/>
+          <a:ln/>
+        </p:spPr>
+        <p:txBody>
+          <a:bodyPr wrap="square" lIns="0" tIns="0" rIns="0" bIns="0" rtlCol="0" anchor="ctr">
+            <a:normAutofit/>
+          </a:bodyPr>
+          <a:lstStyle/>
+          <a:p>
+            <a:pPr algn="ctr" indent="0" marL="0">
+              <a:buNone/>
+            </a:pPr>
+            <a:r>
+              <a:rPr lang="en-US" altLang="en-US" sz="700" b="1" dirty="0">
+                <a:solidFill>
+                  <a:srgbClr val="222222"/>
+                </a:solidFill>
+                <a:latin typeface="Calibri" pitchFamily="34" charset="0"/>
+                <a:ea typeface="Calibri" pitchFamily="34" charset="-122"/>
+                <a:cs typeface="Calibri" pitchFamily="34" charset="-120"/>
+              </a:rPr>
+              <a:t>24 Nov</a:t>
+            </a:r>
+            <a:endParaRPr lang="en-US" sz="700" dirty="0"/>
+          </a:p>
+        </p:txBody>
+      </p:sp>
+      <p:sp>
+        <p:nvSpPr>
+          <p:cNvPr id="340" name="Shape 338"/>
+          <p:cNvSpPr/>
+          <p:nvPr/>
+        </p:nvSpPr>
+        <p:spPr>
+          <a:xfrm>
+            <a:off x="10862310" y="5297752"/>
+            <a:ext cx="722719" cy="125075"/>
+          </a:xfrm>
+          <a:prstGeom prst="roundRect">
+            <a:avLst>
+              <a:gd name="adj" fmla="val 29243"/>
+            </a:avLst>
+          </a:prstGeom>
+          <a:solidFill>
+            <a:srgbClr val="D68A00"/>
+          </a:solidFill>
+          <a:ln w="19050">
+            <a:solidFill>
+              <a:srgbClr val="222222"/>
+            </a:solidFill>
+            <a:prstDash val="solid"/>
+          </a:ln>
+          <a:effectLst>
+            <a:outerShdw sx="100000" sy="100000" kx="0" ky="0" algn="bl" rotWithShape="0" blurRad="38100" dist="12700" dir="5400000">
+              <a:srgbClr val="000000">
+                <a:alpha val="20000"/>
+              </a:srgbClr>
+            </a:outerShdw>
+          </a:effectLst>
+        </p:spPr>
+      </p:sp>
+      <p:sp>
+        <p:nvSpPr>
+          <p:cNvPr id="341" name="Text 339"/>
+          <p:cNvSpPr/>
+          <p:nvPr/>
+        </p:nvSpPr>
+        <p:spPr>
+          <a:xfrm>
+            <a:off x="10862310" y="5297752"/>
+            <a:ext cx="722719" cy="125075"/>
+          </a:xfrm>
+          <a:prstGeom prst="rect">
+            <a:avLst/>
+          </a:prstGeom>
+          <a:noFill/>
+          <a:ln/>
+        </p:spPr>
+        <p:txBody>
+          <a:bodyPr wrap="square" lIns="0" tIns="0" rIns="0" bIns="0" rtlCol="0" anchor="ctr">
+            <a:normAutofit/>
+          </a:bodyPr>
+          <a:lstStyle/>
+          <a:p>
+            <a:pPr algn="ctr" indent="0" marL="0">
+              <a:buNone/>
+            </a:pPr>
+            <a:r>
+              <a:rPr lang="en-US" altLang="en-US" sz="700" b="1" dirty="0">
+                <a:solidFill>
+                  <a:srgbClr val="FFFFFF"/>
+                </a:solidFill>
+                <a:latin typeface="Calibri" pitchFamily="34" charset="0"/>
+                <a:ea typeface="Calibri" pitchFamily="34" charset="-122"/>
+                <a:cs typeface="Calibri" pitchFamily="34" charset="-120"/>
+              </a:rPr>
               <a:t>5 d</a:t>
             </a:r>
-            <a:endParaRPr lang="en-US" sz="800" dirty="0"/>
-          </a:p>
-        </p:txBody>
-      </p:sp>
-      <p:sp>
-        <p:nvSpPr>
-          <p:cNvPr id="283" name="Shape 281"/>
-          <p:cNvSpPr/>
-          <p:nvPr/>
-        </p:nvSpPr>
-        <p:spPr>
-          <a:xfrm>
-            <a:off x="6460407" y="2882287"/>
-            <a:ext cx="0" cy="292641"/>
+            <a:endParaRPr lang="en-US" sz="700" dirty="0"/>
+          </a:p>
+        </p:txBody>
+      </p:sp>
+      <p:sp>
+        <p:nvSpPr>
+          <p:cNvPr id="342" name="Shape 340"/>
+          <p:cNvSpPr/>
+          <p:nvPr/>
+        </p:nvSpPr>
+        <p:spPr>
+          <a:xfrm>
+            <a:off x="6460407" y="3266366"/>
+            <a:ext cx="0" cy="153109"/>
           </a:xfrm>
           <a:prstGeom prst="line">
             <a:avLst/>
@@ -16658,13 +18819,201 @@
       </p:sp>
       <p:sp>
         <p:nvSpPr>
-          <p:cNvPr id="284" name="Shape 282"/>
-          <p:cNvSpPr/>
-          <p:nvPr/>
-        </p:nvSpPr>
-        <p:spPr>
-          <a:xfrm>
-            <a:off x="6460407" y="3174927"/>
+          <p:cNvPr id="343" name="Shape 341"/>
+          <p:cNvSpPr/>
+          <p:nvPr/>
+        </p:nvSpPr>
+        <p:spPr>
+          <a:xfrm>
+            <a:off x="6460407" y="3419475"/>
+            <a:ext cx="56445" cy="0"/>
+          </a:xfrm>
+          <a:prstGeom prst="line">
+            <a:avLst/>
+          </a:prstGeom>
+          <a:noFill/>
+          <a:ln w="13970">
+            <a:solidFill>
+              <a:srgbClr val="2D3338"/>
+            </a:solidFill>
+            <a:prstDash val="solid"/>
+            <a:tailEnd type="triangle"/>
+          </a:ln>
+        </p:spPr>
+      </p:sp>
+      <p:sp>
+        <p:nvSpPr>
+          <p:cNvPr id="344" name="Shape 342"/>
+          <p:cNvSpPr/>
+          <p:nvPr/>
+        </p:nvSpPr>
+        <p:spPr>
+          <a:xfrm>
+            <a:off x="6580861" y="3482012"/>
+            <a:ext cx="0" cy="153109"/>
+          </a:xfrm>
+          <a:prstGeom prst="line">
+            <a:avLst/>
+          </a:prstGeom>
+          <a:noFill/>
+          <a:ln w="13970">
+            <a:solidFill>
+              <a:srgbClr val="2D3338"/>
+            </a:solidFill>
+            <a:prstDash val="solid"/>
+          </a:ln>
+        </p:spPr>
+      </p:sp>
+      <p:sp>
+        <p:nvSpPr>
+          <p:cNvPr id="345" name="Shape 343"/>
+          <p:cNvSpPr/>
+          <p:nvPr/>
+        </p:nvSpPr>
+        <p:spPr>
+          <a:xfrm>
+            <a:off x="6580861" y="3635121"/>
+            <a:ext cx="56445" cy="0"/>
+          </a:xfrm>
+          <a:prstGeom prst="line">
+            <a:avLst/>
+          </a:prstGeom>
+          <a:noFill/>
+          <a:ln w="13970">
+            <a:solidFill>
+              <a:srgbClr val="2D3338"/>
+            </a:solidFill>
+            <a:prstDash val="solid"/>
+            <a:tailEnd type="triangle"/>
+          </a:ln>
+        </p:spPr>
+      </p:sp>
+      <p:sp>
+        <p:nvSpPr>
+          <p:cNvPr id="346" name="Shape 344"/>
+          <p:cNvSpPr/>
+          <p:nvPr/>
+        </p:nvSpPr>
+        <p:spPr>
+          <a:xfrm>
+            <a:off x="6701314" y="3697658"/>
+            <a:ext cx="0" cy="153109"/>
+          </a:xfrm>
+          <a:prstGeom prst="line">
+            <a:avLst/>
+          </a:prstGeom>
+          <a:noFill/>
+          <a:ln w="13970">
+            <a:solidFill>
+              <a:srgbClr val="2D3338"/>
+            </a:solidFill>
+            <a:prstDash val="solid"/>
+          </a:ln>
+        </p:spPr>
+      </p:sp>
+      <p:sp>
+        <p:nvSpPr>
+          <p:cNvPr id="347" name="Shape 345"/>
+          <p:cNvSpPr/>
+          <p:nvPr/>
+        </p:nvSpPr>
+        <p:spPr>
+          <a:xfrm>
+            <a:off x="6701314" y="3850767"/>
+            <a:ext cx="176898" cy="0"/>
+          </a:xfrm>
+          <a:prstGeom prst="line">
+            <a:avLst/>
+          </a:prstGeom>
+          <a:noFill/>
+          <a:ln w="13970">
+            <a:solidFill>
+              <a:srgbClr val="2D3338"/>
+            </a:solidFill>
+            <a:prstDash val="solid"/>
+            <a:tailEnd type="triangle"/>
+          </a:ln>
+        </p:spPr>
+      </p:sp>
+      <p:sp>
+        <p:nvSpPr>
+          <p:cNvPr id="348" name="Shape 346"/>
+          <p:cNvSpPr/>
+          <p:nvPr/>
+        </p:nvSpPr>
+        <p:spPr>
+          <a:xfrm>
+            <a:off x="6942220" y="3913304"/>
+            <a:ext cx="0" cy="153109"/>
+          </a:xfrm>
+          <a:prstGeom prst="line">
+            <a:avLst/>
+          </a:prstGeom>
+          <a:noFill/>
+          <a:ln w="13970">
+            <a:solidFill>
+              <a:srgbClr val="2D3338"/>
+            </a:solidFill>
+            <a:prstDash val="solid"/>
+          </a:ln>
+        </p:spPr>
+      </p:sp>
+      <p:sp>
+        <p:nvSpPr>
+          <p:cNvPr id="349" name="Shape 347"/>
+          <p:cNvSpPr/>
+          <p:nvPr/>
+        </p:nvSpPr>
+        <p:spPr>
+          <a:xfrm>
+            <a:off x="6942220" y="4066413"/>
+            <a:ext cx="56445" cy="0"/>
+          </a:xfrm>
+          <a:prstGeom prst="line">
+            <a:avLst/>
+          </a:prstGeom>
+          <a:noFill/>
+          <a:ln w="13970">
+            <a:solidFill>
+              <a:srgbClr val="2D3338"/>
+            </a:solidFill>
+            <a:prstDash val="solid"/>
+            <a:tailEnd type="triangle"/>
+          </a:ln>
+        </p:spPr>
+      </p:sp>
+      <p:sp>
+        <p:nvSpPr>
+          <p:cNvPr id="350" name="Shape 348"/>
+          <p:cNvSpPr/>
+          <p:nvPr/>
+        </p:nvSpPr>
+        <p:spPr>
+          <a:xfrm>
+            <a:off x="6460407" y="3050720"/>
+            <a:ext cx="0" cy="1231339"/>
+          </a:xfrm>
+          <a:prstGeom prst="line">
+            <a:avLst/>
+          </a:prstGeom>
+          <a:noFill/>
+          <a:ln w="13970">
+            <a:solidFill>
+              <a:srgbClr val="2D3338"/>
+            </a:solidFill>
+            <a:prstDash val="solid"/>
+          </a:ln>
+        </p:spPr>
+      </p:sp>
+      <p:sp>
+        <p:nvSpPr>
+          <p:cNvPr id="351" name="Shape 349"/>
+          <p:cNvSpPr/>
+          <p:nvPr/>
+        </p:nvSpPr>
+        <p:spPr>
+          <a:xfrm>
+            <a:off x="6460407" y="4282059"/>
             <a:ext cx="779164" cy="0"/>
           </a:xfrm>
           <a:prstGeom prst="line">
@@ -16682,13 +19031,13 @@
       </p:sp>
       <p:sp>
         <p:nvSpPr>
-          <p:cNvPr id="285" name="Shape 283"/>
-          <p:cNvSpPr/>
-          <p:nvPr/>
-        </p:nvSpPr>
-        <p:spPr>
-          <a:xfrm>
-            <a:off x="7202996" y="2771285"/>
+          <p:cNvPr id="352" name="Shape 350"/>
+          <p:cNvSpPr/>
+          <p:nvPr/>
+        </p:nvSpPr>
+        <p:spPr>
+          <a:xfrm>
+            <a:off x="7202996" y="2988183"/>
             <a:ext cx="45720" cy="0"/>
           </a:xfrm>
           <a:prstGeom prst="line">
@@ -16705,14 +19054,14 @@
       </p:sp>
       <p:sp>
         <p:nvSpPr>
-          <p:cNvPr id="286" name="Shape 284"/>
-          <p:cNvSpPr/>
-          <p:nvPr/>
-        </p:nvSpPr>
-        <p:spPr>
-          <a:xfrm>
-            <a:off x="7202996" y="2771285"/>
-            <a:ext cx="0" cy="807285"/>
+          <p:cNvPr id="353" name="Shape 351"/>
+          <p:cNvSpPr/>
+          <p:nvPr/>
+        </p:nvSpPr>
+        <p:spPr>
+          <a:xfrm>
+            <a:off x="7202996" y="2988183"/>
+            <a:ext cx="0" cy="1509522"/>
           </a:xfrm>
           <a:prstGeom prst="line">
             <a:avLst/>
@@ -16728,13 +19077,13 @@
       </p:sp>
       <p:sp>
         <p:nvSpPr>
-          <p:cNvPr id="287" name="Shape 285"/>
-          <p:cNvSpPr/>
-          <p:nvPr/>
-        </p:nvSpPr>
-        <p:spPr>
-          <a:xfrm>
-            <a:off x="7202996" y="3578570"/>
+          <p:cNvPr id="354" name="Shape 352"/>
+          <p:cNvSpPr/>
+          <p:nvPr/>
+        </p:nvSpPr>
+        <p:spPr>
+          <a:xfrm>
+            <a:off x="7202996" y="4497705"/>
             <a:ext cx="36576" cy="0"/>
           </a:xfrm>
           <a:prstGeom prst="line">
@@ -16752,13 +19101,13 @@
       </p:sp>
       <p:sp>
         <p:nvSpPr>
-          <p:cNvPr id="288" name="Shape 286"/>
-          <p:cNvSpPr/>
-          <p:nvPr/>
-        </p:nvSpPr>
-        <p:spPr>
-          <a:xfrm>
-            <a:off x="7805261" y="3578570"/>
+          <p:cNvPr id="355" name="Shape 353"/>
+          <p:cNvSpPr/>
+          <p:nvPr/>
+        </p:nvSpPr>
+        <p:spPr>
+          <a:xfrm>
+            <a:off x="7805261" y="4497705"/>
             <a:ext cx="45720" cy="0"/>
           </a:xfrm>
           <a:prstGeom prst="line">
@@ -16775,14 +19124,14 @@
       </p:sp>
       <p:sp>
         <p:nvSpPr>
-          <p:cNvPr id="289" name="Shape 287"/>
-          <p:cNvSpPr/>
-          <p:nvPr/>
-        </p:nvSpPr>
-        <p:spPr>
-          <a:xfrm>
-            <a:off x="7805261" y="3578570"/>
-            <a:ext cx="0" cy="403642"/>
+          <p:cNvPr id="356" name="Shape 354"/>
+          <p:cNvSpPr/>
+          <p:nvPr/>
+        </p:nvSpPr>
+        <p:spPr>
+          <a:xfrm>
+            <a:off x="7805261" y="4497705"/>
+            <a:ext cx="0" cy="215646"/>
           </a:xfrm>
           <a:prstGeom prst="line">
             <a:avLst/>
@@ -16798,13 +19147,13 @@
       </p:sp>
       <p:sp>
         <p:nvSpPr>
-          <p:cNvPr id="290" name="Shape 288"/>
-          <p:cNvSpPr/>
-          <p:nvPr/>
-        </p:nvSpPr>
-        <p:spPr>
-          <a:xfrm>
-            <a:off x="7805261" y="3982212"/>
+          <p:cNvPr id="357" name="Shape 355"/>
+          <p:cNvSpPr/>
+          <p:nvPr/>
+        </p:nvSpPr>
+        <p:spPr>
+          <a:xfrm>
+            <a:off x="7805261" y="4713351"/>
             <a:ext cx="36576" cy="0"/>
           </a:xfrm>
           <a:prstGeom prst="line">
@@ -16822,13 +19171,13 @@
       </p:sp>
       <p:sp>
         <p:nvSpPr>
-          <p:cNvPr id="291" name="Shape 289"/>
-          <p:cNvSpPr/>
-          <p:nvPr/>
-        </p:nvSpPr>
-        <p:spPr>
-          <a:xfrm>
-            <a:off x="9130246" y="3982212"/>
+          <p:cNvPr id="358" name="Shape 356"/>
+          <p:cNvSpPr/>
+          <p:nvPr/>
+        </p:nvSpPr>
+        <p:spPr>
+          <a:xfrm>
+            <a:off x="9130246" y="4713351"/>
             <a:ext cx="45720" cy="0"/>
           </a:xfrm>
           <a:prstGeom prst="line">
@@ -16845,14 +19194,14 @@
       </p:sp>
       <p:sp>
         <p:nvSpPr>
-          <p:cNvPr id="292" name="Shape 290"/>
-          <p:cNvSpPr/>
-          <p:nvPr/>
-        </p:nvSpPr>
-        <p:spPr>
-          <a:xfrm>
-            <a:off x="9130246" y="3982212"/>
-            <a:ext cx="0" cy="403642"/>
+          <p:cNvPr id="359" name="Shape 357"/>
+          <p:cNvSpPr/>
+          <p:nvPr/>
+        </p:nvSpPr>
+        <p:spPr>
+          <a:xfrm>
+            <a:off x="9130246" y="4713351"/>
+            <a:ext cx="0" cy="215646"/>
           </a:xfrm>
           <a:prstGeom prst="line">
             <a:avLst/>
@@ -16868,13 +19217,13 @@
       </p:sp>
       <p:sp>
         <p:nvSpPr>
-          <p:cNvPr id="293" name="Shape 291"/>
-          <p:cNvSpPr/>
-          <p:nvPr/>
-        </p:nvSpPr>
-        <p:spPr>
-          <a:xfrm>
-            <a:off x="9130246" y="4385854"/>
+          <p:cNvPr id="360" name="Shape 358"/>
+          <p:cNvSpPr/>
+          <p:nvPr/>
+        </p:nvSpPr>
+        <p:spPr>
+          <a:xfrm>
+            <a:off x="9130246" y="4928997"/>
             <a:ext cx="36576" cy="0"/>
           </a:xfrm>
           <a:prstGeom prst="line">
@@ -16892,13 +19241,13 @@
       </p:sp>
       <p:sp>
         <p:nvSpPr>
-          <p:cNvPr id="294" name="Shape 292"/>
-          <p:cNvSpPr/>
-          <p:nvPr/>
-        </p:nvSpPr>
-        <p:spPr>
-          <a:xfrm>
-            <a:off x="9130246" y="3982212"/>
+          <p:cNvPr id="361" name="Shape 359"/>
+          <p:cNvSpPr/>
+          <p:nvPr/>
+        </p:nvSpPr>
+        <p:spPr>
+          <a:xfrm>
+            <a:off x="9130246" y="4713351"/>
             <a:ext cx="45720" cy="0"/>
           </a:xfrm>
           <a:prstGeom prst="line">
@@ -16915,14 +19264,14 @@
       </p:sp>
       <p:sp>
         <p:nvSpPr>
-          <p:cNvPr id="295" name="Shape 293"/>
-          <p:cNvSpPr/>
-          <p:nvPr/>
-        </p:nvSpPr>
-        <p:spPr>
-          <a:xfrm>
-            <a:off x="9130246" y="3982212"/>
-            <a:ext cx="0" cy="807285"/>
+          <p:cNvPr id="362" name="Shape 360"/>
+          <p:cNvSpPr/>
+          <p:nvPr/>
+        </p:nvSpPr>
+        <p:spPr>
+          <a:xfrm>
+            <a:off x="9130246" y="4713351"/>
+            <a:ext cx="0" cy="431292"/>
           </a:xfrm>
           <a:prstGeom prst="line">
             <a:avLst/>
@@ -16938,13 +19287,13 @@
       </p:sp>
       <p:sp>
         <p:nvSpPr>
-          <p:cNvPr id="296" name="Shape 294"/>
-          <p:cNvSpPr/>
-          <p:nvPr/>
-        </p:nvSpPr>
-        <p:spPr>
-          <a:xfrm>
-            <a:off x="9130246" y="4789497"/>
+          <p:cNvPr id="363" name="Shape 361"/>
+          <p:cNvSpPr/>
+          <p:nvPr/>
+        </p:nvSpPr>
+        <p:spPr>
+          <a:xfrm>
+            <a:off x="9130246" y="5144643"/>
             <a:ext cx="36576" cy="0"/>
           </a:xfrm>
           <a:prstGeom prst="line">
@@ -16962,13 +19311,13 @@
       </p:sp>
       <p:sp>
         <p:nvSpPr>
-          <p:cNvPr id="297" name="Shape 295"/>
-          <p:cNvSpPr/>
-          <p:nvPr/>
-        </p:nvSpPr>
-        <p:spPr>
-          <a:xfrm>
-            <a:off x="10816590" y="4789497"/>
+          <p:cNvPr id="364" name="Shape 362"/>
+          <p:cNvSpPr/>
+          <p:nvPr/>
+        </p:nvSpPr>
+        <p:spPr>
+          <a:xfrm>
+            <a:off x="10816590" y="5144643"/>
             <a:ext cx="45720" cy="0"/>
           </a:xfrm>
           <a:prstGeom prst="line">
@@ -16985,14 +19334,14 @@
       </p:sp>
       <p:sp>
         <p:nvSpPr>
-          <p:cNvPr id="298" name="Shape 296"/>
-          <p:cNvSpPr/>
-          <p:nvPr/>
-        </p:nvSpPr>
-        <p:spPr>
-          <a:xfrm>
-            <a:off x="10816590" y="4789497"/>
-            <a:ext cx="0" cy="403642"/>
+          <p:cNvPr id="365" name="Shape 363"/>
+          <p:cNvSpPr/>
+          <p:nvPr/>
+        </p:nvSpPr>
+        <p:spPr>
+          <a:xfrm>
+            <a:off x="10816590" y="5144643"/>
+            <a:ext cx="0" cy="215646"/>
           </a:xfrm>
           <a:prstGeom prst="line">
             <a:avLst/>
@@ -17008,13 +19357,13 @@
       </p:sp>
       <p:sp>
         <p:nvSpPr>
-          <p:cNvPr id="299" name="Shape 297"/>
-          <p:cNvSpPr/>
-          <p:nvPr/>
-        </p:nvSpPr>
-        <p:spPr>
-          <a:xfrm>
-            <a:off x="10816590" y="5193139"/>
+          <p:cNvPr id="366" name="Shape 364"/>
+          <p:cNvSpPr/>
+          <p:nvPr/>
+        </p:nvSpPr>
+        <p:spPr>
+          <a:xfrm>
+            <a:off x="10816590" y="5360289"/>
             <a:ext cx="36576" cy="0"/>
           </a:xfrm>
           <a:prstGeom prst="line">
@@ -17032,14 +19381,14 @@
       </p:sp>
       <p:sp>
         <p:nvSpPr>
-          <p:cNvPr id="300" name="Shape 298"/>
+          <p:cNvPr id="367" name="Shape 365"/>
           <p:cNvSpPr/>
           <p:nvPr/>
         </p:nvSpPr>
         <p:spPr>
           <a:xfrm>
             <a:off x="7429395" y="1947672"/>
-            <a:ext cx="0" cy="3447288"/>
+            <a:ext cx="0" cy="3520440"/>
           </a:xfrm>
           <a:prstGeom prst="line">
             <a:avLst/>
@@ -17055,13 +19404,13 @@
       </p:sp>
       <p:sp>
         <p:nvSpPr>
-          <p:cNvPr id="301" name="Shape 299"/>
-          <p:cNvSpPr/>
-          <p:nvPr/>
-        </p:nvSpPr>
-        <p:spPr>
-          <a:xfrm>
-            <a:off x="7383675" y="1956816"/>
+          <p:cNvPr id="368" name="Shape 366"/>
+          <p:cNvSpPr/>
+          <p:nvPr/>
+        </p:nvSpPr>
+        <p:spPr>
+          <a:xfrm>
+            <a:off x="7383675" y="2240280"/>
             <a:ext cx="1143000" cy="155448"/>
           </a:xfrm>
           <a:prstGeom prst="roundRect">
@@ -17082,13 +19431,13 @@
       </p:sp>
       <p:sp>
         <p:nvSpPr>
-          <p:cNvPr id="302" name="Text 300"/>
-          <p:cNvSpPr/>
-          <p:nvPr/>
-        </p:nvSpPr>
-        <p:spPr>
-          <a:xfrm>
-            <a:off x="7383675" y="1956816"/>
+          <p:cNvPr id="369" name="Text 367"/>
+          <p:cNvSpPr/>
+          <p:nvPr/>
+        </p:nvSpPr>
+        <p:spPr>
+          <a:xfrm>
+            <a:off x="7383675" y="2240280"/>
             <a:ext cx="1143000" cy="155448"/>
           </a:xfrm>
           <a:prstGeom prst="rect">
@@ -17123,14 +19472,14 @@
       </p:sp>
       <p:sp>
         <p:nvSpPr>
-          <p:cNvPr id="303" name="Shape 301"/>
+          <p:cNvPr id="370" name="Shape 368"/>
           <p:cNvSpPr/>
           <p:nvPr/>
         </p:nvSpPr>
         <p:spPr>
           <a:xfrm>
             <a:off x="365760" y="1325880"/>
-            <a:ext cx="11460175" cy="4069080"/>
+            <a:ext cx="11460175" cy="4142232"/>
           </a:xfrm>
           <a:prstGeom prst="rect">
             <a:avLst/>
@@ -17150,13 +19499,13 @@
       </p:sp>
       <p:sp>
         <p:nvSpPr>
-          <p:cNvPr id="304" name="Shape 302"/>
-          <p:cNvSpPr/>
-          <p:nvPr/>
-        </p:nvSpPr>
-        <p:spPr>
-          <a:xfrm>
-            <a:off x="365760" y="5522976"/>
+          <p:cNvPr id="371" name="Shape 369"/>
+          <p:cNvSpPr/>
+          <p:nvPr/>
+        </p:nvSpPr>
+        <p:spPr>
+          <a:xfrm>
+            <a:off x="365760" y="5577840"/>
             <a:ext cx="2204253" cy="822960"/>
           </a:xfrm>
           <a:prstGeom prst="roundRect">
@@ -17184,13 +19533,13 @@
       </p:sp>
       <p:sp>
         <p:nvSpPr>
-          <p:cNvPr id="305" name="Shape 303"/>
-          <p:cNvSpPr/>
-          <p:nvPr/>
-        </p:nvSpPr>
-        <p:spPr>
-          <a:xfrm>
-            <a:off x="420624" y="5522976"/>
+          <p:cNvPr id="372" name="Shape 370"/>
+          <p:cNvSpPr/>
+          <p:nvPr/>
+        </p:nvSpPr>
+        <p:spPr>
+          <a:xfrm>
+            <a:off x="420624" y="5577840"/>
             <a:ext cx="2094525" cy="54864"/>
           </a:xfrm>
           <a:prstGeom prst="rect">
@@ -17209,13 +19558,13 @@
       </p:sp>
       <p:sp>
         <p:nvSpPr>
-          <p:cNvPr id="306" name="Text 304"/>
-          <p:cNvSpPr/>
-          <p:nvPr/>
-        </p:nvSpPr>
-        <p:spPr>
-          <a:xfrm>
-            <a:off x="475488" y="5614416"/>
+          <p:cNvPr id="373" name="Text 371"/>
+          <p:cNvSpPr/>
+          <p:nvPr/>
+        </p:nvSpPr>
+        <p:spPr>
+          <a:xfrm>
+            <a:off x="475488" y="5669280"/>
             <a:ext cx="1984797" cy="201168"/>
           </a:xfrm>
           <a:prstGeom prst="rect">
@@ -17250,13 +19599,13 @@
       </p:sp>
       <p:sp>
         <p:nvSpPr>
-          <p:cNvPr id="307" name="Text 305"/>
-          <p:cNvSpPr/>
-          <p:nvPr/>
-        </p:nvSpPr>
-        <p:spPr>
-          <a:xfrm>
-            <a:off x="475488" y="5815584"/>
+          <p:cNvPr id="374" name="Text 372"/>
+          <p:cNvSpPr/>
+          <p:nvPr/>
+        </p:nvSpPr>
+        <p:spPr>
+          <a:xfrm>
+            <a:off x="475488" y="5870448"/>
             <a:ext cx="1984797" cy="292608"/>
           </a:xfrm>
           <a:prstGeom prst="rect">
@@ -17291,13 +19640,13 @@
       </p:sp>
       <p:sp>
         <p:nvSpPr>
-          <p:cNvPr id="308" name="Text 306"/>
-          <p:cNvSpPr/>
-          <p:nvPr/>
-        </p:nvSpPr>
-        <p:spPr>
-          <a:xfrm>
-            <a:off x="475488" y="6108192"/>
+          <p:cNvPr id="375" name="Text 373"/>
+          <p:cNvSpPr/>
+          <p:nvPr/>
+        </p:nvSpPr>
+        <p:spPr>
+          <a:xfrm>
+            <a:off x="475488" y="6163056"/>
             <a:ext cx="1984797" cy="182880"/>
           </a:xfrm>
           <a:prstGeom prst="rect">
@@ -17332,13 +19681,13 @@
       </p:sp>
       <p:sp>
         <p:nvSpPr>
-          <p:cNvPr id="309" name="Shape 307"/>
-          <p:cNvSpPr/>
-          <p:nvPr/>
-        </p:nvSpPr>
-        <p:spPr>
-          <a:xfrm>
-            <a:off x="2679741" y="5522976"/>
+          <p:cNvPr id="376" name="Shape 374"/>
+          <p:cNvSpPr/>
+          <p:nvPr/>
+        </p:nvSpPr>
+        <p:spPr>
+          <a:xfrm>
+            <a:off x="2679741" y="5577840"/>
             <a:ext cx="2204253" cy="822960"/>
           </a:xfrm>
           <a:prstGeom prst="roundRect">
@@ -17366,13 +19715,13 @@
       </p:sp>
       <p:sp>
         <p:nvSpPr>
-          <p:cNvPr id="310" name="Shape 308"/>
-          <p:cNvSpPr/>
-          <p:nvPr/>
-        </p:nvSpPr>
-        <p:spPr>
-          <a:xfrm>
-            <a:off x="2734605" y="5522976"/>
+          <p:cNvPr id="377" name="Shape 375"/>
+          <p:cNvSpPr/>
+          <p:nvPr/>
+        </p:nvSpPr>
+        <p:spPr>
+          <a:xfrm>
+            <a:off x="2734605" y="5577840"/>
             <a:ext cx="2094525" cy="54864"/>
           </a:xfrm>
           <a:prstGeom prst="rect">
@@ -17391,13 +19740,13 @@
       </p:sp>
       <p:sp>
         <p:nvSpPr>
-          <p:cNvPr id="311" name="Text 309"/>
-          <p:cNvSpPr/>
-          <p:nvPr/>
-        </p:nvSpPr>
-        <p:spPr>
-          <a:xfrm>
-            <a:off x="2789469" y="5614416"/>
+          <p:cNvPr id="378" name="Text 376"/>
+          <p:cNvSpPr/>
+          <p:nvPr/>
+        </p:nvSpPr>
+        <p:spPr>
+          <a:xfrm>
+            <a:off x="2789469" y="5669280"/>
             <a:ext cx="1984797" cy="201168"/>
           </a:xfrm>
           <a:prstGeom prst="rect">
@@ -17432,13 +19781,13 @@
       </p:sp>
       <p:sp>
         <p:nvSpPr>
-          <p:cNvPr id="312" name="Text 310"/>
-          <p:cNvSpPr/>
-          <p:nvPr/>
-        </p:nvSpPr>
-        <p:spPr>
-          <a:xfrm>
-            <a:off x="2789469" y="5815584"/>
+          <p:cNvPr id="379" name="Text 377"/>
+          <p:cNvSpPr/>
+          <p:nvPr/>
+        </p:nvSpPr>
+        <p:spPr>
+          <a:xfrm>
+            <a:off x="2789469" y="5870448"/>
             <a:ext cx="1984797" cy="292608"/>
           </a:xfrm>
           <a:prstGeom prst="rect">
@@ -17473,13 +19822,13 @@
       </p:sp>
       <p:sp>
         <p:nvSpPr>
-          <p:cNvPr id="313" name="Text 311"/>
-          <p:cNvSpPr/>
-          <p:nvPr/>
-        </p:nvSpPr>
-        <p:spPr>
-          <a:xfrm>
-            <a:off x="2789469" y="6108192"/>
+          <p:cNvPr id="380" name="Text 378"/>
+          <p:cNvSpPr/>
+          <p:nvPr/>
+        </p:nvSpPr>
+        <p:spPr>
+          <a:xfrm>
+            <a:off x="2789469" y="6163056"/>
             <a:ext cx="1984797" cy="182880"/>
           </a:xfrm>
           <a:prstGeom prst="rect">
@@ -17514,13 +19863,13 @@
       </p:sp>
       <p:sp>
         <p:nvSpPr>
-          <p:cNvPr id="314" name="Shape 312"/>
-          <p:cNvSpPr/>
-          <p:nvPr/>
-        </p:nvSpPr>
-        <p:spPr>
-          <a:xfrm>
-            <a:off x="4993721" y="5522976"/>
+          <p:cNvPr id="381" name="Shape 379"/>
+          <p:cNvSpPr/>
+          <p:nvPr/>
+        </p:nvSpPr>
+        <p:spPr>
+          <a:xfrm>
+            <a:off x="4993721" y="5577840"/>
             <a:ext cx="2204253" cy="822960"/>
           </a:xfrm>
           <a:prstGeom prst="roundRect">
@@ -17548,13 +19897,13 @@
       </p:sp>
       <p:sp>
         <p:nvSpPr>
-          <p:cNvPr id="315" name="Shape 313"/>
-          <p:cNvSpPr/>
-          <p:nvPr/>
-        </p:nvSpPr>
-        <p:spPr>
-          <a:xfrm>
-            <a:off x="5048585" y="5522976"/>
+          <p:cNvPr id="382" name="Shape 380"/>
+          <p:cNvSpPr/>
+          <p:nvPr/>
+        </p:nvSpPr>
+        <p:spPr>
+          <a:xfrm>
+            <a:off x="5048585" y="5577840"/>
             <a:ext cx="2094525" cy="54864"/>
           </a:xfrm>
           <a:prstGeom prst="rect">
@@ -17573,13 +19922,13 @@
       </p:sp>
       <p:sp>
         <p:nvSpPr>
-          <p:cNvPr id="316" name="Text 314"/>
-          <p:cNvSpPr/>
-          <p:nvPr/>
-        </p:nvSpPr>
-        <p:spPr>
-          <a:xfrm>
-            <a:off x="5103449" y="5614416"/>
+          <p:cNvPr id="383" name="Text 381"/>
+          <p:cNvSpPr/>
+          <p:nvPr/>
+        </p:nvSpPr>
+        <p:spPr>
+          <a:xfrm>
+            <a:off x="5103449" y="5669280"/>
             <a:ext cx="1984797" cy="201168"/>
           </a:xfrm>
           <a:prstGeom prst="rect">
@@ -17614,13 +19963,13 @@
       </p:sp>
       <p:sp>
         <p:nvSpPr>
-          <p:cNvPr id="317" name="Text 315"/>
-          <p:cNvSpPr/>
-          <p:nvPr/>
-        </p:nvSpPr>
-        <p:spPr>
-          <a:xfrm>
-            <a:off x="5103449" y="5815584"/>
+          <p:cNvPr id="384" name="Text 382"/>
+          <p:cNvSpPr/>
+          <p:nvPr/>
+        </p:nvSpPr>
+        <p:spPr>
+          <a:xfrm>
+            <a:off x="5103449" y="5870448"/>
             <a:ext cx="1984797" cy="292608"/>
           </a:xfrm>
           <a:prstGeom prst="rect">
@@ -17655,13 +20004,13 @@
       </p:sp>
       <p:sp>
         <p:nvSpPr>
-          <p:cNvPr id="318" name="Text 316"/>
-          <p:cNvSpPr/>
-          <p:nvPr/>
-        </p:nvSpPr>
-        <p:spPr>
-          <a:xfrm>
-            <a:off x="5103449" y="6108192"/>
+          <p:cNvPr id="385" name="Text 383"/>
+          <p:cNvSpPr/>
+          <p:nvPr/>
+        </p:nvSpPr>
+        <p:spPr>
+          <a:xfrm>
+            <a:off x="5103449" y="6163056"/>
             <a:ext cx="1984797" cy="182880"/>
           </a:xfrm>
           <a:prstGeom prst="rect">
@@ -17696,13 +20045,13 @@
       </p:sp>
       <p:sp>
         <p:nvSpPr>
-          <p:cNvPr id="319" name="Shape 317"/>
-          <p:cNvSpPr/>
-          <p:nvPr/>
-        </p:nvSpPr>
-        <p:spPr>
-          <a:xfrm>
-            <a:off x="7307702" y="5522976"/>
+          <p:cNvPr id="386" name="Shape 384"/>
+          <p:cNvSpPr/>
+          <p:nvPr/>
+        </p:nvSpPr>
+        <p:spPr>
+          <a:xfrm>
+            <a:off x="7307702" y="5577840"/>
             <a:ext cx="2204253" cy="822960"/>
           </a:xfrm>
           <a:prstGeom prst="roundRect">
@@ -17730,13 +20079,13 @@
       </p:sp>
       <p:sp>
         <p:nvSpPr>
-          <p:cNvPr id="320" name="Shape 318"/>
-          <p:cNvSpPr/>
-          <p:nvPr/>
-        </p:nvSpPr>
-        <p:spPr>
-          <a:xfrm>
-            <a:off x="7362566" y="5522976"/>
+          <p:cNvPr id="387" name="Shape 385"/>
+          <p:cNvSpPr/>
+          <p:nvPr/>
+        </p:nvSpPr>
+        <p:spPr>
+          <a:xfrm>
+            <a:off x="7362566" y="5577840"/>
             <a:ext cx="2094525" cy="54864"/>
           </a:xfrm>
           <a:prstGeom prst="rect">
@@ -17755,13 +20104,13 @@
       </p:sp>
       <p:sp>
         <p:nvSpPr>
-          <p:cNvPr id="321" name="Text 319"/>
-          <p:cNvSpPr/>
-          <p:nvPr/>
-        </p:nvSpPr>
-        <p:spPr>
-          <a:xfrm>
-            <a:off x="7417430" y="5614416"/>
+          <p:cNvPr id="388" name="Text 386"/>
+          <p:cNvSpPr/>
+          <p:nvPr/>
+        </p:nvSpPr>
+        <p:spPr>
+          <a:xfrm>
+            <a:off x="7417430" y="5669280"/>
             <a:ext cx="1984797" cy="201168"/>
           </a:xfrm>
           <a:prstGeom prst="rect">
@@ -17796,13 +20145,13 @@
       </p:sp>
       <p:sp>
         <p:nvSpPr>
-          <p:cNvPr id="322" name="Text 320"/>
-          <p:cNvSpPr/>
-          <p:nvPr/>
-        </p:nvSpPr>
-        <p:spPr>
-          <a:xfrm>
-            <a:off x="7417430" y="5815584"/>
+          <p:cNvPr id="389" name="Text 387"/>
+          <p:cNvSpPr/>
+          <p:nvPr/>
+        </p:nvSpPr>
+        <p:spPr>
+          <a:xfrm>
+            <a:off x="7417430" y="5870448"/>
             <a:ext cx="1984797" cy="292608"/>
           </a:xfrm>
           <a:prstGeom prst="rect">
@@ -17837,13 +20186,13 @@
       </p:sp>
       <p:sp>
         <p:nvSpPr>
-          <p:cNvPr id="323" name="Text 321"/>
-          <p:cNvSpPr/>
-          <p:nvPr/>
-        </p:nvSpPr>
-        <p:spPr>
-          <a:xfrm>
-            <a:off x="7417430" y="6108192"/>
+          <p:cNvPr id="390" name="Text 388"/>
+          <p:cNvSpPr/>
+          <p:nvPr/>
+        </p:nvSpPr>
+        <p:spPr>
+          <a:xfrm>
+            <a:off x="7417430" y="6163056"/>
             <a:ext cx="1984797" cy="182880"/>
           </a:xfrm>
           <a:prstGeom prst="rect">
@@ -17878,13 +20227,13 @@
       </p:sp>
       <p:sp>
         <p:nvSpPr>
-          <p:cNvPr id="324" name="Shape 322"/>
-          <p:cNvSpPr/>
-          <p:nvPr/>
-        </p:nvSpPr>
-        <p:spPr>
-          <a:xfrm>
-            <a:off x="9621683" y="5522976"/>
+          <p:cNvPr id="391" name="Shape 389"/>
+          <p:cNvSpPr/>
+          <p:nvPr/>
+        </p:nvSpPr>
+        <p:spPr>
+          <a:xfrm>
+            <a:off x="9621683" y="5577840"/>
             <a:ext cx="2204253" cy="822960"/>
           </a:xfrm>
           <a:prstGeom prst="roundRect">
@@ -17912,13 +20261,13 @@
       </p:sp>
       <p:sp>
         <p:nvSpPr>
-          <p:cNvPr id="325" name="Shape 323"/>
-          <p:cNvSpPr/>
-          <p:nvPr/>
-        </p:nvSpPr>
-        <p:spPr>
-          <a:xfrm>
-            <a:off x="9676547" y="5522976"/>
+          <p:cNvPr id="392" name="Shape 390"/>
+          <p:cNvSpPr/>
+          <p:nvPr/>
+        </p:nvSpPr>
+        <p:spPr>
+          <a:xfrm>
+            <a:off x="9676547" y="5577840"/>
             <a:ext cx="2094525" cy="54864"/>
           </a:xfrm>
           <a:prstGeom prst="rect">
@@ -17937,13 +20286,13 @@
       </p:sp>
       <p:sp>
         <p:nvSpPr>
-          <p:cNvPr id="326" name="Text 324"/>
-          <p:cNvSpPr/>
-          <p:nvPr/>
-        </p:nvSpPr>
-        <p:spPr>
-          <a:xfrm>
-            <a:off x="9731411" y="5614416"/>
+          <p:cNvPr id="393" name="Text 391"/>
+          <p:cNvSpPr/>
+          <p:nvPr/>
+        </p:nvSpPr>
+        <p:spPr>
+          <a:xfrm>
+            <a:off x="9731411" y="5669280"/>
             <a:ext cx="1984797" cy="201168"/>
           </a:xfrm>
           <a:prstGeom prst="rect">
@@ -17978,13 +20327,13 @@
       </p:sp>
       <p:sp>
         <p:nvSpPr>
-          <p:cNvPr id="327" name="Text 325"/>
-          <p:cNvSpPr/>
-          <p:nvPr/>
-        </p:nvSpPr>
-        <p:spPr>
-          <a:xfrm>
-            <a:off x="9731411" y="5815584"/>
+          <p:cNvPr id="394" name="Text 392"/>
+          <p:cNvSpPr/>
+          <p:nvPr/>
+        </p:nvSpPr>
+        <p:spPr>
+          <a:xfrm>
+            <a:off x="9731411" y="5870448"/>
             <a:ext cx="1984797" cy="292608"/>
           </a:xfrm>
           <a:prstGeom prst="rect">
@@ -18019,13 +20368,13 @@
       </p:sp>
       <p:sp>
         <p:nvSpPr>
-          <p:cNvPr id="328" name="Text 326"/>
-          <p:cNvSpPr/>
-          <p:nvPr/>
-        </p:nvSpPr>
-        <p:spPr>
-          <a:xfrm>
-            <a:off x="9731411" y="6108192"/>
+          <p:cNvPr id="395" name="Text 393"/>
+          <p:cNvSpPr/>
+          <p:nvPr/>
+        </p:nvSpPr>
+        <p:spPr>
+          <a:xfrm>
+            <a:off x="9731411" y="6163056"/>
             <a:ext cx="1984797" cy="182880"/>
           </a:xfrm>
           <a:prstGeom prst="rect">
@@ -18419,8 +20768,8 @@
         </p:nvSpPr>
         <p:spPr>
           <a:xfrm>
-            <a:off x="749808" y="2176272"/>
-            <a:ext cx="1606235" cy="621792"/>
+            <a:off x="749808" y="2157984"/>
+            <a:ext cx="1606235" cy="411480"/>
           </a:xfrm>
           <a:prstGeom prst="rect">
             <a:avLst/>
@@ -18454,7 +20803,48 @@
       </p:sp>
       <p:sp>
         <p:nvSpPr>
-          <p:cNvPr id="11" name="Shape 9"/>
+          <p:cNvPr id="11" name="Text 9"/>
+          <p:cNvSpPr/>
+          <p:nvPr/>
+        </p:nvSpPr>
+        <p:spPr>
+          <a:xfrm>
+            <a:off x="749808" y="2542032"/>
+            <a:ext cx="1606235" cy="228600"/>
+          </a:xfrm>
+          <a:prstGeom prst="rect">
+            <a:avLst/>
+          </a:prstGeom>
+          <a:noFill/>
+          <a:ln/>
+        </p:spPr>
+        <p:txBody>
+          <a:bodyPr wrap="square" lIns="0" tIns="0" rIns="0" bIns="0" rtlCol="0" anchor="t">
+            <a:normAutofit/>
+          </a:bodyPr>
+          <a:lstStyle/>
+          <a:p>
+            <a:pPr algn="l" indent="0" marL="0">
+              <a:buNone/>
+            </a:pPr>
+            <a:r>
+              <a:rPr lang="en-US" altLang="en-US" sz="750" b="1" dirty="0">
+                <a:solidFill>
+                  <a:srgbClr val="7A3A30"/>
+                </a:solidFill>
+                <a:latin typeface="Calibri" pitchFamily="34" charset="0"/>
+                <a:ea typeface="Calibri" pitchFamily="34" charset="-122"/>
+                <a:cs typeface="Calibri" pitchFamily="34" charset="-120"/>
+              </a:rPr>
+              <a:t>13 Oct → 14 Oct · 2 d</a:t>
+            </a:r>
+            <a:endParaRPr lang="en-US" sz="750" dirty="0"/>
+          </a:p>
+        </p:txBody>
+      </p:sp>
+      <p:sp>
+        <p:nvSpPr>
+          <p:cNvPr id="12" name="Shape 10"/>
           <p:cNvSpPr/>
           <p:nvPr/>
         </p:nvSpPr>
@@ -18479,7 +20869,7 @@
       </p:sp>
       <p:sp>
         <p:nvSpPr>
-          <p:cNvPr id="12" name="Shape 10"/>
+          <p:cNvPr id="13" name="Shape 11"/>
           <p:cNvSpPr/>
           <p:nvPr/>
         </p:nvSpPr>
@@ -18504,7 +20894,7 @@
       </p:sp>
       <p:sp>
         <p:nvSpPr>
-          <p:cNvPr id="13" name="Text 11"/>
+          <p:cNvPr id="14" name="Text 12"/>
           <p:cNvSpPr/>
           <p:nvPr/>
         </p:nvSpPr>
@@ -18545,14 +20935,14 @@
       </p:sp>
       <p:sp>
         <p:nvSpPr>
-          <p:cNvPr id="14" name="Text 12"/>
-          <p:cNvSpPr/>
-          <p:nvPr/>
-        </p:nvSpPr>
-        <p:spPr>
-          <a:xfrm>
-            <a:off x="3041843" y="2176272"/>
-            <a:ext cx="1606235" cy="621792"/>
+          <p:cNvPr id="15" name="Text 13"/>
+          <p:cNvSpPr/>
+          <p:nvPr/>
+        </p:nvSpPr>
+        <p:spPr>
+          <a:xfrm>
+            <a:off x="3041843" y="2157984"/>
+            <a:ext cx="1606235" cy="411480"/>
           </a:xfrm>
           <a:prstGeom prst="rect">
             <a:avLst/>
@@ -18586,7 +20976,48 @@
       </p:sp>
       <p:sp>
         <p:nvSpPr>
-          <p:cNvPr id="15" name="Shape 13"/>
+          <p:cNvPr id="16" name="Text 14"/>
+          <p:cNvSpPr/>
+          <p:nvPr/>
+        </p:nvSpPr>
+        <p:spPr>
+          <a:xfrm>
+            <a:off x="3041843" y="2542032"/>
+            <a:ext cx="1606235" cy="228600"/>
+          </a:xfrm>
+          <a:prstGeom prst="rect">
+            <a:avLst/>
+          </a:prstGeom>
+          <a:noFill/>
+          <a:ln/>
+        </p:spPr>
+        <p:txBody>
+          <a:bodyPr wrap="square" lIns="0" tIns="0" rIns="0" bIns="0" rtlCol="0" anchor="t">
+            <a:normAutofit/>
+          </a:bodyPr>
+          <a:lstStyle/>
+          <a:p>
+            <a:pPr algn="l" indent="0" marL="0">
+              <a:buNone/>
+            </a:pPr>
+            <a:r>
+              <a:rPr lang="en-US" altLang="en-US" sz="750" b="1" dirty="0">
+                <a:solidFill>
+                  <a:srgbClr val="7A3A30"/>
+                </a:solidFill>
+                <a:latin typeface="Calibri" pitchFamily="34" charset="0"/>
+                <a:ea typeface="Calibri" pitchFamily="34" charset="-122"/>
+                <a:cs typeface="Calibri" pitchFamily="34" charset="-120"/>
+              </a:rPr>
+              <a:t>14 Oct → 17 Oct · 3 d · A1 SS +1</a:t>
+            </a:r>
+            <a:endParaRPr lang="en-US" sz="750" dirty="0"/>
+          </a:p>
+        </p:txBody>
+      </p:sp>
+      <p:sp>
+        <p:nvSpPr>
+          <p:cNvPr id="17" name="Shape 15"/>
           <p:cNvSpPr/>
           <p:nvPr/>
         </p:nvSpPr>
@@ -18611,7 +21042,7 @@
       </p:sp>
       <p:sp>
         <p:nvSpPr>
-          <p:cNvPr id="16" name="Shape 14"/>
+          <p:cNvPr id="18" name="Shape 16"/>
           <p:cNvSpPr/>
           <p:nvPr/>
         </p:nvSpPr>
@@ -18636,7 +21067,7 @@
       </p:sp>
       <p:sp>
         <p:nvSpPr>
-          <p:cNvPr id="17" name="Text 15"/>
+          <p:cNvPr id="19" name="Text 17"/>
           <p:cNvSpPr/>
           <p:nvPr/>
         </p:nvSpPr>
@@ -18677,14 +21108,14 @@
       </p:sp>
       <p:sp>
         <p:nvSpPr>
-          <p:cNvPr id="18" name="Text 16"/>
-          <p:cNvSpPr/>
-          <p:nvPr/>
-        </p:nvSpPr>
-        <p:spPr>
-          <a:xfrm>
-            <a:off x="5333878" y="2176272"/>
-            <a:ext cx="1606235" cy="621792"/>
+          <p:cNvPr id="20" name="Text 18"/>
+          <p:cNvSpPr/>
+          <p:nvPr/>
+        </p:nvSpPr>
+        <p:spPr>
+          <a:xfrm>
+            <a:off x="5333878" y="2157984"/>
+            <a:ext cx="1606235" cy="411480"/>
           </a:xfrm>
           <a:prstGeom prst="rect">
             <a:avLst/>
@@ -18718,7 +21149,48 @@
       </p:sp>
       <p:sp>
         <p:nvSpPr>
-          <p:cNvPr id="19" name="Shape 17"/>
+          <p:cNvPr id="21" name="Text 19"/>
+          <p:cNvSpPr/>
+          <p:nvPr/>
+        </p:nvSpPr>
+        <p:spPr>
+          <a:xfrm>
+            <a:off x="5333878" y="2542032"/>
+            <a:ext cx="1606235" cy="228600"/>
+          </a:xfrm>
+          <a:prstGeom prst="rect">
+            <a:avLst/>
+          </a:prstGeom>
+          <a:noFill/>
+          <a:ln/>
+        </p:spPr>
+        <p:txBody>
+          <a:bodyPr wrap="square" lIns="0" tIns="0" rIns="0" bIns="0" rtlCol="0" anchor="t">
+            <a:normAutofit/>
+          </a:bodyPr>
+          <a:lstStyle/>
+          <a:p>
+            <a:pPr algn="l" indent="0" marL="0">
+              <a:buNone/>
+            </a:pPr>
+            <a:r>
+              <a:rPr lang="en-US" altLang="en-US" sz="750" b="1" dirty="0">
+                <a:solidFill>
+                  <a:srgbClr val="7A3A30"/>
+                </a:solidFill>
+                <a:latin typeface="Calibri" pitchFamily="34" charset="0"/>
+                <a:ea typeface="Calibri" pitchFamily="34" charset="-122"/>
+                <a:cs typeface="Calibri" pitchFamily="34" charset="-120"/>
+              </a:rPr>
+              <a:t>15 Oct → 18 Oct · 3 d · A2 SS +1</a:t>
+            </a:r>
+            <a:endParaRPr lang="en-US" sz="750" dirty="0"/>
+          </a:p>
+        </p:txBody>
+      </p:sp>
+      <p:sp>
+        <p:nvSpPr>
+          <p:cNvPr id="22" name="Shape 20"/>
           <p:cNvSpPr/>
           <p:nvPr/>
         </p:nvSpPr>
@@ -18743,7 +21215,7 @@
       </p:sp>
       <p:sp>
         <p:nvSpPr>
-          <p:cNvPr id="20" name="Shape 18"/>
+          <p:cNvPr id="23" name="Shape 21"/>
           <p:cNvSpPr/>
           <p:nvPr/>
         </p:nvSpPr>
@@ -18768,7 +21240,7 @@
       </p:sp>
       <p:sp>
         <p:nvSpPr>
-          <p:cNvPr id="21" name="Text 19"/>
+          <p:cNvPr id="24" name="Text 22"/>
           <p:cNvSpPr/>
           <p:nvPr/>
         </p:nvSpPr>
@@ -18809,14 +21281,14 @@
       </p:sp>
       <p:sp>
         <p:nvSpPr>
-          <p:cNvPr id="22" name="Text 20"/>
-          <p:cNvSpPr/>
-          <p:nvPr/>
-        </p:nvSpPr>
-        <p:spPr>
-          <a:xfrm>
-            <a:off x="7625913" y="2176272"/>
-            <a:ext cx="1606235" cy="621792"/>
+          <p:cNvPr id="25" name="Text 23"/>
+          <p:cNvSpPr/>
+          <p:nvPr/>
+        </p:nvSpPr>
+        <p:spPr>
+          <a:xfrm>
+            <a:off x="7625913" y="2157984"/>
+            <a:ext cx="1606235" cy="411480"/>
           </a:xfrm>
           <a:prstGeom prst="rect">
             <a:avLst/>
@@ -18850,7 +21322,48 @@
       </p:sp>
       <p:sp>
         <p:nvSpPr>
-          <p:cNvPr id="23" name="Shape 21"/>
+          <p:cNvPr id="26" name="Text 24"/>
+          <p:cNvSpPr/>
+          <p:nvPr/>
+        </p:nvSpPr>
+        <p:spPr>
+          <a:xfrm>
+            <a:off x="7625913" y="2542032"/>
+            <a:ext cx="1606235" cy="228600"/>
+          </a:xfrm>
+          <a:prstGeom prst="rect">
+            <a:avLst/>
+          </a:prstGeom>
+          <a:noFill/>
+          <a:ln/>
+        </p:spPr>
+        <p:txBody>
+          <a:bodyPr wrap="square" lIns="0" tIns="0" rIns="0" bIns="0" rtlCol="0" anchor="t">
+            <a:normAutofit/>
+          </a:bodyPr>
+          <a:lstStyle/>
+          <a:p>
+            <a:pPr algn="l" indent="0" marL="0">
+              <a:buNone/>
+            </a:pPr>
+            <a:r>
+              <a:rPr lang="en-US" altLang="en-US" sz="750" b="1" dirty="0">
+                <a:solidFill>
+                  <a:srgbClr val="7A3A30"/>
+                </a:solidFill>
+                <a:latin typeface="Calibri" pitchFamily="34" charset="0"/>
+                <a:ea typeface="Calibri" pitchFamily="34" charset="-122"/>
+                <a:cs typeface="Calibri" pitchFamily="34" charset="-120"/>
+              </a:rPr>
+              <a:t>17 Oct → 19 Oct · 3 d · A3 SS +1</a:t>
+            </a:r>
+            <a:endParaRPr lang="en-US" sz="750" dirty="0"/>
+          </a:p>
+        </p:txBody>
+      </p:sp>
+      <p:sp>
+        <p:nvSpPr>
+          <p:cNvPr id="27" name="Shape 25"/>
           <p:cNvSpPr/>
           <p:nvPr/>
         </p:nvSpPr>
@@ -18875,7 +21388,7 @@
       </p:sp>
       <p:sp>
         <p:nvSpPr>
-          <p:cNvPr id="24" name="Shape 22"/>
+          <p:cNvPr id="28" name="Shape 26"/>
           <p:cNvSpPr/>
           <p:nvPr/>
         </p:nvSpPr>
@@ -18900,7 +21413,7 @@
       </p:sp>
       <p:sp>
         <p:nvSpPr>
-          <p:cNvPr id="25" name="Text 23"/>
+          <p:cNvPr id="29" name="Text 27"/>
           <p:cNvSpPr/>
           <p:nvPr/>
         </p:nvSpPr>
@@ -18941,14 +21454,14 @@
       </p:sp>
       <p:sp>
         <p:nvSpPr>
-          <p:cNvPr id="26" name="Text 24"/>
-          <p:cNvSpPr/>
-          <p:nvPr/>
-        </p:nvSpPr>
-        <p:spPr>
-          <a:xfrm>
-            <a:off x="9917948" y="2176272"/>
-            <a:ext cx="1606235" cy="621792"/>
+          <p:cNvPr id="30" name="Text 28"/>
+          <p:cNvSpPr/>
+          <p:nvPr/>
+        </p:nvSpPr>
+        <p:spPr>
+          <a:xfrm>
+            <a:off x="9917948" y="2157984"/>
+            <a:ext cx="1606235" cy="411480"/>
           </a:xfrm>
           <a:prstGeom prst="rect">
             <a:avLst/>
@@ -18982,7 +21495,89 @@
       </p:sp>
       <p:sp>
         <p:nvSpPr>
-          <p:cNvPr id="27" name="Shape 25"/>
+          <p:cNvPr id="31" name="Text 29"/>
+          <p:cNvSpPr/>
+          <p:nvPr/>
+        </p:nvSpPr>
+        <p:spPr>
+          <a:xfrm>
+            <a:off x="9917948" y="2542032"/>
+            <a:ext cx="1606235" cy="228600"/>
+          </a:xfrm>
+          <a:prstGeom prst="rect">
+            <a:avLst/>
+          </a:prstGeom>
+          <a:noFill/>
+          <a:ln/>
+        </p:spPr>
+        <p:txBody>
+          <a:bodyPr wrap="square" lIns="0" tIns="0" rIns="0" bIns="0" rtlCol="0" anchor="t">
+            <a:normAutofit/>
+          </a:bodyPr>
+          <a:lstStyle/>
+          <a:p>
+            <a:pPr algn="l" indent="0" marL="0">
+              <a:buNone/>
+            </a:pPr>
+            <a:r>
+              <a:rPr lang="en-US" altLang="en-US" sz="750" b="1" dirty="0">
+                <a:solidFill>
+                  <a:srgbClr val="7A3A30"/>
+                </a:solidFill>
+                <a:latin typeface="Calibri" pitchFamily="34" charset="0"/>
+                <a:ea typeface="Calibri" pitchFamily="34" charset="-122"/>
+                <a:cs typeface="Calibri" pitchFamily="34" charset="-120"/>
+              </a:rPr>
+              <a:t>18 Oct → 19 Oct · 2 d · A4 SS +1</a:t>
+            </a:r>
+            <a:endParaRPr lang="en-US" sz="750" dirty="0"/>
+          </a:p>
+        </p:txBody>
+      </p:sp>
+      <p:sp>
+        <p:nvSpPr>
+          <p:cNvPr id="32" name="Text 30"/>
+          <p:cNvSpPr/>
+          <p:nvPr/>
+        </p:nvSpPr>
+        <p:spPr>
+          <a:xfrm>
+            <a:off x="365760" y="2852928"/>
+            <a:ext cx="11460175" cy="182880"/>
+          </a:xfrm>
+          <a:prstGeom prst="rect">
+            <a:avLst/>
+          </a:prstGeom>
+          <a:noFill/>
+          <a:ln/>
+        </p:spPr>
+        <p:txBody>
+          <a:bodyPr wrap="square" lIns="0" tIns="0" rIns="0" bIns="0" rtlCol="0" anchor="ctr">
+            <a:normAutofit/>
+          </a:bodyPr>
+          <a:lstStyle/>
+          <a:p>
+            <a:pPr algn="l" indent="0" marL="0">
+              <a:buNone/>
+            </a:pPr>
+            <a:r>
+              <a:rPr lang="en-US" altLang="en-US" sz="750" dirty="0">
+                <a:solidFill>
+                  <a:srgbClr val="66707A"/>
+                </a:solidFill>
+                <a:latin typeface="Calibri" pitchFamily="34" charset="0"/>
+                <a:ea typeface="Calibri" pitchFamily="34" charset="-122"/>
+                <a:cs typeface="Calibri" pitchFamily="34" charset="-120"/>
+              </a:rPr>
+              <a:t>Durations and links of the five sub-activities are proposed to fit within the 6 working days of Activity A (editable).</a:t>
+            </a:r>
+            <a:endParaRPr lang="en-US" sz="750" dirty="0"/>
+          </a:p>
+        </p:txBody>
+      </p:sp>
+      <p:sp>
+        <p:nvSpPr>
+          <p:cNvPr id="33" name="Shape 31"/>
           <p:cNvSpPr/>
           <p:nvPr/>
         </p:nvSpPr>
@@ -19007,7 +21602,7 @@
       </p:sp>
       <p:sp>
         <p:nvSpPr>
-          <p:cNvPr id="28" name="Text 26"/>
+          <p:cNvPr id="34" name="Text 32"/>
           <p:cNvSpPr/>
           <p:nvPr/>
         </p:nvSpPr>
@@ -19048,7 +21643,7 @@
       </p:sp>
       <p:sp>
         <p:nvSpPr>
-          <p:cNvPr id="29" name="Shape 27"/>
+          <p:cNvPr id="35" name="Shape 33"/>
           <p:cNvSpPr/>
           <p:nvPr/>
         </p:nvSpPr>
@@ -19073,7 +21668,7 @@
       </p:sp>
       <p:sp>
         <p:nvSpPr>
-          <p:cNvPr id="30" name="Text 28"/>
+          <p:cNvPr id="36" name="Text 34"/>
           <p:cNvSpPr/>
           <p:nvPr/>
         </p:nvSpPr>
@@ -19114,7 +21709,7 @@
       </p:sp>
       <p:sp>
         <p:nvSpPr>
-          <p:cNvPr id="31" name="Text 29"/>
+          <p:cNvPr id="37" name="Text 35"/>
           <p:cNvSpPr/>
           <p:nvPr/>
         </p:nvSpPr>
@@ -19155,7 +21750,7 @@
       </p:sp>
       <p:sp>
         <p:nvSpPr>
-          <p:cNvPr id="32" name="Shape 30"/>
+          <p:cNvPr id="38" name="Shape 36"/>
           <p:cNvSpPr/>
           <p:nvPr/>
         </p:nvSpPr>
@@ -19180,7 +21775,7 @@
       </p:sp>
       <p:sp>
         <p:nvSpPr>
-          <p:cNvPr id="33" name="Text 31"/>
+          <p:cNvPr id="39" name="Text 37"/>
           <p:cNvSpPr/>
           <p:nvPr/>
         </p:nvSpPr>
@@ -19221,7 +21816,7 @@
       </p:sp>
       <p:sp>
         <p:nvSpPr>
-          <p:cNvPr id="34" name="Text 32"/>
+          <p:cNvPr id="40" name="Text 38"/>
           <p:cNvSpPr/>
           <p:nvPr/>
         </p:nvSpPr>
@@ -19262,7 +21857,7 @@
       </p:sp>
       <p:sp>
         <p:nvSpPr>
-          <p:cNvPr id="35" name="Shape 33"/>
+          <p:cNvPr id="41" name="Shape 39"/>
           <p:cNvSpPr/>
           <p:nvPr/>
         </p:nvSpPr>
@@ -19287,7 +21882,7 @@
       </p:sp>
       <p:sp>
         <p:nvSpPr>
-          <p:cNvPr id="36" name="Text 34"/>
+          <p:cNvPr id="42" name="Text 40"/>
           <p:cNvSpPr/>
           <p:nvPr/>
         </p:nvSpPr>
@@ -19328,7 +21923,7 @@
       </p:sp>
       <p:sp>
         <p:nvSpPr>
-          <p:cNvPr id="37" name="Text 35"/>
+          <p:cNvPr id="43" name="Text 41"/>
           <p:cNvSpPr/>
           <p:nvPr/>
         </p:nvSpPr>
@@ -19369,7 +21964,7 @@
       </p:sp>
       <p:sp>
         <p:nvSpPr>
-          <p:cNvPr id="38" name="Shape 36"/>
+          <p:cNvPr id="44" name="Shape 42"/>
           <p:cNvSpPr/>
           <p:nvPr/>
         </p:nvSpPr>
@@ -19394,7 +21989,7 @@
       </p:sp>
       <p:sp>
         <p:nvSpPr>
-          <p:cNvPr id="39" name="Text 37"/>
+          <p:cNvPr id="45" name="Text 43"/>
           <p:cNvSpPr/>
           <p:nvPr/>
         </p:nvSpPr>
@@ -19435,7 +22030,7 @@
       </p:sp>
       <p:sp>
         <p:nvSpPr>
-          <p:cNvPr id="40" name="Text 38"/>
+          <p:cNvPr id="46" name="Text 44"/>
           <p:cNvSpPr/>
           <p:nvPr/>
         </p:nvSpPr>
@@ -19476,7 +22071,7 @@
       </p:sp>
       <p:sp>
         <p:nvSpPr>
-          <p:cNvPr id="41" name="Shape 39"/>
+          <p:cNvPr id="47" name="Shape 45"/>
           <p:cNvSpPr/>
           <p:nvPr/>
         </p:nvSpPr>
@@ -19501,7 +22096,7 @@
       </p:sp>
       <p:sp>
         <p:nvSpPr>
-          <p:cNvPr id="42" name="Text 40"/>
+          <p:cNvPr id="48" name="Text 46"/>
           <p:cNvSpPr/>
           <p:nvPr/>
         </p:nvSpPr>
@@ -19542,7 +22137,7 @@
       </p:sp>
       <p:sp>
         <p:nvSpPr>
-          <p:cNvPr id="43" name="Text 41"/>
+          <p:cNvPr id="49" name="Text 47"/>
           <p:cNvSpPr/>
           <p:nvPr/>
         </p:nvSpPr>
@@ -19583,7 +22178,7 @@
       </p:sp>
       <p:sp>
         <p:nvSpPr>
-          <p:cNvPr id="44" name="Shape 42"/>
+          <p:cNvPr id="50" name="Shape 48"/>
           <p:cNvSpPr/>
           <p:nvPr/>
         </p:nvSpPr>
@@ -19610,7 +22205,7 @@
       </p:sp>
       <p:sp>
         <p:nvSpPr>
-          <p:cNvPr id="45" name="Text 43"/>
+          <p:cNvPr id="51" name="Text 49"/>
           <p:cNvSpPr/>
           <p:nvPr/>
         </p:nvSpPr>
@@ -19651,7 +22246,7 @@
       </p:sp>
       <p:sp>
         <p:nvSpPr>
-          <p:cNvPr id="46" name="Text 44"/>
+          <p:cNvPr id="52" name="Text 50"/>
           <p:cNvSpPr/>
           <p:nvPr/>
         </p:nvSpPr>
@@ -19692,7 +22287,7 @@
       </p:sp>
       <p:sp>
         <p:nvSpPr>
-          <p:cNvPr id="47" name="Shape 45"/>
+          <p:cNvPr id="53" name="Shape 51"/>
           <p:cNvSpPr/>
           <p:nvPr/>
         </p:nvSpPr>
@@ -19717,7 +22312,7 @@
       </p:sp>
       <p:sp>
         <p:nvSpPr>
-          <p:cNvPr id="48" name="Text 46"/>
+          <p:cNvPr id="54" name="Text 52"/>
           <p:cNvSpPr/>
           <p:nvPr/>
         </p:nvSpPr>
@@ -19758,7 +22353,7 @@
       </p:sp>
       <p:sp>
         <p:nvSpPr>
-          <p:cNvPr id="49" name="Text 47"/>
+          <p:cNvPr id="55" name="Text 53"/>
           <p:cNvSpPr/>
           <p:nvPr/>
         </p:nvSpPr>
@@ -19870,7 +22465,7 @@
       </p:sp>
       <p:sp>
         <p:nvSpPr>
-          <p:cNvPr id="50" name="Text 48"/>
+          <p:cNvPr id="56" name="Text 54"/>
           <p:cNvSpPr/>
           <p:nvPr/>
         </p:nvSpPr>

--- a/ufwl-timeline/UFWL_Presentation_EN.pptx
+++ b/ufwl-timeline/UFWL_Presentation_EN.pptx
@@ -7,10 +7,9 @@
   <p:sldIdLst>
     <p:sldId id="256" r:id="rId2"/>
     <p:sldId id="257" r:id="rId3"/>
-    <p:sldId id="258" r:id="rId4"/>
   </p:sldIdLst>
   <p:notesMasterIdLst>
-    <p:notesMasterId r:id="rId5"/>
+    <p:notesMasterId r:id="rId4"/>
   </p:notesMasterIdLst>
   <p:sldSz cx="12192000" cy="6858000"/>
   <p:notesSz cx="6858000" cy="12192000"/>
@@ -634,94 +633,6 @@
 </p:notes>
 </file>
 
-<file path=ppt/notesSlides/notesSlide3.xml><?xml version="1.0" encoding="utf-8"?>
-<p:notes xmlns:a="http://schemas.openxmlformats.org/drawingml/2006/main" xmlns:r="http://schemas.openxmlformats.org/officeDocument/2006/relationships" xmlns:p="http://schemas.openxmlformats.org/presentationml/2006/main">
-  <p:cSld>
-    <p:spTree>
-      <p:nvGrpSpPr>
-        <p:cNvPr id="1" name=""/>
-        <p:cNvGrpSpPr/>
-        <p:nvPr/>
-      </p:nvGrpSpPr>
-      <p:grpSpPr>
-        <a:xfrm>
-          <a:off x="0" y="0"/>
-          <a:ext cx="0" cy="0"/>
-          <a:chOff x="0" y="0"/>
-          <a:chExt cx="0" cy="0"/>
-        </a:xfrm>
-      </p:grpSpPr>
-      <p:sp>
-        <p:nvSpPr>
-          <p:cNvPr id="2" name="Slide Image Placeholder 1"/>
-          <p:cNvSpPr>
-            <a:spLocks noGrp="1" noRot="1" noChangeAspect="1"/>
-          </p:cNvSpPr>
-          <p:nvPr>
-            <p:ph type="sldImg"/>
-          </p:nvPr>
-        </p:nvSpPr>
-        <p:spPr/>
-      </p:sp>
-      <p:sp>
-        <p:nvSpPr>
-          <p:cNvPr id="3" name="Notes Placeholder 2"/>
-          <p:cNvSpPr>
-            <a:spLocks noGrp="1"/>
-          </p:cNvSpPr>
-          <p:nvPr>
-            <p:ph type="body" idx="1"/>
-          </p:nvPr>
-        </p:nvSpPr>
-        <p:spPr/>
-        <p:txBody>
-          <a:bodyPr/>
-          <a:lstStyle/>
-          <a:p>
-            <a:r>
-              <a:rPr lang="en-US" dirty="0"/>
-              <a:t/>
-            </a:r>
-            <a:endParaRPr lang="en-US" dirty="0"/>
-          </a:p>
-        </p:txBody>
-      </p:sp>
-      <p:sp>
-        <p:nvSpPr>
-          <p:cNvPr id="4" name="Slide Number Placeholder 3"/>
-          <p:cNvSpPr>
-            <a:spLocks noGrp="1"/>
-          </p:cNvSpPr>
-          <p:nvPr>
-            <p:ph type="sldNum" sz="quarter" idx="10"/>
-          </p:nvPr>
-        </p:nvSpPr>
-        <p:spPr/>
-        <p:txBody>
-          <a:bodyPr/>
-          <a:lstStyle/>
-          <a:p>
-            <a:fld id="{F7021451-1387-4CA6-816F-3879F97B5CBC}" type="slidenum">
-              <a:rPr lang="en-US"/>
-              <a:t>3</a:t>
-            </a:fld>
-            <a:endParaRPr lang="en-US"/>
-          </a:p>
-        </p:txBody>
-      </p:sp>
-    </p:spTree>
-    <p:extLst>
-      <p:ext uri="{BB962C8B-B14F-4D97-AF65-F5344CB8AC3E}">
-        <p14:creationId xmlns:p14="http://schemas.microsoft.com/office/powerpoint/2010/main" val="1024086991"/>
-      </p:ext>
-    </p:extLst>
-  </p:cSld>
-  <p:clrMapOvr>
-    <a:masterClrMapping/>
-  </p:clrMapOvr>
-</p:notes>
-</file>
-
 <file path=ppt/slideLayouts/slideLayout1.xml><?xml version="1.0" encoding="utf-8"?>
 <p:sldLayout xmlns:a="http://schemas.openxmlformats.org/drawingml/2006/main" xmlns:r="http://schemas.openxmlformats.org/officeDocument/2006/relationships" xmlns:p="http://schemas.openxmlformats.org/presentationml/2006/main" preserve="1">
   <p:cSld name="DEFAULT">
@@ -20450,2103 +20361,6 @@
             <a:fld id="{F7021451-1387-4CA6-816F-3879F97B5CBC}" type="slidenum">
               <a:rPr b="0" lang="en-US"/>
               <a:t>2</a:t>
-            </a:fld>
-            <a:endParaRPr lang="en-US"/>
-          </a:p>
-        </p:txBody>
-      </p:sp>
-    </p:spTree>
-  </p:cSld>
-  <p:clrMapOvr>
-    <a:masterClrMapping/>
-  </p:clrMapOvr>
-</p:sld>
-</file>
-
-<file path=ppt/slides/slide3.xml><?xml version="1.0" encoding="utf-8"?>
-<p:sld xmlns:a="http://schemas.openxmlformats.org/drawingml/2006/main" xmlns:r="http://schemas.openxmlformats.org/officeDocument/2006/relationships" xmlns:p="http://schemas.openxmlformats.org/presentationml/2006/main">
-  <p:cSld name="Slide 3">
-    <p:spTree>
-      <p:nvGrpSpPr>
-        <p:cNvPr id="1" name=""/>
-        <p:cNvGrpSpPr/>
-        <p:nvPr/>
-      </p:nvGrpSpPr>
-      <p:grpSpPr>
-        <a:xfrm>
-          <a:off x="0" y="0"/>
-          <a:ext cx="0" cy="0"/>
-          <a:chOff x="0" y="0"/>
-          <a:chExt cx="0" cy="0"/>
-        </a:xfrm>
-      </p:grpSpPr>
-      <p:sp>
-        <p:nvSpPr>
-          <p:cNvPr id="2" name="Text 0"/>
-          <p:cNvSpPr/>
-          <p:nvPr/>
-        </p:nvSpPr>
-        <p:spPr>
-          <a:xfrm>
-            <a:off x="365760" y="109728"/>
-            <a:ext cx="10134295" cy="457200"/>
-          </a:xfrm>
-          <a:prstGeom prst="rect">
-            <a:avLst/>
-          </a:prstGeom>
-          <a:noFill/>
-          <a:ln/>
-        </p:spPr>
-        <p:txBody>
-          <a:bodyPr wrap="square" lIns="0" tIns="0" rIns="0" bIns="0" rtlCol="0" anchor="ctr">
-            <a:normAutofit/>
-          </a:bodyPr>
-          <a:lstStyle/>
-          <a:p>
-            <a:pPr algn="l" indent="0" marL="0">
-              <a:buNone/>
-            </a:pPr>
-            <a:r>
-              <a:rPr lang="en-US" altLang="en-US" sz="2400" b="1" dirty="0">
-                <a:solidFill>
-                  <a:srgbClr val="3D3935"/>
-                </a:solidFill>
-                <a:latin typeface="Calibri" pitchFamily="34" charset="0"/>
-                <a:ea typeface="Calibri" pitchFamily="34" charset="-122"/>
-                <a:cs typeface="Calibri" pitchFamily="34" charset="-120"/>
-              </a:rPr>
-              <a:t>Shoring Activities &amp; Planning Basis</a:t>
-            </a:r>
-            <a:endParaRPr lang="en-US" sz="2400" dirty="0"/>
-          </a:p>
-        </p:txBody>
-      </p:sp>
-      <p:sp>
-        <p:nvSpPr>
-          <p:cNvPr id="3" name="Text 1"/>
-          <p:cNvSpPr/>
-          <p:nvPr/>
-        </p:nvSpPr>
-        <p:spPr>
-          <a:xfrm>
-            <a:off x="365760" y="548640"/>
-            <a:ext cx="10134295" cy="256032"/>
-          </a:xfrm>
-          <a:prstGeom prst="rect">
-            <a:avLst/>
-          </a:prstGeom>
-          <a:noFill/>
-          <a:ln/>
-        </p:spPr>
-        <p:txBody>
-          <a:bodyPr wrap="square" lIns="0" tIns="0" rIns="0" bIns="0" rtlCol="0" anchor="ctr">
-            <a:normAutofit/>
-          </a:bodyPr>
-          <a:lstStyle/>
-          <a:p>
-            <a:pPr algn="l" indent="0" marL="0">
-              <a:buNone/>
-            </a:pPr>
-            <a:r>
-              <a:rPr lang="en-US" altLang="en-US" sz="1200" dirty="0">
-                <a:solidFill>
-                  <a:srgbClr val="66707A"/>
-                </a:solidFill>
-                <a:latin typeface="Calibri" pitchFamily="34" charset="0"/>
-                <a:ea typeface="Calibri" pitchFamily="34" charset="-122"/>
-                <a:cs typeface="Calibri" pitchFamily="34" charset="-120"/>
-              </a:rPr>
-              <a:t>Sequence of shoring works, key dates and conditions of the proposed programme</a:t>
-            </a:r>
-            <a:endParaRPr lang="en-US" sz="1200" dirty="0"/>
-          </a:p>
-        </p:txBody>
-      </p:sp>
-      <p:sp>
-        <p:nvSpPr>
-          <p:cNvPr id="4" name="Shape 2"/>
-          <p:cNvSpPr/>
-          <p:nvPr/>
-        </p:nvSpPr>
-        <p:spPr>
-          <a:xfrm>
-            <a:off x="365760" y="1133856"/>
-            <a:ext cx="54864" cy="256032"/>
-          </a:xfrm>
-          <a:prstGeom prst="rect">
-            <a:avLst/>
-          </a:prstGeom>
-          <a:solidFill>
-            <a:srgbClr val="00778B"/>
-          </a:solidFill>
-          <a:ln w="12700">
-            <a:solidFill>
-              <a:srgbClr val="00778B"/>
-            </a:solidFill>
-            <a:prstDash val="solid"/>
-          </a:ln>
-        </p:spPr>
-      </p:sp>
-      <p:sp>
-        <p:nvSpPr>
-          <p:cNvPr id="5" name="Text 3"/>
-          <p:cNvSpPr/>
-          <p:nvPr/>
-        </p:nvSpPr>
-        <p:spPr>
-          <a:xfrm>
-            <a:off x="512064" y="1097280"/>
-            <a:ext cx="7315200" cy="329184"/>
-          </a:xfrm>
-          <a:prstGeom prst="rect">
-            <a:avLst/>
-          </a:prstGeom>
-          <a:noFill/>
-          <a:ln/>
-        </p:spPr>
-        <p:txBody>
-          <a:bodyPr wrap="square" lIns="0" tIns="0" rIns="0" bIns="0" rtlCol="0" anchor="ctr">
-            <a:normAutofit/>
-          </a:bodyPr>
-          <a:lstStyle/>
-          <a:p>
-            <a:pPr algn="l" indent="0" marL="0">
-              <a:buNone/>
-            </a:pPr>
-            <a:r>
-              <a:rPr lang="en-US" altLang="en-US" sz="1500" b="1" dirty="0">
-                <a:solidFill>
-                  <a:srgbClr val="3D3935"/>
-                </a:solidFill>
-                <a:latin typeface="Calibri" pitchFamily="34" charset="0"/>
-                <a:ea typeface="Calibri" pitchFamily="34" charset="-122"/>
-                <a:cs typeface="Calibri" pitchFamily="34" charset="-120"/>
-              </a:rPr>
-              <a:t>Shoring works sequence (Activity A)</a:t>
-            </a:r>
-            <a:endParaRPr lang="en-US" sz="1500" dirty="0"/>
-          </a:p>
-        </p:txBody>
-      </p:sp>
-      <p:sp>
-        <p:nvSpPr>
-          <p:cNvPr id="6" name="Text 4"/>
-          <p:cNvSpPr/>
-          <p:nvPr/>
-        </p:nvSpPr>
-        <p:spPr>
-          <a:xfrm>
-            <a:off x="512064" y="1417320"/>
-            <a:ext cx="8229600" cy="256032"/>
-          </a:xfrm>
-          <a:prstGeom prst="rect">
-            <a:avLst/>
-          </a:prstGeom>
-          <a:noFill/>
-          <a:ln/>
-        </p:spPr>
-        <p:txBody>
-          <a:bodyPr wrap="square" lIns="0" tIns="0" rIns="0" bIns="0" rtlCol="0" anchor="ctr">
-            <a:normAutofit/>
-          </a:bodyPr>
-          <a:lstStyle/>
-          <a:p>
-            <a:pPr algn="l" indent="0" marL="0">
-              <a:buNone/>
-            </a:pPr>
-            <a:r>
-              <a:rPr lang="en-US" altLang="en-US" sz="1100" b="1" dirty="0">
-                <a:solidFill>
-                  <a:srgbClr val="C8503F"/>
-                </a:solidFill>
-                <a:latin typeface="Calibri" pitchFamily="34" charset="0"/>
-                <a:ea typeface="Calibri" pitchFamily="34" charset="-122"/>
-                <a:cs typeface="Calibri" pitchFamily="34" charset="-120"/>
-              </a:rPr>
-              <a:t>13 October 2026 → 19 October 2026 · 6 working days</a:t>
-            </a:r>
-            <a:endParaRPr lang="en-US" sz="1100" dirty="0"/>
-          </a:p>
-        </p:txBody>
-      </p:sp>
-      <p:sp>
-        <p:nvSpPr>
-          <p:cNvPr id="7" name="Shape 5"/>
-          <p:cNvSpPr/>
-          <p:nvPr/>
-        </p:nvSpPr>
-        <p:spPr>
-          <a:xfrm>
-            <a:off x="365760" y="1783080"/>
-            <a:ext cx="2365187" cy="1051560"/>
-          </a:xfrm>
-          <a:prstGeom prst="chevron">
-            <a:avLst/>
-          </a:prstGeom>
-          <a:solidFill>
-            <a:srgbClr val="F4DAD6"/>
-          </a:solidFill>
-          <a:ln w="12700">
-            <a:solidFill>
-              <a:srgbClr val="F4DAD6"/>
-            </a:solidFill>
-            <a:prstDash val="solid"/>
-          </a:ln>
-        </p:spPr>
-      </p:sp>
-      <p:sp>
-        <p:nvSpPr>
-          <p:cNvPr id="8" name="Shape 6"/>
-          <p:cNvSpPr/>
-          <p:nvPr/>
-        </p:nvSpPr>
-        <p:spPr>
-          <a:xfrm>
-            <a:off x="731520" y="1874520"/>
-            <a:ext cx="274320" cy="274320"/>
-          </a:xfrm>
-          <a:prstGeom prst="ellipse">
-            <a:avLst/>
-          </a:prstGeom>
-          <a:solidFill>
-            <a:srgbClr val="C8503F"/>
-          </a:solidFill>
-          <a:ln w="12700">
-            <a:solidFill>
-              <a:srgbClr val="C8503F"/>
-            </a:solidFill>
-            <a:prstDash val="solid"/>
-          </a:ln>
-        </p:spPr>
-      </p:sp>
-      <p:sp>
-        <p:nvSpPr>
-          <p:cNvPr id="9" name="Text 7"/>
-          <p:cNvSpPr/>
-          <p:nvPr/>
-        </p:nvSpPr>
-        <p:spPr>
-          <a:xfrm>
-            <a:off x="731520" y="1874520"/>
-            <a:ext cx="274320" cy="274320"/>
-          </a:xfrm>
-          <a:prstGeom prst="rect">
-            <a:avLst/>
-          </a:prstGeom>
-          <a:noFill/>
-          <a:ln/>
-        </p:spPr>
-        <p:txBody>
-          <a:bodyPr wrap="square" lIns="0" tIns="0" rIns="0" bIns="0" rtlCol="0" anchor="ctr">
-            <a:normAutofit/>
-          </a:bodyPr>
-          <a:lstStyle/>
-          <a:p>
-            <a:pPr algn="ctr" indent="0" marL="0">
-              <a:buNone/>
-            </a:pPr>
-            <a:r>
-              <a:rPr lang="en-US" altLang="en-US" sz="1000" b="1" dirty="0">
-                <a:solidFill>
-                  <a:srgbClr val="FFFFFF"/>
-                </a:solidFill>
-                <a:latin typeface="Calibri" pitchFamily="34" charset="0"/>
-                <a:ea typeface="Calibri" pitchFamily="34" charset="-122"/>
-                <a:cs typeface="Calibri" pitchFamily="34" charset="-120"/>
-              </a:rPr>
-              <a:t>1</a:t>
-            </a:r>
-            <a:endParaRPr lang="en-US" sz="1000" dirty="0"/>
-          </a:p>
-        </p:txBody>
-      </p:sp>
-      <p:sp>
-        <p:nvSpPr>
-          <p:cNvPr id="10" name="Text 8"/>
-          <p:cNvSpPr/>
-          <p:nvPr/>
-        </p:nvSpPr>
-        <p:spPr>
-          <a:xfrm>
-            <a:off x="749808" y="2157984"/>
-            <a:ext cx="1606235" cy="411480"/>
-          </a:xfrm>
-          <a:prstGeom prst="rect">
-            <a:avLst/>
-          </a:prstGeom>
-          <a:noFill/>
-          <a:ln/>
-        </p:spPr>
-        <p:txBody>
-          <a:bodyPr wrap="square" lIns="0" tIns="0" rIns="0" bIns="0" rtlCol="0" anchor="t">
-            <a:normAutofit/>
-          </a:bodyPr>
-          <a:lstStyle/>
-          <a:p>
-            <a:pPr algn="l" indent="0" marL="0">
-              <a:buNone/>
-            </a:pPr>
-            <a:r>
-              <a:rPr lang="en-US" altLang="en-US" sz="1100" b="1" dirty="0">
-                <a:solidFill>
-                  <a:srgbClr val="3D3935"/>
-                </a:solidFill>
-                <a:latin typeface="Calibri" pitchFamily="34" charset="0"/>
-                <a:ea typeface="Calibri" pitchFamily="34" charset="-122"/>
-                <a:cs typeface="Calibri" pitchFamily="34" charset="-120"/>
-              </a:rPr>
-              <a:t>Excavation / digging for H-Beam</a:t>
-            </a:r>
-            <a:endParaRPr lang="en-US" sz="1100" dirty="0"/>
-          </a:p>
-        </p:txBody>
-      </p:sp>
-      <p:sp>
-        <p:nvSpPr>
-          <p:cNvPr id="11" name="Text 9"/>
-          <p:cNvSpPr/>
-          <p:nvPr/>
-        </p:nvSpPr>
-        <p:spPr>
-          <a:xfrm>
-            <a:off x="749808" y="2542032"/>
-            <a:ext cx="1606235" cy="228600"/>
-          </a:xfrm>
-          <a:prstGeom prst="rect">
-            <a:avLst/>
-          </a:prstGeom>
-          <a:noFill/>
-          <a:ln/>
-        </p:spPr>
-        <p:txBody>
-          <a:bodyPr wrap="square" lIns="0" tIns="0" rIns="0" bIns="0" rtlCol="0" anchor="t">
-            <a:normAutofit/>
-          </a:bodyPr>
-          <a:lstStyle/>
-          <a:p>
-            <a:pPr algn="l" indent="0" marL="0">
-              <a:buNone/>
-            </a:pPr>
-            <a:r>
-              <a:rPr lang="en-US" altLang="en-US" sz="750" b="1" dirty="0">
-                <a:solidFill>
-                  <a:srgbClr val="7A3A30"/>
-                </a:solidFill>
-                <a:latin typeface="Calibri" pitchFamily="34" charset="0"/>
-                <a:ea typeface="Calibri" pitchFamily="34" charset="-122"/>
-                <a:cs typeface="Calibri" pitchFamily="34" charset="-120"/>
-              </a:rPr>
-              <a:t>13 Oct → 14 Oct · 2 d</a:t>
-            </a:r>
-            <a:endParaRPr lang="en-US" sz="750" dirty="0"/>
-          </a:p>
-        </p:txBody>
-      </p:sp>
-      <p:sp>
-        <p:nvSpPr>
-          <p:cNvPr id="12" name="Shape 10"/>
-          <p:cNvSpPr/>
-          <p:nvPr/>
-        </p:nvSpPr>
-        <p:spPr>
-          <a:xfrm>
-            <a:off x="2657795" y="1783080"/>
-            <a:ext cx="2365187" cy="1051560"/>
-          </a:xfrm>
-          <a:prstGeom prst="chevron">
-            <a:avLst/>
-          </a:prstGeom>
-          <a:solidFill>
-            <a:srgbClr val="F4DAD6"/>
-          </a:solidFill>
-          <a:ln w="12700">
-            <a:solidFill>
-              <a:srgbClr val="F4DAD6"/>
-            </a:solidFill>
-            <a:prstDash val="solid"/>
-          </a:ln>
-        </p:spPr>
-      </p:sp>
-      <p:sp>
-        <p:nvSpPr>
-          <p:cNvPr id="13" name="Shape 11"/>
-          <p:cNvSpPr/>
-          <p:nvPr/>
-        </p:nvSpPr>
-        <p:spPr>
-          <a:xfrm>
-            <a:off x="3023555" y="1874520"/>
-            <a:ext cx="274320" cy="274320"/>
-          </a:xfrm>
-          <a:prstGeom prst="ellipse">
-            <a:avLst/>
-          </a:prstGeom>
-          <a:solidFill>
-            <a:srgbClr val="C8503F"/>
-          </a:solidFill>
-          <a:ln w="12700">
-            <a:solidFill>
-              <a:srgbClr val="C8503F"/>
-            </a:solidFill>
-            <a:prstDash val="solid"/>
-          </a:ln>
-        </p:spPr>
-      </p:sp>
-      <p:sp>
-        <p:nvSpPr>
-          <p:cNvPr id="14" name="Text 12"/>
-          <p:cNvSpPr/>
-          <p:nvPr/>
-        </p:nvSpPr>
-        <p:spPr>
-          <a:xfrm>
-            <a:off x="3023555" y="1874520"/>
-            <a:ext cx="274320" cy="274320"/>
-          </a:xfrm>
-          <a:prstGeom prst="rect">
-            <a:avLst/>
-          </a:prstGeom>
-          <a:noFill/>
-          <a:ln/>
-        </p:spPr>
-        <p:txBody>
-          <a:bodyPr wrap="square" lIns="0" tIns="0" rIns="0" bIns="0" rtlCol="0" anchor="ctr">
-            <a:normAutofit/>
-          </a:bodyPr>
-          <a:lstStyle/>
-          <a:p>
-            <a:pPr algn="ctr" indent="0" marL="0">
-              <a:buNone/>
-            </a:pPr>
-            <a:r>
-              <a:rPr lang="en-US" altLang="en-US" sz="1000" b="1" dirty="0">
-                <a:solidFill>
-                  <a:srgbClr val="FFFFFF"/>
-                </a:solidFill>
-                <a:latin typeface="Calibri" pitchFamily="34" charset="0"/>
-                <a:ea typeface="Calibri" pitchFamily="34" charset="-122"/>
-                <a:cs typeface="Calibri" pitchFamily="34" charset="-120"/>
-              </a:rPr>
-              <a:t>2</a:t>
-            </a:r>
-            <a:endParaRPr lang="en-US" sz="1000" dirty="0"/>
-          </a:p>
-        </p:txBody>
-      </p:sp>
-      <p:sp>
-        <p:nvSpPr>
-          <p:cNvPr id="15" name="Text 13"/>
-          <p:cNvSpPr/>
-          <p:nvPr/>
-        </p:nvSpPr>
-        <p:spPr>
-          <a:xfrm>
-            <a:off x="3041843" y="2157984"/>
-            <a:ext cx="1606235" cy="411480"/>
-          </a:xfrm>
-          <a:prstGeom prst="rect">
-            <a:avLst/>
-          </a:prstGeom>
-          <a:noFill/>
-          <a:ln/>
-        </p:spPr>
-        <p:txBody>
-          <a:bodyPr wrap="square" lIns="0" tIns="0" rIns="0" bIns="0" rtlCol="0" anchor="t">
-            <a:normAutofit/>
-          </a:bodyPr>
-          <a:lstStyle/>
-          <a:p>
-            <a:pPr algn="l" indent="0" marL="0">
-              <a:buNone/>
-            </a:pPr>
-            <a:r>
-              <a:rPr lang="en-US" altLang="en-US" sz="1100" b="1" dirty="0">
-                <a:solidFill>
-                  <a:srgbClr val="3D3935"/>
-                </a:solidFill>
-                <a:latin typeface="Calibri" pitchFamily="34" charset="0"/>
-                <a:ea typeface="Calibri" pitchFamily="34" charset="-122"/>
-                <a:cs typeface="Calibri" pitchFamily="34" charset="-120"/>
-              </a:rPr>
-              <a:t>Installation of H-Beam</a:t>
-            </a:r>
-            <a:endParaRPr lang="en-US" sz="1100" dirty="0"/>
-          </a:p>
-        </p:txBody>
-      </p:sp>
-      <p:sp>
-        <p:nvSpPr>
-          <p:cNvPr id="16" name="Text 14"/>
-          <p:cNvSpPr/>
-          <p:nvPr/>
-        </p:nvSpPr>
-        <p:spPr>
-          <a:xfrm>
-            <a:off x="3041843" y="2542032"/>
-            <a:ext cx="1606235" cy="228600"/>
-          </a:xfrm>
-          <a:prstGeom prst="rect">
-            <a:avLst/>
-          </a:prstGeom>
-          <a:noFill/>
-          <a:ln/>
-        </p:spPr>
-        <p:txBody>
-          <a:bodyPr wrap="square" lIns="0" tIns="0" rIns="0" bIns="0" rtlCol="0" anchor="t">
-            <a:normAutofit/>
-          </a:bodyPr>
-          <a:lstStyle/>
-          <a:p>
-            <a:pPr algn="l" indent="0" marL="0">
-              <a:buNone/>
-            </a:pPr>
-            <a:r>
-              <a:rPr lang="en-US" altLang="en-US" sz="750" b="1" dirty="0">
-                <a:solidFill>
-                  <a:srgbClr val="7A3A30"/>
-                </a:solidFill>
-                <a:latin typeface="Calibri" pitchFamily="34" charset="0"/>
-                <a:ea typeface="Calibri" pitchFamily="34" charset="-122"/>
-                <a:cs typeface="Calibri" pitchFamily="34" charset="-120"/>
-              </a:rPr>
-              <a:t>14 Oct → 17 Oct · 3 d · A1 SS +1</a:t>
-            </a:r>
-            <a:endParaRPr lang="en-US" sz="750" dirty="0"/>
-          </a:p>
-        </p:txBody>
-      </p:sp>
-      <p:sp>
-        <p:nvSpPr>
-          <p:cNvPr id="17" name="Shape 15"/>
-          <p:cNvSpPr/>
-          <p:nvPr/>
-        </p:nvSpPr>
-        <p:spPr>
-          <a:xfrm>
-            <a:off x="4949830" y="1783080"/>
-            <a:ext cx="2365187" cy="1051560"/>
-          </a:xfrm>
-          <a:prstGeom prst="chevron">
-            <a:avLst/>
-          </a:prstGeom>
-          <a:solidFill>
-            <a:srgbClr val="F4DAD6"/>
-          </a:solidFill>
-          <a:ln w="12700">
-            <a:solidFill>
-              <a:srgbClr val="F4DAD6"/>
-            </a:solidFill>
-            <a:prstDash val="solid"/>
-          </a:ln>
-        </p:spPr>
-      </p:sp>
-      <p:sp>
-        <p:nvSpPr>
-          <p:cNvPr id="18" name="Shape 16"/>
-          <p:cNvSpPr/>
-          <p:nvPr/>
-        </p:nvSpPr>
-        <p:spPr>
-          <a:xfrm>
-            <a:off x="5315590" y="1874520"/>
-            <a:ext cx="274320" cy="274320"/>
-          </a:xfrm>
-          <a:prstGeom prst="ellipse">
-            <a:avLst/>
-          </a:prstGeom>
-          <a:solidFill>
-            <a:srgbClr val="C8503F"/>
-          </a:solidFill>
-          <a:ln w="12700">
-            <a:solidFill>
-              <a:srgbClr val="C8503F"/>
-            </a:solidFill>
-            <a:prstDash val="solid"/>
-          </a:ln>
-        </p:spPr>
-      </p:sp>
-      <p:sp>
-        <p:nvSpPr>
-          <p:cNvPr id="19" name="Text 17"/>
-          <p:cNvSpPr/>
-          <p:nvPr/>
-        </p:nvSpPr>
-        <p:spPr>
-          <a:xfrm>
-            <a:off x="5315590" y="1874520"/>
-            <a:ext cx="274320" cy="274320"/>
-          </a:xfrm>
-          <a:prstGeom prst="rect">
-            <a:avLst/>
-          </a:prstGeom>
-          <a:noFill/>
-          <a:ln/>
-        </p:spPr>
-        <p:txBody>
-          <a:bodyPr wrap="square" lIns="0" tIns="0" rIns="0" bIns="0" rtlCol="0" anchor="ctr">
-            <a:normAutofit/>
-          </a:bodyPr>
-          <a:lstStyle/>
-          <a:p>
-            <a:pPr algn="ctr" indent="0" marL="0">
-              <a:buNone/>
-            </a:pPr>
-            <a:r>
-              <a:rPr lang="en-US" altLang="en-US" sz="1000" b="1" dirty="0">
-                <a:solidFill>
-                  <a:srgbClr val="FFFFFF"/>
-                </a:solidFill>
-                <a:latin typeface="Calibri" pitchFamily="34" charset="0"/>
-                <a:ea typeface="Calibri" pitchFamily="34" charset="-122"/>
-                <a:cs typeface="Calibri" pitchFamily="34" charset="-120"/>
-              </a:rPr>
-              <a:t>3</a:t>
-            </a:r>
-            <a:endParaRPr lang="en-US" sz="1000" dirty="0"/>
-          </a:p>
-        </p:txBody>
-      </p:sp>
-      <p:sp>
-        <p:nvSpPr>
-          <p:cNvPr id="20" name="Text 18"/>
-          <p:cNvSpPr/>
-          <p:nvPr/>
-        </p:nvSpPr>
-        <p:spPr>
-          <a:xfrm>
-            <a:off x="5333878" y="2157984"/>
-            <a:ext cx="1606235" cy="411480"/>
-          </a:xfrm>
-          <a:prstGeom prst="rect">
-            <a:avLst/>
-          </a:prstGeom>
-          <a:noFill/>
-          <a:ln/>
-        </p:spPr>
-        <p:txBody>
-          <a:bodyPr wrap="square" lIns="0" tIns="0" rIns="0" bIns="0" rtlCol="0" anchor="t">
-            <a:normAutofit/>
-          </a:bodyPr>
-          <a:lstStyle/>
-          <a:p>
-            <a:pPr algn="l" indent="0" marL="0">
-              <a:buNone/>
-            </a:pPr>
-            <a:r>
-              <a:rPr lang="en-US" altLang="en-US" sz="1100" b="1" dirty="0">
-                <a:solidFill>
-                  <a:srgbClr val="3D3935"/>
-                </a:solidFill>
-                <a:latin typeface="Calibri" pitchFamily="34" charset="0"/>
-                <a:ea typeface="Calibri" pitchFamily="34" charset="-122"/>
-                <a:cs typeface="Calibri" pitchFamily="34" charset="-120"/>
-              </a:rPr>
-              <a:t>Concrete work for H-Beam</a:t>
-            </a:r>
-            <a:endParaRPr lang="en-US" sz="1100" dirty="0"/>
-          </a:p>
-        </p:txBody>
-      </p:sp>
-      <p:sp>
-        <p:nvSpPr>
-          <p:cNvPr id="21" name="Text 19"/>
-          <p:cNvSpPr/>
-          <p:nvPr/>
-        </p:nvSpPr>
-        <p:spPr>
-          <a:xfrm>
-            <a:off x="5333878" y="2542032"/>
-            <a:ext cx="1606235" cy="228600"/>
-          </a:xfrm>
-          <a:prstGeom prst="rect">
-            <a:avLst/>
-          </a:prstGeom>
-          <a:noFill/>
-          <a:ln/>
-        </p:spPr>
-        <p:txBody>
-          <a:bodyPr wrap="square" lIns="0" tIns="0" rIns="0" bIns="0" rtlCol="0" anchor="t">
-            <a:normAutofit/>
-          </a:bodyPr>
-          <a:lstStyle/>
-          <a:p>
-            <a:pPr algn="l" indent="0" marL="0">
-              <a:buNone/>
-            </a:pPr>
-            <a:r>
-              <a:rPr lang="en-US" altLang="en-US" sz="750" b="1" dirty="0">
-                <a:solidFill>
-                  <a:srgbClr val="7A3A30"/>
-                </a:solidFill>
-                <a:latin typeface="Calibri" pitchFamily="34" charset="0"/>
-                <a:ea typeface="Calibri" pitchFamily="34" charset="-122"/>
-                <a:cs typeface="Calibri" pitchFamily="34" charset="-120"/>
-              </a:rPr>
-              <a:t>15 Oct → 18 Oct · 3 d · A2 SS +1</a:t>
-            </a:r>
-            <a:endParaRPr lang="en-US" sz="750" dirty="0"/>
-          </a:p>
-        </p:txBody>
-      </p:sp>
-      <p:sp>
-        <p:nvSpPr>
-          <p:cNvPr id="22" name="Shape 20"/>
-          <p:cNvSpPr/>
-          <p:nvPr/>
-        </p:nvSpPr>
-        <p:spPr>
-          <a:xfrm>
-            <a:off x="7241865" y="1783080"/>
-            <a:ext cx="2365187" cy="1051560"/>
-          </a:xfrm>
-          <a:prstGeom prst="chevron">
-            <a:avLst/>
-          </a:prstGeom>
-          <a:solidFill>
-            <a:srgbClr val="F4DAD6"/>
-          </a:solidFill>
-          <a:ln w="12700">
-            <a:solidFill>
-              <a:srgbClr val="F4DAD6"/>
-            </a:solidFill>
-            <a:prstDash val="solid"/>
-          </a:ln>
-        </p:spPr>
-      </p:sp>
-      <p:sp>
-        <p:nvSpPr>
-          <p:cNvPr id="23" name="Shape 21"/>
-          <p:cNvSpPr/>
-          <p:nvPr/>
-        </p:nvSpPr>
-        <p:spPr>
-          <a:xfrm>
-            <a:off x="7607625" y="1874520"/>
-            <a:ext cx="274320" cy="274320"/>
-          </a:xfrm>
-          <a:prstGeom prst="ellipse">
-            <a:avLst/>
-          </a:prstGeom>
-          <a:solidFill>
-            <a:srgbClr val="C8503F"/>
-          </a:solidFill>
-          <a:ln w="12700">
-            <a:solidFill>
-              <a:srgbClr val="C8503F"/>
-            </a:solidFill>
-            <a:prstDash val="solid"/>
-          </a:ln>
-        </p:spPr>
-      </p:sp>
-      <p:sp>
-        <p:nvSpPr>
-          <p:cNvPr id="24" name="Text 22"/>
-          <p:cNvSpPr/>
-          <p:nvPr/>
-        </p:nvSpPr>
-        <p:spPr>
-          <a:xfrm>
-            <a:off x="7607625" y="1874520"/>
-            <a:ext cx="274320" cy="274320"/>
-          </a:xfrm>
-          <a:prstGeom prst="rect">
-            <a:avLst/>
-          </a:prstGeom>
-          <a:noFill/>
-          <a:ln/>
-        </p:spPr>
-        <p:txBody>
-          <a:bodyPr wrap="square" lIns="0" tIns="0" rIns="0" bIns="0" rtlCol="0" anchor="ctr">
-            <a:normAutofit/>
-          </a:bodyPr>
-          <a:lstStyle/>
-          <a:p>
-            <a:pPr algn="ctr" indent="0" marL="0">
-              <a:buNone/>
-            </a:pPr>
-            <a:r>
-              <a:rPr lang="en-US" altLang="en-US" sz="1000" b="1" dirty="0">
-                <a:solidFill>
-                  <a:srgbClr val="FFFFFF"/>
-                </a:solidFill>
-                <a:latin typeface="Calibri" pitchFamily="34" charset="0"/>
-                <a:ea typeface="Calibri" pitchFamily="34" charset="-122"/>
-                <a:cs typeface="Calibri" pitchFamily="34" charset="-120"/>
-              </a:rPr>
-              <a:t>4</a:t>
-            </a:r>
-            <a:endParaRPr lang="en-US" sz="1000" dirty="0"/>
-          </a:p>
-        </p:txBody>
-      </p:sp>
-      <p:sp>
-        <p:nvSpPr>
-          <p:cNvPr id="25" name="Text 23"/>
-          <p:cNvSpPr/>
-          <p:nvPr/>
-        </p:nvSpPr>
-        <p:spPr>
-          <a:xfrm>
-            <a:off x="7625913" y="2157984"/>
-            <a:ext cx="1606235" cy="411480"/>
-          </a:xfrm>
-          <a:prstGeom prst="rect">
-            <a:avLst/>
-          </a:prstGeom>
-          <a:noFill/>
-          <a:ln/>
-        </p:spPr>
-        <p:txBody>
-          <a:bodyPr wrap="square" lIns="0" tIns="0" rIns="0" bIns="0" rtlCol="0" anchor="t">
-            <a:normAutofit/>
-          </a:bodyPr>
-          <a:lstStyle/>
-          <a:p>
-            <a:pPr algn="l" indent="0" marL="0">
-              <a:buNone/>
-            </a:pPr>
-            <a:r>
-              <a:rPr lang="en-US" altLang="en-US" sz="1100" b="1" dirty="0">
-                <a:solidFill>
-                  <a:srgbClr val="3D3935"/>
-                </a:solidFill>
-                <a:latin typeface="Calibri" pitchFamily="34" charset="0"/>
-                <a:ea typeface="Calibri" pitchFamily="34" charset="-122"/>
-                <a:cs typeface="Calibri" pitchFamily="34" charset="-120"/>
-              </a:rPr>
-              <a:t>Bracing for shoring</a:t>
-            </a:r>
-            <a:endParaRPr lang="en-US" sz="1100" dirty="0"/>
-          </a:p>
-        </p:txBody>
-      </p:sp>
-      <p:sp>
-        <p:nvSpPr>
-          <p:cNvPr id="26" name="Text 24"/>
-          <p:cNvSpPr/>
-          <p:nvPr/>
-        </p:nvSpPr>
-        <p:spPr>
-          <a:xfrm>
-            <a:off x="7625913" y="2542032"/>
-            <a:ext cx="1606235" cy="228600"/>
-          </a:xfrm>
-          <a:prstGeom prst="rect">
-            <a:avLst/>
-          </a:prstGeom>
-          <a:noFill/>
-          <a:ln/>
-        </p:spPr>
-        <p:txBody>
-          <a:bodyPr wrap="square" lIns="0" tIns="0" rIns="0" bIns="0" rtlCol="0" anchor="t">
-            <a:normAutofit/>
-          </a:bodyPr>
-          <a:lstStyle/>
-          <a:p>
-            <a:pPr algn="l" indent="0" marL="0">
-              <a:buNone/>
-            </a:pPr>
-            <a:r>
-              <a:rPr lang="en-US" altLang="en-US" sz="750" b="1" dirty="0">
-                <a:solidFill>
-                  <a:srgbClr val="7A3A30"/>
-                </a:solidFill>
-                <a:latin typeface="Calibri" pitchFamily="34" charset="0"/>
-                <a:ea typeface="Calibri" pitchFamily="34" charset="-122"/>
-                <a:cs typeface="Calibri" pitchFamily="34" charset="-120"/>
-              </a:rPr>
-              <a:t>17 Oct → 19 Oct · 3 d · A3 SS +1</a:t>
-            </a:r>
-            <a:endParaRPr lang="en-US" sz="750" dirty="0"/>
-          </a:p>
-        </p:txBody>
-      </p:sp>
-      <p:sp>
-        <p:nvSpPr>
-          <p:cNvPr id="27" name="Shape 25"/>
-          <p:cNvSpPr/>
-          <p:nvPr/>
-        </p:nvSpPr>
-        <p:spPr>
-          <a:xfrm>
-            <a:off x="9533900" y="1783080"/>
-            <a:ext cx="2365187" cy="1051560"/>
-          </a:xfrm>
-          <a:prstGeom prst="chevron">
-            <a:avLst/>
-          </a:prstGeom>
-          <a:solidFill>
-            <a:srgbClr val="F4DAD6"/>
-          </a:solidFill>
-          <a:ln w="12700">
-            <a:solidFill>
-              <a:srgbClr val="F4DAD6"/>
-            </a:solidFill>
-            <a:prstDash val="solid"/>
-          </a:ln>
-        </p:spPr>
-      </p:sp>
-      <p:sp>
-        <p:nvSpPr>
-          <p:cNvPr id="28" name="Shape 26"/>
-          <p:cNvSpPr/>
-          <p:nvPr/>
-        </p:nvSpPr>
-        <p:spPr>
-          <a:xfrm>
-            <a:off x="9899660" y="1874520"/>
-            <a:ext cx="274320" cy="274320"/>
-          </a:xfrm>
-          <a:prstGeom prst="ellipse">
-            <a:avLst/>
-          </a:prstGeom>
-          <a:solidFill>
-            <a:srgbClr val="C8503F"/>
-          </a:solidFill>
-          <a:ln w="12700">
-            <a:solidFill>
-              <a:srgbClr val="C8503F"/>
-            </a:solidFill>
-            <a:prstDash val="solid"/>
-          </a:ln>
-        </p:spPr>
-      </p:sp>
-      <p:sp>
-        <p:nvSpPr>
-          <p:cNvPr id="29" name="Text 27"/>
-          <p:cNvSpPr/>
-          <p:nvPr/>
-        </p:nvSpPr>
-        <p:spPr>
-          <a:xfrm>
-            <a:off x="9899660" y="1874520"/>
-            <a:ext cx="274320" cy="274320"/>
-          </a:xfrm>
-          <a:prstGeom prst="rect">
-            <a:avLst/>
-          </a:prstGeom>
-          <a:noFill/>
-          <a:ln/>
-        </p:spPr>
-        <p:txBody>
-          <a:bodyPr wrap="square" lIns="0" tIns="0" rIns="0" bIns="0" rtlCol="0" anchor="ctr">
-            <a:normAutofit/>
-          </a:bodyPr>
-          <a:lstStyle/>
-          <a:p>
-            <a:pPr algn="ctr" indent="0" marL="0">
-              <a:buNone/>
-            </a:pPr>
-            <a:r>
-              <a:rPr lang="en-US" altLang="en-US" sz="1000" b="1" dirty="0">
-                <a:solidFill>
-                  <a:srgbClr val="FFFFFF"/>
-                </a:solidFill>
-                <a:latin typeface="Calibri" pitchFamily="34" charset="0"/>
-                <a:ea typeface="Calibri" pitchFamily="34" charset="-122"/>
-                <a:cs typeface="Calibri" pitchFamily="34" charset="-120"/>
-              </a:rPr>
-              <a:t>5</a:t>
-            </a:r>
-            <a:endParaRPr lang="en-US" sz="1000" dirty="0"/>
-          </a:p>
-        </p:txBody>
-      </p:sp>
-      <p:sp>
-        <p:nvSpPr>
-          <p:cNvPr id="30" name="Text 28"/>
-          <p:cNvSpPr/>
-          <p:nvPr/>
-        </p:nvSpPr>
-        <p:spPr>
-          <a:xfrm>
-            <a:off x="9917948" y="2157984"/>
-            <a:ext cx="1606235" cy="411480"/>
-          </a:xfrm>
-          <a:prstGeom prst="rect">
-            <a:avLst/>
-          </a:prstGeom>
-          <a:noFill/>
-          <a:ln/>
-        </p:spPr>
-        <p:txBody>
-          <a:bodyPr wrap="square" lIns="0" tIns="0" rIns="0" bIns="0" rtlCol="0" anchor="t">
-            <a:normAutofit/>
-          </a:bodyPr>
-          <a:lstStyle/>
-          <a:p>
-            <a:pPr algn="l" indent="0" marL="0">
-              <a:buNone/>
-            </a:pPr>
-            <a:r>
-              <a:rPr lang="en-US" altLang="en-US" sz="1100" b="1" dirty="0">
-                <a:solidFill>
-                  <a:srgbClr val="3D3935"/>
-                </a:solidFill>
-                <a:latin typeface="Calibri" pitchFamily="34" charset="0"/>
-                <a:ea typeface="Calibri" pitchFamily="34" charset="-122"/>
-                <a:cs typeface="Calibri" pitchFamily="34" charset="-120"/>
-              </a:rPr>
-              <a:t>Corrugated sheets installation / insertion</a:t>
-            </a:r>
-            <a:endParaRPr lang="en-US" sz="1100" dirty="0"/>
-          </a:p>
-        </p:txBody>
-      </p:sp>
-      <p:sp>
-        <p:nvSpPr>
-          <p:cNvPr id="31" name="Text 29"/>
-          <p:cNvSpPr/>
-          <p:nvPr/>
-        </p:nvSpPr>
-        <p:spPr>
-          <a:xfrm>
-            <a:off x="9917948" y="2542032"/>
-            <a:ext cx="1606235" cy="228600"/>
-          </a:xfrm>
-          <a:prstGeom prst="rect">
-            <a:avLst/>
-          </a:prstGeom>
-          <a:noFill/>
-          <a:ln/>
-        </p:spPr>
-        <p:txBody>
-          <a:bodyPr wrap="square" lIns="0" tIns="0" rIns="0" bIns="0" rtlCol="0" anchor="t">
-            <a:normAutofit/>
-          </a:bodyPr>
-          <a:lstStyle/>
-          <a:p>
-            <a:pPr algn="l" indent="0" marL="0">
-              <a:buNone/>
-            </a:pPr>
-            <a:r>
-              <a:rPr lang="en-US" altLang="en-US" sz="750" b="1" dirty="0">
-                <a:solidFill>
-                  <a:srgbClr val="7A3A30"/>
-                </a:solidFill>
-                <a:latin typeface="Calibri" pitchFamily="34" charset="0"/>
-                <a:ea typeface="Calibri" pitchFamily="34" charset="-122"/>
-                <a:cs typeface="Calibri" pitchFamily="34" charset="-120"/>
-              </a:rPr>
-              <a:t>18 Oct → 19 Oct · 2 d · A4 SS +1</a:t>
-            </a:r>
-            <a:endParaRPr lang="en-US" sz="750" dirty="0"/>
-          </a:p>
-        </p:txBody>
-      </p:sp>
-      <p:sp>
-        <p:nvSpPr>
-          <p:cNvPr id="32" name="Text 30"/>
-          <p:cNvSpPr/>
-          <p:nvPr/>
-        </p:nvSpPr>
-        <p:spPr>
-          <a:xfrm>
-            <a:off x="365760" y="2852928"/>
-            <a:ext cx="11460175" cy="182880"/>
-          </a:xfrm>
-          <a:prstGeom prst="rect">
-            <a:avLst/>
-          </a:prstGeom>
-          <a:noFill/>
-          <a:ln/>
-        </p:spPr>
-        <p:txBody>
-          <a:bodyPr wrap="square" lIns="0" tIns="0" rIns="0" bIns="0" rtlCol="0" anchor="ctr">
-            <a:normAutofit/>
-          </a:bodyPr>
-          <a:lstStyle/>
-          <a:p>
-            <a:pPr algn="l" indent="0" marL="0">
-              <a:buNone/>
-            </a:pPr>
-            <a:r>
-              <a:rPr lang="en-US" altLang="en-US" sz="750" dirty="0">
-                <a:solidFill>
-                  <a:srgbClr val="66707A"/>
-                </a:solidFill>
-                <a:latin typeface="Calibri" pitchFamily="34" charset="0"/>
-                <a:ea typeface="Calibri" pitchFamily="34" charset="-122"/>
-                <a:cs typeface="Calibri" pitchFamily="34" charset="-120"/>
-              </a:rPr>
-              <a:t>Durations and links of the five sub-activities are proposed to fit within the 6 working days of Activity A (editable).</a:t>
-            </a:r>
-            <a:endParaRPr lang="en-US" sz="750" dirty="0"/>
-          </a:p>
-        </p:txBody>
-      </p:sp>
-      <p:sp>
-        <p:nvSpPr>
-          <p:cNvPr id="33" name="Shape 31"/>
-          <p:cNvSpPr/>
-          <p:nvPr/>
-        </p:nvSpPr>
-        <p:spPr>
-          <a:xfrm>
-            <a:off x="365760" y="3099816"/>
-            <a:ext cx="54864" cy="256032"/>
-          </a:xfrm>
-          <a:prstGeom prst="rect">
-            <a:avLst/>
-          </a:prstGeom>
-          <a:solidFill>
-            <a:srgbClr val="00778B"/>
-          </a:solidFill>
-          <a:ln w="12700">
-            <a:solidFill>
-              <a:srgbClr val="00778B"/>
-            </a:solidFill>
-            <a:prstDash val="solid"/>
-          </a:ln>
-        </p:spPr>
-      </p:sp>
-      <p:sp>
-        <p:nvSpPr>
-          <p:cNvPr id="34" name="Text 32"/>
-          <p:cNvSpPr/>
-          <p:nvPr/>
-        </p:nvSpPr>
-        <p:spPr>
-          <a:xfrm>
-            <a:off x="512064" y="3063240"/>
-            <a:ext cx="3657600" cy="329184"/>
-          </a:xfrm>
-          <a:prstGeom prst="rect">
-            <a:avLst/>
-          </a:prstGeom>
-          <a:noFill/>
-          <a:ln/>
-        </p:spPr>
-        <p:txBody>
-          <a:bodyPr wrap="square" lIns="0" tIns="0" rIns="0" bIns="0" rtlCol="0" anchor="ctr">
-            <a:normAutofit/>
-          </a:bodyPr>
-          <a:lstStyle/>
-          <a:p>
-            <a:pPr algn="l" indent="0" marL="0">
-              <a:buNone/>
-            </a:pPr>
-            <a:r>
-              <a:rPr lang="en-US" altLang="en-US" sz="1500" b="1" dirty="0">
-                <a:solidFill>
-                  <a:srgbClr val="3D3935"/>
-                </a:solidFill>
-                <a:latin typeface="Calibri" pitchFamily="34" charset="0"/>
-                <a:ea typeface="Calibri" pitchFamily="34" charset="-122"/>
-                <a:cs typeface="Calibri" pitchFamily="34" charset="-120"/>
-              </a:rPr>
-              <a:t>Key dates (automatic)</a:t>
-            </a:r>
-            <a:endParaRPr lang="en-US" sz="1500" dirty="0"/>
-          </a:p>
-        </p:txBody>
-      </p:sp>
-      <p:sp>
-        <p:nvSpPr>
-          <p:cNvPr id="35" name="Shape 33"/>
-          <p:cNvSpPr/>
-          <p:nvPr/>
-        </p:nvSpPr>
-        <p:spPr>
-          <a:xfrm>
-            <a:off x="365760" y="3493008"/>
-            <a:ext cx="4206240" cy="310896"/>
-          </a:xfrm>
-          <a:prstGeom prst="rect">
-            <a:avLst/>
-          </a:prstGeom>
-          <a:solidFill>
-            <a:srgbClr val="FFFFFF"/>
-          </a:solidFill>
-          <a:ln w="6350">
-            <a:solidFill>
-              <a:srgbClr val="DFE6EA"/>
-            </a:solidFill>
-            <a:prstDash val="solid"/>
-          </a:ln>
-        </p:spPr>
-      </p:sp>
-      <p:sp>
-        <p:nvSpPr>
-          <p:cNvPr id="36" name="Text 34"/>
-          <p:cNvSpPr/>
-          <p:nvPr/>
-        </p:nvSpPr>
-        <p:spPr>
-          <a:xfrm>
-            <a:off x="457200" y="3493008"/>
-            <a:ext cx="2286000" cy="310896"/>
-          </a:xfrm>
-          <a:prstGeom prst="rect">
-            <a:avLst/>
-          </a:prstGeom>
-          <a:noFill/>
-          <a:ln/>
-        </p:spPr>
-        <p:txBody>
-          <a:bodyPr wrap="square" lIns="0" tIns="0" rIns="0" bIns="0" rtlCol="0" anchor="ctr">
-            <a:normAutofit/>
-          </a:bodyPr>
-          <a:lstStyle/>
-          <a:p>
-            <a:pPr algn="l" indent="0" marL="0">
-              <a:buNone/>
-            </a:pPr>
-            <a:r>
-              <a:rPr lang="en-US" altLang="en-US" sz="950" dirty="0">
-                <a:solidFill>
-                  <a:srgbClr val="4A555D"/>
-                </a:solidFill>
-                <a:latin typeface="Calibri" pitchFamily="34" charset="0"/>
-                <a:ea typeface="Calibri" pitchFamily="34" charset="-122"/>
-                <a:cs typeface="Calibri" pitchFamily="34" charset="-120"/>
-              </a:rPr>
-              <a:t>Commencement</a:t>
-            </a:r>
-            <a:endParaRPr lang="en-US" sz="950" dirty="0"/>
-          </a:p>
-        </p:txBody>
-      </p:sp>
-      <p:sp>
-        <p:nvSpPr>
-          <p:cNvPr id="37" name="Text 35"/>
-          <p:cNvSpPr/>
-          <p:nvPr/>
-        </p:nvSpPr>
-        <p:spPr>
-          <a:xfrm>
-            <a:off x="2651760" y="3493008"/>
-            <a:ext cx="1828800" cy="310896"/>
-          </a:xfrm>
-          <a:prstGeom prst="rect">
-            <a:avLst/>
-          </a:prstGeom>
-          <a:noFill/>
-          <a:ln/>
-        </p:spPr>
-        <p:txBody>
-          <a:bodyPr wrap="square" lIns="0" tIns="0" rIns="0" bIns="0" rtlCol="0" anchor="ctr">
-            <a:normAutofit/>
-          </a:bodyPr>
-          <a:lstStyle/>
-          <a:p>
-            <a:pPr algn="r" indent="0" marL="0">
-              <a:buNone/>
-            </a:pPr>
-            <a:r>
-              <a:rPr lang="en-US" altLang="en-US" sz="950" b="1" dirty="0">
-                <a:solidFill>
-                  <a:srgbClr val="3D3935"/>
-                </a:solidFill>
-                <a:latin typeface="Calibri" pitchFamily="34" charset="0"/>
-                <a:ea typeface="Calibri" pitchFamily="34" charset="-122"/>
-                <a:cs typeface="Calibri" pitchFamily="34" charset="-120"/>
-              </a:rPr>
-              <a:t>Tue 13 Oct 2026</a:t>
-            </a:r>
-            <a:endParaRPr lang="en-US" sz="950" dirty="0"/>
-          </a:p>
-        </p:txBody>
-      </p:sp>
-      <p:sp>
-        <p:nvSpPr>
-          <p:cNvPr id="38" name="Shape 36"/>
-          <p:cNvSpPr/>
-          <p:nvPr/>
-        </p:nvSpPr>
-        <p:spPr>
-          <a:xfrm>
-            <a:off x="365760" y="3803904"/>
-            <a:ext cx="4206240" cy="310896"/>
-          </a:xfrm>
-          <a:prstGeom prst="rect">
-            <a:avLst/>
-          </a:prstGeom>
-          <a:solidFill>
-            <a:srgbClr val="F6F9FA"/>
-          </a:solidFill>
-          <a:ln w="6350">
-            <a:solidFill>
-              <a:srgbClr val="DFE6EA"/>
-            </a:solidFill>
-            <a:prstDash val="solid"/>
-          </a:ln>
-        </p:spPr>
-      </p:sp>
-      <p:sp>
-        <p:nvSpPr>
-          <p:cNvPr id="39" name="Text 37"/>
-          <p:cNvSpPr/>
-          <p:nvPr/>
-        </p:nvSpPr>
-        <p:spPr>
-          <a:xfrm>
-            <a:off x="457200" y="3803904"/>
-            <a:ext cx="2286000" cy="310896"/>
-          </a:xfrm>
-          <a:prstGeom prst="rect">
-            <a:avLst/>
-          </a:prstGeom>
-          <a:noFill/>
-          <a:ln/>
-        </p:spPr>
-        <p:txBody>
-          <a:bodyPr wrap="square" lIns="0" tIns="0" rIns="0" bIns="0" rtlCol="0" anchor="ctr">
-            <a:normAutofit/>
-          </a:bodyPr>
-          <a:lstStyle/>
-          <a:p>
-            <a:pPr algn="l" indent="0" marL="0">
-              <a:buNone/>
-            </a:pPr>
-            <a:r>
-              <a:rPr lang="en-US" altLang="en-US" sz="950" dirty="0">
-                <a:solidFill>
-                  <a:srgbClr val="4A555D"/>
-                </a:solidFill>
-                <a:latin typeface="Calibri" pitchFamily="34" charset="0"/>
-                <a:ea typeface="Calibri" pitchFamily="34" charset="-122"/>
-                <a:cs typeface="Calibri" pitchFamily="34" charset="-120"/>
-              </a:rPr>
-              <a:t>Shoring installation complete</a:t>
-            </a:r>
-            <a:endParaRPr lang="en-US" sz="950" dirty="0"/>
-          </a:p>
-        </p:txBody>
-      </p:sp>
-      <p:sp>
-        <p:nvSpPr>
-          <p:cNvPr id="40" name="Text 38"/>
-          <p:cNvSpPr/>
-          <p:nvPr/>
-        </p:nvSpPr>
-        <p:spPr>
-          <a:xfrm>
-            <a:off x="2651760" y="3803904"/>
-            <a:ext cx="1828800" cy="310896"/>
-          </a:xfrm>
-          <a:prstGeom prst="rect">
-            <a:avLst/>
-          </a:prstGeom>
-          <a:noFill/>
-          <a:ln/>
-        </p:spPr>
-        <p:txBody>
-          <a:bodyPr wrap="square" lIns="0" tIns="0" rIns="0" bIns="0" rtlCol="0" anchor="ctr">
-            <a:normAutofit/>
-          </a:bodyPr>
-          <a:lstStyle/>
-          <a:p>
-            <a:pPr algn="r" indent="0" marL="0">
-              <a:buNone/>
-            </a:pPr>
-            <a:r>
-              <a:rPr lang="en-US" altLang="en-US" sz="950" b="1" dirty="0">
-                <a:solidFill>
-                  <a:srgbClr val="3D3935"/>
-                </a:solidFill>
-                <a:latin typeface="Calibri" pitchFamily="34" charset="0"/>
-                <a:ea typeface="Calibri" pitchFamily="34" charset="-122"/>
-                <a:cs typeface="Calibri" pitchFamily="34" charset="-120"/>
-              </a:rPr>
-              <a:t>Mon 19 Oct 2026</a:t>
-            </a:r>
-            <a:endParaRPr lang="en-US" sz="950" dirty="0"/>
-          </a:p>
-        </p:txBody>
-      </p:sp>
-      <p:sp>
-        <p:nvSpPr>
-          <p:cNvPr id="41" name="Shape 39"/>
-          <p:cNvSpPr/>
-          <p:nvPr/>
-        </p:nvSpPr>
-        <p:spPr>
-          <a:xfrm>
-            <a:off x="365760" y="4114800"/>
-            <a:ext cx="4206240" cy="310896"/>
-          </a:xfrm>
-          <a:prstGeom prst="rect">
-            <a:avLst/>
-          </a:prstGeom>
-          <a:solidFill>
-            <a:srgbClr val="FFFFFF"/>
-          </a:solidFill>
-          <a:ln w="6350">
-            <a:solidFill>
-              <a:srgbClr val="DFE6EA"/>
-            </a:solidFill>
-            <a:prstDash val="solid"/>
-          </a:ln>
-        </p:spPr>
-      </p:sp>
-      <p:sp>
-        <p:nvSpPr>
-          <p:cNvPr id="42" name="Text 40"/>
-          <p:cNvSpPr/>
-          <p:nvPr/>
-        </p:nvSpPr>
-        <p:spPr>
-          <a:xfrm>
-            <a:off x="457200" y="4114800"/>
-            <a:ext cx="2286000" cy="310896"/>
-          </a:xfrm>
-          <a:prstGeom prst="rect">
-            <a:avLst/>
-          </a:prstGeom>
-          <a:noFill/>
-          <a:ln/>
-        </p:spPr>
-        <p:txBody>
-          <a:bodyPr wrap="square" lIns="0" tIns="0" rIns="0" bIns="0" rtlCol="0" anchor="ctr">
-            <a:normAutofit/>
-          </a:bodyPr>
-          <a:lstStyle/>
-          <a:p>
-            <a:pPr algn="l" indent="0" marL="0">
-              <a:buNone/>
-            </a:pPr>
-            <a:r>
-              <a:rPr lang="en-US" altLang="en-US" sz="950" dirty="0">
-                <a:solidFill>
-                  <a:srgbClr val="4A555D"/>
-                </a:solidFill>
-                <a:latin typeface="Calibri" pitchFamily="34" charset="0"/>
-                <a:ea typeface="Calibri" pitchFamily="34" charset="-122"/>
-                <a:cs typeface="Calibri" pitchFamily="34" charset="-120"/>
-              </a:rPr>
-              <a:t>Pit works complete (pit wall)</a:t>
-            </a:r>
-            <a:endParaRPr lang="en-US" sz="950" dirty="0"/>
-          </a:p>
-        </p:txBody>
-      </p:sp>
-      <p:sp>
-        <p:nvSpPr>
-          <p:cNvPr id="43" name="Text 41"/>
-          <p:cNvSpPr/>
-          <p:nvPr/>
-        </p:nvSpPr>
-        <p:spPr>
-          <a:xfrm>
-            <a:off x="2651760" y="4114800"/>
-            <a:ext cx="1828800" cy="310896"/>
-          </a:xfrm>
-          <a:prstGeom prst="rect">
-            <a:avLst/>
-          </a:prstGeom>
-          <a:noFill/>
-          <a:ln/>
-        </p:spPr>
-        <p:txBody>
-          <a:bodyPr wrap="square" lIns="0" tIns="0" rIns="0" bIns="0" rtlCol="0" anchor="ctr">
-            <a:normAutofit/>
-          </a:bodyPr>
-          <a:lstStyle/>
-          <a:p>
-            <a:pPr algn="r" indent="0" marL="0">
-              <a:buNone/>
-            </a:pPr>
-            <a:r>
-              <a:rPr lang="en-US" altLang="en-US" sz="950" b="1" dirty="0">
-                <a:solidFill>
-                  <a:srgbClr val="3D3935"/>
-                </a:solidFill>
-                <a:latin typeface="Calibri" pitchFamily="34" charset="0"/>
-                <a:ea typeface="Calibri" pitchFamily="34" charset="-122"/>
-                <a:cs typeface="Calibri" pitchFamily="34" charset="-120"/>
-              </a:rPr>
-              <a:t>Wed 11 Nov 2026</a:t>
-            </a:r>
-            <a:endParaRPr lang="en-US" sz="950" dirty="0"/>
-          </a:p>
-        </p:txBody>
-      </p:sp>
-      <p:sp>
-        <p:nvSpPr>
-          <p:cNvPr id="44" name="Shape 42"/>
-          <p:cNvSpPr/>
-          <p:nvPr/>
-        </p:nvSpPr>
-        <p:spPr>
-          <a:xfrm>
-            <a:off x="365760" y="4425696"/>
-            <a:ext cx="4206240" cy="310896"/>
-          </a:xfrm>
-          <a:prstGeom prst="rect">
-            <a:avLst/>
-          </a:prstGeom>
-          <a:solidFill>
-            <a:srgbClr val="F6F9FA"/>
-          </a:solidFill>
-          <a:ln w="6350">
-            <a:solidFill>
-              <a:srgbClr val="DFE6EA"/>
-            </a:solidFill>
-            <a:prstDash val="solid"/>
-          </a:ln>
-        </p:spPr>
-      </p:sp>
-      <p:sp>
-        <p:nvSpPr>
-          <p:cNvPr id="45" name="Text 43"/>
-          <p:cNvSpPr/>
-          <p:nvPr/>
-        </p:nvSpPr>
-        <p:spPr>
-          <a:xfrm>
-            <a:off x="457200" y="4425696"/>
-            <a:ext cx="2286000" cy="310896"/>
-          </a:xfrm>
-          <a:prstGeom prst="rect">
-            <a:avLst/>
-          </a:prstGeom>
-          <a:noFill/>
-          <a:ln/>
-        </p:spPr>
-        <p:txBody>
-          <a:bodyPr wrap="square" lIns="0" tIns="0" rIns="0" bIns="0" rtlCol="0" anchor="ctr">
-            <a:normAutofit/>
-          </a:bodyPr>
-          <a:lstStyle/>
-          <a:p>
-            <a:pPr algn="l" indent="0" marL="0">
-              <a:buNone/>
-            </a:pPr>
-            <a:r>
-              <a:rPr lang="en-US" altLang="en-US" sz="950" dirty="0">
-                <a:solidFill>
-                  <a:srgbClr val="4A555D"/>
-                </a:solidFill>
-                <a:latin typeface="Calibri" pitchFamily="34" charset="0"/>
-                <a:ea typeface="Calibri" pitchFamily="34" charset="-122"/>
-                <a:cs typeface="Calibri" pitchFamily="34" charset="-120"/>
-              </a:rPr>
-              <a:t>Building foundation complete</a:t>
-            </a:r>
-            <a:endParaRPr lang="en-US" sz="950" dirty="0"/>
-          </a:p>
-        </p:txBody>
-      </p:sp>
-      <p:sp>
-        <p:nvSpPr>
-          <p:cNvPr id="46" name="Text 44"/>
-          <p:cNvSpPr/>
-          <p:nvPr/>
-        </p:nvSpPr>
-        <p:spPr>
-          <a:xfrm>
-            <a:off x="2651760" y="4425696"/>
-            <a:ext cx="1828800" cy="310896"/>
-          </a:xfrm>
-          <a:prstGeom prst="rect">
-            <a:avLst/>
-          </a:prstGeom>
-          <a:noFill/>
-          <a:ln/>
-        </p:spPr>
-        <p:txBody>
-          <a:bodyPr wrap="square" lIns="0" tIns="0" rIns="0" bIns="0" rtlCol="0" anchor="ctr">
-            <a:normAutofit/>
-          </a:bodyPr>
-          <a:lstStyle/>
-          <a:p>
-            <a:pPr algn="r" indent="0" marL="0">
-              <a:buNone/>
-            </a:pPr>
-            <a:r>
-              <a:rPr lang="en-US" altLang="en-US" sz="950" b="1" dirty="0">
-                <a:solidFill>
-                  <a:srgbClr val="3D3935"/>
-                </a:solidFill>
-                <a:latin typeface="Calibri" pitchFamily="34" charset="0"/>
-                <a:ea typeface="Calibri" pitchFamily="34" charset="-122"/>
-                <a:cs typeface="Calibri" pitchFamily="34" charset="-120"/>
-              </a:rPr>
-              <a:t>Wed 18 Nov 2026</a:t>
-            </a:r>
-            <a:endParaRPr lang="en-US" sz="950" dirty="0"/>
-          </a:p>
-        </p:txBody>
-      </p:sp>
-      <p:sp>
-        <p:nvSpPr>
-          <p:cNvPr id="47" name="Shape 45"/>
-          <p:cNvSpPr/>
-          <p:nvPr/>
-        </p:nvSpPr>
-        <p:spPr>
-          <a:xfrm>
-            <a:off x="365760" y="4736592"/>
-            <a:ext cx="4206240" cy="310896"/>
-          </a:xfrm>
-          <a:prstGeom prst="rect">
-            <a:avLst/>
-          </a:prstGeom>
-          <a:solidFill>
-            <a:srgbClr val="FFFFFF"/>
-          </a:solidFill>
-          <a:ln w="6350">
-            <a:solidFill>
-              <a:srgbClr val="DFE6EA"/>
-            </a:solidFill>
-            <a:prstDash val="solid"/>
-          </a:ln>
-        </p:spPr>
-      </p:sp>
-      <p:sp>
-        <p:nvSpPr>
-          <p:cNvPr id="48" name="Text 46"/>
-          <p:cNvSpPr/>
-          <p:nvPr/>
-        </p:nvSpPr>
-        <p:spPr>
-          <a:xfrm>
-            <a:off x="457200" y="4736592"/>
-            <a:ext cx="2286000" cy="310896"/>
-          </a:xfrm>
-          <a:prstGeom prst="rect">
-            <a:avLst/>
-          </a:prstGeom>
-          <a:noFill/>
-          <a:ln/>
-        </p:spPr>
-        <p:txBody>
-          <a:bodyPr wrap="square" lIns="0" tIns="0" rIns="0" bIns="0" rtlCol="0" anchor="ctr">
-            <a:normAutofit/>
-          </a:bodyPr>
-          <a:lstStyle/>
-          <a:p>
-            <a:pPr algn="l" indent="0" marL="0">
-              <a:buNone/>
-            </a:pPr>
-            <a:r>
-              <a:rPr lang="en-US" altLang="en-US" sz="950" dirty="0">
-                <a:solidFill>
-                  <a:srgbClr val="4A555D"/>
-                </a:solidFill>
-                <a:latin typeface="Calibri" pitchFamily="34" charset="0"/>
-                <a:ea typeface="Calibri" pitchFamily="34" charset="-122"/>
-                <a:cs typeface="Calibri" pitchFamily="34" charset="-120"/>
-              </a:rPr>
-              <a:t>Overall completion</a:t>
-            </a:r>
-            <a:endParaRPr lang="en-US" sz="950" dirty="0"/>
-          </a:p>
-        </p:txBody>
-      </p:sp>
-      <p:sp>
-        <p:nvSpPr>
-          <p:cNvPr id="49" name="Text 47"/>
-          <p:cNvSpPr/>
-          <p:nvPr/>
-        </p:nvSpPr>
-        <p:spPr>
-          <a:xfrm>
-            <a:off x="2651760" y="4736592"/>
-            <a:ext cx="1828800" cy="310896"/>
-          </a:xfrm>
-          <a:prstGeom prst="rect">
-            <a:avLst/>
-          </a:prstGeom>
-          <a:noFill/>
-          <a:ln/>
-        </p:spPr>
-        <p:txBody>
-          <a:bodyPr wrap="square" lIns="0" tIns="0" rIns="0" bIns="0" rtlCol="0" anchor="ctr">
-            <a:normAutofit/>
-          </a:bodyPr>
-          <a:lstStyle/>
-          <a:p>
-            <a:pPr algn="r" indent="0" marL="0">
-              <a:buNone/>
-            </a:pPr>
-            <a:r>
-              <a:rPr lang="en-US" altLang="en-US" sz="950" b="1" dirty="0">
-                <a:solidFill>
-                  <a:srgbClr val="3D3935"/>
-                </a:solidFill>
-                <a:latin typeface="Calibri" pitchFamily="34" charset="0"/>
-                <a:ea typeface="Calibri" pitchFamily="34" charset="-122"/>
-                <a:cs typeface="Calibri" pitchFamily="34" charset="-120"/>
-              </a:rPr>
-              <a:t>Tue 24 Nov 2026</a:t>
-            </a:r>
-            <a:endParaRPr lang="en-US" sz="950" dirty="0"/>
-          </a:p>
-        </p:txBody>
-      </p:sp>
-      <p:sp>
-        <p:nvSpPr>
-          <p:cNvPr id="50" name="Shape 48"/>
-          <p:cNvSpPr/>
-          <p:nvPr/>
-        </p:nvSpPr>
-        <p:spPr>
-          <a:xfrm>
-            <a:off x="365760" y="5166360"/>
-            <a:ext cx="4206240" cy="960120"/>
-          </a:xfrm>
-          <a:prstGeom prst="roundRect">
-            <a:avLst>
-              <a:gd name="adj" fmla="val 7619"/>
-            </a:avLst>
-          </a:prstGeom>
-          <a:solidFill>
-            <a:srgbClr val="FFF6E5"/>
-          </a:solidFill>
-          <a:ln w="12700">
-            <a:solidFill>
-              <a:srgbClr val="F0C36D"/>
-            </a:solidFill>
-            <a:prstDash val="solid"/>
-          </a:ln>
-        </p:spPr>
-      </p:sp>
-      <p:sp>
-        <p:nvSpPr>
-          <p:cNvPr id="51" name="Text 49"/>
-          <p:cNvSpPr/>
-          <p:nvPr/>
-        </p:nvSpPr>
-        <p:spPr>
-          <a:xfrm>
-            <a:off x="502920" y="5212080"/>
-            <a:ext cx="3931920" cy="228600"/>
-          </a:xfrm>
-          <a:prstGeom prst="rect">
-            <a:avLst/>
-          </a:prstGeom>
-          <a:noFill/>
-          <a:ln/>
-        </p:spPr>
-        <p:txBody>
-          <a:bodyPr wrap="square" lIns="0" tIns="0" rIns="0" bIns="0" rtlCol="0" anchor="ctr">
-            <a:normAutofit/>
-          </a:bodyPr>
-          <a:lstStyle/>
-          <a:p>
-            <a:pPr algn="l" indent="0" marL="0">
-              <a:buNone/>
-            </a:pPr>
-            <a:r>
-              <a:rPr lang="en-US" altLang="en-US" sz="950" b="1" dirty="0">
-                <a:solidFill>
-                  <a:srgbClr val="9A6A00"/>
-                </a:solidFill>
-                <a:latin typeface="Calibri" pitchFamily="34" charset="0"/>
-                <a:ea typeface="Calibri" pitchFamily="34" charset="-122"/>
-                <a:cs typeface="Calibri" pitchFamily="34" charset="-120"/>
-              </a:rPr>
-              <a:t>What-if scenario</a:t>
-            </a:r>
-            <a:endParaRPr lang="en-US" sz="950" dirty="0"/>
-          </a:p>
-        </p:txBody>
-      </p:sp>
-      <p:sp>
-        <p:nvSpPr>
-          <p:cNvPr id="52" name="Text 50"/>
-          <p:cNvSpPr/>
-          <p:nvPr/>
-        </p:nvSpPr>
-        <p:spPr>
-          <a:xfrm>
-            <a:off x="502920" y="5440680"/>
-            <a:ext cx="3931920" cy="658368"/>
-          </a:xfrm>
-          <a:prstGeom prst="rect">
-            <a:avLst/>
-          </a:prstGeom>
-          <a:noFill/>
-          <a:ln/>
-        </p:spPr>
-        <p:txBody>
-          <a:bodyPr wrap="square" lIns="0" tIns="0" rIns="0" bIns="0" rtlCol="0" anchor="t">
-            <a:normAutofit/>
-          </a:bodyPr>
-          <a:lstStyle/>
-          <a:p>
-            <a:pPr algn="l" indent="0" marL="0">
-              <a:buNone/>
-            </a:pPr>
-            <a:r>
-              <a:rPr lang="en-US" altLang="en-US" sz="950" dirty="0">
-                <a:solidFill>
-                  <a:srgbClr val="3D3935"/>
-                </a:solidFill>
-                <a:latin typeface="Calibri" pitchFamily="34" charset="0"/>
-                <a:ea typeface="Calibri" pitchFamily="34" charset="-122"/>
-                <a:cs typeface="Calibri" pitchFamily="34" charset="-120"/>
-              </a:rPr>
-              <a:t>If works start on 21 October 2026 (permit-ready date) → overall completion would be 2 December 2026 (+8 calendar days later than proposed).</a:t>
-            </a:r>
-            <a:endParaRPr lang="en-US" sz="950" dirty="0"/>
-          </a:p>
-        </p:txBody>
-      </p:sp>
-      <p:sp>
-        <p:nvSpPr>
-          <p:cNvPr id="53" name="Shape 51"/>
-          <p:cNvSpPr/>
-          <p:nvPr/>
-        </p:nvSpPr>
-        <p:spPr>
-          <a:xfrm>
-            <a:off x="4937760" y="3099816"/>
-            <a:ext cx="54864" cy="256032"/>
-          </a:xfrm>
-          <a:prstGeom prst="rect">
-            <a:avLst/>
-          </a:prstGeom>
-          <a:solidFill>
-            <a:srgbClr val="00778B"/>
-          </a:solidFill>
-          <a:ln w="12700">
-            <a:solidFill>
-              <a:srgbClr val="00778B"/>
-            </a:solidFill>
-            <a:prstDash val="solid"/>
-          </a:ln>
-        </p:spPr>
-      </p:sp>
-      <p:sp>
-        <p:nvSpPr>
-          <p:cNvPr id="54" name="Text 52"/>
-          <p:cNvSpPr/>
-          <p:nvPr/>
-        </p:nvSpPr>
-        <p:spPr>
-          <a:xfrm>
-            <a:off x="5084064" y="3063240"/>
-            <a:ext cx="5486400" cy="329184"/>
-          </a:xfrm>
-          <a:prstGeom prst="rect">
-            <a:avLst/>
-          </a:prstGeom>
-          <a:noFill/>
-          <a:ln/>
-        </p:spPr>
-        <p:txBody>
-          <a:bodyPr wrap="square" lIns="0" tIns="0" rIns="0" bIns="0" rtlCol="0" anchor="ctr">
-            <a:normAutofit/>
-          </a:bodyPr>
-          <a:lstStyle/>
-          <a:p>
-            <a:pPr algn="l" indent="0" marL="0">
-              <a:buNone/>
-            </a:pPr>
-            <a:r>
-              <a:rPr lang="en-US" altLang="en-US" sz="1500" b="1" dirty="0">
-                <a:solidFill>
-                  <a:srgbClr val="3D3935"/>
-                </a:solidFill>
-                <a:latin typeface="Calibri" pitchFamily="34" charset="0"/>
-                <a:ea typeface="Calibri" pitchFamily="34" charset="-122"/>
-                <a:cs typeface="Calibri" pitchFamily="34" charset="-120"/>
-              </a:rPr>
-              <a:t>Notes &amp; conditions</a:t>
-            </a:r>
-            <a:endParaRPr lang="en-US" sz="1500" dirty="0"/>
-          </a:p>
-        </p:txBody>
-      </p:sp>
-      <p:sp>
-        <p:nvSpPr>
-          <p:cNvPr id="55" name="Text 53"/>
-          <p:cNvSpPr/>
-          <p:nvPr/>
-        </p:nvSpPr>
-        <p:spPr>
-          <a:xfrm>
-            <a:off x="5029200" y="3474720"/>
-            <a:ext cx="6766560" cy="2697480"/>
-          </a:xfrm>
-          <a:prstGeom prst="rect">
-            <a:avLst/>
-          </a:prstGeom>
-          <a:noFill/>
-          <a:ln/>
-        </p:spPr>
-        <p:txBody>
-          <a:bodyPr wrap="square" lIns="0" tIns="0" rIns="0" bIns="0" rtlCol="0" anchor="t">
-            <a:normAutofit/>
-          </a:bodyPr>
-          <a:lstStyle/>
-          <a:p>
-            <a:pPr algn="l" marL="342900" indent="-342900">
-              <a:spcAft>
-                <a:spcPts val="600"/>
-              </a:spcAft>
-              <a:buSzPct val="100000"/>
-              <a:buFont typeface="+mj-lt"/>
-              <a:buAutoNum type="arabicPeriod" startAt="1"/>
-            </a:pPr>
-            <a:r>
-              <a:rPr lang="en-US" altLang="en-US" sz="1050" dirty="0">
-                <a:solidFill>
-                  <a:srgbClr val="333333"/>
-                </a:solidFill>
-                <a:latin typeface="Calibri" pitchFamily="34" charset="0"/>
-                <a:ea typeface="Calibri" pitchFamily="34" charset="-122"/>
-                <a:cs typeface="Calibri" pitchFamily="34" charset="-120"/>
-              </a:rPr>
-              <a:t>Commencement of each activity is subject to issuance of the work permit and timely approval of Work Inspection Requests (WIRs) and Material Inspection Requests (MIRs). Any delay in permit issuance or WIR / MIR approval will shift the affected activity and all succeeding activities accordingly.</a:t>
-            </a:r>
-            <a:endParaRPr lang="en-US" sz="1050" dirty="0"/>
-          </a:p>
-          <a:p>
-            <a:pPr algn="l" marL="342900" indent="-342900">
-              <a:spcAft>
-                <a:spcPts val="600"/>
-              </a:spcAft>
-              <a:buSzPct val="100000"/>
-              <a:buFont typeface="+mj-lt"/>
-              <a:buAutoNum type="arabicPeriod" startAt="1"/>
-            </a:pPr>
-            <a:r>
-              <a:rPr lang="en-US" altLang="en-US" sz="1050" dirty="0">
-                <a:solidFill>
-                  <a:srgbClr val="333333"/>
-                </a:solidFill>
-                <a:latin typeface="Calibri" pitchFamily="34" charset="0"/>
-                <a:ea typeface="Calibri" pitchFamily="34" charset="-122"/>
-                <a:cs typeface="Calibri" pitchFamily="34" charset="-120"/>
-              </a:rPr>
-              <a:t>Working week is Saturday to Thursday. Fridays are non-working.</a:t>
-            </a:r>
-            <a:endParaRPr lang="en-US" sz="1050" dirty="0"/>
-          </a:p>
-          <a:p>
-            <a:pPr algn="l" marL="342900" indent="-342900">
-              <a:spcAft>
-                <a:spcPts val="600"/>
-              </a:spcAft>
-              <a:buSzPct val="100000"/>
-              <a:buFont typeface="+mj-lt"/>
-              <a:buAutoNum type="arabicPeriod" startAt="1"/>
-            </a:pPr>
-            <a:r>
-              <a:rPr lang="en-US" altLang="en-US" sz="1050" dirty="0">
-                <a:solidFill>
-                  <a:srgbClr val="333333"/>
-                </a:solidFill>
-                <a:latin typeface="Calibri" pitchFamily="34" charset="0"/>
-                <a:ea typeface="Calibri" pitchFamily="34" charset="-122"/>
-                <a:cs typeface="Calibri" pitchFamily="34" charset="-120"/>
-              </a:rPr>
-              <a:t>Lean concrete runs parallel to shoring (SS link) and is placed only in bays where shoring is installed.</a:t>
-            </a:r>
-            <a:endParaRPr lang="en-US" sz="1050" dirty="0"/>
-          </a:p>
-          <a:p>
-            <a:pPr algn="l" marL="342900" indent="-342900">
-              <a:spcAft>
-                <a:spcPts val="600"/>
-              </a:spcAft>
-              <a:buSzPct val="100000"/>
-              <a:buFont typeface="+mj-lt"/>
-              <a:buAutoNum type="arabicPeriod" startAt="1"/>
-            </a:pPr>
-            <a:r>
-              <a:rPr lang="en-US" altLang="en-US" sz="1050" dirty="0">
-                <a:solidFill>
-                  <a:srgbClr val="333333"/>
-                </a:solidFill>
-                <a:latin typeface="Calibri" pitchFamily="34" charset="0"/>
-                <a:ea typeface="Calibri" pitchFamily="34" charset="-122"/>
-                <a:cs typeface="Calibri" pitchFamily="34" charset="-120"/>
-              </a:rPr>
-              <a:t>Building foundation is linked to completion of the pit slab / raft (FS link) and runs parallel to the pit wall. Change its predecessor to E if it must follow the pit wall.</a:t>
-            </a:r>
-            <a:endParaRPr lang="en-US" sz="1050" dirty="0"/>
-          </a:p>
-        </p:txBody>
-      </p:sp>
-      <p:sp>
-        <p:nvSpPr>
-          <p:cNvPr id="56" name="Text 54"/>
-          <p:cNvSpPr/>
-          <p:nvPr/>
-        </p:nvSpPr>
-        <p:spPr>
-          <a:xfrm>
-            <a:off x="365760" y="6199632"/>
-            <a:ext cx="11460175" cy="228600"/>
-          </a:xfrm>
-          <a:prstGeom prst="rect">
-            <a:avLst/>
-          </a:prstGeom>
-          <a:noFill/>
-          <a:ln/>
-        </p:spPr>
-        <p:txBody>
-          <a:bodyPr wrap="square" lIns="0" tIns="0" rIns="0" bIns="0" rtlCol="0" anchor="ctr">
-            <a:normAutofit/>
-          </a:bodyPr>
-          <a:lstStyle/>
-          <a:p>
-            <a:pPr algn="l" indent="0" marL="0">
-              <a:buNone/>
-            </a:pPr>
-            <a:r>
-              <a:rPr lang="en-US" altLang="en-US" sz="750" dirty="0">
-                <a:solidFill>
-                  <a:srgbClr val="66707A"/>
-                </a:solidFill>
-                <a:latin typeface="Calibri" pitchFamily="34" charset="0"/>
-                <a:ea typeface="Calibri" pitchFamily="34" charset="-122"/>
-                <a:cs typeface="Calibri" pitchFamily="34" charset="-120"/>
-              </a:rPr>
-              <a:t>Source: Gulf Development Company for Contracting – Programme Rev 01 (12 Oct 2026), forwarded by SAR Construction Manager</a:t>
-            </a:r>
-            <a:endParaRPr lang="en-US" sz="750" dirty="0"/>
-          </a:p>
-        </p:txBody>
-      </p:sp>
-      <p:sp>
-        <p:nvSpPr>
-          <p:cNvPr id="25" name="Slide Number Placeholder 0"/>
-          <p:cNvSpPr>
-            <a:spLocks noGrp="1"/>
-          </p:cNvSpPr>
-          <p:nvPr>
-            <p:ph type="sldNum" sz="quarter" idx="4294967295"/>
-          </p:nvPr>
-        </p:nvSpPr>
-        <p:spPr>
-          <a:xfrm>
-            <a:off x="11323015" y="6519672"/>
-            <a:ext cx="548640" cy="310896"/>
-          </a:xfrm>
-          <a:prstGeom prst="rect">
-            <a:avLst/>
-          </a:prstGeom>
-          <a:extLst>
-            <a:ext uri="{C572A759-6A51-4108-AA02-DFA0A04FC94B}">
-              <ma14:wrappingTextBoxFlag xmlns:ma14="http://schemas.microsoft.com/office/mac/drawingml/2011/main" val="0"/>
-            </a:ext>
-          </a:extLst>
-        </p:spPr>
-        <p:txBody>
-          <a:bodyPr/>
-          <a:lstStyle>
-            <a:lvl1pPr>
-              <a:defRPr sz="1000">
-                <a:solidFill>
-                  <a:srgbClr val="FFFFFF"/>
-                </a:solidFill>
-                <a:latin typeface="Calibri"/>
-                <a:ea typeface="Calibri"/>
-                <a:cs typeface="Calibri"/>
-              </a:defRPr>
-            </a:lvl1pPr>
-          </a:lstStyle>
-          <a:p>
-            <a:pPr algn="ctr"/>
-            <a:fld id="{F7021451-1387-4CA6-816F-3879F97B5CBC}" type="slidenum">
-              <a:rPr b="0" lang="en-US"/>
-              <a:t>3</a:t>
             </a:fld>
             <a:endParaRPr lang="en-US"/>
           </a:p>

--- a/ufwl-timeline/UFWL_Presentation_EN.pptx
+++ b/ufwl-timeline/UFWL_Presentation_EN.pptx
@@ -14348,9 +14348,7 @@
             <a:ext cx="237744" cy="237744"/>
           </a:xfrm>
           <a:prstGeom prst="ellipse">
-            <a:avLst>
-              <a:gd name="adj" fmla="val 32692"/>
-            </a:avLst>
+            <a:avLst/>
           </a:prstGeom>
           <a:solidFill>
             <a:srgbClr val="C8503F"/>
@@ -16545,9 +16543,7 @@
             <a:ext cx="237744" cy="237744"/>
           </a:xfrm>
           <a:prstGeom prst="ellipse">
-            <a:avLst>
-              <a:gd name="adj" fmla="val 32692"/>
-            </a:avLst>
+            <a:avLst/>
           </a:prstGeom>
           <a:solidFill>
             <a:srgbClr val="00778B"/>
@@ -16877,9 +16873,7 @@
             <a:ext cx="237744" cy="237744"/>
           </a:xfrm>
           <a:prstGeom prst="ellipse">
-            <a:avLst>
-              <a:gd name="adj" fmla="val 32692"/>
-            </a:avLst>
+            <a:avLst/>
           </a:prstGeom>
           <a:solidFill>
             <a:srgbClr val="00778B"/>
@@ -17250,9 +17244,7 @@
             <a:ext cx="237744" cy="237744"/>
           </a:xfrm>
           <a:prstGeom prst="ellipse">
-            <a:avLst>
-              <a:gd name="adj" fmla="val 32692"/>
-            </a:avLst>
+            <a:avLst/>
           </a:prstGeom>
           <a:solidFill>
             <a:srgbClr val="00778B"/>
@@ -17623,9 +17615,7 @@
             <a:ext cx="237744" cy="237744"/>
           </a:xfrm>
           <a:prstGeom prst="ellipse">
-            <a:avLst>
-              <a:gd name="adj" fmla="val 32692"/>
-            </a:avLst>
+            <a:avLst/>
           </a:prstGeom>
           <a:solidFill>
             <a:srgbClr val="00778B"/>
@@ -17996,9 +17986,7 @@
             <a:ext cx="237744" cy="237744"/>
           </a:xfrm>
           <a:prstGeom prst="ellipse">
-            <a:avLst>
-              <a:gd name="adj" fmla="val 32692"/>
-            </a:avLst>
+            <a:avLst/>
           </a:prstGeom>
           <a:solidFill>
             <a:srgbClr val="2E9E6B"/>
@@ -18369,9 +18357,7 @@
             <a:ext cx="237744" cy="237744"/>
           </a:xfrm>
           <a:prstGeom prst="ellipse">
-            <a:avLst>
-              <a:gd name="adj" fmla="val 32692"/>
-            </a:avLst>
+            <a:avLst/>
           </a:prstGeom>
           <a:solidFill>
             <a:srgbClr val="D68A00"/>

--- a/ufwl-timeline/UFWL_Presentation_EN.pptx
+++ b/ufwl-timeline/UFWL_Presentation_EN.pptx
@@ -7012,13 +7012,81 @@
       </p:sp>
       <p:sp>
         <p:nvSpPr>
-          <p:cNvPr id="14" name="Text 12"/>
-          <p:cNvSpPr/>
-          <p:nvPr/>
-        </p:nvSpPr>
-        <p:spPr>
-          <a:xfrm>
-            <a:off x="7702906" y="1005840"/>
+          <p:cNvPr id="14" name="Shape 12"/>
+          <p:cNvSpPr/>
+          <p:nvPr/>
+        </p:nvSpPr>
+        <p:spPr>
+          <a:xfrm>
+            <a:off x="7702906" y="1097280"/>
+            <a:ext cx="274320" cy="45720"/>
+          </a:xfrm>
+          <a:prstGeom prst="roundRect">
+            <a:avLst>
+              <a:gd name="adj" fmla="val 40000"/>
+            </a:avLst>
+          </a:prstGeom>
+          <a:solidFill>
+            <a:srgbClr val="8A959C"/>
+          </a:solidFill>
+          <a:ln w="12700">
+            <a:solidFill>
+              <a:srgbClr val="8A959C"/>
+            </a:solidFill>
+            <a:prstDash val="solid"/>
+          </a:ln>
+        </p:spPr>
+      </p:sp>
+      <p:sp>
+        <p:nvSpPr>
+          <p:cNvPr id="15" name="Text 13"/>
+          <p:cNvSpPr/>
+          <p:nvPr/>
+        </p:nvSpPr>
+        <p:spPr>
+          <a:xfrm>
+            <a:off x="8032090" y="1005840"/>
+            <a:ext cx="2381098" cy="237744"/>
+          </a:xfrm>
+          <a:prstGeom prst="rect">
+            <a:avLst/>
+          </a:prstGeom>
+          <a:noFill/>
+          <a:ln/>
+        </p:spPr>
+        <p:txBody>
+          <a:bodyPr wrap="square" lIns="0" tIns="0" rIns="0" bIns="0" rtlCol="0" anchor="ctr">
+            <a:normAutofit/>
+          </a:bodyPr>
+          <a:lstStyle/>
+          <a:p>
+            <a:pPr algn="l" indent="0" marL="0">
+              <a:buNone/>
+            </a:pPr>
+            <a:r>
+              <a:rPr lang="en-US" altLang="en-US" sz="900" dirty="0">
+                <a:solidFill>
+                  <a:srgbClr val="333333"/>
+                </a:solidFill>
+                <a:latin typeface="Calibri" pitchFamily="34" charset="0"/>
+                <a:ea typeface="Calibri" pitchFamily="34" charset="-122"/>
+                <a:cs typeface="Calibri" pitchFamily="34" charset="-120"/>
+              </a:rPr>
+              <a:t>Baseline (contractor programme Rev 01)</a:t>
+            </a:r>
+            <a:endParaRPr lang="en-US" sz="900" dirty="0"/>
+          </a:p>
+        </p:txBody>
+      </p:sp>
+      <p:sp>
+        <p:nvSpPr>
+          <p:cNvPr id="16" name="Text 14"/>
+          <p:cNvSpPr/>
+          <p:nvPr/>
+        </p:nvSpPr>
+        <p:spPr>
+          <a:xfrm>
+            <a:off x="10358323" y="1005840"/>
             <a:ext cx="1532534" cy="237744"/>
           </a:xfrm>
           <a:prstGeom prst="rect">
@@ -7053,7 +7121,7 @@
       </p:sp>
       <p:sp>
         <p:nvSpPr>
-          <p:cNvPr id="15" name="Shape 13"/>
+          <p:cNvPr id="17" name="Shape 15"/>
           <p:cNvSpPr/>
           <p:nvPr/>
         </p:nvSpPr>
@@ -7078,7 +7146,7 @@
       </p:sp>
       <p:sp>
         <p:nvSpPr>
-          <p:cNvPr id="16" name="Text 14"/>
+          <p:cNvPr id="18" name="Text 16"/>
           <p:cNvSpPr/>
           <p:nvPr/>
         </p:nvSpPr>
@@ -7119,7 +7187,7 @@
       </p:sp>
       <p:sp>
         <p:nvSpPr>
-          <p:cNvPr id="17" name="Text 15"/>
+          <p:cNvPr id="19" name="Text 17"/>
           <p:cNvSpPr/>
           <p:nvPr/>
         </p:nvSpPr>
@@ -7160,7 +7228,7 @@
       </p:sp>
       <p:sp>
         <p:nvSpPr>
-          <p:cNvPr id="18" name="Text 16"/>
+          <p:cNvPr id="20" name="Text 18"/>
           <p:cNvSpPr/>
           <p:nvPr/>
         </p:nvSpPr>
@@ -7201,7 +7269,7 @@
       </p:sp>
       <p:sp>
         <p:nvSpPr>
-          <p:cNvPr id="19" name="Text 17"/>
+          <p:cNvPr id="21" name="Text 19"/>
           <p:cNvSpPr/>
           <p:nvPr/>
         </p:nvSpPr>
@@ -7242,7 +7310,7 @@
       </p:sp>
       <p:sp>
         <p:nvSpPr>
-          <p:cNvPr id="20" name="Text 18"/>
+          <p:cNvPr id="22" name="Text 20"/>
           <p:cNvSpPr/>
           <p:nvPr/>
         </p:nvSpPr>
@@ -7283,7 +7351,7 @@
       </p:sp>
       <p:sp>
         <p:nvSpPr>
-          <p:cNvPr id="21" name="Text 19"/>
+          <p:cNvPr id="23" name="Text 21"/>
           <p:cNvSpPr/>
           <p:nvPr/>
         </p:nvSpPr>
@@ -7324,7 +7392,7 @@
       </p:sp>
       <p:sp>
         <p:nvSpPr>
-          <p:cNvPr id="22" name="Shape 20"/>
+          <p:cNvPr id="24" name="Shape 22"/>
           <p:cNvSpPr/>
           <p:nvPr/>
         </p:nvSpPr>
@@ -7349,7 +7417,7 @@
       </p:sp>
       <p:sp>
         <p:nvSpPr>
-          <p:cNvPr id="23" name="Text 21"/>
+          <p:cNvPr id="25" name="Text 23"/>
           <p:cNvSpPr/>
           <p:nvPr/>
         </p:nvSpPr>
@@ -7390,7 +7458,7 @@
       </p:sp>
       <p:sp>
         <p:nvSpPr>
-          <p:cNvPr id="24" name="Shape 22"/>
+          <p:cNvPr id="26" name="Shape 24"/>
           <p:cNvSpPr/>
           <p:nvPr/>
         </p:nvSpPr>
@@ -7415,7 +7483,7 @@
       </p:sp>
       <p:sp>
         <p:nvSpPr>
-          <p:cNvPr id="25" name="Text 23"/>
+          <p:cNvPr id="27" name="Text 25"/>
           <p:cNvSpPr/>
           <p:nvPr/>
         </p:nvSpPr>
@@ -7456,7 +7524,7 @@
       </p:sp>
       <p:sp>
         <p:nvSpPr>
-          <p:cNvPr id="26" name="Shape 24"/>
+          <p:cNvPr id="28" name="Shape 26"/>
           <p:cNvSpPr/>
           <p:nvPr/>
         </p:nvSpPr>
@@ -7481,7 +7549,7 @@
       </p:sp>
       <p:sp>
         <p:nvSpPr>
-          <p:cNvPr id="27" name="Text 25"/>
+          <p:cNvPr id="29" name="Text 27"/>
           <p:cNvSpPr/>
           <p:nvPr/>
         </p:nvSpPr>
@@ -7522,7 +7590,7 @@
       </p:sp>
       <p:sp>
         <p:nvSpPr>
-          <p:cNvPr id="28" name="Shape 26"/>
+          <p:cNvPr id="30" name="Shape 28"/>
           <p:cNvSpPr/>
           <p:nvPr/>
         </p:nvSpPr>
@@ -7547,7 +7615,7 @@
       </p:sp>
       <p:sp>
         <p:nvSpPr>
-          <p:cNvPr id="29" name="Text 27"/>
+          <p:cNvPr id="31" name="Text 29"/>
           <p:cNvSpPr/>
           <p:nvPr/>
         </p:nvSpPr>
@@ -7588,7 +7656,7 @@
       </p:sp>
       <p:sp>
         <p:nvSpPr>
-          <p:cNvPr id="30" name="Shape 28"/>
+          <p:cNvPr id="32" name="Shape 30"/>
           <p:cNvSpPr/>
           <p:nvPr/>
         </p:nvSpPr>
@@ -7613,7 +7681,7 @@
       </p:sp>
       <p:sp>
         <p:nvSpPr>
-          <p:cNvPr id="31" name="Text 29"/>
+          <p:cNvPr id="33" name="Text 31"/>
           <p:cNvSpPr/>
           <p:nvPr/>
         </p:nvSpPr>
@@ -7654,7 +7722,7 @@
       </p:sp>
       <p:sp>
         <p:nvSpPr>
-          <p:cNvPr id="32" name="Shape 30"/>
+          <p:cNvPr id="34" name="Shape 32"/>
           <p:cNvSpPr/>
           <p:nvPr/>
         </p:nvSpPr>
@@ -7679,7 +7747,7 @@
       </p:sp>
       <p:sp>
         <p:nvSpPr>
-          <p:cNvPr id="33" name="Text 31"/>
+          <p:cNvPr id="35" name="Text 33"/>
           <p:cNvSpPr/>
           <p:nvPr/>
         </p:nvSpPr>
@@ -7720,7 +7788,7 @@
       </p:sp>
       <p:sp>
         <p:nvSpPr>
-          <p:cNvPr id="34" name="Shape 32"/>
+          <p:cNvPr id="36" name="Shape 34"/>
           <p:cNvSpPr/>
           <p:nvPr/>
         </p:nvSpPr>
@@ -7745,7 +7813,7 @@
       </p:sp>
       <p:sp>
         <p:nvSpPr>
-          <p:cNvPr id="35" name="Text 33"/>
+          <p:cNvPr id="37" name="Text 35"/>
           <p:cNvSpPr/>
           <p:nvPr/>
         </p:nvSpPr>
@@ -7786,7 +7854,7 @@
       </p:sp>
       <p:sp>
         <p:nvSpPr>
-          <p:cNvPr id="36" name="Shape 34"/>
+          <p:cNvPr id="38" name="Shape 36"/>
           <p:cNvSpPr/>
           <p:nvPr/>
         </p:nvSpPr>
@@ -7811,7 +7879,7 @@
       </p:sp>
       <p:sp>
         <p:nvSpPr>
-          <p:cNvPr id="37" name="Text 35"/>
+          <p:cNvPr id="39" name="Text 37"/>
           <p:cNvSpPr/>
           <p:nvPr/>
         </p:nvSpPr>
@@ -7852,7 +7920,7 @@
       </p:sp>
       <p:sp>
         <p:nvSpPr>
-          <p:cNvPr id="38" name="Shape 36"/>
+          <p:cNvPr id="40" name="Shape 38"/>
           <p:cNvSpPr/>
           <p:nvPr/>
         </p:nvSpPr>
@@ -7877,7 +7945,7 @@
       </p:sp>
       <p:sp>
         <p:nvSpPr>
-          <p:cNvPr id="39" name="Text 37"/>
+          <p:cNvPr id="41" name="Text 39"/>
           <p:cNvSpPr/>
           <p:nvPr/>
         </p:nvSpPr>
@@ -7918,7 +7986,7 @@
       </p:sp>
       <p:sp>
         <p:nvSpPr>
-          <p:cNvPr id="40" name="Shape 38"/>
+          <p:cNvPr id="42" name="Shape 40"/>
           <p:cNvSpPr/>
           <p:nvPr/>
         </p:nvSpPr>
@@ -7943,7 +8011,7 @@
       </p:sp>
       <p:sp>
         <p:nvSpPr>
-          <p:cNvPr id="41" name="Text 39"/>
+          <p:cNvPr id="43" name="Text 41"/>
           <p:cNvSpPr/>
           <p:nvPr/>
         </p:nvSpPr>
@@ -7984,7 +8052,7 @@
       </p:sp>
       <p:sp>
         <p:nvSpPr>
-          <p:cNvPr id="42" name="Text 40"/>
+          <p:cNvPr id="44" name="Text 42"/>
           <p:cNvSpPr/>
           <p:nvPr/>
         </p:nvSpPr>
@@ -8025,7 +8093,7 @@
       </p:sp>
       <p:sp>
         <p:nvSpPr>
-          <p:cNvPr id="43" name="Shape 41"/>
+          <p:cNvPr id="45" name="Shape 43"/>
           <p:cNvSpPr/>
           <p:nvPr/>
         </p:nvSpPr>
@@ -8048,7 +8116,7 @@
       </p:sp>
       <p:sp>
         <p:nvSpPr>
-          <p:cNvPr id="44" name="Shape 42"/>
+          <p:cNvPr id="46" name="Shape 44"/>
           <p:cNvSpPr/>
           <p:nvPr/>
         </p:nvSpPr>
@@ -8073,7 +8141,7 @@
       </p:sp>
       <p:sp>
         <p:nvSpPr>
-          <p:cNvPr id="45" name="Text 43"/>
+          <p:cNvPr id="47" name="Text 45"/>
           <p:cNvSpPr/>
           <p:nvPr/>
         </p:nvSpPr>
@@ -8114,7 +8182,7 @@
       </p:sp>
       <p:sp>
         <p:nvSpPr>
-          <p:cNvPr id="46" name="Text 44"/>
+          <p:cNvPr id="48" name="Text 46"/>
           <p:cNvSpPr/>
           <p:nvPr/>
         </p:nvSpPr>
@@ -8155,7 +8223,7 @@
       </p:sp>
       <p:sp>
         <p:nvSpPr>
-          <p:cNvPr id="47" name="Shape 45"/>
+          <p:cNvPr id="49" name="Shape 47"/>
           <p:cNvSpPr/>
           <p:nvPr/>
         </p:nvSpPr>
@@ -8180,7 +8248,7 @@
       </p:sp>
       <p:sp>
         <p:nvSpPr>
-          <p:cNvPr id="48" name="Text 46"/>
+          <p:cNvPr id="50" name="Text 48"/>
           <p:cNvSpPr/>
           <p:nvPr/>
         </p:nvSpPr>
@@ -8221,7 +8289,7 @@
       </p:sp>
       <p:sp>
         <p:nvSpPr>
-          <p:cNvPr id="49" name="Text 47"/>
+          <p:cNvPr id="51" name="Text 49"/>
           <p:cNvSpPr/>
           <p:nvPr/>
         </p:nvSpPr>
@@ -8262,7 +8330,7 @@
       </p:sp>
       <p:sp>
         <p:nvSpPr>
-          <p:cNvPr id="50" name="Shape 48"/>
+          <p:cNvPr id="52" name="Shape 50"/>
           <p:cNvSpPr/>
           <p:nvPr/>
         </p:nvSpPr>
@@ -8287,7 +8355,7 @@
       </p:sp>
       <p:sp>
         <p:nvSpPr>
-          <p:cNvPr id="51" name="Text 49"/>
+          <p:cNvPr id="53" name="Text 51"/>
           <p:cNvSpPr/>
           <p:nvPr/>
         </p:nvSpPr>
@@ -8328,7 +8396,7 @@
       </p:sp>
       <p:sp>
         <p:nvSpPr>
-          <p:cNvPr id="52" name="Text 50"/>
+          <p:cNvPr id="54" name="Text 52"/>
           <p:cNvSpPr/>
           <p:nvPr/>
         </p:nvSpPr>
@@ -8369,7 +8437,7 @@
       </p:sp>
       <p:sp>
         <p:nvSpPr>
-          <p:cNvPr id="53" name="Shape 51"/>
+          <p:cNvPr id="55" name="Shape 53"/>
           <p:cNvSpPr/>
           <p:nvPr/>
         </p:nvSpPr>
@@ -8394,7 +8462,7 @@
       </p:sp>
       <p:sp>
         <p:nvSpPr>
-          <p:cNvPr id="54" name="Text 52"/>
+          <p:cNvPr id="56" name="Text 54"/>
           <p:cNvSpPr/>
           <p:nvPr/>
         </p:nvSpPr>
@@ -8435,7 +8503,7 @@
       </p:sp>
       <p:sp>
         <p:nvSpPr>
-          <p:cNvPr id="55" name="Text 53"/>
+          <p:cNvPr id="57" name="Text 55"/>
           <p:cNvSpPr/>
           <p:nvPr/>
         </p:nvSpPr>
@@ -8476,7 +8544,7 @@
       </p:sp>
       <p:sp>
         <p:nvSpPr>
-          <p:cNvPr id="56" name="Shape 54"/>
+          <p:cNvPr id="58" name="Shape 56"/>
           <p:cNvSpPr/>
           <p:nvPr/>
         </p:nvSpPr>
@@ -8501,7 +8569,7 @@
       </p:sp>
       <p:sp>
         <p:nvSpPr>
-          <p:cNvPr id="57" name="Text 55"/>
+          <p:cNvPr id="59" name="Text 57"/>
           <p:cNvSpPr/>
           <p:nvPr/>
         </p:nvSpPr>
@@ -8542,7 +8610,7 @@
       </p:sp>
       <p:sp>
         <p:nvSpPr>
-          <p:cNvPr id="58" name="Text 56"/>
+          <p:cNvPr id="60" name="Text 58"/>
           <p:cNvSpPr/>
           <p:nvPr/>
         </p:nvSpPr>
@@ -8583,7 +8651,7 @@
       </p:sp>
       <p:sp>
         <p:nvSpPr>
-          <p:cNvPr id="59" name="Shape 57"/>
+          <p:cNvPr id="61" name="Shape 59"/>
           <p:cNvSpPr/>
           <p:nvPr/>
         </p:nvSpPr>
@@ -8608,7 +8676,7 @@
       </p:sp>
       <p:sp>
         <p:nvSpPr>
-          <p:cNvPr id="60" name="Text 58"/>
+          <p:cNvPr id="62" name="Text 60"/>
           <p:cNvSpPr/>
           <p:nvPr/>
         </p:nvSpPr>
@@ -8649,7 +8717,7 @@
       </p:sp>
       <p:sp>
         <p:nvSpPr>
-          <p:cNvPr id="61" name="Text 59"/>
+          <p:cNvPr id="63" name="Text 61"/>
           <p:cNvSpPr/>
           <p:nvPr/>
         </p:nvSpPr>
@@ -8690,7 +8758,7 @@
       </p:sp>
       <p:sp>
         <p:nvSpPr>
-          <p:cNvPr id="62" name="Shape 60"/>
+          <p:cNvPr id="64" name="Shape 62"/>
           <p:cNvSpPr/>
           <p:nvPr/>
         </p:nvSpPr>
@@ -8719,7 +8787,7 @@
       </p:sp>
       <p:sp>
         <p:nvSpPr>
-          <p:cNvPr id="63" name="Shape 61"/>
+          <p:cNvPr id="65" name="Shape 63"/>
           <p:cNvSpPr/>
           <p:nvPr/>
         </p:nvSpPr>
@@ -8744,7 +8812,7 @@
       </p:sp>
       <p:sp>
         <p:nvSpPr>
-          <p:cNvPr id="64" name="Text 62"/>
+          <p:cNvPr id="66" name="Text 64"/>
           <p:cNvSpPr/>
           <p:nvPr/>
         </p:nvSpPr>
@@ -8785,7 +8853,7 @@
       </p:sp>
       <p:sp>
         <p:nvSpPr>
-          <p:cNvPr id="65" name="Text 63"/>
+          <p:cNvPr id="67" name="Text 65"/>
           <p:cNvSpPr/>
           <p:nvPr/>
         </p:nvSpPr>
@@ -8826,7 +8894,7 @@
       </p:sp>
       <p:sp>
         <p:nvSpPr>
-          <p:cNvPr id="66" name="Shape 64"/>
+          <p:cNvPr id="68" name="Shape 66"/>
           <p:cNvSpPr/>
           <p:nvPr/>
         </p:nvSpPr>
@@ -8849,7 +8917,7 @@
       </p:sp>
       <p:sp>
         <p:nvSpPr>
-          <p:cNvPr id="67" name="Shape 65"/>
+          <p:cNvPr id="69" name="Shape 67"/>
           <p:cNvSpPr/>
           <p:nvPr/>
         </p:nvSpPr>
@@ -8874,7 +8942,7 @@
       </p:sp>
       <p:sp>
         <p:nvSpPr>
-          <p:cNvPr id="68" name="Text 66"/>
+          <p:cNvPr id="70" name="Text 68"/>
           <p:cNvSpPr/>
           <p:nvPr/>
         </p:nvSpPr>
@@ -8915,7 +8983,7 @@
       </p:sp>
       <p:sp>
         <p:nvSpPr>
-          <p:cNvPr id="69" name="Text 67"/>
+          <p:cNvPr id="71" name="Text 69"/>
           <p:cNvSpPr/>
           <p:nvPr/>
         </p:nvSpPr>
@@ -8956,7 +9024,7 @@
       </p:sp>
       <p:sp>
         <p:nvSpPr>
-          <p:cNvPr id="70" name="Shape 68"/>
+          <p:cNvPr id="72" name="Shape 70"/>
           <p:cNvSpPr/>
           <p:nvPr/>
         </p:nvSpPr>
@@ -8981,7 +9049,7 @@
       </p:sp>
       <p:sp>
         <p:nvSpPr>
-          <p:cNvPr id="71" name="Text 69"/>
+          <p:cNvPr id="73" name="Text 71"/>
           <p:cNvSpPr/>
           <p:nvPr/>
         </p:nvSpPr>
@@ -9022,7 +9090,7 @@
       </p:sp>
       <p:sp>
         <p:nvSpPr>
-          <p:cNvPr id="72" name="Text 70"/>
+          <p:cNvPr id="74" name="Text 72"/>
           <p:cNvSpPr/>
           <p:nvPr/>
         </p:nvSpPr>
@@ -9063,7 +9131,7 @@
       </p:sp>
       <p:sp>
         <p:nvSpPr>
-          <p:cNvPr id="73" name="Shape 71"/>
+          <p:cNvPr id="75" name="Shape 73"/>
           <p:cNvSpPr/>
           <p:nvPr/>
         </p:nvSpPr>
@@ -9088,7 +9156,7 @@
       </p:sp>
       <p:sp>
         <p:nvSpPr>
-          <p:cNvPr id="74" name="Text 72"/>
+          <p:cNvPr id="76" name="Text 74"/>
           <p:cNvSpPr/>
           <p:nvPr/>
         </p:nvSpPr>
@@ -9129,7 +9197,7 @@
       </p:sp>
       <p:sp>
         <p:nvSpPr>
-          <p:cNvPr id="75" name="Text 73"/>
+          <p:cNvPr id="77" name="Text 75"/>
           <p:cNvSpPr/>
           <p:nvPr/>
         </p:nvSpPr>
@@ -9170,7 +9238,7 @@
       </p:sp>
       <p:sp>
         <p:nvSpPr>
-          <p:cNvPr id="76" name="Shape 74"/>
+          <p:cNvPr id="78" name="Shape 76"/>
           <p:cNvSpPr/>
           <p:nvPr/>
         </p:nvSpPr>
@@ -9195,7 +9263,7 @@
       </p:sp>
       <p:sp>
         <p:nvSpPr>
-          <p:cNvPr id="77" name="Text 75"/>
+          <p:cNvPr id="79" name="Text 77"/>
           <p:cNvSpPr/>
           <p:nvPr/>
         </p:nvSpPr>
@@ -9236,7 +9304,7 @@
       </p:sp>
       <p:sp>
         <p:nvSpPr>
-          <p:cNvPr id="78" name="Text 76"/>
+          <p:cNvPr id="80" name="Text 78"/>
           <p:cNvSpPr/>
           <p:nvPr/>
         </p:nvSpPr>
@@ -9277,7 +9345,7 @@
       </p:sp>
       <p:sp>
         <p:nvSpPr>
-          <p:cNvPr id="79" name="Shape 77"/>
+          <p:cNvPr id="81" name="Shape 79"/>
           <p:cNvSpPr/>
           <p:nvPr/>
         </p:nvSpPr>
@@ -9302,7 +9370,7 @@
       </p:sp>
       <p:sp>
         <p:nvSpPr>
-          <p:cNvPr id="80" name="Text 78"/>
+          <p:cNvPr id="82" name="Text 80"/>
           <p:cNvSpPr/>
           <p:nvPr/>
         </p:nvSpPr>
@@ -9343,7 +9411,7 @@
       </p:sp>
       <p:sp>
         <p:nvSpPr>
-          <p:cNvPr id="81" name="Text 79"/>
+          <p:cNvPr id="83" name="Text 81"/>
           <p:cNvSpPr/>
           <p:nvPr/>
         </p:nvSpPr>
@@ -9384,7 +9452,7 @@
       </p:sp>
       <p:sp>
         <p:nvSpPr>
-          <p:cNvPr id="82" name="Shape 80"/>
+          <p:cNvPr id="84" name="Shape 82"/>
           <p:cNvSpPr/>
           <p:nvPr/>
         </p:nvSpPr>
@@ -9409,7 +9477,7 @@
       </p:sp>
       <p:sp>
         <p:nvSpPr>
-          <p:cNvPr id="83" name="Text 81"/>
+          <p:cNvPr id="85" name="Text 83"/>
           <p:cNvSpPr/>
           <p:nvPr/>
         </p:nvSpPr>
@@ -9450,7 +9518,7 @@
       </p:sp>
       <p:sp>
         <p:nvSpPr>
-          <p:cNvPr id="84" name="Text 82"/>
+          <p:cNvPr id="86" name="Text 84"/>
           <p:cNvSpPr/>
           <p:nvPr/>
         </p:nvSpPr>
@@ -9491,7 +9559,7 @@
       </p:sp>
       <p:sp>
         <p:nvSpPr>
-          <p:cNvPr id="85" name="Shape 83"/>
+          <p:cNvPr id="87" name="Shape 85"/>
           <p:cNvSpPr/>
           <p:nvPr/>
         </p:nvSpPr>
@@ -9520,7 +9588,7 @@
       </p:sp>
       <p:sp>
         <p:nvSpPr>
-          <p:cNvPr id="86" name="Shape 84"/>
+          <p:cNvPr id="88" name="Shape 86"/>
           <p:cNvSpPr/>
           <p:nvPr/>
         </p:nvSpPr>
@@ -9545,7 +9613,7 @@
       </p:sp>
       <p:sp>
         <p:nvSpPr>
-          <p:cNvPr id="87" name="Text 85"/>
+          <p:cNvPr id="89" name="Text 87"/>
           <p:cNvSpPr/>
           <p:nvPr/>
         </p:nvSpPr>
@@ -9586,7 +9654,7 @@
       </p:sp>
       <p:sp>
         <p:nvSpPr>
-          <p:cNvPr id="88" name="Text 86"/>
+          <p:cNvPr id="90" name="Text 88"/>
           <p:cNvSpPr/>
           <p:nvPr/>
         </p:nvSpPr>
@@ -9627,7 +9695,7 @@
       </p:sp>
       <p:sp>
         <p:nvSpPr>
-          <p:cNvPr id="89" name="Shape 87"/>
+          <p:cNvPr id="91" name="Shape 89"/>
           <p:cNvSpPr/>
           <p:nvPr/>
         </p:nvSpPr>
@@ -9650,7 +9718,7 @@
       </p:sp>
       <p:sp>
         <p:nvSpPr>
-          <p:cNvPr id="90" name="Shape 88"/>
+          <p:cNvPr id="92" name="Shape 90"/>
           <p:cNvSpPr/>
           <p:nvPr/>
         </p:nvSpPr>
@@ -9675,7 +9743,7 @@
       </p:sp>
       <p:sp>
         <p:nvSpPr>
-          <p:cNvPr id="91" name="Text 89"/>
+          <p:cNvPr id="93" name="Text 91"/>
           <p:cNvSpPr/>
           <p:nvPr/>
         </p:nvSpPr>
@@ -9716,7 +9784,7 @@
       </p:sp>
       <p:sp>
         <p:nvSpPr>
-          <p:cNvPr id="92" name="Text 90"/>
+          <p:cNvPr id="94" name="Text 92"/>
           <p:cNvSpPr/>
           <p:nvPr/>
         </p:nvSpPr>
@@ -9757,7 +9825,7 @@
       </p:sp>
       <p:sp>
         <p:nvSpPr>
-          <p:cNvPr id="93" name="Shape 91"/>
+          <p:cNvPr id="95" name="Shape 93"/>
           <p:cNvSpPr/>
           <p:nvPr/>
         </p:nvSpPr>
@@ -9782,7 +9850,7 @@
       </p:sp>
       <p:sp>
         <p:nvSpPr>
-          <p:cNvPr id="94" name="Text 92"/>
+          <p:cNvPr id="96" name="Text 94"/>
           <p:cNvSpPr/>
           <p:nvPr/>
         </p:nvSpPr>
@@ -9823,7 +9891,7 @@
       </p:sp>
       <p:sp>
         <p:nvSpPr>
-          <p:cNvPr id="95" name="Text 93"/>
+          <p:cNvPr id="97" name="Text 95"/>
           <p:cNvSpPr/>
           <p:nvPr/>
         </p:nvSpPr>
@@ -9864,7 +9932,7 @@
       </p:sp>
       <p:sp>
         <p:nvSpPr>
-          <p:cNvPr id="96" name="Shape 94"/>
+          <p:cNvPr id="98" name="Shape 96"/>
           <p:cNvSpPr/>
           <p:nvPr/>
         </p:nvSpPr>
@@ -9889,7 +9957,7 @@
       </p:sp>
       <p:sp>
         <p:nvSpPr>
-          <p:cNvPr id="97" name="Text 95"/>
+          <p:cNvPr id="99" name="Text 97"/>
           <p:cNvSpPr/>
           <p:nvPr/>
         </p:nvSpPr>
@@ -9930,7 +9998,7 @@
       </p:sp>
       <p:sp>
         <p:nvSpPr>
-          <p:cNvPr id="98" name="Text 96"/>
+          <p:cNvPr id="100" name="Text 98"/>
           <p:cNvSpPr/>
           <p:nvPr/>
         </p:nvSpPr>
@@ -9971,7 +10039,7 @@
       </p:sp>
       <p:sp>
         <p:nvSpPr>
-          <p:cNvPr id="99" name="Shape 97"/>
+          <p:cNvPr id="101" name="Shape 99"/>
           <p:cNvSpPr/>
           <p:nvPr/>
         </p:nvSpPr>
@@ -9996,7 +10064,7 @@
       </p:sp>
       <p:sp>
         <p:nvSpPr>
-          <p:cNvPr id="100" name="Text 98"/>
+          <p:cNvPr id="102" name="Text 100"/>
           <p:cNvSpPr/>
           <p:nvPr/>
         </p:nvSpPr>
@@ -10037,7 +10105,7 @@
       </p:sp>
       <p:sp>
         <p:nvSpPr>
-          <p:cNvPr id="101" name="Text 99"/>
+          <p:cNvPr id="103" name="Text 101"/>
           <p:cNvSpPr/>
           <p:nvPr/>
         </p:nvSpPr>
@@ -10078,7 +10146,7 @@
       </p:sp>
       <p:sp>
         <p:nvSpPr>
-          <p:cNvPr id="102" name="Shape 100"/>
+          <p:cNvPr id="104" name="Shape 102"/>
           <p:cNvSpPr/>
           <p:nvPr/>
         </p:nvSpPr>
@@ -10103,7 +10171,7 @@
       </p:sp>
       <p:sp>
         <p:nvSpPr>
-          <p:cNvPr id="103" name="Text 101"/>
+          <p:cNvPr id="105" name="Text 103"/>
           <p:cNvSpPr/>
           <p:nvPr/>
         </p:nvSpPr>
@@ -10144,7 +10212,7 @@
       </p:sp>
       <p:sp>
         <p:nvSpPr>
-          <p:cNvPr id="104" name="Text 102"/>
+          <p:cNvPr id="106" name="Text 104"/>
           <p:cNvSpPr/>
           <p:nvPr/>
         </p:nvSpPr>
@@ -10185,7 +10253,7 @@
       </p:sp>
       <p:sp>
         <p:nvSpPr>
-          <p:cNvPr id="105" name="Shape 103"/>
+          <p:cNvPr id="107" name="Shape 105"/>
           <p:cNvSpPr/>
           <p:nvPr/>
         </p:nvSpPr>
@@ -10210,7 +10278,7 @@
       </p:sp>
       <p:sp>
         <p:nvSpPr>
-          <p:cNvPr id="106" name="Text 104"/>
+          <p:cNvPr id="108" name="Text 106"/>
           <p:cNvSpPr/>
           <p:nvPr/>
         </p:nvSpPr>
@@ -10251,7 +10319,7 @@
       </p:sp>
       <p:sp>
         <p:nvSpPr>
-          <p:cNvPr id="107" name="Text 105"/>
+          <p:cNvPr id="109" name="Text 107"/>
           <p:cNvSpPr/>
           <p:nvPr/>
         </p:nvSpPr>
@@ -10292,7 +10360,7 @@
       </p:sp>
       <p:sp>
         <p:nvSpPr>
-          <p:cNvPr id="108" name="Shape 106"/>
+          <p:cNvPr id="110" name="Shape 108"/>
           <p:cNvSpPr/>
           <p:nvPr/>
         </p:nvSpPr>
@@ -10321,7 +10389,7 @@
       </p:sp>
       <p:sp>
         <p:nvSpPr>
-          <p:cNvPr id="109" name="Shape 107"/>
+          <p:cNvPr id="111" name="Shape 109"/>
           <p:cNvSpPr/>
           <p:nvPr/>
         </p:nvSpPr>
@@ -10346,7 +10414,7 @@
       </p:sp>
       <p:sp>
         <p:nvSpPr>
-          <p:cNvPr id="110" name="Text 108"/>
+          <p:cNvPr id="112" name="Text 110"/>
           <p:cNvSpPr/>
           <p:nvPr/>
         </p:nvSpPr>
@@ -10387,7 +10455,7 @@
       </p:sp>
       <p:sp>
         <p:nvSpPr>
-          <p:cNvPr id="111" name="Text 109"/>
+          <p:cNvPr id="113" name="Text 111"/>
           <p:cNvSpPr/>
           <p:nvPr/>
         </p:nvSpPr>
@@ -10428,7 +10496,7 @@
       </p:sp>
       <p:sp>
         <p:nvSpPr>
-          <p:cNvPr id="112" name="Shape 110"/>
+          <p:cNvPr id="114" name="Shape 112"/>
           <p:cNvSpPr/>
           <p:nvPr/>
         </p:nvSpPr>
@@ -10451,7 +10519,7 @@
       </p:sp>
       <p:sp>
         <p:nvSpPr>
-          <p:cNvPr id="113" name="Shape 111"/>
+          <p:cNvPr id="115" name="Shape 113"/>
           <p:cNvSpPr/>
           <p:nvPr/>
         </p:nvSpPr>
@@ -10476,7 +10544,7 @@
       </p:sp>
       <p:sp>
         <p:nvSpPr>
-          <p:cNvPr id="114" name="Text 112"/>
+          <p:cNvPr id="116" name="Text 114"/>
           <p:cNvSpPr/>
           <p:nvPr/>
         </p:nvSpPr>
@@ -10517,7 +10585,7 @@
       </p:sp>
       <p:sp>
         <p:nvSpPr>
-          <p:cNvPr id="115" name="Text 113"/>
+          <p:cNvPr id="117" name="Text 115"/>
           <p:cNvSpPr/>
           <p:nvPr/>
         </p:nvSpPr>
@@ -10558,7 +10626,7 @@
       </p:sp>
       <p:sp>
         <p:nvSpPr>
-          <p:cNvPr id="116" name="Shape 114"/>
+          <p:cNvPr id="118" name="Shape 116"/>
           <p:cNvSpPr/>
           <p:nvPr/>
         </p:nvSpPr>
@@ -10583,7 +10651,7 @@
       </p:sp>
       <p:sp>
         <p:nvSpPr>
-          <p:cNvPr id="117" name="Text 115"/>
+          <p:cNvPr id="119" name="Text 117"/>
           <p:cNvSpPr/>
           <p:nvPr/>
         </p:nvSpPr>
@@ -10624,7 +10692,7 @@
       </p:sp>
       <p:sp>
         <p:nvSpPr>
-          <p:cNvPr id="118" name="Text 116"/>
+          <p:cNvPr id="120" name="Text 118"/>
           <p:cNvSpPr/>
           <p:nvPr/>
         </p:nvSpPr>
@@ -10665,7 +10733,7 @@
       </p:sp>
       <p:sp>
         <p:nvSpPr>
-          <p:cNvPr id="119" name="Shape 117"/>
+          <p:cNvPr id="121" name="Shape 119"/>
           <p:cNvSpPr/>
           <p:nvPr/>
         </p:nvSpPr>
@@ -10690,7 +10758,7 @@
       </p:sp>
       <p:sp>
         <p:nvSpPr>
-          <p:cNvPr id="120" name="Text 118"/>
+          <p:cNvPr id="122" name="Text 120"/>
           <p:cNvSpPr/>
           <p:nvPr/>
         </p:nvSpPr>
@@ -10731,7 +10799,7 @@
       </p:sp>
       <p:sp>
         <p:nvSpPr>
-          <p:cNvPr id="121" name="Text 119"/>
+          <p:cNvPr id="123" name="Text 121"/>
           <p:cNvSpPr/>
           <p:nvPr/>
         </p:nvSpPr>
@@ -10772,7 +10840,7 @@
       </p:sp>
       <p:sp>
         <p:nvSpPr>
-          <p:cNvPr id="122" name="Shape 120"/>
+          <p:cNvPr id="124" name="Shape 122"/>
           <p:cNvSpPr/>
           <p:nvPr/>
         </p:nvSpPr>
@@ -10797,7 +10865,7 @@
       </p:sp>
       <p:sp>
         <p:nvSpPr>
-          <p:cNvPr id="123" name="Text 121"/>
+          <p:cNvPr id="125" name="Text 123"/>
           <p:cNvSpPr/>
           <p:nvPr/>
         </p:nvSpPr>
@@ -10838,7 +10906,7 @@
       </p:sp>
       <p:sp>
         <p:nvSpPr>
-          <p:cNvPr id="124" name="Text 122"/>
+          <p:cNvPr id="126" name="Text 124"/>
           <p:cNvSpPr/>
           <p:nvPr/>
         </p:nvSpPr>
@@ -10879,7 +10947,7 @@
       </p:sp>
       <p:sp>
         <p:nvSpPr>
-          <p:cNvPr id="125" name="Shape 123"/>
+          <p:cNvPr id="127" name="Shape 125"/>
           <p:cNvSpPr/>
           <p:nvPr/>
         </p:nvSpPr>
@@ -10904,7 +10972,7 @@
       </p:sp>
       <p:sp>
         <p:nvSpPr>
-          <p:cNvPr id="126" name="Text 124"/>
+          <p:cNvPr id="128" name="Text 126"/>
           <p:cNvSpPr/>
           <p:nvPr/>
         </p:nvSpPr>
@@ -10945,7 +11013,7 @@
       </p:sp>
       <p:sp>
         <p:nvSpPr>
-          <p:cNvPr id="127" name="Text 125"/>
+          <p:cNvPr id="129" name="Text 127"/>
           <p:cNvSpPr/>
           <p:nvPr/>
         </p:nvSpPr>
@@ -10986,7 +11054,7 @@
       </p:sp>
       <p:sp>
         <p:nvSpPr>
-          <p:cNvPr id="128" name="Shape 126"/>
+          <p:cNvPr id="130" name="Shape 128"/>
           <p:cNvSpPr/>
           <p:nvPr/>
         </p:nvSpPr>
@@ -11011,7 +11079,7 @@
       </p:sp>
       <p:sp>
         <p:nvSpPr>
-          <p:cNvPr id="129" name="Text 127"/>
+          <p:cNvPr id="131" name="Text 129"/>
           <p:cNvSpPr/>
           <p:nvPr/>
         </p:nvSpPr>
@@ -11052,7 +11120,7 @@
       </p:sp>
       <p:sp>
         <p:nvSpPr>
-          <p:cNvPr id="130" name="Text 128"/>
+          <p:cNvPr id="132" name="Text 130"/>
           <p:cNvSpPr/>
           <p:nvPr/>
         </p:nvSpPr>
@@ -11093,7 +11161,7 @@
       </p:sp>
       <p:sp>
         <p:nvSpPr>
-          <p:cNvPr id="131" name="Shape 129"/>
+          <p:cNvPr id="133" name="Shape 131"/>
           <p:cNvSpPr/>
           <p:nvPr/>
         </p:nvSpPr>
@@ -11122,7 +11190,7 @@
       </p:sp>
       <p:sp>
         <p:nvSpPr>
-          <p:cNvPr id="132" name="Shape 130"/>
+          <p:cNvPr id="134" name="Shape 132"/>
           <p:cNvSpPr/>
           <p:nvPr/>
         </p:nvSpPr>
@@ -11147,7 +11215,7 @@
       </p:sp>
       <p:sp>
         <p:nvSpPr>
-          <p:cNvPr id="133" name="Text 131"/>
+          <p:cNvPr id="135" name="Text 133"/>
           <p:cNvSpPr/>
           <p:nvPr/>
         </p:nvSpPr>
@@ -11188,7 +11256,7 @@
       </p:sp>
       <p:sp>
         <p:nvSpPr>
-          <p:cNvPr id="134" name="Text 132"/>
+          <p:cNvPr id="136" name="Text 134"/>
           <p:cNvSpPr/>
           <p:nvPr/>
         </p:nvSpPr>
@@ -11229,7 +11297,7 @@
       </p:sp>
       <p:sp>
         <p:nvSpPr>
-          <p:cNvPr id="135" name="Shape 133"/>
+          <p:cNvPr id="137" name="Shape 135"/>
           <p:cNvSpPr/>
           <p:nvPr/>
         </p:nvSpPr>
@@ -11252,7 +11320,7 @@
       </p:sp>
       <p:sp>
         <p:nvSpPr>
-          <p:cNvPr id="136" name="Shape 134"/>
+          <p:cNvPr id="138" name="Shape 136"/>
           <p:cNvSpPr/>
           <p:nvPr/>
         </p:nvSpPr>
@@ -11277,7 +11345,7 @@
       </p:sp>
       <p:sp>
         <p:nvSpPr>
-          <p:cNvPr id="137" name="Text 135"/>
+          <p:cNvPr id="139" name="Text 137"/>
           <p:cNvSpPr/>
           <p:nvPr/>
         </p:nvSpPr>
@@ -11318,7 +11386,7 @@
       </p:sp>
       <p:sp>
         <p:nvSpPr>
-          <p:cNvPr id="138" name="Text 136"/>
+          <p:cNvPr id="140" name="Text 138"/>
           <p:cNvSpPr/>
           <p:nvPr/>
         </p:nvSpPr>
@@ -11359,7 +11427,7 @@
       </p:sp>
       <p:sp>
         <p:nvSpPr>
-          <p:cNvPr id="139" name="Shape 137"/>
+          <p:cNvPr id="141" name="Shape 139"/>
           <p:cNvSpPr/>
           <p:nvPr/>
         </p:nvSpPr>
@@ -11384,7 +11452,7 @@
       </p:sp>
       <p:sp>
         <p:nvSpPr>
-          <p:cNvPr id="140" name="Text 138"/>
+          <p:cNvPr id="142" name="Text 140"/>
           <p:cNvSpPr/>
           <p:nvPr/>
         </p:nvSpPr>
@@ -11425,7 +11493,7 @@
       </p:sp>
       <p:sp>
         <p:nvSpPr>
-          <p:cNvPr id="141" name="Text 139"/>
+          <p:cNvPr id="143" name="Text 141"/>
           <p:cNvSpPr/>
           <p:nvPr/>
         </p:nvSpPr>
@@ -11466,7 +11534,7 @@
       </p:sp>
       <p:sp>
         <p:nvSpPr>
-          <p:cNvPr id="142" name="Shape 140"/>
+          <p:cNvPr id="144" name="Shape 142"/>
           <p:cNvSpPr/>
           <p:nvPr/>
         </p:nvSpPr>
@@ -11491,7 +11559,7 @@
       </p:sp>
       <p:sp>
         <p:nvSpPr>
-          <p:cNvPr id="143" name="Text 141"/>
+          <p:cNvPr id="145" name="Text 143"/>
           <p:cNvSpPr/>
           <p:nvPr/>
         </p:nvSpPr>
@@ -11532,7 +11600,7 @@
       </p:sp>
       <p:sp>
         <p:nvSpPr>
-          <p:cNvPr id="144" name="Text 142"/>
+          <p:cNvPr id="146" name="Text 144"/>
           <p:cNvSpPr/>
           <p:nvPr/>
         </p:nvSpPr>
@@ -11573,7 +11641,7 @@
       </p:sp>
       <p:sp>
         <p:nvSpPr>
-          <p:cNvPr id="145" name="Shape 143"/>
+          <p:cNvPr id="147" name="Shape 145"/>
           <p:cNvSpPr/>
           <p:nvPr/>
         </p:nvSpPr>
@@ -11598,7 +11666,7 @@
       </p:sp>
       <p:sp>
         <p:nvSpPr>
-          <p:cNvPr id="146" name="Text 144"/>
+          <p:cNvPr id="148" name="Text 146"/>
           <p:cNvSpPr/>
           <p:nvPr/>
         </p:nvSpPr>
@@ -11639,7 +11707,7 @@
       </p:sp>
       <p:sp>
         <p:nvSpPr>
-          <p:cNvPr id="147" name="Text 145"/>
+          <p:cNvPr id="149" name="Text 147"/>
           <p:cNvSpPr/>
           <p:nvPr/>
         </p:nvSpPr>
@@ -11680,7 +11748,7 @@
       </p:sp>
       <p:sp>
         <p:nvSpPr>
-          <p:cNvPr id="148" name="Shape 146"/>
+          <p:cNvPr id="150" name="Shape 148"/>
           <p:cNvSpPr/>
           <p:nvPr/>
         </p:nvSpPr>
@@ -11705,7 +11773,7 @@
       </p:sp>
       <p:sp>
         <p:nvSpPr>
-          <p:cNvPr id="149" name="Text 147"/>
+          <p:cNvPr id="151" name="Text 149"/>
           <p:cNvSpPr/>
           <p:nvPr/>
         </p:nvSpPr>
@@ -11746,7 +11814,7 @@
       </p:sp>
       <p:sp>
         <p:nvSpPr>
-          <p:cNvPr id="150" name="Text 148"/>
+          <p:cNvPr id="152" name="Text 150"/>
           <p:cNvSpPr/>
           <p:nvPr/>
         </p:nvSpPr>
@@ -11787,7 +11855,7 @@
       </p:sp>
       <p:sp>
         <p:nvSpPr>
-          <p:cNvPr id="151" name="Shape 149"/>
+          <p:cNvPr id="153" name="Shape 151"/>
           <p:cNvSpPr/>
           <p:nvPr/>
         </p:nvSpPr>
@@ -11812,7 +11880,7 @@
       </p:sp>
       <p:sp>
         <p:nvSpPr>
-          <p:cNvPr id="152" name="Text 150"/>
+          <p:cNvPr id="154" name="Text 152"/>
           <p:cNvSpPr/>
           <p:nvPr/>
         </p:nvSpPr>
@@ -11853,7 +11921,7 @@
       </p:sp>
       <p:sp>
         <p:nvSpPr>
-          <p:cNvPr id="153" name="Text 151"/>
+          <p:cNvPr id="155" name="Text 153"/>
           <p:cNvSpPr/>
           <p:nvPr/>
         </p:nvSpPr>
@@ -11894,7 +11962,7 @@
       </p:sp>
       <p:sp>
         <p:nvSpPr>
-          <p:cNvPr id="154" name="Shape 152"/>
+          <p:cNvPr id="156" name="Shape 154"/>
           <p:cNvSpPr/>
           <p:nvPr/>
         </p:nvSpPr>
@@ -11923,7 +11991,7 @@
       </p:sp>
       <p:sp>
         <p:nvSpPr>
-          <p:cNvPr id="155" name="Shape 153"/>
+          <p:cNvPr id="157" name="Shape 155"/>
           <p:cNvSpPr/>
           <p:nvPr/>
         </p:nvSpPr>
@@ -11948,7 +12016,7 @@
       </p:sp>
       <p:sp>
         <p:nvSpPr>
-          <p:cNvPr id="156" name="Text 154"/>
+          <p:cNvPr id="158" name="Text 156"/>
           <p:cNvSpPr/>
           <p:nvPr/>
         </p:nvSpPr>
@@ -11989,7 +12057,7 @@
       </p:sp>
       <p:sp>
         <p:nvSpPr>
-          <p:cNvPr id="157" name="Text 155"/>
+          <p:cNvPr id="159" name="Text 157"/>
           <p:cNvSpPr/>
           <p:nvPr/>
         </p:nvSpPr>
@@ -12030,7 +12098,7 @@
       </p:sp>
       <p:sp>
         <p:nvSpPr>
-          <p:cNvPr id="158" name="Shape 156"/>
+          <p:cNvPr id="160" name="Shape 158"/>
           <p:cNvSpPr/>
           <p:nvPr/>
         </p:nvSpPr>
@@ -12053,7 +12121,7 @@
       </p:sp>
       <p:sp>
         <p:nvSpPr>
-          <p:cNvPr id="159" name="Shape 157"/>
+          <p:cNvPr id="161" name="Shape 159"/>
           <p:cNvSpPr/>
           <p:nvPr/>
         </p:nvSpPr>
@@ -12078,7 +12146,7 @@
       </p:sp>
       <p:sp>
         <p:nvSpPr>
-          <p:cNvPr id="160" name="Text 158"/>
+          <p:cNvPr id="162" name="Text 160"/>
           <p:cNvSpPr/>
           <p:nvPr/>
         </p:nvSpPr>
@@ -12119,7 +12187,7 @@
       </p:sp>
       <p:sp>
         <p:nvSpPr>
-          <p:cNvPr id="161" name="Text 159"/>
+          <p:cNvPr id="163" name="Text 161"/>
           <p:cNvSpPr/>
           <p:nvPr/>
         </p:nvSpPr>
@@ -12160,7 +12228,7 @@
       </p:sp>
       <p:sp>
         <p:nvSpPr>
-          <p:cNvPr id="162" name="Shape 160"/>
+          <p:cNvPr id="164" name="Shape 162"/>
           <p:cNvSpPr/>
           <p:nvPr/>
         </p:nvSpPr>
@@ -12185,7 +12253,7 @@
       </p:sp>
       <p:sp>
         <p:nvSpPr>
-          <p:cNvPr id="163" name="Text 161"/>
+          <p:cNvPr id="165" name="Text 163"/>
           <p:cNvSpPr/>
           <p:nvPr/>
         </p:nvSpPr>
@@ -12226,7 +12294,7 @@
       </p:sp>
       <p:sp>
         <p:nvSpPr>
-          <p:cNvPr id="164" name="Text 162"/>
+          <p:cNvPr id="166" name="Text 164"/>
           <p:cNvSpPr/>
           <p:nvPr/>
         </p:nvSpPr>
@@ -12267,7 +12335,7 @@
       </p:sp>
       <p:sp>
         <p:nvSpPr>
-          <p:cNvPr id="165" name="Shape 163"/>
+          <p:cNvPr id="167" name="Shape 165"/>
           <p:cNvSpPr/>
           <p:nvPr/>
         </p:nvSpPr>
@@ -12292,7 +12360,7 @@
       </p:sp>
       <p:sp>
         <p:nvSpPr>
-          <p:cNvPr id="166" name="Text 164"/>
+          <p:cNvPr id="168" name="Text 166"/>
           <p:cNvSpPr/>
           <p:nvPr/>
         </p:nvSpPr>
@@ -12333,7 +12401,7 @@
       </p:sp>
       <p:sp>
         <p:nvSpPr>
-          <p:cNvPr id="167" name="Text 165"/>
+          <p:cNvPr id="169" name="Text 167"/>
           <p:cNvSpPr/>
           <p:nvPr/>
         </p:nvSpPr>
@@ -12374,7 +12442,7 @@
       </p:sp>
       <p:sp>
         <p:nvSpPr>
-          <p:cNvPr id="168" name="Shape 166"/>
+          <p:cNvPr id="170" name="Shape 168"/>
           <p:cNvSpPr/>
           <p:nvPr/>
         </p:nvSpPr>
@@ -12399,7 +12467,7 @@
       </p:sp>
       <p:sp>
         <p:nvSpPr>
-          <p:cNvPr id="169" name="Text 167"/>
+          <p:cNvPr id="171" name="Text 169"/>
           <p:cNvSpPr/>
           <p:nvPr/>
         </p:nvSpPr>
@@ -12440,7 +12508,7 @@
       </p:sp>
       <p:sp>
         <p:nvSpPr>
-          <p:cNvPr id="170" name="Text 168"/>
+          <p:cNvPr id="172" name="Text 170"/>
           <p:cNvSpPr/>
           <p:nvPr/>
         </p:nvSpPr>
@@ -12481,7 +12549,7 @@
       </p:sp>
       <p:sp>
         <p:nvSpPr>
-          <p:cNvPr id="171" name="Shape 169"/>
+          <p:cNvPr id="173" name="Shape 171"/>
           <p:cNvSpPr/>
           <p:nvPr/>
         </p:nvSpPr>
@@ -12506,7 +12574,7 @@
       </p:sp>
       <p:sp>
         <p:nvSpPr>
-          <p:cNvPr id="172" name="Text 170"/>
+          <p:cNvPr id="174" name="Text 172"/>
           <p:cNvSpPr/>
           <p:nvPr/>
         </p:nvSpPr>
@@ -12547,7 +12615,7 @@
       </p:sp>
       <p:sp>
         <p:nvSpPr>
-          <p:cNvPr id="173" name="Text 171"/>
+          <p:cNvPr id="175" name="Text 173"/>
           <p:cNvSpPr/>
           <p:nvPr/>
         </p:nvSpPr>
@@ -12588,7 +12656,7 @@
       </p:sp>
       <p:sp>
         <p:nvSpPr>
-          <p:cNvPr id="174" name="Shape 172"/>
+          <p:cNvPr id="176" name="Shape 174"/>
           <p:cNvSpPr/>
           <p:nvPr/>
         </p:nvSpPr>
@@ -12613,7 +12681,7 @@
       </p:sp>
       <p:sp>
         <p:nvSpPr>
-          <p:cNvPr id="175" name="Text 173"/>
+          <p:cNvPr id="177" name="Text 175"/>
           <p:cNvSpPr/>
           <p:nvPr/>
         </p:nvSpPr>
@@ -12654,7 +12722,7 @@
       </p:sp>
       <p:sp>
         <p:nvSpPr>
-          <p:cNvPr id="176" name="Text 174"/>
+          <p:cNvPr id="178" name="Text 176"/>
           <p:cNvSpPr/>
           <p:nvPr/>
         </p:nvSpPr>
@@ -12695,7 +12763,7 @@
       </p:sp>
       <p:sp>
         <p:nvSpPr>
-          <p:cNvPr id="177" name="Shape 175"/>
+          <p:cNvPr id="179" name="Shape 177"/>
           <p:cNvSpPr/>
           <p:nvPr/>
         </p:nvSpPr>
@@ -12724,7 +12792,7 @@
       </p:sp>
       <p:sp>
         <p:nvSpPr>
-          <p:cNvPr id="178" name="Shape 176"/>
+          <p:cNvPr id="180" name="Shape 178"/>
           <p:cNvSpPr/>
           <p:nvPr/>
         </p:nvSpPr>
@@ -12749,7 +12817,7 @@
       </p:sp>
       <p:sp>
         <p:nvSpPr>
-          <p:cNvPr id="179" name="Text 177"/>
+          <p:cNvPr id="181" name="Text 179"/>
           <p:cNvSpPr/>
           <p:nvPr/>
         </p:nvSpPr>
@@ -12790,7 +12858,7 @@
       </p:sp>
       <p:sp>
         <p:nvSpPr>
-          <p:cNvPr id="180" name="Text 178"/>
+          <p:cNvPr id="182" name="Text 180"/>
           <p:cNvSpPr/>
           <p:nvPr/>
         </p:nvSpPr>
@@ -12831,7 +12899,7 @@
       </p:sp>
       <p:sp>
         <p:nvSpPr>
-          <p:cNvPr id="181" name="Shape 179"/>
+          <p:cNvPr id="183" name="Shape 181"/>
           <p:cNvSpPr/>
           <p:nvPr/>
         </p:nvSpPr>
@@ -12854,7 +12922,7 @@
       </p:sp>
       <p:sp>
         <p:nvSpPr>
-          <p:cNvPr id="182" name="Shape 180"/>
+          <p:cNvPr id="184" name="Shape 182"/>
           <p:cNvSpPr/>
           <p:nvPr/>
         </p:nvSpPr>
@@ -12879,7 +12947,7 @@
       </p:sp>
       <p:sp>
         <p:nvSpPr>
-          <p:cNvPr id="183" name="Text 181"/>
+          <p:cNvPr id="185" name="Text 183"/>
           <p:cNvSpPr/>
           <p:nvPr/>
         </p:nvSpPr>
@@ -12920,7 +12988,7 @@
       </p:sp>
       <p:sp>
         <p:nvSpPr>
-          <p:cNvPr id="184" name="Text 182"/>
+          <p:cNvPr id="186" name="Text 184"/>
           <p:cNvSpPr/>
           <p:nvPr/>
         </p:nvSpPr>
@@ -12961,7 +13029,7 @@
       </p:sp>
       <p:sp>
         <p:nvSpPr>
-          <p:cNvPr id="185" name="Shape 183"/>
+          <p:cNvPr id="187" name="Shape 185"/>
           <p:cNvSpPr/>
           <p:nvPr/>
         </p:nvSpPr>
@@ -12986,7 +13054,7 @@
       </p:sp>
       <p:sp>
         <p:nvSpPr>
-          <p:cNvPr id="186" name="Text 184"/>
+          <p:cNvPr id="188" name="Text 186"/>
           <p:cNvSpPr/>
           <p:nvPr/>
         </p:nvSpPr>
@@ -13027,7 +13095,7 @@
       </p:sp>
       <p:sp>
         <p:nvSpPr>
-          <p:cNvPr id="187" name="Text 185"/>
+          <p:cNvPr id="189" name="Text 187"/>
           <p:cNvSpPr/>
           <p:nvPr/>
         </p:nvSpPr>
@@ -13068,7 +13136,7 @@
       </p:sp>
       <p:sp>
         <p:nvSpPr>
-          <p:cNvPr id="188" name="Shape 186"/>
+          <p:cNvPr id="190" name="Shape 188"/>
           <p:cNvSpPr/>
           <p:nvPr/>
         </p:nvSpPr>
@@ -13093,7 +13161,7 @@
       </p:sp>
       <p:sp>
         <p:nvSpPr>
-          <p:cNvPr id="189" name="Text 187"/>
+          <p:cNvPr id="191" name="Text 189"/>
           <p:cNvSpPr/>
           <p:nvPr/>
         </p:nvSpPr>
@@ -13134,7 +13202,7 @@
       </p:sp>
       <p:sp>
         <p:nvSpPr>
-          <p:cNvPr id="190" name="Text 188"/>
+          <p:cNvPr id="192" name="Text 190"/>
           <p:cNvSpPr/>
           <p:nvPr/>
         </p:nvSpPr>
@@ -13175,7 +13243,7 @@
       </p:sp>
       <p:sp>
         <p:nvSpPr>
-          <p:cNvPr id="191" name="Shape 189"/>
+          <p:cNvPr id="193" name="Shape 191"/>
           <p:cNvSpPr/>
           <p:nvPr/>
         </p:nvSpPr>
@@ -13200,7 +13268,7 @@
       </p:sp>
       <p:sp>
         <p:nvSpPr>
-          <p:cNvPr id="192" name="Text 190"/>
+          <p:cNvPr id="194" name="Text 192"/>
           <p:cNvSpPr/>
           <p:nvPr/>
         </p:nvSpPr>
@@ -13241,7 +13309,7 @@
       </p:sp>
       <p:sp>
         <p:nvSpPr>
-          <p:cNvPr id="193" name="Text 191"/>
+          <p:cNvPr id="195" name="Text 193"/>
           <p:cNvSpPr/>
           <p:nvPr/>
         </p:nvSpPr>
@@ -13282,7 +13350,7 @@
       </p:sp>
       <p:sp>
         <p:nvSpPr>
-          <p:cNvPr id="194" name="Shape 192"/>
+          <p:cNvPr id="196" name="Shape 194"/>
           <p:cNvSpPr/>
           <p:nvPr/>
         </p:nvSpPr>
@@ -13307,7 +13375,7 @@
       </p:sp>
       <p:sp>
         <p:nvSpPr>
-          <p:cNvPr id="195" name="Text 193"/>
+          <p:cNvPr id="197" name="Text 195"/>
           <p:cNvSpPr/>
           <p:nvPr/>
         </p:nvSpPr>
@@ -13348,7 +13416,7 @@
       </p:sp>
       <p:sp>
         <p:nvSpPr>
-          <p:cNvPr id="196" name="Text 194"/>
+          <p:cNvPr id="198" name="Text 196"/>
           <p:cNvSpPr/>
           <p:nvPr/>
         </p:nvSpPr>
@@ -13389,7 +13457,7 @@
       </p:sp>
       <p:sp>
         <p:nvSpPr>
-          <p:cNvPr id="197" name="Shape 195"/>
+          <p:cNvPr id="199" name="Shape 197"/>
           <p:cNvSpPr/>
           <p:nvPr/>
         </p:nvSpPr>
@@ -13414,7 +13482,7 @@
       </p:sp>
       <p:sp>
         <p:nvSpPr>
-          <p:cNvPr id="198" name="Shape 196"/>
+          <p:cNvPr id="200" name="Shape 198"/>
           <p:cNvSpPr/>
           <p:nvPr/>
         </p:nvSpPr>
@@ -13439,7 +13507,7 @@
       </p:sp>
       <p:sp>
         <p:nvSpPr>
-          <p:cNvPr id="199" name="Text 197"/>
+          <p:cNvPr id="201" name="Text 199"/>
           <p:cNvSpPr/>
           <p:nvPr/>
         </p:nvSpPr>
@@ -13480,7 +13548,7 @@
       </p:sp>
       <p:sp>
         <p:nvSpPr>
-          <p:cNvPr id="200" name="Text 198"/>
+          <p:cNvPr id="202" name="Text 200"/>
           <p:cNvSpPr/>
           <p:nvPr/>
         </p:nvSpPr>
@@ -13521,7 +13589,7 @@
       </p:sp>
       <p:sp>
         <p:nvSpPr>
-          <p:cNvPr id="201" name="Text 199"/>
+          <p:cNvPr id="203" name="Text 201"/>
           <p:cNvSpPr/>
           <p:nvPr/>
         </p:nvSpPr>
@@ -13554,7 +13622,7 @@
                 <a:ea typeface="Calibri" pitchFamily="34" charset="-122"/>
                 <a:cs typeface="Calibri" pitchFamily="34" charset="-120"/>
               </a:rPr>
-              <a:t>37</a:t>
+              <a:t>33</a:t>
             </a:r>
             <a:endParaRPr lang="en-US" sz="1100" dirty="0"/>
           </a:p>
@@ -13562,7 +13630,7 @@
       </p:sp>
       <p:sp>
         <p:nvSpPr>
-          <p:cNvPr id="202" name="Text 200"/>
+          <p:cNvPr id="204" name="Text 202"/>
           <p:cNvSpPr/>
           <p:nvPr/>
         </p:nvSpPr>
@@ -13603,7 +13671,7 @@
       </p:sp>
       <p:sp>
         <p:nvSpPr>
-          <p:cNvPr id="203" name="Text 201"/>
+          <p:cNvPr id="205" name="Text 203"/>
           <p:cNvSpPr/>
           <p:nvPr/>
         </p:nvSpPr>
@@ -13636,7 +13704,7 @@
                 <a:ea typeface="Calibri" pitchFamily="34" charset="-122"/>
                 <a:cs typeface="Calibri" pitchFamily="34" charset="-120"/>
               </a:rPr>
-              <a:t>24 Nov</a:t>
+              <a:t>19 Nov</a:t>
             </a:r>
             <a:endParaRPr lang="en-US" sz="850" dirty="0"/>
           </a:p>
@@ -13644,14 +13712,14 @@
       </p:sp>
       <p:sp>
         <p:nvSpPr>
-          <p:cNvPr id="204" name="Shape 202"/>
+          <p:cNvPr id="206" name="Shape 204"/>
           <p:cNvSpPr/>
           <p:nvPr/>
         </p:nvSpPr>
         <p:spPr>
           <a:xfrm>
             <a:off x="6405543" y="2011680"/>
-            <a:ext cx="5179485" cy="182880"/>
+            <a:ext cx="4577220" cy="182880"/>
           </a:xfrm>
           <a:prstGeom prst="roundRect">
             <a:avLst>
@@ -13671,14 +13739,14 @@
       </p:sp>
       <p:sp>
         <p:nvSpPr>
-          <p:cNvPr id="205" name="Text 203"/>
+          <p:cNvPr id="207" name="Text 205"/>
           <p:cNvSpPr/>
           <p:nvPr/>
         </p:nvSpPr>
         <p:spPr>
           <a:xfrm>
             <a:off x="6405543" y="2011680"/>
-            <a:ext cx="5179485" cy="182880"/>
+            <a:ext cx="4577220" cy="182880"/>
           </a:xfrm>
           <a:prstGeom prst="rect">
             <a:avLst/>
@@ -13704,7 +13772,7 @@
                 <a:ea typeface="Calibri" pitchFamily="34" charset="-122"/>
                 <a:cs typeface="Calibri" pitchFamily="34" charset="-120"/>
               </a:rPr>
-              <a:t>37 working days · 13 Oct → 24 Nov</a:t>
+              <a:t>33 working days · 13 Oct → 19 Nov · baseline 37 (−4)</a:t>
             </a:r>
             <a:endParaRPr lang="en-US" sz="850" dirty="0"/>
           </a:p>
@@ -13712,7 +13780,7 @@
       </p:sp>
       <p:sp>
         <p:nvSpPr>
-          <p:cNvPr id="206" name="Shape 204"/>
+          <p:cNvPr id="208" name="Shape 206"/>
           <p:cNvSpPr/>
           <p:nvPr/>
         </p:nvSpPr>
@@ -13737,7 +13805,7 @@
       </p:sp>
       <p:sp>
         <p:nvSpPr>
-          <p:cNvPr id="207" name="Text 205"/>
+          <p:cNvPr id="209" name="Text 207"/>
           <p:cNvSpPr/>
           <p:nvPr/>
         </p:nvSpPr>
@@ -13778,13 +13846,13 @@
       </p:sp>
       <p:sp>
         <p:nvSpPr>
-          <p:cNvPr id="208" name="Shape 206"/>
-          <p:cNvSpPr/>
-          <p:nvPr/>
-        </p:nvSpPr>
-        <p:spPr>
-          <a:xfrm>
-            <a:off x="6383474" y="2313432"/>
+          <p:cNvPr id="210" name="Shape 208"/>
+          <p:cNvSpPr/>
+          <p:nvPr/>
+        </p:nvSpPr>
+        <p:spPr>
+          <a:xfrm>
+            <a:off x="6383474" y="2478024"/>
             <a:ext cx="164592" cy="164592"/>
           </a:xfrm>
           <a:prstGeom prst="diamond">
@@ -13803,14 +13871,14 @@
       </p:sp>
       <p:sp>
         <p:nvSpPr>
-          <p:cNvPr id="209" name="Text 207"/>
-          <p:cNvSpPr/>
-          <p:nvPr/>
-        </p:nvSpPr>
-        <p:spPr>
-          <a:xfrm>
-            <a:off x="6036002" y="2487168"/>
-            <a:ext cx="859536" cy="201168"/>
+          <p:cNvPr id="211" name="Text 209"/>
+          <p:cNvSpPr/>
+          <p:nvPr/>
+        </p:nvSpPr>
+        <p:spPr>
+          <a:xfrm>
+            <a:off x="5642810" y="2651760"/>
+            <a:ext cx="1645920" cy="100584"/>
           </a:xfrm>
           <a:prstGeom prst="rect">
             <a:avLst/>
@@ -13844,14 +13912,14 @@
       </p:sp>
       <p:sp>
         <p:nvSpPr>
-          <p:cNvPr id="210" name="Text 208"/>
-          <p:cNvSpPr/>
-          <p:nvPr/>
-        </p:nvSpPr>
-        <p:spPr>
-          <a:xfrm>
-            <a:off x="5898842" y="2697480"/>
-            <a:ext cx="1133856" cy="164592"/>
+          <p:cNvPr id="212" name="Text 210"/>
+          <p:cNvSpPr/>
+          <p:nvPr/>
+        </p:nvSpPr>
+        <p:spPr>
+          <a:xfrm>
+            <a:off x="5642810" y="2743200"/>
+            <a:ext cx="1645920" cy="128016"/>
           </a:xfrm>
           <a:prstGeom prst="rect">
             <a:avLst/>
@@ -13885,13 +13953,13 @@
       </p:sp>
       <p:sp>
         <p:nvSpPr>
-          <p:cNvPr id="211" name="Shape 209"/>
-          <p:cNvSpPr/>
-          <p:nvPr/>
-        </p:nvSpPr>
-        <p:spPr>
-          <a:xfrm>
-            <a:off x="7106193" y="2313432"/>
+          <p:cNvPr id="213" name="Shape 211"/>
+          <p:cNvSpPr/>
+          <p:nvPr/>
+        </p:nvSpPr>
+        <p:spPr>
+          <a:xfrm>
+            <a:off x="6865287" y="2478024"/>
             <a:ext cx="164592" cy="164592"/>
           </a:xfrm>
           <a:prstGeom prst="diamond">
@@ -13910,14 +13978,121 @@
       </p:sp>
       <p:sp>
         <p:nvSpPr>
-          <p:cNvPr id="212" name="Text 210"/>
-          <p:cNvSpPr/>
-          <p:nvPr/>
-        </p:nvSpPr>
-        <p:spPr>
-          <a:xfrm>
-            <a:off x="6758721" y="2487168"/>
-            <a:ext cx="859536" cy="201168"/>
+          <p:cNvPr id="214" name="Text 212"/>
+          <p:cNvSpPr/>
+          <p:nvPr/>
+        </p:nvSpPr>
+        <p:spPr>
+          <a:xfrm>
+            <a:off x="6124623" y="2240280"/>
+            <a:ext cx="1645920" cy="109728"/>
+          </a:xfrm>
+          <a:prstGeom prst="rect">
+            <a:avLst/>
+          </a:prstGeom>
+          <a:noFill/>
+          <a:ln/>
+        </p:spPr>
+        <p:txBody>
+          <a:bodyPr wrap="square" lIns="0" tIns="0" rIns="0" bIns="0" rtlCol="0" anchor="b">
+            <a:normAutofit/>
+          </a:bodyPr>
+          <a:lstStyle/>
+          <a:p>
+            <a:pPr algn="ctr" indent="0" marL="0">
+              <a:buNone/>
+            </a:pPr>
+            <a:r>
+              <a:rPr lang="en-US" altLang="en-US" sz="550" dirty="0">
+                <a:solidFill>
+                  <a:srgbClr val="556070"/>
+                </a:solidFill>
+                <a:latin typeface="Calibri" pitchFamily="34" charset="0"/>
+                <a:ea typeface="Calibri" pitchFamily="34" charset="-122"/>
+                <a:cs typeface="Calibri" pitchFamily="34" charset="-120"/>
+              </a:rPr>
+              <a:t>Shoring installation complete</a:t>
+            </a:r>
+            <a:endParaRPr lang="en-US" sz="550" dirty="0"/>
+          </a:p>
+        </p:txBody>
+      </p:sp>
+      <p:sp>
+        <p:nvSpPr>
+          <p:cNvPr id="215" name="Text 213"/>
+          <p:cNvSpPr/>
+          <p:nvPr/>
+        </p:nvSpPr>
+        <p:spPr>
+          <a:xfrm>
+            <a:off x="6124623" y="2350008"/>
+            <a:ext cx="1645920" cy="118872"/>
+          </a:xfrm>
+          <a:prstGeom prst="rect">
+            <a:avLst/>
+          </a:prstGeom>
+          <a:noFill/>
+          <a:ln/>
+        </p:spPr>
+        <p:txBody>
+          <a:bodyPr wrap="square" lIns="0" tIns="0" rIns="0" bIns="0" rtlCol="0" anchor="ctr">
+            <a:normAutofit/>
+          </a:bodyPr>
+          <a:lstStyle/>
+          <a:p>
+            <a:pPr algn="ctr" indent="0" marL="0">
+              <a:buNone/>
+            </a:pPr>
+            <a:r>
+              <a:rPr lang="en-US" altLang="en-US" sz="750" b="1" dirty="0">
+                <a:solidFill>
+                  <a:srgbClr val="3D3935"/>
+                </a:solidFill>
+                <a:latin typeface="Calibri" pitchFamily="34" charset="0"/>
+                <a:ea typeface="Calibri" pitchFamily="34" charset="-122"/>
+                <a:cs typeface="Calibri" pitchFamily="34" charset="-120"/>
+              </a:rPr>
+              <a:t>17 Oct</a:t>
+            </a:r>
+            <a:endParaRPr lang="en-US" sz="750" dirty="0"/>
+          </a:p>
+        </p:txBody>
+      </p:sp>
+      <p:sp>
+        <p:nvSpPr>
+          <p:cNvPr id="216" name="Shape 214"/>
+          <p:cNvSpPr/>
+          <p:nvPr/>
+        </p:nvSpPr>
+        <p:spPr>
+          <a:xfrm>
+            <a:off x="9153896" y="2478024"/>
+            <a:ext cx="164592" cy="164592"/>
+          </a:xfrm>
+          <a:prstGeom prst="diamond">
+            <a:avLst/>
+          </a:prstGeom>
+          <a:solidFill>
+            <a:srgbClr val="3D3935"/>
+          </a:solidFill>
+          <a:ln w="19050">
+            <a:solidFill>
+              <a:srgbClr val="FFFFFF"/>
+            </a:solidFill>
+            <a:prstDash val="solid"/>
+          </a:ln>
+        </p:spPr>
+      </p:sp>
+      <p:sp>
+        <p:nvSpPr>
+          <p:cNvPr id="217" name="Text 215"/>
+          <p:cNvSpPr/>
+          <p:nvPr/>
+        </p:nvSpPr>
+        <p:spPr>
+          <a:xfrm>
+            <a:off x="8413232" y="2651760"/>
+            <a:ext cx="1645920" cy="100584"/>
           </a:xfrm>
           <a:prstGeom prst="rect">
             <a:avLst/>
@@ -13943,7 +14118,7 @@
                 <a:ea typeface="Calibri" pitchFamily="34" charset="-122"/>
                 <a:cs typeface="Calibri" pitchFamily="34" charset="-120"/>
               </a:rPr>
-              <a:t>Shoring installation complete</a:t>
+              <a:t>Pit works complete (pit wall)</a:t>
             </a:r>
             <a:endParaRPr lang="en-US" sz="550" dirty="0"/>
           </a:p>
@@ -13951,14 +14126,14 @@
       </p:sp>
       <p:sp>
         <p:nvSpPr>
-          <p:cNvPr id="213" name="Text 211"/>
-          <p:cNvSpPr/>
-          <p:nvPr/>
-        </p:nvSpPr>
-        <p:spPr>
-          <a:xfrm>
-            <a:off x="6621561" y="2697480"/>
-            <a:ext cx="1133856" cy="164592"/>
+          <p:cNvPr id="218" name="Text 216"/>
+          <p:cNvSpPr/>
+          <p:nvPr/>
+        </p:nvSpPr>
+        <p:spPr>
+          <a:xfrm>
+            <a:off x="8413232" y="2743200"/>
+            <a:ext cx="1645920" cy="128016"/>
           </a:xfrm>
           <a:prstGeom prst="rect">
             <a:avLst/>
@@ -13984,7 +14159,7 @@
                 <a:ea typeface="Calibri" pitchFamily="34" charset="-122"/>
                 <a:cs typeface="Calibri" pitchFamily="34" charset="-120"/>
               </a:rPr>
-              <a:t>19 Oct</a:t>
+              <a:t>5 Nov</a:t>
             </a:r>
             <a:endParaRPr lang="en-US" sz="750" dirty="0"/>
           </a:p>
@@ -13992,13 +14167,13 @@
       </p:sp>
       <p:sp>
         <p:nvSpPr>
-          <p:cNvPr id="214" name="Shape 212"/>
-          <p:cNvSpPr/>
-          <p:nvPr/>
-        </p:nvSpPr>
-        <p:spPr>
-          <a:xfrm>
-            <a:off x="9876615" y="2313432"/>
+          <p:cNvPr id="219" name="Shape 217"/>
+          <p:cNvSpPr/>
+          <p:nvPr/>
+        </p:nvSpPr>
+        <p:spPr>
+          <a:xfrm>
+            <a:off x="10237975" y="2478024"/>
             <a:ext cx="164592" cy="164592"/>
           </a:xfrm>
           <a:prstGeom prst="diamond">
@@ -14017,14 +14192,121 @@
       </p:sp>
       <p:sp>
         <p:nvSpPr>
-          <p:cNvPr id="215" name="Text 213"/>
-          <p:cNvSpPr/>
-          <p:nvPr/>
-        </p:nvSpPr>
-        <p:spPr>
-          <a:xfrm>
-            <a:off x="9529143" y="2487168"/>
-            <a:ext cx="859536" cy="201168"/>
+          <p:cNvPr id="220" name="Text 218"/>
+          <p:cNvSpPr/>
+          <p:nvPr/>
+        </p:nvSpPr>
+        <p:spPr>
+          <a:xfrm>
+            <a:off x="9497311" y="2240280"/>
+            <a:ext cx="1645920" cy="109728"/>
+          </a:xfrm>
+          <a:prstGeom prst="rect">
+            <a:avLst/>
+          </a:prstGeom>
+          <a:noFill/>
+          <a:ln/>
+        </p:spPr>
+        <p:txBody>
+          <a:bodyPr wrap="square" lIns="0" tIns="0" rIns="0" bIns="0" rtlCol="0" anchor="b">
+            <a:normAutofit/>
+          </a:bodyPr>
+          <a:lstStyle/>
+          <a:p>
+            <a:pPr algn="ctr" indent="0" marL="0">
+              <a:buNone/>
+            </a:pPr>
+            <a:r>
+              <a:rPr lang="en-US" altLang="en-US" sz="550" dirty="0">
+                <a:solidFill>
+                  <a:srgbClr val="556070"/>
+                </a:solidFill>
+                <a:latin typeface="Calibri" pitchFamily="34" charset="0"/>
+                <a:ea typeface="Calibri" pitchFamily="34" charset="-122"/>
+                <a:cs typeface="Calibri" pitchFamily="34" charset="-120"/>
+              </a:rPr>
+              <a:t>Building foundation complete</a:t>
+            </a:r>
+            <a:endParaRPr lang="en-US" sz="550" dirty="0"/>
+          </a:p>
+        </p:txBody>
+      </p:sp>
+      <p:sp>
+        <p:nvSpPr>
+          <p:cNvPr id="221" name="Text 219"/>
+          <p:cNvSpPr/>
+          <p:nvPr/>
+        </p:nvSpPr>
+        <p:spPr>
+          <a:xfrm>
+            <a:off x="9497311" y="2350008"/>
+            <a:ext cx="1645920" cy="118872"/>
+          </a:xfrm>
+          <a:prstGeom prst="rect">
+            <a:avLst/>
+          </a:prstGeom>
+          <a:noFill/>
+          <a:ln/>
+        </p:spPr>
+        <p:txBody>
+          <a:bodyPr wrap="square" lIns="0" tIns="0" rIns="0" bIns="0" rtlCol="0" anchor="ctr">
+            <a:normAutofit/>
+          </a:bodyPr>
+          <a:lstStyle/>
+          <a:p>
+            <a:pPr algn="ctr" indent="0" marL="0">
+              <a:buNone/>
+            </a:pPr>
+            <a:r>
+              <a:rPr lang="en-US" altLang="en-US" sz="750" b="1" dirty="0">
+                <a:solidFill>
+                  <a:srgbClr val="3D3935"/>
+                </a:solidFill>
+                <a:latin typeface="Calibri" pitchFamily="34" charset="0"/>
+                <a:ea typeface="Calibri" pitchFamily="34" charset="-122"/>
+                <a:cs typeface="Calibri" pitchFamily="34" charset="-120"/>
+              </a:rPr>
+              <a:t>14 Nov</a:t>
+            </a:r>
+            <a:endParaRPr lang="en-US" sz="750" dirty="0"/>
+          </a:p>
+        </p:txBody>
+      </p:sp>
+      <p:sp>
+        <p:nvSpPr>
+          <p:cNvPr id="222" name="Shape 220"/>
+          <p:cNvSpPr/>
+          <p:nvPr/>
+        </p:nvSpPr>
+        <p:spPr>
+          <a:xfrm>
+            <a:off x="10840241" y="2478024"/>
+            <a:ext cx="164592" cy="164592"/>
+          </a:xfrm>
+          <a:prstGeom prst="diamond">
+            <a:avLst/>
+          </a:prstGeom>
+          <a:solidFill>
+            <a:srgbClr val="3D3935"/>
+          </a:solidFill>
+          <a:ln w="19050">
+            <a:solidFill>
+              <a:srgbClr val="FFFFFF"/>
+            </a:solidFill>
+            <a:prstDash val="solid"/>
+          </a:ln>
+        </p:spPr>
+      </p:sp>
+      <p:sp>
+        <p:nvSpPr>
+          <p:cNvPr id="223" name="Text 221"/>
+          <p:cNvSpPr/>
+          <p:nvPr/>
+        </p:nvSpPr>
+        <p:spPr>
+          <a:xfrm>
+            <a:off x="10099577" y="2651760"/>
+            <a:ext cx="1645920" cy="100584"/>
           </a:xfrm>
           <a:prstGeom prst="rect">
             <a:avLst/>
@@ -14050,7 +14332,7 @@
                 <a:ea typeface="Calibri" pitchFamily="34" charset="-122"/>
                 <a:cs typeface="Calibri" pitchFamily="34" charset="-120"/>
               </a:rPr>
-              <a:t>Pit works complete (pit wall)</a:t>
+              <a:t>Overall completion</a:t>
             </a:r>
             <a:endParaRPr lang="en-US" sz="550" dirty="0"/>
           </a:p>
@@ -14058,14 +14340,14 @@
       </p:sp>
       <p:sp>
         <p:nvSpPr>
-          <p:cNvPr id="216" name="Text 214"/>
-          <p:cNvSpPr/>
-          <p:nvPr/>
-        </p:nvSpPr>
-        <p:spPr>
-          <a:xfrm>
-            <a:off x="9391983" y="2697480"/>
-            <a:ext cx="1133856" cy="164592"/>
+          <p:cNvPr id="224" name="Text 222"/>
+          <p:cNvSpPr/>
+          <p:nvPr/>
+        </p:nvSpPr>
+        <p:spPr>
+          <a:xfrm>
+            <a:off x="10099577" y="2743200"/>
+            <a:ext cx="1645920" cy="128016"/>
           </a:xfrm>
           <a:prstGeom prst="rect">
             <a:avLst/>
@@ -14091,7 +14373,7 @@
                 <a:ea typeface="Calibri" pitchFamily="34" charset="-122"/>
                 <a:cs typeface="Calibri" pitchFamily="34" charset="-120"/>
               </a:rPr>
-              <a:t>11 Nov</a:t>
+              <a:t>19 Nov</a:t>
             </a:r>
             <a:endParaRPr lang="en-US" sz="750" dirty="0"/>
           </a:p>
@@ -14099,221 +14381,7 @@
       </p:sp>
       <p:sp>
         <p:nvSpPr>
-          <p:cNvPr id="217" name="Shape 215"/>
-          <p:cNvSpPr/>
-          <p:nvPr/>
-        </p:nvSpPr>
-        <p:spPr>
-          <a:xfrm>
-            <a:off x="10719787" y="2313432"/>
-            <a:ext cx="164592" cy="164592"/>
-          </a:xfrm>
-          <a:prstGeom prst="diamond">
-            <a:avLst/>
-          </a:prstGeom>
-          <a:solidFill>
-            <a:srgbClr val="3D3935"/>
-          </a:solidFill>
-          <a:ln w="19050">
-            <a:solidFill>
-              <a:srgbClr val="FFFFFF"/>
-            </a:solidFill>
-            <a:prstDash val="solid"/>
-          </a:ln>
-        </p:spPr>
-      </p:sp>
-      <p:sp>
-        <p:nvSpPr>
-          <p:cNvPr id="218" name="Text 216"/>
-          <p:cNvSpPr/>
-          <p:nvPr/>
-        </p:nvSpPr>
-        <p:spPr>
-          <a:xfrm>
-            <a:off x="10372315" y="2487168"/>
-            <a:ext cx="859536" cy="201168"/>
-          </a:xfrm>
-          <a:prstGeom prst="rect">
-            <a:avLst/>
-          </a:prstGeom>
-          <a:noFill/>
-          <a:ln/>
-        </p:spPr>
-        <p:txBody>
-          <a:bodyPr wrap="square" lIns="0" tIns="0" rIns="0" bIns="0" rtlCol="0" anchor="t">
-            <a:normAutofit/>
-          </a:bodyPr>
-          <a:lstStyle/>
-          <a:p>
-            <a:pPr algn="ctr" indent="0" marL="0">
-              <a:buNone/>
-            </a:pPr>
-            <a:r>
-              <a:rPr lang="en-US" altLang="en-US" sz="550" dirty="0">
-                <a:solidFill>
-                  <a:srgbClr val="556070"/>
-                </a:solidFill>
-                <a:latin typeface="Calibri" pitchFamily="34" charset="0"/>
-                <a:ea typeface="Calibri" pitchFamily="34" charset="-122"/>
-                <a:cs typeface="Calibri" pitchFamily="34" charset="-120"/>
-              </a:rPr>
-              <a:t>Building foundation complete</a:t>
-            </a:r>
-            <a:endParaRPr lang="en-US" sz="550" dirty="0"/>
-          </a:p>
-        </p:txBody>
-      </p:sp>
-      <p:sp>
-        <p:nvSpPr>
-          <p:cNvPr id="219" name="Text 217"/>
-          <p:cNvSpPr/>
-          <p:nvPr/>
-        </p:nvSpPr>
-        <p:spPr>
-          <a:xfrm>
-            <a:off x="10235155" y="2697480"/>
-            <a:ext cx="1133856" cy="164592"/>
-          </a:xfrm>
-          <a:prstGeom prst="rect">
-            <a:avLst/>
-          </a:prstGeom>
-          <a:noFill/>
-          <a:ln/>
-        </p:spPr>
-        <p:txBody>
-          <a:bodyPr wrap="square" lIns="0" tIns="0" rIns="0" bIns="0" rtlCol="0" anchor="ctr">
-            <a:normAutofit/>
-          </a:bodyPr>
-          <a:lstStyle/>
-          <a:p>
-            <a:pPr algn="ctr" indent="0" marL="0">
-              <a:buNone/>
-            </a:pPr>
-            <a:r>
-              <a:rPr lang="en-US" altLang="en-US" sz="750" b="1" dirty="0">
-                <a:solidFill>
-                  <a:srgbClr val="3D3935"/>
-                </a:solidFill>
-                <a:latin typeface="Calibri" pitchFamily="34" charset="0"/>
-                <a:ea typeface="Calibri" pitchFamily="34" charset="-122"/>
-                <a:cs typeface="Calibri" pitchFamily="34" charset="-120"/>
-              </a:rPr>
-              <a:t>18 Nov</a:t>
-            </a:r>
-            <a:endParaRPr lang="en-US" sz="750" dirty="0"/>
-          </a:p>
-        </p:txBody>
-      </p:sp>
-      <p:sp>
-        <p:nvSpPr>
-          <p:cNvPr id="220" name="Shape 218"/>
-          <p:cNvSpPr/>
-          <p:nvPr/>
-        </p:nvSpPr>
-        <p:spPr>
-          <a:xfrm>
-            <a:off x="11442506" y="2313432"/>
-            <a:ext cx="164592" cy="164592"/>
-          </a:xfrm>
-          <a:prstGeom prst="diamond">
-            <a:avLst/>
-          </a:prstGeom>
-          <a:solidFill>
-            <a:srgbClr val="3D3935"/>
-          </a:solidFill>
-          <a:ln w="19050">
-            <a:solidFill>
-              <a:srgbClr val="FFFFFF"/>
-            </a:solidFill>
-            <a:prstDash val="solid"/>
-          </a:ln>
-        </p:spPr>
-      </p:sp>
-      <p:sp>
-        <p:nvSpPr>
-          <p:cNvPr id="221" name="Text 219"/>
-          <p:cNvSpPr/>
-          <p:nvPr/>
-        </p:nvSpPr>
-        <p:spPr>
-          <a:xfrm>
-            <a:off x="11095034" y="2487168"/>
-            <a:ext cx="859536" cy="201168"/>
-          </a:xfrm>
-          <a:prstGeom prst="rect">
-            <a:avLst/>
-          </a:prstGeom>
-          <a:noFill/>
-          <a:ln/>
-        </p:spPr>
-        <p:txBody>
-          <a:bodyPr wrap="square" lIns="0" tIns="0" rIns="0" bIns="0" rtlCol="0" anchor="t">
-            <a:normAutofit/>
-          </a:bodyPr>
-          <a:lstStyle/>
-          <a:p>
-            <a:pPr algn="ctr" indent="0" marL="0">
-              <a:buNone/>
-            </a:pPr>
-            <a:r>
-              <a:rPr lang="en-US" altLang="en-US" sz="550" dirty="0">
-                <a:solidFill>
-                  <a:srgbClr val="556070"/>
-                </a:solidFill>
-                <a:latin typeface="Calibri" pitchFamily="34" charset="0"/>
-                <a:ea typeface="Calibri" pitchFamily="34" charset="-122"/>
-                <a:cs typeface="Calibri" pitchFamily="34" charset="-120"/>
-              </a:rPr>
-              <a:t>Overall completion</a:t>
-            </a:r>
-            <a:endParaRPr lang="en-US" sz="550" dirty="0"/>
-          </a:p>
-        </p:txBody>
-      </p:sp>
-      <p:sp>
-        <p:nvSpPr>
-          <p:cNvPr id="222" name="Text 220"/>
-          <p:cNvSpPr/>
-          <p:nvPr/>
-        </p:nvSpPr>
-        <p:spPr>
-          <a:xfrm>
-            <a:off x="10957874" y="2697480"/>
-            <a:ext cx="1133856" cy="164592"/>
-          </a:xfrm>
-          <a:prstGeom prst="rect">
-            <a:avLst/>
-          </a:prstGeom>
-          <a:noFill/>
-          <a:ln/>
-        </p:spPr>
-        <p:txBody>
-          <a:bodyPr wrap="square" lIns="0" tIns="0" rIns="0" bIns="0" rtlCol="0" anchor="ctr">
-            <a:normAutofit/>
-          </a:bodyPr>
-          <a:lstStyle/>
-          <a:p>
-            <a:pPr algn="ctr" indent="0" marL="0">
-              <a:buNone/>
-            </a:pPr>
-            <a:r>
-              <a:rPr lang="en-US" altLang="en-US" sz="750" b="1" dirty="0">
-                <a:solidFill>
-                  <a:srgbClr val="3D3935"/>
-                </a:solidFill>
-                <a:latin typeface="Calibri" pitchFamily="34" charset="0"/>
-                <a:ea typeface="Calibri" pitchFamily="34" charset="-122"/>
-                <a:cs typeface="Calibri" pitchFamily="34" charset="-120"/>
-              </a:rPr>
-              <a:t>24 Nov</a:t>
-            </a:r>
-            <a:endParaRPr lang="en-US" sz="750" dirty="0"/>
-          </a:p>
-        </p:txBody>
-      </p:sp>
-      <p:sp>
-        <p:nvSpPr>
-          <p:cNvPr id="223" name="Shape 221"/>
+          <p:cNvPr id="225" name="Shape 223"/>
           <p:cNvSpPr/>
           <p:nvPr/>
         </p:nvSpPr>
@@ -14338,7 +14406,7 @@
       </p:sp>
       <p:sp>
         <p:nvSpPr>
-          <p:cNvPr id="224" name="Shape 222"/>
+          <p:cNvPr id="226" name="Shape 224"/>
           <p:cNvSpPr/>
           <p:nvPr/>
         </p:nvSpPr>
@@ -14363,7 +14431,7 @@
       </p:sp>
       <p:sp>
         <p:nvSpPr>
-          <p:cNvPr id="225" name="Text 223"/>
+          <p:cNvPr id="227" name="Text 225"/>
           <p:cNvSpPr/>
           <p:nvPr/>
         </p:nvSpPr>
@@ -14404,7 +14472,7 @@
       </p:sp>
       <p:sp>
         <p:nvSpPr>
-          <p:cNvPr id="226" name="Text 224"/>
+          <p:cNvPr id="228" name="Text 226"/>
           <p:cNvSpPr/>
           <p:nvPr/>
         </p:nvSpPr>
@@ -14445,7 +14513,7 @@
       </p:sp>
       <p:sp>
         <p:nvSpPr>
-          <p:cNvPr id="227" name="Text 225"/>
+          <p:cNvPr id="229" name="Text 227"/>
           <p:cNvSpPr/>
           <p:nvPr/>
         </p:nvSpPr>
@@ -14486,7 +14554,7 @@
       </p:sp>
       <p:sp>
         <p:nvSpPr>
-          <p:cNvPr id="228" name="Text 226"/>
+          <p:cNvPr id="230" name="Text 228"/>
           <p:cNvSpPr/>
           <p:nvPr/>
         </p:nvSpPr>
@@ -14519,7 +14587,7 @@
                 <a:ea typeface="Calibri" pitchFamily="34" charset="-122"/>
                 <a:cs typeface="Calibri" pitchFamily="34" charset="-120"/>
               </a:rPr>
-              <a:t>6</a:t>
+              <a:t>4</a:t>
             </a:r>
             <a:endParaRPr lang="en-US" sz="900" dirty="0"/>
           </a:p>
@@ -14527,7 +14595,7 @@
       </p:sp>
       <p:sp>
         <p:nvSpPr>
-          <p:cNvPr id="229" name="Text 227"/>
+          <p:cNvPr id="231" name="Text 229"/>
           <p:cNvSpPr/>
           <p:nvPr/>
         </p:nvSpPr>
@@ -14568,7 +14636,7 @@
       </p:sp>
       <p:sp>
         <p:nvSpPr>
-          <p:cNvPr id="230" name="Text 228"/>
+          <p:cNvPr id="232" name="Text 230"/>
           <p:cNvSpPr/>
           <p:nvPr/>
         </p:nvSpPr>
@@ -14601,7 +14669,7 @@
                 <a:ea typeface="Calibri" pitchFamily="34" charset="-122"/>
                 <a:cs typeface="Calibri" pitchFamily="34" charset="-120"/>
               </a:rPr>
-              <a:t>19 Oct</a:t>
+              <a:t>17 Oct</a:t>
             </a:r>
             <a:endParaRPr lang="en-US" sz="700" dirty="0"/>
           </a:p>
@@ -14609,14 +14677,41 @@
       </p:sp>
       <p:sp>
         <p:nvSpPr>
-          <p:cNvPr id="231" name="Shape 229"/>
+          <p:cNvPr id="233" name="Shape 231"/>
+          <p:cNvSpPr/>
+          <p:nvPr/>
+        </p:nvSpPr>
+        <p:spPr>
+          <a:xfrm>
+            <a:off x="6405543" y="3041142"/>
+            <a:ext cx="843172" cy="32004"/>
+          </a:xfrm>
+          <a:prstGeom prst="roundRect">
+            <a:avLst>
+              <a:gd name="adj" fmla="val 42857"/>
+            </a:avLst>
+          </a:prstGeom>
+          <a:solidFill>
+            <a:srgbClr val="8A959C"/>
+          </a:solidFill>
+          <a:ln w="12700">
+            <a:solidFill>
+              <a:srgbClr val="8A959C"/>
+            </a:solidFill>
+            <a:prstDash val="solid"/>
+          </a:ln>
+        </p:spPr>
+      </p:sp>
+      <p:sp>
+        <p:nvSpPr>
+          <p:cNvPr id="234" name="Shape 232"/>
           <p:cNvSpPr/>
           <p:nvPr/>
         </p:nvSpPr>
         <p:spPr>
           <a:xfrm>
             <a:off x="6405543" y="2928747"/>
-            <a:ext cx="843172" cy="64008"/>
+            <a:ext cx="602266" cy="64008"/>
           </a:xfrm>
           <a:prstGeom prst="rect">
             <a:avLst/>
@@ -14634,7 +14729,7 @@
       </p:sp>
       <p:sp>
         <p:nvSpPr>
-          <p:cNvPr id="232" name="Shape 230"/>
+          <p:cNvPr id="235" name="Shape 233"/>
           <p:cNvSpPr/>
           <p:nvPr/>
         </p:nvSpPr>
@@ -14659,13 +14754,13 @@
       </p:sp>
       <p:sp>
         <p:nvSpPr>
-          <p:cNvPr id="233" name="Shape 231"/>
+          <p:cNvPr id="236" name="Shape 234"/>
           <p:cNvSpPr/>
           <p:nvPr/>
         </p:nvSpPr>
         <p:spPr>
           <a:xfrm flipV="1">
-            <a:off x="7184707" y="2992755"/>
+            <a:off x="6943801" y="2992755"/>
             <a:ext cx="64008" cy="54864"/>
           </a:xfrm>
           <a:prstGeom prst="triangle">
@@ -14684,13 +14779,13 @@
       </p:sp>
       <p:sp>
         <p:nvSpPr>
-          <p:cNvPr id="234" name="Text 232"/>
-          <p:cNvSpPr/>
-          <p:nvPr/>
-        </p:nvSpPr>
-        <p:spPr>
-          <a:xfrm>
-            <a:off x="7294435" y="2880360"/>
+          <p:cNvPr id="237" name="Text 235"/>
+          <p:cNvSpPr/>
+          <p:nvPr/>
+        </p:nvSpPr>
+        <p:spPr>
+          <a:xfrm>
+            <a:off x="7053529" y="2880360"/>
             <a:ext cx="548640" cy="215646"/>
           </a:xfrm>
           <a:prstGeom prst="rect">
@@ -14717,7 +14812,7 @@
                 <a:ea typeface="Calibri" pitchFamily="34" charset="-122"/>
                 <a:cs typeface="Calibri" pitchFamily="34" charset="-120"/>
               </a:rPr>
-              <a:t>6 d</a:t>
+              <a:t>4 d</a:t>
             </a:r>
             <a:endParaRPr lang="en-US" sz="750" dirty="0"/>
           </a:p>
@@ -14725,7 +14820,7 @@
       </p:sp>
       <p:sp>
         <p:nvSpPr>
-          <p:cNvPr id="235" name="Shape 233"/>
+          <p:cNvPr id="238" name="Shape 236"/>
           <p:cNvSpPr/>
           <p:nvPr/>
         </p:nvSpPr>
@@ -14750,7 +14845,7 @@
       </p:sp>
       <p:sp>
         <p:nvSpPr>
-          <p:cNvPr id="236" name="Shape 234"/>
+          <p:cNvPr id="239" name="Shape 237"/>
           <p:cNvSpPr/>
           <p:nvPr/>
         </p:nvSpPr>
@@ -14777,7 +14872,7 @@
       </p:sp>
       <p:sp>
         <p:nvSpPr>
-          <p:cNvPr id="237" name="Text 235"/>
+          <p:cNvPr id="240" name="Text 238"/>
           <p:cNvSpPr/>
           <p:nvPr/>
         </p:nvSpPr>
@@ -14818,7 +14913,7 @@
       </p:sp>
       <p:sp>
         <p:nvSpPr>
-          <p:cNvPr id="238" name="Text 236"/>
+          <p:cNvPr id="241" name="Text 239"/>
           <p:cNvSpPr/>
           <p:nvPr/>
         </p:nvSpPr>
@@ -14859,7 +14954,7 @@
       </p:sp>
       <p:sp>
         <p:nvSpPr>
-          <p:cNvPr id="239" name="Text 237"/>
+          <p:cNvPr id="242" name="Text 240"/>
           <p:cNvSpPr/>
           <p:nvPr/>
         </p:nvSpPr>
@@ -14900,7 +14995,7 @@
       </p:sp>
       <p:sp>
         <p:nvSpPr>
-          <p:cNvPr id="240" name="Text 238"/>
+          <p:cNvPr id="243" name="Text 241"/>
           <p:cNvSpPr/>
           <p:nvPr/>
         </p:nvSpPr>
@@ -14941,7 +15036,7 @@
       </p:sp>
       <p:sp>
         <p:nvSpPr>
-          <p:cNvPr id="241" name="Text 239"/>
+          <p:cNvPr id="244" name="Text 242"/>
           <p:cNvSpPr/>
           <p:nvPr/>
         </p:nvSpPr>
@@ -14982,7 +15077,7 @@
       </p:sp>
       <p:sp>
         <p:nvSpPr>
-          <p:cNvPr id="242" name="Text 240"/>
+          <p:cNvPr id="245" name="Text 243"/>
           <p:cNvSpPr/>
           <p:nvPr/>
         </p:nvSpPr>
@@ -15023,7 +15118,7 @@
       </p:sp>
       <p:sp>
         <p:nvSpPr>
-          <p:cNvPr id="243" name="Shape 241"/>
+          <p:cNvPr id="246" name="Shape 244"/>
           <p:cNvSpPr/>
           <p:nvPr/>
         </p:nvSpPr>
@@ -15057,7 +15152,7 @@
       </p:sp>
       <p:sp>
         <p:nvSpPr>
-          <p:cNvPr id="244" name="Shape 242"/>
+          <p:cNvPr id="247" name="Shape 245"/>
           <p:cNvSpPr/>
           <p:nvPr/>
         </p:nvSpPr>
@@ -15082,7 +15177,7 @@
       </p:sp>
       <p:sp>
         <p:nvSpPr>
-          <p:cNvPr id="245" name="Shape 243"/>
+          <p:cNvPr id="248" name="Shape 246"/>
           <p:cNvSpPr/>
           <p:nvPr/>
         </p:nvSpPr>
@@ -15109,7 +15204,7 @@
       </p:sp>
       <p:sp>
         <p:nvSpPr>
-          <p:cNvPr id="246" name="Text 244"/>
+          <p:cNvPr id="249" name="Text 247"/>
           <p:cNvSpPr/>
           <p:nvPr/>
         </p:nvSpPr>
@@ -15150,7 +15245,7 @@
       </p:sp>
       <p:sp>
         <p:nvSpPr>
-          <p:cNvPr id="247" name="Text 245"/>
+          <p:cNvPr id="250" name="Text 248"/>
           <p:cNvSpPr/>
           <p:nvPr/>
         </p:nvSpPr>
@@ -15191,7 +15286,7 @@
       </p:sp>
       <p:sp>
         <p:nvSpPr>
-          <p:cNvPr id="248" name="Text 246"/>
+          <p:cNvPr id="251" name="Text 249"/>
           <p:cNvSpPr/>
           <p:nvPr/>
         </p:nvSpPr>
@@ -15232,7 +15327,7 @@
       </p:sp>
       <p:sp>
         <p:nvSpPr>
-          <p:cNvPr id="249" name="Text 247"/>
+          <p:cNvPr id="252" name="Text 250"/>
           <p:cNvSpPr/>
           <p:nvPr/>
         </p:nvSpPr>
@@ -15265,7 +15360,7 @@
                 <a:ea typeface="Calibri" pitchFamily="34" charset="-122"/>
                 <a:cs typeface="Calibri" pitchFamily="34" charset="-120"/>
               </a:rPr>
-              <a:t>3</a:t>
+              <a:t>2</a:t>
             </a:r>
             <a:endParaRPr lang="en-US" sz="900" dirty="0"/>
           </a:p>
@@ -15273,7 +15368,7 @@
       </p:sp>
       <p:sp>
         <p:nvSpPr>
-          <p:cNvPr id="250" name="Text 248"/>
+          <p:cNvPr id="253" name="Text 251"/>
           <p:cNvSpPr/>
           <p:nvPr/>
         </p:nvSpPr>
@@ -15314,7 +15409,7 @@
       </p:sp>
       <p:sp>
         <p:nvSpPr>
-          <p:cNvPr id="251" name="Text 249"/>
+          <p:cNvPr id="254" name="Text 252"/>
           <p:cNvSpPr/>
           <p:nvPr/>
         </p:nvSpPr>
@@ -15347,7 +15442,7 @@
                 <a:ea typeface="Calibri" pitchFamily="34" charset="-122"/>
                 <a:cs typeface="Calibri" pitchFamily="34" charset="-120"/>
               </a:rPr>
-              <a:t>17 Oct</a:t>
+              <a:t>15 Oct</a:t>
             </a:r>
             <a:endParaRPr lang="en-US" sz="700" dirty="0"/>
           </a:p>
@@ -15355,14 +15450,41 @@
       </p:sp>
       <p:sp>
         <p:nvSpPr>
-          <p:cNvPr id="252" name="Shape 250"/>
+          <p:cNvPr id="255" name="Shape 253"/>
+          <p:cNvSpPr/>
+          <p:nvPr/>
+        </p:nvSpPr>
+        <p:spPr>
+          <a:xfrm>
+            <a:off x="6525997" y="3472434"/>
+            <a:ext cx="481813" cy="32004"/>
+          </a:xfrm>
+          <a:prstGeom prst="roundRect">
+            <a:avLst>
+              <a:gd name="adj" fmla="val 42857"/>
+            </a:avLst>
+          </a:prstGeom>
+          <a:solidFill>
+            <a:srgbClr val="8A959C"/>
+          </a:solidFill>
+          <a:ln w="12700">
+            <a:solidFill>
+              <a:srgbClr val="8A959C"/>
+            </a:solidFill>
+            <a:prstDash val="solid"/>
+          </a:ln>
+        </p:spPr>
+      </p:sp>
+      <p:sp>
+        <p:nvSpPr>
+          <p:cNvPr id="256" name="Shape 254"/>
           <p:cNvSpPr/>
           <p:nvPr/>
         </p:nvSpPr>
         <p:spPr>
           <a:xfrm>
             <a:off x="6525997" y="3356938"/>
-            <a:ext cx="481813" cy="125075"/>
+            <a:ext cx="240906" cy="125075"/>
           </a:xfrm>
           <a:prstGeom prst="roundRect">
             <a:avLst>
@@ -15389,48 +15511,7 @@
       </p:sp>
       <p:sp>
         <p:nvSpPr>
-          <p:cNvPr id="253" name="Text 251"/>
-          <p:cNvSpPr/>
-          <p:nvPr/>
-        </p:nvSpPr>
-        <p:spPr>
-          <a:xfrm>
-            <a:off x="6525997" y="3356938"/>
-            <a:ext cx="481813" cy="125075"/>
-          </a:xfrm>
-          <a:prstGeom prst="rect">
-            <a:avLst/>
-          </a:prstGeom>
-          <a:noFill/>
-          <a:ln/>
-        </p:spPr>
-        <p:txBody>
-          <a:bodyPr wrap="square" lIns="0" tIns="0" rIns="0" bIns="0" rtlCol="0" anchor="ctr">
-            <a:normAutofit/>
-          </a:bodyPr>
-          <a:lstStyle/>
-          <a:p>
-            <a:pPr algn="ctr" indent="0" marL="0">
-              <a:buNone/>
-            </a:pPr>
-            <a:r>
-              <a:rPr lang="en-US" altLang="en-US" sz="700" b="1" dirty="0">
-                <a:solidFill>
-                  <a:srgbClr val="FFFFFF"/>
-                </a:solidFill>
-                <a:latin typeface="Calibri" pitchFamily="34" charset="0"/>
-                <a:ea typeface="Calibri" pitchFamily="34" charset="-122"/>
-                <a:cs typeface="Calibri" pitchFamily="34" charset="-120"/>
-              </a:rPr>
-              <a:t>3 d</a:t>
-            </a:r>
-            <a:endParaRPr lang="en-US" sz="700" dirty="0"/>
-          </a:p>
-        </p:txBody>
-      </p:sp>
-      <p:sp>
-        <p:nvSpPr>
-          <p:cNvPr id="254" name="Shape 252"/>
+          <p:cNvPr id="257" name="Shape 255"/>
           <p:cNvSpPr/>
           <p:nvPr/>
         </p:nvSpPr>
@@ -15455,7 +15536,7 @@
       </p:sp>
       <p:sp>
         <p:nvSpPr>
-          <p:cNvPr id="255" name="Shape 253"/>
+          <p:cNvPr id="258" name="Shape 256"/>
           <p:cNvSpPr/>
           <p:nvPr/>
         </p:nvSpPr>
@@ -15482,7 +15563,7 @@
       </p:sp>
       <p:sp>
         <p:nvSpPr>
-          <p:cNvPr id="256" name="Text 254"/>
+          <p:cNvPr id="259" name="Text 257"/>
           <p:cNvSpPr/>
           <p:nvPr/>
         </p:nvSpPr>
@@ -15523,7 +15604,7 @@
       </p:sp>
       <p:sp>
         <p:nvSpPr>
-          <p:cNvPr id="257" name="Text 255"/>
+          <p:cNvPr id="260" name="Text 258"/>
           <p:cNvSpPr/>
           <p:nvPr/>
         </p:nvSpPr>
@@ -15564,7 +15645,7 @@
       </p:sp>
       <p:sp>
         <p:nvSpPr>
-          <p:cNvPr id="258" name="Text 256"/>
+          <p:cNvPr id="261" name="Text 259"/>
           <p:cNvSpPr/>
           <p:nvPr/>
         </p:nvSpPr>
@@ -15605,7 +15686,7 @@
       </p:sp>
       <p:sp>
         <p:nvSpPr>
-          <p:cNvPr id="259" name="Text 257"/>
+          <p:cNvPr id="262" name="Text 260"/>
           <p:cNvSpPr/>
           <p:nvPr/>
         </p:nvSpPr>
@@ -15638,7 +15719,7 @@
                 <a:ea typeface="Calibri" pitchFamily="34" charset="-122"/>
                 <a:cs typeface="Calibri" pitchFamily="34" charset="-120"/>
               </a:rPr>
-              <a:t>3</a:t>
+              <a:t>2</a:t>
             </a:r>
             <a:endParaRPr lang="en-US" sz="900" dirty="0"/>
           </a:p>
@@ -15646,7 +15727,7 @@
       </p:sp>
       <p:sp>
         <p:nvSpPr>
-          <p:cNvPr id="260" name="Text 258"/>
+          <p:cNvPr id="263" name="Text 261"/>
           <p:cNvSpPr/>
           <p:nvPr/>
         </p:nvSpPr>
@@ -15687,7 +15768,7 @@
       </p:sp>
       <p:sp>
         <p:nvSpPr>
-          <p:cNvPr id="261" name="Text 259"/>
+          <p:cNvPr id="264" name="Text 262"/>
           <p:cNvSpPr/>
           <p:nvPr/>
         </p:nvSpPr>
@@ -15720,7 +15801,7 @@
                 <a:ea typeface="Calibri" pitchFamily="34" charset="-122"/>
                 <a:cs typeface="Calibri" pitchFamily="34" charset="-120"/>
               </a:rPr>
-              <a:t>18 Oct</a:t>
+              <a:t>17 Oct</a:t>
             </a:r>
             <a:endParaRPr lang="en-US" sz="700" dirty="0"/>
           </a:p>
@@ -15728,14 +15809,41 @@
       </p:sp>
       <p:sp>
         <p:nvSpPr>
-          <p:cNvPr id="262" name="Shape 260"/>
+          <p:cNvPr id="265" name="Shape 263"/>
+          <p:cNvSpPr/>
+          <p:nvPr/>
+        </p:nvSpPr>
+        <p:spPr>
+          <a:xfrm>
+            <a:off x="6646450" y="3688080"/>
+            <a:ext cx="481813" cy="32004"/>
+          </a:xfrm>
+          <a:prstGeom prst="roundRect">
+            <a:avLst>
+              <a:gd name="adj" fmla="val 42857"/>
+            </a:avLst>
+          </a:prstGeom>
+          <a:solidFill>
+            <a:srgbClr val="8A959C"/>
+          </a:solidFill>
+          <a:ln w="12700">
+            <a:solidFill>
+              <a:srgbClr val="8A959C"/>
+            </a:solidFill>
+            <a:prstDash val="solid"/>
+          </a:ln>
+        </p:spPr>
+      </p:sp>
+      <p:sp>
+        <p:nvSpPr>
+          <p:cNvPr id="266" name="Shape 264"/>
           <p:cNvSpPr/>
           <p:nvPr/>
         </p:nvSpPr>
         <p:spPr>
           <a:xfrm>
             <a:off x="6646450" y="3572584"/>
-            <a:ext cx="481813" cy="125075"/>
+            <a:ext cx="361359" cy="125075"/>
           </a:xfrm>
           <a:prstGeom prst="roundRect">
             <a:avLst>
@@ -15762,14 +15870,14 @@
       </p:sp>
       <p:sp>
         <p:nvSpPr>
-          <p:cNvPr id="263" name="Text 261"/>
+          <p:cNvPr id="267" name="Text 265"/>
           <p:cNvSpPr/>
           <p:nvPr/>
         </p:nvSpPr>
         <p:spPr>
           <a:xfrm>
             <a:off x="6646450" y="3572584"/>
-            <a:ext cx="481813" cy="125075"/>
+            <a:ext cx="361359" cy="125075"/>
           </a:xfrm>
           <a:prstGeom prst="rect">
             <a:avLst/>
@@ -15795,7 +15903,7 @@
                 <a:ea typeface="Calibri" pitchFamily="34" charset="-122"/>
                 <a:cs typeface="Calibri" pitchFamily="34" charset="-120"/>
               </a:rPr>
-              <a:t>3 d</a:t>
+              <a:t>2 d</a:t>
             </a:r>
             <a:endParaRPr lang="en-US" sz="700" dirty="0"/>
           </a:p>
@@ -15803,7 +15911,7 @@
       </p:sp>
       <p:sp>
         <p:nvSpPr>
-          <p:cNvPr id="264" name="Shape 262"/>
+          <p:cNvPr id="268" name="Shape 266"/>
           <p:cNvSpPr/>
           <p:nvPr/>
         </p:nvSpPr>
@@ -15828,7 +15936,7 @@
       </p:sp>
       <p:sp>
         <p:nvSpPr>
-          <p:cNvPr id="265" name="Shape 263"/>
+          <p:cNvPr id="269" name="Shape 267"/>
           <p:cNvSpPr/>
           <p:nvPr/>
         </p:nvSpPr>
@@ -15855,7 +15963,7 @@
       </p:sp>
       <p:sp>
         <p:nvSpPr>
-          <p:cNvPr id="266" name="Text 264"/>
+          <p:cNvPr id="270" name="Text 268"/>
           <p:cNvSpPr/>
           <p:nvPr/>
         </p:nvSpPr>
@@ -15896,7 +16004,7 @@
       </p:sp>
       <p:sp>
         <p:nvSpPr>
-          <p:cNvPr id="267" name="Text 265"/>
+          <p:cNvPr id="271" name="Text 269"/>
           <p:cNvSpPr/>
           <p:nvPr/>
         </p:nvSpPr>
@@ -15937,7 +16045,7 @@
       </p:sp>
       <p:sp>
         <p:nvSpPr>
-          <p:cNvPr id="268" name="Text 266"/>
+          <p:cNvPr id="272" name="Text 270"/>
           <p:cNvSpPr/>
           <p:nvPr/>
         </p:nvSpPr>
@@ -15978,7 +16086,7 @@
       </p:sp>
       <p:sp>
         <p:nvSpPr>
-          <p:cNvPr id="269" name="Text 267"/>
+          <p:cNvPr id="273" name="Text 271"/>
           <p:cNvSpPr/>
           <p:nvPr/>
         </p:nvSpPr>
@@ -16011,7 +16119,7 @@
                 <a:ea typeface="Calibri" pitchFamily="34" charset="-122"/>
                 <a:cs typeface="Calibri" pitchFamily="34" charset="-120"/>
               </a:rPr>
-              <a:t>3</a:t>
+              <a:t>1</a:t>
             </a:r>
             <a:endParaRPr lang="en-US" sz="900" dirty="0"/>
           </a:p>
@@ -16019,7 +16127,7 @@
       </p:sp>
       <p:sp>
         <p:nvSpPr>
-          <p:cNvPr id="270" name="Text 268"/>
+          <p:cNvPr id="274" name="Text 272"/>
           <p:cNvSpPr/>
           <p:nvPr/>
         </p:nvSpPr>
@@ -16060,7 +16168,7 @@
       </p:sp>
       <p:sp>
         <p:nvSpPr>
-          <p:cNvPr id="271" name="Text 269"/>
+          <p:cNvPr id="275" name="Text 273"/>
           <p:cNvSpPr/>
           <p:nvPr/>
         </p:nvSpPr>
@@ -16093,7 +16201,7 @@
                 <a:ea typeface="Calibri" pitchFamily="34" charset="-122"/>
                 <a:cs typeface="Calibri" pitchFamily="34" charset="-120"/>
               </a:rPr>
-              <a:t>19 Oct</a:t>
+              <a:t>17 Oct</a:t>
             </a:r>
             <a:endParaRPr lang="en-US" sz="700" dirty="0"/>
           </a:p>
@@ -16101,18 +16209,45 @@
       </p:sp>
       <p:sp>
         <p:nvSpPr>
-          <p:cNvPr id="272" name="Shape 270"/>
-          <p:cNvSpPr/>
-          <p:nvPr/>
-        </p:nvSpPr>
-        <p:spPr>
-          <a:xfrm>
-            <a:off x="6887356" y="3788230"/>
-            <a:ext cx="361359" cy="125075"/>
+          <p:cNvPr id="276" name="Shape 274"/>
+          <p:cNvSpPr/>
+          <p:nvPr/>
+        </p:nvSpPr>
+        <p:spPr>
+          <a:xfrm>
+            <a:off x="6887356" y="3903726"/>
+            <a:ext cx="361359" cy="32004"/>
           </a:xfrm>
           <a:prstGeom prst="roundRect">
             <a:avLst>
-              <a:gd name="adj" fmla="val 29243"/>
+              <a:gd name="adj" fmla="val 42857"/>
+            </a:avLst>
+          </a:prstGeom>
+          <a:solidFill>
+            <a:srgbClr val="8A959C"/>
+          </a:solidFill>
+          <a:ln w="12700">
+            <a:solidFill>
+              <a:srgbClr val="8A959C"/>
+            </a:solidFill>
+            <a:prstDash val="solid"/>
+          </a:ln>
+        </p:spPr>
+      </p:sp>
+      <p:sp>
+        <p:nvSpPr>
+          <p:cNvPr id="277" name="Shape 275"/>
+          <p:cNvSpPr/>
+          <p:nvPr/>
+        </p:nvSpPr>
+        <p:spPr>
+          <a:xfrm>
+            <a:off x="6887356" y="3788230"/>
+            <a:ext cx="120453" cy="125075"/>
+          </a:xfrm>
+          <a:prstGeom prst="roundRect">
+            <a:avLst>
+              <a:gd name="adj" fmla="val 30365"/>
             </a:avLst>
           </a:prstGeom>
           <a:solidFill>
@@ -16135,48 +16270,7 @@
       </p:sp>
       <p:sp>
         <p:nvSpPr>
-          <p:cNvPr id="273" name="Text 271"/>
-          <p:cNvSpPr/>
-          <p:nvPr/>
-        </p:nvSpPr>
-        <p:spPr>
-          <a:xfrm>
-            <a:off x="6887356" y="3788230"/>
-            <a:ext cx="361359" cy="125075"/>
-          </a:xfrm>
-          <a:prstGeom prst="rect">
-            <a:avLst/>
-          </a:prstGeom>
-          <a:noFill/>
-          <a:ln/>
-        </p:spPr>
-        <p:txBody>
-          <a:bodyPr wrap="square" lIns="0" tIns="0" rIns="0" bIns="0" rtlCol="0" anchor="ctr">
-            <a:normAutofit/>
-          </a:bodyPr>
-          <a:lstStyle/>
-          <a:p>
-            <a:pPr algn="ctr" indent="0" marL="0">
-              <a:buNone/>
-            </a:pPr>
-            <a:r>
-              <a:rPr lang="en-US" altLang="en-US" sz="700" b="1" dirty="0">
-                <a:solidFill>
-                  <a:srgbClr val="FFFFFF"/>
-                </a:solidFill>
-                <a:latin typeface="Calibri" pitchFamily="34" charset="0"/>
-                <a:ea typeface="Calibri" pitchFamily="34" charset="-122"/>
-                <a:cs typeface="Calibri" pitchFamily="34" charset="-120"/>
-              </a:rPr>
-              <a:t>3 d</a:t>
-            </a:r>
-            <a:endParaRPr lang="en-US" sz="700" dirty="0"/>
-          </a:p>
-        </p:txBody>
-      </p:sp>
-      <p:sp>
-        <p:nvSpPr>
-          <p:cNvPr id="274" name="Shape 272"/>
+          <p:cNvPr id="278" name="Shape 276"/>
           <p:cNvSpPr/>
           <p:nvPr/>
         </p:nvSpPr>
@@ -16201,7 +16295,7 @@
       </p:sp>
       <p:sp>
         <p:nvSpPr>
-          <p:cNvPr id="275" name="Shape 273"/>
+          <p:cNvPr id="279" name="Shape 277"/>
           <p:cNvSpPr/>
           <p:nvPr/>
         </p:nvSpPr>
@@ -16228,7 +16322,7 @@
       </p:sp>
       <p:sp>
         <p:nvSpPr>
-          <p:cNvPr id="276" name="Text 274"/>
+          <p:cNvPr id="280" name="Text 278"/>
           <p:cNvSpPr/>
           <p:nvPr/>
         </p:nvSpPr>
@@ -16269,7 +16363,7 @@
       </p:sp>
       <p:sp>
         <p:nvSpPr>
-          <p:cNvPr id="277" name="Text 275"/>
+          <p:cNvPr id="281" name="Text 279"/>
           <p:cNvSpPr/>
           <p:nvPr/>
         </p:nvSpPr>
@@ -16310,7 +16404,7 @@
       </p:sp>
       <p:sp>
         <p:nvSpPr>
-          <p:cNvPr id="278" name="Text 276"/>
+          <p:cNvPr id="282" name="Text 280"/>
           <p:cNvSpPr/>
           <p:nvPr/>
         </p:nvSpPr>
@@ -16343,7 +16437,7 @@
                 <a:ea typeface="Calibri" pitchFamily="34" charset="-122"/>
                 <a:cs typeface="Calibri" pitchFamily="34" charset="-120"/>
               </a:rPr>
-              <a:t>A4 · SS +1</a:t>
+              <a:t>A4 · SS +0</a:t>
             </a:r>
             <a:endParaRPr lang="en-US" sz="700" dirty="0"/>
           </a:p>
@@ -16351,7 +16445,7 @@
       </p:sp>
       <p:sp>
         <p:nvSpPr>
-          <p:cNvPr id="279" name="Text 277"/>
+          <p:cNvPr id="283" name="Text 281"/>
           <p:cNvSpPr/>
           <p:nvPr/>
         </p:nvSpPr>
@@ -16384,7 +16478,7 @@
                 <a:ea typeface="Calibri" pitchFamily="34" charset="-122"/>
                 <a:cs typeface="Calibri" pitchFamily="34" charset="-120"/>
               </a:rPr>
-              <a:t>2</a:t>
+              <a:t>1</a:t>
             </a:r>
             <a:endParaRPr lang="en-US" sz="900" dirty="0"/>
           </a:p>
@@ -16392,7 +16486,7 @@
       </p:sp>
       <p:sp>
         <p:nvSpPr>
-          <p:cNvPr id="280" name="Text 278"/>
+          <p:cNvPr id="284" name="Text 282"/>
           <p:cNvSpPr/>
           <p:nvPr/>
         </p:nvSpPr>
@@ -16425,7 +16519,7 @@
                 <a:ea typeface="Calibri" pitchFamily="34" charset="-122"/>
                 <a:cs typeface="Calibri" pitchFamily="34" charset="-120"/>
               </a:rPr>
-              <a:t>18 Oct</a:t>
+              <a:t>17 Oct</a:t>
             </a:r>
             <a:endParaRPr lang="en-US" sz="700" dirty="0"/>
           </a:p>
@@ -16433,7 +16527,7 @@
       </p:sp>
       <p:sp>
         <p:nvSpPr>
-          <p:cNvPr id="281" name="Text 279"/>
+          <p:cNvPr id="285" name="Text 283"/>
           <p:cNvSpPr/>
           <p:nvPr/>
         </p:nvSpPr>
@@ -16466,7 +16560,7 @@
                 <a:ea typeface="Calibri" pitchFamily="34" charset="-122"/>
                 <a:cs typeface="Calibri" pitchFamily="34" charset="-120"/>
               </a:rPr>
-              <a:t>19 Oct</a:t>
+              <a:t>17 Oct</a:t>
             </a:r>
             <a:endParaRPr lang="en-US" sz="700" dirty="0"/>
           </a:p>
@@ -16474,18 +16568,45 @@
       </p:sp>
       <p:sp>
         <p:nvSpPr>
-          <p:cNvPr id="282" name="Shape 280"/>
-          <p:cNvSpPr/>
-          <p:nvPr/>
-        </p:nvSpPr>
-        <p:spPr>
-          <a:xfrm>
-            <a:off x="7007809" y="4003876"/>
-            <a:ext cx="240906" cy="125075"/>
+          <p:cNvPr id="286" name="Shape 284"/>
+          <p:cNvSpPr/>
+          <p:nvPr/>
+        </p:nvSpPr>
+        <p:spPr>
+          <a:xfrm>
+            <a:off x="7007809" y="4119372"/>
+            <a:ext cx="240906" cy="32004"/>
           </a:xfrm>
           <a:prstGeom prst="roundRect">
             <a:avLst>
-              <a:gd name="adj" fmla="val 29243"/>
+              <a:gd name="adj" fmla="val 42857"/>
+            </a:avLst>
+          </a:prstGeom>
+          <a:solidFill>
+            <a:srgbClr val="8A959C"/>
+          </a:solidFill>
+          <a:ln w="12700">
+            <a:solidFill>
+              <a:srgbClr val="8A959C"/>
+            </a:solidFill>
+            <a:prstDash val="solid"/>
+          </a:ln>
+        </p:spPr>
+      </p:sp>
+      <p:sp>
+        <p:nvSpPr>
+          <p:cNvPr id="287" name="Shape 285"/>
+          <p:cNvSpPr/>
+          <p:nvPr/>
+        </p:nvSpPr>
+        <p:spPr>
+          <a:xfrm>
+            <a:off x="6887356" y="4003876"/>
+            <a:ext cx="120453" cy="125075"/>
+          </a:xfrm>
+          <a:prstGeom prst="roundRect">
+            <a:avLst>
+              <a:gd name="adj" fmla="val 30365"/>
             </a:avLst>
           </a:prstGeom>
           <a:solidFill>
@@ -16508,7 +16629,7 @@
       </p:sp>
       <p:sp>
         <p:nvSpPr>
-          <p:cNvPr id="283" name="Shape 281"/>
+          <p:cNvPr id="288" name="Shape 286"/>
           <p:cNvSpPr/>
           <p:nvPr/>
         </p:nvSpPr>
@@ -16533,7 +16654,7 @@
       </p:sp>
       <p:sp>
         <p:nvSpPr>
-          <p:cNvPr id="284" name="Shape 282"/>
+          <p:cNvPr id="289" name="Shape 287"/>
           <p:cNvSpPr/>
           <p:nvPr/>
         </p:nvSpPr>
@@ -16558,7 +16679,7 @@
       </p:sp>
       <p:sp>
         <p:nvSpPr>
-          <p:cNvPr id="285" name="Text 283"/>
+          <p:cNvPr id="290" name="Text 288"/>
           <p:cNvSpPr/>
           <p:nvPr/>
         </p:nvSpPr>
@@ -16599,7 +16720,7 @@
       </p:sp>
       <p:sp>
         <p:nvSpPr>
-          <p:cNvPr id="286" name="Text 284"/>
+          <p:cNvPr id="291" name="Text 289"/>
           <p:cNvSpPr/>
           <p:nvPr/>
         </p:nvSpPr>
@@ -16640,7 +16761,7 @@
       </p:sp>
       <p:sp>
         <p:nvSpPr>
-          <p:cNvPr id="287" name="Text 285"/>
+          <p:cNvPr id="292" name="Text 290"/>
           <p:cNvSpPr/>
           <p:nvPr/>
         </p:nvSpPr>
@@ -16673,7 +16794,7 @@
                 <a:ea typeface="Calibri" pitchFamily="34" charset="-122"/>
                 <a:cs typeface="Calibri" pitchFamily="34" charset="-120"/>
               </a:rPr>
-              <a:t>A · SS +6</a:t>
+              <a:t>A · SS +4</a:t>
             </a:r>
             <a:endParaRPr lang="en-US" sz="700" dirty="0"/>
           </a:p>
@@ -16681,7 +16802,7 @@
       </p:sp>
       <p:sp>
         <p:nvSpPr>
-          <p:cNvPr id="288" name="Text 286"/>
+          <p:cNvPr id="293" name="Text 291"/>
           <p:cNvSpPr/>
           <p:nvPr/>
         </p:nvSpPr>
@@ -16714,7 +16835,7 @@
                 <a:ea typeface="Calibri" pitchFamily="34" charset="-122"/>
                 <a:cs typeface="Calibri" pitchFamily="34" charset="-120"/>
               </a:rPr>
-              <a:t>2</a:t>
+              <a:t>1</a:t>
             </a:r>
             <a:endParaRPr lang="en-US" sz="900" dirty="0"/>
           </a:p>
@@ -16722,7 +16843,7 @@
       </p:sp>
       <p:sp>
         <p:nvSpPr>
-          <p:cNvPr id="289" name="Text 287"/>
+          <p:cNvPr id="294" name="Text 292"/>
           <p:cNvSpPr/>
           <p:nvPr/>
         </p:nvSpPr>
@@ -16755,7 +16876,7 @@
                 <a:ea typeface="Calibri" pitchFamily="34" charset="-122"/>
                 <a:cs typeface="Calibri" pitchFamily="34" charset="-120"/>
               </a:rPr>
-              <a:t>20 Oct</a:t>
+              <a:t>18 Oct</a:t>
             </a:r>
             <a:endParaRPr lang="en-US" sz="700" dirty="0"/>
           </a:p>
@@ -16763,7 +16884,7 @@
       </p:sp>
       <p:sp>
         <p:nvSpPr>
-          <p:cNvPr id="290" name="Text 288"/>
+          <p:cNvPr id="295" name="Text 293"/>
           <p:cNvSpPr/>
           <p:nvPr/>
         </p:nvSpPr>
@@ -16796,7 +16917,7 @@
                 <a:ea typeface="Calibri" pitchFamily="34" charset="-122"/>
                 <a:cs typeface="Calibri" pitchFamily="34" charset="-120"/>
               </a:rPr>
-              <a:t>21 Oct</a:t>
+              <a:t>18 Oct</a:t>
             </a:r>
             <a:endParaRPr lang="en-US" sz="700" dirty="0"/>
           </a:p>
@@ -16804,18 +16925,45 @@
       </p:sp>
       <p:sp>
         <p:nvSpPr>
-          <p:cNvPr id="291" name="Shape 289"/>
-          <p:cNvSpPr/>
-          <p:nvPr/>
-        </p:nvSpPr>
-        <p:spPr>
-          <a:xfrm>
-            <a:off x="7248716" y="4219522"/>
-            <a:ext cx="240906" cy="125075"/>
+          <p:cNvPr id="296" name="Shape 294"/>
+          <p:cNvSpPr/>
+          <p:nvPr/>
+        </p:nvSpPr>
+        <p:spPr>
+          <a:xfrm>
+            <a:off x="7248716" y="4335018"/>
+            <a:ext cx="240906" cy="32004"/>
           </a:xfrm>
           <a:prstGeom prst="roundRect">
             <a:avLst>
-              <a:gd name="adj" fmla="val 29243"/>
+              <a:gd name="adj" fmla="val 42857"/>
+            </a:avLst>
+          </a:prstGeom>
+          <a:solidFill>
+            <a:srgbClr val="8A959C"/>
+          </a:solidFill>
+          <a:ln w="12700">
+            <a:solidFill>
+              <a:srgbClr val="8A959C"/>
+            </a:solidFill>
+            <a:prstDash val="solid"/>
+          </a:ln>
+        </p:spPr>
+      </p:sp>
+      <p:sp>
+        <p:nvSpPr>
+          <p:cNvPr id="297" name="Shape 295"/>
+          <p:cNvSpPr/>
+          <p:nvPr/>
+        </p:nvSpPr>
+        <p:spPr>
+          <a:xfrm>
+            <a:off x="7007809" y="4219522"/>
+            <a:ext cx="120453" cy="125075"/>
+          </a:xfrm>
+          <a:prstGeom prst="roundRect">
+            <a:avLst>
+              <a:gd name="adj" fmla="val 30365"/>
             </a:avLst>
           </a:prstGeom>
           <a:solidFill>
@@ -16838,7 +16986,7 @@
       </p:sp>
       <p:sp>
         <p:nvSpPr>
-          <p:cNvPr id="292" name="Shape 290"/>
+          <p:cNvPr id="298" name="Shape 296"/>
           <p:cNvSpPr/>
           <p:nvPr/>
         </p:nvSpPr>
@@ -16863,7 +17011,7 @@
       </p:sp>
       <p:sp>
         <p:nvSpPr>
-          <p:cNvPr id="293" name="Shape 291"/>
+          <p:cNvPr id="299" name="Shape 297"/>
           <p:cNvSpPr/>
           <p:nvPr/>
         </p:nvSpPr>
@@ -16888,7 +17036,7 @@
       </p:sp>
       <p:sp>
         <p:nvSpPr>
-          <p:cNvPr id="294" name="Text 292"/>
+          <p:cNvPr id="300" name="Text 298"/>
           <p:cNvSpPr/>
           <p:nvPr/>
         </p:nvSpPr>
@@ -16929,7 +17077,7 @@
       </p:sp>
       <p:sp>
         <p:nvSpPr>
-          <p:cNvPr id="295" name="Text 293"/>
+          <p:cNvPr id="301" name="Text 299"/>
           <p:cNvSpPr/>
           <p:nvPr/>
         </p:nvSpPr>
@@ -16970,7 +17118,7 @@
       </p:sp>
       <p:sp>
         <p:nvSpPr>
-          <p:cNvPr id="296" name="Text 294"/>
+          <p:cNvPr id="302" name="Text 300"/>
           <p:cNvSpPr/>
           <p:nvPr/>
         </p:nvSpPr>
@@ -17011,7 +17159,7 @@
       </p:sp>
       <p:sp>
         <p:nvSpPr>
-          <p:cNvPr id="297" name="Text 295"/>
+          <p:cNvPr id="303" name="Text 301"/>
           <p:cNvSpPr/>
           <p:nvPr/>
         </p:nvSpPr>
@@ -17044,7 +17192,7 @@
                 <a:ea typeface="Calibri" pitchFamily="34" charset="-122"/>
                 <a:cs typeface="Calibri" pitchFamily="34" charset="-120"/>
               </a:rPr>
-              <a:t>4</a:t>
+              <a:t>3</a:t>
             </a:r>
             <a:endParaRPr lang="en-US" sz="900" dirty="0"/>
           </a:p>
@@ -17052,7 +17200,7 @@
       </p:sp>
       <p:sp>
         <p:nvSpPr>
-          <p:cNvPr id="298" name="Text 296"/>
+          <p:cNvPr id="304" name="Text 302"/>
           <p:cNvSpPr/>
           <p:nvPr/>
         </p:nvSpPr>
@@ -17085,7 +17233,7 @@
                 <a:ea typeface="Calibri" pitchFamily="34" charset="-122"/>
                 <a:cs typeface="Calibri" pitchFamily="34" charset="-120"/>
               </a:rPr>
-              <a:t>20 Oct</a:t>
+              <a:t>18 Oct</a:t>
             </a:r>
             <a:endParaRPr lang="en-US" sz="700" dirty="0"/>
           </a:p>
@@ -17093,7 +17241,7 @@
       </p:sp>
       <p:sp>
         <p:nvSpPr>
-          <p:cNvPr id="299" name="Text 297"/>
+          <p:cNvPr id="305" name="Text 303"/>
           <p:cNvSpPr/>
           <p:nvPr/>
         </p:nvSpPr>
@@ -17126,7 +17274,7 @@
                 <a:ea typeface="Calibri" pitchFamily="34" charset="-122"/>
                 <a:cs typeface="Calibri" pitchFamily="34" charset="-120"/>
               </a:rPr>
-              <a:t>24 Oct</a:t>
+              <a:t>20 Oct</a:t>
             </a:r>
             <a:endParaRPr lang="en-US" sz="700" dirty="0"/>
           </a:p>
@@ -17134,14 +17282,41 @@
       </p:sp>
       <p:sp>
         <p:nvSpPr>
-          <p:cNvPr id="300" name="Shape 298"/>
-          <p:cNvSpPr/>
-          <p:nvPr/>
-        </p:nvSpPr>
-        <p:spPr>
-          <a:xfrm>
-            <a:off x="7248716" y="4435168"/>
-            <a:ext cx="602266" cy="125075"/>
+          <p:cNvPr id="306" name="Shape 304"/>
+          <p:cNvSpPr/>
+          <p:nvPr/>
+        </p:nvSpPr>
+        <p:spPr>
+          <a:xfrm>
+            <a:off x="7248716" y="4550664"/>
+            <a:ext cx="602266" cy="32004"/>
+          </a:xfrm>
+          <a:prstGeom prst="roundRect">
+            <a:avLst>
+              <a:gd name="adj" fmla="val 42857"/>
+            </a:avLst>
+          </a:prstGeom>
+          <a:solidFill>
+            <a:srgbClr val="8A959C"/>
+          </a:solidFill>
+          <a:ln w="12700">
+            <a:solidFill>
+              <a:srgbClr val="8A959C"/>
+            </a:solidFill>
+            <a:prstDash val="solid"/>
+          </a:ln>
+        </p:spPr>
+      </p:sp>
+      <p:sp>
+        <p:nvSpPr>
+          <p:cNvPr id="307" name="Shape 305"/>
+          <p:cNvSpPr/>
+          <p:nvPr/>
+        </p:nvSpPr>
+        <p:spPr>
+          <a:xfrm>
+            <a:off x="7007809" y="4435168"/>
+            <a:ext cx="361359" cy="125075"/>
           </a:xfrm>
           <a:prstGeom prst="roundRect">
             <a:avLst>
@@ -17168,14 +17343,14 @@
       </p:sp>
       <p:sp>
         <p:nvSpPr>
-          <p:cNvPr id="301" name="Text 299"/>
-          <p:cNvSpPr/>
-          <p:nvPr/>
-        </p:nvSpPr>
-        <p:spPr>
-          <a:xfrm>
-            <a:off x="7248716" y="4435168"/>
-            <a:ext cx="602266" cy="125075"/>
+          <p:cNvPr id="308" name="Text 306"/>
+          <p:cNvSpPr/>
+          <p:nvPr/>
+        </p:nvSpPr>
+        <p:spPr>
+          <a:xfrm>
+            <a:off x="7007809" y="4435168"/>
+            <a:ext cx="361359" cy="125075"/>
           </a:xfrm>
           <a:prstGeom prst="rect">
             <a:avLst/>
@@ -17201,7 +17376,7 @@
                 <a:ea typeface="Calibri" pitchFamily="34" charset="-122"/>
                 <a:cs typeface="Calibri" pitchFamily="34" charset="-120"/>
               </a:rPr>
-              <a:t>4 d</a:t>
+              <a:t>3 d</a:t>
             </a:r>
             <a:endParaRPr lang="en-US" sz="700" dirty="0"/>
           </a:p>
@@ -17209,7 +17384,7 @@
       </p:sp>
       <p:sp>
         <p:nvSpPr>
-          <p:cNvPr id="302" name="Shape 300"/>
+          <p:cNvPr id="309" name="Shape 307"/>
           <p:cNvSpPr/>
           <p:nvPr/>
         </p:nvSpPr>
@@ -17234,7 +17409,7 @@
       </p:sp>
       <p:sp>
         <p:nvSpPr>
-          <p:cNvPr id="303" name="Shape 301"/>
+          <p:cNvPr id="310" name="Shape 308"/>
           <p:cNvSpPr/>
           <p:nvPr/>
         </p:nvSpPr>
@@ -17259,7 +17434,7 @@
       </p:sp>
       <p:sp>
         <p:nvSpPr>
-          <p:cNvPr id="304" name="Text 302"/>
+          <p:cNvPr id="311" name="Text 309"/>
           <p:cNvSpPr/>
           <p:nvPr/>
         </p:nvSpPr>
@@ -17300,7 +17475,7 @@
       </p:sp>
       <p:sp>
         <p:nvSpPr>
-          <p:cNvPr id="305" name="Text 303"/>
+          <p:cNvPr id="312" name="Text 310"/>
           <p:cNvSpPr/>
           <p:nvPr/>
         </p:nvSpPr>
@@ -17341,7 +17516,7 @@
       </p:sp>
       <p:sp>
         <p:nvSpPr>
-          <p:cNvPr id="306" name="Text 304"/>
+          <p:cNvPr id="313" name="Text 311"/>
           <p:cNvSpPr/>
           <p:nvPr/>
         </p:nvSpPr>
@@ -17382,7 +17557,7 @@
       </p:sp>
       <p:sp>
         <p:nvSpPr>
-          <p:cNvPr id="307" name="Text 305"/>
+          <p:cNvPr id="314" name="Text 312"/>
           <p:cNvSpPr/>
           <p:nvPr/>
         </p:nvSpPr>
@@ -17415,7 +17590,7 @@
                 <a:ea typeface="Calibri" pitchFamily="34" charset="-122"/>
                 <a:cs typeface="Calibri" pitchFamily="34" charset="-120"/>
               </a:rPr>
-              <a:t>10</a:t>
+              <a:t>9</a:t>
             </a:r>
             <a:endParaRPr lang="en-US" sz="900" dirty="0"/>
           </a:p>
@@ -17423,7 +17598,7 @@
       </p:sp>
       <p:sp>
         <p:nvSpPr>
-          <p:cNvPr id="308" name="Text 306"/>
+          <p:cNvPr id="315" name="Text 313"/>
           <p:cNvSpPr/>
           <p:nvPr/>
         </p:nvSpPr>
@@ -17456,7 +17631,7 @@
                 <a:ea typeface="Calibri" pitchFamily="34" charset="-122"/>
                 <a:cs typeface="Calibri" pitchFamily="34" charset="-120"/>
               </a:rPr>
-              <a:t>25 Oct</a:t>
+              <a:t>21 Oct</a:t>
             </a:r>
             <a:endParaRPr lang="en-US" sz="700" dirty="0"/>
           </a:p>
@@ -17464,7 +17639,7 @@
       </p:sp>
       <p:sp>
         <p:nvSpPr>
-          <p:cNvPr id="309" name="Text 307"/>
+          <p:cNvPr id="316" name="Text 314"/>
           <p:cNvSpPr/>
           <p:nvPr/>
         </p:nvSpPr>
@@ -17497,7 +17672,7 @@
                 <a:ea typeface="Calibri" pitchFamily="34" charset="-122"/>
                 <a:cs typeface="Calibri" pitchFamily="34" charset="-120"/>
               </a:rPr>
-              <a:t>4 Nov</a:t>
+              <a:t>31 Oct</a:t>
             </a:r>
             <a:endParaRPr lang="en-US" sz="700" dirty="0"/>
           </a:p>
@@ -17505,13 +17680,40 @@
       </p:sp>
       <p:sp>
         <p:nvSpPr>
-          <p:cNvPr id="310" name="Shape 308"/>
-          <p:cNvSpPr/>
-          <p:nvPr/>
-        </p:nvSpPr>
-        <p:spPr>
-          <a:xfrm>
-            <a:off x="7850981" y="4650814"/>
+          <p:cNvPr id="317" name="Shape 315"/>
+          <p:cNvSpPr/>
+          <p:nvPr/>
+        </p:nvSpPr>
+        <p:spPr>
+          <a:xfrm>
+            <a:off x="7850981" y="4766310"/>
+            <a:ext cx="1324985" cy="32004"/>
+          </a:xfrm>
+          <a:prstGeom prst="roundRect">
+            <a:avLst>
+              <a:gd name="adj" fmla="val 42857"/>
+            </a:avLst>
+          </a:prstGeom>
+          <a:solidFill>
+            <a:srgbClr val="8A959C"/>
+          </a:solidFill>
+          <a:ln w="12700">
+            <a:solidFill>
+              <a:srgbClr val="8A959C"/>
+            </a:solidFill>
+            <a:prstDash val="solid"/>
+          </a:ln>
+        </p:spPr>
+      </p:sp>
+      <p:sp>
+        <p:nvSpPr>
+          <p:cNvPr id="318" name="Shape 316"/>
+          <p:cNvSpPr/>
+          <p:nvPr/>
+        </p:nvSpPr>
+        <p:spPr>
+          <a:xfrm>
+            <a:off x="7369169" y="4650814"/>
             <a:ext cx="1324985" cy="125075"/>
           </a:xfrm>
           <a:prstGeom prst="roundRect">
@@ -17539,13 +17741,13 @@
       </p:sp>
       <p:sp>
         <p:nvSpPr>
-          <p:cNvPr id="311" name="Text 309"/>
-          <p:cNvSpPr/>
-          <p:nvPr/>
-        </p:nvSpPr>
-        <p:spPr>
-          <a:xfrm>
-            <a:off x="7850981" y="4650814"/>
+          <p:cNvPr id="319" name="Text 317"/>
+          <p:cNvSpPr/>
+          <p:nvPr/>
+        </p:nvSpPr>
+        <p:spPr>
+          <a:xfrm>
+            <a:off x="7369169" y="4650814"/>
             <a:ext cx="1324985" cy="125075"/>
           </a:xfrm>
           <a:prstGeom prst="rect">
@@ -17572,7 +17774,7 @@
                 <a:ea typeface="Calibri" pitchFamily="34" charset="-122"/>
                 <a:cs typeface="Calibri" pitchFamily="34" charset="-120"/>
               </a:rPr>
-              <a:t>10 d</a:t>
+              <a:t>9 d</a:t>
             </a:r>
             <a:endParaRPr lang="en-US" sz="700" dirty="0"/>
           </a:p>
@@ -17580,7 +17782,7 @@
       </p:sp>
       <p:sp>
         <p:nvSpPr>
-          <p:cNvPr id="312" name="Shape 310"/>
+          <p:cNvPr id="320" name="Shape 318"/>
           <p:cNvSpPr/>
           <p:nvPr/>
         </p:nvSpPr>
@@ -17605,7 +17807,7 @@
       </p:sp>
       <p:sp>
         <p:nvSpPr>
-          <p:cNvPr id="313" name="Shape 311"/>
+          <p:cNvPr id="321" name="Shape 319"/>
           <p:cNvSpPr/>
           <p:nvPr/>
         </p:nvSpPr>
@@ -17630,7 +17832,7 @@
       </p:sp>
       <p:sp>
         <p:nvSpPr>
-          <p:cNvPr id="314" name="Text 312"/>
+          <p:cNvPr id="322" name="Text 320"/>
           <p:cNvSpPr/>
           <p:nvPr/>
         </p:nvSpPr>
@@ -17671,7 +17873,7 @@
       </p:sp>
       <p:sp>
         <p:nvSpPr>
-          <p:cNvPr id="315" name="Text 313"/>
+          <p:cNvPr id="323" name="Text 321"/>
           <p:cNvSpPr/>
           <p:nvPr/>
         </p:nvSpPr>
@@ -17712,7 +17914,7 @@
       </p:sp>
       <p:sp>
         <p:nvSpPr>
-          <p:cNvPr id="316" name="Text 314"/>
+          <p:cNvPr id="324" name="Text 322"/>
           <p:cNvSpPr/>
           <p:nvPr/>
         </p:nvSpPr>
@@ -17753,7 +17955,7 @@
       </p:sp>
       <p:sp>
         <p:nvSpPr>
-          <p:cNvPr id="317" name="Text 315"/>
+          <p:cNvPr id="325" name="Text 323"/>
           <p:cNvSpPr/>
           <p:nvPr/>
         </p:nvSpPr>
@@ -17786,7 +17988,7 @@
                 <a:ea typeface="Calibri" pitchFamily="34" charset="-122"/>
                 <a:cs typeface="Calibri" pitchFamily="34" charset="-120"/>
               </a:rPr>
-              <a:t>6</a:t>
+              <a:t>5</a:t>
             </a:r>
             <a:endParaRPr lang="en-US" sz="900" dirty="0"/>
           </a:p>
@@ -17794,7 +17996,7 @@
       </p:sp>
       <p:sp>
         <p:nvSpPr>
-          <p:cNvPr id="318" name="Text 316"/>
+          <p:cNvPr id="326" name="Text 324"/>
           <p:cNvSpPr/>
           <p:nvPr/>
         </p:nvSpPr>
@@ -17827,7 +18029,7 @@
                 <a:ea typeface="Calibri" pitchFamily="34" charset="-122"/>
                 <a:cs typeface="Calibri" pitchFamily="34" charset="-120"/>
               </a:rPr>
-              <a:t>5 Nov</a:t>
+              <a:t>1 Nov</a:t>
             </a:r>
             <a:endParaRPr lang="en-US" sz="700" dirty="0"/>
           </a:p>
@@ -17835,7 +18037,7 @@
       </p:sp>
       <p:sp>
         <p:nvSpPr>
-          <p:cNvPr id="319" name="Text 317"/>
+          <p:cNvPr id="327" name="Text 325"/>
           <p:cNvSpPr/>
           <p:nvPr/>
         </p:nvSpPr>
@@ -17868,7 +18070,7 @@
                 <a:ea typeface="Calibri" pitchFamily="34" charset="-122"/>
                 <a:cs typeface="Calibri" pitchFamily="34" charset="-120"/>
               </a:rPr>
-              <a:t>11 Nov</a:t>
+              <a:t>5 Nov</a:t>
             </a:r>
             <a:endParaRPr lang="en-US" sz="700" dirty="0"/>
           </a:p>
@@ -17876,14 +18078,41 @@
       </p:sp>
       <p:sp>
         <p:nvSpPr>
-          <p:cNvPr id="320" name="Shape 318"/>
-          <p:cNvSpPr/>
-          <p:nvPr/>
-        </p:nvSpPr>
-        <p:spPr>
-          <a:xfrm>
-            <a:off x="9175966" y="4866460"/>
-            <a:ext cx="843172" cy="125075"/>
+          <p:cNvPr id="328" name="Shape 326"/>
+          <p:cNvSpPr/>
+          <p:nvPr/>
+        </p:nvSpPr>
+        <p:spPr>
+          <a:xfrm>
+            <a:off x="9175966" y="4981956"/>
+            <a:ext cx="843172" cy="32004"/>
+          </a:xfrm>
+          <a:prstGeom prst="roundRect">
+            <a:avLst>
+              <a:gd name="adj" fmla="val 42857"/>
+            </a:avLst>
+          </a:prstGeom>
+          <a:solidFill>
+            <a:srgbClr val="8A959C"/>
+          </a:solidFill>
+          <a:ln w="12700">
+            <a:solidFill>
+              <a:srgbClr val="8A959C"/>
+            </a:solidFill>
+            <a:prstDash val="solid"/>
+          </a:ln>
+        </p:spPr>
+      </p:sp>
+      <p:sp>
+        <p:nvSpPr>
+          <p:cNvPr id="329" name="Shape 327"/>
+          <p:cNvSpPr/>
+          <p:nvPr/>
+        </p:nvSpPr>
+        <p:spPr>
+          <a:xfrm>
+            <a:off x="8694153" y="4866460"/>
+            <a:ext cx="602266" cy="125075"/>
           </a:xfrm>
           <a:prstGeom prst="roundRect">
             <a:avLst>
@@ -17910,14 +18139,14 @@
       </p:sp>
       <p:sp>
         <p:nvSpPr>
-          <p:cNvPr id="321" name="Text 319"/>
-          <p:cNvSpPr/>
-          <p:nvPr/>
-        </p:nvSpPr>
-        <p:spPr>
-          <a:xfrm>
-            <a:off x="9175966" y="4866460"/>
-            <a:ext cx="843172" cy="125075"/>
+          <p:cNvPr id="330" name="Text 328"/>
+          <p:cNvSpPr/>
+          <p:nvPr/>
+        </p:nvSpPr>
+        <p:spPr>
+          <a:xfrm>
+            <a:off x="8694153" y="4866460"/>
+            <a:ext cx="602266" cy="125075"/>
           </a:xfrm>
           <a:prstGeom prst="rect">
             <a:avLst/>
@@ -17943,7 +18172,7 @@
                 <a:ea typeface="Calibri" pitchFamily="34" charset="-122"/>
                 <a:cs typeface="Calibri" pitchFamily="34" charset="-120"/>
               </a:rPr>
-              <a:t>6 d</a:t>
+              <a:t>5 d</a:t>
             </a:r>
             <a:endParaRPr lang="en-US" sz="700" dirty="0"/>
           </a:p>
@@ -17951,7 +18180,7 @@
       </p:sp>
       <p:sp>
         <p:nvSpPr>
-          <p:cNvPr id="322" name="Shape 320"/>
+          <p:cNvPr id="331" name="Shape 329"/>
           <p:cNvSpPr/>
           <p:nvPr/>
         </p:nvSpPr>
@@ -17976,7 +18205,7 @@
       </p:sp>
       <p:sp>
         <p:nvSpPr>
-          <p:cNvPr id="323" name="Shape 321"/>
+          <p:cNvPr id="332" name="Shape 330"/>
           <p:cNvSpPr/>
           <p:nvPr/>
         </p:nvSpPr>
@@ -18001,7 +18230,7 @@
       </p:sp>
       <p:sp>
         <p:nvSpPr>
-          <p:cNvPr id="324" name="Text 322"/>
+          <p:cNvPr id="333" name="Text 331"/>
           <p:cNvSpPr/>
           <p:nvPr/>
         </p:nvSpPr>
@@ -18042,7 +18271,7 @@
       </p:sp>
       <p:sp>
         <p:nvSpPr>
-          <p:cNvPr id="325" name="Text 323"/>
+          <p:cNvPr id="334" name="Text 332"/>
           <p:cNvSpPr/>
           <p:nvPr/>
         </p:nvSpPr>
@@ -18083,7 +18312,7 @@
       </p:sp>
       <p:sp>
         <p:nvSpPr>
-          <p:cNvPr id="326" name="Text 324"/>
+          <p:cNvPr id="335" name="Text 333"/>
           <p:cNvSpPr/>
           <p:nvPr/>
         </p:nvSpPr>
@@ -18124,7 +18353,7 @@
       </p:sp>
       <p:sp>
         <p:nvSpPr>
-          <p:cNvPr id="327" name="Text 325"/>
+          <p:cNvPr id="336" name="Text 334"/>
           <p:cNvSpPr/>
           <p:nvPr/>
         </p:nvSpPr>
@@ -18165,7 +18394,7 @@
       </p:sp>
       <p:sp>
         <p:nvSpPr>
-          <p:cNvPr id="328" name="Text 326"/>
+          <p:cNvPr id="337" name="Text 335"/>
           <p:cNvSpPr/>
           <p:nvPr/>
         </p:nvSpPr>
@@ -18198,7 +18427,7 @@
                 <a:ea typeface="Calibri" pitchFamily="34" charset="-122"/>
                 <a:cs typeface="Calibri" pitchFamily="34" charset="-120"/>
               </a:rPr>
-              <a:t>5 Nov</a:t>
+              <a:t>1 Nov</a:t>
             </a:r>
             <a:endParaRPr lang="en-US" sz="700" dirty="0"/>
           </a:p>
@@ -18206,7 +18435,7 @@
       </p:sp>
       <p:sp>
         <p:nvSpPr>
-          <p:cNvPr id="329" name="Text 327"/>
+          <p:cNvPr id="338" name="Text 336"/>
           <p:cNvSpPr/>
           <p:nvPr/>
         </p:nvSpPr>
@@ -18239,7 +18468,7 @@
                 <a:ea typeface="Calibri" pitchFamily="34" charset="-122"/>
                 <a:cs typeface="Calibri" pitchFamily="34" charset="-120"/>
               </a:rPr>
-              <a:t>18 Nov</a:t>
+              <a:t>14 Nov</a:t>
             </a:r>
             <a:endParaRPr lang="en-US" sz="700" dirty="0"/>
           </a:p>
@@ -18247,13 +18476,40 @@
       </p:sp>
       <p:sp>
         <p:nvSpPr>
-          <p:cNvPr id="330" name="Shape 328"/>
-          <p:cNvSpPr/>
-          <p:nvPr/>
-        </p:nvSpPr>
-        <p:spPr>
-          <a:xfrm>
-            <a:off x="9175966" y="5082106"/>
+          <p:cNvPr id="339" name="Shape 337"/>
+          <p:cNvSpPr/>
+          <p:nvPr/>
+        </p:nvSpPr>
+        <p:spPr>
+          <a:xfrm>
+            <a:off x="9175966" y="5197602"/>
+            <a:ext cx="1686344" cy="32004"/>
+          </a:xfrm>
+          <a:prstGeom prst="roundRect">
+            <a:avLst>
+              <a:gd name="adj" fmla="val 42857"/>
+            </a:avLst>
+          </a:prstGeom>
+          <a:solidFill>
+            <a:srgbClr val="8A959C"/>
+          </a:solidFill>
+          <a:ln w="12700">
+            <a:solidFill>
+              <a:srgbClr val="8A959C"/>
+            </a:solidFill>
+            <a:prstDash val="solid"/>
+          </a:ln>
+        </p:spPr>
+      </p:sp>
+      <p:sp>
+        <p:nvSpPr>
+          <p:cNvPr id="340" name="Shape 338"/>
+          <p:cNvSpPr/>
+          <p:nvPr/>
+        </p:nvSpPr>
+        <p:spPr>
+          <a:xfrm>
+            <a:off x="8694153" y="5082106"/>
             <a:ext cx="1686344" cy="125075"/>
           </a:xfrm>
           <a:prstGeom prst="roundRect">
@@ -18281,13 +18537,13 @@
       </p:sp>
       <p:sp>
         <p:nvSpPr>
-          <p:cNvPr id="331" name="Text 329"/>
-          <p:cNvSpPr/>
-          <p:nvPr/>
-        </p:nvSpPr>
-        <p:spPr>
-          <a:xfrm>
-            <a:off x="9175966" y="5082106"/>
+          <p:cNvPr id="341" name="Text 339"/>
+          <p:cNvSpPr/>
+          <p:nvPr/>
+        </p:nvSpPr>
+        <p:spPr>
+          <a:xfrm>
+            <a:off x="8694153" y="5082106"/>
             <a:ext cx="1686344" cy="125075"/>
           </a:xfrm>
           <a:prstGeom prst="rect">
@@ -18322,7 +18578,7 @@
       </p:sp>
       <p:sp>
         <p:nvSpPr>
-          <p:cNvPr id="332" name="Shape 330"/>
+          <p:cNvPr id="342" name="Shape 340"/>
           <p:cNvSpPr/>
           <p:nvPr/>
         </p:nvSpPr>
@@ -18347,7 +18603,7 @@
       </p:sp>
       <p:sp>
         <p:nvSpPr>
-          <p:cNvPr id="333" name="Shape 331"/>
+          <p:cNvPr id="343" name="Shape 341"/>
           <p:cNvSpPr/>
           <p:nvPr/>
         </p:nvSpPr>
@@ -18372,7 +18628,7 @@
       </p:sp>
       <p:sp>
         <p:nvSpPr>
-          <p:cNvPr id="334" name="Text 332"/>
+          <p:cNvPr id="344" name="Text 342"/>
           <p:cNvSpPr/>
           <p:nvPr/>
         </p:nvSpPr>
@@ -18413,7 +18669,7 @@
       </p:sp>
       <p:sp>
         <p:nvSpPr>
-          <p:cNvPr id="335" name="Text 333"/>
+          <p:cNvPr id="345" name="Text 343"/>
           <p:cNvSpPr/>
           <p:nvPr/>
         </p:nvSpPr>
@@ -18454,7 +18710,7 @@
       </p:sp>
       <p:sp>
         <p:nvSpPr>
-          <p:cNvPr id="336" name="Text 334"/>
+          <p:cNvPr id="346" name="Text 344"/>
           <p:cNvSpPr/>
           <p:nvPr/>
         </p:nvSpPr>
@@ -18495,7 +18751,7 @@
       </p:sp>
       <p:sp>
         <p:nvSpPr>
-          <p:cNvPr id="337" name="Text 335"/>
+          <p:cNvPr id="347" name="Text 345"/>
           <p:cNvSpPr/>
           <p:nvPr/>
         </p:nvSpPr>
@@ -18536,7 +18792,7 @@
       </p:sp>
       <p:sp>
         <p:nvSpPr>
-          <p:cNvPr id="338" name="Text 336"/>
+          <p:cNvPr id="348" name="Text 346"/>
           <p:cNvSpPr/>
           <p:nvPr/>
         </p:nvSpPr>
@@ -18569,7 +18825,7 @@
                 <a:ea typeface="Calibri" pitchFamily="34" charset="-122"/>
                 <a:cs typeface="Calibri" pitchFamily="34" charset="-120"/>
               </a:rPr>
-              <a:t>19 Nov</a:t>
+              <a:t>15 Nov</a:t>
             </a:r>
             <a:endParaRPr lang="en-US" sz="700" dirty="0"/>
           </a:p>
@@ -18577,7 +18833,7 @@
       </p:sp>
       <p:sp>
         <p:nvSpPr>
-          <p:cNvPr id="339" name="Text 337"/>
+          <p:cNvPr id="349" name="Text 347"/>
           <p:cNvSpPr/>
           <p:nvPr/>
         </p:nvSpPr>
@@ -18610,7 +18866,7 @@
                 <a:ea typeface="Calibri" pitchFamily="34" charset="-122"/>
                 <a:cs typeface="Calibri" pitchFamily="34" charset="-120"/>
               </a:rPr>
-              <a:t>24 Nov</a:t>
+              <a:t>19 Nov</a:t>
             </a:r>
             <a:endParaRPr lang="en-US" sz="700" dirty="0"/>
           </a:p>
@@ -18618,14 +18874,41 @@
       </p:sp>
       <p:sp>
         <p:nvSpPr>
-          <p:cNvPr id="340" name="Shape 338"/>
-          <p:cNvSpPr/>
-          <p:nvPr/>
-        </p:nvSpPr>
-        <p:spPr>
-          <a:xfrm>
-            <a:off x="10862310" y="5297752"/>
-            <a:ext cx="722719" cy="125075"/>
+          <p:cNvPr id="350" name="Shape 348"/>
+          <p:cNvSpPr/>
+          <p:nvPr/>
+        </p:nvSpPr>
+        <p:spPr>
+          <a:xfrm>
+            <a:off x="10862310" y="5413248"/>
+            <a:ext cx="722719" cy="32004"/>
+          </a:xfrm>
+          <a:prstGeom prst="roundRect">
+            <a:avLst>
+              <a:gd name="adj" fmla="val 42857"/>
+            </a:avLst>
+          </a:prstGeom>
+          <a:solidFill>
+            <a:srgbClr val="8A959C"/>
+          </a:solidFill>
+          <a:ln w="12700">
+            <a:solidFill>
+              <a:srgbClr val="8A959C"/>
+            </a:solidFill>
+            <a:prstDash val="solid"/>
+          </a:ln>
+        </p:spPr>
+      </p:sp>
+      <p:sp>
+        <p:nvSpPr>
+          <p:cNvPr id="351" name="Shape 349"/>
+          <p:cNvSpPr/>
+          <p:nvPr/>
+        </p:nvSpPr>
+        <p:spPr>
+          <a:xfrm>
+            <a:off x="10380497" y="5297752"/>
+            <a:ext cx="602266" cy="125075"/>
           </a:xfrm>
           <a:prstGeom prst="roundRect">
             <a:avLst>
@@ -18652,14 +18935,14 @@
       </p:sp>
       <p:sp>
         <p:nvSpPr>
-          <p:cNvPr id="341" name="Text 339"/>
-          <p:cNvSpPr/>
-          <p:nvPr/>
-        </p:nvSpPr>
-        <p:spPr>
-          <a:xfrm>
-            <a:off x="10862310" y="5297752"/>
-            <a:ext cx="722719" cy="125075"/>
+          <p:cNvPr id="352" name="Text 350"/>
+          <p:cNvSpPr/>
+          <p:nvPr/>
+        </p:nvSpPr>
+        <p:spPr>
+          <a:xfrm>
+            <a:off x="10380497" y="5297752"/>
+            <a:ext cx="602266" cy="125075"/>
           </a:xfrm>
           <a:prstGeom prst="rect">
             <a:avLst/>
@@ -18693,7 +18976,7 @@
       </p:sp>
       <p:sp>
         <p:nvSpPr>
-          <p:cNvPr id="342" name="Shape 340"/>
+          <p:cNvPr id="353" name="Shape 351"/>
           <p:cNvSpPr/>
           <p:nvPr/>
         </p:nvSpPr>
@@ -18716,7 +18999,7 @@
       </p:sp>
       <p:sp>
         <p:nvSpPr>
-          <p:cNvPr id="343" name="Shape 341"/>
+          <p:cNvPr id="354" name="Shape 352"/>
           <p:cNvSpPr/>
           <p:nvPr/>
         </p:nvSpPr>
@@ -18740,7 +19023,7 @@
       </p:sp>
       <p:sp>
         <p:nvSpPr>
-          <p:cNvPr id="344" name="Shape 342"/>
+          <p:cNvPr id="355" name="Shape 353"/>
           <p:cNvSpPr/>
           <p:nvPr/>
         </p:nvSpPr>
@@ -18763,7 +19046,7 @@
       </p:sp>
       <p:sp>
         <p:nvSpPr>
-          <p:cNvPr id="345" name="Shape 343"/>
+          <p:cNvPr id="356" name="Shape 354"/>
           <p:cNvSpPr/>
           <p:nvPr/>
         </p:nvSpPr>
@@ -18787,7 +19070,7 @@
       </p:sp>
       <p:sp>
         <p:nvSpPr>
-          <p:cNvPr id="346" name="Shape 344"/>
+          <p:cNvPr id="357" name="Shape 355"/>
           <p:cNvSpPr/>
           <p:nvPr/>
         </p:nvSpPr>
@@ -18810,7 +19093,7 @@
       </p:sp>
       <p:sp>
         <p:nvSpPr>
-          <p:cNvPr id="347" name="Shape 345"/>
+          <p:cNvPr id="358" name="Shape 356"/>
           <p:cNvSpPr/>
           <p:nvPr/>
         </p:nvSpPr>
@@ -18834,7 +19117,7 @@
       </p:sp>
       <p:sp>
         <p:nvSpPr>
-          <p:cNvPr id="348" name="Shape 346"/>
+          <p:cNvPr id="359" name="Shape 357"/>
           <p:cNvSpPr/>
           <p:nvPr/>
         </p:nvSpPr>
@@ -18857,14 +19140,14 @@
       </p:sp>
       <p:sp>
         <p:nvSpPr>
-          <p:cNvPr id="349" name="Shape 347"/>
-          <p:cNvSpPr/>
-          <p:nvPr/>
-        </p:nvSpPr>
-        <p:spPr>
-          <a:xfrm>
-            <a:off x="6942220" y="4066413"/>
-            <a:ext cx="56445" cy="0"/>
+          <p:cNvPr id="360" name="Shape 358"/>
+          <p:cNvSpPr/>
+          <p:nvPr/>
+        </p:nvSpPr>
+        <p:spPr>
+          <a:xfrm>
+            <a:off x="6878212" y="4066413"/>
+            <a:ext cx="64008" cy="0"/>
           </a:xfrm>
           <a:prstGeom prst="line">
             <a:avLst/>
@@ -18881,7 +19164,7 @@
       </p:sp>
       <p:sp>
         <p:nvSpPr>
-          <p:cNvPr id="350" name="Shape 348"/>
+          <p:cNvPr id="361" name="Shape 359"/>
           <p:cNvSpPr/>
           <p:nvPr/>
         </p:nvSpPr>
@@ -18904,14 +19187,14 @@
       </p:sp>
       <p:sp>
         <p:nvSpPr>
-          <p:cNvPr id="351" name="Shape 349"/>
+          <p:cNvPr id="362" name="Shape 360"/>
           <p:cNvSpPr/>
           <p:nvPr/>
         </p:nvSpPr>
         <p:spPr>
           <a:xfrm>
             <a:off x="6460407" y="4282059"/>
-            <a:ext cx="779164" cy="0"/>
+            <a:ext cx="538258" cy="0"/>
           </a:xfrm>
           <a:prstGeom prst="line">
             <a:avLst/>
@@ -18928,13 +19211,13 @@
       </p:sp>
       <p:sp>
         <p:nvSpPr>
-          <p:cNvPr id="352" name="Shape 350"/>
-          <p:cNvSpPr/>
-          <p:nvPr/>
-        </p:nvSpPr>
-        <p:spPr>
-          <a:xfrm>
-            <a:off x="7202996" y="2988183"/>
+          <p:cNvPr id="363" name="Shape 361"/>
+          <p:cNvSpPr/>
+          <p:nvPr/>
+        </p:nvSpPr>
+        <p:spPr>
+          <a:xfrm>
+            <a:off x="6962089" y="2988183"/>
             <a:ext cx="45720" cy="0"/>
           </a:xfrm>
           <a:prstGeom prst="line">
@@ -18951,13 +19234,13 @@
       </p:sp>
       <p:sp>
         <p:nvSpPr>
-          <p:cNvPr id="353" name="Shape 351"/>
-          <p:cNvSpPr/>
-          <p:nvPr/>
-        </p:nvSpPr>
-        <p:spPr>
-          <a:xfrm>
-            <a:off x="7202996" y="2988183"/>
+          <p:cNvPr id="364" name="Shape 362"/>
+          <p:cNvSpPr/>
+          <p:nvPr/>
+        </p:nvSpPr>
+        <p:spPr>
+          <a:xfrm>
+            <a:off x="6962089" y="2988183"/>
             <a:ext cx="0" cy="1509522"/>
           </a:xfrm>
           <a:prstGeom prst="line">
@@ -18974,13 +19257,13 @@
       </p:sp>
       <p:sp>
         <p:nvSpPr>
-          <p:cNvPr id="354" name="Shape 352"/>
-          <p:cNvSpPr/>
-          <p:nvPr/>
-        </p:nvSpPr>
-        <p:spPr>
-          <a:xfrm>
-            <a:off x="7202996" y="4497705"/>
+          <p:cNvPr id="365" name="Shape 363"/>
+          <p:cNvSpPr/>
+          <p:nvPr/>
+        </p:nvSpPr>
+        <p:spPr>
+          <a:xfrm>
+            <a:off x="6962089" y="4497705"/>
             <a:ext cx="36576" cy="0"/>
           </a:xfrm>
           <a:prstGeom prst="line">
@@ -18998,13 +19281,13 @@
       </p:sp>
       <p:sp>
         <p:nvSpPr>
-          <p:cNvPr id="355" name="Shape 353"/>
-          <p:cNvSpPr/>
-          <p:nvPr/>
-        </p:nvSpPr>
-        <p:spPr>
-          <a:xfrm>
-            <a:off x="7805261" y="4497705"/>
+          <p:cNvPr id="366" name="Shape 364"/>
+          <p:cNvSpPr/>
+          <p:nvPr/>
+        </p:nvSpPr>
+        <p:spPr>
+          <a:xfrm>
+            <a:off x="7323449" y="4497705"/>
             <a:ext cx="45720" cy="0"/>
           </a:xfrm>
           <a:prstGeom prst="line">
@@ -19021,13 +19304,13 @@
       </p:sp>
       <p:sp>
         <p:nvSpPr>
-          <p:cNvPr id="356" name="Shape 354"/>
-          <p:cNvSpPr/>
-          <p:nvPr/>
-        </p:nvSpPr>
-        <p:spPr>
-          <a:xfrm>
-            <a:off x="7805261" y="4497705"/>
+          <p:cNvPr id="367" name="Shape 365"/>
+          <p:cNvSpPr/>
+          <p:nvPr/>
+        </p:nvSpPr>
+        <p:spPr>
+          <a:xfrm>
+            <a:off x="7323449" y="4497705"/>
             <a:ext cx="0" cy="215646"/>
           </a:xfrm>
           <a:prstGeom prst="line">
@@ -19044,13 +19327,13 @@
       </p:sp>
       <p:sp>
         <p:nvSpPr>
-          <p:cNvPr id="357" name="Shape 355"/>
-          <p:cNvSpPr/>
-          <p:nvPr/>
-        </p:nvSpPr>
-        <p:spPr>
-          <a:xfrm>
-            <a:off x="7805261" y="4713351"/>
+          <p:cNvPr id="368" name="Shape 366"/>
+          <p:cNvSpPr/>
+          <p:nvPr/>
+        </p:nvSpPr>
+        <p:spPr>
+          <a:xfrm>
+            <a:off x="7323449" y="4713351"/>
             <a:ext cx="36576" cy="0"/>
           </a:xfrm>
           <a:prstGeom prst="line">
@@ -19068,13 +19351,13 @@
       </p:sp>
       <p:sp>
         <p:nvSpPr>
-          <p:cNvPr id="358" name="Shape 356"/>
-          <p:cNvSpPr/>
-          <p:nvPr/>
-        </p:nvSpPr>
-        <p:spPr>
-          <a:xfrm>
-            <a:off x="9130246" y="4713351"/>
+          <p:cNvPr id="369" name="Shape 367"/>
+          <p:cNvSpPr/>
+          <p:nvPr/>
+        </p:nvSpPr>
+        <p:spPr>
+          <a:xfrm>
+            <a:off x="8648433" y="4713351"/>
             <a:ext cx="45720" cy="0"/>
           </a:xfrm>
           <a:prstGeom prst="line">
@@ -19091,13 +19374,13 @@
       </p:sp>
       <p:sp>
         <p:nvSpPr>
-          <p:cNvPr id="359" name="Shape 357"/>
-          <p:cNvSpPr/>
-          <p:nvPr/>
-        </p:nvSpPr>
-        <p:spPr>
-          <a:xfrm>
-            <a:off x="9130246" y="4713351"/>
+          <p:cNvPr id="370" name="Shape 368"/>
+          <p:cNvSpPr/>
+          <p:nvPr/>
+        </p:nvSpPr>
+        <p:spPr>
+          <a:xfrm>
+            <a:off x="8648433" y="4713351"/>
             <a:ext cx="0" cy="215646"/>
           </a:xfrm>
           <a:prstGeom prst="line">
@@ -19114,13 +19397,13 @@
       </p:sp>
       <p:sp>
         <p:nvSpPr>
-          <p:cNvPr id="360" name="Shape 358"/>
-          <p:cNvSpPr/>
-          <p:nvPr/>
-        </p:nvSpPr>
-        <p:spPr>
-          <a:xfrm>
-            <a:off x="9130246" y="4928997"/>
+          <p:cNvPr id="371" name="Shape 369"/>
+          <p:cNvSpPr/>
+          <p:nvPr/>
+        </p:nvSpPr>
+        <p:spPr>
+          <a:xfrm>
+            <a:off x="8648433" y="4928997"/>
             <a:ext cx="36576" cy="0"/>
           </a:xfrm>
           <a:prstGeom prst="line">
@@ -19138,13 +19421,13 @@
       </p:sp>
       <p:sp>
         <p:nvSpPr>
-          <p:cNvPr id="361" name="Shape 359"/>
-          <p:cNvSpPr/>
-          <p:nvPr/>
-        </p:nvSpPr>
-        <p:spPr>
-          <a:xfrm>
-            <a:off x="9130246" y="4713351"/>
+          <p:cNvPr id="372" name="Shape 370"/>
+          <p:cNvSpPr/>
+          <p:nvPr/>
+        </p:nvSpPr>
+        <p:spPr>
+          <a:xfrm>
+            <a:off x="8648433" y="4713351"/>
             <a:ext cx="45720" cy="0"/>
           </a:xfrm>
           <a:prstGeom prst="line">
@@ -19161,13 +19444,13 @@
       </p:sp>
       <p:sp>
         <p:nvSpPr>
-          <p:cNvPr id="362" name="Shape 360"/>
-          <p:cNvSpPr/>
-          <p:nvPr/>
-        </p:nvSpPr>
-        <p:spPr>
-          <a:xfrm>
-            <a:off x="9130246" y="4713351"/>
+          <p:cNvPr id="373" name="Shape 371"/>
+          <p:cNvSpPr/>
+          <p:nvPr/>
+        </p:nvSpPr>
+        <p:spPr>
+          <a:xfrm>
+            <a:off x="8648433" y="4713351"/>
             <a:ext cx="0" cy="431292"/>
           </a:xfrm>
           <a:prstGeom prst="line">
@@ -19184,13 +19467,13 @@
       </p:sp>
       <p:sp>
         <p:nvSpPr>
-          <p:cNvPr id="363" name="Shape 361"/>
-          <p:cNvSpPr/>
-          <p:nvPr/>
-        </p:nvSpPr>
-        <p:spPr>
-          <a:xfrm>
-            <a:off x="9130246" y="5144643"/>
+          <p:cNvPr id="374" name="Shape 372"/>
+          <p:cNvSpPr/>
+          <p:nvPr/>
+        </p:nvSpPr>
+        <p:spPr>
+          <a:xfrm>
+            <a:off x="8648433" y="5144643"/>
             <a:ext cx="36576" cy="0"/>
           </a:xfrm>
           <a:prstGeom prst="line">
@@ -19208,13 +19491,13 @@
       </p:sp>
       <p:sp>
         <p:nvSpPr>
-          <p:cNvPr id="364" name="Shape 362"/>
-          <p:cNvSpPr/>
-          <p:nvPr/>
-        </p:nvSpPr>
-        <p:spPr>
-          <a:xfrm>
-            <a:off x="10816590" y="5144643"/>
+          <p:cNvPr id="375" name="Shape 373"/>
+          <p:cNvSpPr/>
+          <p:nvPr/>
+        </p:nvSpPr>
+        <p:spPr>
+          <a:xfrm>
+            <a:off x="10334777" y="5144643"/>
             <a:ext cx="45720" cy="0"/>
           </a:xfrm>
           <a:prstGeom prst="line">
@@ -19231,13 +19514,13 @@
       </p:sp>
       <p:sp>
         <p:nvSpPr>
-          <p:cNvPr id="365" name="Shape 363"/>
-          <p:cNvSpPr/>
-          <p:nvPr/>
-        </p:nvSpPr>
-        <p:spPr>
-          <a:xfrm>
-            <a:off x="10816590" y="5144643"/>
+          <p:cNvPr id="376" name="Shape 374"/>
+          <p:cNvSpPr/>
+          <p:nvPr/>
+        </p:nvSpPr>
+        <p:spPr>
+          <a:xfrm>
+            <a:off x="10334777" y="5144643"/>
             <a:ext cx="0" cy="215646"/>
           </a:xfrm>
           <a:prstGeom prst="line">
@@ -19254,13 +19537,13 @@
       </p:sp>
       <p:sp>
         <p:nvSpPr>
-          <p:cNvPr id="366" name="Shape 364"/>
-          <p:cNvSpPr/>
-          <p:nvPr/>
-        </p:nvSpPr>
-        <p:spPr>
-          <a:xfrm>
-            <a:off x="10816590" y="5360289"/>
+          <p:cNvPr id="377" name="Shape 375"/>
+          <p:cNvSpPr/>
+          <p:nvPr/>
+        </p:nvSpPr>
+        <p:spPr>
+          <a:xfrm>
+            <a:off x="10334777" y="5360289"/>
             <a:ext cx="36576" cy="0"/>
           </a:xfrm>
           <a:prstGeom prst="line">
@@ -19278,7 +19561,7 @@
       </p:sp>
       <p:sp>
         <p:nvSpPr>
-          <p:cNvPr id="367" name="Shape 365"/>
+          <p:cNvPr id="378" name="Shape 376"/>
           <p:cNvSpPr/>
           <p:nvPr/>
         </p:nvSpPr>
@@ -19301,7 +19584,7 @@
       </p:sp>
       <p:sp>
         <p:nvSpPr>
-          <p:cNvPr id="368" name="Shape 366"/>
+          <p:cNvPr id="379" name="Shape 377"/>
           <p:cNvSpPr/>
           <p:nvPr/>
         </p:nvSpPr>
@@ -19328,7 +19611,7 @@
       </p:sp>
       <p:sp>
         <p:nvSpPr>
-          <p:cNvPr id="369" name="Text 367"/>
+          <p:cNvPr id="380" name="Text 378"/>
           <p:cNvSpPr/>
           <p:nvPr/>
         </p:nvSpPr>
@@ -19369,7 +19652,7 @@
       </p:sp>
       <p:sp>
         <p:nvSpPr>
-          <p:cNvPr id="370" name="Shape 368"/>
+          <p:cNvPr id="381" name="Shape 379"/>
           <p:cNvSpPr/>
           <p:nvPr/>
         </p:nvSpPr>
@@ -19396,7 +19679,7 @@
       </p:sp>
       <p:sp>
         <p:nvSpPr>
-          <p:cNvPr id="371" name="Shape 369"/>
+          <p:cNvPr id="382" name="Shape 380"/>
           <p:cNvSpPr/>
           <p:nvPr/>
         </p:nvSpPr>
@@ -19430,7 +19713,7 @@
       </p:sp>
       <p:sp>
         <p:nvSpPr>
-          <p:cNvPr id="372" name="Shape 370"/>
+          <p:cNvPr id="383" name="Shape 381"/>
           <p:cNvSpPr/>
           <p:nvPr/>
         </p:nvSpPr>
@@ -19455,7 +19738,7 @@
       </p:sp>
       <p:sp>
         <p:nvSpPr>
-          <p:cNvPr id="373" name="Text 371"/>
+          <p:cNvPr id="384" name="Text 382"/>
           <p:cNvSpPr/>
           <p:nvPr/>
         </p:nvSpPr>
@@ -19496,7 +19779,7 @@
       </p:sp>
       <p:sp>
         <p:nvSpPr>
-          <p:cNvPr id="374" name="Text 372"/>
+          <p:cNvPr id="385" name="Text 383"/>
           <p:cNvSpPr/>
           <p:nvPr/>
         </p:nvSpPr>
@@ -19537,7 +19820,7 @@
       </p:sp>
       <p:sp>
         <p:nvSpPr>
-          <p:cNvPr id="375" name="Text 373"/>
+          <p:cNvPr id="386" name="Text 384"/>
           <p:cNvSpPr/>
           <p:nvPr/>
         </p:nvSpPr>
@@ -19570,7 +19853,7 @@
                 <a:ea typeface="Calibri" pitchFamily="34" charset="-122"/>
                 <a:cs typeface="Calibri" pitchFamily="34" charset="-120"/>
               </a:rPr>
-              <a:t>Working day 1 / 37</a:t>
+              <a:t>Working day 1 / 33</a:t>
             </a:r>
             <a:endParaRPr lang="en-US" sz="750" dirty="0"/>
           </a:p>
@@ -19578,7 +19861,7 @@
       </p:sp>
       <p:sp>
         <p:nvSpPr>
-          <p:cNvPr id="376" name="Shape 374"/>
+          <p:cNvPr id="387" name="Shape 385"/>
           <p:cNvSpPr/>
           <p:nvPr/>
         </p:nvSpPr>
@@ -19612,7 +19895,7 @@
       </p:sp>
       <p:sp>
         <p:nvSpPr>
-          <p:cNvPr id="377" name="Shape 375"/>
+          <p:cNvPr id="388" name="Shape 386"/>
           <p:cNvSpPr/>
           <p:nvPr/>
         </p:nvSpPr>
@@ -19637,7 +19920,7 @@
       </p:sp>
       <p:sp>
         <p:nvSpPr>
-          <p:cNvPr id="378" name="Text 376"/>
+          <p:cNvPr id="389" name="Text 387"/>
           <p:cNvSpPr/>
           <p:nvPr/>
         </p:nvSpPr>
@@ -19678,7 +19961,7 @@
       </p:sp>
       <p:sp>
         <p:nvSpPr>
-          <p:cNvPr id="379" name="Text 377"/>
+          <p:cNvPr id="390" name="Text 388"/>
           <p:cNvSpPr/>
           <p:nvPr/>
         </p:nvSpPr>
@@ -19711,7 +19994,7 @@
                 <a:ea typeface="Calibri" pitchFamily="34" charset="-122"/>
                 <a:cs typeface="Calibri" pitchFamily="34" charset="-120"/>
               </a:rPr>
-              <a:t>Mon 19 Oct 2026</a:t>
+              <a:t>Sat 17 Oct 2026</a:t>
             </a:r>
             <a:endParaRPr lang="en-US" sz="1300" dirty="0"/>
           </a:p>
@@ -19719,7 +20002,7 @@
       </p:sp>
       <p:sp>
         <p:nvSpPr>
-          <p:cNvPr id="380" name="Text 378"/>
+          <p:cNvPr id="391" name="Text 389"/>
           <p:cNvSpPr/>
           <p:nvPr/>
         </p:nvSpPr>
@@ -19752,7 +20035,7 @@
                 <a:ea typeface="Calibri" pitchFamily="34" charset="-122"/>
                 <a:cs typeface="Calibri" pitchFamily="34" charset="-120"/>
               </a:rPr>
-              <a:t>Working day 6 / 37</a:t>
+              <a:t>Working day 4 / 33</a:t>
             </a:r>
             <a:endParaRPr lang="en-US" sz="750" dirty="0"/>
           </a:p>
@@ -19760,7 +20043,7 @@
       </p:sp>
       <p:sp>
         <p:nvSpPr>
-          <p:cNvPr id="381" name="Shape 379"/>
+          <p:cNvPr id="392" name="Shape 390"/>
           <p:cNvSpPr/>
           <p:nvPr/>
         </p:nvSpPr>
@@ -19794,7 +20077,7 @@
       </p:sp>
       <p:sp>
         <p:nvSpPr>
-          <p:cNvPr id="382" name="Shape 380"/>
+          <p:cNvPr id="393" name="Shape 391"/>
           <p:cNvSpPr/>
           <p:nvPr/>
         </p:nvSpPr>
@@ -19819,7 +20102,7 @@
       </p:sp>
       <p:sp>
         <p:nvSpPr>
-          <p:cNvPr id="383" name="Text 381"/>
+          <p:cNvPr id="394" name="Text 392"/>
           <p:cNvSpPr/>
           <p:nvPr/>
         </p:nvSpPr>
@@ -19860,7 +20143,7 @@
       </p:sp>
       <p:sp>
         <p:nvSpPr>
-          <p:cNvPr id="384" name="Text 382"/>
+          <p:cNvPr id="395" name="Text 393"/>
           <p:cNvSpPr/>
           <p:nvPr/>
         </p:nvSpPr>
@@ -19893,7 +20176,7 @@
                 <a:ea typeface="Calibri" pitchFamily="34" charset="-122"/>
                 <a:cs typeface="Calibri" pitchFamily="34" charset="-120"/>
               </a:rPr>
-              <a:t>Wed 11 Nov 2026</a:t>
+              <a:t>Thu 5 Nov 2026</a:t>
             </a:r>
             <a:endParaRPr lang="en-US" sz="1300" dirty="0"/>
           </a:p>
@@ -19901,7 +20184,7 @@
       </p:sp>
       <p:sp>
         <p:nvSpPr>
-          <p:cNvPr id="385" name="Text 383"/>
+          <p:cNvPr id="396" name="Text 394"/>
           <p:cNvSpPr/>
           <p:nvPr/>
         </p:nvSpPr>
@@ -19934,7 +20217,7 @@
                 <a:ea typeface="Calibri" pitchFamily="34" charset="-122"/>
                 <a:cs typeface="Calibri" pitchFamily="34" charset="-120"/>
               </a:rPr>
-              <a:t>Working day 26 / 37</a:t>
+              <a:t>Working day 21 / 33</a:t>
             </a:r>
             <a:endParaRPr lang="en-US" sz="750" dirty="0"/>
           </a:p>
@@ -19942,7 +20225,7 @@
       </p:sp>
       <p:sp>
         <p:nvSpPr>
-          <p:cNvPr id="386" name="Shape 384"/>
+          <p:cNvPr id="397" name="Shape 395"/>
           <p:cNvSpPr/>
           <p:nvPr/>
         </p:nvSpPr>
@@ -19976,7 +20259,7 @@
       </p:sp>
       <p:sp>
         <p:nvSpPr>
-          <p:cNvPr id="387" name="Shape 385"/>
+          <p:cNvPr id="398" name="Shape 396"/>
           <p:cNvSpPr/>
           <p:nvPr/>
         </p:nvSpPr>
@@ -20001,7 +20284,7 @@
       </p:sp>
       <p:sp>
         <p:nvSpPr>
-          <p:cNvPr id="388" name="Text 386"/>
+          <p:cNvPr id="399" name="Text 397"/>
           <p:cNvSpPr/>
           <p:nvPr/>
         </p:nvSpPr>
@@ -20042,7 +20325,7 @@
       </p:sp>
       <p:sp>
         <p:nvSpPr>
-          <p:cNvPr id="389" name="Text 387"/>
+          <p:cNvPr id="400" name="Text 398"/>
           <p:cNvSpPr/>
           <p:nvPr/>
         </p:nvSpPr>
@@ -20075,7 +20358,7 @@
                 <a:ea typeface="Calibri" pitchFamily="34" charset="-122"/>
                 <a:cs typeface="Calibri" pitchFamily="34" charset="-120"/>
               </a:rPr>
-              <a:t>Wed 18 Nov 2026</a:t>
+              <a:t>Sat 14 Nov 2026</a:t>
             </a:r>
             <a:endParaRPr lang="en-US" sz="1300" dirty="0"/>
           </a:p>
@@ -20083,7 +20366,7 @@
       </p:sp>
       <p:sp>
         <p:nvSpPr>
-          <p:cNvPr id="390" name="Text 388"/>
+          <p:cNvPr id="401" name="Text 399"/>
           <p:cNvSpPr/>
           <p:nvPr/>
         </p:nvSpPr>
@@ -20116,7 +20399,7 @@
                 <a:ea typeface="Calibri" pitchFamily="34" charset="-122"/>
                 <a:cs typeface="Calibri" pitchFamily="34" charset="-120"/>
               </a:rPr>
-              <a:t>Working day 32 / 37</a:t>
+              <a:t>Working day 28 / 33</a:t>
             </a:r>
             <a:endParaRPr lang="en-US" sz="750" dirty="0"/>
           </a:p>
@@ -20124,7 +20407,7 @@
       </p:sp>
       <p:sp>
         <p:nvSpPr>
-          <p:cNvPr id="391" name="Shape 389"/>
+          <p:cNvPr id="402" name="Shape 400"/>
           <p:cNvSpPr/>
           <p:nvPr/>
         </p:nvSpPr>
@@ -20158,7 +20441,7 @@
       </p:sp>
       <p:sp>
         <p:nvSpPr>
-          <p:cNvPr id="392" name="Shape 390"/>
+          <p:cNvPr id="403" name="Shape 401"/>
           <p:cNvSpPr/>
           <p:nvPr/>
         </p:nvSpPr>
@@ -20183,7 +20466,7 @@
       </p:sp>
       <p:sp>
         <p:nvSpPr>
-          <p:cNvPr id="393" name="Text 391"/>
+          <p:cNvPr id="404" name="Text 402"/>
           <p:cNvSpPr/>
           <p:nvPr/>
         </p:nvSpPr>
@@ -20224,7 +20507,7 @@
       </p:sp>
       <p:sp>
         <p:nvSpPr>
-          <p:cNvPr id="394" name="Text 392"/>
+          <p:cNvPr id="405" name="Text 403"/>
           <p:cNvSpPr/>
           <p:nvPr/>
         </p:nvSpPr>
@@ -20257,7 +20540,7 @@
                 <a:ea typeface="Calibri" pitchFamily="34" charset="-122"/>
                 <a:cs typeface="Calibri" pitchFamily="34" charset="-120"/>
               </a:rPr>
-              <a:t>Tue 24 Nov 2026</a:t>
+              <a:t>Thu 19 Nov 2026</a:t>
             </a:r>
             <a:endParaRPr lang="en-US" sz="1300" dirty="0"/>
           </a:p>
@@ -20265,7 +20548,7 @@
       </p:sp>
       <p:sp>
         <p:nvSpPr>
-          <p:cNvPr id="395" name="Text 393"/>
+          <p:cNvPr id="406" name="Text 404"/>
           <p:cNvSpPr/>
           <p:nvPr/>
         </p:nvSpPr>
@@ -20298,7 +20581,7 @@
                 <a:ea typeface="Calibri" pitchFamily="34" charset="-122"/>
                 <a:cs typeface="Calibri" pitchFamily="34" charset="-120"/>
               </a:rPr>
-              <a:t>Working day 37 / 37</a:t>
+              <a:t>Working day 33 / 33</a:t>
             </a:r>
             <a:endParaRPr lang="en-US" sz="750" dirty="0"/>
           </a:p>

--- a/ufwl-timeline/UFWL_Presentation_EN.pptx
+++ b/ufwl-timeline/UFWL_Presentation_EN.pptx
@@ -12086,7 +12086,7 @@
             <a:avLst/>
           </a:prstGeom>
           <a:solidFill>
-            <a:srgbClr val="FAF8FF"/>
+            <a:srgbClr val="FFFFFF"/>
           </a:solidFill>
           <a:ln w="6350">
             <a:solidFill>
@@ -12111,11 +12111,11 @@
             <a:avLst/>
           </a:prstGeom>
           <a:solidFill>
-            <a:srgbClr val="6C4AB6"/>
+            <a:srgbClr val="C8503F"/>
           </a:solidFill>
           <a:ln w="12700">
             <a:solidFill>
-              <a:srgbClr val="6C4AB6"/>
+              <a:srgbClr val="C8503F"/>
             </a:solidFill>
             <a:prstDash val="solid"/>
           </a:ln>
@@ -12191,13 +12191,13 @@
             <a:r>
               <a:rPr lang="en-US" altLang="en-US" sz="850" b="1" dirty="0">
                 <a:solidFill>
-                  <a:srgbClr val="4A3A86"/>
-                </a:solidFill>
-                <a:latin typeface="Calibri" pitchFamily="34" charset="0"/>
-                <a:ea typeface="Calibri" pitchFamily="34" charset="-122"/>
-                <a:cs typeface="Calibri" pitchFamily="34" charset="-120"/>
-              </a:rPr>
-              <a:t>Concrete works to backfilling – total time required</a:t>
+                  <a:srgbClr val="C8503F"/>
+                </a:solidFill>
+                <a:latin typeface="Calibri" pitchFamily="34" charset="0"/>
+                <a:ea typeface="Calibri" pitchFamily="34" charset="-122"/>
+                <a:cs typeface="Calibri" pitchFamily="34" charset="-120"/>
+              </a:rPr>
+              <a:t>Shoring works – total time required</a:t>
             </a:r>
             <a:endParaRPr lang="en-US" sz="850" dirty="0"/>
           </a:p>
@@ -12238,7 +12238,7 @@
                 <a:ea typeface="Calibri" pitchFamily="34" charset="-122"/>
                 <a:cs typeface="Calibri" pitchFamily="34" charset="-120"/>
               </a:rPr>
-              <a:t>16</a:t>
+              <a:t>4</a:t>
             </a:r>
             <a:endParaRPr lang="en-US" sz="1100" dirty="0"/>
           </a:p>
@@ -12279,7 +12279,7 @@
                 <a:ea typeface="Calibri" pitchFamily="34" charset="-122"/>
                 <a:cs typeface="Calibri" pitchFamily="34" charset="-120"/>
               </a:rPr>
-              <a:t>27 Oct</a:t>
+              <a:t>22 Oct</a:t>
             </a:r>
             <a:endParaRPr lang="en-US" sz="850" dirty="0"/>
           </a:p>
@@ -12320,7 +12320,7 @@
                 <a:ea typeface="Calibri" pitchFamily="34" charset="-122"/>
                 <a:cs typeface="Calibri" pitchFamily="34" charset="-120"/>
               </a:rPr>
-              <a:t>14 Nov</a:t>
+              <a:t>26 Oct</a:t>
             </a:r>
             <a:endParaRPr lang="en-US" sz="850" dirty="0"/>
           </a:p>
@@ -12334,15 +12334,106 @@
         </p:nvSpPr>
         <p:spPr>
           <a:xfrm>
-            <a:off x="8254854" y="2286000"/>
-            <a:ext cx="3230979" cy="182880"/>
+            <a:off x="7404596" y="2276856"/>
+            <a:ext cx="850258" cy="201168"/>
           </a:xfrm>
           <a:prstGeom prst="roundRect">
             <a:avLst>
-              <a:gd name="adj" fmla="val 20000"/>
+              <a:gd name="adj" fmla="val 18182"/>
             </a:avLst>
           </a:prstGeom>
           <a:solidFill>
+            <a:srgbClr val="C8503F"/>
+          </a:solidFill>
+          <a:ln w="12700">
+            <a:solidFill>
+              <a:srgbClr val="C8503F"/>
+            </a:solidFill>
+            <a:prstDash val="solid"/>
+          </a:ln>
+        </p:spPr>
+      </p:sp>
+      <p:sp>
+        <p:nvSpPr>
+          <p:cNvPr id="167" name="Text 165"/>
+          <p:cNvSpPr/>
+          <p:nvPr/>
+        </p:nvSpPr>
+        <p:spPr>
+          <a:xfrm>
+            <a:off x="7404596" y="2276856"/>
+            <a:ext cx="850258" cy="201168"/>
+          </a:xfrm>
+          <a:prstGeom prst="rect">
+            <a:avLst/>
+          </a:prstGeom>
+          <a:noFill/>
+          <a:ln/>
+        </p:spPr>
+        <p:txBody>
+          <a:bodyPr wrap="square" lIns="0" tIns="0" rIns="0" bIns="0" rtlCol="0" anchor="ctr">
+            <a:normAutofit/>
+          </a:bodyPr>
+          <a:lstStyle/>
+          <a:p>
+            <a:pPr algn="ctr" indent="0" marL="0">
+              <a:buNone/>
+            </a:pPr>
+            <a:r>
+              <a:rPr lang="en-US" altLang="en-US" sz="800" b="1" dirty="0">
+                <a:solidFill>
+                  <a:srgbClr val="FFFFFF"/>
+                </a:solidFill>
+                <a:latin typeface="Calibri" pitchFamily="34" charset="0"/>
+                <a:ea typeface="Calibri" pitchFamily="34" charset="-122"/>
+                <a:cs typeface="Calibri" pitchFamily="34" charset="-120"/>
+              </a:rPr>
+              <a:t>4 working days</a:t>
+            </a:r>
+            <a:endParaRPr lang="en-US" sz="800" dirty="0"/>
+          </a:p>
+        </p:txBody>
+      </p:sp>
+      <p:sp>
+        <p:nvSpPr>
+          <p:cNvPr id="168" name="Shape 166"/>
+          <p:cNvSpPr/>
+          <p:nvPr/>
+        </p:nvSpPr>
+        <p:spPr>
+          <a:xfrm>
+            <a:off x="365760" y="2514600"/>
+            <a:ext cx="11460175" cy="274320"/>
+          </a:xfrm>
+          <a:prstGeom prst="rect">
+            <a:avLst/>
+          </a:prstGeom>
+          <a:solidFill>
+            <a:srgbClr val="FFFFFF"/>
+          </a:solidFill>
+          <a:ln w="6350">
+            <a:solidFill>
+              <a:srgbClr val="DFE6EA"/>
+            </a:solidFill>
+            <a:prstDash val="solid"/>
+          </a:ln>
+        </p:spPr>
+      </p:sp>
+      <p:sp>
+        <p:nvSpPr>
+          <p:cNvPr id="169" name="Shape 167"/>
+          <p:cNvSpPr/>
+          <p:nvPr/>
+        </p:nvSpPr>
+        <p:spPr>
+          <a:xfrm>
+            <a:off x="438912" y="2532888"/>
+            <a:ext cx="237744" cy="237744"/>
+          </a:xfrm>
+          <a:prstGeom prst="ellipse">
+            <a:avLst/>
+          </a:prstGeom>
+          <a:solidFill>
             <a:srgbClr val="6C4AB6"/>
           </a:solidFill>
           <a:ln w="12700">
@@ -12355,14 +12446,14 @@
       </p:sp>
       <p:sp>
         <p:nvSpPr>
-          <p:cNvPr id="167" name="Text 165"/>
-          <p:cNvSpPr/>
-          <p:nvPr/>
-        </p:nvSpPr>
-        <p:spPr>
-          <a:xfrm>
-            <a:off x="8254854" y="2286000"/>
-            <a:ext cx="3230979" cy="182880"/>
+          <p:cNvPr id="170" name="Text 168"/>
+          <p:cNvSpPr/>
+          <p:nvPr/>
+        </p:nvSpPr>
+        <p:spPr>
+          <a:xfrm>
+            <a:off x="365760" y="2514600"/>
+            <a:ext cx="384048" cy="274320"/>
           </a:xfrm>
           <a:prstGeom prst="rect">
             <a:avLst/>
@@ -12380,6 +12471,238 @@
               <a:buNone/>
             </a:pPr>
             <a:r>
+              <a:rPr lang="en-US" altLang="en-US" sz="900" b="1" dirty="0">
+                <a:solidFill>
+                  <a:srgbClr val="FFFFFF"/>
+                </a:solidFill>
+                <a:latin typeface="Calibri" pitchFamily="34" charset="0"/>
+                <a:ea typeface="Calibri" pitchFamily="34" charset="-122"/>
+                <a:cs typeface="Calibri" pitchFamily="34" charset="-120"/>
+              </a:rPr>
+              <a:t>⟷</a:t>
+            </a:r>
+            <a:endParaRPr lang="en-US" sz="900" dirty="0"/>
+          </a:p>
+        </p:txBody>
+      </p:sp>
+      <p:sp>
+        <p:nvSpPr>
+          <p:cNvPr id="171" name="Text 169"/>
+          <p:cNvSpPr/>
+          <p:nvPr/>
+        </p:nvSpPr>
+        <p:spPr>
+          <a:xfrm>
+            <a:off x="822960" y="2514600"/>
+            <a:ext cx="2606040" cy="274320"/>
+          </a:xfrm>
+          <a:prstGeom prst="rect">
+            <a:avLst/>
+          </a:prstGeom>
+          <a:noFill/>
+          <a:ln/>
+        </p:spPr>
+        <p:txBody>
+          <a:bodyPr wrap="square" lIns="0" tIns="0" rIns="0" bIns="0" rtlCol="0" anchor="ctr">
+            <a:normAutofit/>
+          </a:bodyPr>
+          <a:lstStyle/>
+          <a:p>
+            <a:pPr algn="l" indent="0" marL="0">
+              <a:buNone/>
+            </a:pPr>
+            <a:r>
+              <a:rPr lang="en-US" altLang="en-US" sz="850" b="1" dirty="0">
+                <a:solidFill>
+                  <a:srgbClr val="6C4AB6"/>
+                </a:solidFill>
+                <a:latin typeface="Calibri" pitchFamily="34" charset="0"/>
+                <a:ea typeface="Calibri" pitchFamily="34" charset="-122"/>
+                <a:cs typeface="Calibri" pitchFamily="34" charset="-120"/>
+              </a:rPr>
+              <a:t>Concrete works to backfilling – total time required</a:t>
+            </a:r>
+            <a:endParaRPr lang="en-US" sz="850" dirty="0"/>
+          </a:p>
+        </p:txBody>
+      </p:sp>
+      <p:sp>
+        <p:nvSpPr>
+          <p:cNvPr id="172" name="Text 170"/>
+          <p:cNvSpPr/>
+          <p:nvPr/>
+        </p:nvSpPr>
+        <p:spPr>
+          <a:xfrm>
+            <a:off x="4224528" y="2514600"/>
+            <a:ext cx="502920" cy="274320"/>
+          </a:xfrm>
+          <a:prstGeom prst="rect">
+            <a:avLst/>
+          </a:prstGeom>
+          <a:noFill/>
+          <a:ln/>
+        </p:spPr>
+        <p:txBody>
+          <a:bodyPr wrap="square" lIns="0" tIns="0" rIns="0" bIns="0" rtlCol="0" anchor="ctr">
+            <a:normAutofit/>
+          </a:bodyPr>
+          <a:lstStyle/>
+          <a:p>
+            <a:pPr algn="ctr" indent="0" marL="0">
+              <a:buNone/>
+            </a:pPr>
+            <a:r>
+              <a:rPr lang="en-US" altLang="en-US" sz="1100" b="1" dirty="0">
+                <a:solidFill>
+                  <a:srgbClr val="222222"/>
+                </a:solidFill>
+                <a:latin typeface="Calibri" pitchFamily="34" charset="0"/>
+                <a:ea typeface="Calibri" pitchFamily="34" charset="-122"/>
+                <a:cs typeface="Calibri" pitchFamily="34" charset="-120"/>
+              </a:rPr>
+              <a:t>16</a:t>
+            </a:r>
+            <a:endParaRPr lang="en-US" sz="1100" dirty="0"/>
+          </a:p>
+        </p:txBody>
+      </p:sp>
+      <p:sp>
+        <p:nvSpPr>
+          <p:cNvPr id="173" name="Text 171"/>
+          <p:cNvSpPr/>
+          <p:nvPr/>
+        </p:nvSpPr>
+        <p:spPr>
+          <a:xfrm>
+            <a:off x="4727448" y="2514600"/>
+            <a:ext cx="658368" cy="274320"/>
+          </a:xfrm>
+          <a:prstGeom prst="rect">
+            <a:avLst/>
+          </a:prstGeom>
+          <a:noFill/>
+          <a:ln/>
+        </p:spPr>
+        <p:txBody>
+          <a:bodyPr wrap="square" lIns="0" tIns="0" rIns="0" bIns="0" rtlCol="0" anchor="ctr">
+            <a:normAutofit/>
+          </a:bodyPr>
+          <a:lstStyle/>
+          <a:p>
+            <a:pPr algn="ctr" indent="0" marL="0">
+              <a:buNone/>
+            </a:pPr>
+            <a:r>
+              <a:rPr lang="en-US" altLang="en-US" sz="850" b="1" dirty="0">
+                <a:solidFill>
+                  <a:srgbClr val="222222"/>
+                </a:solidFill>
+                <a:latin typeface="Calibri" pitchFamily="34" charset="0"/>
+                <a:ea typeface="Calibri" pitchFamily="34" charset="-122"/>
+                <a:cs typeface="Calibri" pitchFamily="34" charset="-120"/>
+              </a:rPr>
+              <a:t>27 Oct</a:t>
+            </a:r>
+            <a:endParaRPr lang="en-US" sz="850" dirty="0"/>
+          </a:p>
+        </p:txBody>
+      </p:sp>
+      <p:sp>
+        <p:nvSpPr>
+          <p:cNvPr id="174" name="Text 172"/>
+          <p:cNvSpPr/>
+          <p:nvPr/>
+        </p:nvSpPr>
+        <p:spPr>
+          <a:xfrm>
+            <a:off x="5385816" y="2514600"/>
+            <a:ext cx="658368" cy="274320"/>
+          </a:xfrm>
+          <a:prstGeom prst="rect">
+            <a:avLst/>
+          </a:prstGeom>
+          <a:noFill/>
+          <a:ln/>
+        </p:spPr>
+        <p:txBody>
+          <a:bodyPr wrap="square" lIns="0" tIns="0" rIns="0" bIns="0" rtlCol="0" anchor="ctr">
+            <a:normAutofit/>
+          </a:bodyPr>
+          <a:lstStyle/>
+          <a:p>
+            <a:pPr algn="ctr" indent="0" marL="0">
+              <a:buNone/>
+            </a:pPr>
+            <a:r>
+              <a:rPr lang="en-US" altLang="en-US" sz="850" b="1" dirty="0">
+                <a:solidFill>
+                  <a:srgbClr val="222222"/>
+                </a:solidFill>
+                <a:latin typeface="Calibri" pitchFamily="34" charset="0"/>
+                <a:ea typeface="Calibri" pitchFamily="34" charset="-122"/>
+                <a:cs typeface="Calibri" pitchFamily="34" charset="-120"/>
+              </a:rPr>
+              <a:t>14 Nov</a:t>
+            </a:r>
+            <a:endParaRPr lang="en-US" sz="850" dirty="0"/>
+          </a:p>
+        </p:txBody>
+      </p:sp>
+      <p:sp>
+        <p:nvSpPr>
+          <p:cNvPr id="175" name="Shape 173"/>
+          <p:cNvSpPr/>
+          <p:nvPr/>
+        </p:nvSpPr>
+        <p:spPr>
+          <a:xfrm>
+            <a:off x="8254854" y="2551176"/>
+            <a:ext cx="3230979" cy="201168"/>
+          </a:xfrm>
+          <a:prstGeom prst="roundRect">
+            <a:avLst>
+              <a:gd name="adj" fmla="val 18182"/>
+            </a:avLst>
+          </a:prstGeom>
+          <a:solidFill>
+            <a:srgbClr val="6C4AB6"/>
+          </a:solidFill>
+          <a:ln w="12700">
+            <a:solidFill>
+              <a:srgbClr val="6C4AB6"/>
+            </a:solidFill>
+            <a:prstDash val="solid"/>
+          </a:ln>
+        </p:spPr>
+      </p:sp>
+      <p:sp>
+        <p:nvSpPr>
+          <p:cNvPr id="176" name="Text 174"/>
+          <p:cNvSpPr/>
+          <p:nvPr/>
+        </p:nvSpPr>
+        <p:spPr>
+          <a:xfrm>
+            <a:off x="8254854" y="2551176"/>
+            <a:ext cx="3230979" cy="201168"/>
+          </a:xfrm>
+          <a:prstGeom prst="rect">
+            <a:avLst/>
+          </a:prstGeom>
+          <a:noFill/>
+          <a:ln/>
+        </p:spPr>
+        <p:txBody>
+          <a:bodyPr wrap="square" lIns="0" tIns="0" rIns="0" bIns="0" rtlCol="0" anchor="ctr">
+            <a:normAutofit/>
+          </a:bodyPr>
+          <a:lstStyle/>
+          <a:p>
+            <a:pPr algn="ctr" indent="0" marL="0">
+              <a:buNone/>
+            </a:pPr>
+            <a:r>
               <a:rPr lang="en-US" altLang="en-US" sz="800" b="1" dirty="0">
                 <a:solidFill>
                   <a:srgbClr val="FFFFFF"/>
@@ -12396,20 +12719,20 @@
       </p:sp>
       <p:sp>
         <p:nvSpPr>
-          <p:cNvPr id="168" name="Shape 166"/>
-          <p:cNvSpPr/>
-          <p:nvPr/>
-        </p:nvSpPr>
-        <p:spPr>
-          <a:xfrm>
-            <a:off x="365760" y="2514600"/>
-            <a:ext cx="5678424" cy="640080"/>
-          </a:xfrm>
-          <a:prstGeom prst="rect">
-            <a:avLst/>
-          </a:prstGeom>
-          <a:solidFill>
-            <a:srgbClr val="FBFDFD"/>
+          <p:cNvPr id="177" name="Shape 175"/>
+          <p:cNvSpPr/>
+          <p:nvPr/>
+        </p:nvSpPr>
+        <p:spPr>
+          <a:xfrm>
+            <a:off x="365760" y="2788920"/>
+            <a:ext cx="11460175" cy="223266"/>
+          </a:xfrm>
+          <a:prstGeom prst="rect">
+            <a:avLst/>
+          </a:prstGeom>
+          <a:solidFill>
+            <a:srgbClr val="FFFFFF"/>
           </a:solidFill>
           <a:ln w="6350">
             <a:solidFill>
@@ -12421,14 +12744,80 @@
       </p:sp>
       <p:sp>
         <p:nvSpPr>
-          <p:cNvPr id="169" name="Text 167"/>
-          <p:cNvSpPr/>
-          <p:nvPr/>
-        </p:nvSpPr>
-        <p:spPr>
-          <a:xfrm>
-            <a:off x="457200" y="2514600"/>
-            <a:ext cx="5495544" cy="640080"/>
+          <p:cNvPr id="178" name="Shape 176"/>
+          <p:cNvSpPr/>
+          <p:nvPr/>
+        </p:nvSpPr>
+        <p:spPr>
+          <a:xfrm>
+            <a:off x="438912" y="2781681"/>
+            <a:ext cx="237744" cy="237744"/>
+          </a:xfrm>
+          <a:prstGeom prst="ellipse">
+            <a:avLst/>
+          </a:prstGeom>
+          <a:solidFill>
+            <a:srgbClr val="C8503F"/>
+          </a:solidFill>
+          <a:ln w="19050">
+            <a:solidFill>
+              <a:srgbClr val="222222"/>
+            </a:solidFill>
+            <a:prstDash val="solid"/>
+          </a:ln>
+        </p:spPr>
+      </p:sp>
+      <p:sp>
+        <p:nvSpPr>
+          <p:cNvPr id="179" name="Text 177"/>
+          <p:cNvSpPr/>
+          <p:nvPr/>
+        </p:nvSpPr>
+        <p:spPr>
+          <a:xfrm>
+            <a:off x="365760" y="2788920"/>
+            <a:ext cx="384048" cy="223266"/>
+          </a:xfrm>
+          <a:prstGeom prst="rect">
+            <a:avLst/>
+          </a:prstGeom>
+          <a:noFill/>
+          <a:ln/>
+        </p:spPr>
+        <p:txBody>
+          <a:bodyPr wrap="square" lIns="0" tIns="0" rIns="0" bIns="0" rtlCol="0" anchor="ctr">
+            <a:normAutofit/>
+          </a:bodyPr>
+          <a:lstStyle/>
+          <a:p>
+            <a:pPr algn="ctr" indent="0" marL="0">
+              <a:buNone/>
+            </a:pPr>
+            <a:r>
+              <a:rPr lang="en-US" altLang="en-US" sz="850" b="1" dirty="0">
+                <a:solidFill>
+                  <a:srgbClr val="FFFFFF"/>
+                </a:solidFill>
+                <a:latin typeface="Calibri" pitchFamily="34" charset="0"/>
+                <a:ea typeface="Calibri" pitchFamily="34" charset="-122"/>
+                <a:cs typeface="Calibri" pitchFamily="34" charset="-120"/>
+              </a:rPr>
+              <a:t>A</a:t>
+            </a:r>
+            <a:endParaRPr lang="en-US" sz="850" dirty="0"/>
+          </a:p>
+        </p:txBody>
+      </p:sp>
+      <p:sp>
+        <p:nvSpPr>
+          <p:cNvPr id="180" name="Text 178"/>
+          <p:cNvSpPr/>
+          <p:nvPr/>
+        </p:nvSpPr>
+        <p:spPr>
+          <a:xfrm>
+            <a:off x="822960" y="2788920"/>
+            <a:ext cx="2606040" cy="223266"/>
           </a:xfrm>
           <a:prstGeom prst="rect">
             <a:avLst/>
@@ -12446,7 +12835,287 @@
               <a:buNone/>
             </a:pPr>
             <a:r>
-              <a:rPr lang="en-US" altLang="en-US" sz="1000" b="1" dirty="0">
+              <a:rPr lang="en-US" altLang="en-US" sz="750" b="1" dirty="0">
+                <a:solidFill>
+                  <a:srgbClr val="222222"/>
+                </a:solidFill>
+                <a:latin typeface="Calibri" pitchFamily="34" charset="0"/>
+                <a:ea typeface="Calibri" pitchFamily="34" charset="-122"/>
+                <a:cs typeface="Calibri" pitchFamily="34" charset="-120"/>
+              </a:rPr>
+              <a:t>Shoring system installation</a:t>
+            </a:r>
+            <a:endParaRPr lang="en-US" sz="750" dirty="0"/>
+          </a:p>
+        </p:txBody>
+      </p:sp>
+      <p:sp>
+        <p:nvSpPr>
+          <p:cNvPr id="181" name="Text 179"/>
+          <p:cNvSpPr/>
+          <p:nvPr/>
+        </p:nvSpPr>
+        <p:spPr>
+          <a:xfrm>
+            <a:off x="3447288" y="2788920"/>
+            <a:ext cx="777240" cy="223266"/>
+          </a:xfrm>
+          <a:prstGeom prst="rect">
+            <a:avLst/>
+          </a:prstGeom>
+          <a:noFill/>
+          <a:ln/>
+        </p:spPr>
+        <p:txBody>
+          <a:bodyPr wrap="square" lIns="0" tIns="0" rIns="0" bIns="0" rtlCol="0" anchor="ctr">
+            <a:normAutofit/>
+          </a:bodyPr>
+          <a:lstStyle/>
+          <a:p>
+            <a:pPr algn="ctr" indent="0" marL="0">
+              <a:buNone/>
+            </a:pPr>
+            <a:r>
+              <a:rPr lang="en-US" altLang="en-US" sz="700" dirty="0">
+                <a:solidFill>
+                  <a:srgbClr val="444444"/>
+                </a:solidFill>
+                <a:latin typeface="Calibri" pitchFamily="34" charset="0"/>
+                <a:ea typeface="Calibri" pitchFamily="34" charset="-122"/>
+                <a:cs typeface="Calibri" pitchFamily="34" charset="-120"/>
+              </a:rPr>
+              <a:t>—</a:t>
+            </a:r>
+            <a:endParaRPr lang="en-US" sz="700" dirty="0"/>
+          </a:p>
+        </p:txBody>
+      </p:sp>
+      <p:sp>
+        <p:nvSpPr>
+          <p:cNvPr id="182" name="Text 180"/>
+          <p:cNvSpPr/>
+          <p:nvPr/>
+        </p:nvSpPr>
+        <p:spPr>
+          <a:xfrm>
+            <a:off x="4224528" y="2788920"/>
+            <a:ext cx="502920" cy="223266"/>
+          </a:xfrm>
+          <a:prstGeom prst="rect">
+            <a:avLst/>
+          </a:prstGeom>
+          <a:noFill/>
+          <a:ln/>
+        </p:spPr>
+        <p:txBody>
+          <a:bodyPr wrap="square" lIns="0" tIns="0" rIns="0" bIns="0" rtlCol="0" anchor="ctr">
+            <a:normAutofit/>
+          </a:bodyPr>
+          <a:lstStyle/>
+          <a:p>
+            <a:pPr algn="ctr" indent="0" marL="0">
+              <a:buNone/>
+            </a:pPr>
+            <a:r>
+              <a:rPr lang="en-US" altLang="en-US" sz="900" b="1" dirty="0">
+                <a:solidFill>
+                  <a:srgbClr val="222222"/>
+                </a:solidFill>
+                <a:latin typeface="Calibri" pitchFamily="34" charset="0"/>
+                <a:ea typeface="Calibri" pitchFamily="34" charset="-122"/>
+                <a:cs typeface="Calibri" pitchFamily="34" charset="-120"/>
+              </a:rPr>
+              <a:t>4</a:t>
+            </a:r>
+            <a:endParaRPr lang="en-US" sz="900" dirty="0"/>
+          </a:p>
+        </p:txBody>
+      </p:sp>
+      <p:sp>
+        <p:nvSpPr>
+          <p:cNvPr id="183" name="Text 181"/>
+          <p:cNvSpPr/>
+          <p:nvPr/>
+        </p:nvSpPr>
+        <p:spPr>
+          <a:xfrm>
+            <a:off x="4727448" y="2788920"/>
+            <a:ext cx="658368" cy="223266"/>
+          </a:xfrm>
+          <a:prstGeom prst="rect">
+            <a:avLst/>
+          </a:prstGeom>
+          <a:noFill/>
+          <a:ln/>
+        </p:spPr>
+        <p:txBody>
+          <a:bodyPr wrap="square" lIns="0" tIns="0" rIns="0" bIns="0" rtlCol="0" anchor="ctr">
+            <a:normAutofit/>
+          </a:bodyPr>
+          <a:lstStyle/>
+          <a:p>
+            <a:pPr algn="ctr" indent="0" marL="0">
+              <a:buNone/>
+            </a:pPr>
+            <a:r>
+              <a:rPr lang="en-US" altLang="en-US" sz="700" b="1" dirty="0">
+                <a:solidFill>
+                  <a:srgbClr val="222222"/>
+                </a:solidFill>
+                <a:latin typeface="Calibri" pitchFamily="34" charset="0"/>
+                <a:ea typeface="Calibri" pitchFamily="34" charset="-122"/>
+                <a:cs typeface="Calibri" pitchFamily="34" charset="-120"/>
+              </a:rPr>
+              <a:t>22 Oct</a:t>
+            </a:r>
+            <a:endParaRPr lang="en-US" sz="700" dirty="0"/>
+          </a:p>
+        </p:txBody>
+      </p:sp>
+      <p:sp>
+        <p:nvSpPr>
+          <p:cNvPr id="184" name="Text 182"/>
+          <p:cNvSpPr/>
+          <p:nvPr/>
+        </p:nvSpPr>
+        <p:spPr>
+          <a:xfrm>
+            <a:off x="5385816" y="2788920"/>
+            <a:ext cx="658368" cy="223266"/>
+          </a:xfrm>
+          <a:prstGeom prst="rect">
+            <a:avLst/>
+          </a:prstGeom>
+          <a:noFill/>
+          <a:ln/>
+        </p:spPr>
+        <p:txBody>
+          <a:bodyPr wrap="square" lIns="0" tIns="0" rIns="0" bIns="0" rtlCol="0" anchor="ctr">
+            <a:normAutofit/>
+          </a:bodyPr>
+          <a:lstStyle/>
+          <a:p>
+            <a:pPr algn="ctr" indent="0" marL="0">
+              <a:buNone/>
+            </a:pPr>
+            <a:r>
+              <a:rPr lang="en-US" altLang="en-US" sz="700" b="1" dirty="0">
+                <a:solidFill>
+                  <a:srgbClr val="222222"/>
+                </a:solidFill>
+                <a:latin typeface="Calibri" pitchFamily="34" charset="0"/>
+                <a:ea typeface="Calibri" pitchFamily="34" charset="-122"/>
+                <a:cs typeface="Calibri" pitchFamily="34" charset="-120"/>
+              </a:rPr>
+              <a:t>26 Oct</a:t>
+            </a:r>
+            <a:endParaRPr lang="en-US" sz="700" dirty="0"/>
+          </a:p>
+        </p:txBody>
+      </p:sp>
+      <p:sp>
+        <p:nvSpPr>
+          <p:cNvPr id="185" name="Shape 183"/>
+          <p:cNvSpPr/>
+          <p:nvPr/>
+        </p:nvSpPr>
+        <p:spPr>
+          <a:xfrm>
+            <a:off x="7404596" y="2841117"/>
+            <a:ext cx="850258" cy="64008"/>
+          </a:xfrm>
+          <a:prstGeom prst="rect">
+            <a:avLst/>
+          </a:prstGeom>
+          <a:solidFill>
+            <a:srgbClr val="C8503F"/>
+          </a:solidFill>
+          <a:ln w="12700">
+            <a:solidFill>
+              <a:srgbClr val="C8503F"/>
+            </a:solidFill>
+            <a:prstDash val="solid"/>
+          </a:ln>
+        </p:spPr>
+      </p:sp>
+      <p:sp>
+        <p:nvSpPr>
+          <p:cNvPr id="186" name="Shape 184"/>
+          <p:cNvSpPr/>
+          <p:nvPr/>
+        </p:nvSpPr>
+        <p:spPr>
+          <a:xfrm flipV="1">
+            <a:off x="7404596" y="2905125"/>
+            <a:ext cx="64008" cy="54864"/>
+          </a:xfrm>
+          <a:prstGeom prst="triangle">
+            <a:avLst/>
+          </a:prstGeom>
+          <a:solidFill>
+            <a:srgbClr val="C8503F"/>
+          </a:solidFill>
+          <a:ln w="12700">
+            <a:solidFill>
+              <a:srgbClr val="C8503F"/>
+            </a:solidFill>
+            <a:prstDash val="solid"/>
+          </a:ln>
+        </p:spPr>
+      </p:sp>
+      <p:sp>
+        <p:nvSpPr>
+          <p:cNvPr id="187" name="Shape 185"/>
+          <p:cNvSpPr/>
+          <p:nvPr/>
+        </p:nvSpPr>
+        <p:spPr>
+          <a:xfrm flipV="1">
+            <a:off x="8190846" y="2905125"/>
+            <a:ext cx="64008" cy="54864"/>
+          </a:xfrm>
+          <a:prstGeom prst="triangle">
+            <a:avLst/>
+          </a:prstGeom>
+          <a:solidFill>
+            <a:srgbClr val="C8503F"/>
+          </a:solidFill>
+          <a:ln w="12700">
+            <a:solidFill>
+              <a:srgbClr val="C8503F"/>
+            </a:solidFill>
+            <a:prstDash val="solid"/>
+          </a:ln>
+        </p:spPr>
+      </p:sp>
+      <p:sp>
+        <p:nvSpPr>
+          <p:cNvPr id="188" name="Text 186"/>
+          <p:cNvSpPr/>
+          <p:nvPr/>
+        </p:nvSpPr>
+        <p:spPr>
+          <a:xfrm>
+            <a:off x="8300574" y="2788920"/>
+            <a:ext cx="548640" cy="223266"/>
+          </a:xfrm>
+          <a:prstGeom prst="rect">
+            <a:avLst/>
+          </a:prstGeom>
+          <a:noFill/>
+          <a:ln/>
+        </p:spPr>
+        <p:txBody>
+          <a:bodyPr wrap="square" lIns="0" tIns="0" rIns="0" bIns="0" rtlCol="0" anchor="ctr">
+            <a:normAutofit/>
+          </a:bodyPr>
+          <a:lstStyle/>
+          <a:p>
+            <a:pPr algn="l" indent="0" marL="0">
+              <a:buNone/>
+            </a:pPr>
+            <a:r>
+              <a:rPr lang="en-US" altLang="en-US" sz="750" b="1" dirty="0">
                 <a:solidFill>
                   <a:srgbClr val="3D3935"/>
                 </a:solidFill>
@@ -12454,114 +13123,7 @@
                 <a:ea typeface="Calibri" pitchFamily="34" charset="-122"/>
                 <a:cs typeface="Calibri" pitchFamily="34" charset="-120"/>
               </a:rPr>
-              <a:t>◆  Milestone</a:t>
-            </a:r>
-            <a:endParaRPr lang="en-US" sz="1000" dirty="0"/>
-          </a:p>
-        </p:txBody>
-      </p:sp>
-      <p:sp>
-        <p:nvSpPr>
-          <p:cNvPr id="170" name="Shape 168"/>
-          <p:cNvSpPr/>
-          <p:nvPr/>
-        </p:nvSpPr>
-        <p:spPr>
-          <a:xfrm>
-            <a:off x="7407326" y="2752344"/>
-            <a:ext cx="164592" cy="164592"/>
-          </a:xfrm>
-          <a:prstGeom prst="diamond">
-            <a:avLst/>
-          </a:prstGeom>
-          <a:solidFill>
-            <a:srgbClr val="3D3935"/>
-          </a:solidFill>
-          <a:ln w="19050">
-            <a:solidFill>
-              <a:srgbClr val="FFFFFF"/>
-            </a:solidFill>
-            <a:prstDash val="solid"/>
-          </a:ln>
-        </p:spPr>
-      </p:sp>
-      <p:sp>
-        <p:nvSpPr>
-          <p:cNvPr id="171" name="Text 169"/>
-          <p:cNvSpPr/>
-          <p:nvPr/>
-        </p:nvSpPr>
-        <p:spPr>
-          <a:xfrm>
-            <a:off x="6666662" y="2926080"/>
-            <a:ext cx="1645920" cy="100584"/>
-          </a:xfrm>
-          <a:prstGeom prst="rect">
-            <a:avLst/>
-          </a:prstGeom>
-          <a:noFill/>
-          <a:ln/>
-        </p:spPr>
-        <p:txBody>
-          <a:bodyPr wrap="square" lIns="0" tIns="0" rIns="0" bIns="0" rtlCol="0" anchor="t">
-            <a:normAutofit/>
-          </a:bodyPr>
-          <a:lstStyle/>
-          <a:p>
-            <a:pPr algn="ctr" indent="0" marL="0">
-              <a:buNone/>
-            </a:pPr>
-            <a:r>
-              <a:rPr lang="en-US" altLang="en-US" sz="550" dirty="0">
-                <a:solidFill>
-                  <a:srgbClr val="556070"/>
-                </a:solidFill>
-                <a:latin typeface="Calibri" pitchFamily="34" charset="0"/>
-                <a:ea typeface="Calibri" pitchFamily="34" charset="-122"/>
-                <a:cs typeface="Calibri" pitchFamily="34" charset="-120"/>
-              </a:rPr>
-              <a:t>Commencement</a:t>
-            </a:r>
-            <a:endParaRPr lang="en-US" sz="550" dirty="0"/>
-          </a:p>
-        </p:txBody>
-      </p:sp>
-      <p:sp>
-        <p:nvSpPr>
-          <p:cNvPr id="172" name="Text 170"/>
-          <p:cNvSpPr/>
-          <p:nvPr/>
-        </p:nvSpPr>
-        <p:spPr>
-          <a:xfrm>
-            <a:off x="6666662" y="3017520"/>
-            <a:ext cx="1645920" cy="128016"/>
-          </a:xfrm>
-          <a:prstGeom prst="rect">
-            <a:avLst/>
-          </a:prstGeom>
-          <a:noFill/>
-          <a:ln/>
-        </p:spPr>
-        <p:txBody>
-          <a:bodyPr wrap="square" lIns="0" tIns="0" rIns="0" bIns="0" rtlCol="0" anchor="ctr">
-            <a:normAutofit/>
-          </a:bodyPr>
-          <a:lstStyle/>
-          <a:p>
-            <a:pPr algn="ctr" indent="0" marL="0">
-              <a:buNone/>
-            </a:pPr>
-            <a:r>
-              <a:rPr lang="en-US" altLang="en-US" sz="750" b="1" dirty="0">
-                <a:solidFill>
-                  <a:srgbClr val="3D3935"/>
-                </a:solidFill>
-                <a:latin typeface="Calibri" pitchFamily="34" charset="0"/>
-                <a:ea typeface="Calibri" pitchFamily="34" charset="-122"/>
-                <a:cs typeface="Calibri" pitchFamily="34" charset="-120"/>
-              </a:rPr>
-              <a:t>22 Oct</a:t>
+              <a:t>4 d</a:t>
             </a:r>
             <a:endParaRPr lang="en-US" sz="750" dirty="0"/>
           </a:p>
@@ -12569,448 +13131,20 @@
       </p:sp>
       <p:sp>
         <p:nvSpPr>
-          <p:cNvPr id="173" name="Shape 171"/>
-          <p:cNvSpPr/>
-          <p:nvPr/>
-        </p:nvSpPr>
-        <p:spPr>
-          <a:xfrm>
-            <a:off x="8087532" y="2752344"/>
-            <a:ext cx="164592" cy="164592"/>
-          </a:xfrm>
-          <a:prstGeom prst="diamond">
-            <a:avLst/>
-          </a:prstGeom>
-          <a:solidFill>
-            <a:srgbClr val="3D3935"/>
-          </a:solidFill>
-          <a:ln w="19050">
-            <a:solidFill>
-              <a:srgbClr val="FFFFFF"/>
-            </a:solidFill>
-            <a:prstDash val="solid"/>
-          </a:ln>
-        </p:spPr>
-      </p:sp>
-      <p:sp>
-        <p:nvSpPr>
-          <p:cNvPr id="174" name="Text 172"/>
-          <p:cNvSpPr/>
-          <p:nvPr/>
-        </p:nvSpPr>
-        <p:spPr>
-          <a:xfrm>
-            <a:off x="7346868" y="2514600"/>
-            <a:ext cx="1645920" cy="109728"/>
-          </a:xfrm>
-          <a:prstGeom prst="rect">
-            <a:avLst/>
-          </a:prstGeom>
-          <a:noFill/>
-          <a:ln/>
-        </p:spPr>
-        <p:txBody>
-          <a:bodyPr wrap="square" lIns="0" tIns="0" rIns="0" bIns="0" rtlCol="0" anchor="b">
-            <a:normAutofit/>
-          </a:bodyPr>
-          <a:lstStyle/>
-          <a:p>
-            <a:pPr algn="ctr" indent="0" marL="0">
-              <a:buNone/>
-            </a:pPr>
-            <a:r>
-              <a:rPr lang="en-US" altLang="en-US" sz="550" dirty="0">
-                <a:solidFill>
-                  <a:srgbClr val="556070"/>
-                </a:solidFill>
-                <a:latin typeface="Calibri" pitchFamily="34" charset="0"/>
-                <a:ea typeface="Calibri" pitchFamily="34" charset="-122"/>
-                <a:cs typeface="Calibri" pitchFamily="34" charset="-120"/>
-              </a:rPr>
-              <a:t>Shoring installation complete</a:t>
-            </a:r>
-            <a:endParaRPr lang="en-US" sz="550" dirty="0"/>
-          </a:p>
-        </p:txBody>
-      </p:sp>
-      <p:sp>
-        <p:nvSpPr>
-          <p:cNvPr id="175" name="Text 173"/>
-          <p:cNvSpPr/>
-          <p:nvPr/>
-        </p:nvSpPr>
-        <p:spPr>
-          <a:xfrm>
-            <a:off x="7346868" y="2624328"/>
-            <a:ext cx="1645920" cy="118872"/>
-          </a:xfrm>
-          <a:prstGeom prst="rect">
-            <a:avLst/>
-          </a:prstGeom>
-          <a:noFill/>
-          <a:ln/>
-        </p:spPr>
-        <p:txBody>
-          <a:bodyPr wrap="square" lIns="0" tIns="0" rIns="0" bIns="0" rtlCol="0" anchor="ctr">
-            <a:normAutofit/>
-          </a:bodyPr>
-          <a:lstStyle/>
-          <a:p>
-            <a:pPr algn="ctr" indent="0" marL="0">
-              <a:buNone/>
-            </a:pPr>
-            <a:r>
-              <a:rPr lang="en-US" altLang="en-US" sz="750" b="1" dirty="0">
-                <a:solidFill>
-                  <a:srgbClr val="3D3935"/>
-                </a:solidFill>
-                <a:latin typeface="Calibri" pitchFamily="34" charset="0"/>
-                <a:ea typeface="Calibri" pitchFamily="34" charset="-122"/>
-                <a:cs typeface="Calibri" pitchFamily="34" charset="-120"/>
-              </a:rPr>
-              <a:t>26 Oct</a:t>
-            </a:r>
-            <a:endParaRPr lang="en-US" sz="750" dirty="0"/>
-          </a:p>
-        </p:txBody>
-      </p:sp>
-      <p:sp>
-        <p:nvSpPr>
-          <p:cNvPr id="176" name="Shape 174"/>
-          <p:cNvSpPr/>
-          <p:nvPr/>
-        </p:nvSpPr>
-        <p:spPr>
-          <a:xfrm>
-            <a:off x="10128150" y="2752344"/>
-            <a:ext cx="164592" cy="164592"/>
-          </a:xfrm>
-          <a:prstGeom prst="diamond">
-            <a:avLst/>
-          </a:prstGeom>
-          <a:solidFill>
-            <a:srgbClr val="3D3935"/>
-          </a:solidFill>
-          <a:ln w="19050">
-            <a:solidFill>
-              <a:srgbClr val="FFFFFF"/>
-            </a:solidFill>
-            <a:prstDash val="solid"/>
-          </a:ln>
-        </p:spPr>
-      </p:sp>
-      <p:sp>
-        <p:nvSpPr>
-          <p:cNvPr id="177" name="Text 175"/>
-          <p:cNvSpPr/>
-          <p:nvPr/>
-        </p:nvSpPr>
-        <p:spPr>
-          <a:xfrm>
-            <a:off x="9387486" y="2926080"/>
-            <a:ext cx="1645920" cy="100584"/>
-          </a:xfrm>
-          <a:prstGeom prst="rect">
-            <a:avLst/>
-          </a:prstGeom>
-          <a:noFill/>
-          <a:ln/>
-        </p:spPr>
-        <p:txBody>
-          <a:bodyPr wrap="square" lIns="0" tIns="0" rIns="0" bIns="0" rtlCol="0" anchor="t">
-            <a:normAutofit/>
-          </a:bodyPr>
-          <a:lstStyle/>
-          <a:p>
-            <a:pPr algn="ctr" indent="0" marL="0">
-              <a:buNone/>
-            </a:pPr>
-            <a:r>
-              <a:rPr lang="en-US" altLang="en-US" sz="550" dirty="0">
-                <a:solidFill>
-                  <a:srgbClr val="556070"/>
-                </a:solidFill>
-                <a:latin typeface="Calibri" pitchFamily="34" charset="0"/>
-                <a:ea typeface="Calibri" pitchFamily="34" charset="-122"/>
-                <a:cs typeface="Calibri" pitchFamily="34" charset="-120"/>
-              </a:rPr>
-              <a:t>Pit works complete (pit wall)</a:t>
-            </a:r>
-            <a:endParaRPr lang="en-US" sz="550" dirty="0"/>
-          </a:p>
-        </p:txBody>
-      </p:sp>
-      <p:sp>
-        <p:nvSpPr>
-          <p:cNvPr id="178" name="Text 176"/>
-          <p:cNvSpPr/>
-          <p:nvPr/>
-        </p:nvSpPr>
-        <p:spPr>
-          <a:xfrm>
-            <a:off x="9387486" y="3017520"/>
-            <a:ext cx="1645920" cy="128016"/>
-          </a:xfrm>
-          <a:prstGeom prst="rect">
-            <a:avLst/>
-          </a:prstGeom>
-          <a:noFill/>
-          <a:ln/>
-        </p:spPr>
-        <p:txBody>
-          <a:bodyPr wrap="square" lIns="0" tIns="0" rIns="0" bIns="0" rtlCol="0" anchor="ctr">
-            <a:normAutofit/>
-          </a:bodyPr>
-          <a:lstStyle/>
-          <a:p>
-            <a:pPr algn="ctr" indent="0" marL="0">
-              <a:buNone/>
-            </a:pPr>
-            <a:r>
-              <a:rPr lang="en-US" altLang="en-US" sz="750" b="1" dirty="0">
-                <a:solidFill>
-                  <a:srgbClr val="3D3935"/>
-                </a:solidFill>
-                <a:latin typeface="Calibri" pitchFamily="34" charset="0"/>
-                <a:ea typeface="Calibri" pitchFamily="34" charset="-122"/>
-                <a:cs typeface="Calibri" pitchFamily="34" charset="-120"/>
-              </a:rPr>
-              <a:t>7 Nov</a:t>
-            </a:r>
-            <a:endParaRPr lang="en-US" sz="750" dirty="0"/>
-          </a:p>
-        </p:txBody>
-      </p:sp>
-      <p:sp>
-        <p:nvSpPr>
-          <p:cNvPr id="179" name="Shape 177"/>
-          <p:cNvSpPr/>
-          <p:nvPr/>
-        </p:nvSpPr>
-        <p:spPr>
-          <a:xfrm>
-            <a:off x="10638304" y="2752344"/>
-            <a:ext cx="164592" cy="164592"/>
-          </a:xfrm>
-          <a:prstGeom prst="diamond">
-            <a:avLst/>
-          </a:prstGeom>
-          <a:solidFill>
-            <a:srgbClr val="3D3935"/>
-          </a:solidFill>
-          <a:ln w="19050">
-            <a:solidFill>
-              <a:srgbClr val="FFFFFF"/>
-            </a:solidFill>
-            <a:prstDash val="solid"/>
-          </a:ln>
-        </p:spPr>
-      </p:sp>
-      <p:sp>
-        <p:nvSpPr>
-          <p:cNvPr id="180" name="Text 178"/>
-          <p:cNvSpPr/>
-          <p:nvPr/>
-        </p:nvSpPr>
-        <p:spPr>
-          <a:xfrm>
-            <a:off x="9897640" y="2514600"/>
-            <a:ext cx="1645920" cy="109728"/>
-          </a:xfrm>
-          <a:prstGeom prst="rect">
-            <a:avLst/>
-          </a:prstGeom>
-          <a:noFill/>
-          <a:ln/>
-        </p:spPr>
-        <p:txBody>
-          <a:bodyPr wrap="square" lIns="0" tIns="0" rIns="0" bIns="0" rtlCol="0" anchor="b">
-            <a:normAutofit/>
-          </a:bodyPr>
-          <a:lstStyle/>
-          <a:p>
-            <a:pPr algn="ctr" indent="0" marL="0">
-              <a:buNone/>
-            </a:pPr>
-            <a:r>
-              <a:rPr lang="en-US" altLang="en-US" sz="550" dirty="0">
-                <a:solidFill>
-                  <a:srgbClr val="556070"/>
-                </a:solidFill>
-                <a:latin typeface="Calibri" pitchFamily="34" charset="0"/>
-                <a:ea typeface="Calibri" pitchFamily="34" charset="-122"/>
-                <a:cs typeface="Calibri" pitchFamily="34" charset="-120"/>
-              </a:rPr>
-              <a:t>Building foundation complete</a:t>
-            </a:r>
-            <a:endParaRPr lang="en-US" sz="550" dirty="0"/>
-          </a:p>
-        </p:txBody>
-      </p:sp>
-      <p:sp>
-        <p:nvSpPr>
-          <p:cNvPr id="181" name="Text 179"/>
-          <p:cNvSpPr/>
-          <p:nvPr/>
-        </p:nvSpPr>
-        <p:spPr>
-          <a:xfrm>
-            <a:off x="9897640" y="2624328"/>
-            <a:ext cx="1645920" cy="118872"/>
-          </a:xfrm>
-          <a:prstGeom prst="rect">
-            <a:avLst/>
-          </a:prstGeom>
-          <a:noFill/>
-          <a:ln/>
-        </p:spPr>
-        <p:txBody>
-          <a:bodyPr wrap="square" lIns="0" tIns="0" rIns="0" bIns="0" rtlCol="0" anchor="ctr">
-            <a:normAutofit/>
-          </a:bodyPr>
-          <a:lstStyle/>
-          <a:p>
-            <a:pPr algn="ctr" indent="0" marL="0">
-              <a:buNone/>
-            </a:pPr>
-            <a:r>
-              <a:rPr lang="en-US" altLang="en-US" sz="750" b="1" dirty="0">
-                <a:solidFill>
-                  <a:srgbClr val="3D3935"/>
-                </a:solidFill>
-                <a:latin typeface="Calibri" pitchFamily="34" charset="0"/>
-                <a:ea typeface="Calibri" pitchFamily="34" charset="-122"/>
-                <a:cs typeface="Calibri" pitchFamily="34" charset="-120"/>
-              </a:rPr>
-              <a:t>10 Nov</a:t>
-            </a:r>
-            <a:endParaRPr lang="en-US" sz="750" dirty="0"/>
-          </a:p>
-        </p:txBody>
-      </p:sp>
-      <p:sp>
-        <p:nvSpPr>
-          <p:cNvPr id="182" name="Shape 180"/>
-          <p:cNvSpPr/>
-          <p:nvPr/>
-        </p:nvSpPr>
-        <p:spPr>
-          <a:xfrm>
-            <a:off x="11318510" y="2752344"/>
-            <a:ext cx="164592" cy="164592"/>
-          </a:xfrm>
-          <a:prstGeom prst="diamond">
-            <a:avLst/>
-          </a:prstGeom>
-          <a:solidFill>
-            <a:srgbClr val="3D3935"/>
-          </a:solidFill>
-          <a:ln w="19050">
-            <a:solidFill>
-              <a:srgbClr val="FFFFFF"/>
-            </a:solidFill>
-            <a:prstDash val="solid"/>
-          </a:ln>
-        </p:spPr>
-      </p:sp>
-      <p:sp>
-        <p:nvSpPr>
-          <p:cNvPr id="183" name="Text 181"/>
-          <p:cNvSpPr/>
-          <p:nvPr/>
-        </p:nvSpPr>
-        <p:spPr>
-          <a:xfrm>
-            <a:off x="10577846" y="2926080"/>
-            <a:ext cx="1645920" cy="100584"/>
-          </a:xfrm>
-          <a:prstGeom prst="rect">
-            <a:avLst/>
-          </a:prstGeom>
-          <a:noFill/>
-          <a:ln/>
-        </p:spPr>
-        <p:txBody>
-          <a:bodyPr wrap="square" lIns="0" tIns="0" rIns="0" bIns="0" rtlCol="0" anchor="t">
-            <a:normAutofit/>
-          </a:bodyPr>
-          <a:lstStyle/>
-          <a:p>
-            <a:pPr algn="ctr" indent="0" marL="0">
-              <a:buNone/>
-            </a:pPr>
-            <a:r>
-              <a:rPr lang="en-US" altLang="en-US" sz="550" dirty="0">
-                <a:solidFill>
-                  <a:srgbClr val="556070"/>
-                </a:solidFill>
-                <a:latin typeface="Calibri" pitchFamily="34" charset="0"/>
-                <a:ea typeface="Calibri" pitchFamily="34" charset="-122"/>
-                <a:cs typeface="Calibri" pitchFamily="34" charset="-120"/>
-              </a:rPr>
-              <a:t>Overall completion</a:t>
-            </a:r>
-            <a:endParaRPr lang="en-US" sz="550" dirty="0"/>
-          </a:p>
-        </p:txBody>
-      </p:sp>
-      <p:sp>
-        <p:nvSpPr>
-          <p:cNvPr id="184" name="Text 182"/>
-          <p:cNvSpPr/>
-          <p:nvPr/>
-        </p:nvSpPr>
-        <p:spPr>
-          <a:xfrm>
-            <a:off x="10577846" y="3017520"/>
-            <a:ext cx="1645920" cy="128016"/>
-          </a:xfrm>
-          <a:prstGeom prst="rect">
-            <a:avLst/>
-          </a:prstGeom>
-          <a:noFill/>
-          <a:ln/>
-        </p:spPr>
-        <p:txBody>
-          <a:bodyPr wrap="square" lIns="0" tIns="0" rIns="0" bIns="0" rtlCol="0" anchor="ctr">
-            <a:normAutofit/>
-          </a:bodyPr>
-          <a:lstStyle/>
-          <a:p>
-            <a:pPr algn="ctr" indent="0" marL="0">
-              <a:buNone/>
-            </a:pPr>
-            <a:r>
-              <a:rPr lang="en-US" altLang="en-US" sz="750" b="1" dirty="0">
-                <a:solidFill>
-                  <a:srgbClr val="3D3935"/>
-                </a:solidFill>
-                <a:latin typeface="Calibri" pitchFamily="34" charset="0"/>
-                <a:ea typeface="Calibri" pitchFamily="34" charset="-122"/>
-                <a:cs typeface="Calibri" pitchFamily="34" charset="-120"/>
-              </a:rPr>
-              <a:t>14 Nov</a:t>
-            </a:r>
-            <a:endParaRPr lang="en-US" sz="750" dirty="0"/>
-          </a:p>
-        </p:txBody>
-      </p:sp>
-      <p:sp>
-        <p:nvSpPr>
-          <p:cNvPr id="185" name="Shape 183"/>
-          <p:cNvSpPr/>
-          <p:nvPr/>
-        </p:nvSpPr>
-        <p:spPr>
-          <a:xfrm>
-            <a:off x="365760" y="3154680"/>
-            <a:ext cx="11460175" cy="192786"/>
-          </a:xfrm>
-          <a:prstGeom prst="rect">
-            <a:avLst/>
-          </a:prstGeom>
-          <a:solidFill>
-            <a:srgbClr val="FFFFFF"/>
+          <p:cNvPr id="189" name="Shape 187"/>
+          <p:cNvSpPr/>
+          <p:nvPr/>
+        </p:nvSpPr>
+        <p:spPr>
+          <a:xfrm>
+            <a:off x="365760" y="3012186"/>
+            <a:ext cx="11460175" cy="223266"/>
+          </a:xfrm>
+          <a:prstGeom prst="rect">
+            <a:avLst/>
+          </a:prstGeom>
+          <a:solidFill>
+            <a:srgbClr val="F6F9FA"/>
           </a:solidFill>
           <a:ln w="6350">
             <a:solidFill>
@@ -13022,425 +13156,13 @@
       </p:sp>
       <p:sp>
         <p:nvSpPr>
-          <p:cNvPr id="186" name="Shape 184"/>
-          <p:cNvSpPr/>
-          <p:nvPr/>
-        </p:nvSpPr>
-        <p:spPr>
-          <a:xfrm>
-            <a:off x="438912" y="3132201"/>
-            <a:ext cx="237744" cy="237744"/>
-          </a:xfrm>
-          <a:prstGeom prst="ellipse">
-            <a:avLst/>
-          </a:prstGeom>
-          <a:solidFill>
-            <a:srgbClr val="C8503F"/>
-          </a:solidFill>
-          <a:ln w="19050">
-            <a:solidFill>
-              <a:srgbClr val="222222"/>
-            </a:solidFill>
-            <a:prstDash val="solid"/>
-          </a:ln>
-        </p:spPr>
-      </p:sp>
-      <p:sp>
-        <p:nvSpPr>
-          <p:cNvPr id="187" name="Text 185"/>
-          <p:cNvSpPr/>
-          <p:nvPr/>
-        </p:nvSpPr>
-        <p:spPr>
-          <a:xfrm>
-            <a:off x="365760" y="3154680"/>
-            <a:ext cx="384048" cy="192786"/>
-          </a:xfrm>
-          <a:prstGeom prst="rect">
-            <a:avLst/>
-          </a:prstGeom>
-          <a:noFill/>
-          <a:ln/>
-        </p:spPr>
-        <p:txBody>
-          <a:bodyPr wrap="square" lIns="0" tIns="0" rIns="0" bIns="0" rtlCol="0" anchor="ctr">
-            <a:normAutofit/>
-          </a:bodyPr>
-          <a:lstStyle/>
-          <a:p>
-            <a:pPr algn="ctr" indent="0" marL="0">
-              <a:buNone/>
-            </a:pPr>
-            <a:r>
-              <a:rPr lang="en-US" altLang="en-US" sz="850" b="1" dirty="0">
-                <a:solidFill>
-                  <a:srgbClr val="FFFFFF"/>
-                </a:solidFill>
-                <a:latin typeface="Calibri" pitchFamily="34" charset="0"/>
-                <a:ea typeface="Calibri" pitchFamily="34" charset="-122"/>
-                <a:cs typeface="Calibri" pitchFamily="34" charset="-120"/>
-              </a:rPr>
-              <a:t>A</a:t>
-            </a:r>
-            <a:endParaRPr lang="en-US" sz="850" dirty="0"/>
-          </a:p>
-        </p:txBody>
-      </p:sp>
-      <p:sp>
-        <p:nvSpPr>
-          <p:cNvPr id="188" name="Text 186"/>
-          <p:cNvSpPr/>
-          <p:nvPr/>
-        </p:nvSpPr>
-        <p:spPr>
-          <a:xfrm>
-            <a:off x="822960" y="3154680"/>
-            <a:ext cx="2606040" cy="192786"/>
-          </a:xfrm>
-          <a:prstGeom prst="rect">
-            <a:avLst/>
-          </a:prstGeom>
-          <a:noFill/>
-          <a:ln/>
-        </p:spPr>
-        <p:txBody>
-          <a:bodyPr wrap="square" lIns="0" tIns="0" rIns="0" bIns="0" rtlCol="0" anchor="ctr">
-            <a:normAutofit/>
-          </a:bodyPr>
-          <a:lstStyle/>
-          <a:p>
-            <a:pPr algn="l" indent="0" marL="0">
-              <a:buNone/>
-            </a:pPr>
-            <a:r>
-              <a:rPr lang="en-US" altLang="en-US" sz="750" b="1" dirty="0">
-                <a:solidFill>
-                  <a:srgbClr val="222222"/>
-                </a:solidFill>
-                <a:latin typeface="Calibri" pitchFamily="34" charset="0"/>
-                <a:ea typeface="Calibri" pitchFamily="34" charset="-122"/>
-                <a:cs typeface="Calibri" pitchFamily="34" charset="-120"/>
-              </a:rPr>
-              <a:t>Shoring system installation</a:t>
-            </a:r>
-            <a:endParaRPr lang="en-US" sz="750" dirty="0"/>
-          </a:p>
-        </p:txBody>
-      </p:sp>
-      <p:sp>
-        <p:nvSpPr>
-          <p:cNvPr id="189" name="Text 187"/>
-          <p:cNvSpPr/>
-          <p:nvPr/>
-        </p:nvSpPr>
-        <p:spPr>
-          <a:xfrm>
-            <a:off x="3447288" y="3154680"/>
-            <a:ext cx="777240" cy="192786"/>
-          </a:xfrm>
-          <a:prstGeom prst="rect">
-            <a:avLst/>
-          </a:prstGeom>
-          <a:noFill/>
-          <a:ln/>
-        </p:spPr>
-        <p:txBody>
-          <a:bodyPr wrap="square" lIns="0" tIns="0" rIns="0" bIns="0" rtlCol="0" anchor="ctr">
-            <a:normAutofit/>
-          </a:bodyPr>
-          <a:lstStyle/>
-          <a:p>
-            <a:pPr algn="ctr" indent="0" marL="0">
-              <a:buNone/>
-            </a:pPr>
-            <a:r>
-              <a:rPr lang="en-US" altLang="en-US" sz="700" dirty="0">
-                <a:solidFill>
-                  <a:srgbClr val="444444"/>
-                </a:solidFill>
-                <a:latin typeface="Calibri" pitchFamily="34" charset="0"/>
-                <a:ea typeface="Calibri" pitchFamily="34" charset="-122"/>
-                <a:cs typeface="Calibri" pitchFamily="34" charset="-120"/>
-              </a:rPr>
-              <a:t>—</a:t>
-            </a:r>
-            <a:endParaRPr lang="en-US" sz="700" dirty="0"/>
-          </a:p>
-        </p:txBody>
-      </p:sp>
-      <p:sp>
-        <p:nvSpPr>
-          <p:cNvPr id="190" name="Text 188"/>
-          <p:cNvSpPr/>
-          <p:nvPr/>
-        </p:nvSpPr>
-        <p:spPr>
-          <a:xfrm>
-            <a:off x="4224528" y="3154680"/>
-            <a:ext cx="502920" cy="192786"/>
-          </a:xfrm>
-          <a:prstGeom prst="rect">
-            <a:avLst/>
-          </a:prstGeom>
-          <a:noFill/>
-          <a:ln/>
-        </p:spPr>
-        <p:txBody>
-          <a:bodyPr wrap="square" lIns="0" tIns="0" rIns="0" bIns="0" rtlCol="0" anchor="ctr">
-            <a:normAutofit/>
-          </a:bodyPr>
-          <a:lstStyle/>
-          <a:p>
-            <a:pPr algn="ctr" indent="0" marL="0">
-              <a:buNone/>
-            </a:pPr>
-            <a:r>
-              <a:rPr lang="en-US" altLang="en-US" sz="900" b="1" dirty="0">
-                <a:solidFill>
-                  <a:srgbClr val="222222"/>
-                </a:solidFill>
-                <a:latin typeface="Calibri" pitchFamily="34" charset="0"/>
-                <a:ea typeface="Calibri" pitchFamily="34" charset="-122"/>
-                <a:cs typeface="Calibri" pitchFamily="34" charset="-120"/>
-              </a:rPr>
-              <a:t>4</a:t>
-            </a:r>
-            <a:endParaRPr lang="en-US" sz="900" dirty="0"/>
-          </a:p>
-        </p:txBody>
-      </p:sp>
-      <p:sp>
-        <p:nvSpPr>
-          <p:cNvPr id="191" name="Text 189"/>
-          <p:cNvSpPr/>
-          <p:nvPr/>
-        </p:nvSpPr>
-        <p:spPr>
-          <a:xfrm>
-            <a:off x="4727448" y="3154680"/>
-            <a:ext cx="658368" cy="192786"/>
-          </a:xfrm>
-          <a:prstGeom prst="rect">
-            <a:avLst/>
-          </a:prstGeom>
-          <a:noFill/>
-          <a:ln/>
-        </p:spPr>
-        <p:txBody>
-          <a:bodyPr wrap="square" lIns="0" tIns="0" rIns="0" bIns="0" rtlCol="0" anchor="ctr">
-            <a:normAutofit/>
-          </a:bodyPr>
-          <a:lstStyle/>
-          <a:p>
-            <a:pPr algn="ctr" indent="0" marL="0">
-              <a:buNone/>
-            </a:pPr>
-            <a:r>
-              <a:rPr lang="en-US" altLang="en-US" sz="700" b="1" dirty="0">
-                <a:solidFill>
-                  <a:srgbClr val="222222"/>
-                </a:solidFill>
-                <a:latin typeface="Calibri" pitchFamily="34" charset="0"/>
-                <a:ea typeface="Calibri" pitchFamily="34" charset="-122"/>
-                <a:cs typeface="Calibri" pitchFamily="34" charset="-120"/>
-              </a:rPr>
-              <a:t>22 Oct</a:t>
-            </a:r>
-            <a:endParaRPr lang="en-US" sz="700" dirty="0"/>
-          </a:p>
-        </p:txBody>
-      </p:sp>
-      <p:sp>
-        <p:nvSpPr>
-          <p:cNvPr id="192" name="Text 190"/>
-          <p:cNvSpPr/>
-          <p:nvPr/>
-        </p:nvSpPr>
-        <p:spPr>
-          <a:xfrm>
-            <a:off x="5385816" y="3154680"/>
-            <a:ext cx="658368" cy="192786"/>
-          </a:xfrm>
-          <a:prstGeom prst="rect">
-            <a:avLst/>
-          </a:prstGeom>
-          <a:noFill/>
-          <a:ln/>
-        </p:spPr>
-        <p:txBody>
-          <a:bodyPr wrap="square" lIns="0" tIns="0" rIns="0" bIns="0" rtlCol="0" anchor="ctr">
-            <a:normAutofit/>
-          </a:bodyPr>
-          <a:lstStyle/>
-          <a:p>
-            <a:pPr algn="ctr" indent="0" marL="0">
-              <a:buNone/>
-            </a:pPr>
-            <a:r>
-              <a:rPr lang="en-US" altLang="en-US" sz="700" b="1" dirty="0">
-                <a:solidFill>
-                  <a:srgbClr val="222222"/>
-                </a:solidFill>
-                <a:latin typeface="Calibri" pitchFamily="34" charset="0"/>
-                <a:ea typeface="Calibri" pitchFamily="34" charset="-122"/>
-                <a:cs typeface="Calibri" pitchFamily="34" charset="-120"/>
-              </a:rPr>
-              <a:t>26 Oct</a:t>
-            </a:r>
-            <a:endParaRPr lang="en-US" sz="700" dirty="0"/>
-          </a:p>
-        </p:txBody>
-      </p:sp>
-      <p:sp>
-        <p:nvSpPr>
-          <p:cNvPr id="193" name="Shape 191"/>
-          <p:cNvSpPr/>
-          <p:nvPr/>
-        </p:nvSpPr>
-        <p:spPr>
-          <a:xfrm>
-            <a:off x="7404596" y="3191637"/>
-            <a:ext cx="850258" cy="64008"/>
-          </a:xfrm>
-          <a:prstGeom prst="rect">
-            <a:avLst/>
-          </a:prstGeom>
-          <a:solidFill>
-            <a:srgbClr val="C8503F"/>
-          </a:solidFill>
-          <a:ln w="12700">
-            <a:solidFill>
-              <a:srgbClr val="C8503F"/>
-            </a:solidFill>
-            <a:prstDash val="solid"/>
-          </a:ln>
-        </p:spPr>
-      </p:sp>
-      <p:sp>
-        <p:nvSpPr>
-          <p:cNvPr id="194" name="Shape 192"/>
-          <p:cNvSpPr/>
-          <p:nvPr/>
-        </p:nvSpPr>
-        <p:spPr>
-          <a:xfrm flipV="1">
-            <a:off x="7404596" y="3255645"/>
-            <a:ext cx="64008" cy="54864"/>
-          </a:xfrm>
-          <a:prstGeom prst="triangle">
-            <a:avLst/>
-          </a:prstGeom>
-          <a:solidFill>
-            <a:srgbClr val="C8503F"/>
-          </a:solidFill>
-          <a:ln w="12700">
-            <a:solidFill>
-              <a:srgbClr val="C8503F"/>
-            </a:solidFill>
-            <a:prstDash val="solid"/>
-          </a:ln>
-        </p:spPr>
-      </p:sp>
-      <p:sp>
-        <p:nvSpPr>
-          <p:cNvPr id="195" name="Shape 193"/>
-          <p:cNvSpPr/>
-          <p:nvPr/>
-        </p:nvSpPr>
-        <p:spPr>
-          <a:xfrm flipV="1">
-            <a:off x="8190846" y="3255645"/>
-            <a:ext cx="64008" cy="54864"/>
-          </a:xfrm>
-          <a:prstGeom prst="triangle">
-            <a:avLst/>
-          </a:prstGeom>
-          <a:solidFill>
-            <a:srgbClr val="C8503F"/>
-          </a:solidFill>
-          <a:ln w="12700">
-            <a:solidFill>
-              <a:srgbClr val="C8503F"/>
-            </a:solidFill>
-            <a:prstDash val="solid"/>
-          </a:ln>
-        </p:spPr>
-      </p:sp>
-      <p:sp>
-        <p:nvSpPr>
-          <p:cNvPr id="196" name="Text 194"/>
-          <p:cNvSpPr/>
-          <p:nvPr/>
-        </p:nvSpPr>
-        <p:spPr>
-          <a:xfrm>
-            <a:off x="8300574" y="3154680"/>
-            <a:ext cx="548640" cy="192786"/>
-          </a:xfrm>
-          <a:prstGeom prst="rect">
-            <a:avLst/>
-          </a:prstGeom>
-          <a:noFill/>
-          <a:ln/>
-        </p:spPr>
-        <p:txBody>
-          <a:bodyPr wrap="square" lIns="0" tIns="0" rIns="0" bIns="0" rtlCol="0" anchor="ctr">
-            <a:normAutofit/>
-          </a:bodyPr>
-          <a:lstStyle/>
-          <a:p>
-            <a:pPr algn="l" indent="0" marL="0">
-              <a:buNone/>
-            </a:pPr>
-            <a:r>
-              <a:rPr lang="en-US" altLang="en-US" sz="750" b="1" dirty="0">
-                <a:solidFill>
-                  <a:srgbClr val="3D3935"/>
-                </a:solidFill>
-                <a:latin typeface="Calibri" pitchFamily="34" charset="0"/>
-                <a:ea typeface="Calibri" pitchFamily="34" charset="-122"/>
-                <a:cs typeface="Calibri" pitchFamily="34" charset="-120"/>
-              </a:rPr>
-              <a:t>4 d</a:t>
-            </a:r>
-            <a:endParaRPr lang="en-US" sz="750" dirty="0"/>
-          </a:p>
-        </p:txBody>
-      </p:sp>
-      <p:sp>
-        <p:nvSpPr>
-          <p:cNvPr id="197" name="Shape 195"/>
-          <p:cNvSpPr/>
-          <p:nvPr/>
-        </p:nvSpPr>
-        <p:spPr>
-          <a:xfrm>
-            <a:off x="365760" y="3347466"/>
-            <a:ext cx="11460175" cy="192786"/>
-          </a:xfrm>
-          <a:prstGeom prst="rect">
-            <a:avLst/>
-          </a:prstGeom>
-          <a:solidFill>
-            <a:srgbClr val="F6F9FA"/>
-          </a:solidFill>
-          <a:ln w="6350">
-            <a:solidFill>
-              <a:srgbClr val="DFE6EA"/>
-            </a:solidFill>
-            <a:prstDash val="solid"/>
-          </a:ln>
-        </p:spPr>
-      </p:sp>
-      <p:sp>
-        <p:nvSpPr>
-          <p:cNvPr id="198" name="Shape 196"/>
-          <p:cNvSpPr/>
-          <p:nvPr/>
-        </p:nvSpPr>
-        <p:spPr>
-          <a:xfrm>
-            <a:off x="420624" y="3366135"/>
+          <p:cNvPr id="190" name="Shape 188"/>
+          <p:cNvSpPr/>
+          <p:nvPr/>
+        </p:nvSpPr>
+        <p:spPr>
+          <a:xfrm>
+            <a:off x="420624" y="3046095"/>
             <a:ext cx="329184" cy="155448"/>
           </a:xfrm>
           <a:prstGeom prst="roundRect">
@@ -13461,14 +13183,14 @@
       </p:sp>
       <p:sp>
         <p:nvSpPr>
-          <p:cNvPr id="199" name="Text 197"/>
-          <p:cNvSpPr/>
-          <p:nvPr/>
-        </p:nvSpPr>
-        <p:spPr>
-          <a:xfrm>
-            <a:off x="393192" y="3347466"/>
-            <a:ext cx="384048" cy="192786"/>
+          <p:cNvPr id="191" name="Text 189"/>
+          <p:cNvSpPr/>
+          <p:nvPr/>
+        </p:nvSpPr>
+        <p:spPr>
+          <a:xfrm>
+            <a:off x="393192" y="3012186"/>
+            <a:ext cx="384048" cy="223266"/>
           </a:xfrm>
           <a:prstGeom prst="rect">
             <a:avLst/>
@@ -13502,14 +13224,14 @@
       </p:sp>
       <p:sp>
         <p:nvSpPr>
-          <p:cNvPr id="200" name="Text 198"/>
-          <p:cNvSpPr/>
-          <p:nvPr/>
-        </p:nvSpPr>
-        <p:spPr>
-          <a:xfrm>
-            <a:off x="987552" y="3347466"/>
-            <a:ext cx="2441448" cy="192786"/>
+          <p:cNvPr id="192" name="Text 190"/>
+          <p:cNvSpPr/>
+          <p:nvPr/>
+        </p:nvSpPr>
+        <p:spPr>
+          <a:xfrm>
+            <a:off x="987552" y="3012186"/>
+            <a:ext cx="2441448" cy="223266"/>
           </a:xfrm>
           <a:prstGeom prst="rect">
             <a:avLst/>
@@ -13543,14 +13265,14 @@
       </p:sp>
       <p:sp>
         <p:nvSpPr>
-          <p:cNvPr id="201" name="Text 199"/>
-          <p:cNvSpPr/>
-          <p:nvPr/>
-        </p:nvSpPr>
-        <p:spPr>
-          <a:xfrm>
-            <a:off x="3447288" y="3347466"/>
-            <a:ext cx="777240" cy="192786"/>
+          <p:cNvPr id="193" name="Text 191"/>
+          <p:cNvSpPr/>
+          <p:nvPr/>
+        </p:nvSpPr>
+        <p:spPr>
+          <a:xfrm>
+            <a:off x="3447288" y="3012186"/>
+            <a:ext cx="777240" cy="223266"/>
           </a:xfrm>
           <a:prstGeom prst="rect">
             <a:avLst/>
@@ -13584,14 +13306,14 @@
       </p:sp>
       <p:sp>
         <p:nvSpPr>
-          <p:cNvPr id="202" name="Text 200"/>
-          <p:cNvSpPr/>
-          <p:nvPr/>
-        </p:nvSpPr>
-        <p:spPr>
-          <a:xfrm>
-            <a:off x="4224528" y="3347466"/>
-            <a:ext cx="502920" cy="192786"/>
+          <p:cNvPr id="194" name="Text 192"/>
+          <p:cNvSpPr/>
+          <p:nvPr/>
+        </p:nvSpPr>
+        <p:spPr>
+          <a:xfrm>
+            <a:off x="4224528" y="3012186"/>
+            <a:ext cx="502920" cy="223266"/>
           </a:xfrm>
           <a:prstGeom prst="rect">
             <a:avLst/>
@@ -13625,14 +13347,14 @@
       </p:sp>
       <p:sp>
         <p:nvSpPr>
-          <p:cNvPr id="203" name="Text 201"/>
-          <p:cNvSpPr/>
-          <p:nvPr/>
-        </p:nvSpPr>
-        <p:spPr>
-          <a:xfrm>
-            <a:off x="4727448" y="3347466"/>
-            <a:ext cx="658368" cy="192786"/>
+          <p:cNvPr id="195" name="Text 193"/>
+          <p:cNvSpPr/>
+          <p:nvPr/>
+        </p:nvSpPr>
+        <p:spPr>
+          <a:xfrm>
+            <a:off x="4727448" y="3012186"/>
+            <a:ext cx="658368" cy="223266"/>
           </a:xfrm>
           <a:prstGeom prst="rect">
             <a:avLst/>
@@ -13666,14 +13388,14 @@
       </p:sp>
       <p:sp>
         <p:nvSpPr>
-          <p:cNvPr id="204" name="Text 202"/>
-          <p:cNvSpPr/>
-          <p:nvPr/>
-        </p:nvSpPr>
-        <p:spPr>
-          <a:xfrm>
-            <a:off x="5385816" y="3347466"/>
-            <a:ext cx="658368" cy="192786"/>
+          <p:cNvPr id="196" name="Text 194"/>
+          <p:cNvSpPr/>
+          <p:nvPr/>
+        </p:nvSpPr>
+        <p:spPr>
+          <a:xfrm>
+            <a:off x="5385816" y="3012186"/>
+            <a:ext cx="658368" cy="223266"/>
           </a:xfrm>
           <a:prstGeom prst="rect">
             <a:avLst/>
@@ -13707,18 +13429,18 @@
       </p:sp>
       <p:sp>
         <p:nvSpPr>
-          <p:cNvPr id="205" name="Shape 203"/>
-          <p:cNvSpPr/>
-          <p:nvPr/>
-        </p:nvSpPr>
-        <p:spPr>
-          <a:xfrm>
-            <a:off x="7404596" y="3387951"/>
-            <a:ext cx="510155" cy="111816"/>
+          <p:cNvPr id="197" name="Shape 195"/>
+          <p:cNvSpPr/>
+          <p:nvPr/>
+        </p:nvSpPr>
+        <p:spPr>
+          <a:xfrm>
+            <a:off x="7404596" y="3059072"/>
+            <a:ext cx="510155" cy="129494"/>
           </a:xfrm>
           <a:prstGeom prst="roundRect">
             <a:avLst>
-              <a:gd name="adj" fmla="val 32711"/>
+              <a:gd name="adj" fmla="val 28245"/>
             </a:avLst>
           </a:prstGeom>
           <a:solidFill>
@@ -13741,14 +13463,14 @@
       </p:sp>
       <p:sp>
         <p:nvSpPr>
-          <p:cNvPr id="206" name="Text 204"/>
-          <p:cNvSpPr/>
-          <p:nvPr/>
-        </p:nvSpPr>
-        <p:spPr>
-          <a:xfrm>
-            <a:off x="7404596" y="3387951"/>
-            <a:ext cx="510155" cy="111816"/>
+          <p:cNvPr id="198" name="Text 196"/>
+          <p:cNvSpPr/>
+          <p:nvPr/>
+        </p:nvSpPr>
+        <p:spPr>
+          <a:xfrm>
+            <a:off x="7404596" y="3059072"/>
+            <a:ext cx="510155" cy="129494"/>
           </a:xfrm>
           <a:prstGeom prst="rect">
             <a:avLst/>
@@ -13782,14 +13504,14 @@
       </p:sp>
       <p:sp>
         <p:nvSpPr>
-          <p:cNvPr id="207" name="Shape 205"/>
-          <p:cNvSpPr/>
-          <p:nvPr/>
-        </p:nvSpPr>
-        <p:spPr>
-          <a:xfrm>
-            <a:off x="365760" y="3540252"/>
-            <a:ext cx="11460175" cy="192786"/>
+          <p:cNvPr id="199" name="Shape 197"/>
+          <p:cNvSpPr/>
+          <p:nvPr/>
+        </p:nvSpPr>
+        <p:spPr>
+          <a:xfrm>
+            <a:off x="365760" y="3235452"/>
+            <a:ext cx="11460175" cy="223266"/>
           </a:xfrm>
           <a:prstGeom prst="rect">
             <a:avLst/>
@@ -13807,13 +13529,13 @@
       </p:sp>
       <p:sp>
         <p:nvSpPr>
-          <p:cNvPr id="208" name="Shape 206"/>
-          <p:cNvSpPr/>
-          <p:nvPr/>
-        </p:nvSpPr>
-        <p:spPr>
-          <a:xfrm>
-            <a:off x="420624" y="3558921"/>
+          <p:cNvPr id="200" name="Shape 198"/>
+          <p:cNvSpPr/>
+          <p:nvPr/>
+        </p:nvSpPr>
+        <p:spPr>
+          <a:xfrm>
+            <a:off x="420624" y="3269361"/>
             <a:ext cx="329184" cy="155448"/>
           </a:xfrm>
           <a:prstGeom prst="roundRect">
@@ -13834,14 +13556,14 @@
       </p:sp>
       <p:sp>
         <p:nvSpPr>
-          <p:cNvPr id="209" name="Text 207"/>
-          <p:cNvSpPr/>
-          <p:nvPr/>
-        </p:nvSpPr>
-        <p:spPr>
-          <a:xfrm>
-            <a:off x="393192" y="3540252"/>
-            <a:ext cx="384048" cy="192786"/>
+          <p:cNvPr id="201" name="Text 199"/>
+          <p:cNvSpPr/>
+          <p:nvPr/>
+        </p:nvSpPr>
+        <p:spPr>
+          <a:xfrm>
+            <a:off x="393192" y="3235452"/>
+            <a:ext cx="384048" cy="223266"/>
           </a:xfrm>
           <a:prstGeom prst="rect">
             <a:avLst/>
@@ -13875,14 +13597,14 @@
       </p:sp>
       <p:sp>
         <p:nvSpPr>
-          <p:cNvPr id="210" name="Text 208"/>
-          <p:cNvSpPr/>
-          <p:nvPr/>
-        </p:nvSpPr>
-        <p:spPr>
-          <a:xfrm>
-            <a:off x="987552" y="3540252"/>
-            <a:ext cx="2441448" cy="192786"/>
+          <p:cNvPr id="202" name="Text 200"/>
+          <p:cNvSpPr/>
+          <p:nvPr/>
+        </p:nvSpPr>
+        <p:spPr>
+          <a:xfrm>
+            <a:off x="987552" y="3235452"/>
+            <a:ext cx="2441448" cy="223266"/>
           </a:xfrm>
           <a:prstGeom prst="rect">
             <a:avLst/>
@@ -13916,14 +13638,14 @@
       </p:sp>
       <p:sp>
         <p:nvSpPr>
-          <p:cNvPr id="211" name="Text 209"/>
-          <p:cNvSpPr/>
-          <p:nvPr/>
-        </p:nvSpPr>
-        <p:spPr>
-          <a:xfrm>
-            <a:off x="3447288" y="3540252"/>
-            <a:ext cx="777240" cy="192786"/>
+          <p:cNvPr id="203" name="Text 201"/>
+          <p:cNvSpPr/>
+          <p:nvPr/>
+        </p:nvSpPr>
+        <p:spPr>
+          <a:xfrm>
+            <a:off x="3447288" y="3235452"/>
+            <a:ext cx="777240" cy="223266"/>
           </a:xfrm>
           <a:prstGeom prst="rect">
             <a:avLst/>
@@ -13957,14 +13679,14 @@
       </p:sp>
       <p:sp>
         <p:nvSpPr>
-          <p:cNvPr id="212" name="Text 210"/>
-          <p:cNvSpPr/>
-          <p:nvPr/>
-        </p:nvSpPr>
-        <p:spPr>
-          <a:xfrm>
-            <a:off x="4224528" y="3540252"/>
-            <a:ext cx="502920" cy="192786"/>
+          <p:cNvPr id="204" name="Text 202"/>
+          <p:cNvSpPr/>
+          <p:nvPr/>
+        </p:nvSpPr>
+        <p:spPr>
+          <a:xfrm>
+            <a:off x="4224528" y="3235452"/>
+            <a:ext cx="502920" cy="223266"/>
           </a:xfrm>
           <a:prstGeom prst="rect">
             <a:avLst/>
@@ -13998,14 +13720,14 @@
       </p:sp>
       <p:sp>
         <p:nvSpPr>
-          <p:cNvPr id="213" name="Text 211"/>
-          <p:cNvSpPr/>
-          <p:nvPr/>
-        </p:nvSpPr>
-        <p:spPr>
-          <a:xfrm>
-            <a:off x="4727448" y="3540252"/>
-            <a:ext cx="658368" cy="192786"/>
+          <p:cNvPr id="205" name="Text 203"/>
+          <p:cNvSpPr/>
+          <p:nvPr/>
+        </p:nvSpPr>
+        <p:spPr>
+          <a:xfrm>
+            <a:off x="4727448" y="3235452"/>
+            <a:ext cx="658368" cy="223266"/>
           </a:xfrm>
           <a:prstGeom prst="rect">
             <a:avLst/>
@@ -14039,14 +13761,14 @@
       </p:sp>
       <p:sp>
         <p:nvSpPr>
-          <p:cNvPr id="214" name="Text 212"/>
-          <p:cNvSpPr/>
-          <p:nvPr/>
-        </p:nvSpPr>
-        <p:spPr>
-          <a:xfrm>
-            <a:off x="5385816" y="3540252"/>
-            <a:ext cx="658368" cy="192786"/>
+          <p:cNvPr id="206" name="Text 204"/>
+          <p:cNvSpPr/>
+          <p:nvPr/>
+        </p:nvSpPr>
+        <p:spPr>
+          <a:xfrm>
+            <a:off x="5385816" y="3235452"/>
+            <a:ext cx="658368" cy="223266"/>
           </a:xfrm>
           <a:prstGeom prst="rect">
             <a:avLst/>
@@ -14080,18 +13802,18 @@
       </p:sp>
       <p:sp>
         <p:nvSpPr>
-          <p:cNvPr id="215" name="Shape 213"/>
-          <p:cNvSpPr/>
-          <p:nvPr/>
-        </p:nvSpPr>
-        <p:spPr>
-          <a:xfrm>
-            <a:off x="7744699" y="3580737"/>
-            <a:ext cx="340103" cy="111816"/>
+          <p:cNvPr id="207" name="Shape 205"/>
+          <p:cNvSpPr/>
+          <p:nvPr/>
+        </p:nvSpPr>
+        <p:spPr>
+          <a:xfrm>
+            <a:off x="7744699" y="3282338"/>
+            <a:ext cx="340103" cy="129494"/>
           </a:xfrm>
           <a:prstGeom prst="roundRect">
             <a:avLst>
-              <a:gd name="adj" fmla="val 32711"/>
+              <a:gd name="adj" fmla="val 28245"/>
             </a:avLst>
           </a:prstGeom>
           <a:solidFill>
@@ -14114,14 +13836,14 @@
       </p:sp>
       <p:sp>
         <p:nvSpPr>
-          <p:cNvPr id="216" name="Text 214"/>
-          <p:cNvSpPr/>
-          <p:nvPr/>
-        </p:nvSpPr>
-        <p:spPr>
-          <a:xfrm>
-            <a:off x="7744699" y="3580737"/>
-            <a:ext cx="340103" cy="111816"/>
+          <p:cNvPr id="208" name="Text 206"/>
+          <p:cNvSpPr/>
+          <p:nvPr/>
+        </p:nvSpPr>
+        <p:spPr>
+          <a:xfrm>
+            <a:off x="7744699" y="3282338"/>
+            <a:ext cx="340103" cy="129494"/>
           </a:xfrm>
           <a:prstGeom prst="rect">
             <a:avLst/>
@@ -14155,14 +13877,14 @@
       </p:sp>
       <p:sp>
         <p:nvSpPr>
-          <p:cNvPr id="217" name="Shape 215"/>
-          <p:cNvSpPr/>
-          <p:nvPr/>
-        </p:nvSpPr>
-        <p:spPr>
-          <a:xfrm>
-            <a:off x="365760" y="3733038"/>
-            <a:ext cx="11460175" cy="192786"/>
+          <p:cNvPr id="209" name="Shape 207"/>
+          <p:cNvSpPr/>
+          <p:nvPr/>
+        </p:nvSpPr>
+        <p:spPr>
+          <a:xfrm>
+            <a:off x="365760" y="3458718"/>
+            <a:ext cx="11460175" cy="223266"/>
           </a:xfrm>
           <a:prstGeom prst="rect">
             <a:avLst/>
@@ -14180,13 +13902,13 @@
       </p:sp>
       <p:sp>
         <p:nvSpPr>
-          <p:cNvPr id="218" name="Shape 216"/>
-          <p:cNvSpPr/>
-          <p:nvPr/>
-        </p:nvSpPr>
-        <p:spPr>
-          <a:xfrm>
-            <a:off x="420624" y="3751707"/>
+          <p:cNvPr id="210" name="Shape 208"/>
+          <p:cNvSpPr/>
+          <p:nvPr/>
+        </p:nvSpPr>
+        <p:spPr>
+          <a:xfrm>
+            <a:off x="420624" y="3492627"/>
             <a:ext cx="329184" cy="155448"/>
           </a:xfrm>
           <a:prstGeom prst="roundRect">
@@ -14207,14 +13929,14 @@
       </p:sp>
       <p:sp>
         <p:nvSpPr>
-          <p:cNvPr id="219" name="Text 217"/>
-          <p:cNvSpPr/>
-          <p:nvPr/>
-        </p:nvSpPr>
-        <p:spPr>
-          <a:xfrm>
-            <a:off x="393192" y="3733038"/>
-            <a:ext cx="384048" cy="192786"/>
+          <p:cNvPr id="211" name="Text 209"/>
+          <p:cNvSpPr/>
+          <p:nvPr/>
+        </p:nvSpPr>
+        <p:spPr>
+          <a:xfrm>
+            <a:off x="393192" y="3458718"/>
+            <a:ext cx="384048" cy="223266"/>
           </a:xfrm>
           <a:prstGeom prst="rect">
             <a:avLst/>
@@ -14248,14 +13970,14 @@
       </p:sp>
       <p:sp>
         <p:nvSpPr>
-          <p:cNvPr id="220" name="Text 218"/>
-          <p:cNvSpPr/>
-          <p:nvPr/>
-        </p:nvSpPr>
-        <p:spPr>
-          <a:xfrm>
-            <a:off x="987552" y="3733038"/>
-            <a:ext cx="2441448" cy="192786"/>
+          <p:cNvPr id="212" name="Text 210"/>
+          <p:cNvSpPr/>
+          <p:nvPr/>
+        </p:nvSpPr>
+        <p:spPr>
+          <a:xfrm>
+            <a:off x="987552" y="3458718"/>
+            <a:ext cx="2441448" cy="223266"/>
           </a:xfrm>
           <a:prstGeom prst="rect">
             <a:avLst/>
@@ -14289,14 +14011,14 @@
       </p:sp>
       <p:sp>
         <p:nvSpPr>
-          <p:cNvPr id="221" name="Text 219"/>
-          <p:cNvSpPr/>
-          <p:nvPr/>
-        </p:nvSpPr>
-        <p:spPr>
-          <a:xfrm>
-            <a:off x="3447288" y="3733038"/>
-            <a:ext cx="777240" cy="192786"/>
+          <p:cNvPr id="213" name="Text 211"/>
+          <p:cNvSpPr/>
+          <p:nvPr/>
+        </p:nvSpPr>
+        <p:spPr>
+          <a:xfrm>
+            <a:off x="3447288" y="3458718"/>
+            <a:ext cx="777240" cy="223266"/>
           </a:xfrm>
           <a:prstGeom prst="rect">
             <a:avLst/>
@@ -14330,14 +14052,14 @@
       </p:sp>
       <p:sp>
         <p:nvSpPr>
-          <p:cNvPr id="222" name="Text 220"/>
-          <p:cNvSpPr/>
-          <p:nvPr/>
-        </p:nvSpPr>
-        <p:spPr>
-          <a:xfrm>
-            <a:off x="4224528" y="3733038"/>
-            <a:ext cx="502920" cy="192786"/>
+          <p:cNvPr id="214" name="Text 212"/>
+          <p:cNvSpPr/>
+          <p:nvPr/>
+        </p:nvSpPr>
+        <p:spPr>
+          <a:xfrm>
+            <a:off x="4224528" y="3458718"/>
+            <a:ext cx="502920" cy="223266"/>
           </a:xfrm>
           <a:prstGeom prst="rect">
             <a:avLst/>
@@ -14371,14 +14093,14 @@
       </p:sp>
       <p:sp>
         <p:nvSpPr>
-          <p:cNvPr id="223" name="Text 221"/>
-          <p:cNvSpPr/>
-          <p:nvPr/>
-        </p:nvSpPr>
-        <p:spPr>
-          <a:xfrm>
-            <a:off x="4727448" y="3733038"/>
-            <a:ext cx="658368" cy="192786"/>
+          <p:cNvPr id="215" name="Text 213"/>
+          <p:cNvSpPr/>
+          <p:nvPr/>
+        </p:nvSpPr>
+        <p:spPr>
+          <a:xfrm>
+            <a:off x="4727448" y="3458718"/>
+            <a:ext cx="658368" cy="223266"/>
           </a:xfrm>
           <a:prstGeom prst="rect">
             <a:avLst/>
@@ -14412,14 +14134,14 @@
       </p:sp>
       <p:sp>
         <p:nvSpPr>
-          <p:cNvPr id="224" name="Text 222"/>
-          <p:cNvSpPr/>
-          <p:nvPr/>
-        </p:nvSpPr>
-        <p:spPr>
-          <a:xfrm>
-            <a:off x="5385816" y="3733038"/>
-            <a:ext cx="658368" cy="192786"/>
+          <p:cNvPr id="216" name="Text 214"/>
+          <p:cNvSpPr/>
+          <p:nvPr/>
+        </p:nvSpPr>
+        <p:spPr>
+          <a:xfrm>
+            <a:off x="5385816" y="3458718"/>
+            <a:ext cx="658368" cy="223266"/>
           </a:xfrm>
           <a:prstGeom prst="rect">
             <a:avLst/>
@@ -14453,18 +14175,18 @@
       </p:sp>
       <p:sp>
         <p:nvSpPr>
-          <p:cNvPr id="225" name="Shape 223"/>
-          <p:cNvSpPr/>
-          <p:nvPr/>
-        </p:nvSpPr>
-        <p:spPr>
-          <a:xfrm>
-            <a:off x="7914751" y="3773523"/>
-            <a:ext cx="340103" cy="111816"/>
+          <p:cNvPr id="217" name="Shape 215"/>
+          <p:cNvSpPr/>
+          <p:nvPr/>
+        </p:nvSpPr>
+        <p:spPr>
+          <a:xfrm>
+            <a:off x="7914751" y="3505604"/>
+            <a:ext cx="340103" cy="129494"/>
           </a:xfrm>
           <a:prstGeom prst="roundRect">
             <a:avLst>
-              <a:gd name="adj" fmla="val 32711"/>
+              <a:gd name="adj" fmla="val 28245"/>
             </a:avLst>
           </a:prstGeom>
           <a:solidFill>
@@ -14487,14 +14209,14 @@
       </p:sp>
       <p:sp>
         <p:nvSpPr>
-          <p:cNvPr id="226" name="Text 224"/>
-          <p:cNvSpPr/>
-          <p:nvPr/>
-        </p:nvSpPr>
-        <p:spPr>
-          <a:xfrm>
-            <a:off x="7914751" y="3773523"/>
-            <a:ext cx="340103" cy="111816"/>
+          <p:cNvPr id="218" name="Text 216"/>
+          <p:cNvSpPr/>
+          <p:nvPr/>
+        </p:nvSpPr>
+        <p:spPr>
+          <a:xfrm>
+            <a:off x="7914751" y="3505604"/>
+            <a:ext cx="340103" cy="129494"/>
           </a:xfrm>
           <a:prstGeom prst="rect">
             <a:avLst/>
@@ -14528,14 +14250,14 @@
       </p:sp>
       <p:sp>
         <p:nvSpPr>
-          <p:cNvPr id="227" name="Shape 225"/>
-          <p:cNvSpPr/>
-          <p:nvPr/>
-        </p:nvSpPr>
-        <p:spPr>
-          <a:xfrm>
-            <a:off x="365760" y="3925824"/>
-            <a:ext cx="11460175" cy="192786"/>
+          <p:cNvPr id="219" name="Shape 217"/>
+          <p:cNvSpPr/>
+          <p:nvPr/>
+        </p:nvSpPr>
+        <p:spPr>
+          <a:xfrm>
+            <a:off x="365760" y="3681984"/>
+            <a:ext cx="11460175" cy="223266"/>
           </a:xfrm>
           <a:prstGeom prst="rect">
             <a:avLst/>
@@ -14553,13 +14275,13 @@
       </p:sp>
       <p:sp>
         <p:nvSpPr>
-          <p:cNvPr id="228" name="Shape 226"/>
-          <p:cNvSpPr/>
-          <p:nvPr/>
-        </p:nvSpPr>
-        <p:spPr>
-          <a:xfrm>
-            <a:off x="420624" y="3944493"/>
+          <p:cNvPr id="220" name="Shape 218"/>
+          <p:cNvSpPr/>
+          <p:nvPr/>
+        </p:nvSpPr>
+        <p:spPr>
+          <a:xfrm>
+            <a:off x="420624" y="3715893"/>
             <a:ext cx="329184" cy="155448"/>
           </a:xfrm>
           <a:prstGeom prst="roundRect">
@@ -14580,14 +14302,14 @@
       </p:sp>
       <p:sp>
         <p:nvSpPr>
-          <p:cNvPr id="229" name="Text 227"/>
-          <p:cNvSpPr/>
-          <p:nvPr/>
-        </p:nvSpPr>
-        <p:spPr>
-          <a:xfrm>
-            <a:off x="393192" y="3925824"/>
-            <a:ext cx="384048" cy="192786"/>
+          <p:cNvPr id="221" name="Text 219"/>
+          <p:cNvSpPr/>
+          <p:nvPr/>
+        </p:nvSpPr>
+        <p:spPr>
+          <a:xfrm>
+            <a:off x="393192" y="3681984"/>
+            <a:ext cx="384048" cy="223266"/>
           </a:xfrm>
           <a:prstGeom prst="rect">
             <a:avLst/>
@@ -14621,14 +14343,14 @@
       </p:sp>
       <p:sp>
         <p:nvSpPr>
-          <p:cNvPr id="230" name="Text 228"/>
-          <p:cNvSpPr/>
-          <p:nvPr/>
-        </p:nvSpPr>
-        <p:spPr>
-          <a:xfrm>
-            <a:off x="987552" y="3925824"/>
-            <a:ext cx="2441448" cy="192786"/>
+          <p:cNvPr id="222" name="Text 220"/>
+          <p:cNvSpPr/>
+          <p:nvPr/>
+        </p:nvSpPr>
+        <p:spPr>
+          <a:xfrm>
+            <a:off x="987552" y="3681984"/>
+            <a:ext cx="2441448" cy="223266"/>
           </a:xfrm>
           <a:prstGeom prst="rect">
             <a:avLst/>
@@ -14662,14 +14384,14 @@
       </p:sp>
       <p:sp>
         <p:nvSpPr>
-          <p:cNvPr id="231" name="Text 229"/>
-          <p:cNvSpPr/>
-          <p:nvPr/>
-        </p:nvSpPr>
-        <p:spPr>
-          <a:xfrm>
-            <a:off x="3447288" y="3925824"/>
-            <a:ext cx="777240" cy="192786"/>
+          <p:cNvPr id="223" name="Text 221"/>
+          <p:cNvSpPr/>
+          <p:nvPr/>
+        </p:nvSpPr>
+        <p:spPr>
+          <a:xfrm>
+            <a:off x="3447288" y="3681984"/>
+            <a:ext cx="777240" cy="223266"/>
           </a:xfrm>
           <a:prstGeom prst="rect">
             <a:avLst/>
@@ -14703,14 +14425,14 @@
       </p:sp>
       <p:sp>
         <p:nvSpPr>
-          <p:cNvPr id="232" name="Text 230"/>
-          <p:cNvSpPr/>
-          <p:nvPr/>
-        </p:nvSpPr>
-        <p:spPr>
-          <a:xfrm>
-            <a:off x="4224528" y="3925824"/>
-            <a:ext cx="502920" cy="192786"/>
+          <p:cNvPr id="224" name="Text 222"/>
+          <p:cNvSpPr/>
+          <p:nvPr/>
+        </p:nvSpPr>
+        <p:spPr>
+          <a:xfrm>
+            <a:off x="4224528" y="3681984"/>
+            <a:ext cx="502920" cy="223266"/>
           </a:xfrm>
           <a:prstGeom prst="rect">
             <a:avLst/>
@@ -14744,14 +14466,14 @@
       </p:sp>
       <p:sp>
         <p:nvSpPr>
-          <p:cNvPr id="233" name="Text 231"/>
-          <p:cNvSpPr/>
-          <p:nvPr/>
-        </p:nvSpPr>
-        <p:spPr>
-          <a:xfrm>
-            <a:off x="4727448" y="3925824"/>
-            <a:ext cx="658368" cy="192786"/>
+          <p:cNvPr id="225" name="Text 223"/>
+          <p:cNvSpPr/>
+          <p:nvPr/>
+        </p:nvSpPr>
+        <p:spPr>
+          <a:xfrm>
+            <a:off x="4727448" y="3681984"/>
+            <a:ext cx="658368" cy="223266"/>
           </a:xfrm>
           <a:prstGeom prst="rect">
             <a:avLst/>
@@ -14785,14 +14507,14 @@
       </p:sp>
       <p:sp>
         <p:nvSpPr>
-          <p:cNvPr id="234" name="Text 232"/>
-          <p:cNvSpPr/>
-          <p:nvPr/>
-        </p:nvSpPr>
-        <p:spPr>
-          <a:xfrm>
-            <a:off x="5385816" y="3925824"/>
-            <a:ext cx="658368" cy="192786"/>
+          <p:cNvPr id="226" name="Text 224"/>
+          <p:cNvSpPr/>
+          <p:nvPr/>
+        </p:nvSpPr>
+        <p:spPr>
+          <a:xfrm>
+            <a:off x="5385816" y="3681984"/>
+            <a:ext cx="658368" cy="223266"/>
           </a:xfrm>
           <a:prstGeom prst="rect">
             <a:avLst/>
@@ -14826,18 +14548,18 @@
       </p:sp>
       <p:sp>
         <p:nvSpPr>
-          <p:cNvPr id="235" name="Shape 233"/>
-          <p:cNvSpPr/>
-          <p:nvPr/>
-        </p:nvSpPr>
-        <p:spPr>
-          <a:xfrm>
-            <a:off x="8084802" y="3966309"/>
-            <a:ext cx="170052" cy="111816"/>
+          <p:cNvPr id="227" name="Shape 225"/>
+          <p:cNvSpPr/>
+          <p:nvPr/>
+        </p:nvSpPr>
+        <p:spPr>
+          <a:xfrm>
+            <a:off x="8084802" y="3728870"/>
+            <a:ext cx="170052" cy="129494"/>
           </a:xfrm>
           <a:prstGeom prst="roundRect">
             <a:avLst>
-              <a:gd name="adj" fmla="val 32711"/>
+              <a:gd name="adj" fmla="val 28245"/>
             </a:avLst>
           </a:prstGeom>
           <a:solidFill>
@@ -14860,14 +14582,14 @@
       </p:sp>
       <p:sp>
         <p:nvSpPr>
-          <p:cNvPr id="236" name="Shape 234"/>
-          <p:cNvSpPr/>
-          <p:nvPr/>
-        </p:nvSpPr>
-        <p:spPr>
-          <a:xfrm>
-            <a:off x="365760" y="4118610"/>
-            <a:ext cx="11460175" cy="192786"/>
+          <p:cNvPr id="228" name="Shape 226"/>
+          <p:cNvSpPr/>
+          <p:nvPr/>
+        </p:nvSpPr>
+        <p:spPr>
+          <a:xfrm>
+            <a:off x="365760" y="3905250"/>
+            <a:ext cx="11460175" cy="223266"/>
           </a:xfrm>
           <a:prstGeom prst="rect">
             <a:avLst/>
@@ -14885,13 +14607,13 @@
       </p:sp>
       <p:sp>
         <p:nvSpPr>
-          <p:cNvPr id="237" name="Shape 235"/>
-          <p:cNvSpPr/>
-          <p:nvPr/>
-        </p:nvSpPr>
-        <p:spPr>
-          <a:xfrm>
-            <a:off x="420624" y="4137279"/>
+          <p:cNvPr id="229" name="Shape 227"/>
+          <p:cNvSpPr/>
+          <p:nvPr/>
+        </p:nvSpPr>
+        <p:spPr>
+          <a:xfrm>
+            <a:off x="420624" y="3939159"/>
             <a:ext cx="329184" cy="155448"/>
           </a:xfrm>
           <a:prstGeom prst="roundRect">
@@ -14912,14 +14634,14 @@
       </p:sp>
       <p:sp>
         <p:nvSpPr>
-          <p:cNvPr id="238" name="Text 236"/>
-          <p:cNvSpPr/>
-          <p:nvPr/>
-        </p:nvSpPr>
-        <p:spPr>
-          <a:xfrm>
-            <a:off x="393192" y="4118610"/>
-            <a:ext cx="384048" cy="192786"/>
+          <p:cNvPr id="230" name="Text 228"/>
+          <p:cNvSpPr/>
+          <p:nvPr/>
+        </p:nvSpPr>
+        <p:spPr>
+          <a:xfrm>
+            <a:off x="393192" y="3905250"/>
+            <a:ext cx="384048" cy="223266"/>
           </a:xfrm>
           <a:prstGeom prst="rect">
             <a:avLst/>
@@ -14953,14 +14675,14 @@
       </p:sp>
       <p:sp>
         <p:nvSpPr>
-          <p:cNvPr id="239" name="Text 237"/>
-          <p:cNvSpPr/>
-          <p:nvPr/>
-        </p:nvSpPr>
-        <p:spPr>
-          <a:xfrm>
-            <a:off x="987552" y="4118610"/>
-            <a:ext cx="2441448" cy="192786"/>
+          <p:cNvPr id="231" name="Text 229"/>
+          <p:cNvSpPr/>
+          <p:nvPr/>
+        </p:nvSpPr>
+        <p:spPr>
+          <a:xfrm>
+            <a:off x="987552" y="3905250"/>
+            <a:ext cx="2441448" cy="223266"/>
           </a:xfrm>
           <a:prstGeom prst="rect">
             <a:avLst/>
@@ -14994,14 +14716,14 @@
       </p:sp>
       <p:sp>
         <p:nvSpPr>
-          <p:cNvPr id="240" name="Text 238"/>
-          <p:cNvSpPr/>
-          <p:nvPr/>
-        </p:nvSpPr>
-        <p:spPr>
-          <a:xfrm>
-            <a:off x="3447288" y="4118610"/>
-            <a:ext cx="777240" cy="192786"/>
+          <p:cNvPr id="232" name="Text 230"/>
+          <p:cNvSpPr/>
+          <p:nvPr/>
+        </p:nvSpPr>
+        <p:spPr>
+          <a:xfrm>
+            <a:off x="3447288" y="3905250"/>
+            <a:ext cx="777240" cy="223266"/>
           </a:xfrm>
           <a:prstGeom prst="rect">
             <a:avLst/>
@@ -15035,14 +14757,14 @@
       </p:sp>
       <p:sp>
         <p:nvSpPr>
-          <p:cNvPr id="241" name="Text 239"/>
-          <p:cNvSpPr/>
-          <p:nvPr/>
-        </p:nvSpPr>
-        <p:spPr>
-          <a:xfrm>
-            <a:off x="4224528" y="4118610"/>
-            <a:ext cx="502920" cy="192786"/>
+          <p:cNvPr id="233" name="Text 231"/>
+          <p:cNvSpPr/>
+          <p:nvPr/>
+        </p:nvSpPr>
+        <p:spPr>
+          <a:xfrm>
+            <a:off x="4224528" y="3905250"/>
+            <a:ext cx="502920" cy="223266"/>
           </a:xfrm>
           <a:prstGeom prst="rect">
             <a:avLst/>
@@ -15076,14 +14798,14 @@
       </p:sp>
       <p:sp>
         <p:nvSpPr>
-          <p:cNvPr id="242" name="Text 240"/>
-          <p:cNvSpPr/>
-          <p:nvPr/>
-        </p:nvSpPr>
-        <p:spPr>
-          <a:xfrm>
-            <a:off x="4727448" y="4118610"/>
-            <a:ext cx="658368" cy="192786"/>
+          <p:cNvPr id="234" name="Text 232"/>
+          <p:cNvSpPr/>
+          <p:nvPr/>
+        </p:nvSpPr>
+        <p:spPr>
+          <a:xfrm>
+            <a:off x="4727448" y="3905250"/>
+            <a:ext cx="658368" cy="223266"/>
           </a:xfrm>
           <a:prstGeom prst="rect">
             <a:avLst/>
@@ -15117,14 +14839,14 @@
       </p:sp>
       <p:sp>
         <p:nvSpPr>
-          <p:cNvPr id="243" name="Text 241"/>
-          <p:cNvSpPr/>
-          <p:nvPr/>
-        </p:nvSpPr>
-        <p:spPr>
-          <a:xfrm>
-            <a:off x="5385816" y="4118610"/>
-            <a:ext cx="658368" cy="192786"/>
+          <p:cNvPr id="235" name="Text 233"/>
+          <p:cNvSpPr/>
+          <p:nvPr/>
+        </p:nvSpPr>
+        <p:spPr>
+          <a:xfrm>
+            <a:off x="5385816" y="3905250"/>
+            <a:ext cx="658368" cy="223266"/>
           </a:xfrm>
           <a:prstGeom prst="rect">
             <a:avLst/>
@@ -15158,18 +14880,18 @@
       </p:sp>
       <p:sp>
         <p:nvSpPr>
-          <p:cNvPr id="244" name="Shape 242"/>
-          <p:cNvSpPr/>
-          <p:nvPr/>
-        </p:nvSpPr>
-        <p:spPr>
-          <a:xfrm>
-            <a:off x="8084802" y="4159095"/>
-            <a:ext cx="170052" cy="111816"/>
+          <p:cNvPr id="236" name="Shape 234"/>
+          <p:cNvSpPr/>
+          <p:nvPr/>
+        </p:nvSpPr>
+        <p:spPr>
+          <a:xfrm>
+            <a:off x="8084802" y="3952136"/>
+            <a:ext cx="170052" cy="129494"/>
           </a:xfrm>
           <a:prstGeom prst="roundRect">
             <a:avLst>
-              <a:gd name="adj" fmla="val 32711"/>
+              <a:gd name="adj" fmla="val 28245"/>
             </a:avLst>
           </a:prstGeom>
           <a:solidFill>
@@ -15192,314 +14914,314 @@
       </p:sp>
       <p:sp>
         <p:nvSpPr>
+          <p:cNvPr id="237" name="Shape 235"/>
+          <p:cNvSpPr/>
+          <p:nvPr/>
+        </p:nvSpPr>
+        <p:spPr>
+          <a:xfrm>
+            <a:off x="365760" y="4128516"/>
+            <a:ext cx="11460175" cy="223266"/>
+          </a:xfrm>
+          <a:prstGeom prst="rect">
+            <a:avLst/>
+          </a:prstGeom>
+          <a:solidFill>
+            <a:srgbClr val="FFFFFF"/>
+          </a:solidFill>
+          <a:ln w="6350">
+            <a:solidFill>
+              <a:srgbClr val="DFE6EA"/>
+            </a:solidFill>
+            <a:prstDash val="solid"/>
+          </a:ln>
+        </p:spPr>
+      </p:sp>
+      <p:sp>
+        <p:nvSpPr>
+          <p:cNvPr id="238" name="Shape 236"/>
+          <p:cNvSpPr/>
+          <p:nvPr/>
+        </p:nvSpPr>
+        <p:spPr>
+          <a:xfrm>
+            <a:off x="438912" y="4121277"/>
+            <a:ext cx="237744" cy="237744"/>
+          </a:xfrm>
+          <a:prstGeom prst="ellipse">
+            <a:avLst/>
+          </a:prstGeom>
+          <a:solidFill>
+            <a:srgbClr val="00778B"/>
+          </a:solidFill>
+          <a:ln w="6350">
+            <a:solidFill>
+              <a:srgbClr val="00778B"/>
+            </a:solidFill>
+            <a:prstDash val="solid"/>
+          </a:ln>
+        </p:spPr>
+      </p:sp>
+      <p:sp>
+        <p:nvSpPr>
+          <p:cNvPr id="239" name="Text 237"/>
+          <p:cNvSpPr/>
+          <p:nvPr/>
+        </p:nvSpPr>
+        <p:spPr>
+          <a:xfrm>
+            <a:off x="365760" y="4128516"/>
+            <a:ext cx="384048" cy="223266"/>
+          </a:xfrm>
+          <a:prstGeom prst="rect">
+            <a:avLst/>
+          </a:prstGeom>
+          <a:noFill/>
+          <a:ln/>
+        </p:spPr>
+        <p:txBody>
+          <a:bodyPr wrap="square" lIns="0" tIns="0" rIns="0" bIns="0" rtlCol="0" anchor="ctr">
+            <a:normAutofit/>
+          </a:bodyPr>
+          <a:lstStyle/>
+          <a:p>
+            <a:pPr algn="ctr" indent="0" marL="0">
+              <a:buNone/>
+            </a:pPr>
+            <a:r>
+              <a:rPr lang="en-US" altLang="en-US" sz="850" b="1" dirty="0">
+                <a:solidFill>
+                  <a:srgbClr val="FFFFFF"/>
+                </a:solidFill>
+                <a:latin typeface="Calibri" pitchFamily="34" charset="0"/>
+                <a:ea typeface="Calibri" pitchFamily="34" charset="-122"/>
+                <a:cs typeface="Calibri" pitchFamily="34" charset="-120"/>
+              </a:rPr>
+              <a:t>B</a:t>
+            </a:r>
+            <a:endParaRPr lang="en-US" sz="850" dirty="0"/>
+          </a:p>
+        </p:txBody>
+      </p:sp>
+      <p:sp>
+        <p:nvSpPr>
+          <p:cNvPr id="240" name="Text 238"/>
+          <p:cNvSpPr/>
+          <p:nvPr/>
+        </p:nvSpPr>
+        <p:spPr>
+          <a:xfrm>
+            <a:off x="822960" y="4128516"/>
+            <a:ext cx="2606040" cy="223266"/>
+          </a:xfrm>
+          <a:prstGeom prst="rect">
+            <a:avLst/>
+          </a:prstGeom>
+          <a:noFill/>
+          <a:ln/>
+        </p:spPr>
+        <p:txBody>
+          <a:bodyPr wrap="square" lIns="0" tIns="0" rIns="0" bIns="0" rtlCol="0" anchor="ctr">
+            <a:normAutofit/>
+          </a:bodyPr>
+          <a:lstStyle/>
+          <a:p>
+            <a:pPr algn="l" indent="0" marL="0">
+              <a:buNone/>
+            </a:pPr>
+            <a:r>
+              <a:rPr lang="en-US" altLang="en-US" sz="750" b="1" dirty="0">
+                <a:solidFill>
+                  <a:srgbClr val="222222"/>
+                </a:solidFill>
+                <a:latin typeface="Calibri" pitchFamily="34" charset="0"/>
+                <a:ea typeface="Calibri" pitchFamily="34" charset="-122"/>
+                <a:cs typeface="Calibri" pitchFamily="34" charset="-120"/>
+              </a:rPr>
+              <a:t>Lean concrete</a:t>
+            </a:r>
+            <a:endParaRPr lang="en-US" sz="750" dirty="0"/>
+          </a:p>
+        </p:txBody>
+      </p:sp>
+      <p:sp>
+        <p:nvSpPr>
+          <p:cNvPr id="241" name="Text 239"/>
+          <p:cNvSpPr/>
+          <p:nvPr/>
+        </p:nvSpPr>
+        <p:spPr>
+          <a:xfrm>
+            <a:off x="3447288" y="4128516"/>
+            <a:ext cx="777240" cy="223266"/>
+          </a:xfrm>
+          <a:prstGeom prst="rect">
+            <a:avLst/>
+          </a:prstGeom>
+          <a:noFill/>
+          <a:ln/>
+        </p:spPr>
+        <p:txBody>
+          <a:bodyPr wrap="square" lIns="0" tIns="0" rIns="0" bIns="0" rtlCol="0" anchor="ctr">
+            <a:normAutofit/>
+          </a:bodyPr>
+          <a:lstStyle/>
+          <a:p>
+            <a:pPr algn="ctr" indent="0" marL="0">
+              <a:buNone/>
+            </a:pPr>
+            <a:r>
+              <a:rPr lang="en-US" altLang="en-US" sz="700" dirty="0">
+                <a:solidFill>
+                  <a:srgbClr val="444444"/>
+                </a:solidFill>
+                <a:latin typeface="Calibri" pitchFamily="34" charset="0"/>
+                <a:ea typeface="Calibri" pitchFamily="34" charset="-122"/>
+                <a:cs typeface="Calibri" pitchFamily="34" charset="-120"/>
+              </a:rPr>
+              <a:t>A · SS +4</a:t>
+            </a:r>
+            <a:endParaRPr lang="en-US" sz="700" dirty="0"/>
+          </a:p>
+        </p:txBody>
+      </p:sp>
+      <p:sp>
+        <p:nvSpPr>
+          <p:cNvPr id="242" name="Text 240"/>
+          <p:cNvSpPr/>
+          <p:nvPr/>
+        </p:nvSpPr>
+        <p:spPr>
+          <a:xfrm>
+            <a:off x="4224528" y="4128516"/>
+            <a:ext cx="502920" cy="223266"/>
+          </a:xfrm>
+          <a:prstGeom prst="rect">
+            <a:avLst/>
+          </a:prstGeom>
+          <a:noFill/>
+          <a:ln/>
+        </p:spPr>
+        <p:txBody>
+          <a:bodyPr wrap="square" lIns="0" tIns="0" rIns="0" bIns="0" rtlCol="0" anchor="ctr">
+            <a:normAutofit/>
+          </a:bodyPr>
+          <a:lstStyle/>
+          <a:p>
+            <a:pPr algn="ctr" indent="0" marL="0">
+              <a:buNone/>
+            </a:pPr>
+            <a:r>
+              <a:rPr lang="en-US" altLang="en-US" sz="900" b="1" dirty="0">
+                <a:solidFill>
+                  <a:srgbClr val="222222"/>
+                </a:solidFill>
+                <a:latin typeface="Calibri" pitchFamily="34" charset="0"/>
+                <a:ea typeface="Calibri" pitchFamily="34" charset="-122"/>
+                <a:cs typeface="Calibri" pitchFamily="34" charset="-120"/>
+              </a:rPr>
+              <a:t>1</a:t>
+            </a:r>
+            <a:endParaRPr lang="en-US" sz="900" dirty="0"/>
+          </a:p>
+        </p:txBody>
+      </p:sp>
+      <p:sp>
+        <p:nvSpPr>
+          <p:cNvPr id="243" name="Text 241"/>
+          <p:cNvSpPr/>
+          <p:nvPr/>
+        </p:nvSpPr>
+        <p:spPr>
+          <a:xfrm>
+            <a:off x="4727448" y="4128516"/>
+            <a:ext cx="658368" cy="223266"/>
+          </a:xfrm>
+          <a:prstGeom prst="rect">
+            <a:avLst/>
+          </a:prstGeom>
+          <a:noFill/>
+          <a:ln/>
+        </p:spPr>
+        <p:txBody>
+          <a:bodyPr wrap="square" lIns="0" tIns="0" rIns="0" bIns="0" rtlCol="0" anchor="ctr">
+            <a:normAutofit/>
+          </a:bodyPr>
+          <a:lstStyle/>
+          <a:p>
+            <a:pPr algn="ctr" indent="0" marL="0">
+              <a:buNone/>
+            </a:pPr>
+            <a:r>
+              <a:rPr lang="en-US" altLang="en-US" sz="700" b="1" dirty="0">
+                <a:solidFill>
+                  <a:srgbClr val="222222"/>
+                </a:solidFill>
+                <a:latin typeface="Calibri" pitchFamily="34" charset="0"/>
+                <a:ea typeface="Calibri" pitchFamily="34" charset="-122"/>
+                <a:cs typeface="Calibri" pitchFamily="34" charset="-120"/>
+              </a:rPr>
+              <a:t>27 Oct</a:t>
+            </a:r>
+            <a:endParaRPr lang="en-US" sz="700" dirty="0"/>
+          </a:p>
+        </p:txBody>
+      </p:sp>
+      <p:sp>
+        <p:nvSpPr>
+          <p:cNvPr id="244" name="Text 242"/>
+          <p:cNvSpPr/>
+          <p:nvPr/>
+        </p:nvSpPr>
+        <p:spPr>
+          <a:xfrm>
+            <a:off x="5385816" y="4128516"/>
+            <a:ext cx="658368" cy="223266"/>
+          </a:xfrm>
+          <a:prstGeom prst="rect">
+            <a:avLst/>
+          </a:prstGeom>
+          <a:noFill/>
+          <a:ln/>
+        </p:spPr>
+        <p:txBody>
+          <a:bodyPr wrap="square" lIns="0" tIns="0" rIns="0" bIns="0" rtlCol="0" anchor="ctr">
+            <a:normAutofit/>
+          </a:bodyPr>
+          <a:lstStyle/>
+          <a:p>
+            <a:pPr algn="ctr" indent="0" marL="0">
+              <a:buNone/>
+            </a:pPr>
+            <a:r>
+              <a:rPr lang="en-US" altLang="en-US" sz="700" b="1" dirty="0">
+                <a:solidFill>
+                  <a:srgbClr val="222222"/>
+                </a:solidFill>
+                <a:latin typeface="Calibri" pitchFamily="34" charset="0"/>
+                <a:ea typeface="Calibri" pitchFamily="34" charset="-122"/>
+                <a:cs typeface="Calibri" pitchFamily="34" charset="-120"/>
+              </a:rPr>
+              <a:t>27 Oct</a:t>
+            </a:r>
+            <a:endParaRPr lang="en-US" sz="700" dirty="0"/>
+          </a:p>
+        </p:txBody>
+      </p:sp>
+      <p:sp>
+        <p:nvSpPr>
           <p:cNvPr id="245" name="Shape 243"/>
           <p:cNvSpPr/>
           <p:nvPr/>
         </p:nvSpPr>
         <p:spPr>
           <a:xfrm>
-            <a:off x="365760" y="4311396"/>
-            <a:ext cx="11460175" cy="192786"/>
-          </a:xfrm>
-          <a:prstGeom prst="rect">
-            <a:avLst/>
-          </a:prstGeom>
-          <a:solidFill>
-            <a:srgbClr val="FFFFFF"/>
-          </a:solidFill>
-          <a:ln w="6350">
-            <a:solidFill>
-              <a:srgbClr val="DFE6EA"/>
-            </a:solidFill>
-            <a:prstDash val="solid"/>
-          </a:ln>
-        </p:spPr>
-      </p:sp>
-      <p:sp>
-        <p:nvSpPr>
-          <p:cNvPr id="246" name="Shape 244"/>
-          <p:cNvSpPr/>
-          <p:nvPr/>
-        </p:nvSpPr>
-        <p:spPr>
-          <a:xfrm>
-            <a:off x="438912" y="4288917"/>
-            <a:ext cx="237744" cy="237744"/>
-          </a:xfrm>
-          <a:prstGeom prst="ellipse">
-            <a:avLst/>
-          </a:prstGeom>
-          <a:solidFill>
-            <a:srgbClr val="00778B"/>
-          </a:solidFill>
-          <a:ln w="6350">
-            <a:solidFill>
-              <a:srgbClr val="00778B"/>
-            </a:solidFill>
-            <a:prstDash val="solid"/>
-          </a:ln>
-        </p:spPr>
-      </p:sp>
-      <p:sp>
-        <p:nvSpPr>
-          <p:cNvPr id="247" name="Text 245"/>
-          <p:cNvSpPr/>
-          <p:nvPr/>
-        </p:nvSpPr>
-        <p:spPr>
-          <a:xfrm>
-            <a:off x="365760" y="4311396"/>
-            <a:ext cx="384048" cy="192786"/>
-          </a:xfrm>
-          <a:prstGeom prst="rect">
-            <a:avLst/>
-          </a:prstGeom>
-          <a:noFill/>
-          <a:ln/>
-        </p:spPr>
-        <p:txBody>
-          <a:bodyPr wrap="square" lIns="0" tIns="0" rIns="0" bIns="0" rtlCol="0" anchor="ctr">
-            <a:normAutofit/>
-          </a:bodyPr>
-          <a:lstStyle/>
-          <a:p>
-            <a:pPr algn="ctr" indent="0" marL="0">
-              <a:buNone/>
-            </a:pPr>
-            <a:r>
-              <a:rPr lang="en-US" altLang="en-US" sz="850" b="1" dirty="0">
-                <a:solidFill>
-                  <a:srgbClr val="FFFFFF"/>
-                </a:solidFill>
-                <a:latin typeface="Calibri" pitchFamily="34" charset="0"/>
-                <a:ea typeface="Calibri" pitchFamily="34" charset="-122"/>
-                <a:cs typeface="Calibri" pitchFamily="34" charset="-120"/>
-              </a:rPr>
-              <a:t>B</a:t>
-            </a:r>
-            <a:endParaRPr lang="en-US" sz="850" dirty="0"/>
-          </a:p>
-        </p:txBody>
-      </p:sp>
-      <p:sp>
-        <p:nvSpPr>
-          <p:cNvPr id="248" name="Text 246"/>
-          <p:cNvSpPr/>
-          <p:nvPr/>
-        </p:nvSpPr>
-        <p:spPr>
-          <a:xfrm>
-            <a:off x="822960" y="4311396"/>
-            <a:ext cx="2606040" cy="192786"/>
-          </a:xfrm>
-          <a:prstGeom prst="rect">
-            <a:avLst/>
-          </a:prstGeom>
-          <a:noFill/>
-          <a:ln/>
-        </p:spPr>
-        <p:txBody>
-          <a:bodyPr wrap="square" lIns="0" tIns="0" rIns="0" bIns="0" rtlCol="0" anchor="ctr">
-            <a:normAutofit/>
-          </a:bodyPr>
-          <a:lstStyle/>
-          <a:p>
-            <a:pPr algn="l" indent="0" marL="0">
-              <a:buNone/>
-            </a:pPr>
-            <a:r>
-              <a:rPr lang="en-US" altLang="en-US" sz="750" b="1" dirty="0">
-                <a:solidFill>
-                  <a:srgbClr val="222222"/>
-                </a:solidFill>
-                <a:latin typeface="Calibri" pitchFamily="34" charset="0"/>
-                <a:ea typeface="Calibri" pitchFamily="34" charset="-122"/>
-                <a:cs typeface="Calibri" pitchFamily="34" charset="-120"/>
-              </a:rPr>
-              <a:t>Lean concrete</a:t>
-            </a:r>
-            <a:endParaRPr lang="en-US" sz="750" dirty="0"/>
-          </a:p>
-        </p:txBody>
-      </p:sp>
-      <p:sp>
-        <p:nvSpPr>
-          <p:cNvPr id="249" name="Text 247"/>
-          <p:cNvSpPr/>
-          <p:nvPr/>
-        </p:nvSpPr>
-        <p:spPr>
-          <a:xfrm>
-            <a:off x="3447288" y="4311396"/>
-            <a:ext cx="777240" cy="192786"/>
-          </a:xfrm>
-          <a:prstGeom prst="rect">
-            <a:avLst/>
-          </a:prstGeom>
-          <a:noFill/>
-          <a:ln/>
-        </p:spPr>
-        <p:txBody>
-          <a:bodyPr wrap="square" lIns="0" tIns="0" rIns="0" bIns="0" rtlCol="0" anchor="ctr">
-            <a:normAutofit/>
-          </a:bodyPr>
-          <a:lstStyle/>
-          <a:p>
-            <a:pPr algn="ctr" indent="0" marL="0">
-              <a:buNone/>
-            </a:pPr>
-            <a:r>
-              <a:rPr lang="en-US" altLang="en-US" sz="700" dirty="0">
-                <a:solidFill>
-                  <a:srgbClr val="444444"/>
-                </a:solidFill>
-                <a:latin typeface="Calibri" pitchFamily="34" charset="0"/>
-                <a:ea typeface="Calibri" pitchFamily="34" charset="-122"/>
-                <a:cs typeface="Calibri" pitchFamily="34" charset="-120"/>
-              </a:rPr>
-              <a:t>A · SS +4</a:t>
-            </a:r>
-            <a:endParaRPr lang="en-US" sz="700" dirty="0"/>
-          </a:p>
-        </p:txBody>
-      </p:sp>
-      <p:sp>
-        <p:nvSpPr>
-          <p:cNvPr id="250" name="Text 248"/>
-          <p:cNvSpPr/>
-          <p:nvPr/>
-        </p:nvSpPr>
-        <p:spPr>
-          <a:xfrm>
-            <a:off x="4224528" y="4311396"/>
-            <a:ext cx="502920" cy="192786"/>
-          </a:xfrm>
-          <a:prstGeom prst="rect">
-            <a:avLst/>
-          </a:prstGeom>
-          <a:noFill/>
-          <a:ln/>
-        </p:spPr>
-        <p:txBody>
-          <a:bodyPr wrap="square" lIns="0" tIns="0" rIns="0" bIns="0" rtlCol="0" anchor="ctr">
-            <a:normAutofit/>
-          </a:bodyPr>
-          <a:lstStyle/>
-          <a:p>
-            <a:pPr algn="ctr" indent="0" marL="0">
-              <a:buNone/>
-            </a:pPr>
-            <a:r>
-              <a:rPr lang="en-US" altLang="en-US" sz="900" b="1" dirty="0">
-                <a:solidFill>
-                  <a:srgbClr val="222222"/>
-                </a:solidFill>
-                <a:latin typeface="Calibri" pitchFamily="34" charset="0"/>
-                <a:ea typeface="Calibri" pitchFamily="34" charset="-122"/>
-                <a:cs typeface="Calibri" pitchFamily="34" charset="-120"/>
-              </a:rPr>
-              <a:t>1</a:t>
-            </a:r>
-            <a:endParaRPr lang="en-US" sz="900" dirty="0"/>
-          </a:p>
-        </p:txBody>
-      </p:sp>
-      <p:sp>
-        <p:nvSpPr>
-          <p:cNvPr id="251" name="Text 249"/>
-          <p:cNvSpPr/>
-          <p:nvPr/>
-        </p:nvSpPr>
-        <p:spPr>
-          <a:xfrm>
-            <a:off x="4727448" y="4311396"/>
-            <a:ext cx="658368" cy="192786"/>
-          </a:xfrm>
-          <a:prstGeom prst="rect">
-            <a:avLst/>
-          </a:prstGeom>
-          <a:noFill/>
-          <a:ln/>
-        </p:spPr>
-        <p:txBody>
-          <a:bodyPr wrap="square" lIns="0" tIns="0" rIns="0" bIns="0" rtlCol="0" anchor="ctr">
-            <a:normAutofit/>
-          </a:bodyPr>
-          <a:lstStyle/>
-          <a:p>
-            <a:pPr algn="ctr" indent="0" marL="0">
-              <a:buNone/>
-            </a:pPr>
-            <a:r>
-              <a:rPr lang="en-US" altLang="en-US" sz="700" b="1" dirty="0">
-                <a:solidFill>
-                  <a:srgbClr val="222222"/>
-                </a:solidFill>
-                <a:latin typeface="Calibri" pitchFamily="34" charset="0"/>
-                <a:ea typeface="Calibri" pitchFamily="34" charset="-122"/>
-                <a:cs typeface="Calibri" pitchFamily="34" charset="-120"/>
-              </a:rPr>
-              <a:t>27 Oct</a:t>
-            </a:r>
-            <a:endParaRPr lang="en-US" sz="700" dirty="0"/>
-          </a:p>
-        </p:txBody>
-      </p:sp>
-      <p:sp>
-        <p:nvSpPr>
-          <p:cNvPr id="252" name="Text 250"/>
-          <p:cNvSpPr/>
-          <p:nvPr/>
-        </p:nvSpPr>
-        <p:spPr>
-          <a:xfrm>
-            <a:off x="5385816" y="4311396"/>
-            <a:ext cx="658368" cy="192786"/>
-          </a:xfrm>
-          <a:prstGeom prst="rect">
-            <a:avLst/>
-          </a:prstGeom>
-          <a:noFill/>
-          <a:ln/>
-        </p:spPr>
-        <p:txBody>
-          <a:bodyPr wrap="square" lIns="0" tIns="0" rIns="0" bIns="0" rtlCol="0" anchor="ctr">
-            <a:normAutofit/>
-          </a:bodyPr>
-          <a:lstStyle/>
-          <a:p>
-            <a:pPr algn="ctr" indent="0" marL="0">
-              <a:buNone/>
-            </a:pPr>
-            <a:r>
-              <a:rPr lang="en-US" altLang="en-US" sz="700" b="1" dirty="0">
-                <a:solidFill>
-                  <a:srgbClr val="222222"/>
-                </a:solidFill>
-                <a:latin typeface="Calibri" pitchFamily="34" charset="0"/>
-                <a:ea typeface="Calibri" pitchFamily="34" charset="-122"/>
-                <a:cs typeface="Calibri" pitchFamily="34" charset="-120"/>
-              </a:rPr>
-              <a:t>27 Oct</a:t>
-            </a:r>
-            <a:endParaRPr lang="en-US" sz="700" dirty="0"/>
-          </a:p>
-        </p:txBody>
-      </p:sp>
-      <p:sp>
-        <p:nvSpPr>
-          <p:cNvPr id="253" name="Shape 251"/>
-          <p:cNvSpPr/>
-          <p:nvPr/>
-        </p:nvSpPr>
-        <p:spPr>
-          <a:xfrm>
-            <a:off x="8254854" y="4351881"/>
-            <a:ext cx="170052" cy="111816"/>
+            <a:off x="8254854" y="4175402"/>
+            <a:ext cx="170052" cy="129494"/>
           </a:xfrm>
           <a:prstGeom prst="roundRect">
             <a:avLst>
-              <a:gd name="adj" fmla="val 32711"/>
+              <a:gd name="adj" fmla="val 28245"/>
             </a:avLst>
           </a:prstGeom>
           <a:solidFill>
@@ -15522,314 +15244,314 @@
       </p:sp>
       <p:sp>
         <p:nvSpPr>
+          <p:cNvPr id="246" name="Shape 244"/>
+          <p:cNvSpPr/>
+          <p:nvPr/>
+        </p:nvSpPr>
+        <p:spPr>
+          <a:xfrm>
+            <a:off x="365760" y="4351782"/>
+            <a:ext cx="11460175" cy="223266"/>
+          </a:xfrm>
+          <a:prstGeom prst="rect">
+            <a:avLst/>
+          </a:prstGeom>
+          <a:solidFill>
+            <a:srgbClr val="F6F9FA"/>
+          </a:solidFill>
+          <a:ln w="6350">
+            <a:solidFill>
+              <a:srgbClr val="DFE6EA"/>
+            </a:solidFill>
+            <a:prstDash val="solid"/>
+          </a:ln>
+        </p:spPr>
+      </p:sp>
+      <p:sp>
+        <p:nvSpPr>
+          <p:cNvPr id="247" name="Shape 245"/>
+          <p:cNvSpPr/>
+          <p:nvPr/>
+        </p:nvSpPr>
+        <p:spPr>
+          <a:xfrm>
+            <a:off x="438912" y="4344543"/>
+            <a:ext cx="237744" cy="237744"/>
+          </a:xfrm>
+          <a:prstGeom prst="ellipse">
+            <a:avLst/>
+          </a:prstGeom>
+          <a:solidFill>
+            <a:srgbClr val="00778B"/>
+          </a:solidFill>
+          <a:ln w="19050">
+            <a:solidFill>
+              <a:srgbClr val="222222"/>
+            </a:solidFill>
+            <a:prstDash val="solid"/>
+          </a:ln>
+        </p:spPr>
+      </p:sp>
+      <p:sp>
+        <p:nvSpPr>
+          <p:cNvPr id="248" name="Text 246"/>
+          <p:cNvSpPr/>
+          <p:nvPr/>
+        </p:nvSpPr>
+        <p:spPr>
+          <a:xfrm>
+            <a:off x="365760" y="4351782"/>
+            <a:ext cx="384048" cy="223266"/>
+          </a:xfrm>
+          <a:prstGeom prst="rect">
+            <a:avLst/>
+          </a:prstGeom>
+          <a:noFill/>
+          <a:ln/>
+        </p:spPr>
+        <p:txBody>
+          <a:bodyPr wrap="square" lIns="0" tIns="0" rIns="0" bIns="0" rtlCol="0" anchor="ctr">
+            <a:normAutofit/>
+          </a:bodyPr>
+          <a:lstStyle/>
+          <a:p>
+            <a:pPr algn="ctr" indent="0" marL="0">
+              <a:buNone/>
+            </a:pPr>
+            <a:r>
+              <a:rPr lang="en-US" altLang="en-US" sz="850" b="1" dirty="0">
+                <a:solidFill>
+                  <a:srgbClr val="FFFFFF"/>
+                </a:solidFill>
+                <a:latin typeface="Calibri" pitchFamily="34" charset="0"/>
+                <a:ea typeface="Calibri" pitchFamily="34" charset="-122"/>
+                <a:cs typeface="Calibri" pitchFamily="34" charset="-120"/>
+              </a:rPr>
+              <a:t>C</a:t>
+            </a:r>
+            <a:endParaRPr lang="en-US" sz="850" dirty="0"/>
+          </a:p>
+        </p:txBody>
+      </p:sp>
+      <p:sp>
+        <p:nvSpPr>
+          <p:cNvPr id="249" name="Text 247"/>
+          <p:cNvSpPr/>
+          <p:nvPr/>
+        </p:nvSpPr>
+        <p:spPr>
+          <a:xfrm>
+            <a:off x="822960" y="4351782"/>
+            <a:ext cx="2606040" cy="223266"/>
+          </a:xfrm>
+          <a:prstGeom prst="rect">
+            <a:avLst/>
+          </a:prstGeom>
+          <a:noFill/>
+          <a:ln/>
+        </p:spPr>
+        <p:txBody>
+          <a:bodyPr wrap="square" lIns="0" tIns="0" rIns="0" bIns="0" rtlCol="0" anchor="ctr">
+            <a:normAutofit/>
+          </a:bodyPr>
+          <a:lstStyle/>
+          <a:p>
+            <a:pPr algn="l" indent="0" marL="0">
+              <a:buNone/>
+            </a:pPr>
+            <a:r>
+              <a:rPr lang="en-US" altLang="en-US" sz="750" b="1" dirty="0">
+                <a:solidFill>
+                  <a:srgbClr val="222222"/>
+                </a:solidFill>
+                <a:latin typeface="Calibri" pitchFamily="34" charset="0"/>
+                <a:ea typeface="Calibri" pitchFamily="34" charset="-122"/>
+                <a:cs typeface="Calibri" pitchFamily="34" charset="-120"/>
+              </a:rPr>
+              <a:t>Pit trench – reinforcement, formwork &amp; concrete</a:t>
+            </a:r>
+            <a:endParaRPr lang="en-US" sz="750" dirty="0"/>
+          </a:p>
+        </p:txBody>
+      </p:sp>
+      <p:sp>
+        <p:nvSpPr>
+          <p:cNvPr id="250" name="Text 248"/>
+          <p:cNvSpPr/>
+          <p:nvPr/>
+        </p:nvSpPr>
+        <p:spPr>
+          <a:xfrm>
+            <a:off x="3447288" y="4351782"/>
+            <a:ext cx="777240" cy="223266"/>
+          </a:xfrm>
+          <a:prstGeom prst="rect">
+            <a:avLst/>
+          </a:prstGeom>
+          <a:noFill/>
+          <a:ln/>
+        </p:spPr>
+        <p:txBody>
+          <a:bodyPr wrap="square" lIns="0" tIns="0" rIns="0" bIns="0" rtlCol="0" anchor="ctr">
+            <a:normAutofit/>
+          </a:bodyPr>
+          <a:lstStyle/>
+          <a:p>
+            <a:pPr algn="ctr" indent="0" marL="0">
+              <a:buNone/>
+            </a:pPr>
+            <a:r>
+              <a:rPr lang="en-US" altLang="en-US" sz="700" dirty="0">
+                <a:solidFill>
+                  <a:srgbClr val="444444"/>
+                </a:solidFill>
+                <a:latin typeface="Calibri" pitchFamily="34" charset="0"/>
+                <a:ea typeface="Calibri" pitchFamily="34" charset="-122"/>
+                <a:cs typeface="Calibri" pitchFamily="34" charset="-120"/>
+              </a:rPr>
+              <a:t>A · FS</a:t>
+            </a:r>
+            <a:endParaRPr lang="en-US" sz="700" dirty="0"/>
+          </a:p>
+        </p:txBody>
+      </p:sp>
+      <p:sp>
+        <p:nvSpPr>
+          <p:cNvPr id="251" name="Text 249"/>
+          <p:cNvSpPr/>
+          <p:nvPr/>
+        </p:nvSpPr>
+        <p:spPr>
+          <a:xfrm>
+            <a:off x="4224528" y="4351782"/>
+            <a:ext cx="502920" cy="223266"/>
+          </a:xfrm>
+          <a:prstGeom prst="rect">
+            <a:avLst/>
+          </a:prstGeom>
+          <a:noFill/>
+          <a:ln/>
+        </p:spPr>
+        <p:txBody>
+          <a:bodyPr wrap="square" lIns="0" tIns="0" rIns="0" bIns="0" rtlCol="0" anchor="ctr">
+            <a:normAutofit/>
+          </a:bodyPr>
+          <a:lstStyle/>
+          <a:p>
+            <a:pPr algn="ctr" indent="0" marL="0">
+              <a:buNone/>
+            </a:pPr>
+            <a:r>
+              <a:rPr lang="en-US" altLang="en-US" sz="900" b="1" dirty="0">
+                <a:solidFill>
+                  <a:srgbClr val="222222"/>
+                </a:solidFill>
+                <a:latin typeface="Calibri" pitchFamily="34" charset="0"/>
+                <a:ea typeface="Calibri" pitchFamily="34" charset="-122"/>
+                <a:cs typeface="Calibri" pitchFamily="34" charset="-120"/>
+              </a:rPr>
+              <a:t>2</a:t>
+            </a:r>
+            <a:endParaRPr lang="en-US" sz="900" dirty="0"/>
+          </a:p>
+        </p:txBody>
+      </p:sp>
+      <p:sp>
+        <p:nvSpPr>
+          <p:cNvPr id="252" name="Text 250"/>
+          <p:cNvSpPr/>
+          <p:nvPr/>
+        </p:nvSpPr>
+        <p:spPr>
+          <a:xfrm>
+            <a:off x="4727448" y="4351782"/>
+            <a:ext cx="658368" cy="223266"/>
+          </a:xfrm>
+          <a:prstGeom prst="rect">
+            <a:avLst/>
+          </a:prstGeom>
+          <a:noFill/>
+          <a:ln/>
+        </p:spPr>
+        <p:txBody>
+          <a:bodyPr wrap="square" lIns="0" tIns="0" rIns="0" bIns="0" rtlCol="0" anchor="ctr">
+            <a:normAutofit/>
+          </a:bodyPr>
+          <a:lstStyle/>
+          <a:p>
+            <a:pPr algn="ctr" indent="0" marL="0">
+              <a:buNone/>
+            </a:pPr>
+            <a:r>
+              <a:rPr lang="en-US" altLang="en-US" sz="700" b="1" dirty="0">
+                <a:solidFill>
+                  <a:srgbClr val="222222"/>
+                </a:solidFill>
+                <a:latin typeface="Calibri" pitchFamily="34" charset="0"/>
+                <a:ea typeface="Calibri" pitchFamily="34" charset="-122"/>
+                <a:cs typeface="Calibri" pitchFamily="34" charset="-120"/>
+              </a:rPr>
+              <a:t>27 Oct</a:t>
+            </a:r>
+            <a:endParaRPr lang="en-US" sz="700" dirty="0"/>
+          </a:p>
+        </p:txBody>
+      </p:sp>
+      <p:sp>
+        <p:nvSpPr>
+          <p:cNvPr id="253" name="Text 251"/>
+          <p:cNvSpPr/>
+          <p:nvPr/>
+        </p:nvSpPr>
+        <p:spPr>
+          <a:xfrm>
+            <a:off x="5385816" y="4351782"/>
+            <a:ext cx="658368" cy="223266"/>
+          </a:xfrm>
+          <a:prstGeom prst="rect">
+            <a:avLst/>
+          </a:prstGeom>
+          <a:noFill/>
+          <a:ln/>
+        </p:spPr>
+        <p:txBody>
+          <a:bodyPr wrap="square" lIns="0" tIns="0" rIns="0" bIns="0" rtlCol="0" anchor="ctr">
+            <a:normAutofit/>
+          </a:bodyPr>
+          <a:lstStyle/>
+          <a:p>
+            <a:pPr algn="ctr" indent="0" marL="0">
+              <a:buNone/>
+            </a:pPr>
+            <a:r>
+              <a:rPr lang="en-US" altLang="en-US" sz="700" b="1" dirty="0">
+                <a:solidFill>
+                  <a:srgbClr val="222222"/>
+                </a:solidFill>
+                <a:latin typeface="Calibri" pitchFamily="34" charset="0"/>
+                <a:ea typeface="Calibri" pitchFamily="34" charset="-122"/>
+                <a:cs typeface="Calibri" pitchFamily="34" charset="-120"/>
+              </a:rPr>
+              <a:t>28 Oct</a:t>
+            </a:r>
+            <a:endParaRPr lang="en-US" sz="700" dirty="0"/>
+          </a:p>
+        </p:txBody>
+      </p:sp>
+      <p:sp>
+        <p:nvSpPr>
           <p:cNvPr id="254" name="Shape 252"/>
           <p:cNvSpPr/>
           <p:nvPr/>
         </p:nvSpPr>
         <p:spPr>
           <a:xfrm>
-            <a:off x="365760" y="4504182"/>
-            <a:ext cx="11460175" cy="192786"/>
-          </a:xfrm>
-          <a:prstGeom prst="rect">
-            <a:avLst/>
-          </a:prstGeom>
-          <a:solidFill>
-            <a:srgbClr val="F6F9FA"/>
-          </a:solidFill>
-          <a:ln w="6350">
-            <a:solidFill>
-              <a:srgbClr val="DFE6EA"/>
-            </a:solidFill>
-            <a:prstDash val="solid"/>
-          </a:ln>
-        </p:spPr>
-      </p:sp>
-      <p:sp>
-        <p:nvSpPr>
-          <p:cNvPr id="255" name="Shape 253"/>
-          <p:cNvSpPr/>
-          <p:nvPr/>
-        </p:nvSpPr>
-        <p:spPr>
-          <a:xfrm>
-            <a:off x="438912" y="4481703"/>
-            <a:ext cx="237744" cy="237744"/>
-          </a:xfrm>
-          <a:prstGeom prst="ellipse">
-            <a:avLst/>
-          </a:prstGeom>
-          <a:solidFill>
-            <a:srgbClr val="00778B"/>
-          </a:solidFill>
-          <a:ln w="19050">
-            <a:solidFill>
-              <a:srgbClr val="222222"/>
-            </a:solidFill>
-            <a:prstDash val="solid"/>
-          </a:ln>
-        </p:spPr>
-      </p:sp>
-      <p:sp>
-        <p:nvSpPr>
-          <p:cNvPr id="256" name="Text 254"/>
-          <p:cNvSpPr/>
-          <p:nvPr/>
-        </p:nvSpPr>
-        <p:spPr>
-          <a:xfrm>
-            <a:off x="365760" y="4504182"/>
-            <a:ext cx="384048" cy="192786"/>
-          </a:xfrm>
-          <a:prstGeom prst="rect">
-            <a:avLst/>
-          </a:prstGeom>
-          <a:noFill/>
-          <a:ln/>
-        </p:spPr>
-        <p:txBody>
-          <a:bodyPr wrap="square" lIns="0" tIns="0" rIns="0" bIns="0" rtlCol="0" anchor="ctr">
-            <a:normAutofit/>
-          </a:bodyPr>
-          <a:lstStyle/>
-          <a:p>
-            <a:pPr algn="ctr" indent="0" marL="0">
-              <a:buNone/>
-            </a:pPr>
-            <a:r>
-              <a:rPr lang="en-US" altLang="en-US" sz="850" b="1" dirty="0">
-                <a:solidFill>
-                  <a:srgbClr val="FFFFFF"/>
-                </a:solidFill>
-                <a:latin typeface="Calibri" pitchFamily="34" charset="0"/>
-                <a:ea typeface="Calibri" pitchFamily="34" charset="-122"/>
-                <a:cs typeface="Calibri" pitchFamily="34" charset="-120"/>
-              </a:rPr>
-              <a:t>C</a:t>
-            </a:r>
-            <a:endParaRPr lang="en-US" sz="850" dirty="0"/>
-          </a:p>
-        </p:txBody>
-      </p:sp>
-      <p:sp>
-        <p:nvSpPr>
-          <p:cNvPr id="257" name="Text 255"/>
-          <p:cNvSpPr/>
-          <p:nvPr/>
-        </p:nvSpPr>
-        <p:spPr>
-          <a:xfrm>
-            <a:off x="822960" y="4504182"/>
-            <a:ext cx="2606040" cy="192786"/>
-          </a:xfrm>
-          <a:prstGeom prst="rect">
-            <a:avLst/>
-          </a:prstGeom>
-          <a:noFill/>
-          <a:ln/>
-        </p:spPr>
-        <p:txBody>
-          <a:bodyPr wrap="square" lIns="0" tIns="0" rIns="0" bIns="0" rtlCol="0" anchor="ctr">
-            <a:normAutofit/>
-          </a:bodyPr>
-          <a:lstStyle/>
-          <a:p>
-            <a:pPr algn="l" indent="0" marL="0">
-              <a:buNone/>
-            </a:pPr>
-            <a:r>
-              <a:rPr lang="en-US" altLang="en-US" sz="750" b="1" dirty="0">
-                <a:solidFill>
-                  <a:srgbClr val="222222"/>
-                </a:solidFill>
-                <a:latin typeface="Calibri" pitchFamily="34" charset="0"/>
-                <a:ea typeface="Calibri" pitchFamily="34" charset="-122"/>
-                <a:cs typeface="Calibri" pitchFamily="34" charset="-120"/>
-              </a:rPr>
-              <a:t>Pit trench – reinforcement, formwork &amp; concrete</a:t>
-            </a:r>
-            <a:endParaRPr lang="en-US" sz="750" dirty="0"/>
-          </a:p>
-        </p:txBody>
-      </p:sp>
-      <p:sp>
-        <p:nvSpPr>
-          <p:cNvPr id="258" name="Text 256"/>
-          <p:cNvSpPr/>
-          <p:nvPr/>
-        </p:nvSpPr>
-        <p:spPr>
-          <a:xfrm>
-            <a:off x="3447288" y="4504182"/>
-            <a:ext cx="777240" cy="192786"/>
-          </a:xfrm>
-          <a:prstGeom prst="rect">
-            <a:avLst/>
-          </a:prstGeom>
-          <a:noFill/>
-          <a:ln/>
-        </p:spPr>
-        <p:txBody>
-          <a:bodyPr wrap="square" lIns="0" tIns="0" rIns="0" bIns="0" rtlCol="0" anchor="ctr">
-            <a:normAutofit/>
-          </a:bodyPr>
-          <a:lstStyle/>
-          <a:p>
-            <a:pPr algn="ctr" indent="0" marL="0">
-              <a:buNone/>
-            </a:pPr>
-            <a:r>
-              <a:rPr lang="en-US" altLang="en-US" sz="700" dirty="0">
-                <a:solidFill>
-                  <a:srgbClr val="444444"/>
-                </a:solidFill>
-                <a:latin typeface="Calibri" pitchFamily="34" charset="0"/>
-                <a:ea typeface="Calibri" pitchFamily="34" charset="-122"/>
-                <a:cs typeface="Calibri" pitchFamily="34" charset="-120"/>
-              </a:rPr>
-              <a:t>A · FS</a:t>
-            </a:r>
-            <a:endParaRPr lang="en-US" sz="700" dirty="0"/>
-          </a:p>
-        </p:txBody>
-      </p:sp>
-      <p:sp>
-        <p:nvSpPr>
-          <p:cNvPr id="259" name="Text 257"/>
-          <p:cNvSpPr/>
-          <p:nvPr/>
-        </p:nvSpPr>
-        <p:spPr>
-          <a:xfrm>
-            <a:off x="4224528" y="4504182"/>
-            <a:ext cx="502920" cy="192786"/>
-          </a:xfrm>
-          <a:prstGeom prst="rect">
-            <a:avLst/>
-          </a:prstGeom>
-          <a:noFill/>
-          <a:ln/>
-        </p:spPr>
-        <p:txBody>
-          <a:bodyPr wrap="square" lIns="0" tIns="0" rIns="0" bIns="0" rtlCol="0" anchor="ctr">
-            <a:normAutofit/>
-          </a:bodyPr>
-          <a:lstStyle/>
-          <a:p>
-            <a:pPr algn="ctr" indent="0" marL="0">
-              <a:buNone/>
-            </a:pPr>
-            <a:r>
-              <a:rPr lang="en-US" altLang="en-US" sz="900" b="1" dirty="0">
-                <a:solidFill>
-                  <a:srgbClr val="222222"/>
-                </a:solidFill>
-                <a:latin typeface="Calibri" pitchFamily="34" charset="0"/>
-                <a:ea typeface="Calibri" pitchFamily="34" charset="-122"/>
-                <a:cs typeface="Calibri" pitchFamily="34" charset="-120"/>
-              </a:rPr>
-              <a:t>2</a:t>
-            </a:r>
-            <a:endParaRPr lang="en-US" sz="900" dirty="0"/>
-          </a:p>
-        </p:txBody>
-      </p:sp>
-      <p:sp>
-        <p:nvSpPr>
-          <p:cNvPr id="260" name="Text 258"/>
-          <p:cNvSpPr/>
-          <p:nvPr/>
-        </p:nvSpPr>
-        <p:spPr>
-          <a:xfrm>
-            <a:off x="4727448" y="4504182"/>
-            <a:ext cx="658368" cy="192786"/>
-          </a:xfrm>
-          <a:prstGeom prst="rect">
-            <a:avLst/>
-          </a:prstGeom>
-          <a:noFill/>
-          <a:ln/>
-        </p:spPr>
-        <p:txBody>
-          <a:bodyPr wrap="square" lIns="0" tIns="0" rIns="0" bIns="0" rtlCol="0" anchor="ctr">
-            <a:normAutofit/>
-          </a:bodyPr>
-          <a:lstStyle/>
-          <a:p>
-            <a:pPr algn="ctr" indent="0" marL="0">
-              <a:buNone/>
-            </a:pPr>
-            <a:r>
-              <a:rPr lang="en-US" altLang="en-US" sz="700" b="1" dirty="0">
-                <a:solidFill>
-                  <a:srgbClr val="222222"/>
-                </a:solidFill>
-                <a:latin typeface="Calibri" pitchFamily="34" charset="0"/>
-                <a:ea typeface="Calibri" pitchFamily="34" charset="-122"/>
-                <a:cs typeface="Calibri" pitchFamily="34" charset="-120"/>
-              </a:rPr>
-              <a:t>27 Oct</a:t>
-            </a:r>
-            <a:endParaRPr lang="en-US" sz="700" dirty="0"/>
-          </a:p>
-        </p:txBody>
-      </p:sp>
-      <p:sp>
-        <p:nvSpPr>
-          <p:cNvPr id="261" name="Text 259"/>
-          <p:cNvSpPr/>
-          <p:nvPr/>
-        </p:nvSpPr>
-        <p:spPr>
-          <a:xfrm>
-            <a:off x="5385816" y="4504182"/>
-            <a:ext cx="658368" cy="192786"/>
-          </a:xfrm>
-          <a:prstGeom prst="rect">
-            <a:avLst/>
-          </a:prstGeom>
-          <a:noFill/>
-          <a:ln/>
-        </p:spPr>
-        <p:txBody>
-          <a:bodyPr wrap="square" lIns="0" tIns="0" rIns="0" bIns="0" rtlCol="0" anchor="ctr">
-            <a:normAutofit/>
-          </a:bodyPr>
-          <a:lstStyle/>
-          <a:p>
-            <a:pPr algn="ctr" indent="0" marL="0">
-              <a:buNone/>
-            </a:pPr>
-            <a:r>
-              <a:rPr lang="en-US" altLang="en-US" sz="700" b="1" dirty="0">
-                <a:solidFill>
-                  <a:srgbClr val="222222"/>
-                </a:solidFill>
-                <a:latin typeface="Calibri" pitchFamily="34" charset="0"/>
-                <a:ea typeface="Calibri" pitchFamily="34" charset="-122"/>
-                <a:cs typeface="Calibri" pitchFamily="34" charset="-120"/>
-              </a:rPr>
-              <a:t>28 Oct</a:t>
-            </a:r>
-            <a:endParaRPr lang="en-US" sz="700" dirty="0"/>
-          </a:p>
-        </p:txBody>
-      </p:sp>
-      <p:sp>
-        <p:nvSpPr>
-          <p:cNvPr id="262" name="Shape 260"/>
-          <p:cNvSpPr/>
-          <p:nvPr/>
-        </p:nvSpPr>
-        <p:spPr>
-          <a:xfrm>
-            <a:off x="8254854" y="4544667"/>
-            <a:ext cx="340103" cy="111816"/>
+            <a:off x="8254854" y="4398668"/>
+            <a:ext cx="340103" cy="129494"/>
           </a:xfrm>
           <a:prstGeom prst="roundRect">
             <a:avLst>
-              <a:gd name="adj" fmla="val 32711"/>
+              <a:gd name="adj" fmla="val 28245"/>
             </a:avLst>
           </a:prstGeom>
           <a:solidFill>
@@ -15852,14 +15574,310 @@
       </p:sp>
       <p:sp>
         <p:nvSpPr>
+          <p:cNvPr id="255" name="Text 253"/>
+          <p:cNvSpPr/>
+          <p:nvPr/>
+        </p:nvSpPr>
+        <p:spPr>
+          <a:xfrm>
+            <a:off x="8254854" y="4398668"/>
+            <a:ext cx="340103" cy="129494"/>
+          </a:xfrm>
+          <a:prstGeom prst="rect">
+            <a:avLst/>
+          </a:prstGeom>
+          <a:noFill/>
+          <a:ln/>
+        </p:spPr>
+        <p:txBody>
+          <a:bodyPr wrap="square" lIns="0" tIns="0" rIns="0" bIns="0" rtlCol="0" anchor="ctr">
+            <a:normAutofit/>
+          </a:bodyPr>
+          <a:lstStyle/>
+          <a:p>
+            <a:pPr algn="ctr" indent="0" marL="0">
+              <a:buNone/>
+            </a:pPr>
+            <a:r>
+              <a:rPr lang="en-US" altLang="en-US" sz="700" b="1" dirty="0">
+                <a:solidFill>
+                  <a:srgbClr val="FFFFFF"/>
+                </a:solidFill>
+                <a:latin typeface="Calibri" pitchFamily="34" charset="0"/>
+                <a:ea typeface="Calibri" pitchFamily="34" charset="-122"/>
+                <a:cs typeface="Calibri" pitchFamily="34" charset="-120"/>
+              </a:rPr>
+              <a:t>2 d</a:t>
+            </a:r>
+            <a:endParaRPr lang="en-US" sz="700" dirty="0"/>
+          </a:p>
+        </p:txBody>
+      </p:sp>
+      <p:sp>
+        <p:nvSpPr>
+          <p:cNvPr id="256" name="Shape 254"/>
+          <p:cNvSpPr/>
+          <p:nvPr/>
+        </p:nvSpPr>
+        <p:spPr>
+          <a:xfrm>
+            <a:off x="365760" y="4575048"/>
+            <a:ext cx="11460175" cy="223266"/>
+          </a:xfrm>
+          <a:prstGeom prst="rect">
+            <a:avLst/>
+          </a:prstGeom>
+          <a:solidFill>
+            <a:srgbClr val="FFFFFF"/>
+          </a:solidFill>
+          <a:ln w="6350">
+            <a:solidFill>
+              <a:srgbClr val="DFE6EA"/>
+            </a:solidFill>
+            <a:prstDash val="solid"/>
+          </a:ln>
+        </p:spPr>
+      </p:sp>
+      <p:sp>
+        <p:nvSpPr>
+          <p:cNvPr id="257" name="Shape 255"/>
+          <p:cNvSpPr/>
+          <p:nvPr/>
+        </p:nvSpPr>
+        <p:spPr>
+          <a:xfrm>
+            <a:off x="438912" y="4567809"/>
+            <a:ext cx="237744" cy="237744"/>
+          </a:xfrm>
+          <a:prstGeom prst="ellipse">
+            <a:avLst/>
+          </a:prstGeom>
+          <a:solidFill>
+            <a:srgbClr val="00778B"/>
+          </a:solidFill>
+          <a:ln w="19050">
+            <a:solidFill>
+              <a:srgbClr val="222222"/>
+            </a:solidFill>
+            <a:prstDash val="solid"/>
+          </a:ln>
+        </p:spPr>
+      </p:sp>
+      <p:sp>
+        <p:nvSpPr>
+          <p:cNvPr id="258" name="Text 256"/>
+          <p:cNvSpPr/>
+          <p:nvPr/>
+        </p:nvSpPr>
+        <p:spPr>
+          <a:xfrm>
+            <a:off x="365760" y="4575048"/>
+            <a:ext cx="384048" cy="223266"/>
+          </a:xfrm>
+          <a:prstGeom prst="rect">
+            <a:avLst/>
+          </a:prstGeom>
+          <a:noFill/>
+          <a:ln/>
+        </p:spPr>
+        <p:txBody>
+          <a:bodyPr wrap="square" lIns="0" tIns="0" rIns="0" bIns="0" rtlCol="0" anchor="ctr">
+            <a:normAutofit/>
+          </a:bodyPr>
+          <a:lstStyle/>
+          <a:p>
+            <a:pPr algn="ctr" indent="0" marL="0">
+              <a:buNone/>
+            </a:pPr>
+            <a:r>
+              <a:rPr lang="en-US" altLang="en-US" sz="850" b="1" dirty="0">
+                <a:solidFill>
+                  <a:srgbClr val="FFFFFF"/>
+                </a:solidFill>
+                <a:latin typeface="Calibri" pitchFamily="34" charset="0"/>
+                <a:ea typeface="Calibri" pitchFamily="34" charset="-122"/>
+                <a:cs typeface="Calibri" pitchFamily="34" charset="-120"/>
+              </a:rPr>
+              <a:t>D</a:t>
+            </a:r>
+            <a:endParaRPr lang="en-US" sz="850" dirty="0"/>
+          </a:p>
+        </p:txBody>
+      </p:sp>
+      <p:sp>
+        <p:nvSpPr>
+          <p:cNvPr id="259" name="Text 257"/>
+          <p:cNvSpPr/>
+          <p:nvPr/>
+        </p:nvSpPr>
+        <p:spPr>
+          <a:xfrm>
+            <a:off x="822960" y="4575048"/>
+            <a:ext cx="2606040" cy="223266"/>
+          </a:xfrm>
+          <a:prstGeom prst="rect">
+            <a:avLst/>
+          </a:prstGeom>
+          <a:noFill/>
+          <a:ln/>
+        </p:spPr>
+        <p:txBody>
+          <a:bodyPr wrap="square" lIns="0" tIns="0" rIns="0" bIns="0" rtlCol="0" anchor="ctr">
+            <a:normAutofit/>
+          </a:bodyPr>
+          <a:lstStyle/>
+          <a:p>
+            <a:pPr algn="l" indent="0" marL="0">
+              <a:buNone/>
+            </a:pPr>
+            <a:r>
+              <a:rPr lang="en-US" altLang="en-US" sz="750" b="1" dirty="0">
+                <a:solidFill>
+                  <a:srgbClr val="222222"/>
+                </a:solidFill>
+                <a:latin typeface="Calibri" pitchFamily="34" charset="0"/>
+                <a:ea typeface="Calibri" pitchFamily="34" charset="-122"/>
+                <a:cs typeface="Calibri" pitchFamily="34" charset="-120"/>
+              </a:rPr>
+              <a:t>Pit slab / raft – reinforcement, formwork &amp; concrete</a:t>
+            </a:r>
+            <a:endParaRPr lang="en-US" sz="750" dirty="0"/>
+          </a:p>
+        </p:txBody>
+      </p:sp>
+      <p:sp>
+        <p:nvSpPr>
+          <p:cNvPr id="260" name="Text 258"/>
+          <p:cNvSpPr/>
+          <p:nvPr/>
+        </p:nvSpPr>
+        <p:spPr>
+          <a:xfrm>
+            <a:off x="3447288" y="4575048"/>
+            <a:ext cx="777240" cy="223266"/>
+          </a:xfrm>
+          <a:prstGeom prst="rect">
+            <a:avLst/>
+          </a:prstGeom>
+          <a:noFill/>
+          <a:ln/>
+        </p:spPr>
+        <p:txBody>
+          <a:bodyPr wrap="square" lIns="0" tIns="0" rIns="0" bIns="0" rtlCol="0" anchor="ctr">
+            <a:normAutofit/>
+          </a:bodyPr>
+          <a:lstStyle/>
+          <a:p>
+            <a:pPr algn="ctr" indent="0" marL="0">
+              <a:buNone/>
+            </a:pPr>
+            <a:r>
+              <a:rPr lang="en-US" altLang="en-US" sz="700" dirty="0">
+                <a:solidFill>
+                  <a:srgbClr val="444444"/>
+                </a:solidFill>
+                <a:latin typeface="Calibri" pitchFamily="34" charset="0"/>
+                <a:ea typeface="Calibri" pitchFamily="34" charset="-122"/>
+                <a:cs typeface="Calibri" pitchFamily="34" charset="-120"/>
+              </a:rPr>
+              <a:t>C · FS</a:t>
+            </a:r>
+            <a:endParaRPr lang="en-US" sz="700" dirty="0"/>
+          </a:p>
+        </p:txBody>
+      </p:sp>
+      <p:sp>
+        <p:nvSpPr>
+          <p:cNvPr id="261" name="Text 259"/>
+          <p:cNvSpPr/>
+          <p:nvPr/>
+        </p:nvSpPr>
+        <p:spPr>
+          <a:xfrm>
+            <a:off x="4224528" y="4575048"/>
+            <a:ext cx="502920" cy="223266"/>
+          </a:xfrm>
+          <a:prstGeom prst="rect">
+            <a:avLst/>
+          </a:prstGeom>
+          <a:noFill/>
+          <a:ln/>
+        </p:spPr>
+        <p:txBody>
+          <a:bodyPr wrap="square" lIns="0" tIns="0" rIns="0" bIns="0" rtlCol="0" anchor="ctr">
+            <a:normAutofit/>
+          </a:bodyPr>
+          <a:lstStyle/>
+          <a:p>
+            <a:pPr algn="ctr" indent="0" marL="0">
+              <a:buNone/>
+            </a:pPr>
+            <a:r>
+              <a:rPr lang="en-US" altLang="en-US" sz="900" b="1" dirty="0">
+                <a:solidFill>
+                  <a:srgbClr val="222222"/>
+                </a:solidFill>
+                <a:latin typeface="Calibri" pitchFamily="34" charset="0"/>
+                <a:ea typeface="Calibri" pitchFamily="34" charset="-122"/>
+                <a:cs typeface="Calibri" pitchFamily="34" charset="-120"/>
+              </a:rPr>
+              <a:t>5</a:t>
+            </a:r>
+            <a:endParaRPr lang="en-US" sz="900" dirty="0"/>
+          </a:p>
+        </p:txBody>
+      </p:sp>
+      <p:sp>
+        <p:nvSpPr>
+          <p:cNvPr id="262" name="Text 260"/>
+          <p:cNvSpPr/>
+          <p:nvPr/>
+        </p:nvSpPr>
+        <p:spPr>
+          <a:xfrm>
+            <a:off x="4727448" y="4575048"/>
+            <a:ext cx="658368" cy="223266"/>
+          </a:xfrm>
+          <a:prstGeom prst="rect">
+            <a:avLst/>
+          </a:prstGeom>
+          <a:noFill/>
+          <a:ln/>
+        </p:spPr>
+        <p:txBody>
+          <a:bodyPr wrap="square" lIns="0" tIns="0" rIns="0" bIns="0" rtlCol="0" anchor="ctr">
+            <a:normAutofit/>
+          </a:bodyPr>
+          <a:lstStyle/>
+          <a:p>
+            <a:pPr algn="ctr" indent="0" marL="0">
+              <a:buNone/>
+            </a:pPr>
+            <a:r>
+              <a:rPr lang="en-US" altLang="en-US" sz="700" b="1" dirty="0">
+                <a:solidFill>
+                  <a:srgbClr val="222222"/>
+                </a:solidFill>
+                <a:latin typeface="Calibri" pitchFamily="34" charset="0"/>
+                <a:ea typeface="Calibri" pitchFamily="34" charset="-122"/>
+                <a:cs typeface="Calibri" pitchFamily="34" charset="-120"/>
+              </a:rPr>
+              <a:t>29 Oct</a:t>
+            </a:r>
+            <a:endParaRPr lang="en-US" sz="700" dirty="0"/>
+          </a:p>
+        </p:txBody>
+      </p:sp>
+      <p:sp>
+        <p:nvSpPr>
           <p:cNvPr id="263" name="Text 261"/>
           <p:cNvSpPr/>
           <p:nvPr/>
         </p:nvSpPr>
         <p:spPr>
           <a:xfrm>
-            <a:off x="8254854" y="4544667"/>
-            <a:ext cx="340103" cy="111816"/>
+            <a:off x="5385816" y="4575048"/>
+            <a:ext cx="658368" cy="223266"/>
           </a:xfrm>
           <a:prstGeom prst="rect">
             <a:avLst/>
@@ -15879,13 +15897,13 @@
             <a:r>
               <a:rPr lang="en-US" altLang="en-US" sz="700" b="1" dirty="0">
                 <a:solidFill>
-                  <a:srgbClr val="FFFFFF"/>
-                </a:solidFill>
-                <a:latin typeface="Calibri" pitchFamily="34" charset="0"/>
-                <a:ea typeface="Calibri" pitchFamily="34" charset="-122"/>
-                <a:cs typeface="Calibri" pitchFamily="34" charset="-120"/>
-              </a:rPr>
-              <a:t>2 d</a:t>
+                  <a:srgbClr val="222222"/>
+                </a:solidFill>
+                <a:latin typeface="Calibri" pitchFamily="34" charset="0"/>
+                <a:ea typeface="Calibri" pitchFamily="34" charset="-122"/>
+                <a:cs typeface="Calibri" pitchFamily="34" charset="-120"/>
+              </a:rPr>
+              <a:t>3 Nov</a:t>
             </a:r>
             <a:endParaRPr lang="en-US" sz="700" dirty="0"/>
           </a:p>
@@ -15899,308 +15917,12 @@
         </p:nvSpPr>
         <p:spPr>
           <a:xfrm>
-            <a:off x="365760" y="4696968"/>
-            <a:ext cx="11460175" cy="192786"/>
-          </a:xfrm>
-          <a:prstGeom prst="rect">
-            <a:avLst/>
-          </a:prstGeom>
-          <a:solidFill>
-            <a:srgbClr val="FFFFFF"/>
-          </a:solidFill>
-          <a:ln w="6350">
-            <a:solidFill>
-              <a:srgbClr val="DFE6EA"/>
-            </a:solidFill>
-            <a:prstDash val="solid"/>
-          </a:ln>
-        </p:spPr>
-      </p:sp>
-      <p:sp>
-        <p:nvSpPr>
-          <p:cNvPr id="265" name="Shape 263"/>
-          <p:cNvSpPr/>
-          <p:nvPr/>
-        </p:nvSpPr>
-        <p:spPr>
-          <a:xfrm>
-            <a:off x="438912" y="4674489"/>
-            <a:ext cx="237744" cy="237744"/>
-          </a:xfrm>
-          <a:prstGeom prst="ellipse">
-            <a:avLst/>
-          </a:prstGeom>
-          <a:solidFill>
-            <a:srgbClr val="00778B"/>
-          </a:solidFill>
-          <a:ln w="19050">
-            <a:solidFill>
-              <a:srgbClr val="222222"/>
-            </a:solidFill>
-            <a:prstDash val="solid"/>
-          </a:ln>
-        </p:spPr>
-      </p:sp>
-      <p:sp>
-        <p:nvSpPr>
-          <p:cNvPr id="266" name="Text 264"/>
-          <p:cNvSpPr/>
-          <p:nvPr/>
-        </p:nvSpPr>
-        <p:spPr>
-          <a:xfrm>
-            <a:off x="365760" y="4696968"/>
-            <a:ext cx="384048" cy="192786"/>
-          </a:xfrm>
-          <a:prstGeom prst="rect">
-            <a:avLst/>
-          </a:prstGeom>
-          <a:noFill/>
-          <a:ln/>
-        </p:spPr>
-        <p:txBody>
-          <a:bodyPr wrap="square" lIns="0" tIns="0" rIns="0" bIns="0" rtlCol="0" anchor="ctr">
-            <a:normAutofit/>
-          </a:bodyPr>
-          <a:lstStyle/>
-          <a:p>
-            <a:pPr algn="ctr" indent="0" marL="0">
-              <a:buNone/>
-            </a:pPr>
-            <a:r>
-              <a:rPr lang="en-US" altLang="en-US" sz="850" b="1" dirty="0">
-                <a:solidFill>
-                  <a:srgbClr val="FFFFFF"/>
-                </a:solidFill>
-                <a:latin typeface="Calibri" pitchFamily="34" charset="0"/>
-                <a:ea typeface="Calibri" pitchFamily="34" charset="-122"/>
-                <a:cs typeface="Calibri" pitchFamily="34" charset="-120"/>
-              </a:rPr>
-              <a:t>D</a:t>
-            </a:r>
-            <a:endParaRPr lang="en-US" sz="850" dirty="0"/>
-          </a:p>
-        </p:txBody>
-      </p:sp>
-      <p:sp>
-        <p:nvSpPr>
-          <p:cNvPr id="267" name="Text 265"/>
-          <p:cNvSpPr/>
-          <p:nvPr/>
-        </p:nvSpPr>
-        <p:spPr>
-          <a:xfrm>
-            <a:off x="822960" y="4696968"/>
-            <a:ext cx="2606040" cy="192786"/>
-          </a:xfrm>
-          <a:prstGeom prst="rect">
-            <a:avLst/>
-          </a:prstGeom>
-          <a:noFill/>
-          <a:ln/>
-        </p:spPr>
-        <p:txBody>
-          <a:bodyPr wrap="square" lIns="0" tIns="0" rIns="0" bIns="0" rtlCol="0" anchor="ctr">
-            <a:normAutofit/>
-          </a:bodyPr>
-          <a:lstStyle/>
-          <a:p>
-            <a:pPr algn="l" indent="0" marL="0">
-              <a:buNone/>
-            </a:pPr>
-            <a:r>
-              <a:rPr lang="en-US" altLang="en-US" sz="750" b="1" dirty="0">
-                <a:solidFill>
-                  <a:srgbClr val="222222"/>
-                </a:solidFill>
-                <a:latin typeface="Calibri" pitchFamily="34" charset="0"/>
-                <a:ea typeface="Calibri" pitchFamily="34" charset="-122"/>
-                <a:cs typeface="Calibri" pitchFamily="34" charset="-120"/>
-              </a:rPr>
-              <a:t>Pit slab / raft – reinforcement, formwork &amp; concrete</a:t>
-            </a:r>
-            <a:endParaRPr lang="en-US" sz="750" dirty="0"/>
-          </a:p>
-        </p:txBody>
-      </p:sp>
-      <p:sp>
-        <p:nvSpPr>
-          <p:cNvPr id="268" name="Text 266"/>
-          <p:cNvSpPr/>
-          <p:nvPr/>
-        </p:nvSpPr>
-        <p:spPr>
-          <a:xfrm>
-            <a:off x="3447288" y="4696968"/>
-            <a:ext cx="777240" cy="192786"/>
-          </a:xfrm>
-          <a:prstGeom prst="rect">
-            <a:avLst/>
-          </a:prstGeom>
-          <a:noFill/>
-          <a:ln/>
-        </p:spPr>
-        <p:txBody>
-          <a:bodyPr wrap="square" lIns="0" tIns="0" rIns="0" bIns="0" rtlCol="0" anchor="ctr">
-            <a:normAutofit/>
-          </a:bodyPr>
-          <a:lstStyle/>
-          <a:p>
-            <a:pPr algn="ctr" indent="0" marL="0">
-              <a:buNone/>
-            </a:pPr>
-            <a:r>
-              <a:rPr lang="en-US" altLang="en-US" sz="700" dirty="0">
-                <a:solidFill>
-                  <a:srgbClr val="444444"/>
-                </a:solidFill>
-                <a:latin typeface="Calibri" pitchFamily="34" charset="0"/>
-                <a:ea typeface="Calibri" pitchFamily="34" charset="-122"/>
-                <a:cs typeface="Calibri" pitchFamily="34" charset="-120"/>
-              </a:rPr>
-              <a:t>C · FS</a:t>
-            </a:r>
-            <a:endParaRPr lang="en-US" sz="700" dirty="0"/>
-          </a:p>
-        </p:txBody>
-      </p:sp>
-      <p:sp>
-        <p:nvSpPr>
-          <p:cNvPr id="269" name="Text 267"/>
-          <p:cNvSpPr/>
-          <p:nvPr/>
-        </p:nvSpPr>
-        <p:spPr>
-          <a:xfrm>
-            <a:off x="4224528" y="4696968"/>
-            <a:ext cx="502920" cy="192786"/>
-          </a:xfrm>
-          <a:prstGeom prst="rect">
-            <a:avLst/>
-          </a:prstGeom>
-          <a:noFill/>
-          <a:ln/>
-        </p:spPr>
-        <p:txBody>
-          <a:bodyPr wrap="square" lIns="0" tIns="0" rIns="0" bIns="0" rtlCol="0" anchor="ctr">
-            <a:normAutofit/>
-          </a:bodyPr>
-          <a:lstStyle/>
-          <a:p>
-            <a:pPr algn="ctr" indent="0" marL="0">
-              <a:buNone/>
-            </a:pPr>
-            <a:r>
-              <a:rPr lang="en-US" altLang="en-US" sz="900" b="1" dirty="0">
-                <a:solidFill>
-                  <a:srgbClr val="222222"/>
-                </a:solidFill>
-                <a:latin typeface="Calibri" pitchFamily="34" charset="0"/>
-                <a:ea typeface="Calibri" pitchFamily="34" charset="-122"/>
-                <a:cs typeface="Calibri" pitchFamily="34" charset="-120"/>
-              </a:rPr>
-              <a:t>5</a:t>
-            </a:r>
-            <a:endParaRPr lang="en-US" sz="900" dirty="0"/>
-          </a:p>
-        </p:txBody>
-      </p:sp>
-      <p:sp>
-        <p:nvSpPr>
-          <p:cNvPr id="270" name="Text 268"/>
-          <p:cNvSpPr/>
-          <p:nvPr/>
-        </p:nvSpPr>
-        <p:spPr>
-          <a:xfrm>
-            <a:off x="4727448" y="4696968"/>
-            <a:ext cx="658368" cy="192786"/>
-          </a:xfrm>
-          <a:prstGeom prst="rect">
-            <a:avLst/>
-          </a:prstGeom>
-          <a:noFill/>
-          <a:ln/>
-        </p:spPr>
-        <p:txBody>
-          <a:bodyPr wrap="square" lIns="0" tIns="0" rIns="0" bIns="0" rtlCol="0" anchor="ctr">
-            <a:normAutofit/>
-          </a:bodyPr>
-          <a:lstStyle/>
-          <a:p>
-            <a:pPr algn="ctr" indent="0" marL="0">
-              <a:buNone/>
-            </a:pPr>
-            <a:r>
-              <a:rPr lang="en-US" altLang="en-US" sz="700" b="1" dirty="0">
-                <a:solidFill>
-                  <a:srgbClr val="222222"/>
-                </a:solidFill>
-                <a:latin typeface="Calibri" pitchFamily="34" charset="0"/>
-                <a:ea typeface="Calibri" pitchFamily="34" charset="-122"/>
-                <a:cs typeface="Calibri" pitchFamily="34" charset="-120"/>
-              </a:rPr>
-              <a:t>29 Oct</a:t>
-            </a:r>
-            <a:endParaRPr lang="en-US" sz="700" dirty="0"/>
-          </a:p>
-        </p:txBody>
-      </p:sp>
-      <p:sp>
-        <p:nvSpPr>
-          <p:cNvPr id="271" name="Text 269"/>
-          <p:cNvSpPr/>
-          <p:nvPr/>
-        </p:nvSpPr>
-        <p:spPr>
-          <a:xfrm>
-            <a:off x="5385816" y="4696968"/>
-            <a:ext cx="658368" cy="192786"/>
-          </a:xfrm>
-          <a:prstGeom prst="rect">
-            <a:avLst/>
-          </a:prstGeom>
-          <a:noFill/>
-          <a:ln/>
-        </p:spPr>
-        <p:txBody>
-          <a:bodyPr wrap="square" lIns="0" tIns="0" rIns="0" bIns="0" rtlCol="0" anchor="ctr">
-            <a:normAutofit/>
-          </a:bodyPr>
-          <a:lstStyle/>
-          <a:p>
-            <a:pPr algn="ctr" indent="0" marL="0">
-              <a:buNone/>
-            </a:pPr>
-            <a:r>
-              <a:rPr lang="en-US" altLang="en-US" sz="700" b="1" dirty="0">
-                <a:solidFill>
-                  <a:srgbClr val="222222"/>
-                </a:solidFill>
-                <a:latin typeface="Calibri" pitchFamily="34" charset="0"/>
-                <a:ea typeface="Calibri" pitchFamily="34" charset="-122"/>
-                <a:cs typeface="Calibri" pitchFamily="34" charset="-120"/>
-              </a:rPr>
-              <a:t>3 Nov</a:t>
-            </a:r>
-            <a:endParaRPr lang="en-US" sz="700" dirty="0"/>
-          </a:p>
-        </p:txBody>
-      </p:sp>
-      <p:sp>
-        <p:nvSpPr>
-          <p:cNvPr id="272" name="Shape 270"/>
-          <p:cNvSpPr/>
-          <p:nvPr/>
-        </p:nvSpPr>
-        <p:spPr>
-          <a:xfrm>
-            <a:off x="8594957" y="4737453"/>
-            <a:ext cx="1020309" cy="111816"/>
+            <a:off x="8594957" y="4621934"/>
+            <a:ext cx="1020309" cy="129494"/>
           </a:xfrm>
           <a:prstGeom prst="roundRect">
             <a:avLst>
-              <a:gd name="adj" fmla="val 32711"/>
+              <a:gd name="adj" fmla="val 28245"/>
             </a:avLst>
           </a:prstGeom>
           <a:solidFill>
@@ -16223,14 +15945,310 @@
       </p:sp>
       <p:sp>
         <p:nvSpPr>
+          <p:cNvPr id="265" name="Text 263"/>
+          <p:cNvSpPr/>
+          <p:nvPr/>
+        </p:nvSpPr>
+        <p:spPr>
+          <a:xfrm>
+            <a:off x="8594957" y="4621934"/>
+            <a:ext cx="1020309" cy="129494"/>
+          </a:xfrm>
+          <a:prstGeom prst="rect">
+            <a:avLst/>
+          </a:prstGeom>
+          <a:noFill/>
+          <a:ln/>
+        </p:spPr>
+        <p:txBody>
+          <a:bodyPr wrap="square" lIns="0" tIns="0" rIns="0" bIns="0" rtlCol="0" anchor="ctr">
+            <a:normAutofit/>
+          </a:bodyPr>
+          <a:lstStyle/>
+          <a:p>
+            <a:pPr algn="ctr" indent="0" marL="0">
+              <a:buNone/>
+            </a:pPr>
+            <a:r>
+              <a:rPr lang="en-US" altLang="en-US" sz="700" b="1" dirty="0">
+                <a:solidFill>
+                  <a:srgbClr val="FFFFFF"/>
+                </a:solidFill>
+                <a:latin typeface="Calibri" pitchFamily="34" charset="0"/>
+                <a:ea typeface="Calibri" pitchFamily="34" charset="-122"/>
+                <a:cs typeface="Calibri" pitchFamily="34" charset="-120"/>
+              </a:rPr>
+              <a:t>5 d</a:t>
+            </a:r>
+            <a:endParaRPr lang="en-US" sz="700" dirty="0"/>
+          </a:p>
+        </p:txBody>
+      </p:sp>
+      <p:sp>
+        <p:nvSpPr>
+          <p:cNvPr id="266" name="Shape 264"/>
+          <p:cNvSpPr/>
+          <p:nvPr/>
+        </p:nvSpPr>
+        <p:spPr>
+          <a:xfrm>
+            <a:off x="365760" y="4798314"/>
+            <a:ext cx="11460175" cy="223266"/>
+          </a:xfrm>
+          <a:prstGeom prst="rect">
+            <a:avLst/>
+          </a:prstGeom>
+          <a:solidFill>
+            <a:srgbClr val="F6F9FA"/>
+          </a:solidFill>
+          <a:ln w="6350">
+            <a:solidFill>
+              <a:srgbClr val="DFE6EA"/>
+            </a:solidFill>
+            <a:prstDash val="solid"/>
+          </a:ln>
+        </p:spPr>
+      </p:sp>
+      <p:sp>
+        <p:nvSpPr>
+          <p:cNvPr id="267" name="Shape 265"/>
+          <p:cNvSpPr/>
+          <p:nvPr/>
+        </p:nvSpPr>
+        <p:spPr>
+          <a:xfrm>
+            <a:off x="438912" y="4791075"/>
+            <a:ext cx="237744" cy="237744"/>
+          </a:xfrm>
+          <a:prstGeom prst="ellipse">
+            <a:avLst/>
+          </a:prstGeom>
+          <a:solidFill>
+            <a:srgbClr val="00778B"/>
+          </a:solidFill>
+          <a:ln w="6350">
+            <a:solidFill>
+              <a:srgbClr val="00778B"/>
+            </a:solidFill>
+            <a:prstDash val="solid"/>
+          </a:ln>
+        </p:spPr>
+      </p:sp>
+      <p:sp>
+        <p:nvSpPr>
+          <p:cNvPr id="268" name="Text 266"/>
+          <p:cNvSpPr/>
+          <p:nvPr/>
+        </p:nvSpPr>
+        <p:spPr>
+          <a:xfrm>
+            <a:off x="365760" y="4798314"/>
+            <a:ext cx="384048" cy="223266"/>
+          </a:xfrm>
+          <a:prstGeom prst="rect">
+            <a:avLst/>
+          </a:prstGeom>
+          <a:noFill/>
+          <a:ln/>
+        </p:spPr>
+        <p:txBody>
+          <a:bodyPr wrap="square" lIns="0" tIns="0" rIns="0" bIns="0" rtlCol="0" anchor="ctr">
+            <a:normAutofit/>
+          </a:bodyPr>
+          <a:lstStyle/>
+          <a:p>
+            <a:pPr algn="ctr" indent="0" marL="0">
+              <a:buNone/>
+            </a:pPr>
+            <a:r>
+              <a:rPr lang="en-US" altLang="en-US" sz="850" b="1" dirty="0">
+                <a:solidFill>
+                  <a:srgbClr val="FFFFFF"/>
+                </a:solidFill>
+                <a:latin typeface="Calibri" pitchFamily="34" charset="0"/>
+                <a:ea typeface="Calibri" pitchFamily="34" charset="-122"/>
+                <a:cs typeface="Calibri" pitchFamily="34" charset="-120"/>
+              </a:rPr>
+              <a:t>E</a:t>
+            </a:r>
+            <a:endParaRPr lang="en-US" sz="850" dirty="0"/>
+          </a:p>
+        </p:txBody>
+      </p:sp>
+      <p:sp>
+        <p:nvSpPr>
+          <p:cNvPr id="269" name="Text 267"/>
+          <p:cNvSpPr/>
+          <p:nvPr/>
+        </p:nvSpPr>
+        <p:spPr>
+          <a:xfrm>
+            <a:off x="822960" y="4798314"/>
+            <a:ext cx="2606040" cy="223266"/>
+          </a:xfrm>
+          <a:prstGeom prst="rect">
+            <a:avLst/>
+          </a:prstGeom>
+          <a:noFill/>
+          <a:ln/>
+        </p:spPr>
+        <p:txBody>
+          <a:bodyPr wrap="square" lIns="0" tIns="0" rIns="0" bIns="0" rtlCol="0" anchor="ctr">
+            <a:normAutofit/>
+          </a:bodyPr>
+          <a:lstStyle/>
+          <a:p>
+            <a:pPr algn="l" indent="0" marL="0">
+              <a:buNone/>
+            </a:pPr>
+            <a:r>
+              <a:rPr lang="en-US" altLang="en-US" sz="750" b="1" dirty="0">
+                <a:solidFill>
+                  <a:srgbClr val="222222"/>
+                </a:solidFill>
+                <a:latin typeface="Calibri" pitchFamily="34" charset="0"/>
+                <a:ea typeface="Calibri" pitchFamily="34" charset="-122"/>
+                <a:cs typeface="Calibri" pitchFamily="34" charset="-120"/>
+              </a:rPr>
+              <a:t>Pit wall – reinforcement, formwork &amp; concrete</a:t>
+            </a:r>
+            <a:endParaRPr lang="en-US" sz="750" dirty="0"/>
+          </a:p>
+        </p:txBody>
+      </p:sp>
+      <p:sp>
+        <p:nvSpPr>
+          <p:cNvPr id="270" name="Text 268"/>
+          <p:cNvSpPr/>
+          <p:nvPr/>
+        </p:nvSpPr>
+        <p:spPr>
+          <a:xfrm>
+            <a:off x="3447288" y="4798314"/>
+            <a:ext cx="777240" cy="223266"/>
+          </a:xfrm>
+          <a:prstGeom prst="rect">
+            <a:avLst/>
+          </a:prstGeom>
+          <a:noFill/>
+          <a:ln/>
+        </p:spPr>
+        <p:txBody>
+          <a:bodyPr wrap="square" lIns="0" tIns="0" rIns="0" bIns="0" rtlCol="0" anchor="ctr">
+            <a:normAutofit/>
+          </a:bodyPr>
+          <a:lstStyle/>
+          <a:p>
+            <a:pPr algn="ctr" indent="0" marL="0">
+              <a:buNone/>
+            </a:pPr>
+            <a:r>
+              <a:rPr lang="en-US" altLang="en-US" sz="700" dirty="0">
+                <a:solidFill>
+                  <a:srgbClr val="444444"/>
+                </a:solidFill>
+                <a:latin typeface="Calibri" pitchFamily="34" charset="0"/>
+                <a:ea typeface="Calibri" pitchFamily="34" charset="-122"/>
+                <a:cs typeface="Calibri" pitchFamily="34" charset="-120"/>
+              </a:rPr>
+              <a:t>D · FS</a:t>
+            </a:r>
+            <a:endParaRPr lang="en-US" sz="700" dirty="0"/>
+          </a:p>
+        </p:txBody>
+      </p:sp>
+      <p:sp>
+        <p:nvSpPr>
+          <p:cNvPr id="271" name="Text 269"/>
+          <p:cNvSpPr/>
+          <p:nvPr/>
+        </p:nvSpPr>
+        <p:spPr>
+          <a:xfrm>
+            <a:off x="4224528" y="4798314"/>
+            <a:ext cx="502920" cy="223266"/>
+          </a:xfrm>
+          <a:prstGeom prst="rect">
+            <a:avLst/>
+          </a:prstGeom>
+          <a:noFill/>
+          <a:ln/>
+        </p:spPr>
+        <p:txBody>
+          <a:bodyPr wrap="square" lIns="0" tIns="0" rIns="0" bIns="0" rtlCol="0" anchor="ctr">
+            <a:normAutofit/>
+          </a:bodyPr>
+          <a:lstStyle/>
+          <a:p>
+            <a:pPr algn="ctr" indent="0" marL="0">
+              <a:buNone/>
+            </a:pPr>
+            <a:r>
+              <a:rPr lang="en-US" altLang="en-US" sz="900" b="1" dirty="0">
+                <a:solidFill>
+                  <a:srgbClr val="222222"/>
+                </a:solidFill>
+                <a:latin typeface="Calibri" pitchFamily="34" charset="0"/>
+                <a:ea typeface="Calibri" pitchFamily="34" charset="-122"/>
+                <a:cs typeface="Calibri" pitchFamily="34" charset="-120"/>
+              </a:rPr>
+              <a:t>3</a:t>
+            </a:r>
+            <a:endParaRPr lang="en-US" sz="900" dirty="0"/>
+          </a:p>
+        </p:txBody>
+      </p:sp>
+      <p:sp>
+        <p:nvSpPr>
+          <p:cNvPr id="272" name="Text 270"/>
+          <p:cNvSpPr/>
+          <p:nvPr/>
+        </p:nvSpPr>
+        <p:spPr>
+          <a:xfrm>
+            <a:off x="4727448" y="4798314"/>
+            <a:ext cx="658368" cy="223266"/>
+          </a:xfrm>
+          <a:prstGeom prst="rect">
+            <a:avLst/>
+          </a:prstGeom>
+          <a:noFill/>
+          <a:ln/>
+        </p:spPr>
+        <p:txBody>
+          <a:bodyPr wrap="square" lIns="0" tIns="0" rIns="0" bIns="0" rtlCol="0" anchor="ctr">
+            <a:normAutofit/>
+          </a:bodyPr>
+          <a:lstStyle/>
+          <a:p>
+            <a:pPr algn="ctr" indent="0" marL="0">
+              <a:buNone/>
+            </a:pPr>
+            <a:r>
+              <a:rPr lang="en-US" altLang="en-US" sz="700" b="1" dirty="0">
+                <a:solidFill>
+                  <a:srgbClr val="222222"/>
+                </a:solidFill>
+                <a:latin typeface="Calibri" pitchFamily="34" charset="0"/>
+                <a:ea typeface="Calibri" pitchFamily="34" charset="-122"/>
+                <a:cs typeface="Calibri" pitchFamily="34" charset="-120"/>
+              </a:rPr>
+              <a:t>4 Nov</a:t>
+            </a:r>
+            <a:endParaRPr lang="en-US" sz="700" dirty="0"/>
+          </a:p>
+        </p:txBody>
+      </p:sp>
+      <p:sp>
+        <p:nvSpPr>
           <p:cNvPr id="273" name="Text 271"/>
           <p:cNvSpPr/>
           <p:nvPr/>
         </p:nvSpPr>
         <p:spPr>
           <a:xfrm>
-            <a:off x="8594957" y="4737453"/>
-            <a:ext cx="1020309" cy="111816"/>
+            <a:off x="5385816" y="4798314"/>
+            <a:ext cx="658368" cy="223266"/>
           </a:xfrm>
           <a:prstGeom prst="rect">
             <a:avLst/>
@@ -16250,13 +16268,13 @@
             <a:r>
               <a:rPr lang="en-US" altLang="en-US" sz="700" b="1" dirty="0">
                 <a:solidFill>
-                  <a:srgbClr val="FFFFFF"/>
-                </a:solidFill>
-                <a:latin typeface="Calibri" pitchFamily="34" charset="0"/>
-                <a:ea typeface="Calibri" pitchFamily="34" charset="-122"/>
-                <a:cs typeface="Calibri" pitchFamily="34" charset="-120"/>
-              </a:rPr>
-              <a:t>5 d</a:t>
+                  <a:srgbClr val="222222"/>
+                </a:solidFill>
+                <a:latin typeface="Calibri" pitchFamily="34" charset="0"/>
+                <a:ea typeface="Calibri" pitchFamily="34" charset="-122"/>
+                <a:cs typeface="Calibri" pitchFamily="34" charset="-120"/>
+              </a:rPr>
+              <a:t>7 Nov</a:t>
             </a:r>
             <a:endParaRPr lang="en-US" sz="700" dirty="0"/>
           </a:p>
@@ -16270,308 +16288,12 @@
         </p:nvSpPr>
         <p:spPr>
           <a:xfrm>
-            <a:off x="365760" y="4889754"/>
-            <a:ext cx="11460175" cy="192786"/>
-          </a:xfrm>
-          <a:prstGeom prst="rect">
-            <a:avLst/>
-          </a:prstGeom>
-          <a:solidFill>
-            <a:srgbClr val="F6F9FA"/>
-          </a:solidFill>
-          <a:ln w="6350">
-            <a:solidFill>
-              <a:srgbClr val="DFE6EA"/>
-            </a:solidFill>
-            <a:prstDash val="solid"/>
-          </a:ln>
-        </p:spPr>
-      </p:sp>
-      <p:sp>
-        <p:nvSpPr>
-          <p:cNvPr id="275" name="Shape 273"/>
-          <p:cNvSpPr/>
-          <p:nvPr/>
-        </p:nvSpPr>
-        <p:spPr>
-          <a:xfrm>
-            <a:off x="438912" y="4867275"/>
-            <a:ext cx="237744" cy="237744"/>
-          </a:xfrm>
-          <a:prstGeom prst="ellipse">
-            <a:avLst/>
-          </a:prstGeom>
-          <a:solidFill>
-            <a:srgbClr val="00778B"/>
-          </a:solidFill>
-          <a:ln w="6350">
-            <a:solidFill>
-              <a:srgbClr val="00778B"/>
-            </a:solidFill>
-            <a:prstDash val="solid"/>
-          </a:ln>
-        </p:spPr>
-      </p:sp>
-      <p:sp>
-        <p:nvSpPr>
-          <p:cNvPr id="276" name="Text 274"/>
-          <p:cNvSpPr/>
-          <p:nvPr/>
-        </p:nvSpPr>
-        <p:spPr>
-          <a:xfrm>
-            <a:off x="365760" y="4889754"/>
-            <a:ext cx="384048" cy="192786"/>
-          </a:xfrm>
-          <a:prstGeom prst="rect">
-            <a:avLst/>
-          </a:prstGeom>
-          <a:noFill/>
-          <a:ln/>
-        </p:spPr>
-        <p:txBody>
-          <a:bodyPr wrap="square" lIns="0" tIns="0" rIns="0" bIns="0" rtlCol="0" anchor="ctr">
-            <a:normAutofit/>
-          </a:bodyPr>
-          <a:lstStyle/>
-          <a:p>
-            <a:pPr algn="ctr" indent="0" marL="0">
-              <a:buNone/>
-            </a:pPr>
-            <a:r>
-              <a:rPr lang="en-US" altLang="en-US" sz="850" b="1" dirty="0">
-                <a:solidFill>
-                  <a:srgbClr val="FFFFFF"/>
-                </a:solidFill>
-                <a:latin typeface="Calibri" pitchFamily="34" charset="0"/>
-                <a:ea typeface="Calibri" pitchFamily="34" charset="-122"/>
-                <a:cs typeface="Calibri" pitchFamily="34" charset="-120"/>
-              </a:rPr>
-              <a:t>E</a:t>
-            </a:r>
-            <a:endParaRPr lang="en-US" sz="850" dirty="0"/>
-          </a:p>
-        </p:txBody>
-      </p:sp>
-      <p:sp>
-        <p:nvSpPr>
-          <p:cNvPr id="277" name="Text 275"/>
-          <p:cNvSpPr/>
-          <p:nvPr/>
-        </p:nvSpPr>
-        <p:spPr>
-          <a:xfrm>
-            <a:off x="822960" y="4889754"/>
-            <a:ext cx="2606040" cy="192786"/>
-          </a:xfrm>
-          <a:prstGeom prst="rect">
-            <a:avLst/>
-          </a:prstGeom>
-          <a:noFill/>
-          <a:ln/>
-        </p:spPr>
-        <p:txBody>
-          <a:bodyPr wrap="square" lIns="0" tIns="0" rIns="0" bIns="0" rtlCol="0" anchor="ctr">
-            <a:normAutofit/>
-          </a:bodyPr>
-          <a:lstStyle/>
-          <a:p>
-            <a:pPr algn="l" indent="0" marL="0">
-              <a:buNone/>
-            </a:pPr>
-            <a:r>
-              <a:rPr lang="en-US" altLang="en-US" sz="750" b="1" dirty="0">
-                <a:solidFill>
-                  <a:srgbClr val="222222"/>
-                </a:solidFill>
-                <a:latin typeface="Calibri" pitchFamily="34" charset="0"/>
-                <a:ea typeface="Calibri" pitchFamily="34" charset="-122"/>
-                <a:cs typeface="Calibri" pitchFamily="34" charset="-120"/>
-              </a:rPr>
-              <a:t>Pit wall – reinforcement, formwork &amp; concrete</a:t>
-            </a:r>
-            <a:endParaRPr lang="en-US" sz="750" dirty="0"/>
-          </a:p>
-        </p:txBody>
-      </p:sp>
-      <p:sp>
-        <p:nvSpPr>
-          <p:cNvPr id="278" name="Text 276"/>
-          <p:cNvSpPr/>
-          <p:nvPr/>
-        </p:nvSpPr>
-        <p:spPr>
-          <a:xfrm>
-            <a:off x="3447288" y="4889754"/>
-            <a:ext cx="777240" cy="192786"/>
-          </a:xfrm>
-          <a:prstGeom prst="rect">
-            <a:avLst/>
-          </a:prstGeom>
-          <a:noFill/>
-          <a:ln/>
-        </p:spPr>
-        <p:txBody>
-          <a:bodyPr wrap="square" lIns="0" tIns="0" rIns="0" bIns="0" rtlCol="0" anchor="ctr">
-            <a:normAutofit/>
-          </a:bodyPr>
-          <a:lstStyle/>
-          <a:p>
-            <a:pPr algn="ctr" indent="0" marL="0">
-              <a:buNone/>
-            </a:pPr>
-            <a:r>
-              <a:rPr lang="en-US" altLang="en-US" sz="700" dirty="0">
-                <a:solidFill>
-                  <a:srgbClr val="444444"/>
-                </a:solidFill>
-                <a:latin typeface="Calibri" pitchFamily="34" charset="0"/>
-                <a:ea typeface="Calibri" pitchFamily="34" charset="-122"/>
-                <a:cs typeface="Calibri" pitchFamily="34" charset="-120"/>
-              </a:rPr>
-              <a:t>D · FS</a:t>
-            </a:r>
-            <a:endParaRPr lang="en-US" sz="700" dirty="0"/>
-          </a:p>
-        </p:txBody>
-      </p:sp>
-      <p:sp>
-        <p:nvSpPr>
-          <p:cNvPr id="279" name="Text 277"/>
-          <p:cNvSpPr/>
-          <p:nvPr/>
-        </p:nvSpPr>
-        <p:spPr>
-          <a:xfrm>
-            <a:off x="4224528" y="4889754"/>
-            <a:ext cx="502920" cy="192786"/>
-          </a:xfrm>
-          <a:prstGeom prst="rect">
-            <a:avLst/>
-          </a:prstGeom>
-          <a:noFill/>
-          <a:ln/>
-        </p:spPr>
-        <p:txBody>
-          <a:bodyPr wrap="square" lIns="0" tIns="0" rIns="0" bIns="0" rtlCol="0" anchor="ctr">
-            <a:normAutofit/>
-          </a:bodyPr>
-          <a:lstStyle/>
-          <a:p>
-            <a:pPr algn="ctr" indent="0" marL="0">
-              <a:buNone/>
-            </a:pPr>
-            <a:r>
-              <a:rPr lang="en-US" altLang="en-US" sz="900" b="1" dirty="0">
-                <a:solidFill>
-                  <a:srgbClr val="222222"/>
-                </a:solidFill>
-                <a:latin typeface="Calibri" pitchFamily="34" charset="0"/>
-                <a:ea typeface="Calibri" pitchFamily="34" charset="-122"/>
-                <a:cs typeface="Calibri" pitchFamily="34" charset="-120"/>
-              </a:rPr>
-              <a:t>3</a:t>
-            </a:r>
-            <a:endParaRPr lang="en-US" sz="900" dirty="0"/>
-          </a:p>
-        </p:txBody>
-      </p:sp>
-      <p:sp>
-        <p:nvSpPr>
-          <p:cNvPr id="280" name="Text 278"/>
-          <p:cNvSpPr/>
-          <p:nvPr/>
-        </p:nvSpPr>
-        <p:spPr>
-          <a:xfrm>
-            <a:off x="4727448" y="4889754"/>
-            <a:ext cx="658368" cy="192786"/>
-          </a:xfrm>
-          <a:prstGeom prst="rect">
-            <a:avLst/>
-          </a:prstGeom>
-          <a:noFill/>
-          <a:ln/>
-        </p:spPr>
-        <p:txBody>
-          <a:bodyPr wrap="square" lIns="0" tIns="0" rIns="0" bIns="0" rtlCol="0" anchor="ctr">
-            <a:normAutofit/>
-          </a:bodyPr>
-          <a:lstStyle/>
-          <a:p>
-            <a:pPr algn="ctr" indent="0" marL="0">
-              <a:buNone/>
-            </a:pPr>
-            <a:r>
-              <a:rPr lang="en-US" altLang="en-US" sz="700" b="1" dirty="0">
-                <a:solidFill>
-                  <a:srgbClr val="222222"/>
-                </a:solidFill>
-                <a:latin typeface="Calibri" pitchFamily="34" charset="0"/>
-                <a:ea typeface="Calibri" pitchFamily="34" charset="-122"/>
-                <a:cs typeface="Calibri" pitchFamily="34" charset="-120"/>
-              </a:rPr>
-              <a:t>4 Nov</a:t>
-            </a:r>
-            <a:endParaRPr lang="en-US" sz="700" dirty="0"/>
-          </a:p>
-        </p:txBody>
-      </p:sp>
-      <p:sp>
-        <p:nvSpPr>
-          <p:cNvPr id="281" name="Text 279"/>
-          <p:cNvSpPr/>
-          <p:nvPr/>
-        </p:nvSpPr>
-        <p:spPr>
-          <a:xfrm>
-            <a:off x="5385816" y="4889754"/>
-            <a:ext cx="658368" cy="192786"/>
-          </a:xfrm>
-          <a:prstGeom prst="rect">
-            <a:avLst/>
-          </a:prstGeom>
-          <a:noFill/>
-          <a:ln/>
-        </p:spPr>
-        <p:txBody>
-          <a:bodyPr wrap="square" lIns="0" tIns="0" rIns="0" bIns="0" rtlCol="0" anchor="ctr">
-            <a:normAutofit/>
-          </a:bodyPr>
-          <a:lstStyle/>
-          <a:p>
-            <a:pPr algn="ctr" indent="0" marL="0">
-              <a:buNone/>
-            </a:pPr>
-            <a:r>
-              <a:rPr lang="en-US" altLang="en-US" sz="700" b="1" dirty="0">
-                <a:solidFill>
-                  <a:srgbClr val="222222"/>
-                </a:solidFill>
-                <a:latin typeface="Calibri" pitchFamily="34" charset="0"/>
-                <a:ea typeface="Calibri" pitchFamily="34" charset="-122"/>
-                <a:cs typeface="Calibri" pitchFamily="34" charset="-120"/>
-              </a:rPr>
-              <a:t>7 Nov</a:t>
-            </a:r>
-            <a:endParaRPr lang="en-US" sz="700" dirty="0"/>
-          </a:p>
-        </p:txBody>
-      </p:sp>
-      <p:sp>
-        <p:nvSpPr>
-          <p:cNvPr id="282" name="Shape 280"/>
-          <p:cNvSpPr/>
-          <p:nvPr/>
-        </p:nvSpPr>
-        <p:spPr>
-          <a:xfrm>
-            <a:off x="9615266" y="4930239"/>
-            <a:ext cx="680206" cy="111816"/>
+            <a:off x="9615266" y="4845200"/>
+            <a:ext cx="680206" cy="129494"/>
           </a:xfrm>
           <a:prstGeom prst="roundRect">
             <a:avLst>
-              <a:gd name="adj" fmla="val 32711"/>
+              <a:gd name="adj" fmla="val 28245"/>
             </a:avLst>
           </a:prstGeom>
           <a:solidFill>
@@ -16594,14 +16316,310 @@
       </p:sp>
       <p:sp>
         <p:nvSpPr>
+          <p:cNvPr id="275" name="Text 273"/>
+          <p:cNvSpPr/>
+          <p:nvPr/>
+        </p:nvSpPr>
+        <p:spPr>
+          <a:xfrm>
+            <a:off x="9615266" y="4845200"/>
+            <a:ext cx="680206" cy="129494"/>
+          </a:xfrm>
+          <a:prstGeom prst="rect">
+            <a:avLst/>
+          </a:prstGeom>
+          <a:noFill/>
+          <a:ln/>
+        </p:spPr>
+        <p:txBody>
+          <a:bodyPr wrap="square" lIns="0" tIns="0" rIns="0" bIns="0" rtlCol="0" anchor="ctr">
+            <a:normAutofit/>
+          </a:bodyPr>
+          <a:lstStyle/>
+          <a:p>
+            <a:pPr algn="ctr" indent="0" marL="0">
+              <a:buNone/>
+            </a:pPr>
+            <a:r>
+              <a:rPr lang="en-US" altLang="en-US" sz="700" b="1" dirty="0">
+                <a:solidFill>
+                  <a:srgbClr val="FFFFFF"/>
+                </a:solidFill>
+                <a:latin typeface="Calibri" pitchFamily="34" charset="0"/>
+                <a:ea typeface="Calibri" pitchFamily="34" charset="-122"/>
+                <a:cs typeface="Calibri" pitchFamily="34" charset="-120"/>
+              </a:rPr>
+              <a:t>3 d</a:t>
+            </a:r>
+            <a:endParaRPr lang="en-US" sz="700" dirty="0"/>
+          </a:p>
+        </p:txBody>
+      </p:sp>
+      <p:sp>
+        <p:nvSpPr>
+          <p:cNvPr id="276" name="Shape 274"/>
+          <p:cNvSpPr/>
+          <p:nvPr/>
+        </p:nvSpPr>
+        <p:spPr>
+          <a:xfrm>
+            <a:off x="365760" y="5021580"/>
+            <a:ext cx="11460175" cy="223266"/>
+          </a:xfrm>
+          <a:prstGeom prst="rect">
+            <a:avLst/>
+          </a:prstGeom>
+          <a:solidFill>
+            <a:srgbClr val="FFFFFF"/>
+          </a:solidFill>
+          <a:ln w="6350">
+            <a:solidFill>
+              <a:srgbClr val="DFE6EA"/>
+            </a:solidFill>
+            <a:prstDash val="solid"/>
+          </a:ln>
+        </p:spPr>
+      </p:sp>
+      <p:sp>
+        <p:nvSpPr>
+          <p:cNvPr id="277" name="Shape 275"/>
+          <p:cNvSpPr/>
+          <p:nvPr/>
+        </p:nvSpPr>
+        <p:spPr>
+          <a:xfrm>
+            <a:off x="438912" y="5014341"/>
+            <a:ext cx="237744" cy="237744"/>
+          </a:xfrm>
+          <a:prstGeom prst="ellipse">
+            <a:avLst/>
+          </a:prstGeom>
+          <a:solidFill>
+            <a:srgbClr val="2E9E6B"/>
+          </a:solidFill>
+          <a:ln w="19050">
+            <a:solidFill>
+              <a:srgbClr val="222222"/>
+            </a:solidFill>
+            <a:prstDash val="solid"/>
+          </a:ln>
+        </p:spPr>
+      </p:sp>
+      <p:sp>
+        <p:nvSpPr>
+          <p:cNvPr id="278" name="Text 276"/>
+          <p:cNvSpPr/>
+          <p:nvPr/>
+        </p:nvSpPr>
+        <p:spPr>
+          <a:xfrm>
+            <a:off x="365760" y="5021580"/>
+            <a:ext cx="384048" cy="223266"/>
+          </a:xfrm>
+          <a:prstGeom prst="rect">
+            <a:avLst/>
+          </a:prstGeom>
+          <a:noFill/>
+          <a:ln/>
+        </p:spPr>
+        <p:txBody>
+          <a:bodyPr wrap="square" lIns="0" tIns="0" rIns="0" bIns="0" rtlCol="0" anchor="ctr">
+            <a:normAutofit/>
+          </a:bodyPr>
+          <a:lstStyle/>
+          <a:p>
+            <a:pPr algn="ctr" indent="0" marL="0">
+              <a:buNone/>
+            </a:pPr>
+            <a:r>
+              <a:rPr lang="en-US" altLang="en-US" sz="850" b="1" dirty="0">
+                <a:solidFill>
+                  <a:srgbClr val="FFFFFF"/>
+                </a:solidFill>
+                <a:latin typeface="Calibri" pitchFamily="34" charset="0"/>
+                <a:ea typeface="Calibri" pitchFamily="34" charset="-122"/>
+                <a:cs typeface="Calibri" pitchFamily="34" charset="-120"/>
+              </a:rPr>
+              <a:t>F</a:t>
+            </a:r>
+            <a:endParaRPr lang="en-US" sz="850" dirty="0"/>
+          </a:p>
+        </p:txBody>
+      </p:sp>
+      <p:sp>
+        <p:nvSpPr>
+          <p:cNvPr id="279" name="Text 277"/>
+          <p:cNvSpPr/>
+          <p:nvPr/>
+        </p:nvSpPr>
+        <p:spPr>
+          <a:xfrm>
+            <a:off x="822960" y="5021580"/>
+            <a:ext cx="2606040" cy="223266"/>
+          </a:xfrm>
+          <a:prstGeom prst="rect">
+            <a:avLst/>
+          </a:prstGeom>
+          <a:noFill/>
+          <a:ln/>
+        </p:spPr>
+        <p:txBody>
+          <a:bodyPr wrap="square" lIns="0" tIns="0" rIns="0" bIns="0" rtlCol="0" anchor="ctr">
+            <a:normAutofit/>
+          </a:bodyPr>
+          <a:lstStyle/>
+          <a:p>
+            <a:pPr algn="l" indent="0" marL="0">
+              <a:buNone/>
+            </a:pPr>
+            <a:r>
+              <a:rPr lang="en-US" altLang="en-US" sz="750" b="1" dirty="0">
+                <a:solidFill>
+                  <a:srgbClr val="222222"/>
+                </a:solidFill>
+                <a:latin typeface="Calibri" pitchFamily="34" charset="0"/>
+                <a:ea typeface="Calibri" pitchFamily="34" charset="-122"/>
+                <a:cs typeface="Calibri" pitchFamily="34" charset="-120"/>
+              </a:rPr>
+              <a:t>Building foundation – excavation, compaction / testing, reinforcement &amp; concrete</a:t>
+            </a:r>
+            <a:endParaRPr lang="en-US" sz="750" dirty="0"/>
+          </a:p>
+        </p:txBody>
+      </p:sp>
+      <p:sp>
+        <p:nvSpPr>
+          <p:cNvPr id="280" name="Text 278"/>
+          <p:cNvSpPr/>
+          <p:nvPr/>
+        </p:nvSpPr>
+        <p:spPr>
+          <a:xfrm>
+            <a:off x="3447288" y="5021580"/>
+            <a:ext cx="777240" cy="223266"/>
+          </a:xfrm>
+          <a:prstGeom prst="rect">
+            <a:avLst/>
+          </a:prstGeom>
+          <a:noFill/>
+          <a:ln/>
+        </p:spPr>
+        <p:txBody>
+          <a:bodyPr wrap="square" lIns="0" tIns="0" rIns="0" bIns="0" rtlCol="0" anchor="ctr">
+            <a:normAutofit/>
+          </a:bodyPr>
+          <a:lstStyle/>
+          <a:p>
+            <a:pPr algn="ctr" indent="0" marL="0">
+              <a:buNone/>
+            </a:pPr>
+            <a:r>
+              <a:rPr lang="en-US" altLang="en-US" sz="700" dirty="0">
+                <a:solidFill>
+                  <a:srgbClr val="444444"/>
+                </a:solidFill>
+                <a:latin typeface="Calibri" pitchFamily="34" charset="0"/>
+                <a:ea typeface="Calibri" pitchFamily="34" charset="-122"/>
+                <a:cs typeface="Calibri" pitchFamily="34" charset="-120"/>
+              </a:rPr>
+              <a:t>D · FS</a:t>
+            </a:r>
+            <a:endParaRPr lang="en-US" sz="700" dirty="0"/>
+          </a:p>
+        </p:txBody>
+      </p:sp>
+      <p:sp>
+        <p:nvSpPr>
+          <p:cNvPr id="281" name="Text 279"/>
+          <p:cNvSpPr/>
+          <p:nvPr/>
+        </p:nvSpPr>
+        <p:spPr>
+          <a:xfrm>
+            <a:off x="4224528" y="5021580"/>
+            <a:ext cx="502920" cy="223266"/>
+          </a:xfrm>
+          <a:prstGeom prst="rect">
+            <a:avLst/>
+          </a:prstGeom>
+          <a:noFill/>
+          <a:ln/>
+        </p:spPr>
+        <p:txBody>
+          <a:bodyPr wrap="square" lIns="0" tIns="0" rIns="0" bIns="0" rtlCol="0" anchor="ctr">
+            <a:normAutofit/>
+          </a:bodyPr>
+          <a:lstStyle/>
+          <a:p>
+            <a:pPr algn="ctr" indent="0" marL="0">
+              <a:buNone/>
+            </a:pPr>
+            <a:r>
+              <a:rPr lang="en-US" altLang="en-US" sz="900" b="1" dirty="0">
+                <a:solidFill>
+                  <a:srgbClr val="222222"/>
+                </a:solidFill>
+                <a:latin typeface="Calibri" pitchFamily="34" charset="0"/>
+                <a:ea typeface="Calibri" pitchFamily="34" charset="-122"/>
+                <a:cs typeface="Calibri" pitchFamily="34" charset="-120"/>
+              </a:rPr>
+              <a:t>6</a:t>
+            </a:r>
+            <a:endParaRPr lang="en-US" sz="900" dirty="0"/>
+          </a:p>
+        </p:txBody>
+      </p:sp>
+      <p:sp>
+        <p:nvSpPr>
+          <p:cNvPr id="282" name="Text 280"/>
+          <p:cNvSpPr/>
+          <p:nvPr/>
+        </p:nvSpPr>
+        <p:spPr>
+          <a:xfrm>
+            <a:off x="4727448" y="5021580"/>
+            <a:ext cx="658368" cy="223266"/>
+          </a:xfrm>
+          <a:prstGeom prst="rect">
+            <a:avLst/>
+          </a:prstGeom>
+          <a:noFill/>
+          <a:ln/>
+        </p:spPr>
+        <p:txBody>
+          <a:bodyPr wrap="square" lIns="0" tIns="0" rIns="0" bIns="0" rtlCol="0" anchor="ctr">
+            <a:normAutofit/>
+          </a:bodyPr>
+          <a:lstStyle/>
+          <a:p>
+            <a:pPr algn="ctr" indent="0" marL="0">
+              <a:buNone/>
+            </a:pPr>
+            <a:r>
+              <a:rPr lang="en-US" altLang="en-US" sz="700" b="1" dirty="0">
+                <a:solidFill>
+                  <a:srgbClr val="222222"/>
+                </a:solidFill>
+                <a:latin typeface="Calibri" pitchFamily="34" charset="0"/>
+                <a:ea typeface="Calibri" pitchFamily="34" charset="-122"/>
+                <a:cs typeface="Calibri" pitchFamily="34" charset="-120"/>
+              </a:rPr>
+              <a:t>4 Nov</a:t>
+            </a:r>
+            <a:endParaRPr lang="en-US" sz="700" dirty="0"/>
+          </a:p>
+        </p:txBody>
+      </p:sp>
+      <p:sp>
+        <p:nvSpPr>
           <p:cNvPr id="283" name="Text 281"/>
           <p:cNvSpPr/>
           <p:nvPr/>
         </p:nvSpPr>
         <p:spPr>
           <a:xfrm>
-            <a:off x="9615266" y="4930239"/>
-            <a:ext cx="680206" cy="111816"/>
+            <a:off x="5385816" y="5021580"/>
+            <a:ext cx="658368" cy="223266"/>
           </a:xfrm>
           <a:prstGeom prst="rect">
             <a:avLst/>
@@ -16621,13 +16639,13 @@
             <a:r>
               <a:rPr lang="en-US" altLang="en-US" sz="700" b="1" dirty="0">
                 <a:solidFill>
-                  <a:srgbClr val="FFFFFF"/>
-                </a:solidFill>
-                <a:latin typeface="Calibri" pitchFamily="34" charset="0"/>
-                <a:ea typeface="Calibri" pitchFamily="34" charset="-122"/>
-                <a:cs typeface="Calibri" pitchFamily="34" charset="-120"/>
-              </a:rPr>
-              <a:t>3 d</a:t>
+                  <a:srgbClr val="222222"/>
+                </a:solidFill>
+                <a:latin typeface="Calibri" pitchFamily="34" charset="0"/>
+                <a:ea typeface="Calibri" pitchFamily="34" charset="-122"/>
+                <a:cs typeface="Calibri" pitchFamily="34" charset="-120"/>
+              </a:rPr>
+              <a:t>10 Nov</a:t>
             </a:r>
             <a:endParaRPr lang="en-US" sz="700" dirty="0"/>
           </a:p>
@@ -16641,308 +16659,12 @@
         </p:nvSpPr>
         <p:spPr>
           <a:xfrm>
-            <a:off x="365760" y="5082540"/>
-            <a:ext cx="11460175" cy="192786"/>
-          </a:xfrm>
-          <a:prstGeom prst="rect">
-            <a:avLst/>
-          </a:prstGeom>
-          <a:solidFill>
-            <a:srgbClr val="FFFFFF"/>
-          </a:solidFill>
-          <a:ln w="6350">
-            <a:solidFill>
-              <a:srgbClr val="DFE6EA"/>
-            </a:solidFill>
-            <a:prstDash val="solid"/>
-          </a:ln>
-        </p:spPr>
-      </p:sp>
-      <p:sp>
-        <p:nvSpPr>
-          <p:cNvPr id="285" name="Shape 283"/>
-          <p:cNvSpPr/>
-          <p:nvPr/>
-        </p:nvSpPr>
-        <p:spPr>
-          <a:xfrm>
-            <a:off x="438912" y="5060061"/>
-            <a:ext cx="237744" cy="237744"/>
-          </a:xfrm>
-          <a:prstGeom prst="ellipse">
-            <a:avLst/>
-          </a:prstGeom>
-          <a:solidFill>
-            <a:srgbClr val="2E9E6B"/>
-          </a:solidFill>
-          <a:ln w="19050">
-            <a:solidFill>
-              <a:srgbClr val="222222"/>
-            </a:solidFill>
-            <a:prstDash val="solid"/>
-          </a:ln>
-        </p:spPr>
-      </p:sp>
-      <p:sp>
-        <p:nvSpPr>
-          <p:cNvPr id="286" name="Text 284"/>
-          <p:cNvSpPr/>
-          <p:nvPr/>
-        </p:nvSpPr>
-        <p:spPr>
-          <a:xfrm>
-            <a:off x="365760" y="5082540"/>
-            <a:ext cx="384048" cy="192786"/>
-          </a:xfrm>
-          <a:prstGeom prst="rect">
-            <a:avLst/>
-          </a:prstGeom>
-          <a:noFill/>
-          <a:ln/>
-        </p:spPr>
-        <p:txBody>
-          <a:bodyPr wrap="square" lIns="0" tIns="0" rIns="0" bIns="0" rtlCol="0" anchor="ctr">
-            <a:normAutofit/>
-          </a:bodyPr>
-          <a:lstStyle/>
-          <a:p>
-            <a:pPr algn="ctr" indent="0" marL="0">
-              <a:buNone/>
-            </a:pPr>
-            <a:r>
-              <a:rPr lang="en-US" altLang="en-US" sz="850" b="1" dirty="0">
-                <a:solidFill>
-                  <a:srgbClr val="FFFFFF"/>
-                </a:solidFill>
-                <a:latin typeface="Calibri" pitchFamily="34" charset="0"/>
-                <a:ea typeface="Calibri" pitchFamily="34" charset="-122"/>
-                <a:cs typeface="Calibri" pitchFamily="34" charset="-120"/>
-              </a:rPr>
-              <a:t>F</a:t>
-            </a:r>
-            <a:endParaRPr lang="en-US" sz="850" dirty="0"/>
-          </a:p>
-        </p:txBody>
-      </p:sp>
-      <p:sp>
-        <p:nvSpPr>
-          <p:cNvPr id="287" name="Text 285"/>
-          <p:cNvSpPr/>
-          <p:nvPr/>
-        </p:nvSpPr>
-        <p:spPr>
-          <a:xfrm>
-            <a:off x="822960" y="5082540"/>
-            <a:ext cx="2606040" cy="192786"/>
-          </a:xfrm>
-          <a:prstGeom prst="rect">
-            <a:avLst/>
-          </a:prstGeom>
-          <a:noFill/>
-          <a:ln/>
-        </p:spPr>
-        <p:txBody>
-          <a:bodyPr wrap="square" lIns="0" tIns="0" rIns="0" bIns="0" rtlCol="0" anchor="ctr">
-            <a:normAutofit/>
-          </a:bodyPr>
-          <a:lstStyle/>
-          <a:p>
-            <a:pPr algn="l" indent="0" marL="0">
-              <a:buNone/>
-            </a:pPr>
-            <a:r>
-              <a:rPr lang="en-US" altLang="en-US" sz="750" b="1" dirty="0">
-                <a:solidFill>
-                  <a:srgbClr val="222222"/>
-                </a:solidFill>
-                <a:latin typeface="Calibri" pitchFamily="34" charset="0"/>
-                <a:ea typeface="Calibri" pitchFamily="34" charset="-122"/>
-                <a:cs typeface="Calibri" pitchFamily="34" charset="-120"/>
-              </a:rPr>
-              <a:t>Building foundation – excavation, compaction / testing, reinforcement &amp; concrete</a:t>
-            </a:r>
-            <a:endParaRPr lang="en-US" sz="750" dirty="0"/>
-          </a:p>
-        </p:txBody>
-      </p:sp>
-      <p:sp>
-        <p:nvSpPr>
-          <p:cNvPr id="288" name="Text 286"/>
-          <p:cNvSpPr/>
-          <p:nvPr/>
-        </p:nvSpPr>
-        <p:spPr>
-          <a:xfrm>
-            <a:off x="3447288" y="5082540"/>
-            <a:ext cx="777240" cy="192786"/>
-          </a:xfrm>
-          <a:prstGeom prst="rect">
-            <a:avLst/>
-          </a:prstGeom>
-          <a:noFill/>
-          <a:ln/>
-        </p:spPr>
-        <p:txBody>
-          <a:bodyPr wrap="square" lIns="0" tIns="0" rIns="0" bIns="0" rtlCol="0" anchor="ctr">
-            <a:normAutofit/>
-          </a:bodyPr>
-          <a:lstStyle/>
-          <a:p>
-            <a:pPr algn="ctr" indent="0" marL="0">
-              <a:buNone/>
-            </a:pPr>
-            <a:r>
-              <a:rPr lang="en-US" altLang="en-US" sz="700" dirty="0">
-                <a:solidFill>
-                  <a:srgbClr val="444444"/>
-                </a:solidFill>
-                <a:latin typeface="Calibri" pitchFamily="34" charset="0"/>
-                <a:ea typeface="Calibri" pitchFamily="34" charset="-122"/>
-                <a:cs typeface="Calibri" pitchFamily="34" charset="-120"/>
-              </a:rPr>
-              <a:t>D · FS</a:t>
-            </a:r>
-            <a:endParaRPr lang="en-US" sz="700" dirty="0"/>
-          </a:p>
-        </p:txBody>
-      </p:sp>
-      <p:sp>
-        <p:nvSpPr>
-          <p:cNvPr id="289" name="Text 287"/>
-          <p:cNvSpPr/>
-          <p:nvPr/>
-        </p:nvSpPr>
-        <p:spPr>
-          <a:xfrm>
-            <a:off x="4224528" y="5082540"/>
-            <a:ext cx="502920" cy="192786"/>
-          </a:xfrm>
-          <a:prstGeom prst="rect">
-            <a:avLst/>
-          </a:prstGeom>
-          <a:noFill/>
-          <a:ln/>
-        </p:spPr>
-        <p:txBody>
-          <a:bodyPr wrap="square" lIns="0" tIns="0" rIns="0" bIns="0" rtlCol="0" anchor="ctr">
-            <a:normAutofit/>
-          </a:bodyPr>
-          <a:lstStyle/>
-          <a:p>
-            <a:pPr algn="ctr" indent="0" marL="0">
-              <a:buNone/>
-            </a:pPr>
-            <a:r>
-              <a:rPr lang="en-US" altLang="en-US" sz="900" b="1" dirty="0">
-                <a:solidFill>
-                  <a:srgbClr val="222222"/>
-                </a:solidFill>
-                <a:latin typeface="Calibri" pitchFamily="34" charset="0"/>
-                <a:ea typeface="Calibri" pitchFamily="34" charset="-122"/>
-                <a:cs typeface="Calibri" pitchFamily="34" charset="-120"/>
-              </a:rPr>
-              <a:t>6</a:t>
-            </a:r>
-            <a:endParaRPr lang="en-US" sz="900" dirty="0"/>
-          </a:p>
-        </p:txBody>
-      </p:sp>
-      <p:sp>
-        <p:nvSpPr>
-          <p:cNvPr id="290" name="Text 288"/>
-          <p:cNvSpPr/>
-          <p:nvPr/>
-        </p:nvSpPr>
-        <p:spPr>
-          <a:xfrm>
-            <a:off x="4727448" y="5082540"/>
-            <a:ext cx="658368" cy="192786"/>
-          </a:xfrm>
-          <a:prstGeom prst="rect">
-            <a:avLst/>
-          </a:prstGeom>
-          <a:noFill/>
-          <a:ln/>
-        </p:spPr>
-        <p:txBody>
-          <a:bodyPr wrap="square" lIns="0" tIns="0" rIns="0" bIns="0" rtlCol="0" anchor="ctr">
-            <a:normAutofit/>
-          </a:bodyPr>
-          <a:lstStyle/>
-          <a:p>
-            <a:pPr algn="ctr" indent="0" marL="0">
-              <a:buNone/>
-            </a:pPr>
-            <a:r>
-              <a:rPr lang="en-US" altLang="en-US" sz="700" b="1" dirty="0">
-                <a:solidFill>
-                  <a:srgbClr val="222222"/>
-                </a:solidFill>
-                <a:latin typeface="Calibri" pitchFamily="34" charset="0"/>
-                <a:ea typeface="Calibri" pitchFamily="34" charset="-122"/>
-                <a:cs typeface="Calibri" pitchFamily="34" charset="-120"/>
-              </a:rPr>
-              <a:t>4 Nov</a:t>
-            </a:r>
-            <a:endParaRPr lang="en-US" sz="700" dirty="0"/>
-          </a:p>
-        </p:txBody>
-      </p:sp>
-      <p:sp>
-        <p:nvSpPr>
-          <p:cNvPr id="291" name="Text 289"/>
-          <p:cNvSpPr/>
-          <p:nvPr/>
-        </p:nvSpPr>
-        <p:spPr>
-          <a:xfrm>
-            <a:off x="5385816" y="5082540"/>
-            <a:ext cx="658368" cy="192786"/>
-          </a:xfrm>
-          <a:prstGeom prst="rect">
-            <a:avLst/>
-          </a:prstGeom>
-          <a:noFill/>
-          <a:ln/>
-        </p:spPr>
-        <p:txBody>
-          <a:bodyPr wrap="square" lIns="0" tIns="0" rIns="0" bIns="0" rtlCol="0" anchor="ctr">
-            <a:normAutofit/>
-          </a:bodyPr>
-          <a:lstStyle/>
-          <a:p>
-            <a:pPr algn="ctr" indent="0" marL="0">
-              <a:buNone/>
-            </a:pPr>
-            <a:r>
-              <a:rPr lang="en-US" altLang="en-US" sz="700" b="1" dirty="0">
-                <a:solidFill>
-                  <a:srgbClr val="222222"/>
-                </a:solidFill>
-                <a:latin typeface="Calibri" pitchFamily="34" charset="0"/>
-                <a:ea typeface="Calibri" pitchFamily="34" charset="-122"/>
-                <a:cs typeface="Calibri" pitchFamily="34" charset="-120"/>
-              </a:rPr>
-              <a:t>10 Nov</a:t>
-            </a:r>
-            <a:endParaRPr lang="en-US" sz="700" dirty="0"/>
-          </a:p>
-        </p:txBody>
-      </p:sp>
-      <p:sp>
-        <p:nvSpPr>
-          <p:cNvPr id="292" name="Shape 290"/>
-          <p:cNvSpPr/>
-          <p:nvPr/>
-        </p:nvSpPr>
-        <p:spPr>
-          <a:xfrm>
-            <a:off x="9615266" y="5123025"/>
-            <a:ext cx="1190361" cy="111816"/>
+            <a:off x="9615266" y="5068466"/>
+            <a:ext cx="1190361" cy="129494"/>
           </a:xfrm>
           <a:prstGeom prst="roundRect">
             <a:avLst>
-              <a:gd name="adj" fmla="val 32711"/>
+              <a:gd name="adj" fmla="val 28245"/>
             </a:avLst>
           </a:prstGeom>
           <a:solidFill>
@@ -16965,14 +16687,310 @@
       </p:sp>
       <p:sp>
         <p:nvSpPr>
+          <p:cNvPr id="285" name="Text 283"/>
+          <p:cNvSpPr/>
+          <p:nvPr/>
+        </p:nvSpPr>
+        <p:spPr>
+          <a:xfrm>
+            <a:off x="9615266" y="5068466"/>
+            <a:ext cx="1190361" cy="129494"/>
+          </a:xfrm>
+          <a:prstGeom prst="rect">
+            <a:avLst/>
+          </a:prstGeom>
+          <a:noFill/>
+          <a:ln/>
+        </p:spPr>
+        <p:txBody>
+          <a:bodyPr wrap="square" lIns="0" tIns="0" rIns="0" bIns="0" rtlCol="0" anchor="ctr">
+            <a:normAutofit/>
+          </a:bodyPr>
+          <a:lstStyle/>
+          <a:p>
+            <a:pPr algn="ctr" indent="0" marL="0">
+              <a:buNone/>
+            </a:pPr>
+            <a:r>
+              <a:rPr lang="en-US" altLang="en-US" sz="700" b="1" dirty="0">
+                <a:solidFill>
+                  <a:srgbClr val="FFFFFF"/>
+                </a:solidFill>
+                <a:latin typeface="Calibri" pitchFamily="34" charset="0"/>
+                <a:ea typeface="Calibri" pitchFamily="34" charset="-122"/>
+                <a:cs typeface="Calibri" pitchFamily="34" charset="-120"/>
+              </a:rPr>
+              <a:t>6 d</a:t>
+            </a:r>
+            <a:endParaRPr lang="en-US" sz="700" dirty="0"/>
+          </a:p>
+        </p:txBody>
+      </p:sp>
+      <p:sp>
+        <p:nvSpPr>
+          <p:cNvPr id="286" name="Shape 284"/>
+          <p:cNvSpPr/>
+          <p:nvPr/>
+        </p:nvSpPr>
+        <p:spPr>
+          <a:xfrm>
+            <a:off x="365760" y="5244846"/>
+            <a:ext cx="11460175" cy="223266"/>
+          </a:xfrm>
+          <a:prstGeom prst="rect">
+            <a:avLst/>
+          </a:prstGeom>
+          <a:solidFill>
+            <a:srgbClr val="F6F9FA"/>
+          </a:solidFill>
+          <a:ln w="6350">
+            <a:solidFill>
+              <a:srgbClr val="DFE6EA"/>
+            </a:solidFill>
+            <a:prstDash val="solid"/>
+          </a:ln>
+        </p:spPr>
+      </p:sp>
+      <p:sp>
+        <p:nvSpPr>
+          <p:cNvPr id="287" name="Shape 285"/>
+          <p:cNvSpPr/>
+          <p:nvPr/>
+        </p:nvSpPr>
+        <p:spPr>
+          <a:xfrm>
+            <a:off x="438912" y="5237607"/>
+            <a:ext cx="237744" cy="237744"/>
+          </a:xfrm>
+          <a:prstGeom prst="ellipse">
+            <a:avLst/>
+          </a:prstGeom>
+          <a:solidFill>
+            <a:srgbClr val="D68A00"/>
+          </a:solidFill>
+          <a:ln w="19050">
+            <a:solidFill>
+              <a:srgbClr val="222222"/>
+            </a:solidFill>
+            <a:prstDash val="solid"/>
+          </a:ln>
+        </p:spPr>
+      </p:sp>
+      <p:sp>
+        <p:nvSpPr>
+          <p:cNvPr id="288" name="Text 286"/>
+          <p:cNvSpPr/>
+          <p:nvPr/>
+        </p:nvSpPr>
+        <p:spPr>
+          <a:xfrm>
+            <a:off x="365760" y="5244846"/>
+            <a:ext cx="384048" cy="223266"/>
+          </a:xfrm>
+          <a:prstGeom prst="rect">
+            <a:avLst/>
+          </a:prstGeom>
+          <a:noFill/>
+          <a:ln/>
+        </p:spPr>
+        <p:txBody>
+          <a:bodyPr wrap="square" lIns="0" tIns="0" rIns="0" bIns="0" rtlCol="0" anchor="ctr">
+            <a:normAutofit/>
+          </a:bodyPr>
+          <a:lstStyle/>
+          <a:p>
+            <a:pPr algn="ctr" indent="0" marL="0">
+              <a:buNone/>
+            </a:pPr>
+            <a:r>
+              <a:rPr lang="en-US" altLang="en-US" sz="850" b="1" dirty="0">
+                <a:solidFill>
+                  <a:srgbClr val="FFFFFF"/>
+                </a:solidFill>
+                <a:latin typeface="Calibri" pitchFamily="34" charset="0"/>
+                <a:ea typeface="Calibri" pitchFamily="34" charset="-122"/>
+                <a:cs typeface="Calibri" pitchFamily="34" charset="-120"/>
+              </a:rPr>
+              <a:t>G</a:t>
+            </a:r>
+            <a:endParaRPr lang="en-US" sz="850" dirty="0"/>
+          </a:p>
+        </p:txBody>
+      </p:sp>
+      <p:sp>
+        <p:nvSpPr>
+          <p:cNvPr id="289" name="Text 287"/>
+          <p:cNvSpPr/>
+          <p:nvPr/>
+        </p:nvSpPr>
+        <p:spPr>
+          <a:xfrm>
+            <a:off x="822960" y="5244846"/>
+            <a:ext cx="2606040" cy="223266"/>
+          </a:xfrm>
+          <a:prstGeom prst="rect">
+            <a:avLst/>
+          </a:prstGeom>
+          <a:noFill/>
+          <a:ln/>
+        </p:spPr>
+        <p:txBody>
+          <a:bodyPr wrap="square" lIns="0" tIns="0" rIns="0" bIns="0" rtlCol="0" anchor="ctr">
+            <a:normAutofit/>
+          </a:bodyPr>
+          <a:lstStyle/>
+          <a:p>
+            <a:pPr algn="l" indent="0" marL="0">
+              <a:buNone/>
+            </a:pPr>
+            <a:r>
+              <a:rPr lang="en-US" altLang="en-US" sz="750" b="1" dirty="0">
+                <a:solidFill>
+                  <a:srgbClr val="222222"/>
+                </a:solidFill>
+                <a:latin typeface="Calibri" pitchFamily="34" charset="0"/>
+                <a:ea typeface="Calibri" pitchFamily="34" charset="-122"/>
+                <a:cs typeface="Calibri" pitchFamily="34" charset="-120"/>
+              </a:rPr>
+              <a:t>Backfilling works for the building</a:t>
+            </a:r>
+            <a:endParaRPr lang="en-US" sz="750" dirty="0"/>
+          </a:p>
+        </p:txBody>
+      </p:sp>
+      <p:sp>
+        <p:nvSpPr>
+          <p:cNvPr id="290" name="Text 288"/>
+          <p:cNvSpPr/>
+          <p:nvPr/>
+        </p:nvSpPr>
+        <p:spPr>
+          <a:xfrm>
+            <a:off x="3447288" y="5244846"/>
+            <a:ext cx="777240" cy="223266"/>
+          </a:xfrm>
+          <a:prstGeom prst="rect">
+            <a:avLst/>
+          </a:prstGeom>
+          <a:noFill/>
+          <a:ln/>
+        </p:spPr>
+        <p:txBody>
+          <a:bodyPr wrap="square" lIns="0" tIns="0" rIns="0" bIns="0" rtlCol="0" anchor="ctr">
+            <a:normAutofit/>
+          </a:bodyPr>
+          <a:lstStyle/>
+          <a:p>
+            <a:pPr algn="ctr" indent="0" marL="0">
+              <a:buNone/>
+            </a:pPr>
+            <a:r>
+              <a:rPr lang="en-US" altLang="en-US" sz="700" dirty="0">
+                <a:solidFill>
+                  <a:srgbClr val="444444"/>
+                </a:solidFill>
+                <a:latin typeface="Calibri" pitchFamily="34" charset="0"/>
+                <a:ea typeface="Calibri" pitchFamily="34" charset="-122"/>
+                <a:cs typeface="Calibri" pitchFamily="34" charset="-120"/>
+              </a:rPr>
+              <a:t>F · FS</a:t>
+            </a:r>
+            <a:endParaRPr lang="en-US" sz="700" dirty="0"/>
+          </a:p>
+        </p:txBody>
+      </p:sp>
+      <p:sp>
+        <p:nvSpPr>
+          <p:cNvPr id="291" name="Text 289"/>
+          <p:cNvSpPr/>
+          <p:nvPr/>
+        </p:nvSpPr>
+        <p:spPr>
+          <a:xfrm>
+            <a:off x="4224528" y="5244846"/>
+            <a:ext cx="502920" cy="223266"/>
+          </a:xfrm>
+          <a:prstGeom prst="rect">
+            <a:avLst/>
+          </a:prstGeom>
+          <a:noFill/>
+          <a:ln/>
+        </p:spPr>
+        <p:txBody>
+          <a:bodyPr wrap="square" lIns="0" tIns="0" rIns="0" bIns="0" rtlCol="0" anchor="ctr">
+            <a:normAutofit/>
+          </a:bodyPr>
+          <a:lstStyle/>
+          <a:p>
+            <a:pPr algn="ctr" indent="0" marL="0">
+              <a:buNone/>
+            </a:pPr>
+            <a:r>
+              <a:rPr lang="en-US" altLang="en-US" sz="900" b="1" dirty="0">
+                <a:solidFill>
+                  <a:srgbClr val="222222"/>
+                </a:solidFill>
+                <a:latin typeface="Calibri" pitchFamily="34" charset="0"/>
+                <a:ea typeface="Calibri" pitchFamily="34" charset="-122"/>
+                <a:cs typeface="Calibri" pitchFamily="34" charset="-120"/>
+              </a:rPr>
+              <a:t>3</a:t>
+            </a:r>
+            <a:endParaRPr lang="en-US" sz="900" dirty="0"/>
+          </a:p>
+        </p:txBody>
+      </p:sp>
+      <p:sp>
+        <p:nvSpPr>
+          <p:cNvPr id="292" name="Text 290"/>
+          <p:cNvSpPr/>
+          <p:nvPr/>
+        </p:nvSpPr>
+        <p:spPr>
+          <a:xfrm>
+            <a:off x="4727448" y="5244846"/>
+            <a:ext cx="658368" cy="223266"/>
+          </a:xfrm>
+          <a:prstGeom prst="rect">
+            <a:avLst/>
+          </a:prstGeom>
+          <a:noFill/>
+          <a:ln/>
+        </p:spPr>
+        <p:txBody>
+          <a:bodyPr wrap="square" lIns="0" tIns="0" rIns="0" bIns="0" rtlCol="0" anchor="ctr">
+            <a:normAutofit/>
+          </a:bodyPr>
+          <a:lstStyle/>
+          <a:p>
+            <a:pPr algn="ctr" indent="0" marL="0">
+              <a:buNone/>
+            </a:pPr>
+            <a:r>
+              <a:rPr lang="en-US" altLang="en-US" sz="700" b="1" dirty="0">
+                <a:solidFill>
+                  <a:srgbClr val="222222"/>
+                </a:solidFill>
+                <a:latin typeface="Calibri" pitchFamily="34" charset="0"/>
+                <a:ea typeface="Calibri" pitchFamily="34" charset="-122"/>
+                <a:cs typeface="Calibri" pitchFamily="34" charset="-120"/>
+              </a:rPr>
+              <a:t>11 Nov</a:t>
+            </a:r>
+            <a:endParaRPr lang="en-US" sz="700" dirty="0"/>
+          </a:p>
+        </p:txBody>
+      </p:sp>
+      <p:sp>
+        <p:nvSpPr>
           <p:cNvPr id="293" name="Text 291"/>
           <p:cNvSpPr/>
           <p:nvPr/>
         </p:nvSpPr>
         <p:spPr>
           <a:xfrm>
-            <a:off x="9615266" y="5123025"/>
-            <a:ext cx="1190361" cy="111816"/>
+            <a:off x="5385816" y="5244846"/>
+            <a:ext cx="658368" cy="223266"/>
           </a:xfrm>
           <a:prstGeom prst="rect">
             <a:avLst/>
@@ -16992,13 +17010,13 @@
             <a:r>
               <a:rPr lang="en-US" altLang="en-US" sz="700" b="1" dirty="0">
                 <a:solidFill>
-                  <a:srgbClr val="FFFFFF"/>
-                </a:solidFill>
-                <a:latin typeface="Calibri" pitchFamily="34" charset="0"/>
-                <a:ea typeface="Calibri" pitchFamily="34" charset="-122"/>
-                <a:cs typeface="Calibri" pitchFamily="34" charset="-120"/>
-              </a:rPr>
-              <a:t>6 d</a:t>
+                  <a:srgbClr val="222222"/>
+                </a:solidFill>
+                <a:latin typeface="Calibri" pitchFamily="34" charset="0"/>
+                <a:ea typeface="Calibri" pitchFamily="34" charset="-122"/>
+                <a:cs typeface="Calibri" pitchFamily="34" charset="-120"/>
+              </a:rPr>
+              <a:t>14 Nov</a:t>
             </a:r>
             <a:endParaRPr lang="en-US" sz="700" dirty="0"/>
           </a:p>
@@ -17012,308 +17030,12 @@
         </p:nvSpPr>
         <p:spPr>
           <a:xfrm>
-            <a:off x="365760" y="5275326"/>
-            <a:ext cx="11460175" cy="192786"/>
-          </a:xfrm>
-          <a:prstGeom prst="rect">
-            <a:avLst/>
-          </a:prstGeom>
-          <a:solidFill>
-            <a:srgbClr val="F6F9FA"/>
-          </a:solidFill>
-          <a:ln w="6350">
-            <a:solidFill>
-              <a:srgbClr val="DFE6EA"/>
-            </a:solidFill>
-            <a:prstDash val="solid"/>
-          </a:ln>
-        </p:spPr>
-      </p:sp>
-      <p:sp>
-        <p:nvSpPr>
-          <p:cNvPr id="295" name="Shape 293"/>
-          <p:cNvSpPr/>
-          <p:nvPr/>
-        </p:nvSpPr>
-        <p:spPr>
-          <a:xfrm>
-            <a:off x="438912" y="5252847"/>
-            <a:ext cx="237744" cy="237744"/>
-          </a:xfrm>
-          <a:prstGeom prst="ellipse">
-            <a:avLst/>
-          </a:prstGeom>
-          <a:solidFill>
-            <a:srgbClr val="D68A00"/>
-          </a:solidFill>
-          <a:ln w="19050">
-            <a:solidFill>
-              <a:srgbClr val="222222"/>
-            </a:solidFill>
-            <a:prstDash val="solid"/>
-          </a:ln>
-        </p:spPr>
-      </p:sp>
-      <p:sp>
-        <p:nvSpPr>
-          <p:cNvPr id="296" name="Text 294"/>
-          <p:cNvSpPr/>
-          <p:nvPr/>
-        </p:nvSpPr>
-        <p:spPr>
-          <a:xfrm>
-            <a:off x="365760" y="5275326"/>
-            <a:ext cx="384048" cy="192786"/>
-          </a:xfrm>
-          <a:prstGeom prst="rect">
-            <a:avLst/>
-          </a:prstGeom>
-          <a:noFill/>
-          <a:ln/>
-        </p:spPr>
-        <p:txBody>
-          <a:bodyPr wrap="square" lIns="0" tIns="0" rIns="0" bIns="0" rtlCol="0" anchor="ctr">
-            <a:normAutofit/>
-          </a:bodyPr>
-          <a:lstStyle/>
-          <a:p>
-            <a:pPr algn="ctr" indent="0" marL="0">
-              <a:buNone/>
-            </a:pPr>
-            <a:r>
-              <a:rPr lang="en-US" altLang="en-US" sz="850" b="1" dirty="0">
-                <a:solidFill>
-                  <a:srgbClr val="FFFFFF"/>
-                </a:solidFill>
-                <a:latin typeface="Calibri" pitchFamily="34" charset="0"/>
-                <a:ea typeface="Calibri" pitchFamily="34" charset="-122"/>
-                <a:cs typeface="Calibri" pitchFamily="34" charset="-120"/>
-              </a:rPr>
-              <a:t>G</a:t>
-            </a:r>
-            <a:endParaRPr lang="en-US" sz="850" dirty="0"/>
-          </a:p>
-        </p:txBody>
-      </p:sp>
-      <p:sp>
-        <p:nvSpPr>
-          <p:cNvPr id="297" name="Text 295"/>
-          <p:cNvSpPr/>
-          <p:nvPr/>
-        </p:nvSpPr>
-        <p:spPr>
-          <a:xfrm>
-            <a:off x="822960" y="5275326"/>
-            <a:ext cx="2606040" cy="192786"/>
-          </a:xfrm>
-          <a:prstGeom prst="rect">
-            <a:avLst/>
-          </a:prstGeom>
-          <a:noFill/>
-          <a:ln/>
-        </p:spPr>
-        <p:txBody>
-          <a:bodyPr wrap="square" lIns="0" tIns="0" rIns="0" bIns="0" rtlCol="0" anchor="ctr">
-            <a:normAutofit/>
-          </a:bodyPr>
-          <a:lstStyle/>
-          <a:p>
-            <a:pPr algn="l" indent="0" marL="0">
-              <a:buNone/>
-            </a:pPr>
-            <a:r>
-              <a:rPr lang="en-US" altLang="en-US" sz="750" b="1" dirty="0">
-                <a:solidFill>
-                  <a:srgbClr val="222222"/>
-                </a:solidFill>
-                <a:latin typeface="Calibri" pitchFamily="34" charset="0"/>
-                <a:ea typeface="Calibri" pitchFamily="34" charset="-122"/>
-                <a:cs typeface="Calibri" pitchFamily="34" charset="-120"/>
-              </a:rPr>
-              <a:t>Backfilling works for the building</a:t>
-            </a:r>
-            <a:endParaRPr lang="en-US" sz="750" dirty="0"/>
-          </a:p>
-        </p:txBody>
-      </p:sp>
-      <p:sp>
-        <p:nvSpPr>
-          <p:cNvPr id="298" name="Text 296"/>
-          <p:cNvSpPr/>
-          <p:nvPr/>
-        </p:nvSpPr>
-        <p:spPr>
-          <a:xfrm>
-            <a:off x="3447288" y="5275326"/>
-            <a:ext cx="777240" cy="192786"/>
-          </a:xfrm>
-          <a:prstGeom prst="rect">
-            <a:avLst/>
-          </a:prstGeom>
-          <a:noFill/>
-          <a:ln/>
-        </p:spPr>
-        <p:txBody>
-          <a:bodyPr wrap="square" lIns="0" tIns="0" rIns="0" bIns="0" rtlCol="0" anchor="ctr">
-            <a:normAutofit/>
-          </a:bodyPr>
-          <a:lstStyle/>
-          <a:p>
-            <a:pPr algn="ctr" indent="0" marL="0">
-              <a:buNone/>
-            </a:pPr>
-            <a:r>
-              <a:rPr lang="en-US" altLang="en-US" sz="700" dirty="0">
-                <a:solidFill>
-                  <a:srgbClr val="444444"/>
-                </a:solidFill>
-                <a:latin typeface="Calibri" pitchFamily="34" charset="0"/>
-                <a:ea typeface="Calibri" pitchFamily="34" charset="-122"/>
-                <a:cs typeface="Calibri" pitchFamily="34" charset="-120"/>
-              </a:rPr>
-              <a:t>F · FS</a:t>
-            </a:r>
-            <a:endParaRPr lang="en-US" sz="700" dirty="0"/>
-          </a:p>
-        </p:txBody>
-      </p:sp>
-      <p:sp>
-        <p:nvSpPr>
-          <p:cNvPr id="299" name="Text 297"/>
-          <p:cNvSpPr/>
-          <p:nvPr/>
-        </p:nvSpPr>
-        <p:spPr>
-          <a:xfrm>
-            <a:off x="4224528" y="5275326"/>
-            <a:ext cx="502920" cy="192786"/>
-          </a:xfrm>
-          <a:prstGeom prst="rect">
-            <a:avLst/>
-          </a:prstGeom>
-          <a:noFill/>
-          <a:ln/>
-        </p:spPr>
-        <p:txBody>
-          <a:bodyPr wrap="square" lIns="0" tIns="0" rIns="0" bIns="0" rtlCol="0" anchor="ctr">
-            <a:normAutofit/>
-          </a:bodyPr>
-          <a:lstStyle/>
-          <a:p>
-            <a:pPr algn="ctr" indent="0" marL="0">
-              <a:buNone/>
-            </a:pPr>
-            <a:r>
-              <a:rPr lang="en-US" altLang="en-US" sz="900" b="1" dirty="0">
-                <a:solidFill>
-                  <a:srgbClr val="222222"/>
-                </a:solidFill>
-                <a:latin typeface="Calibri" pitchFamily="34" charset="0"/>
-                <a:ea typeface="Calibri" pitchFamily="34" charset="-122"/>
-                <a:cs typeface="Calibri" pitchFamily="34" charset="-120"/>
-              </a:rPr>
-              <a:t>3</a:t>
-            </a:r>
-            <a:endParaRPr lang="en-US" sz="900" dirty="0"/>
-          </a:p>
-        </p:txBody>
-      </p:sp>
-      <p:sp>
-        <p:nvSpPr>
-          <p:cNvPr id="300" name="Text 298"/>
-          <p:cNvSpPr/>
-          <p:nvPr/>
-        </p:nvSpPr>
-        <p:spPr>
-          <a:xfrm>
-            <a:off x="4727448" y="5275326"/>
-            <a:ext cx="658368" cy="192786"/>
-          </a:xfrm>
-          <a:prstGeom prst="rect">
-            <a:avLst/>
-          </a:prstGeom>
-          <a:noFill/>
-          <a:ln/>
-        </p:spPr>
-        <p:txBody>
-          <a:bodyPr wrap="square" lIns="0" tIns="0" rIns="0" bIns="0" rtlCol="0" anchor="ctr">
-            <a:normAutofit/>
-          </a:bodyPr>
-          <a:lstStyle/>
-          <a:p>
-            <a:pPr algn="ctr" indent="0" marL="0">
-              <a:buNone/>
-            </a:pPr>
-            <a:r>
-              <a:rPr lang="en-US" altLang="en-US" sz="700" b="1" dirty="0">
-                <a:solidFill>
-                  <a:srgbClr val="222222"/>
-                </a:solidFill>
-                <a:latin typeface="Calibri" pitchFamily="34" charset="0"/>
-                <a:ea typeface="Calibri" pitchFamily="34" charset="-122"/>
-                <a:cs typeface="Calibri" pitchFamily="34" charset="-120"/>
-              </a:rPr>
-              <a:t>11 Nov</a:t>
-            </a:r>
-            <a:endParaRPr lang="en-US" sz="700" dirty="0"/>
-          </a:p>
-        </p:txBody>
-      </p:sp>
-      <p:sp>
-        <p:nvSpPr>
-          <p:cNvPr id="301" name="Text 299"/>
-          <p:cNvSpPr/>
-          <p:nvPr/>
-        </p:nvSpPr>
-        <p:spPr>
-          <a:xfrm>
-            <a:off x="5385816" y="5275326"/>
-            <a:ext cx="658368" cy="192786"/>
-          </a:xfrm>
-          <a:prstGeom prst="rect">
-            <a:avLst/>
-          </a:prstGeom>
-          <a:noFill/>
-          <a:ln/>
-        </p:spPr>
-        <p:txBody>
-          <a:bodyPr wrap="square" lIns="0" tIns="0" rIns="0" bIns="0" rtlCol="0" anchor="ctr">
-            <a:normAutofit/>
-          </a:bodyPr>
-          <a:lstStyle/>
-          <a:p>
-            <a:pPr algn="ctr" indent="0" marL="0">
-              <a:buNone/>
-            </a:pPr>
-            <a:r>
-              <a:rPr lang="en-US" altLang="en-US" sz="700" b="1" dirty="0">
-                <a:solidFill>
-                  <a:srgbClr val="222222"/>
-                </a:solidFill>
-                <a:latin typeface="Calibri" pitchFamily="34" charset="0"/>
-                <a:ea typeface="Calibri" pitchFamily="34" charset="-122"/>
-                <a:cs typeface="Calibri" pitchFamily="34" charset="-120"/>
-              </a:rPr>
-              <a:t>14 Nov</a:t>
-            </a:r>
-            <a:endParaRPr lang="en-US" sz="700" dirty="0"/>
-          </a:p>
-        </p:txBody>
-      </p:sp>
-      <p:sp>
-        <p:nvSpPr>
-          <p:cNvPr id="302" name="Shape 300"/>
-          <p:cNvSpPr/>
-          <p:nvPr/>
-        </p:nvSpPr>
-        <p:spPr>
-          <a:xfrm>
-            <a:off x="10805626" y="5315811"/>
-            <a:ext cx="680206" cy="111816"/>
+            <a:off x="10805626" y="5291732"/>
+            <a:ext cx="680206" cy="129494"/>
           </a:xfrm>
           <a:prstGeom prst="roundRect">
             <a:avLst>
-              <a:gd name="adj" fmla="val 32711"/>
+              <a:gd name="adj" fmla="val 28245"/>
             </a:avLst>
           </a:prstGeom>
           <a:solidFill>
@@ -17336,14 +17058,14 @@
       </p:sp>
       <p:sp>
         <p:nvSpPr>
-          <p:cNvPr id="303" name="Text 301"/>
-          <p:cNvSpPr/>
-          <p:nvPr/>
-        </p:nvSpPr>
-        <p:spPr>
-          <a:xfrm>
-            <a:off x="10805626" y="5315811"/>
-            <a:ext cx="680206" cy="111816"/>
+          <p:cNvPr id="295" name="Text 293"/>
+          <p:cNvSpPr/>
+          <p:nvPr/>
+        </p:nvSpPr>
+        <p:spPr>
+          <a:xfrm>
+            <a:off x="10805626" y="5291732"/>
+            <a:ext cx="680206" cy="129494"/>
           </a:xfrm>
           <a:prstGeom prst="rect">
             <a:avLst/>
@@ -17377,14 +17099,202 @@
       </p:sp>
       <p:sp>
         <p:nvSpPr>
+          <p:cNvPr id="296" name="Shape 294"/>
+          <p:cNvSpPr/>
+          <p:nvPr/>
+        </p:nvSpPr>
+        <p:spPr>
+          <a:xfrm>
+            <a:off x="7459460" y="3188566"/>
+            <a:ext cx="0" cy="158519"/>
+          </a:xfrm>
+          <a:prstGeom prst="line">
+            <a:avLst/>
+          </a:prstGeom>
+          <a:noFill/>
+          <a:ln w="13970">
+            <a:solidFill>
+              <a:srgbClr val="2D3338"/>
+            </a:solidFill>
+            <a:prstDash val="solid"/>
+          </a:ln>
+        </p:spPr>
+      </p:sp>
+      <p:sp>
+        <p:nvSpPr>
+          <p:cNvPr id="297" name="Shape 295"/>
+          <p:cNvSpPr/>
+          <p:nvPr/>
+        </p:nvSpPr>
+        <p:spPr>
+          <a:xfrm>
+            <a:off x="7459460" y="3347085"/>
+            <a:ext cx="276095" cy="0"/>
+          </a:xfrm>
+          <a:prstGeom prst="line">
+            <a:avLst/>
+          </a:prstGeom>
+          <a:noFill/>
+          <a:ln w="13970">
+            <a:solidFill>
+              <a:srgbClr val="2D3338"/>
+            </a:solidFill>
+            <a:prstDash val="solid"/>
+            <a:tailEnd type="triangle"/>
+          </a:ln>
+        </p:spPr>
+      </p:sp>
+      <p:sp>
+        <p:nvSpPr>
+          <p:cNvPr id="298" name="Shape 296"/>
+          <p:cNvSpPr/>
+          <p:nvPr/>
+        </p:nvSpPr>
+        <p:spPr>
+          <a:xfrm>
+            <a:off x="7799563" y="3411832"/>
+            <a:ext cx="0" cy="158519"/>
+          </a:xfrm>
+          <a:prstGeom prst="line">
+            <a:avLst/>
+          </a:prstGeom>
+          <a:noFill/>
+          <a:ln w="13970">
+            <a:solidFill>
+              <a:srgbClr val="2D3338"/>
+            </a:solidFill>
+            <a:prstDash val="solid"/>
+          </a:ln>
+        </p:spPr>
+      </p:sp>
+      <p:sp>
+        <p:nvSpPr>
+          <p:cNvPr id="299" name="Shape 297"/>
+          <p:cNvSpPr/>
+          <p:nvPr/>
+        </p:nvSpPr>
+        <p:spPr>
+          <a:xfrm>
+            <a:off x="7799563" y="3570351"/>
+            <a:ext cx="106044" cy="0"/>
+          </a:xfrm>
+          <a:prstGeom prst="line">
+            <a:avLst/>
+          </a:prstGeom>
+          <a:noFill/>
+          <a:ln w="13970">
+            <a:solidFill>
+              <a:srgbClr val="2D3338"/>
+            </a:solidFill>
+            <a:prstDash val="solid"/>
+            <a:tailEnd type="triangle"/>
+          </a:ln>
+        </p:spPr>
+      </p:sp>
+      <p:sp>
+        <p:nvSpPr>
+          <p:cNvPr id="300" name="Shape 298"/>
+          <p:cNvSpPr/>
+          <p:nvPr/>
+        </p:nvSpPr>
+        <p:spPr>
+          <a:xfrm>
+            <a:off x="7969615" y="3635098"/>
+            <a:ext cx="0" cy="158519"/>
+          </a:xfrm>
+          <a:prstGeom prst="line">
+            <a:avLst/>
+          </a:prstGeom>
+          <a:noFill/>
+          <a:ln w="13970">
+            <a:solidFill>
+              <a:srgbClr val="2D3338"/>
+            </a:solidFill>
+            <a:prstDash val="solid"/>
+          </a:ln>
+        </p:spPr>
+      </p:sp>
+      <p:sp>
+        <p:nvSpPr>
+          <p:cNvPr id="301" name="Shape 299"/>
+          <p:cNvSpPr/>
+          <p:nvPr/>
+        </p:nvSpPr>
+        <p:spPr>
+          <a:xfrm>
+            <a:off x="7969615" y="3793617"/>
+            <a:ext cx="106044" cy="0"/>
+          </a:xfrm>
+          <a:prstGeom prst="line">
+            <a:avLst/>
+          </a:prstGeom>
+          <a:noFill/>
+          <a:ln w="13970">
+            <a:solidFill>
+              <a:srgbClr val="2D3338"/>
+            </a:solidFill>
+            <a:prstDash val="solid"/>
+            <a:tailEnd type="triangle"/>
+          </a:ln>
+        </p:spPr>
+      </p:sp>
+      <p:sp>
+        <p:nvSpPr>
+          <p:cNvPr id="302" name="Shape 300"/>
+          <p:cNvSpPr/>
+          <p:nvPr/>
+        </p:nvSpPr>
+        <p:spPr>
+          <a:xfrm>
+            <a:off x="8139666" y="3858364"/>
+            <a:ext cx="0" cy="158519"/>
+          </a:xfrm>
+          <a:prstGeom prst="line">
+            <a:avLst/>
+          </a:prstGeom>
+          <a:noFill/>
+          <a:ln w="13970">
+            <a:solidFill>
+              <a:srgbClr val="2D3338"/>
+            </a:solidFill>
+            <a:prstDash val="solid"/>
+          </a:ln>
+        </p:spPr>
+      </p:sp>
+      <p:sp>
+        <p:nvSpPr>
+          <p:cNvPr id="303" name="Shape 301"/>
+          <p:cNvSpPr/>
+          <p:nvPr/>
+        </p:nvSpPr>
+        <p:spPr>
+          <a:xfrm>
+            <a:off x="8075658" y="4016883"/>
+            <a:ext cx="64008" cy="0"/>
+          </a:xfrm>
+          <a:prstGeom prst="line">
+            <a:avLst/>
+          </a:prstGeom>
+          <a:noFill/>
+          <a:ln w="13970">
+            <a:solidFill>
+              <a:srgbClr val="2D3338"/>
+            </a:solidFill>
+            <a:prstDash val="solid"/>
+            <a:tailEnd type="triangle"/>
+          </a:ln>
+        </p:spPr>
+      </p:sp>
+      <p:sp>
+        <p:nvSpPr>
           <p:cNvPr id="304" name="Shape 302"/>
           <p:cNvSpPr/>
           <p:nvPr/>
         </p:nvSpPr>
         <p:spPr>
           <a:xfrm>
-            <a:off x="7459460" y="3499767"/>
-            <a:ext cx="0" cy="136878"/>
+            <a:off x="7459460" y="2965300"/>
+            <a:ext cx="0" cy="1274849"/>
           </a:xfrm>
           <a:prstGeom prst="line">
             <a:avLst/>
@@ -17406,8 +17316,8 @@
         </p:nvSpPr>
         <p:spPr>
           <a:xfrm>
-            <a:off x="7459460" y="3636645"/>
-            <a:ext cx="276095" cy="0"/>
+            <a:off x="7459460" y="4240149"/>
+            <a:ext cx="786250" cy="0"/>
           </a:xfrm>
           <a:prstGeom prst="line">
             <a:avLst/>
@@ -17430,8 +17340,8 @@
         </p:nvSpPr>
         <p:spPr>
           <a:xfrm>
-            <a:off x="7799563" y="3692553"/>
-            <a:ext cx="0" cy="136878"/>
+            <a:off x="8209134" y="2900553"/>
+            <a:ext cx="45720" cy="0"/>
           </a:xfrm>
           <a:prstGeom prst="line">
             <a:avLst/>
@@ -17453,8 +17363,8 @@
         </p:nvSpPr>
         <p:spPr>
           <a:xfrm>
-            <a:off x="7799563" y="3829431"/>
-            <a:ext cx="106044" cy="0"/>
+            <a:off x="8209134" y="2900553"/>
+            <a:ext cx="0" cy="1562862"/>
           </a:xfrm>
           <a:prstGeom prst="line">
             <a:avLst/>
@@ -17465,20 +17375,43 @@
               <a:srgbClr val="2D3338"/>
             </a:solidFill>
             <a:prstDash val="solid"/>
+          </a:ln>
+        </p:spPr>
+      </p:sp>
+      <p:sp>
+        <p:nvSpPr>
+          <p:cNvPr id="308" name="Shape 306"/>
+          <p:cNvSpPr/>
+          <p:nvPr/>
+        </p:nvSpPr>
+        <p:spPr>
+          <a:xfrm>
+            <a:off x="8209134" y="4463415"/>
+            <a:ext cx="36576" cy="0"/>
+          </a:xfrm>
+          <a:prstGeom prst="line">
+            <a:avLst/>
+          </a:prstGeom>
+          <a:noFill/>
+          <a:ln w="13970">
+            <a:solidFill>
+              <a:srgbClr val="2D3338"/>
+            </a:solidFill>
+            <a:prstDash val="solid"/>
             <a:tailEnd type="triangle"/>
           </a:ln>
         </p:spPr>
       </p:sp>
       <p:sp>
         <p:nvSpPr>
-          <p:cNvPr id="308" name="Shape 306"/>
-          <p:cNvSpPr/>
-          <p:nvPr/>
-        </p:nvSpPr>
-        <p:spPr>
-          <a:xfrm>
-            <a:off x="7969615" y="3885339"/>
-            <a:ext cx="0" cy="136878"/>
+          <p:cNvPr id="309" name="Shape 307"/>
+          <p:cNvSpPr/>
+          <p:nvPr/>
+        </p:nvSpPr>
+        <p:spPr>
+          <a:xfrm>
+            <a:off x="8549237" y="4463415"/>
+            <a:ext cx="45720" cy="0"/>
           </a:xfrm>
           <a:prstGeom prst="line">
             <a:avLst/>
@@ -17494,14 +17427,14 @@
       </p:sp>
       <p:sp>
         <p:nvSpPr>
-          <p:cNvPr id="309" name="Shape 307"/>
-          <p:cNvSpPr/>
-          <p:nvPr/>
-        </p:nvSpPr>
-        <p:spPr>
-          <a:xfrm>
-            <a:off x="7969615" y="4022217"/>
-            <a:ext cx="106044" cy="0"/>
+          <p:cNvPr id="310" name="Shape 308"/>
+          <p:cNvSpPr/>
+          <p:nvPr/>
+        </p:nvSpPr>
+        <p:spPr>
+          <a:xfrm>
+            <a:off x="8549237" y="4463415"/>
+            <a:ext cx="0" cy="223266"/>
           </a:xfrm>
           <a:prstGeom prst="line">
             <a:avLst/>
@@ -17512,20 +17445,43 @@
               <a:srgbClr val="2D3338"/>
             </a:solidFill>
             <a:prstDash val="solid"/>
+          </a:ln>
+        </p:spPr>
+      </p:sp>
+      <p:sp>
+        <p:nvSpPr>
+          <p:cNvPr id="311" name="Shape 309"/>
+          <p:cNvSpPr/>
+          <p:nvPr/>
+        </p:nvSpPr>
+        <p:spPr>
+          <a:xfrm>
+            <a:off x="8549237" y="4686681"/>
+            <a:ext cx="36576" cy="0"/>
+          </a:xfrm>
+          <a:prstGeom prst="line">
+            <a:avLst/>
+          </a:prstGeom>
+          <a:noFill/>
+          <a:ln w="13970">
+            <a:solidFill>
+              <a:srgbClr val="2D3338"/>
+            </a:solidFill>
+            <a:prstDash val="solid"/>
             <a:tailEnd type="triangle"/>
           </a:ln>
         </p:spPr>
       </p:sp>
       <p:sp>
         <p:nvSpPr>
-          <p:cNvPr id="310" name="Shape 308"/>
-          <p:cNvSpPr/>
-          <p:nvPr/>
-        </p:nvSpPr>
-        <p:spPr>
-          <a:xfrm>
-            <a:off x="8139666" y="4078125"/>
-            <a:ext cx="0" cy="136878"/>
+          <p:cNvPr id="312" name="Shape 310"/>
+          <p:cNvSpPr/>
+          <p:nvPr/>
+        </p:nvSpPr>
+        <p:spPr>
+          <a:xfrm>
+            <a:off x="9569546" y="4686681"/>
+            <a:ext cx="45720" cy="0"/>
           </a:xfrm>
           <a:prstGeom prst="line">
             <a:avLst/>
@@ -17541,14 +17497,14 @@
       </p:sp>
       <p:sp>
         <p:nvSpPr>
-          <p:cNvPr id="311" name="Shape 309"/>
-          <p:cNvSpPr/>
-          <p:nvPr/>
-        </p:nvSpPr>
-        <p:spPr>
-          <a:xfrm>
-            <a:off x="8075658" y="4215003"/>
-            <a:ext cx="64008" cy="0"/>
+          <p:cNvPr id="313" name="Shape 311"/>
+          <p:cNvSpPr/>
+          <p:nvPr/>
+        </p:nvSpPr>
+        <p:spPr>
+          <a:xfrm>
+            <a:off x="9569546" y="4686681"/>
+            <a:ext cx="0" cy="223266"/>
           </a:xfrm>
           <a:prstGeom prst="line">
             <a:avLst/>
@@ -17559,20 +17515,43 @@
               <a:srgbClr val="2D3338"/>
             </a:solidFill>
             <a:prstDash val="solid"/>
+          </a:ln>
+        </p:spPr>
+      </p:sp>
+      <p:sp>
+        <p:nvSpPr>
+          <p:cNvPr id="314" name="Shape 312"/>
+          <p:cNvSpPr/>
+          <p:nvPr/>
+        </p:nvSpPr>
+        <p:spPr>
+          <a:xfrm>
+            <a:off x="9569546" y="4909947"/>
+            <a:ext cx="36576" cy="0"/>
+          </a:xfrm>
+          <a:prstGeom prst="line">
+            <a:avLst/>
+          </a:prstGeom>
+          <a:noFill/>
+          <a:ln w="13970">
+            <a:solidFill>
+              <a:srgbClr val="2D3338"/>
+            </a:solidFill>
+            <a:prstDash val="solid"/>
             <a:tailEnd type="triangle"/>
           </a:ln>
         </p:spPr>
       </p:sp>
       <p:sp>
         <p:nvSpPr>
-          <p:cNvPr id="312" name="Shape 310"/>
-          <p:cNvSpPr/>
-          <p:nvPr/>
-        </p:nvSpPr>
-        <p:spPr>
-          <a:xfrm>
-            <a:off x="7459460" y="3306981"/>
-            <a:ext cx="0" cy="1100808"/>
+          <p:cNvPr id="315" name="Shape 313"/>
+          <p:cNvSpPr/>
+          <p:nvPr/>
+        </p:nvSpPr>
+        <p:spPr>
+          <a:xfrm>
+            <a:off x="9569546" y="4686681"/>
+            <a:ext cx="45720" cy="0"/>
           </a:xfrm>
           <a:prstGeom prst="line">
             <a:avLst/>
@@ -17588,14 +17567,14 @@
       </p:sp>
       <p:sp>
         <p:nvSpPr>
-          <p:cNvPr id="313" name="Shape 311"/>
-          <p:cNvSpPr/>
-          <p:nvPr/>
-        </p:nvSpPr>
-        <p:spPr>
-          <a:xfrm>
-            <a:off x="7459460" y="4407789"/>
-            <a:ext cx="786250" cy="0"/>
+          <p:cNvPr id="316" name="Shape 314"/>
+          <p:cNvSpPr/>
+          <p:nvPr/>
+        </p:nvSpPr>
+        <p:spPr>
+          <a:xfrm>
+            <a:off x="9569546" y="4686681"/>
+            <a:ext cx="0" cy="446532"/>
           </a:xfrm>
           <a:prstGeom prst="line">
             <a:avLst/>
@@ -17606,19 +17585,42 @@
               <a:srgbClr val="2D3338"/>
             </a:solidFill>
             <a:prstDash val="solid"/>
+          </a:ln>
+        </p:spPr>
+      </p:sp>
+      <p:sp>
+        <p:nvSpPr>
+          <p:cNvPr id="317" name="Shape 315"/>
+          <p:cNvSpPr/>
+          <p:nvPr/>
+        </p:nvSpPr>
+        <p:spPr>
+          <a:xfrm>
+            <a:off x="9569546" y="5133213"/>
+            <a:ext cx="36576" cy="0"/>
+          </a:xfrm>
+          <a:prstGeom prst="line">
+            <a:avLst/>
+          </a:prstGeom>
+          <a:noFill/>
+          <a:ln w="13970">
+            <a:solidFill>
+              <a:srgbClr val="2D3338"/>
+            </a:solidFill>
+            <a:prstDash val="solid"/>
             <a:tailEnd type="triangle"/>
           </a:ln>
         </p:spPr>
       </p:sp>
       <p:sp>
         <p:nvSpPr>
-          <p:cNvPr id="314" name="Shape 312"/>
-          <p:cNvSpPr/>
-          <p:nvPr/>
-        </p:nvSpPr>
-        <p:spPr>
-          <a:xfrm>
-            <a:off x="8209134" y="3251073"/>
+          <p:cNvPr id="318" name="Shape 316"/>
+          <p:cNvSpPr/>
+          <p:nvPr/>
+        </p:nvSpPr>
+        <p:spPr>
+          <a:xfrm>
+            <a:off x="10759906" y="5133213"/>
             <a:ext cx="45720" cy="0"/>
           </a:xfrm>
           <a:prstGeom prst="line">
@@ -17635,14 +17637,14 @@
       </p:sp>
       <p:sp>
         <p:nvSpPr>
-          <p:cNvPr id="315" name="Shape 313"/>
-          <p:cNvSpPr/>
-          <p:nvPr/>
-        </p:nvSpPr>
-        <p:spPr>
-          <a:xfrm>
-            <a:off x="8209134" y="3251073"/>
-            <a:ext cx="0" cy="1349502"/>
+          <p:cNvPr id="319" name="Shape 317"/>
+          <p:cNvSpPr/>
+          <p:nvPr/>
+        </p:nvSpPr>
+        <p:spPr>
+          <a:xfrm>
+            <a:off x="10759906" y="5133213"/>
+            <a:ext cx="0" cy="223266"/>
           </a:xfrm>
           <a:prstGeom prst="line">
             <a:avLst/>
@@ -17658,13 +17660,13 @@
       </p:sp>
       <p:sp>
         <p:nvSpPr>
-          <p:cNvPr id="316" name="Shape 314"/>
-          <p:cNvSpPr/>
-          <p:nvPr/>
-        </p:nvSpPr>
-        <p:spPr>
-          <a:xfrm>
-            <a:off x="8209134" y="4600575"/>
+          <p:cNvPr id="320" name="Shape 318"/>
+          <p:cNvSpPr/>
+          <p:nvPr/>
+        </p:nvSpPr>
+        <p:spPr>
+          <a:xfrm>
+            <a:off x="10759906" y="5356479"/>
             <a:ext cx="36576" cy="0"/>
           </a:xfrm>
           <a:prstGeom prst="line">
@@ -17682,287 +17684,7 @@
       </p:sp>
       <p:sp>
         <p:nvSpPr>
-          <p:cNvPr id="317" name="Shape 315"/>
-          <p:cNvSpPr/>
-          <p:nvPr/>
-        </p:nvSpPr>
-        <p:spPr>
-          <a:xfrm>
-            <a:off x="8549237" y="4600575"/>
-            <a:ext cx="45720" cy="0"/>
-          </a:xfrm>
-          <a:prstGeom prst="line">
-            <a:avLst/>
-          </a:prstGeom>
-          <a:noFill/>
-          <a:ln w="13970">
-            <a:solidFill>
-              <a:srgbClr val="2D3338"/>
-            </a:solidFill>
-            <a:prstDash val="solid"/>
-          </a:ln>
-        </p:spPr>
-      </p:sp>
-      <p:sp>
-        <p:nvSpPr>
-          <p:cNvPr id="318" name="Shape 316"/>
-          <p:cNvSpPr/>
-          <p:nvPr/>
-        </p:nvSpPr>
-        <p:spPr>
-          <a:xfrm>
-            <a:off x="8549237" y="4600575"/>
-            <a:ext cx="0" cy="192786"/>
-          </a:xfrm>
-          <a:prstGeom prst="line">
-            <a:avLst/>
-          </a:prstGeom>
-          <a:noFill/>
-          <a:ln w="13970">
-            <a:solidFill>
-              <a:srgbClr val="2D3338"/>
-            </a:solidFill>
-            <a:prstDash val="solid"/>
-          </a:ln>
-        </p:spPr>
-      </p:sp>
-      <p:sp>
-        <p:nvSpPr>
-          <p:cNvPr id="319" name="Shape 317"/>
-          <p:cNvSpPr/>
-          <p:nvPr/>
-        </p:nvSpPr>
-        <p:spPr>
-          <a:xfrm>
-            <a:off x="8549237" y="4793361"/>
-            <a:ext cx="36576" cy="0"/>
-          </a:xfrm>
-          <a:prstGeom prst="line">
-            <a:avLst/>
-          </a:prstGeom>
-          <a:noFill/>
-          <a:ln w="13970">
-            <a:solidFill>
-              <a:srgbClr val="2D3338"/>
-            </a:solidFill>
-            <a:prstDash val="solid"/>
-            <a:tailEnd type="triangle"/>
-          </a:ln>
-        </p:spPr>
-      </p:sp>
-      <p:sp>
-        <p:nvSpPr>
-          <p:cNvPr id="320" name="Shape 318"/>
-          <p:cNvSpPr/>
-          <p:nvPr/>
-        </p:nvSpPr>
-        <p:spPr>
-          <a:xfrm>
-            <a:off x="9569546" y="4793361"/>
-            <a:ext cx="45720" cy="0"/>
-          </a:xfrm>
-          <a:prstGeom prst="line">
-            <a:avLst/>
-          </a:prstGeom>
-          <a:noFill/>
-          <a:ln w="13970">
-            <a:solidFill>
-              <a:srgbClr val="2D3338"/>
-            </a:solidFill>
-            <a:prstDash val="solid"/>
-          </a:ln>
-        </p:spPr>
-      </p:sp>
-      <p:sp>
-        <p:nvSpPr>
           <p:cNvPr id="321" name="Shape 319"/>
-          <p:cNvSpPr/>
-          <p:nvPr/>
-        </p:nvSpPr>
-        <p:spPr>
-          <a:xfrm>
-            <a:off x="9569546" y="4793361"/>
-            <a:ext cx="0" cy="192786"/>
-          </a:xfrm>
-          <a:prstGeom prst="line">
-            <a:avLst/>
-          </a:prstGeom>
-          <a:noFill/>
-          <a:ln w="13970">
-            <a:solidFill>
-              <a:srgbClr val="2D3338"/>
-            </a:solidFill>
-            <a:prstDash val="solid"/>
-          </a:ln>
-        </p:spPr>
-      </p:sp>
-      <p:sp>
-        <p:nvSpPr>
-          <p:cNvPr id="322" name="Shape 320"/>
-          <p:cNvSpPr/>
-          <p:nvPr/>
-        </p:nvSpPr>
-        <p:spPr>
-          <a:xfrm>
-            <a:off x="9569546" y="4986147"/>
-            <a:ext cx="36576" cy="0"/>
-          </a:xfrm>
-          <a:prstGeom prst="line">
-            <a:avLst/>
-          </a:prstGeom>
-          <a:noFill/>
-          <a:ln w="13970">
-            <a:solidFill>
-              <a:srgbClr val="2D3338"/>
-            </a:solidFill>
-            <a:prstDash val="solid"/>
-            <a:tailEnd type="triangle"/>
-          </a:ln>
-        </p:spPr>
-      </p:sp>
-      <p:sp>
-        <p:nvSpPr>
-          <p:cNvPr id="323" name="Shape 321"/>
-          <p:cNvSpPr/>
-          <p:nvPr/>
-        </p:nvSpPr>
-        <p:spPr>
-          <a:xfrm>
-            <a:off x="9569546" y="4793361"/>
-            <a:ext cx="45720" cy="0"/>
-          </a:xfrm>
-          <a:prstGeom prst="line">
-            <a:avLst/>
-          </a:prstGeom>
-          <a:noFill/>
-          <a:ln w="13970">
-            <a:solidFill>
-              <a:srgbClr val="2D3338"/>
-            </a:solidFill>
-            <a:prstDash val="solid"/>
-          </a:ln>
-        </p:spPr>
-      </p:sp>
-      <p:sp>
-        <p:nvSpPr>
-          <p:cNvPr id="324" name="Shape 322"/>
-          <p:cNvSpPr/>
-          <p:nvPr/>
-        </p:nvSpPr>
-        <p:spPr>
-          <a:xfrm>
-            <a:off x="9569546" y="4793361"/>
-            <a:ext cx="0" cy="385572"/>
-          </a:xfrm>
-          <a:prstGeom prst="line">
-            <a:avLst/>
-          </a:prstGeom>
-          <a:noFill/>
-          <a:ln w="13970">
-            <a:solidFill>
-              <a:srgbClr val="2D3338"/>
-            </a:solidFill>
-            <a:prstDash val="solid"/>
-          </a:ln>
-        </p:spPr>
-      </p:sp>
-      <p:sp>
-        <p:nvSpPr>
-          <p:cNvPr id="325" name="Shape 323"/>
-          <p:cNvSpPr/>
-          <p:nvPr/>
-        </p:nvSpPr>
-        <p:spPr>
-          <a:xfrm>
-            <a:off x="9569546" y="5178933"/>
-            <a:ext cx="36576" cy="0"/>
-          </a:xfrm>
-          <a:prstGeom prst="line">
-            <a:avLst/>
-          </a:prstGeom>
-          <a:noFill/>
-          <a:ln w="13970">
-            <a:solidFill>
-              <a:srgbClr val="2D3338"/>
-            </a:solidFill>
-            <a:prstDash val="solid"/>
-            <a:tailEnd type="triangle"/>
-          </a:ln>
-        </p:spPr>
-      </p:sp>
-      <p:sp>
-        <p:nvSpPr>
-          <p:cNvPr id="326" name="Shape 324"/>
-          <p:cNvSpPr/>
-          <p:nvPr/>
-        </p:nvSpPr>
-        <p:spPr>
-          <a:xfrm>
-            <a:off x="10759906" y="5178933"/>
-            <a:ext cx="45720" cy="0"/>
-          </a:xfrm>
-          <a:prstGeom prst="line">
-            <a:avLst/>
-          </a:prstGeom>
-          <a:noFill/>
-          <a:ln w="13970">
-            <a:solidFill>
-              <a:srgbClr val="2D3338"/>
-            </a:solidFill>
-            <a:prstDash val="solid"/>
-          </a:ln>
-        </p:spPr>
-      </p:sp>
-      <p:sp>
-        <p:nvSpPr>
-          <p:cNvPr id="327" name="Shape 325"/>
-          <p:cNvSpPr/>
-          <p:nvPr/>
-        </p:nvSpPr>
-        <p:spPr>
-          <a:xfrm>
-            <a:off x="10759906" y="5178933"/>
-            <a:ext cx="0" cy="192786"/>
-          </a:xfrm>
-          <a:prstGeom prst="line">
-            <a:avLst/>
-          </a:prstGeom>
-          <a:noFill/>
-          <a:ln w="13970">
-            <a:solidFill>
-              <a:srgbClr val="2D3338"/>
-            </a:solidFill>
-            <a:prstDash val="solid"/>
-          </a:ln>
-        </p:spPr>
-      </p:sp>
-      <p:sp>
-        <p:nvSpPr>
-          <p:cNvPr id="328" name="Shape 326"/>
-          <p:cNvSpPr/>
-          <p:nvPr/>
-        </p:nvSpPr>
-        <p:spPr>
-          <a:xfrm>
-            <a:off x="10759906" y="5371719"/>
-            <a:ext cx="36576" cy="0"/>
-          </a:xfrm>
-          <a:prstGeom prst="line">
-            <a:avLst/>
-          </a:prstGeom>
-          <a:noFill/>
-          <a:ln w="13970">
-            <a:solidFill>
-              <a:srgbClr val="2D3338"/>
-            </a:solidFill>
-            <a:prstDash val="solid"/>
-            <a:tailEnd type="triangle"/>
-          </a:ln>
-        </p:spPr>
-      </p:sp>
-      <p:sp>
-        <p:nvSpPr>
-          <p:cNvPr id="329" name="Shape 327"/>
           <p:cNvSpPr/>
           <p:nvPr/>
         </p:nvSpPr>
@@ -17985,7 +17707,7 @@
       </p:sp>
       <p:sp>
         <p:nvSpPr>
-          <p:cNvPr id="330" name="Shape 328"/>
+          <p:cNvPr id="322" name="Shape 320"/>
           <p:cNvSpPr/>
           <p:nvPr/>
         </p:nvSpPr>
@@ -18012,7 +17734,7 @@
       </p:sp>
       <p:sp>
         <p:nvSpPr>
-          <p:cNvPr id="331" name="Text 329"/>
+          <p:cNvPr id="323" name="Text 321"/>
           <p:cNvSpPr/>
           <p:nvPr/>
         </p:nvSpPr>
@@ -18053,7 +17775,7 @@
       </p:sp>
       <p:sp>
         <p:nvSpPr>
-          <p:cNvPr id="332" name="Shape 330"/>
+          <p:cNvPr id="324" name="Shape 322"/>
           <p:cNvSpPr/>
           <p:nvPr/>
         </p:nvSpPr>
@@ -18080,7 +17802,7 @@
       </p:sp>
       <p:sp>
         <p:nvSpPr>
-          <p:cNvPr id="333" name="Shape 331"/>
+          <p:cNvPr id="325" name="Shape 323"/>
           <p:cNvSpPr/>
           <p:nvPr/>
         </p:nvSpPr>
@@ -18114,7 +17836,7 @@
       </p:sp>
       <p:sp>
         <p:nvSpPr>
-          <p:cNvPr id="334" name="Shape 332"/>
+          <p:cNvPr id="326" name="Shape 324"/>
           <p:cNvSpPr/>
           <p:nvPr/>
         </p:nvSpPr>
@@ -18139,7 +17861,7 @@
       </p:sp>
       <p:sp>
         <p:nvSpPr>
-          <p:cNvPr id="335" name="Text 333"/>
+          <p:cNvPr id="327" name="Text 325"/>
           <p:cNvSpPr/>
           <p:nvPr/>
         </p:nvSpPr>
@@ -18180,7 +17902,7 @@
       </p:sp>
       <p:sp>
         <p:nvSpPr>
-          <p:cNvPr id="336" name="Text 334"/>
+          <p:cNvPr id="328" name="Text 326"/>
           <p:cNvSpPr/>
           <p:nvPr/>
         </p:nvSpPr>
@@ -18221,7 +17943,7 @@
       </p:sp>
       <p:sp>
         <p:nvSpPr>
-          <p:cNvPr id="337" name="Text 335"/>
+          <p:cNvPr id="329" name="Text 327"/>
           <p:cNvSpPr/>
           <p:nvPr/>
         </p:nvSpPr>
@@ -18262,7 +17984,7 @@
       </p:sp>
       <p:sp>
         <p:nvSpPr>
-          <p:cNvPr id="338" name="Shape 336"/>
+          <p:cNvPr id="330" name="Shape 328"/>
           <p:cNvSpPr/>
           <p:nvPr/>
         </p:nvSpPr>
@@ -18296,7 +18018,7 @@
       </p:sp>
       <p:sp>
         <p:nvSpPr>
-          <p:cNvPr id="339" name="Shape 337"/>
+          <p:cNvPr id="331" name="Shape 329"/>
           <p:cNvSpPr/>
           <p:nvPr/>
         </p:nvSpPr>
@@ -18321,7 +18043,7 @@
       </p:sp>
       <p:sp>
         <p:nvSpPr>
-          <p:cNvPr id="340" name="Text 338"/>
+          <p:cNvPr id="332" name="Text 330"/>
           <p:cNvSpPr/>
           <p:nvPr/>
         </p:nvSpPr>
@@ -18362,7 +18084,7 @@
       </p:sp>
       <p:sp>
         <p:nvSpPr>
-          <p:cNvPr id="341" name="Text 339"/>
+          <p:cNvPr id="333" name="Text 331"/>
           <p:cNvSpPr/>
           <p:nvPr/>
         </p:nvSpPr>
@@ -18403,7 +18125,7 @@
       </p:sp>
       <p:sp>
         <p:nvSpPr>
-          <p:cNvPr id="342" name="Text 340"/>
+          <p:cNvPr id="334" name="Text 332"/>
           <p:cNvSpPr/>
           <p:nvPr/>
         </p:nvSpPr>
@@ -18444,7 +18166,7 @@
       </p:sp>
       <p:sp>
         <p:nvSpPr>
-          <p:cNvPr id="343" name="Shape 341"/>
+          <p:cNvPr id="335" name="Shape 333"/>
           <p:cNvSpPr/>
           <p:nvPr/>
         </p:nvSpPr>
@@ -18478,7 +18200,7 @@
       </p:sp>
       <p:sp>
         <p:nvSpPr>
-          <p:cNvPr id="344" name="Shape 342"/>
+          <p:cNvPr id="336" name="Shape 334"/>
           <p:cNvSpPr/>
           <p:nvPr/>
         </p:nvSpPr>
@@ -18503,7 +18225,7 @@
       </p:sp>
       <p:sp>
         <p:nvSpPr>
-          <p:cNvPr id="345" name="Text 343"/>
+          <p:cNvPr id="337" name="Text 335"/>
           <p:cNvSpPr/>
           <p:nvPr/>
         </p:nvSpPr>
@@ -18544,7 +18266,7 @@
       </p:sp>
       <p:sp>
         <p:nvSpPr>
-          <p:cNvPr id="346" name="Text 344"/>
+          <p:cNvPr id="338" name="Text 336"/>
           <p:cNvSpPr/>
           <p:nvPr/>
         </p:nvSpPr>
@@ -18585,7 +18307,7 @@
       </p:sp>
       <p:sp>
         <p:nvSpPr>
-          <p:cNvPr id="347" name="Text 345"/>
+          <p:cNvPr id="339" name="Text 337"/>
           <p:cNvSpPr/>
           <p:nvPr/>
         </p:nvSpPr>
@@ -18626,7 +18348,7 @@
       </p:sp>
       <p:sp>
         <p:nvSpPr>
-          <p:cNvPr id="348" name="Shape 346"/>
+          <p:cNvPr id="340" name="Shape 338"/>
           <p:cNvSpPr/>
           <p:nvPr/>
         </p:nvSpPr>
@@ -18660,7 +18382,7 @@
       </p:sp>
       <p:sp>
         <p:nvSpPr>
-          <p:cNvPr id="349" name="Shape 347"/>
+          <p:cNvPr id="341" name="Shape 339"/>
           <p:cNvSpPr/>
           <p:nvPr/>
         </p:nvSpPr>
@@ -18685,7 +18407,7 @@
       </p:sp>
       <p:sp>
         <p:nvSpPr>
-          <p:cNvPr id="350" name="Text 348"/>
+          <p:cNvPr id="342" name="Text 340"/>
           <p:cNvSpPr/>
           <p:nvPr/>
         </p:nvSpPr>
@@ -18726,7 +18448,7 @@
       </p:sp>
       <p:sp>
         <p:nvSpPr>
-          <p:cNvPr id="351" name="Text 349"/>
+          <p:cNvPr id="343" name="Text 341"/>
           <p:cNvSpPr/>
           <p:nvPr/>
         </p:nvSpPr>
@@ -18767,7 +18489,7 @@
       </p:sp>
       <p:sp>
         <p:nvSpPr>
-          <p:cNvPr id="352" name="Text 350"/>
+          <p:cNvPr id="344" name="Text 342"/>
           <p:cNvSpPr/>
           <p:nvPr/>
         </p:nvSpPr>
@@ -18808,7 +18530,7 @@
       </p:sp>
       <p:sp>
         <p:nvSpPr>
-          <p:cNvPr id="353" name="Shape 351"/>
+          <p:cNvPr id="345" name="Shape 343"/>
           <p:cNvSpPr/>
           <p:nvPr/>
         </p:nvSpPr>
@@ -18842,7 +18564,7 @@
       </p:sp>
       <p:sp>
         <p:nvSpPr>
-          <p:cNvPr id="354" name="Shape 352"/>
+          <p:cNvPr id="346" name="Shape 344"/>
           <p:cNvSpPr/>
           <p:nvPr/>
         </p:nvSpPr>
@@ -18867,7 +18589,7 @@
       </p:sp>
       <p:sp>
         <p:nvSpPr>
-          <p:cNvPr id="355" name="Text 353"/>
+          <p:cNvPr id="347" name="Text 345"/>
           <p:cNvSpPr/>
           <p:nvPr/>
         </p:nvSpPr>
@@ -18908,7 +18630,7 @@
       </p:sp>
       <p:sp>
         <p:nvSpPr>
-          <p:cNvPr id="356" name="Text 354"/>
+          <p:cNvPr id="348" name="Text 346"/>
           <p:cNvSpPr/>
           <p:nvPr/>
         </p:nvSpPr>
@@ -18949,7 +18671,7 @@
       </p:sp>
       <p:sp>
         <p:nvSpPr>
-          <p:cNvPr id="357" name="Text 355"/>
+          <p:cNvPr id="349" name="Text 347"/>
           <p:cNvSpPr/>
           <p:nvPr/>
         </p:nvSpPr>

--- a/ufwl-timeline/UFWL_Presentation_EN.pptx
+++ b/ufwl-timeline/UFWL_Presentation_EN.pptx
@@ -12080,7 +12080,7 @@
         <p:spPr>
           <a:xfrm>
             <a:off x="365760" y="2240280"/>
-            <a:ext cx="11460175" cy="274320"/>
+            <a:ext cx="11460175" cy="268986"/>
           </a:xfrm>
           <a:prstGeom prst="rect">
             <a:avLst/>
@@ -12104,7 +12104,7 @@
         </p:nvSpPr>
         <p:spPr>
           <a:xfrm>
-            <a:off x="438912" y="2258568"/>
+            <a:off x="438912" y="2255901"/>
             <a:ext cx="237744" cy="237744"/>
           </a:xfrm>
           <a:prstGeom prst="ellipse">
@@ -12113,6 +12113,277 @@
           <a:solidFill>
             <a:srgbClr val="C8503F"/>
           </a:solidFill>
+          <a:ln w="19050">
+            <a:solidFill>
+              <a:srgbClr val="222222"/>
+            </a:solidFill>
+            <a:prstDash val="solid"/>
+          </a:ln>
+        </p:spPr>
+      </p:sp>
+      <p:sp>
+        <p:nvSpPr>
+          <p:cNvPr id="161" name="Text 159"/>
+          <p:cNvSpPr/>
+          <p:nvPr/>
+        </p:nvSpPr>
+        <p:spPr>
+          <a:xfrm>
+            <a:off x="365760" y="2240280"/>
+            <a:ext cx="384048" cy="268986"/>
+          </a:xfrm>
+          <a:prstGeom prst="rect">
+            <a:avLst/>
+          </a:prstGeom>
+          <a:noFill/>
+          <a:ln/>
+        </p:spPr>
+        <p:txBody>
+          <a:bodyPr wrap="square" lIns="0" tIns="0" rIns="0" bIns="0" rtlCol="0" anchor="ctr">
+            <a:normAutofit/>
+          </a:bodyPr>
+          <a:lstStyle/>
+          <a:p>
+            <a:pPr algn="ctr" indent="0" marL="0">
+              <a:buNone/>
+            </a:pPr>
+            <a:r>
+              <a:rPr lang="en-US" altLang="en-US" sz="850" b="1" dirty="0">
+                <a:solidFill>
+                  <a:srgbClr val="FFFFFF"/>
+                </a:solidFill>
+                <a:latin typeface="Calibri" pitchFamily="34" charset="0"/>
+                <a:ea typeface="Calibri" pitchFamily="34" charset="-122"/>
+                <a:cs typeface="Calibri" pitchFamily="34" charset="-120"/>
+              </a:rPr>
+              <a:t>A</a:t>
+            </a:r>
+            <a:endParaRPr lang="en-US" sz="850" dirty="0"/>
+          </a:p>
+        </p:txBody>
+      </p:sp>
+      <p:sp>
+        <p:nvSpPr>
+          <p:cNvPr id="162" name="Text 160"/>
+          <p:cNvSpPr/>
+          <p:nvPr/>
+        </p:nvSpPr>
+        <p:spPr>
+          <a:xfrm>
+            <a:off x="822960" y="2240280"/>
+            <a:ext cx="2606040" cy="268986"/>
+          </a:xfrm>
+          <a:prstGeom prst="rect">
+            <a:avLst/>
+          </a:prstGeom>
+          <a:noFill/>
+          <a:ln/>
+        </p:spPr>
+        <p:txBody>
+          <a:bodyPr wrap="square" lIns="0" tIns="0" rIns="0" bIns="0" rtlCol="0" anchor="ctr">
+            <a:normAutofit/>
+          </a:bodyPr>
+          <a:lstStyle/>
+          <a:p>
+            <a:pPr algn="l" indent="0" marL="0">
+              <a:buNone/>
+            </a:pPr>
+            <a:r>
+              <a:rPr lang="en-US" altLang="en-US" sz="750" b="1" dirty="0">
+                <a:solidFill>
+                  <a:srgbClr val="222222"/>
+                </a:solidFill>
+                <a:latin typeface="Calibri" pitchFamily="34" charset="0"/>
+                <a:ea typeface="Calibri" pitchFamily="34" charset="-122"/>
+                <a:cs typeface="Calibri" pitchFamily="34" charset="-120"/>
+              </a:rPr>
+              <a:t>Shoring system installation</a:t>
+            </a:r>
+            <a:endParaRPr lang="en-US" sz="750" dirty="0"/>
+          </a:p>
+        </p:txBody>
+      </p:sp>
+      <p:sp>
+        <p:nvSpPr>
+          <p:cNvPr id="163" name="Text 161"/>
+          <p:cNvSpPr/>
+          <p:nvPr/>
+        </p:nvSpPr>
+        <p:spPr>
+          <a:xfrm>
+            <a:off x="3447288" y="2240280"/>
+            <a:ext cx="777240" cy="268986"/>
+          </a:xfrm>
+          <a:prstGeom prst="rect">
+            <a:avLst/>
+          </a:prstGeom>
+          <a:noFill/>
+          <a:ln/>
+        </p:spPr>
+        <p:txBody>
+          <a:bodyPr wrap="square" lIns="0" tIns="0" rIns="0" bIns="0" rtlCol="0" anchor="ctr">
+            <a:normAutofit/>
+          </a:bodyPr>
+          <a:lstStyle/>
+          <a:p>
+            <a:pPr algn="ctr" indent="0" marL="0">
+              <a:buNone/>
+            </a:pPr>
+            <a:r>
+              <a:rPr lang="en-US" altLang="en-US" sz="700" dirty="0">
+                <a:solidFill>
+                  <a:srgbClr val="444444"/>
+                </a:solidFill>
+                <a:latin typeface="Calibri" pitchFamily="34" charset="0"/>
+                <a:ea typeface="Calibri" pitchFamily="34" charset="-122"/>
+                <a:cs typeface="Calibri" pitchFamily="34" charset="-120"/>
+              </a:rPr>
+              <a:t>—</a:t>
+            </a:r>
+            <a:endParaRPr lang="en-US" sz="700" dirty="0"/>
+          </a:p>
+        </p:txBody>
+      </p:sp>
+      <p:sp>
+        <p:nvSpPr>
+          <p:cNvPr id="164" name="Text 162"/>
+          <p:cNvSpPr/>
+          <p:nvPr/>
+        </p:nvSpPr>
+        <p:spPr>
+          <a:xfrm>
+            <a:off x="4224528" y="2240280"/>
+            <a:ext cx="502920" cy="268986"/>
+          </a:xfrm>
+          <a:prstGeom prst="rect">
+            <a:avLst/>
+          </a:prstGeom>
+          <a:noFill/>
+          <a:ln/>
+        </p:spPr>
+        <p:txBody>
+          <a:bodyPr wrap="square" lIns="0" tIns="0" rIns="0" bIns="0" rtlCol="0" anchor="ctr">
+            <a:normAutofit/>
+          </a:bodyPr>
+          <a:lstStyle/>
+          <a:p>
+            <a:pPr algn="ctr" indent="0" marL="0">
+              <a:buNone/>
+            </a:pPr>
+            <a:r>
+              <a:rPr lang="en-US" altLang="en-US" sz="900" b="1" dirty="0">
+                <a:solidFill>
+                  <a:srgbClr val="222222"/>
+                </a:solidFill>
+                <a:latin typeface="Calibri" pitchFamily="34" charset="0"/>
+                <a:ea typeface="Calibri" pitchFamily="34" charset="-122"/>
+                <a:cs typeface="Calibri" pitchFamily="34" charset="-120"/>
+              </a:rPr>
+              <a:t>4</a:t>
+            </a:r>
+            <a:endParaRPr lang="en-US" sz="900" dirty="0"/>
+          </a:p>
+        </p:txBody>
+      </p:sp>
+      <p:sp>
+        <p:nvSpPr>
+          <p:cNvPr id="165" name="Text 163"/>
+          <p:cNvSpPr/>
+          <p:nvPr/>
+        </p:nvSpPr>
+        <p:spPr>
+          <a:xfrm>
+            <a:off x="4727448" y="2240280"/>
+            <a:ext cx="658368" cy="268986"/>
+          </a:xfrm>
+          <a:prstGeom prst="rect">
+            <a:avLst/>
+          </a:prstGeom>
+          <a:noFill/>
+          <a:ln/>
+        </p:spPr>
+        <p:txBody>
+          <a:bodyPr wrap="square" lIns="0" tIns="0" rIns="0" bIns="0" rtlCol="0" anchor="ctr">
+            <a:normAutofit/>
+          </a:bodyPr>
+          <a:lstStyle/>
+          <a:p>
+            <a:pPr algn="ctr" indent="0" marL="0">
+              <a:buNone/>
+            </a:pPr>
+            <a:r>
+              <a:rPr lang="en-US" altLang="en-US" sz="700" b="1" dirty="0">
+                <a:solidFill>
+                  <a:srgbClr val="222222"/>
+                </a:solidFill>
+                <a:latin typeface="Calibri" pitchFamily="34" charset="0"/>
+                <a:ea typeface="Calibri" pitchFamily="34" charset="-122"/>
+                <a:cs typeface="Calibri" pitchFamily="34" charset="-120"/>
+              </a:rPr>
+              <a:t>22 Oct</a:t>
+            </a:r>
+            <a:endParaRPr lang="en-US" sz="700" dirty="0"/>
+          </a:p>
+        </p:txBody>
+      </p:sp>
+      <p:sp>
+        <p:nvSpPr>
+          <p:cNvPr id="166" name="Text 164"/>
+          <p:cNvSpPr/>
+          <p:nvPr/>
+        </p:nvSpPr>
+        <p:spPr>
+          <a:xfrm>
+            <a:off x="5385816" y="2240280"/>
+            <a:ext cx="658368" cy="268986"/>
+          </a:xfrm>
+          <a:prstGeom prst="rect">
+            <a:avLst/>
+          </a:prstGeom>
+          <a:noFill/>
+          <a:ln/>
+        </p:spPr>
+        <p:txBody>
+          <a:bodyPr wrap="square" lIns="0" tIns="0" rIns="0" bIns="0" rtlCol="0" anchor="ctr">
+            <a:normAutofit/>
+          </a:bodyPr>
+          <a:lstStyle/>
+          <a:p>
+            <a:pPr algn="ctr" indent="0" marL="0">
+              <a:buNone/>
+            </a:pPr>
+            <a:r>
+              <a:rPr lang="en-US" altLang="en-US" sz="700" b="1" dirty="0">
+                <a:solidFill>
+                  <a:srgbClr val="222222"/>
+                </a:solidFill>
+                <a:latin typeface="Calibri" pitchFamily="34" charset="0"/>
+                <a:ea typeface="Calibri" pitchFamily="34" charset="-122"/>
+                <a:cs typeface="Calibri" pitchFamily="34" charset="-120"/>
+              </a:rPr>
+              <a:t>26 Oct</a:t>
+            </a:r>
+            <a:endParaRPr lang="en-US" sz="700" dirty="0"/>
+          </a:p>
+        </p:txBody>
+      </p:sp>
+      <p:sp>
+        <p:nvSpPr>
+          <p:cNvPr id="167" name="Shape 165"/>
+          <p:cNvSpPr/>
+          <p:nvPr/>
+        </p:nvSpPr>
+        <p:spPr>
+          <a:xfrm>
+            <a:off x="7404596" y="2315337"/>
+            <a:ext cx="850258" cy="64008"/>
+          </a:xfrm>
+          <a:prstGeom prst="rect">
+            <a:avLst/>
+          </a:prstGeom>
+          <a:solidFill>
+            <a:srgbClr val="C8503F"/>
+          </a:solidFill>
           <a:ln w="12700">
             <a:solidFill>
               <a:srgbClr val="C8503F"/>
@@ -12123,55 +12394,64 @@
       </p:sp>
       <p:sp>
         <p:nvSpPr>
-          <p:cNvPr id="161" name="Text 159"/>
-          <p:cNvSpPr/>
-          <p:nvPr/>
-        </p:nvSpPr>
-        <p:spPr>
-          <a:xfrm>
-            <a:off x="365760" y="2240280"/>
-            <a:ext cx="384048" cy="274320"/>
-          </a:xfrm>
-          <a:prstGeom prst="rect">
-            <a:avLst/>
-          </a:prstGeom>
-          <a:noFill/>
-          <a:ln/>
-        </p:spPr>
-        <p:txBody>
-          <a:bodyPr wrap="square" lIns="0" tIns="0" rIns="0" bIns="0" rtlCol="0" anchor="ctr">
-            <a:normAutofit/>
-          </a:bodyPr>
-          <a:lstStyle/>
-          <a:p>
-            <a:pPr algn="ctr" indent="0" marL="0">
-              <a:buNone/>
-            </a:pPr>
-            <a:r>
-              <a:rPr lang="en-US" altLang="en-US" sz="900" b="1" dirty="0">
-                <a:solidFill>
-                  <a:srgbClr val="FFFFFF"/>
-                </a:solidFill>
-                <a:latin typeface="Calibri" pitchFamily="34" charset="0"/>
-                <a:ea typeface="Calibri" pitchFamily="34" charset="-122"/>
-                <a:cs typeface="Calibri" pitchFamily="34" charset="-120"/>
-              </a:rPr>
-              <a:t>⟷</a:t>
-            </a:r>
-            <a:endParaRPr lang="en-US" sz="900" dirty="0"/>
-          </a:p>
-        </p:txBody>
-      </p:sp>
-      <p:sp>
-        <p:nvSpPr>
-          <p:cNvPr id="162" name="Text 160"/>
-          <p:cNvSpPr/>
-          <p:nvPr/>
-        </p:nvSpPr>
-        <p:spPr>
-          <a:xfrm>
-            <a:off x="822960" y="2240280"/>
-            <a:ext cx="2606040" cy="274320"/>
+          <p:cNvPr id="168" name="Shape 166"/>
+          <p:cNvSpPr/>
+          <p:nvPr/>
+        </p:nvSpPr>
+        <p:spPr>
+          <a:xfrm flipV="1">
+            <a:off x="7404596" y="2379345"/>
+            <a:ext cx="64008" cy="54864"/>
+          </a:xfrm>
+          <a:prstGeom prst="triangle">
+            <a:avLst/>
+          </a:prstGeom>
+          <a:solidFill>
+            <a:srgbClr val="C8503F"/>
+          </a:solidFill>
+          <a:ln w="12700">
+            <a:solidFill>
+              <a:srgbClr val="C8503F"/>
+            </a:solidFill>
+            <a:prstDash val="solid"/>
+          </a:ln>
+        </p:spPr>
+      </p:sp>
+      <p:sp>
+        <p:nvSpPr>
+          <p:cNvPr id="169" name="Shape 167"/>
+          <p:cNvSpPr/>
+          <p:nvPr/>
+        </p:nvSpPr>
+        <p:spPr>
+          <a:xfrm flipV="1">
+            <a:off x="8190846" y="2379345"/>
+            <a:ext cx="64008" cy="54864"/>
+          </a:xfrm>
+          <a:prstGeom prst="triangle">
+            <a:avLst/>
+          </a:prstGeom>
+          <a:solidFill>
+            <a:srgbClr val="C8503F"/>
+          </a:solidFill>
+          <a:ln w="12700">
+            <a:solidFill>
+              <a:srgbClr val="C8503F"/>
+            </a:solidFill>
+            <a:prstDash val="solid"/>
+          </a:ln>
+        </p:spPr>
+      </p:sp>
+      <p:sp>
+        <p:nvSpPr>
+          <p:cNvPr id="170" name="Text 168"/>
+          <p:cNvSpPr/>
+          <p:nvPr/>
+        </p:nvSpPr>
+        <p:spPr>
+          <a:xfrm>
+            <a:off x="8300574" y="2240280"/>
+            <a:ext cx="548640" cy="268986"/>
           </a:xfrm>
           <a:prstGeom prst="rect">
             <a:avLst/>
@@ -12189,227 +12469,36 @@
               <a:buNone/>
             </a:pPr>
             <a:r>
-              <a:rPr lang="en-US" altLang="en-US" sz="850" b="1" dirty="0">
-                <a:solidFill>
-                  <a:srgbClr val="C8503F"/>
-                </a:solidFill>
-                <a:latin typeface="Calibri" pitchFamily="34" charset="0"/>
-                <a:ea typeface="Calibri" pitchFamily="34" charset="-122"/>
-                <a:cs typeface="Calibri" pitchFamily="34" charset="-120"/>
-              </a:rPr>
-              <a:t>Shoring works – total time required</a:t>
-            </a:r>
-            <a:endParaRPr lang="en-US" sz="850" dirty="0"/>
-          </a:p>
-        </p:txBody>
-      </p:sp>
-      <p:sp>
-        <p:nvSpPr>
-          <p:cNvPr id="163" name="Text 161"/>
-          <p:cNvSpPr/>
-          <p:nvPr/>
-        </p:nvSpPr>
-        <p:spPr>
-          <a:xfrm>
-            <a:off x="4224528" y="2240280"/>
-            <a:ext cx="502920" cy="274320"/>
-          </a:xfrm>
-          <a:prstGeom prst="rect">
-            <a:avLst/>
-          </a:prstGeom>
-          <a:noFill/>
-          <a:ln/>
-        </p:spPr>
-        <p:txBody>
-          <a:bodyPr wrap="square" lIns="0" tIns="0" rIns="0" bIns="0" rtlCol="0" anchor="ctr">
-            <a:normAutofit/>
-          </a:bodyPr>
-          <a:lstStyle/>
-          <a:p>
-            <a:pPr algn="ctr" indent="0" marL="0">
-              <a:buNone/>
-            </a:pPr>
-            <a:r>
-              <a:rPr lang="en-US" altLang="en-US" sz="1100" b="1" dirty="0">
-                <a:solidFill>
-                  <a:srgbClr val="222222"/>
-                </a:solidFill>
-                <a:latin typeface="Calibri" pitchFamily="34" charset="0"/>
-                <a:ea typeface="Calibri" pitchFamily="34" charset="-122"/>
-                <a:cs typeface="Calibri" pitchFamily="34" charset="-120"/>
-              </a:rPr>
-              <a:t>4</a:t>
-            </a:r>
-            <a:endParaRPr lang="en-US" sz="1100" dirty="0"/>
-          </a:p>
-        </p:txBody>
-      </p:sp>
-      <p:sp>
-        <p:nvSpPr>
-          <p:cNvPr id="164" name="Text 162"/>
-          <p:cNvSpPr/>
-          <p:nvPr/>
-        </p:nvSpPr>
-        <p:spPr>
-          <a:xfrm>
-            <a:off x="4727448" y="2240280"/>
-            <a:ext cx="658368" cy="274320"/>
-          </a:xfrm>
-          <a:prstGeom prst="rect">
-            <a:avLst/>
-          </a:prstGeom>
-          <a:noFill/>
-          <a:ln/>
-        </p:spPr>
-        <p:txBody>
-          <a:bodyPr wrap="square" lIns="0" tIns="0" rIns="0" bIns="0" rtlCol="0" anchor="ctr">
-            <a:normAutofit/>
-          </a:bodyPr>
-          <a:lstStyle/>
-          <a:p>
-            <a:pPr algn="ctr" indent="0" marL="0">
-              <a:buNone/>
-            </a:pPr>
-            <a:r>
-              <a:rPr lang="en-US" altLang="en-US" sz="850" b="1" dirty="0">
-                <a:solidFill>
-                  <a:srgbClr val="222222"/>
-                </a:solidFill>
-                <a:latin typeface="Calibri" pitchFamily="34" charset="0"/>
-                <a:ea typeface="Calibri" pitchFamily="34" charset="-122"/>
-                <a:cs typeface="Calibri" pitchFamily="34" charset="-120"/>
-              </a:rPr>
-              <a:t>22 Oct</a:t>
-            </a:r>
-            <a:endParaRPr lang="en-US" sz="850" dirty="0"/>
-          </a:p>
-        </p:txBody>
-      </p:sp>
-      <p:sp>
-        <p:nvSpPr>
-          <p:cNvPr id="165" name="Text 163"/>
-          <p:cNvSpPr/>
-          <p:nvPr/>
-        </p:nvSpPr>
-        <p:spPr>
-          <a:xfrm>
-            <a:off x="5385816" y="2240280"/>
-            <a:ext cx="658368" cy="274320"/>
-          </a:xfrm>
-          <a:prstGeom prst="rect">
-            <a:avLst/>
-          </a:prstGeom>
-          <a:noFill/>
-          <a:ln/>
-        </p:spPr>
-        <p:txBody>
-          <a:bodyPr wrap="square" lIns="0" tIns="0" rIns="0" bIns="0" rtlCol="0" anchor="ctr">
-            <a:normAutofit/>
-          </a:bodyPr>
-          <a:lstStyle/>
-          <a:p>
-            <a:pPr algn="ctr" indent="0" marL="0">
-              <a:buNone/>
-            </a:pPr>
-            <a:r>
-              <a:rPr lang="en-US" altLang="en-US" sz="850" b="1" dirty="0">
-                <a:solidFill>
-                  <a:srgbClr val="222222"/>
-                </a:solidFill>
-                <a:latin typeface="Calibri" pitchFamily="34" charset="0"/>
-                <a:ea typeface="Calibri" pitchFamily="34" charset="-122"/>
-                <a:cs typeface="Calibri" pitchFamily="34" charset="-120"/>
-              </a:rPr>
-              <a:t>26 Oct</a:t>
-            </a:r>
-            <a:endParaRPr lang="en-US" sz="850" dirty="0"/>
-          </a:p>
-        </p:txBody>
-      </p:sp>
-      <p:sp>
-        <p:nvSpPr>
-          <p:cNvPr id="166" name="Shape 164"/>
-          <p:cNvSpPr/>
-          <p:nvPr/>
-        </p:nvSpPr>
-        <p:spPr>
-          <a:xfrm>
-            <a:off x="7404596" y="2276856"/>
-            <a:ext cx="850258" cy="201168"/>
-          </a:xfrm>
-          <a:prstGeom prst="roundRect">
-            <a:avLst>
-              <a:gd name="adj" fmla="val 18182"/>
-            </a:avLst>
-          </a:prstGeom>
-          <a:solidFill>
-            <a:srgbClr val="C8503F"/>
-          </a:solidFill>
-          <a:ln w="12700">
-            <a:solidFill>
-              <a:srgbClr val="C8503F"/>
-            </a:solidFill>
-            <a:prstDash val="solid"/>
-          </a:ln>
-        </p:spPr>
-      </p:sp>
-      <p:sp>
-        <p:nvSpPr>
-          <p:cNvPr id="167" name="Text 165"/>
-          <p:cNvSpPr/>
-          <p:nvPr/>
-        </p:nvSpPr>
-        <p:spPr>
-          <a:xfrm>
-            <a:off x="7404596" y="2276856"/>
-            <a:ext cx="850258" cy="201168"/>
-          </a:xfrm>
-          <a:prstGeom prst="rect">
-            <a:avLst/>
-          </a:prstGeom>
-          <a:noFill/>
-          <a:ln/>
-        </p:spPr>
-        <p:txBody>
-          <a:bodyPr wrap="square" lIns="0" tIns="0" rIns="0" bIns="0" rtlCol="0" anchor="ctr">
-            <a:normAutofit/>
-          </a:bodyPr>
-          <a:lstStyle/>
-          <a:p>
-            <a:pPr algn="ctr" indent="0" marL="0">
-              <a:buNone/>
-            </a:pPr>
-            <a:r>
-              <a:rPr lang="en-US" altLang="en-US" sz="800" b="1" dirty="0">
-                <a:solidFill>
-                  <a:srgbClr val="FFFFFF"/>
-                </a:solidFill>
-                <a:latin typeface="Calibri" pitchFamily="34" charset="0"/>
-                <a:ea typeface="Calibri" pitchFamily="34" charset="-122"/>
-                <a:cs typeface="Calibri" pitchFamily="34" charset="-120"/>
-              </a:rPr>
-              <a:t>4 working days</a:t>
-            </a:r>
-            <a:endParaRPr lang="en-US" sz="800" dirty="0"/>
-          </a:p>
-        </p:txBody>
-      </p:sp>
-      <p:sp>
-        <p:nvSpPr>
-          <p:cNvPr id="168" name="Shape 166"/>
-          <p:cNvSpPr/>
-          <p:nvPr/>
-        </p:nvSpPr>
-        <p:spPr>
-          <a:xfrm>
-            <a:off x="365760" y="2514600"/>
-            <a:ext cx="11460175" cy="274320"/>
-          </a:xfrm>
-          <a:prstGeom prst="rect">
-            <a:avLst/>
-          </a:prstGeom>
-          <a:solidFill>
-            <a:srgbClr val="FFFFFF"/>
+              <a:rPr lang="en-US" altLang="en-US" sz="750" b="1" dirty="0">
+                <a:solidFill>
+                  <a:srgbClr val="3D3935"/>
+                </a:solidFill>
+                <a:latin typeface="Calibri" pitchFamily="34" charset="0"/>
+                <a:ea typeface="Calibri" pitchFamily="34" charset="-122"/>
+                <a:cs typeface="Calibri" pitchFamily="34" charset="-120"/>
+              </a:rPr>
+              <a:t>4 d</a:t>
+            </a:r>
+            <a:endParaRPr lang="en-US" sz="750" dirty="0"/>
+          </a:p>
+        </p:txBody>
+      </p:sp>
+      <p:sp>
+        <p:nvSpPr>
+          <p:cNvPr id="171" name="Shape 169"/>
+          <p:cNvSpPr/>
+          <p:nvPr/>
+        </p:nvSpPr>
+        <p:spPr>
+          <a:xfrm>
+            <a:off x="365760" y="2509266"/>
+            <a:ext cx="11460175" cy="268986"/>
+          </a:xfrm>
+          <a:prstGeom prst="rect">
+            <a:avLst/>
+          </a:prstGeom>
+          <a:solidFill>
+            <a:srgbClr val="F6F9FA"/>
           </a:solidFill>
           <a:ln w="6350">
             <a:solidFill>
@@ -12421,748 +12510,13 @@
       </p:sp>
       <p:sp>
         <p:nvSpPr>
-          <p:cNvPr id="169" name="Shape 167"/>
-          <p:cNvSpPr/>
-          <p:nvPr/>
-        </p:nvSpPr>
-        <p:spPr>
-          <a:xfrm>
-            <a:off x="438912" y="2532888"/>
-            <a:ext cx="237744" cy="237744"/>
-          </a:xfrm>
-          <a:prstGeom prst="ellipse">
-            <a:avLst/>
-          </a:prstGeom>
-          <a:solidFill>
-            <a:srgbClr val="6C4AB6"/>
-          </a:solidFill>
-          <a:ln w="12700">
-            <a:solidFill>
-              <a:srgbClr val="6C4AB6"/>
-            </a:solidFill>
-            <a:prstDash val="solid"/>
-          </a:ln>
-        </p:spPr>
-      </p:sp>
-      <p:sp>
-        <p:nvSpPr>
-          <p:cNvPr id="170" name="Text 168"/>
-          <p:cNvSpPr/>
-          <p:nvPr/>
-        </p:nvSpPr>
-        <p:spPr>
-          <a:xfrm>
-            <a:off x="365760" y="2514600"/>
-            <a:ext cx="384048" cy="274320"/>
-          </a:xfrm>
-          <a:prstGeom prst="rect">
-            <a:avLst/>
-          </a:prstGeom>
-          <a:noFill/>
-          <a:ln/>
-        </p:spPr>
-        <p:txBody>
-          <a:bodyPr wrap="square" lIns="0" tIns="0" rIns="0" bIns="0" rtlCol="0" anchor="ctr">
-            <a:normAutofit/>
-          </a:bodyPr>
-          <a:lstStyle/>
-          <a:p>
-            <a:pPr algn="ctr" indent="0" marL="0">
-              <a:buNone/>
-            </a:pPr>
-            <a:r>
-              <a:rPr lang="en-US" altLang="en-US" sz="900" b="1" dirty="0">
-                <a:solidFill>
-                  <a:srgbClr val="FFFFFF"/>
-                </a:solidFill>
-                <a:latin typeface="Calibri" pitchFamily="34" charset="0"/>
-                <a:ea typeface="Calibri" pitchFamily="34" charset="-122"/>
-                <a:cs typeface="Calibri" pitchFamily="34" charset="-120"/>
-              </a:rPr>
-              <a:t>⟷</a:t>
-            </a:r>
-            <a:endParaRPr lang="en-US" sz="900" dirty="0"/>
-          </a:p>
-        </p:txBody>
-      </p:sp>
-      <p:sp>
-        <p:nvSpPr>
-          <p:cNvPr id="171" name="Text 169"/>
-          <p:cNvSpPr/>
-          <p:nvPr/>
-        </p:nvSpPr>
-        <p:spPr>
-          <a:xfrm>
-            <a:off x="822960" y="2514600"/>
-            <a:ext cx="2606040" cy="274320"/>
-          </a:xfrm>
-          <a:prstGeom prst="rect">
-            <a:avLst/>
-          </a:prstGeom>
-          <a:noFill/>
-          <a:ln/>
-        </p:spPr>
-        <p:txBody>
-          <a:bodyPr wrap="square" lIns="0" tIns="0" rIns="0" bIns="0" rtlCol="0" anchor="ctr">
-            <a:normAutofit/>
-          </a:bodyPr>
-          <a:lstStyle/>
-          <a:p>
-            <a:pPr algn="l" indent="0" marL="0">
-              <a:buNone/>
-            </a:pPr>
-            <a:r>
-              <a:rPr lang="en-US" altLang="en-US" sz="850" b="1" dirty="0">
-                <a:solidFill>
-                  <a:srgbClr val="6C4AB6"/>
-                </a:solidFill>
-                <a:latin typeface="Calibri" pitchFamily="34" charset="0"/>
-                <a:ea typeface="Calibri" pitchFamily="34" charset="-122"/>
-                <a:cs typeface="Calibri" pitchFamily="34" charset="-120"/>
-              </a:rPr>
-              <a:t>Concrete works to backfilling – total time required</a:t>
-            </a:r>
-            <a:endParaRPr lang="en-US" sz="850" dirty="0"/>
-          </a:p>
-        </p:txBody>
-      </p:sp>
-      <p:sp>
-        <p:nvSpPr>
-          <p:cNvPr id="172" name="Text 170"/>
-          <p:cNvSpPr/>
-          <p:nvPr/>
-        </p:nvSpPr>
-        <p:spPr>
-          <a:xfrm>
-            <a:off x="4224528" y="2514600"/>
-            <a:ext cx="502920" cy="274320"/>
-          </a:xfrm>
-          <a:prstGeom prst="rect">
-            <a:avLst/>
-          </a:prstGeom>
-          <a:noFill/>
-          <a:ln/>
-        </p:spPr>
-        <p:txBody>
-          <a:bodyPr wrap="square" lIns="0" tIns="0" rIns="0" bIns="0" rtlCol="0" anchor="ctr">
-            <a:normAutofit/>
-          </a:bodyPr>
-          <a:lstStyle/>
-          <a:p>
-            <a:pPr algn="ctr" indent="0" marL="0">
-              <a:buNone/>
-            </a:pPr>
-            <a:r>
-              <a:rPr lang="en-US" altLang="en-US" sz="1100" b="1" dirty="0">
-                <a:solidFill>
-                  <a:srgbClr val="222222"/>
-                </a:solidFill>
-                <a:latin typeface="Calibri" pitchFamily="34" charset="0"/>
-                <a:ea typeface="Calibri" pitchFamily="34" charset="-122"/>
-                <a:cs typeface="Calibri" pitchFamily="34" charset="-120"/>
-              </a:rPr>
-              <a:t>16</a:t>
-            </a:r>
-            <a:endParaRPr lang="en-US" sz="1100" dirty="0"/>
-          </a:p>
-        </p:txBody>
-      </p:sp>
-      <p:sp>
-        <p:nvSpPr>
-          <p:cNvPr id="173" name="Text 171"/>
-          <p:cNvSpPr/>
-          <p:nvPr/>
-        </p:nvSpPr>
-        <p:spPr>
-          <a:xfrm>
-            <a:off x="4727448" y="2514600"/>
-            <a:ext cx="658368" cy="274320"/>
-          </a:xfrm>
-          <a:prstGeom prst="rect">
-            <a:avLst/>
-          </a:prstGeom>
-          <a:noFill/>
-          <a:ln/>
-        </p:spPr>
-        <p:txBody>
-          <a:bodyPr wrap="square" lIns="0" tIns="0" rIns="0" bIns="0" rtlCol="0" anchor="ctr">
-            <a:normAutofit/>
-          </a:bodyPr>
-          <a:lstStyle/>
-          <a:p>
-            <a:pPr algn="ctr" indent="0" marL="0">
-              <a:buNone/>
-            </a:pPr>
-            <a:r>
-              <a:rPr lang="en-US" altLang="en-US" sz="850" b="1" dirty="0">
-                <a:solidFill>
-                  <a:srgbClr val="222222"/>
-                </a:solidFill>
-                <a:latin typeface="Calibri" pitchFamily="34" charset="0"/>
-                <a:ea typeface="Calibri" pitchFamily="34" charset="-122"/>
-                <a:cs typeface="Calibri" pitchFamily="34" charset="-120"/>
-              </a:rPr>
-              <a:t>27 Oct</a:t>
-            </a:r>
-            <a:endParaRPr lang="en-US" sz="850" dirty="0"/>
-          </a:p>
-        </p:txBody>
-      </p:sp>
-      <p:sp>
-        <p:nvSpPr>
-          <p:cNvPr id="174" name="Text 172"/>
-          <p:cNvSpPr/>
-          <p:nvPr/>
-        </p:nvSpPr>
-        <p:spPr>
-          <a:xfrm>
-            <a:off x="5385816" y="2514600"/>
-            <a:ext cx="658368" cy="274320"/>
-          </a:xfrm>
-          <a:prstGeom prst="rect">
-            <a:avLst/>
-          </a:prstGeom>
-          <a:noFill/>
-          <a:ln/>
-        </p:spPr>
-        <p:txBody>
-          <a:bodyPr wrap="square" lIns="0" tIns="0" rIns="0" bIns="0" rtlCol="0" anchor="ctr">
-            <a:normAutofit/>
-          </a:bodyPr>
-          <a:lstStyle/>
-          <a:p>
-            <a:pPr algn="ctr" indent="0" marL="0">
-              <a:buNone/>
-            </a:pPr>
-            <a:r>
-              <a:rPr lang="en-US" altLang="en-US" sz="850" b="1" dirty="0">
-                <a:solidFill>
-                  <a:srgbClr val="222222"/>
-                </a:solidFill>
-                <a:latin typeface="Calibri" pitchFamily="34" charset="0"/>
-                <a:ea typeface="Calibri" pitchFamily="34" charset="-122"/>
-                <a:cs typeface="Calibri" pitchFamily="34" charset="-120"/>
-              </a:rPr>
-              <a:t>14 Nov</a:t>
-            </a:r>
-            <a:endParaRPr lang="en-US" sz="850" dirty="0"/>
-          </a:p>
-        </p:txBody>
-      </p:sp>
-      <p:sp>
-        <p:nvSpPr>
-          <p:cNvPr id="175" name="Shape 173"/>
-          <p:cNvSpPr/>
-          <p:nvPr/>
-        </p:nvSpPr>
-        <p:spPr>
-          <a:xfrm>
-            <a:off x="8254854" y="2551176"/>
-            <a:ext cx="3230979" cy="201168"/>
-          </a:xfrm>
-          <a:prstGeom prst="roundRect">
-            <a:avLst>
-              <a:gd name="adj" fmla="val 18182"/>
-            </a:avLst>
-          </a:prstGeom>
-          <a:solidFill>
-            <a:srgbClr val="6C4AB6"/>
-          </a:solidFill>
-          <a:ln w="12700">
-            <a:solidFill>
-              <a:srgbClr val="6C4AB6"/>
-            </a:solidFill>
-            <a:prstDash val="solid"/>
-          </a:ln>
-        </p:spPr>
-      </p:sp>
-      <p:sp>
-        <p:nvSpPr>
-          <p:cNvPr id="176" name="Text 174"/>
-          <p:cNvSpPr/>
-          <p:nvPr/>
-        </p:nvSpPr>
-        <p:spPr>
-          <a:xfrm>
-            <a:off x="8254854" y="2551176"/>
-            <a:ext cx="3230979" cy="201168"/>
-          </a:xfrm>
-          <a:prstGeom prst="rect">
-            <a:avLst/>
-          </a:prstGeom>
-          <a:noFill/>
-          <a:ln/>
-        </p:spPr>
-        <p:txBody>
-          <a:bodyPr wrap="square" lIns="0" tIns="0" rIns="0" bIns="0" rtlCol="0" anchor="ctr">
-            <a:normAutofit/>
-          </a:bodyPr>
-          <a:lstStyle/>
-          <a:p>
-            <a:pPr algn="ctr" indent="0" marL="0">
-              <a:buNone/>
-            </a:pPr>
-            <a:r>
-              <a:rPr lang="en-US" altLang="en-US" sz="800" b="1" dirty="0">
-                <a:solidFill>
-                  <a:srgbClr val="FFFFFF"/>
-                </a:solidFill>
-                <a:latin typeface="Calibri" pitchFamily="34" charset="0"/>
-                <a:ea typeface="Calibri" pitchFamily="34" charset="-122"/>
-                <a:cs typeface="Calibri" pitchFamily="34" charset="-120"/>
-              </a:rPr>
-              <a:t>16 working days</a:t>
-            </a:r>
-            <a:endParaRPr lang="en-US" sz="800" dirty="0"/>
-          </a:p>
-        </p:txBody>
-      </p:sp>
-      <p:sp>
-        <p:nvSpPr>
-          <p:cNvPr id="177" name="Shape 175"/>
-          <p:cNvSpPr/>
-          <p:nvPr/>
-        </p:nvSpPr>
-        <p:spPr>
-          <a:xfrm>
-            <a:off x="365760" y="2788920"/>
-            <a:ext cx="11460175" cy="223266"/>
-          </a:xfrm>
-          <a:prstGeom prst="rect">
-            <a:avLst/>
-          </a:prstGeom>
-          <a:solidFill>
-            <a:srgbClr val="FFFFFF"/>
-          </a:solidFill>
-          <a:ln w="6350">
-            <a:solidFill>
-              <a:srgbClr val="DFE6EA"/>
-            </a:solidFill>
-            <a:prstDash val="solid"/>
-          </a:ln>
-        </p:spPr>
-      </p:sp>
-      <p:sp>
-        <p:nvSpPr>
-          <p:cNvPr id="178" name="Shape 176"/>
-          <p:cNvSpPr/>
-          <p:nvPr/>
-        </p:nvSpPr>
-        <p:spPr>
-          <a:xfrm>
-            <a:off x="438912" y="2781681"/>
-            <a:ext cx="237744" cy="237744"/>
-          </a:xfrm>
-          <a:prstGeom prst="ellipse">
-            <a:avLst/>
-          </a:prstGeom>
-          <a:solidFill>
-            <a:srgbClr val="C8503F"/>
-          </a:solidFill>
-          <a:ln w="19050">
-            <a:solidFill>
-              <a:srgbClr val="222222"/>
-            </a:solidFill>
-            <a:prstDash val="solid"/>
-          </a:ln>
-        </p:spPr>
-      </p:sp>
-      <p:sp>
-        <p:nvSpPr>
-          <p:cNvPr id="179" name="Text 177"/>
-          <p:cNvSpPr/>
-          <p:nvPr/>
-        </p:nvSpPr>
-        <p:spPr>
-          <a:xfrm>
-            <a:off x="365760" y="2788920"/>
-            <a:ext cx="384048" cy="223266"/>
-          </a:xfrm>
-          <a:prstGeom prst="rect">
-            <a:avLst/>
-          </a:prstGeom>
-          <a:noFill/>
-          <a:ln/>
-        </p:spPr>
-        <p:txBody>
-          <a:bodyPr wrap="square" lIns="0" tIns="0" rIns="0" bIns="0" rtlCol="0" anchor="ctr">
-            <a:normAutofit/>
-          </a:bodyPr>
-          <a:lstStyle/>
-          <a:p>
-            <a:pPr algn="ctr" indent="0" marL="0">
-              <a:buNone/>
-            </a:pPr>
-            <a:r>
-              <a:rPr lang="en-US" altLang="en-US" sz="850" b="1" dirty="0">
-                <a:solidFill>
-                  <a:srgbClr val="FFFFFF"/>
-                </a:solidFill>
-                <a:latin typeface="Calibri" pitchFamily="34" charset="0"/>
-                <a:ea typeface="Calibri" pitchFamily="34" charset="-122"/>
-                <a:cs typeface="Calibri" pitchFamily="34" charset="-120"/>
-              </a:rPr>
-              <a:t>A</a:t>
-            </a:r>
-            <a:endParaRPr lang="en-US" sz="850" dirty="0"/>
-          </a:p>
-        </p:txBody>
-      </p:sp>
-      <p:sp>
-        <p:nvSpPr>
-          <p:cNvPr id="180" name="Text 178"/>
-          <p:cNvSpPr/>
-          <p:nvPr/>
-        </p:nvSpPr>
-        <p:spPr>
-          <a:xfrm>
-            <a:off x="822960" y="2788920"/>
-            <a:ext cx="2606040" cy="223266"/>
-          </a:xfrm>
-          <a:prstGeom prst="rect">
-            <a:avLst/>
-          </a:prstGeom>
-          <a:noFill/>
-          <a:ln/>
-        </p:spPr>
-        <p:txBody>
-          <a:bodyPr wrap="square" lIns="0" tIns="0" rIns="0" bIns="0" rtlCol="0" anchor="ctr">
-            <a:normAutofit/>
-          </a:bodyPr>
-          <a:lstStyle/>
-          <a:p>
-            <a:pPr algn="l" indent="0" marL="0">
-              <a:buNone/>
-            </a:pPr>
-            <a:r>
-              <a:rPr lang="en-US" altLang="en-US" sz="750" b="1" dirty="0">
-                <a:solidFill>
-                  <a:srgbClr val="222222"/>
-                </a:solidFill>
-                <a:latin typeface="Calibri" pitchFamily="34" charset="0"/>
-                <a:ea typeface="Calibri" pitchFamily="34" charset="-122"/>
-                <a:cs typeface="Calibri" pitchFamily="34" charset="-120"/>
-              </a:rPr>
-              <a:t>Shoring system installation</a:t>
-            </a:r>
-            <a:endParaRPr lang="en-US" sz="750" dirty="0"/>
-          </a:p>
-        </p:txBody>
-      </p:sp>
-      <p:sp>
-        <p:nvSpPr>
-          <p:cNvPr id="181" name="Text 179"/>
-          <p:cNvSpPr/>
-          <p:nvPr/>
-        </p:nvSpPr>
-        <p:spPr>
-          <a:xfrm>
-            <a:off x="3447288" y="2788920"/>
-            <a:ext cx="777240" cy="223266"/>
-          </a:xfrm>
-          <a:prstGeom prst="rect">
-            <a:avLst/>
-          </a:prstGeom>
-          <a:noFill/>
-          <a:ln/>
-        </p:spPr>
-        <p:txBody>
-          <a:bodyPr wrap="square" lIns="0" tIns="0" rIns="0" bIns="0" rtlCol="0" anchor="ctr">
-            <a:normAutofit/>
-          </a:bodyPr>
-          <a:lstStyle/>
-          <a:p>
-            <a:pPr algn="ctr" indent="0" marL="0">
-              <a:buNone/>
-            </a:pPr>
-            <a:r>
-              <a:rPr lang="en-US" altLang="en-US" sz="700" dirty="0">
-                <a:solidFill>
-                  <a:srgbClr val="444444"/>
-                </a:solidFill>
-                <a:latin typeface="Calibri" pitchFamily="34" charset="0"/>
-                <a:ea typeface="Calibri" pitchFamily="34" charset="-122"/>
-                <a:cs typeface="Calibri" pitchFamily="34" charset="-120"/>
-              </a:rPr>
-              <a:t>—</a:t>
-            </a:r>
-            <a:endParaRPr lang="en-US" sz="700" dirty="0"/>
-          </a:p>
-        </p:txBody>
-      </p:sp>
-      <p:sp>
-        <p:nvSpPr>
-          <p:cNvPr id="182" name="Text 180"/>
-          <p:cNvSpPr/>
-          <p:nvPr/>
-        </p:nvSpPr>
-        <p:spPr>
-          <a:xfrm>
-            <a:off x="4224528" y="2788920"/>
-            <a:ext cx="502920" cy="223266"/>
-          </a:xfrm>
-          <a:prstGeom prst="rect">
-            <a:avLst/>
-          </a:prstGeom>
-          <a:noFill/>
-          <a:ln/>
-        </p:spPr>
-        <p:txBody>
-          <a:bodyPr wrap="square" lIns="0" tIns="0" rIns="0" bIns="0" rtlCol="0" anchor="ctr">
-            <a:normAutofit/>
-          </a:bodyPr>
-          <a:lstStyle/>
-          <a:p>
-            <a:pPr algn="ctr" indent="0" marL="0">
-              <a:buNone/>
-            </a:pPr>
-            <a:r>
-              <a:rPr lang="en-US" altLang="en-US" sz="900" b="1" dirty="0">
-                <a:solidFill>
-                  <a:srgbClr val="222222"/>
-                </a:solidFill>
-                <a:latin typeface="Calibri" pitchFamily="34" charset="0"/>
-                <a:ea typeface="Calibri" pitchFamily="34" charset="-122"/>
-                <a:cs typeface="Calibri" pitchFamily="34" charset="-120"/>
-              </a:rPr>
-              <a:t>4</a:t>
-            </a:r>
-            <a:endParaRPr lang="en-US" sz="900" dirty="0"/>
-          </a:p>
-        </p:txBody>
-      </p:sp>
-      <p:sp>
-        <p:nvSpPr>
-          <p:cNvPr id="183" name="Text 181"/>
-          <p:cNvSpPr/>
-          <p:nvPr/>
-        </p:nvSpPr>
-        <p:spPr>
-          <a:xfrm>
-            <a:off x="4727448" y="2788920"/>
-            <a:ext cx="658368" cy="223266"/>
-          </a:xfrm>
-          <a:prstGeom prst="rect">
-            <a:avLst/>
-          </a:prstGeom>
-          <a:noFill/>
-          <a:ln/>
-        </p:spPr>
-        <p:txBody>
-          <a:bodyPr wrap="square" lIns="0" tIns="0" rIns="0" bIns="0" rtlCol="0" anchor="ctr">
-            <a:normAutofit/>
-          </a:bodyPr>
-          <a:lstStyle/>
-          <a:p>
-            <a:pPr algn="ctr" indent="0" marL="0">
-              <a:buNone/>
-            </a:pPr>
-            <a:r>
-              <a:rPr lang="en-US" altLang="en-US" sz="700" b="1" dirty="0">
-                <a:solidFill>
-                  <a:srgbClr val="222222"/>
-                </a:solidFill>
-                <a:latin typeface="Calibri" pitchFamily="34" charset="0"/>
-                <a:ea typeface="Calibri" pitchFamily="34" charset="-122"/>
-                <a:cs typeface="Calibri" pitchFamily="34" charset="-120"/>
-              </a:rPr>
-              <a:t>22 Oct</a:t>
-            </a:r>
-            <a:endParaRPr lang="en-US" sz="700" dirty="0"/>
-          </a:p>
-        </p:txBody>
-      </p:sp>
-      <p:sp>
-        <p:nvSpPr>
-          <p:cNvPr id="184" name="Text 182"/>
-          <p:cNvSpPr/>
-          <p:nvPr/>
-        </p:nvSpPr>
-        <p:spPr>
-          <a:xfrm>
-            <a:off x="5385816" y="2788920"/>
-            <a:ext cx="658368" cy="223266"/>
-          </a:xfrm>
-          <a:prstGeom prst="rect">
-            <a:avLst/>
-          </a:prstGeom>
-          <a:noFill/>
-          <a:ln/>
-        </p:spPr>
-        <p:txBody>
-          <a:bodyPr wrap="square" lIns="0" tIns="0" rIns="0" bIns="0" rtlCol="0" anchor="ctr">
-            <a:normAutofit/>
-          </a:bodyPr>
-          <a:lstStyle/>
-          <a:p>
-            <a:pPr algn="ctr" indent="0" marL="0">
-              <a:buNone/>
-            </a:pPr>
-            <a:r>
-              <a:rPr lang="en-US" altLang="en-US" sz="700" b="1" dirty="0">
-                <a:solidFill>
-                  <a:srgbClr val="222222"/>
-                </a:solidFill>
-                <a:latin typeface="Calibri" pitchFamily="34" charset="0"/>
-                <a:ea typeface="Calibri" pitchFamily="34" charset="-122"/>
-                <a:cs typeface="Calibri" pitchFamily="34" charset="-120"/>
-              </a:rPr>
-              <a:t>26 Oct</a:t>
-            </a:r>
-            <a:endParaRPr lang="en-US" sz="700" dirty="0"/>
-          </a:p>
-        </p:txBody>
-      </p:sp>
-      <p:sp>
-        <p:nvSpPr>
-          <p:cNvPr id="185" name="Shape 183"/>
-          <p:cNvSpPr/>
-          <p:nvPr/>
-        </p:nvSpPr>
-        <p:spPr>
-          <a:xfrm>
-            <a:off x="7404596" y="2841117"/>
-            <a:ext cx="850258" cy="64008"/>
-          </a:xfrm>
-          <a:prstGeom prst="rect">
-            <a:avLst/>
-          </a:prstGeom>
-          <a:solidFill>
-            <a:srgbClr val="C8503F"/>
-          </a:solidFill>
-          <a:ln w="12700">
-            <a:solidFill>
-              <a:srgbClr val="C8503F"/>
-            </a:solidFill>
-            <a:prstDash val="solid"/>
-          </a:ln>
-        </p:spPr>
-      </p:sp>
-      <p:sp>
-        <p:nvSpPr>
-          <p:cNvPr id="186" name="Shape 184"/>
-          <p:cNvSpPr/>
-          <p:nvPr/>
-        </p:nvSpPr>
-        <p:spPr>
-          <a:xfrm flipV="1">
-            <a:off x="7404596" y="2905125"/>
-            <a:ext cx="64008" cy="54864"/>
-          </a:xfrm>
-          <a:prstGeom prst="triangle">
-            <a:avLst/>
-          </a:prstGeom>
-          <a:solidFill>
-            <a:srgbClr val="C8503F"/>
-          </a:solidFill>
-          <a:ln w="12700">
-            <a:solidFill>
-              <a:srgbClr val="C8503F"/>
-            </a:solidFill>
-            <a:prstDash val="solid"/>
-          </a:ln>
-        </p:spPr>
-      </p:sp>
-      <p:sp>
-        <p:nvSpPr>
-          <p:cNvPr id="187" name="Shape 185"/>
-          <p:cNvSpPr/>
-          <p:nvPr/>
-        </p:nvSpPr>
-        <p:spPr>
-          <a:xfrm flipV="1">
-            <a:off x="8190846" y="2905125"/>
-            <a:ext cx="64008" cy="54864"/>
-          </a:xfrm>
-          <a:prstGeom prst="triangle">
-            <a:avLst/>
-          </a:prstGeom>
-          <a:solidFill>
-            <a:srgbClr val="C8503F"/>
-          </a:solidFill>
-          <a:ln w="12700">
-            <a:solidFill>
-              <a:srgbClr val="C8503F"/>
-            </a:solidFill>
-            <a:prstDash val="solid"/>
-          </a:ln>
-        </p:spPr>
-      </p:sp>
-      <p:sp>
-        <p:nvSpPr>
-          <p:cNvPr id="188" name="Text 186"/>
-          <p:cNvSpPr/>
-          <p:nvPr/>
-        </p:nvSpPr>
-        <p:spPr>
-          <a:xfrm>
-            <a:off x="8300574" y="2788920"/>
-            <a:ext cx="548640" cy="223266"/>
-          </a:xfrm>
-          <a:prstGeom prst="rect">
-            <a:avLst/>
-          </a:prstGeom>
-          <a:noFill/>
-          <a:ln/>
-        </p:spPr>
-        <p:txBody>
-          <a:bodyPr wrap="square" lIns="0" tIns="0" rIns="0" bIns="0" rtlCol="0" anchor="ctr">
-            <a:normAutofit/>
-          </a:bodyPr>
-          <a:lstStyle/>
-          <a:p>
-            <a:pPr algn="l" indent="0" marL="0">
-              <a:buNone/>
-            </a:pPr>
-            <a:r>
-              <a:rPr lang="en-US" altLang="en-US" sz="750" b="1" dirty="0">
-                <a:solidFill>
-                  <a:srgbClr val="3D3935"/>
-                </a:solidFill>
-                <a:latin typeface="Calibri" pitchFamily="34" charset="0"/>
-                <a:ea typeface="Calibri" pitchFamily="34" charset="-122"/>
-                <a:cs typeface="Calibri" pitchFamily="34" charset="-120"/>
-              </a:rPr>
-              <a:t>4 d</a:t>
-            </a:r>
-            <a:endParaRPr lang="en-US" sz="750" dirty="0"/>
-          </a:p>
-        </p:txBody>
-      </p:sp>
-      <p:sp>
-        <p:nvSpPr>
-          <p:cNvPr id="189" name="Shape 187"/>
-          <p:cNvSpPr/>
-          <p:nvPr/>
-        </p:nvSpPr>
-        <p:spPr>
-          <a:xfrm>
-            <a:off x="365760" y="3012186"/>
-            <a:ext cx="11460175" cy="223266"/>
-          </a:xfrm>
-          <a:prstGeom prst="rect">
-            <a:avLst/>
-          </a:prstGeom>
-          <a:solidFill>
-            <a:srgbClr val="F6F9FA"/>
-          </a:solidFill>
-          <a:ln w="6350">
-            <a:solidFill>
-              <a:srgbClr val="DFE6EA"/>
-            </a:solidFill>
-            <a:prstDash val="solid"/>
-          </a:ln>
-        </p:spPr>
-      </p:sp>
-      <p:sp>
-        <p:nvSpPr>
-          <p:cNvPr id="190" name="Shape 188"/>
-          <p:cNvSpPr/>
-          <p:nvPr/>
-        </p:nvSpPr>
-        <p:spPr>
-          <a:xfrm>
-            <a:off x="420624" y="3046095"/>
+          <p:cNvPr id="172" name="Shape 170"/>
+          <p:cNvSpPr/>
+          <p:nvPr/>
+        </p:nvSpPr>
+        <p:spPr>
+          <a:xfrm>
+            <a:off x="420624" y="2566035"/>
             <a:ext cx="329184" cy="155448"/>
           </a:xfrm>
           <a:prstGeom prst="roundRect">
@@ -13183,14 +12537,14 @@
       </p:sp>
       <p:sp>
         <p:nvSpPr>
-          <p:cNvPr id="191" name="Text 189"/>
-          <p:cNvSpPr/>
-          <p:nvPr/>
-        </p:nvSpPr>
-        <p:spPr>
-          <a:xfrm>
-            <a:off x="393192" y="3012186"/>
-            <a:ext cx="384048" cy="223266"/>
+          <p:cNvPr id="173" name="Text 171"/>
+          <p:cNvSpPr/>
+          <p:nvPr/>
+        </p:nvSpPr>
+        <p:spPr>
+          <a:xfrm>
+            <a:off x="393192" y="2509266"/>
+            <a:ext cx="384048" cy="268986"/>
           </a:xfrm>
           <a:prstGeom prst="rect">
             <a:avLst/>
@@ -13224,14 +12578,14 @@
       </p:sp>
       <p:sp>
         <p:nvSpPr>
-          <p:cNvPr id="192" name="Text 190"/>
-          <p:cNvSpPr/>
-          <p:nvPr/>
-        </p:nvSpPr>
-        <p:spPr>
-          <a:xfrm>
-            <a:off x="987552" y="3012186"/>
-            <a:ext cx="2441448" cy="223266"/>
+          <p:cNvPr id="174" name="Text 172"/>
+          <p:cNvSpPr/>
+          <p:nvPr/>
+        </p:nvSpPr>
+        <p:spPr>
+          <a:xfrm>
+            <a:off x="987552" y="2509266"/>
+            <a:ext cx="2441448" cy="268986"/>
           </a:xfrm>
           <a:prstGeom prst="rect">
             <a:avLst/>
@@ -13265,14 +12619,14 @@
       </p:sp>
       <p:sp>
         <p:nvSpPr>
-          <p:cNvPr id="193" name="Text 191"/>
-          <p:cNvSpPr/>
-          <p:nvPr/>
-        </p:nvSpPr>
-        <p:spPr>
-          <a:xfrm>
-            <a:off x="3447288" y="3012186"/>
-            <a:ext cx="777240" cy="223266"/>
+          <p:cNvPr id="175" name="Text 173"/>
+          <p:cNvSpPr/>
+          <p:nvPr/>
+        </p:nvSpPr>
+        <p:spPr>
+          <a:xfrm>
+            <a:off x="3447288" y="2509266"/>
+            <a:ext cx="777240" cy="268986"/>
           </a:xfrm>
           <a:prstGeom prst="rect">
             <a:avLst/>
@@ -13306,14 +12660,14 @@
       </p:sp>
       <p:sp>
         <p:nvSpPr>
-          <p:cNvPr id="194" name="Text 192"/>
-          <p:cNvSpPr/>
-          <p:nvPr/>
-        </p:nvSpPr>
-        <p:spPr>
-          <a:xfrm>
-            <a:off x="4224528" y="3012186"/>
-            <a:ext cx="502920" cy="223266"/>
+          <p:cNvPr id="176" name="Text 174"/>
+          <p:cNvSpPr/>
+          <p:nvPr/>
+        </p:nvSpPr>
+        <p:spPr>
+          <a:xfrm>
+            <a:off x="4224528" y="2509266"/>
+            <a:ext cx="502920" cy="268986"/>
           </a:xfrm>
           <a:prstGeom prst="rect">
             <a:avLst/>
@@ -13347,14 +12701,14 @@
       </p:sp>
       <p:sp>
         <p:nvSpPr>
-          <p:cNvPr id="195" name="Text 193"/>
-          <p:cNvSpPr/>
-          <p:nvPr/>
-        </p:nvSpPr>
-        <p:spPr>
-          <a:xfrm>
-            <a:off x="4727448" y="3012186"/>
-            <a:ext cx="658368" cy="223266"/>
+          <p:cNvPr id="177" name="Text 175"/>
+          <p:cNvSpPr/>
+          <p:nvPr/>
+        </p:nvSpPr>
+        <p:spPr>
+          <a:xfrm>
+            <a:off x="4727448" y="2509266"/>
+            <a:ext cx="658368" cy="268986"/>
           </a:xfrm>
           <a:prstGeom prst="rect">
             <a:avLst/>
@@ -13388,14 +12742,14 @@
       </p:sp>
       <p:sp>
         <p:nvSpPr>
-          <p:cNvPr id="196" name="Text 194"/>
-          <p:cNvSpPr/>
-          <p:nvPr/>
-        </p:nvSpPr>
-        <p:spPr>
-          <a:xfrm>
-            <a:off x="5385816" y="3012186"/>
-            <a:ext cx="658368" cy="223266"/>
+          <p:cNvPr id="178" name="Text 176"/>
+          <p:cNvSpPr/>
+          <p:nvPr/>
+        </p:nvSpPr>
+        <p:spPr>
+          <a:xfrm>
+            <a:off x="5385816" y="2509266"/>
+            <a:ext cx="658368" cy="268986"/>
           </a:xfrm>
           <a:prstGeom prst="rect">
             <a:avLst/>
@@ -13429,18 +12783,18 @@
       </p:sp>
       <p:sp>
         <p:nvSpPr>
-          <p:cNvPr id="197" name="Shape 195"/>
-          <p:cNvSpPr/>
-          <p:nvPr/>
-        </p:nvSpPr>
-        <p:spPr>
-          <a:xfrm>
-            <a:off x="7404596" y="3059072"/>
-            <a:ext cx="510155" cy="129494"/>
+          <p:cNvPr id="179" name="Shape 177"/>
+          <p:cNvSpPr/>
+          <p:nvPr/>
+        </p:nvSpPr>
+        <p:spPr>
+          <a:xfrm>
+            <a:off x="7404596" y="2565753"/>
+            <a:ext cx="510155" cy="156012"/>
           </a:xfrm>
           <a:prstGeom prst="roundRect">
             <a:avLst>
-              <a:gd name="adj" fmla="val 28245"/>
+              <a:gd name="adj" fmla="val 23444"/>
             </a:avLst>
           </a:prstGeom>
           <a:solidFill>
@@ -13463,14 +12817,14 @@
       </p:sp>
       <p:sp>
         <p:nvSpPr>
-          <p:cNvPr id="198" name="Text 196"/>
-          <p:cNvSpPr/>
-          <p:nvPr/>
-        </p:nvSpPr>
-        <p:spPr>
-          <a:xfrm>
-            <a:off x="7404596" y="3059072"/>
-            <a:ext cx="510155" cy="129494"/>
+          <p:cNvPr id="180" name="Text 178"/>
+          <p:cNvSpPr/>
+          <p:nvPr/>
+        </p:nvSpPr>
+        <p:spPr>
+          <a:xfrm>
+            <a:off x="7404596" y="2565753"/>
+            <a:ext cx="510155" cy="156012"/>
           </a:xfrm>
           <a:prstGeom prst="rect">
             <a:avLst/>
@@ -13504,14 +12858,14 @@
       </p:sp>
       <p:sp>
         <p:nvSpPr>
-          <p:cNvPr id="199" name="Shape 197"/>
-          <p:cNvSpPr/>
-          <p:nvPr/>
-        </p:nvSpPr>
-        <p:spPr>
-          <a:xfrm>
-            <a:off x="365760" y="3235452"/>
-            <a:ext cx="11460175" cy="223266"/>
+          <p:cNvPr id="181" name="Shape 179"/>
+          <p:cNvSpPr/>
+          <p:nvPr/>
+        </p:nvSpPr>
+        <p:spPr>
+          <a:xfrm>
+            <a:off x="365760" y="2778252"/>
+            <a:ext cx="11460175" cy="268986"/>
           </a:xfrm>
           <a:prstGeom prst="rect">
             <a:avLst/>
@@ -13529,13 +12883,13 @@
       </p:sp>
       <p:sp>
         <p:nvSpPr>
-          <p:cNvPr id="200" name="Shape 198"/>
-          <p:cNvSpPr/>
-          <p:nvPr/>
-        </p:nvSpPr>
-        <p:spPr>
-          <a:xfrm>
-            <a:off x="420624" y="3269361"/>
+          <p:cNvPr id="182" name="Shape 180"/>
+          <p:cNvSpPr/>
+          <p:nvPr/>
+        </p:nvSpPr>
+        <p:spPr>
+          <a:xfrm>
+            <a:off x="420624" y="2835021"/>
             <a:ext cx="329184" cy="155448"/>
           </a:xfrm>
           <a:prstGeom prst="roundRect">
@@ -13556,14 +12910,14 @@
       </p:sp>
       <p:sp>
         <p:nvSpPr>
-          <p:cNvPr id="201" name="Text 199"/>
-          <p:cNvSpPr/>
-          <p:nvPr/>
-        </p:nvSpPr>
-        <p:spPr>
-          <a:xfrm>
-            <a:off x="393192" y="3235452"/>
-            <a:ext cx="384048" cy="223266"/>
+          <p:cNvPr id="183" name="Text 181"/>
+          <p:cNvSpPr/>
+          <p:nvPr/>
+        </p:nvSpPr>
+        <p:spPr>
+          <a:xfrm>
+            <a:off x="393192" y="2778252"/>
+            <a:ext cx="384048" cy="268986"/>
           </a:xfrm>
           <a:prstGeom prst="rect">
             <a:avLst/>
@@ -13597,14 +12951,14 @@
       </p:sp>
       <p:sp>
         <p:nvSpPr>
-          <p:cNvPr id="202" name="Text 200"/>
-          <p:cNvSpPr/>
-          <p:nvPr/>
-        </p:nvSpPr>
-        <p:spPr>
-          <a:xfrm>
-            <a:off x="987552" y="3235452"/>
-            <a:ext cx="2441448" cy="223266"/>
+          <p:cNvPr id="184" name="Text 182"/>
+          <p:cNvSpPr/>
+          <p:nvPr/>
+        </p:nvSpPr>
+        <p:spPr>
+          <a:xfrm>
+            <a:off x="987552" y="2778252"/>
+            <a:ext cx="2441448" cy="268986"/>
           </a:xfrm>
           <a:prstGeom prst="rect">
             <a:avLst/>
@@ -13638,14 +12992,14 @@
       </p:sp>
       <p:sp>
         <p:nvSpPr>
-          <p:cNvPr id="203" name="Text 201"/>
-          <p:cNvSpPr/>
-          <p:nvPr/>
-        </p:nvSpPr>
-        <p:spPr>
-          <a:xfrm>
-            <a:off x="3447288" y="3235452"/>
-            <a:ext cx="777240" cy="223266"/>
+          <p:cNvPr id="185" name="Text 183"/>
+          <p:cNvSpPr/>
+          <p:nvPr/>
+        </p:nvSpPr>
+        <p:spPr>
+          <a:xfrm>
+            <a:off x="3447288" y="2778252"/>
+            <a:ext cx="777240" cy="268986"/>
           </a:xfrm>
           <a:prstGeom prst="rect">
             <a:avLst/>
@@ -13679,14 +13033,14 @@
       </p:sp>
       <p:sp>
         <p:nvSpPr>
-          <p:cNvPr id="204" name="Text 202"/>
-          <p:cNvSpPr/>
-          <p:nvPr/>
-        </p:nvSpPr>
-        <p:spPr>
-          <a:xfrm>
-            <a:off x="4224528" y="3235452"/>
-            <a:ext cx="502920" cy="223266"/>
+          <p:cNvPr id="186" name="Text 184"/>
+          <p:cNvSpPr/>
+          <p:nvPr/>
+        </p:nvSpPr>
+        <p:spPr>
+          <a:xfrm>
+            <a:off x="4224528" y="2778252"/>
+            <a:ext cx="502920" cy="268986"/>
           </a:xfrm>
           <a:prstGeom prst="rect">
             <a:avLst/>
@@ -13720,14 +13074,14 @@
       </p:sp>
       <p:sp>
         <p:nvSpPr>
-          <p:cNvPr id="205" name="Text 203"/>
-          <p:cNvSpPr/>
-          <p:nvPr/>
-        </p:nvSpPr>
-        <p:spPr>
-          <a:xfrm>
-            <a:off x="4727448" y="3235452"/>
-            <a:ext cx="658368" cy="223266"/>
+          <p:cNvPr id="187" name="Text 185"/>
+          <p:cNvSpPr/>
+          <p:nvPr/>
+        </p:nvSpPr>
+        <p:spPr>
+          <a:xfrm>
+            <a:off x="4727448" y="2778252"/>
+            <a:ext cx="658368" cy="268986"/>
           </a:xfrm>
           <a:prstGeom prst="rect">
             <a:avLst/>
@@ -13761,14 +13115,14 @@
       </p:sp>
       <p:sp>
         <p:nvSpPr>
-          <p:cNvPr id="206" name="Text 204"/>
-          <p:cNvSpPr/>
-          <p:nvPr/>
-        </p:nvSpPr>
-        <p:spPr>
-          <a:xfrm>
-            <a:off x="5385816" y="3235452"/>
-            <a:ext cx="658368" cy="223266"/>
+          <p:cNvPr id="188" name="Text 186"/>
+          <p:cNvSpPr/>
+          <p:nvPr/>
+        </p:nvSpPr>
+        <p:spPr>
+          <a:xfrm>
+            <a:off x="5385816" y="2778252"/>
+            <a:ext cx="658368" cy="268986"/>
           </a:xfrm>
           <a:prstGeom prst="rect">
             <a:avLst/>
@@ -13802,18 +13156,18 @@
       </p:sp>
       <p:sp>
         <p:nvSpPr>
-          <p:cNvPr id="207" name="Shape 205"/>
-          <p:cNvSpPr/>
-          <p:nvPr/>
-        </p:nvSpPr>
-        <p:spPr>
-          <a:xfrm>
-            <a:off x="7744699" y="3282338"/>
-            <a:ext cx="340103" cy="129494"/>
+          <p:cNvPr id="189" name="Shape 187"/>
+          <p:cNvSpPr/>
+          <p:nvPr/>
+        </p:nvSpPr>
+        <p:spPr>
+          <a:xfrm>
+            <a:off x="7744699" y="2834739"/>
+            <a:ext cx="340103" cy="156012"/>
           </a:xfrm>
           <a:prstGeom prst="roundRect">
             <a:avLst>
-              <a:gd name="adj" fmla="val 28245"/>
+              <a:gd name="adj" fmla="val 23444"/>
             </a:avLst>
           </a:prstGeom>
           <a:solidFill>
@@ -13836,14 +13190,14 @@
       </p:sp>
       <p:sp>
         <p:nvSpPr>
-          <p:cNvPr id="208" name="Text 206"/>
-          <p:cNvSpPr/>
-          <p:nvPr/>
-        </p:nvSpPr>
-        <p:spPr>
-          <a:xfrm>
-            <a:off x="7744699" y="3282338"/>
-            <a:ext cx="340103" cy="129494"/>
+          <p:cNvPr id="190" name="Text 188"/>
+          <p:cNvSpPr/>
+          <p:nvPr/>
+        </p:nvSpPr>
+        <p:spPr>
+          <a:xfrm>
+            <a:off x="7744699" y="2834739"/>
+            <a:ext cx="340103" cy="156012"/>
           </a:xfrm>
           <a:prstGeom prst="rect">
             <a:avLst/>
@@ -13877,14 +13231,14 @@
       </p:sp>
       <p:sp>
         <p:nvSpPr>
-          <p:cNvPr id="209" name="Shape 207"/>
-          <p:cNvSpPr/>
-          <p:nvPr/>
-        </p:nvSpPr>
-        <p:spPr>
-          <a:xfrm>
-            <a:off x="365760" y="3458718"/>
-            <a:ext cx="11460175" cy="223266"/>
+          <p:cNvPr id="191" name="Shape 189"/>
+          <p:cNvSpPr/>
+          <p:nvPr/>
+        </p:nvSpPr>
+        <p:spPr>
+          <a:xfrm>
+            <a:off x="365760" y="3047238"/>
+            <a:ext cx="11460175" cy="268986"/>
           </a:xfrm>
           <a:prstGeom prst="rect">
             <a:avLst/>
@@ -13902,13 +13256,13 @@
       </p:sp>
       <p:sp>
         <p:nvSpPr>
-          <p:cNvPr id="210" name="Shape 208"/>
-          <p:cNvSpPr/>
-          <p:nvPr/>
-        </p:nvSpPr>
-        <p:spPr>
-          <a:xfrm>
-            <a:off x="420624" y="3492627"/>
+          <p:cNvPr id="192" name="Shape 190"/>
+          <p:cNvSpPr/>
+          <p:nvPr/>
+        </p:nvSpPr>
+        <p:spPr>
+          <a:xfrm>
+            <a:off x="420624" y="3104007"/>
             <a:ext cx="329184" cy="155448"/>
           </a:xfrm>
           <a:prstGeom prst="roundRect">
@@ -13929,14 +13283,14 @@
       </p:sp>
       <p:sp>
         <p:nvSpPr>
-          <p:cNvPr id="211" name="Text 209"/>
-          <p:cNvSpPr/>
-          <p:nvPr/>
-        </p:nvSpPr>
-        <p:spPr>
-          <a:xfrm>
-            <a:off x="393192" y="3458718"/>
-            <a:ext cx="384048" cy="223266"/>
+          <p:cNvPr id="193" name="Text 191"/>
+          <p:cNvSpPr/>
+          <p:nvPr/>
+        </p:nvSpPr>
+        <p:spPr>
+          <a:xfrm>
+            <a:off x="393192" y="3047238"/>
+            <a:ext cx="384048" cy="268986"/>
           </a:xfrm>
           <a:prstGeom prst="rect">
             <a:avLst/>
@@ -13970,14 +13324,14 @@
       </p:sp>
       <p:sp>
         <p:nvSpPr>
-          <p:cNvPr id="212" name="Text 210"/>
-          <p:cNvSpPr/>
-          <p:nvPr/>
-        </p:nvSpPr>
-        <p:spPr>
-          <a:xfrm>
-            <a:off x="987552" y="3458718"/>
-            <a:ext cx="2441448" cy="223266"/>
+          <p:cNvPr id="194" name="Text 192"/>
+          <p:cNvSpPr/>
+          <p:nvPr/>
+        </p:nvSpPr>
+        <p:spPr>
+          <a:xfrm>
+            <a:off x="987552" y="3047238"/>
+            <a:ext cx="2441448" cy="268986"/>
           </a:xfrm>
           <a:prstGeom prst="rect">
             <a:avLst/>
@@ -14011,14 +13365,14 @@
       </p:sp>
       <p:sp>
         <p:nvSpPr>
-          <p:cNvPr id="213" name="Text 211"/>
-          <p:cNvSpPr/>
-          <p:nvPr/>
-        </p:nvSpPr>
-        <p:spPr>
-          <a:xfrm>
-            <a:off x="3447288" y="3458718"/>
-            <a:ext cx="777240" cy="223266"/>
+          <p:cNvPr id="195" name="Text 193"/>
+          <p:cNvSpPr/>
+          <p:nvPr/>
+        </p:nvSpPr>
+        <p:spPr>
+          <a:xfrm>
+            <a:off x="3447288" y="3047238"/>
+            <a:ext cx="777240" cy="268986"/>
           </a:xfrm>
           <a:prstGeom prst="rect">
             <a:avLst/>
@@ -14052,14 +13406,14 @@
       </p:sp>
       <p:sp>
         <p:nvSpPr>
-          <p:cNvPr id="214" name="Text 212"/>
-          <p:cNvSpPr/>
-          <p:nvPr/>
-        </p:nvSpPr>
-        <p:spPr>
-          <a:xfrm>
-            <a:off x="4224528" y="3458718"/>
-            <a:ext cx="502920" cy="223266"/>
+          <p:cNvPr id="196" name="Text 194"/>
+          <p:cNvSpPr/>
+          <p:nvPr/>
+        </p:nvSpPr>
+        <p:spPr>
+          <a:xfrm>
+            <a:off x="4224528" y="3047238"/>
+            <a:ext cx="502920" cy="268986"/>
           </a:xfrm>
           <a:prstGeom prst="rect">
             <a:avLst/>
@@ -14093,14 +13447,14 @@
       </p:sp>
       <p:sp>
         <p:nvSpPr>
-          <p:cNvPr id="215" name="Text 213"/>
-          <p:cNvSpPr/>
-          <p:nvPr/>
-        </p:nvSpPr>
-        <p:spPr>
-          <a:xfrm>
-            <a:off x="4727448" y="3458718"/>
-            <a:ext cx="658368" cy="223266"/>
+          <p:cNvPr id="197" name="Text 195"/>
+          <p:cNvSpPr/>
+          <p:nvPr/>
+        </p:nvSpPr>
+        <p:spPr>
+          <a:xfrm>
+            <a:off x="4727448" y="3047238"/>
+            <a:ext cx="658368" cy="268986"/>
           </a:xfrm>
           <a:prstGeom prst="rect">
             <a:avLst/>
@@ -14134,14 +13488,14 @@
       </p:sp>
       <p:sp>
         <p:nvSpPr>
-          <p:cNvPr id="216" name="Text 214"/>
-          <p:cNvSpPr/>
-          <p:nvPr/>
-        </p:nvSpPr>
-        <p:spPr>
-          <a:xfrm>
-            <a:off x="5385816" y="3458718"/>
-            <a:ext cx="658368" cy="223266"/>
+          <p:cNvPr id="198" name="Text 196"/>
+          <p:cNvSpPr/>
+          <p:nvPr/>
+        </p:nvSpPr>
+        <p:spPr>
+          <a:xfrm>
+            <a:off x="5385816" y="3047238"/>
+            <a:ext cx="658368" cy="268986"/>
           </a:xfrm>
           <a:prstGeom prst="rect">
             <a:avLst/>
@@ -14175,18 +13529,18 @@
       </p:sp>
       <p:sp>
         <p:nvSpPr>
-          <p:cNvPr id="217" name="Shape 215"/>
-          <p:cNvSpPr/>
-          <p:nvPr/>
-        </p:nvSpPr>
-        <p:spPr>
-          <a:xfrm>
-            <a:off x="7914751" y="3505604"/>
-            <a:ext cx="340103" cy="129494"/>
+          <p:cNvPr id="199" name="Shape 197"/>
+          <p:cNvSpPr/>
+          <p:nvPr/>
+        </p:nvSpPr>
+        <p:spPr>
+          <a:xfrm>
+            <a:off x="7914751" y="3103725"/>
+            <a:ext cx="340103" cy="156012"/>
           </a:xfrm>
           <a:prstGeom prst="roundRect">
             <a:avLst>
-              <a:gd name="adj" fmla="val 28245"/>
+              <a:gd name="adj" fmla="val 23444"/>
             </a:avLst>
           </a:prstGeom>
           <a:solidFill>
@@ -14209,14 +13563,14 @@
       </p:sp>
       <p:sp>
         <p:nvSpPr>
-          <p:cNvPr id="218" name="Text 216"/>
-          <p:cNvSpPr/>
-          <p:nvPr/>
-        </p:nvSpPr>
-        <p:spPr>
-          <a:xfrm>
-            <a:off x="7914751" y="3505604"/>
-            <a:ext cx="340103" cy="129494"/>
+          <p:cNvPr id="200" name="Text 198"/>
+          <p:cNvSpPr/>
+          <p:nvPr/>
+        </p:nvSpPr>
+        <p:spPr>
+          <a:xfrm>
+            <a:off x="7914751" y="3103725"/>
+            <a:ext cx="340103" cy="156012"/>
           </a:xfrm>
           <a:prstGeom prst="rect">
             <a:avLst/>
@@ -14250,14 +13604,14 @@
       </p:sp>
       <p:sp>
         <p:nvSpPr>
-          <p:cNvPr id="219" name="Shape 217"/>
-          <p:cNvSpPr/>
-          <p:nvPr/>
-        </p:nvSpPr>
-        <p:spPr>
-          <a:xfrm>
-            <a:off x="365760" y="3681984"/>
-            <a:ext cx="11460175" cy="223266"/>
+          <p:cNvPr id="201" name="Shape 199"/>
+          <p:cNvSpPr/>
+          <p:nvPr/>
+        </p:nvSpPr>
+        <p:spPr>
+          <a:xfrm>
+            <a:off x="365760" y="3316224"/>
+            <a:ext cx="11460175" cy="268986"/>
           </a:xfrm>
           <a:prstGeom prst="rect">
             <a:avLst/>
@@ -14275,13 +13629,13 @@
       </p:sp>
       <p:sp>
         <p:nvSpPr>
-          <p:cNvPr id="220" name="Shape 218"/>
-          <p:cNvSpPr/>
-          <p:nvPr/>
-        </p:nvSpPr>
-        <p:spPr>
-          <a:xfrm>
-            <a:off x="420624" y="3715893"/>
+          <p:cNvPr id="202" name="Shape 200"/>
+          <p:cNvSpPr/>
+          <p:nvPr/>
+        </p:nvSpPr>
+        <p:spPr>
+          <a:xfrm>
+            <a:off x="420624" y="3372993"/>
             <a:ext cx="329184" cy="155448"/>
           </a:xfrm>
           <a:prstGeom prst="roundRect">
@@ -14302,14 +13656,14 @@
       </p:sp>
       <p:sp>
         <p:nvSpPr>
-          <p:cNvPr id="221" name="Text 219"/>
-          <p:cNvSpPr/>
-          <p:nvPr/>
-        </p:nvSpPr>
-        <p:spPr>
-          <a:xfrm>
-            <a:off x="393192" y="3681984"/>
-            <a:ext cx="384048" cy="223266"/>
+          <p:cNvPr id="203" name="Text 201"/>
+          <p:cNvSpPr/>
+          <p:nvPr/>
+        </p:nvSpPr>
+        <p:spPr>
+          <a:xfrm>
+            <a:off x="393192" y="3316224"/>
+            <a:ext cx="384048" cy="268986"/>
           </a:xfrm>
           <a:prstGeom prst="rect">
             <a:avLst/>
@@ -14343,14 +13697,14 @@
       </p:sp>
       <p:sp>
         <p:nvSpPr>
-          <p:cNvPr id="222" name="Text 220"/>
-          <p:cNvSpPr/>
-          <p:nvPr/>
-        </p:nvSpPr>
-        <p:spPr>
-          <a:xfrm>
-            <a:off x="987552" y="3681984"/>
-            <a:ext cx="2441448" cy="223266"/>
+          <p:cNvPr id="204" name="Text 202"/>
+          <p:cNvSpPr/>
+          <p:nvPr/>
+        </p:nvSpPr>
+        <p:spPr>
+          <a:xfrm>
+            <a:off x="987552" y="3316224"/>
+            <a:ext cx="2441448" cy="268986"/>
           </a:xfrm>
           <a:prstGeom prst="rect">
             <a:avLst/>
@@ -14384,14 +13738,14 @@
       </p:sp>
       <p:sp>
         <p:nvSpPr>
-          <p:cNvPr id="223" name="Text 221"/>
-          <p:cNvSpPr/>
-          <p:nvPr/>
-        </p:nvSpPr>
-        <p:spPr>
-          <a:xfrm>
-            <a:off x="3447288" y="3681984"/>
-            <a:ext cx="777240" cy="223266"/>
+          <p:cNvPr id="205" name="Text 203"/>
+          <p:cNvSpPr/>
+          <p:nvPr/>
+        </p:nvSpPr>
+        <p:spPr>
+          <a:xfrm>
+            <a:off x="3447288" y="3316224"/>
+            <a:ext cx="777240" cy="268986"/>
           </a:xfrm>
           <a:prstGeom prst="rect">
             <a:avLst/>
@@ -14425,14 +13779,14 @@
       </p:sp>
       <p:sp>
         <p:nvSpPr>
-          <p:cNvPr id="224" name="Text 222"/>
-          <p:cNvSpPr/>
-          <p:nvPr/>
-        </p:nvSpPr>
-        <p:spPr>
-          <a:xfrm>
-            <a:off x="4224528" y="3681984"/>
-            <a:ext cx="502920" cy="223266"/>
+          <p:cNvPr id="206" name="Text 204"/>
+          <p:cNvSpPr/>
+          <p:nvPr/>
+        </p:nvSpPr>
+        <p:spPr>
+          <a:xfrm>
+            <a:off x="4224528" y="3316224"/>
+            <a:ext cx="502920" cy="268986"/>
           </a:xfrm>
           <a:prstGeom prst="rect">
             <a:avLst/>
@@ -14466,14 +13820,14 @@
       </p:sp>
       <p:sp>
         <p:nvSpPr>
-          <p:cNvPr id="225" name="Text 223"/>
-          <p:cNvSpPr/>
-          <p:nvPr/>
-        </p:nvSpPr>
-        <p:spPr>
-          <a:xfrm>
-            <a:off x="4727448" y="3681984"/>
-            <a:ext cx="658368" cy="223266"/>
+          <p:cNvPr id="207" name="Text 205"/>
+          <p:cNvSpPr/>
+          <p:nvPr/>
+        </p:nvSpPr>
+        <p:spPr>
+          <a:xfrm>
+            <a:off x="4727448" y="3316224"/>
+            <a:ext cx="658368" cy="268986"/>
           </a:xfrm>
           <a:prstGeom prst="rect">
             <a:avLst/>
@@ -14507,14 +13861,14 @@
       </p:sp>
       <p:sp>
         <p:nvSpPr>
-          <p:cNvPr id="226" name="Text 224"/>
-          <p:cNvSpPr/>
-          <p:nvPr/>
-        </p:nvSpPr>
-        <p:spPr>
-          <a:xfrm>
-            <a:off x="5385816" y="3681984"/>
-            <a:ext cx="658368" cy="223266"/>
+          <p:cNvPr id="208" name="Text 206"/>
+          <p:cNvSpPr/>
+          <p:nvPr/>
+        </p:nvSpPr>
+        <p:spPr>
+          <a:xfrm>
+            <a:off x="5385816" y="3316224"/>
+            <a:ext cx="658368" cy="268986"/>
           </a:xfrm>
           <a:prstGeom prst="rect">
             <a:avLst/>
@@ -14548,18 +13902,18 @@
       </p:sp>
       <p:sp>
         <p:nvSpPr>
-          <p:cNvPr id="227" name="Shape 225"/>
-          <p:cNvSpPr/>
-          <p:nvPr/>
-        </p:nvSpPr>
-        <p:spPr>
-          <a:xfrm>
-            <a:off x="8084802" y="3728870"/>
-            <a:ext cx="170052" cy="129494"/>
+          <p:cNvPr id="209" name="Shape 207"/>
+          <p:cNvSpPr/>
+          <p:nvPr/>
+        </p:nvSpPr>
+        <p:spPr>
+          <a:xfrm>
+            <a:off x="8084802" y="3372711"/>
+            <a:ext cx="170052" cy="156012"/>
           </a:xfrm>
           <a:prstGeom prst="roundRect">
             <a:avLst>
-              <a:gd name="adj" fmla="val 28245"/>
+              <a:gd name="adj" fmla="val 23444"/>
             </a:avLst>
           </a:prstGeom>
           <a:solidFill>
@@ -14582,14 +13936,14 @@
       </p:sp>
       <p:sp>
         <p:nvSpPr>
-          <p:cNvPr id="228" name="Shape 226"/>
-          <p:cNvSpPr/>
-          <p:nvPr/>
-        </p:nvSpPr>
-        <p:spPr>
-          <a:xfrm>
-            <a:off x="365760" y="3905250"/>
-            <a:ext cx="11460175" cy="223266"/>
+          <p:cNvPr id="210" name="Shape 208"/>
+          <p:cNvSpPr/>
+          <p:nvPr/>
+        </p:nvSpPr>
+        <p:spPr>
+          <a:xfrm>
+            <a:off x="365760" y="3585210"/>
+            <a:ext cx="11460175" cy="268986"/>
           </a:xfrm>
           <a:prstGeom prst="rect">
             <a:avLst/>
@@ -14607,13 +13961,13 @@
       </p:sp>
       <p:sp>
         <p:nvSpPr>
-          <p:cNvPr id="229" name="Shape 227"/>
-          <p:cNvSpPr/>
-          <p:nvPr/>
-        </p:nvSpPr>
-        <p:spPr>
-          <a:xfrm>
-            <a:off x="420624" y="3939159"/>
+          <p:cNvPr id="211" name="Shape 209"/>
+          <p:cNvSpPr/>
+          <p:nvPr/>
+        </p:nvSpPr>
+        <p:spPr>
+          <a:xfrm>
+            <a:off x="420624" y="3641979"/>
             <a:ext cx="329184" cy="155448"/>
           </a:xfrm>
           <a:prstGeom prst="roundRect">
@@ -14634,14 +13988,14 @@
       </p:sp>
       <p:sp>
         <p:nvSpPr>
-          <p:cNvPr id="230" name="Text 228"/>
-          <p:cNvSpPr/>
-          <p:nvPr/>
-        </p:nvSpPr>
-        <p:spPr>
-          <a:xfrm>
-            <a:off x="393192" y="3905250"/>
-            <a:ext cx="384048" cy="223266"/>
+          <p:cNvPr id="212" name="Text 210"/>
+          <p:cNvSpPr/>
+          <p:nvPr/>
+        </p:nvSpPr>
+        <p:spPr>
+          <a:xfrm>
+            <a:off x="393192" y="3585210"/>
+            <a:ext cx="384048" cy="268986"/>
           </a:xfrm>
           <a:prstGeom prst="rect">
             <a:avLst/>
@@ -14675,14 +14029,14 @@
       </p:sp>
       <p:sp>
         <p:nvSpPr>
-          <p:cNvPr id="231" name="Text 229"/>
-          <p:cNvSpPr/>
-          <p:nvPr/>
-        </p:nvSpPr>
-        <p:spPr>
-          <a:xfrm>
-            <a:off x="987552" y="3905250"/>
-            <a:ext cx="2441448" cy="223266"/>
+          <p:cNvPr id="213" name="Text 211"/>
+          <p:cNvSpPr/>
+          <p:nvPr/>
+        </p:nvSpPr>
+        <p:spPr>
+          <a:xfrm>
+            <a:off x="987552" y="3585210"/>
+            <a:ext cx="2441448" cy="268986"/>
           </a:xfrm>
           <a:prstGeom prst="rect">
             <a:avLst/>
@@ -14716,14 +14070,14 @@
       </p:sp>
       <p:sp>
         <p:nvSpPr>
-          <p:cNvPr id="232" name="Text 230"/>
-          <p:cNvSpPr/>
-          <p:nvPr/>
-        </p:nvSpPr>
-        <p:spPr>
-          <a:xfrm>
-            <a:off x="3447288" y="3905250"/>
-            <a:ext cx="777240" cy="223266"/>
+          <p:cNvPr id="214" name="Text 212"/>
+          <p:cNvSpPr/>
+          <p:nvPr/>
+        </p:nvSpPr>
+        <p:spPr>
+          <a:xfrm>
+            <a:off x="3447288" y="3585210"/>
+            <a:ext cx="777240" cy="268986"/>
           </a:xfrm>
           <a:prstGeom prst="rect">
             <a:avLst/>
@@ -14757,14 +14111,14 @@
       </p:sp>
       <p:sp>
         <p:nvSpPr>
-          <p:cNvPr id="233" name="Text 231"/>
-          <p:cNvSpPr/>
-          <p:nvPr/>
-        </p:nvSpPr>
-        <p:spPr>
-          <a:xfrm>
-            <a:off x="4224528" y="3905250"/>
-            <a:ext cx="502920" cy="223266"/>
+          <p:cNvPr id="215" name="Text 213"/>
+          <p:cNvSpPr/>
+          <p:nvPr/>
+        </p:nvSpPr>
+        <p:spPr>
+          <a:xfrm>
+            <a:off x="4224528" y="3585210"/>
+            <a:ext cx="502920" cy="268986"/>
           </a:xfrm>
           <a:prstGeom prst="rect">
             <a:avLst/>
@@ -14798,14 +14152,14 @@
       </p:sp>
       <p:sp>
         <p:nvSpPr>
-          <p:cNvPr id="234" name="Text 232"/>
-          <p:cNvSpPr/>
-          <p:nvPr/>
-        </p:nvSpPr>
-        <p:spPr>
-          <a:xfrm>
-            <a:off x="4727448" y="3905250"/>
-            <a:ext cx="658368" cy="223266"/>
+          <p:cNvPr id="216" name="Text 214"/>
+          <p:cNvSpPr/>
+          <p:nvPr/>
+        </p:nvSpPr>
+        <p:spPr>
+          <a:xfrm>
+            <a:off x="4727448" y="3585210"/>
+            <a:ext cx="658368" cy="268986"/>
           </a:xfrm>
           <a:prstGeom prst="rect">
             <a:avLst/>
@@ -14839,14 +14193,14 @@
       </p:sp>
       <p:sp>
         <p:nvSpPr>
-          <p:cNvPr id="235" name="Text 233"/>
-          <p:cNvSpPr/>
-          <p:nvPr/>
-        </p:nvSpPr>
-        <p:spPr>
-          <a:xfrm>
-            <a:off x="5385816" y="3905250"/>
-            <a:ext cx="658368" cy="223266"/>
+          <p:cNvPr id="217" name="Text 215"/>
+          <p:cNvSpPr/>
+          <p:nvPr/>
+        </p:nvSpPr>
+        <p:spPr>
+          <a:xfrm>
+            <a:off x="5385816" y="3585210"/>
+            <a:ext cx="658368" cy="268986"/>
           </a:xfrm>
           <a:prstGeom prst="rect">
             <a:avLst/>
@@ -14880,18 +14234,18 @@
       </p:sp>
       <p:sp>
         <p:nvSpPr>
-          <p:cNvPr id="236" name="Shape 234"/>
-          <p:cNvSpPr/>
-          <p:nvPr/>
-        </p:nvSpPr>
-        <p:spPr>
-          <a:xfrm>
-            <a:off x="8084802" y="3952136"/>
-            <a:ext cx="170052" cy="129494"/>
+          <p:cNvPr id="218" name="Shape 216"/>
+          <p:cNvSpPr/>
+          <p:nvPr/>
+        </p:nvSpPr>
+        <p:spPr>
+          <a:xfrm>
+            <a:off x="8084802" y="3641697"/>
+            <a:ext cx="170052" cy="156012"/>
           </a:xfrm>
           <a:prstGeom prst="roundRect">
             <a:avLst>
-              <a:gd name="adj" fmla="val 28245"/>
+              <a:gd name="adj" fmla="val 23444"/>
             </a:avLst>
           </a:prstGeom>
           <a:solidFill>
@@ -14914,14 +14268,14 @@
       </p:sp>
       <p:sp>
         <p:nvSpPr>
-          <p:cNvPr id="237" name="Shape 235"/>
-          <p:cNvSpPr/>
-          <p:nvPr/>
-        </p:nvSpPr>
-        <p:spPr>
-          <a:xfrm>
-            <a:off x="365760" y="4128516"/>
-            <a:ext cx="11460175" cy="223266"/>
+          <p:cNvPr id="219" name="Shape 217"/>
+          <p:cNvSpPr/>
+          <p:nvPr/>
+        </p:nvSpPr>
+        <p:spPr>
+          <a:xfrm>
+            <a:off x="365760" y="3854196"/>
+            <a:ext cx="11460175" cy="268986"/>
           </a:xfrm>
           <a:prstGeom prst="rect">
             <a:avLst/>
@@ -14939,13 +14293,13 @@
       </p:sp>
       <p:sp>
         <p:nvSpPr>
-          <p:cNvPr id="238" name="Shape 236"/>
-          <p:cNvSpPr/>
-          <p:nvPr/>
-        </p:nvSpPr>
-        <p:spPr>
-          <a:xfrm>
-            <a:off x="438912" y="4121277"/>
+          <p:cNvPr id="220" name="Shape 218"/>
+          <p:cNvSpPr/>
+          <p:nvPr/>
+        </p:nvSpPr>
+        <p:spPr>
+          <a:xfrm>
+            <a:off x="438912" y="3869817"/>
             <a:ext cx="237744" cy="237744"/>
           </a:xfrm>
           <a:prstGeom prst="ellipse">
@@ -14964,14 +14318,14 @@
       </p:sp>
       <p:sp>
         <p:nvSpPr>
-          <p:cNvPr id="239" name="Text 237"/>
-          <p:cNvSpPr/>
-          <p:nvPr/>
-        </p:nvSpPr>
-        <p:spPr>
-          <a:xfrm>
-            <a:off x="365760" y="4128516"/>
-            <a:ext cx="384048" cy="223266"/>
+          <p:cNvPr id="221" name="Text 219"/>
+          <p:cNvSpPr/>
+          <p:nvPr/>
+        </p:nvSpPr>
+        <p:spPr>
+          <a:xfrm>
+            <a:off x="365760" y="3854196"/>
+            <a:ext cx="384048" cy="268986"/>
           </a:xfrm>
           <a:prstGeom prst="rect">
             <a:avLst/>
@@ -15005,14 +14359,14 @@
       </p:sp>
       <p:sp>
         <p:nvSpPr>
-          <p:cNvPr id="240" name="Text 238"/>
-          <p:cNvSpPr/>
-          <p:nvPr/>
-        </p:nvSpPr>
-        <p:spPr>
-          <a:xfrm>
-            <a:off x="822960" y="4128516"/>
-            <a:ext cx="2606040" cy="223266"/>
+          <p:cNvPr id="222" name="Text 220"/>
+          <p:cNvSpPr/>
+          <p:nvPr/>
+        </p:nvSpPr>
+        <p:spPr>
+          <a:xfrm>
+            <a:off x="822960" y="3854196"/>
+            <a:ext cx="2606040" cy="268986"/>
           </a:xfrm>
           <a:prstGeom prst="rect">
             <a:avLst/>
@@ -15046,14 +14400,14 @@
       </p:sp>
       <p:sp>
         <p:nvSpPr>
-          <p:cNvPr id="241" name="Text 239"/>
-          <p:cNvSpPr/>
-          <p:nvPr/>
-        </p:nvSpPr>
-        <p:spPr>
-          <a:xfrm>
-            <a:off x="3447288" y="4128516"/>
-            <a:ext cx="777240" cy="223266"/>
+          <p:cNvPr id="223" name="Text 221"/>
+          <p:cNvSpPr/>
+          <p:nvPr/>
+        </p:nvSpPr>
+        <p:spPr>
+          <a:xfrm>
+            <a:off x="3447288" y="3854196"/>
+            <a:ext cx="777240" cy="268986"/>
           </a:xfrm>
           <a:prstGeom prst="rect">
             <a:avLst/>
@@ -15087,14 +14441,14 @@
       </p:sp>
       <p:sp>
         <p:nvSpPr>
-          <p:cNvPr id="242" name="Text 240"/>
-          <p:cNvSpPr/>
-          <p:nvPr/>
-        </p:nvSpPr>
-        <p:spPr>
-          <a:xfrm>
-            <a:off x="4224528" y="4128516"/>
-            <a:ext cx="502920" cy="223266"/>
+          <p:cNvPr id="224" name="Text 222"/>
+          <p:cNvSpPr/>
+          <p:nvPr/>
+        </p:nvSpPr>
+        <p:spPr>
+          <a:xfrm>
+            <a:off x="4224528" y="3854196"/>
+            <a:ext cx="502920" cy="268986"/>
           </a:xfrm>
           <a:prstGeom prst="rect">
             <a:avLst/>
@@ -15128,14 +14482,14 @@
       </p:sp>
       <p:sp>
         <p:nvSpPr>
-          <p:cNvPr id="243" name="Text 241"/>
-          <p:cNvSpPr/>
-          <p:nvPr/>
-        </p:nvSpPr>
-        <p:spPr>
-          <a:xfrm>
-            <a:off x="4727448" y="4128516"/>
-            <a:ext cx="658368" cy="223266"/>
+          <p:cNvPr id="225" name="Text 223"/>
+          <p:cNvSpPr/>
+          <p:nvPr/>
+        </p:nvSpPr>
+        <p:spPr>
+          <a:xfrm>
+            <a:off x="4727448" y="3854196"/>
+            <a:ext cx="658368" cy="268986"/>
           </a:xfrm>
           <a:prstGeom prst="rect">
             <a:avLst/>
@@ -15169,14 +14523,14 @@
       </p:sp>
       <p:sp>
         <p:nvSpPr>
-          <p:cNvPr id="244" name="Text 242"/>
-          <p:cNvSpPr/>
-          <p:nvPr/>
-        </p:nvSpPr>
-        <p:spPr>
-          <a:xfrm>
-            <a:off x="5385816" y="4128516"/>
-            <a:ext cx="658368" cy="223266"/>
+          <p:cNvPr id="226" name="Text 224"/>
+          <p:cNvSpPr/>
+          <p:nvPr/>
+        </p:nvSpPr>
+        <p:spPr>
+          <a:xfrm>
+            <a:off x="5385816" y="3854196"/>
+            <a:ext cx="658368" cy="268986"/>
           </a:xfrm>
           <a:prstGeom prst="rect">
             <a:avLst/>
@@ -15210,18 +14564,18 @@
       </p:sp>
       <p:sp>
         <p:nvSpPr>
-          <p:cNvPr id="245" name="Shape 243"/>
-          <p:cNvSpPr/>
-          <p:nvPr/>
-        </p:nvSpPr>
-        <p:spPr>
-          <a:xfrm>
-            <a:off x="8254854" y="4175402"/>
-            <a:ext cx="170052" cy="129494"/>
+          <p:cNvPr id="227" name="Shape 225"/>
+          <p:cNvSpPr/>
+          <p:nvPr/>
+        </p:nvSpPr>
+        <p:spPr>
+          <a:xfrm>
+            <a:off x="8254854" y="3910683"/>
+            <a:ext cx="170052" cy="156012"/>
           </a:xfrm>
           <a:prstGeom prst="roundRect">
             <a:avLst>
-              <a:gd name="adj" fmla="val 28245"/>
+              <a:gd name="adj" fmla="val 23444"/>
             </a:avLst>
           </a:prstGeom>
           <a:solidFill>
@@ -15244,14 +14598,14 @@
       </p:sp>
       <p:sp>
         <p:nvSpPr>
-          <p:cNvPr id="246" name="Shape 244"/>
-          <p:cNvSpPr/>
-          <p:nvPr/>
-        </p:nvSpPr>
-        <p:spPr>
-          <a:xfrm>
-            <a:off x="365760" y="4351782"/>
-            <a:ext cx="11460175" cy="223266"/>
+          <p:cNvPr id="228" name="Shape 226"/>
+          <p:cNvSpPr/>
+          <p:nvPr/>
+        </p:nvSpPr>
+        <p:spPr>
+          <a:xfrm>
+            <a:off x="365760" y="4123182"/>
+            <a:ext cx="11460175" cy="268986"/>
           </a:xfrm>
           <a:prstGeom prst="rect">
             <a:avLst/>
@@ -15269,13 +14623,13 @@
       </p:sp>
       <p:sp>
         <p:nvSpPr>
-          <p:cNvPr id="247" name="Shape 245"/>
-          <p:cNvSpPr/>
-          <p:nvPr/>
-        </p:nvSpPr>
-        <p:spPr>
-          <a:xfrm>
-            <a:off x="438912" y="4344543"/>
+          <p:cNvPr id="229" name="Shape 227"/>
+          <p:cNvSpPr/>
+          <p:nvPr/>
+        </p:nvSpPr>
+        <p:spPr>
+          <a:xfrm>
+            <a:off x="438912" y="4138803"/>
             <a:ext cx="237744" cy="237744"/>
           </a:xfrm>
           <a:prstGeom prst="ellipse">
@@ -15294,14 +14648,14 @@
       </p:sp>
       <p:sp>
         <p:nvSpPr>
-          <p:cNvPr id="248" name="Text 246"/>
-          <p:cNvSpPr/>
-          <p:nvPr/>
-        </p:nvSpPr>
-        <p:spPr>
-          <a:xfrm>
-            <a:off x="365760" y="4351782"/>
-            <a:ext cx="384048" cy="223266"/>
+          <p:cNvPr id="230" name="Text 228"/>
+          <p:cNvSpPr/>
+          <p:nvPr/>
+        </p:nvSpPr>
+        <p:spPr>
+          <a:xfrm>
+            <a:off x="365760" y="4123182"/>
+            <a:ext cx="384048" cy="268986"/>
           </a:xfrm>
           <a:prstGeom prst="rect">
             <a:avLst/>
@@ -15335,14 +14689,14 @@
       </p:sp>
       <p:sp>
         <p:nvSpPr>
-          <p:cNvPr id="249" name="Text 247"/>
-          <p:cNvSpPr/>
-          <p:nvPr/>
-        </p:nvSpPr>
-        <p:spPr>
-          <a:xfrm>
-            <a:off x="822960" y="4351782"/>
-            <a:ext cx="2606040" cy="223266"/>
+          <p:cNvPr id="231" name="Text 229"/>
+          <p:cNvSpPr/>
+          <p:nvPr/>
+        </p:nvSpPr>
+        <p:spPr>
+          <a:xfrm>
+            <a:off x="822960" y="4123182"/>
+            <a:ext cx="2606040" cy="268986"/>
           </a:xfrm>
           <a:prstGeom prst="rect">
             <a:avLst/>
@@ -15376,14 +14730,14 @@
       </p:sp>
       <p:sp>
         <p:nvSpPr>
-          <p:cNvPr id="250" name="Text 248"/>
-          <p:cNvSpPr/>
-          <p:nvPr/>
-        </p:nvSpPr>
-        <p:spPr>
-          <a:xfrm>
-            <a:off x="3447288" y="4351782"/>
-            <a:ext cx="777240" cy="223266"/>
+          <p:cNvPr id="232" name="Text 230"/>
+          <p:cNvSpPr/>
+          <p:nvPr/>
+        </p:nvSpPr>
+        <p:spPr>
+          <a:xfrm>
+            <a:off x="3447288" y="4123182"/>
+            <a:ext cx="777240" cy="268986"/>
           </a:xfrm>
           <a:prstGeom prst="rect">
             <a:avLst/>
@@ -15417,14 +14771,14 @@
       </p:sp>
       <p:sp>
         <p:nvSpPr>
-          <p:cNvPr id="251" name="Text 249"/>
-          <p:cNvSpPr/>
-          <p:nvPr/>
-        </p:nvSpPr>
-        <p:spPr>
-          <a:xfrm>
-            <a:off x="4224528" y="4351782"/>
-            <a:ext cx="502920" cy="223266"/>
+          <p:cNvPr id="233" name="Text 231"/>
+          <p:cNvSpPr/>
+          <p:nvPr/>
+        </p:nvSpPr>
+        <p:spPr>
+          <a:xfrm>
+            <a:off x="4224528" y="4123182"/>
+            <a:ext cx="502920" cy="268986"/>
           </a:xfrm>
           <a:prstGeom prst="rect">
             <a:avLst/>
@@ -15458,14 +14812,14 @@
       </p:sp>
       <p:sp>
         <p:nvSpPr>
-          <p:cNvPr id="252" name="Text 250"/>
-          <p:cNvSpPr/>
-          <p:nvPr/>
-        </p:nvSpPr>
-        <p:spPr>
-          <a:xfrm>
-            <a:off x="4727448" y="4351782"/>
-            <a:ext cx="658368" cy="223266"/>
+          <p:cNvPr id="234" name="Text 232"/>
+          <p:cNvSpPr/>
+          <p:nvPr/>
+        </p:nvSpPr>
+        <p:spPr>
+          <a:xfrm>
+            <a:off x="4727448" y="4123182"/>
+            <a:ext cx="658368" cy="268986"/>
           </a:xfrm>
           <a:prstGeom prst="rect">
             <a:avLst/>
@@ -15499,14 +14853,14 @@
       </p:sp>
       <p:sp>
         <p:nvSpPr>
-          <p:cNvPr id="253" name="Text 251"/>
-          <p:cNvSpPr/>
-          <p:nvPr/>
-        </p:nvSpPr>
-        <p:spPr>
-          <a:xfrm>
-            <a:off x="5385816" y="4351782"/>
-            <a:ext cx="658368" cy="223266"/>
+          <p:cNvPr id="235" name="Text 233"/>
+          <p:cNvSpPr/>
+          <p:nvPr/>
+        </p:nvSpPr>
+        <p:spPr>
+          <a:xfrm>
+            <a:off x="5385816" y="4123182"/>
+            <a:ext cx="658368" cy="268986"/>
           </a:xfrm>
           <a:prstGeom prst="rect">
             <a:avLst/>
@@ -15540,18 +14894,18 @@
       </p:sp>
       <p:sp>
         <p:nvSpPr>
-          <p:cNvPr id="254" name="Shape 252"/>
-          <p:cNvSpPr/>
-          <p:nvPr/>
-        </p:nvSpPr>
-        <p:spPr>
-          <a:xfrm>
-            <a:off x="8254854" y="4398668"/>
-            <a:ext cx="340103" cy="129494"/>
+          <p:cNvPr id="236" name="Shape 234"/>
+          <p:cNvSpPr/>
+          <p:nvPr/>
+        </p:nvSpPr>
+        <p:spPr>
+          <a:xfrm>
+            <a:off x="8254854" y="4179669"/>
+            <a:ext cx="340103" cy="156012"/>
           </a:xfrm>
           <a:prstGeom prst="roundRect">
             <a:avLst>
-              <a:gd name="adj" fmla="val 28245"/>
+              <a:gd name="adj" fmla="val 23444"/>
             </a:avLst>
           </a:prstGeom>
           <a:solidFill>
@@ -15574,14 +14928,14 @@
       </p:sp>
       <p:sp>
         <p:nvSpPr>
-          <p:cNvPr id="255" name="Text 253"/>
-          <p:cNvSpPr/>
-          <p:nvPr/>
-        </p:nvSpPr>
-        <p:spPr>
-          <a:xfrm>
-            <a:off x="8254854" y="4398668"/>
-            <a:ext cx="340103" cy="129494"/>
+          <p:cNvPr id="237" name="Text 235"/>
+          <p:cNvSpPr/>
+          <p:nvPr/>
+        </p:nvSpPr>
+        <p:spPr>
+          <a:xfrm>
+            <a:off x="8254854" y="4179669"/>
+            <a:ext cx="340103" cy="156012"/>
           </a:xfrm>
           <a:prstGeom prst="rect">
             <a:avLst/>
@@ -15615,14 +14969,14 @@
       </p:sp>
       <p:sp>
         <p:nvSpPr>
-          <p:cNvPr id="256" name="Shape 254"/>
-          <p:cNvSpPr/>
-          <p:nvPr/>
-        </p:nvSpPr>
-        <p:spPr>
-          <a:xfrm>
-            <a:off x="365760" y="4575048"/>
-            <a:ext cx="11460175" cy="223266"/>
+          <p:cNvPr id="238" name="Shape 236"/>
+          <p:cNvSpPr/>
+          <p:nvPr/>
+        </p:nvSpPr>
+        <p:spPr>
+          <a:xfrm>
+            <a:off x="365760" y="4392168"/>
+            <a:ext cx="11460175" cy="268986"/>
           </a:xfrm>
           <a:prstGeom prst="rect">
             <a:avLst/>
@@ -15640,13 +14994,13 @@
       </p:sp>
       <p:sp>
         <p:nvSpPr>
-          <p:cNvPr id="257" name="Shape 255"/>
-          <p:cNvSpPr/>
-          <p:nvPr/>
-        </p:nvSpPr>
-        <p:spPr>
-          <a:xfrm>
-            <a:off x="438912" y="4567809"/>
+          <p:cNvPr id="239" name="Shape 237"/>
+          <p:cNvSpPr/>
+          <p:nvPr/>
+        </p:nvSpPr>
+        <p:spPr>
+          <a:xfrm>
+            <a:off x="438912" y="4407789"/>
             <a:ext cx="237744" cy="237744"/>
           </a:xfrm>
           <a:prstGeom prst="ellipse">
@@ -15665,14 +15019,14 @@
       </p:sp>
       <p:sp>
         <p:nvSpPr>
-          <p:cNvPr id="258" name="Text 256"/>
-          <p:cNvSpPr/>
-          <p:nvPr/>
-        </p:nvSpPr>
-        <p:spPr>
-          <a:xfrm>
-            <a:off x="365760" y="4575048"/>
-            <a:ext cx="384048" cy="223266"/>
+          <p:cNvPr id="240" name="Text 238"/>
+          <p:cNvSpPr/>
+          <p:nvPr/>
+        </p:nvSpPr>
+        <p:spPr>
+          <a:xfrm>
+            <a:off x="365760" y="4392168"/>
+            <a:ext cx="384048" cy="268986"/>
           </a:xfrm>
           <a:prstGeom prst="rect">
             <a:avLst/>
@@ -15706,14 +15060,14 @@
       </p:sp>
       <p:sp>
         <p:nvSpPr>
-          <p:cNvPr id="259" name="Text 257"/>
-          <p:cNvSpPr/>
-          <p:nvPr/>
-        </p:nvSpPr>
-        <p:spPr>
-          <a:xfrm>
-            <a:off x="822960" y="4575048"/>
-            <a:ext cx="2606040" cy="223266"/>
+          <p:cNvPr id="241" name="Text 239"/>
+          <p:cNvSpPr/>
+          <p:nvPr/>
+        </p:nvSpPr>
+        <p:spPr>
+          <a:xfrm>
+            <a:off x="822960" y="4392168"/>
+            <a:ext cx="2606040" cy="268986"/>
           </a:xfrm>
           <a:prstGeom prst="rect">
             <a:avLst/>
@@ -15747,14 +15101,14 @@
       </p:sp>
       <p:sp>
         <p:nvSpPr>
-          <p:cNvPr id="260" name="Text 258"/>
-          <p:cNvSpPr/>
-          <p:nvPr/>
-        </p:nvSpPr>
-        <p:spPr>
-          <a:xfrm>
-            <a:off x="3447288" y="4575048"/>
-            <a:ext cx="777240" cy="223266"/>
+          <p:cNvPr id="242" name="Text 240"/>
+          <p:cNvSpPr/>
+          <p:nvPr/>
+        </p:nvSpPr>
+        <p:spPr>
+          <a:xfrm>
+            <a:off x="3447288" y="4392168"/>
+            <a:ext cx="777240" cy="268986"/>
           </a:xfrm>
           <a:prstGeom prst="rect">
             <a:avLst/>
@@ -15788,14 +15142,14 @@
       </p:sp>
       <p:sp>
         <p:nvSpPr>
-          <p:cNvPr id="261" name="Text 259"/>
-          <p:cNvSpPr/>
-          <p:nvPr/>
-        </p:nvSpPr>
-        <p:spPr>
-          <a:xfrm>
-            <a:off x="4224528" y="4575048"/>
-            <a:ext cx="502920" cy="223266"/>
+          <p:cNvPr id="243" name="Text 241"/>
+          <p:cNvSpPr/>
+          <p:nvPr/>
+        </p:nvSpPr>
+        <p:spPr>
+          <a:xfrm>
+            <a:off x="4224528" y="4392168"/>
+            <a:ext cx="502920" cy="268986"/>
           </a:xfrm>
           <a:prstGeom prst="rect">
             <a:avLst/>
@@ -15829,14 +15183,14 @@
       </p:sp>
       <p:sp>
         <p:nvSpPr>
-          <p:cNvPr id="262" name="Text 260"/>
-          <p:cNvSpPr/>
-          <p:nvPr/>
-        </p:nvSpPr>
-        <p:spPr>
-          <a:xfrm>
-            <a:off x="4727448" y="4575048"/>
-            <a:ext cx="658368" cy="223266"/>
+          <p:cNvPr id="244" name="Text 242"/>
+          <p:cNvSpPr/>
+          <p:nvPr/>
+        </p:nvSpPr>
+        <p:spPr>
+          <a:xfrm>
+            <a:off x="4727448" y="4392168"/>
+            <a:ext cx="658368" cy="268986"/>
           </a:xfrm>
           <a:prstGeom prst="rect">
             <a:avLst/>
@@ -15870,14 +15224,14 @@
       </p:sp>
       <p:sp>
         <p:nvSpPr>
-          <p:cNvPr id="263" name="Text 261"/>
-          <p:cNvSpPr/>
-          <p:nvPr/>
-        </p:nvSpPr>
-        <p:spPr>
-          <a:xfrm>
-            <a:off x="5385816" y="4575048"/>
-            <a:ext cx="658368" cy="223266"/>
+          <p:cNvPr id="245" name="Text 243"/>
+          <p:cNvSpPr/>
+          <p:nvPr/>
+        </p:nvSpPr>
+        <p:spPr>
+          <a:xfrm>
+            <a:off x="5385816" y="4392168"/>
+            <a:ext cx="658368" cy="268986"/>
           </a:xfrm>
           <a:prstGeom prst="rect">
             <a:avLst/>
@@ -15911,18 +15265,18 @@
       </p:sp>
       <p:sp>
         <p:nvSpPr>
-          <p:cNvPr id="264" name="Shape 262"/>
-          <p:cNvSpPr/>
-          <p:nvPr/>
-        </p:nvSpPr>
-        <p:spPr>
-          <a:xfrm>
-            <a:off x="8594957" y="4621934"/>
-            <a:ext cx="1020309" cy="129494"/>
+          <p:cNvPr id="246" name="Shape 244"/>
+          <p:cNvSpPr/>
+          <p:nvPr/>
+        </p:nvSpPr>
+        <p:spPr>
+          <a:xfrm>
+            <a:off x="8594957" y="4448655"/>
+            <a:ext cx="1020309" cy="156012"/>
           </a:xfrm>
           <a:prstGeom prst="roundRect">
             <a:avLst>
-              <a:gd name="adj" fmla="val 28245"/>
+              <a:gd name="adj" fmla="val 23444"/>
             </a:avLst>
           </a:prstGeom>
           <a:solidFill>
@@ -15945,14 +15299,14 @@
       </p:sp>
       <p:sp>
         <p:nvSpPr>
-          <p:cNvPr id="265" name="Text 263"/>
-          <p:cNvSpPr/>
-          <p:nvPr/>
-        </p:nvSpPr>
-        <p:spPr>
-          <a:xfrm>
-            <a:off x="8594957" y="4621934"/>
-            <a:ext cx="1020309" cy="129494"/>
+          <p:cNvPr id="247" name="Text 245"/>
+          <p:cNvSpPr/>
+          <p:nvPr/>
+        </p:nvSpPr>
+        <p:spPr>
+          <a:xfrm>
+            <a:off x="8594957" y="4448655"/>
+            <a:ext cx="1020309" cy="156012"/>
           </a:xfrm>
           <a:prstGeom prst="rect">
             <a:avLst/>
@@ -15986,14 +15340,14 @@
       </p:sp>
       <p:sp>
         <p:nvSpPr>
-          <p:cNvPr id="266" name="Shape 264"/>
-          <p:cNvSpPr/>
-          <p:nvPr/>
-        </p:nvSpPr>
-        <p:spPr>
-          <a:xfrm>
-            <a:off x="365760" y="4798314"/>
-            <a:ext cx="11460175" cy="223266"/>
+          <p:cNvPr id="248" name="Shape 246"/>
+          <p:cNvSpPr/>
+          <p:nvPr/>
+        </p:nvSpPr>
+        <p:spPr>
+          <a:xfrm>
+            <a:off x="365760" y="4661154"/>
+            <a:ext cx="11460175" cy="268986"/>
           </a:xfrm>
           <a:prstGeom prst="rect">
             <a:avLst/>
@@ -16011,13 +15365,13 @@
       </p:sp>
       <p:sp>
         <p:nvSpPr>
-          <p:cNvPr id="267" name="Shape 265"/>
-          <p:cNvSpPr/>
-          <p:nvPr/>
-        </p:nvSpPr>
-        <p:spPr>
-          <a:xfrm>
-            <a:off x="438912" y="4791075"/>
+          <p:cNvPr id="249" name="Shape 247"/>
+          <p:cNvSpPr/>
+          <p:nvPr/>
+        </p:nvSpPr>
+        <p:spPr>
+          <a:xfrm>
+            <a:off x="438912" y="4676775"/>
             <a:ext cx="237744" cy="237744"/>
           </a:xfrm>
           <a:prstGeom prst="ellipse">
@@ -16036,14 +15390,14 @@
       </p:sp>
       <p:sp>
         <p:nvSpPr>
-          <p:cNvPr id="268" name="Text 266"/>
-          <p:cNvSpPr/>
-          <p:nvPr/>
-        </p:nvSpPr>
-        <p:spPr>
-          <a:xfrm>
-            <a:off x="365760" y="4798314"/>
-            <a:ext cx="384048" cy="223266"/>
+          <p:cNvPr id="250" name="Text 248"/>
+          <p:cNvSpPr/>
+          <p:nvPr/>
+        </p:nvSpPr>
+        <p:spPr>
+          <a:xfrm>
+            <a:off x="365760" y="4661154"/>
+            <a:ext cx="384048" cy="268986"/>
           </a:xfrm>
           <a:prstGeom prst="rect">
             <a:avLst/>
@@ -16077,14 +15431,14 @@
       </p:sp>
       <p:sp>
         <p:nvSpPr>
-          <p:cNvPr id="269" name="Text 267"/>
-          <p:cNvSpPr/>
-          <p:nvPr/>
-        </p:nvSpPr>
-        <p:spPr>
-          <a:xfrm>
-            <a:off x="822960" y="4798314"/>
-            <a:ext cx="2606040" cy="223266"/>
+          <p:cNvPr id="251" name="Text 249"/>
+          <p:cNvSpPr/>
+          <p:nvPr/>
+        </p:nvSpPr>
+        <p:spPr>
+          <a:xfrm>
+            <a:off x="822960" y="4661154"/>
+            <a:ext cx="2606040" cy="268986"/>
           </a:xfrm>
           <a:prstGeom prst="rect">
             <a:avLst/>
@@ -16118,14 +15472,14 @@
       </p:sp>
       <p:sp>
         <p:nvSpPr>
-          <p:cNvPr id="270" name="Text 268"/>
-          <p:cNvSpPr/>
-          <p:nvPr/>
-        </p:nvSpPr>
-        <p:spPr>
-          <a:xfrm>
-            <a:off x="3447288" y="4798314"/>
-            <a:ext cx="777240" cy="223266"/>
+          <p:cNvPr id="252" name="Text 250"/>
+          <p:cNvSpPr/>
+          <p:nvPr/>
+        </p:nvSpPr>
+        <p:spPr>
+          <a:xfrm>
+            <a:off x="3447288" y="4661154"/>
+            <a:ext cx="777240" cy="268986"/>
           </a:xfrm>
           <a:prstGeom prst="rect">
             <a:avLst/>
@@ -16159,14 +15513,14 @@
       </p:sp>
       <p:sp>
         <p:nvSpPr>
-          <p:cNvPr id="271" name="Text 269"/>
-          <p:cNvSpPr/>
-          <p:nvPr/>
-        </p:nvSpPr>
-        <p:spPr>
-          <a:xfrm>
-            <a:off x="4224528" y="4798314"/>
-            <a:ext cx="502920" cy="223266"/>
+          <p:cNvPr id="253" name="Text 251"/>
+          <p:cNvSpPr/>
+          <p:nvPr/>
+        </p:nvSpPr>
+        <p:spPr>
+          <a:xfrm>
+            <a:off x="4224528" y="4661154"/>
+            <a:ext cx="502920" cy="268986"/>
           </a:xfrm>
           <a:prstGeom prst="rect">
             <a:avLst/>
@@ -16200,14 +15554,14 @@
       </p:sp>
       <p:sp>
         <p:nvSpPr>
-          <p:cNvPr id="272" name="Text 270"/>
-          <p:cNvSpPr/>
-          <p:nvPr/>
-        </p:nvSpPr>
-        <p:spPr>
-          <a:xfrm>
-            <a:off x="4727448" y="4798314"/>
-            <a:ext cx="658368" cy="223266"/>
+          <p:cNvPr id="254" name="Text 252"/>
+          <p:cNvSpPr/>
+          <p:nvPr/>
+        </p:nvSpPr>
+        <p:spPr>
+          <a:xfrm>
+            <a:off x="4727448" y="4661154"/>
+            <a:ext cx="658368" cy="268986"/>
           </a:xfrm>
           <a:prstGeom prst="rect">
             <a:avLst/>
@@ -16241,14 +15595,14 @@
       </p:sp>
       <p:sp>
         <p:nvSpPr>
-          <p:cNvPr id="273" name="Text 271"/>
-          <p:cNvSpPr/>
-          <p:nvPr/>
-        </p:nvSpPr>
-        <p:spPr>
-          <a:xfrm>
-            <a:off x="5385816" y="4798314"/>
-            <a:ext cx="658368" cy="223266"/>
+          <p:cNvPr id="255" name="Text 253"/>
+          <p:cNvSpPr/>
+          <p:nvPr/>
+        </p:nvSpPr>
+        <p:spPr>
+          <a:xfrm>
+            <a:off x="5385816" y="4661154"/>
+            <a:ext cx="658368" cy="268986"/>
           </a:xfrm>
           <a:prstGeom prst="rect">
             <a:avLst/>
@@ -16282,18 +15636,18 @@
       </p:sp>
       <p:sp>
         <p:nvSpPr>
-          <p:cNvPr id="274" name="Shape 272"/>
-          <p:cNvSpPr/>
-          <p:nvPr/>
-        </p:nvSpPr>
-        <p:spPr>
-          <a:xfrm>
-            <a:off x="9615266" y="4845200"/>
-            <a:ext cx="680206" cy="129494"/>
+          <p:cNvPr id="256" name="Shape 254"/>
+          <p:cNvSpPr/>
+          <p:nvPr/>
+        </p:nvSpPr>
+        <p:spPr>
+          <a:xfrm>
+            <a:off x="9615266" y="4717641"/>
+            <a:ext cx="680206" cy="156012"/>
           </a:xfrm>
           <a:prstGeom prst="roundRect">
             <a:avLst>
-              <a:gd name="adj" fmla="val 28245"/>
+              <a:gd name="adj" fmla="val 23444"/>
             </a:avLst>
           </a:prstGeom>
           <a:solidFill>
@@ -16316,14 +15670,14 @@
       </p:sp>
       <p:sp>
         <p:nvSpPr>
-          <p:cNvPr id="275" name="Text 273"/>
-          <p:cNvSpPr/>
-          <p:nvPr/>
-        </p:nvSpPr>
-        <p:spPr>
-          <a:xfrm>
-            <a:off x="9615266" y="4845200"/>
-            <a:ext cx="680206" cy="129494"/>
+          <p:cNvPr id="257" name="Text 255"/>
+          <p:cNvSpPr/>
+          <p:nvPr/>
+        </p:nvSpPr>
+        <p:spPr>
+          <a:xfrm>
+            <a:off x="9615266" y="4717641"/>
+            <a:ext cx="680206" cy="156012"/>
           </a:xfrm>
           <a:prstGeom prst="rect">
             <a:avLst/>
@@ -16357,14 +15711,14 @@
       </p:sp>
       <p:sp>
         <p:nvSpPr>
-          <p:cNvPr id="276" name="Shape 274"/>
-          <p:cNvSpPr/>
-          <p:nvPr/>
-        </p:nvSpPr>
-        <p:spPr>
-          <a:xfrm>
-            <a:off x="365760" y="5021580"/>
-            <a:ext cx="11460175" cy="223266"/>
+          <p:cNvPr id="258" name="Shape 256"/>
+          <p:cNvSpPr/>
+          <p:nvPr/>
+        </p:nvSpPr>
+        <p:spPr>
+          <a:xfrm>
+            <a:off x="365760" y="4930140"/>
+            <a:ext cx="11460175" cy="268986"/>
           </a:xfrm>
           <a:prstGeom prst="rect">
             <a:avLst/>
@@ -16382,13 +15736,13 @@
       </p:sp>
       <p:sp>
         <p:nvSpPr>
-          <p:cNvPr id="277" name="Shape 275"/>
-          <p:cNvSpPr/>
-          <p:nvPr/>
-        </p:nvSpPr>
-        <p:spPr>
-          <a:xfrm>
-            <a:off x="438912" y="5014341"/>
+          <p:cNvPr id="259" name="Shape 257"/>
+          <p:cNvSpPr/>
+          <p:nvPr/>
+        </p:nvSpPr>
+        <p:spPr>
+          <a:xfrm>
+            <a:off x="438912" y="4945761"/>
             <a:ext cx="237744" cy="237744"/>
           </a:xfrm>
           <a:prstGeom prst="ellipse">
@@ -16407,14 +15761,14 @@
       </p:sp>
       <p:sp>
         <p:nvSpPr>
-          <p:cNvPr id="278" name="Text 276"/>
-          <p:cNvSpPr/>
-          <p:nvPr/>
-        </p:nvSpPr>
-        <p:spPr>
-          <a:xfrm>
-            <a:off x="365760" y="5021580"/>
-            <a:ext cx="384048" cy="223266"/>
+          <p:cNvPr id="260" name="Text 258"/>
+          <p:cNvSpPr/>
+          <p:nvPr/>
+        </p:nvSpPr>
+        <p:spPr>
+          <a:xfrm>
+            <a:off x="365760" y="4930140"/>
+            <a:ext cx="384048" cy="268986"/>
           </a:xfrm>
           <a:prstGeom prst="rect">
             <a:avLst/>
@@ -16448,14 +15802,14 @@
       </p:sp>
       <p:sp>
         <p:nvSpPr>
-          <p:cNvPr id="279" name="Text 277"/>
-          <p:cNvSpPr/>
-          <p:nvPr/>
-        </p:nvSpPr>
-        <p:spPr>
-          <a:xfrm>
-            <a:off x="822960" y="5021580"/>
-            <a:ext cx="2606040" cy="223266"/>
+          <p:cNvPr id="261" name="Text 259"/>
+          <p:cNvSpPr/>
+          <p:nvPr/>
+        </p:nvSpPr>
+        <p:spPr>
+          <a:xfrm>
+            <a:off x="822960" y="4930140"/>
+            <a:ext cx="2606040" cy="268986"/>
           </a:xfrm>
           <a:prstGeom prst="rect">
             <a:avLst/>
@@ -16489,14 +15843,14 @@
       </p:sp>
       <p:sp>
         <p:nvSpPr>
-          <p:cNvPr id="280" name="Text 278"/>
-          <p:cNvSpPr/>
-          <p:nvPr/>
-        </p:nvSpPr>
-        <p:spPr>
-          <a:xfrm>
-            <a:off x="3447288" y="5021580"/>
-            <a:ext cx="777240" cy="223266"/>
+          <p:cNvPr id="262" name="Text 260"/>
+          <p:cNvSpPr/>
+          <p:nvPr/>
+        </p:nvSpPr>
+        <p:spPr>
+          <a:xfrm>
+            <a:off x="3447288" y="4930140"/>
+            <a:ext cx="777240" cy="268986"/>
           </a:xfrm>
           <a:prstGeom prst="rect">
             <a:avLst/>
@@ -16530,14 +15884,14 @@
       </p:sp>
       <p:sp>
         <p:nvSpPr>
-          <p:cNvPr id="281" name="Text 279"/>
-          <p:cNvSpPr/>
-          <p:nvPr/>
-        </p:nvSpPr>
-        <p:spPr>
-          <a:xfrm>
-            <a:off x="4224528" y="5021580"/>
-            <a:ext cx="502920" cy="223266"/>
+          <p:cNvPr id="263" name="Text 261"/>
+          <p:cNvSpPr/>
+          <p:nvPr/>
+        </p:nvSpPr>
+        <p:spPr>
+          <a:xfrm>
+            <a:off x="4224528" y="4930140"/>
+            <a:ext cx="502920" cy="268986"/>
           </a:xfrm>
           <a:prstGeom prst="rect">
             <a:avLst/>
@@ -16571,14 +15925,14 @@
       </p:sp>
       <p:sp>
         <p:nvSpPr>
-          <p:cNvPr id="282" name="Text 280"/>
-          <p:cNvSpPr/>
-          <p:nvPr/>
-        </p:nvSpPr>
-        <p:spPr>
-          <a:xfrm>
-            <a:off x="4727448" y="5021580"/>
-            <a:ext cx="658368" cy="223266"/>
+          <p:cNvPr id="264" name="Text 262"/>
+          <p:cNvSpPr/>
+          <p:nvPr/>
+        </p:nvSpPr>
+        <p:spPr>
+          <a:xfrm>
+            <a:off x="4727448" y="4930140"/>
+            <a:ext cx="658368" cy="268986"/>
           </a:xfrm>
           <a:prstGeom prst="rect">
             <a:avLst/>
@@ -16612,14 +15966,14 @@
       </p:sp>
       <p:sp>
         <p:nvSpPr>
-          <p:cNvPr id="283" name="Text 281"/>
-          <p:cNvSpPr/>
-          <p:nvPr/>
-        </p:nvSpPr>
-        <p:spPr>
-          <a:xfrm>
-            <a:off x="5385816" y="5021580"/>
-            <a:ext cx="658368" cy="223266"/>
+          <p:cNvPr id="265" name="Text 263"/>
+          <p:cNvSpPr/>
+          <p:nvPr/>
+        </p:nvSpPr>
+        <p:spPr>
+          <a:xfrm>
+            <a:off x="5385816" y="4930140"/>
+            <a:ext cx="658368" cy="268986"/>
           </a:xfrm>
           <a:prstGeom prst="rect">
             <a:avLst/>
@@ -16653,18 +16007,18 @@
       </p:sp>
       <p:sp>
         <p:nvSpPr>
-          <p:cNvPr id="284" name="Shape 282"/>
-          <p:cNvSpPr/>
-          <p:nvPr/>
-        </p:nvSpPr>
-        <p:spPr>
-          <a:xfrm>
-            <a:off x="9615266" y="5068466"/>
-            <a:ext cx="1190361" cy="129494"/>
+          <p:cNvPr id="266" name="Shape 264"/>
+          <p:cNvSpPr/>
+          <p:nvPr/>
+        </p:nvSpPr>
+        <p:spPr>
+          <a:xfrm>
+            <a:off x="9615266" y="4986627"/>
+            <a:ext cx="1190361" cy="156012"/>
           </a:xfrm>
           <a:prstGeom prst="roundRect">
             <a:avLst>
-              <a:gd name="adj" fmla="val 28245"/>
+              <a:gd name="adj" fmla="val 23444"/>
             </a:avLst>
           </a:prstGeom>
           <a:solidFill>
@@ -16687,14 +16041,14 @@
       </p:sp>
       <p:sp>
         <p:nvSpPr>
-          <p:cNvPr id="285" name="Text 283"/>
-          <p:cNvSpPr/>
-          <p:nvPr/>
-        </p:nvSpPr>
-        <p:spPr>
-          <a:xfrm>
-            <a:off x="9615266" y="5068466"/>
-            <a:ext cx="1190361" cy="129494"/>
+          <p:cNvPr id="267" name="Text 265"/>
+          <p:cNvSpPr/>
+          <p:nvPr/>
+        </p:nvSpPr>
+        <p:spPr>
+          <a:xfrm>
+            <a:off x="9615266" y="4986627"/>
+            <a:ext cx="1190361" cy="156012"/>
           </a:xfrm>
           <a:prstGeom prst="rect">
             <a:avLst/>
@@ -16728,14 +16082,14 @@
       </p:sp>
       <p:sp>
         <p:nvSpPr>
-          <p:cNvPr id="286" name="Shape 284"/>
-          <p:cNvSpPr/>
-          <p:nvPr/>
-        </p:nvSpPr>
-        <p:spPr>
-          <a:xfrm>
-            <a:off x="365760" y="5244846"/>
-            <a:ext cx="11460175" cy="223266"/>
+          <p:cNvPr id="268" name="Shape 266"/>
+          <p:cNvSpPr/>
+          <p:nvPr/>
+        </p:nvSpPr>
+        <p:spPr>
+          <a:xfrm>
+            <a:off x="365760" y="5199126"/>
+            <a:ext cx="11460175" cy="268986"/>
           </a:xfrm>
           <a:prstGeom prst="rect">
             <a:avLst/>
@@ -16753,13 +16107,13 @@
       </p:sp>
       <p:sp>
         <p:nvSpPr>
-          <p:cNvPr id="287" name="Shape 285"/>
-          <p:cNvSpPr/>
-          <p:nvPr/>
-        </p:nvSpPr>
-        <p:spPr>
-          <a:xfrm>
-            <a:off x="438912" y="5237607"/>
+          <p:cNvPr id="269" name="Shape 267"/>
+          <p:cNvSpPr/>
+          <p:nvPr/>
+        </p:nvSpPr>
+        <p:spPr>
+          <a:xfrm>
+            <a:off x="438912" y="5214747"/>
             <a:ext cx="237744" cy="237744"/>
           </a:xfrm>
           <a:prstGeom prst="ellipse">
@@ -16778,14 +16132,14 @@
       </p:sp>
       <p:sp>
         <p:nvSpPr>
-          <p:cNvPr id="288" name="Text 286"/>
-          <p:cNvSpPr/>
-          <p:nvPr/>
-        </p:nvSpPr>
-        <p:spPr>
-          <a:xfrm>
-            <a:off x="365760" y="5244846"/>
-            <a:ext cx="384048" cy="223266"/>
+          <p:cNvPr id="270" name="Text 268"/>
+          <p:cNvSpPr/>
+          <p:nvPr/>
+        </p:nvSpPr>
+        <p:spPr>
+          <a:xfrm>
+            <a:off x="365760" y="5199126"/>
+            <a:ext cx="384048" cy="268986"/>
           </a:xfrm>
           <a:prstGeom prst="rect">
             <a:avLst/>
@@ -16819,14 +16173,14 @@
       </p:sp>
       <p:sp>
         <p:nvSpPr>
-          <p:cNvPr id="289" name="Text 287"/>
-          <p:cNvSpPr/>
-          <p:nvPr/>
-        </p:nvSpPr>
-        <p:spPr>
-          <a:xfrm>
-            <a:off x="822960" y="5244846"/>
-            <a:ext cx="2606040" cy="223266"/>
+          <p:cNvPr id="271" name="Text 269"/>
+          <p:cNvSpPr/>
+          <p:nvPr/>
+        </p:nvSpPr>
+        <p:spPr>
+          <a:xfrm>
+            <a:off x="822960" y="5199126"/>
+            <a:ext cx="2606040" cy="268986"/>
           </a:xfrm>
           <a:prstGeom prst="rect">
             <a:avLst/>
@@ -16860,14 +16214,14 @@
       </p:sp>
       <p:sp>
         <p:nvSpPr>
-          <p:cNvPr id="290" name="Text 288"/>
-          <p:cNvSpPr/>
-          <p:nvPr/>
-        </p:nvSpPr>
-        <p:spPr>
-          <a:xfrm>
-            <a:off x="3447288" y="5244846"/>
-            <a:ext cx="777240" cy="223266"/>
+          <p:cNvPr id="272" name="Text 270"/>
+          <p:cNvSpPr/>
+          <p:nvPr/>
+        </p:nvSpPr>
+        <p:spPr>
+          <a:xfrm>
+            <a:off x="3447288" y="5199126"/>
+            <a:ext cx="777240" cy="268986"/>
           </a:xfrm>
           <a:prstGeom prst="rect">
             <a:avLst/>
@@ -16901,14 +16255,14 @@
       </p:sp>
       <p:sp>
         <p:nvSpPr>
-          <p:cNvPr id="291" name="Text 289"/>
-          <p:cNvSpPr/>
-          <p:nvPr/>
-        </p:nvSpPr>
-        <p:spPr>
-          <a:xfrm>
-            <a:off x="4224528" y="5244846"/>
-            <a:ext cx="502920" cy="223266"/>
+          <p:cNvPr id="273" name="Text 271"/>
+          <p:cNvSpPr/>
+          <p:nvPr/>
+        </p:nvSpPr>
+        <p:spPr>
+          <a:xfrm>
+            <a:off x="4224528" y="5199126"/>
+            <a:ext cx="502920" cy="268986"/>
           </a:xfrm>
           <a:prstGeom prst="rect">
             <a:avLst/>
@@ -16942,14 +16296,14 @@
       </p:sp>
       <p:sp>
         <p:nvSpPr>
-          <p:cNvPr id="292" name="Text 290"/>
-          <p:cNvSpPr/>
-          <p:nvPr/>
-        </p:nvSpPr>
-        <p:spPr>
-          <a:xfrm>
-            <a:off x="4727448" y="5244846"/>
-            <a:ext cx="658368" cy="223266"/>
+          <p:cNvPr id="274" name="Text 272"/>
+          <p:cNvSpPr/>
+          <p:nvPr/>
+        </p:nvSpPr>
+        <p:spPr>
+          <a:xfrm>
+            <a:off x="4727448" y="5199126"/>
+            <a:ext cx="658368" cy="268986"/>
           </a:xfrm>
           <a:prstGeom prst="rect">
             <a:avLst/>
@@ -16983,14 +16337,14 @@
       </p:sp>
       <p:sp>
         <p:nvSpPr>
-          <p:cNvPr id="293" name="Text 291"/>
-          <p:cNvSpPr/>
-          <p:nvPr/>
-        </p:nvSpPr>
-        <p:spPr>
-          <a:xfrm>
-            <a:off x="5385816" y="5244846"/>
-            <a:ext cx="658368" cy="223266"/>
+          <p:cNvPr id="275" name="Text 273"/>
+          <p:cNvSpPr/>
+          <p:nvPr/>
+        </p:nvSpPr>
+        <p:spPr>
+          <a:xfrm>
+            <a:off x="5385816" y="5199126"/>
+            <a:ext cx="658368" cy="268986"/>
           </a:xfrm>
           <a:prstGeom prst="rect">
             <a:avLst/>
@@ -17024,18 +16378,18 @@
       </p:sp>
       <p:sp>
         <p:nvSpPr>
-          <p:cNvPr id="294" name="Shape 292"/>
-          <p:cNvSpPr/>
-          <p:nvPr/>
-        </p:nvSpPr>
-        <p:spPr>
-          <a:xfrm>
-            <a:off x="10805626" y="5291732"/>
-            <a:ext cx="680206" cy="129494"/>
+          <p:cNvPr id="276" name="Shape 274"/>
+          <p:cNvSpPr/>
+          <p:nvPr/>
+        </p:nvSpPr>
+        <p:spPr>
+          <a:xfrm>
+            <a:off x="10805626" y="5255613"/>
+            <a:ext cx="680206" cy="156012"/>
           </a:xfrm>
           <a:prstGeom prst="roundRect">
             <a:avLst>
-              <a:gd name="adj" fmla="val 28245"/>
+              <a:gd name="adj" fmla="val 23444"/>
             </a:avLst>
           </a:prstGeom>
           <a:solidFill>
@@ -17058,14 +16412,14 @@
       </p:sp>
       <p:sp>
         <p:nvSpPr>
-          <p:cNvPr id="295" name="Text 293"/>
-          <p:cNvSpPr/>
-          <p:nvPr/>
-        </p:nvSpPr>
-        <p:spPr>
-          <a:xfrm>
-            <a:off x="10805626" y="5291732"/>
-            <a:ext cx="680206" cy="129494"/>
+          <p:cNvPr id="277" name="Text 275"/>
+          <p:cNvSpPr/>
+          <p:nvPr/>
+        </p:nvSpPr>
+        <p:spPr>
+          <a:xfrm>
+            <a:off x="10805626" y="5255613"/>
+            <a:ext cx="680206" cy="156012"/>
           </a:xfrm>
           <a:prstGeom prst="rect">
             <a:avLst/>
@@ -17099,14 +16453,435 @@
       </p:sp>
       <p:sp>
         <p:nvSpPr>
+          <p:cNvPr id="278" name="Shape 276"/>
+          <p:cNvSpPr/>
+          <p:nvPr/>
+        </p:nvSpPr>
+        <p:spPr>
+          <a:xfrm>
+            <a:off x="7459460" y="2721765"/>
+            <a:ext cx="0" cy="190980"/>
+          </a:xfrm>
+          <a:prstGeom prst="line">
+            <a:avLst/>
+          </a:prstGeom>
+          <a:noFill/>
+          <a:ln w="13970">
+            <a:solidFill>
+              <a:srgbClr val="2D3338"/>
+            </a:solidFill>
+            <a:prstDash val="solid"/>
+          </a:ln>
+        </p:spPr>
+      </p:sp>
+      <p:sp>
+        <p:nvSpPr>
+          <p:cNvPr id="279" name="Shape 277"/>
+          <p:cNvSpPr/>
+          <p:nvPr/>
+        </p:nvSpPr>
+        <p:spPr>
+          <a:xfrm>
+            <a:off x="7459460" y="2912745"/>
+            <a:ext cx="276095" cy="0"/>
+          </a:xfrm>
+          <a:prstGeom prst="line">
+            <a:avLst/>
+          </a:prstGeom>
+          <a:noFill/>
+          <a:ln w="13970">
+            <a:solidFill>
+              <a:srgbClr val="2D3338"/>
+            </a:solidFill>
+            <a:prstDash val="solid"/>
+            <a:tailEnd type="triangle"/>
+          </a:ln>
+        </p:spPr>
+      </p:sp>
+      <p:sp>
+        <p:nvSpPr>
+          <p:cNvPr id="280" name="Shape 278"/>
+          <p:cNvSpPr/>
+          <p:nvPr/>
+        </p:nvSpPr>
+        <p:spPr>
+          <a:xfrm>
+            <a:off x="7799563" y="2990751"/>
+            <a:ext cx="0" cy="190980"/>
+          </a:xfrm>
+          <a:prstGeom prst="line">
+            <a:avLst/>
+          </a:prstGeom>
+          <a:noFill/>
+          <a:ln w="13970">
+            <a:solidFill>
+              <a:srgbClr val="2D3338"/>
+            </a:solidFill>
+            <a:prstDash val="solid"/>
+          </a:ln>
+        </p:spPr>
+      </p:sp>
+      <p:sp>
+        <p:nvSpPr>
+          <p:cNvPr id="281" name="Shape 279"/>
+          <p:cNvSpPr/>
+          <p:nvPr/>
+        </p:nvSpPr>
+        <p:spPr>
+          <a:xfrm>
+            <a:off x="7799563" y="3181731"/>
+            <a:ext cx="106044" cy="0"/>
+          </a:xfrm>
+          <a:prstGeom prst="line">
+            <a:avLst/>
+          </a:prstGeom>
+          <a:noFill/>
+          <a:ln w="13970">
+            <a:solidFill>
+              <a:srgbClr val="2D3338"/>
+            </a:solidFill>
+            <a:prstDash val="solid"/>
+            <a:tailEnd type="triangle"/>
+          </a:ln>
+        </p:spPr>
+      </p:sp>
+      <p:sp>
+        <p:nvSpPr>
+          <p:cNvPr id="282" name="Shape 280"/>
+          <p:cNvSpPr/>
+          <p:nvPr/>
+        </p:nvSpPr>
+        <p:spPr>
+          <a:xfrm>
+            <a:off x="7969615" y="3259737"/>
+            <a:ext cx="0" cy="190980"/>
+          </a:xfrm>
+          <a:prstGeom prst="line">
+            <a:avLst/>
+          </a:prstGeom>
+          <a:noFill/>
+          <a:ln w="13970">
+            <a:solidFill>
+              <a:srgbClr val="2D3338"/>
+            </a:solidFill>
+            <a:prstDash val="solid"/>
+          </a:ln>
+        </p:spPr>
+      </p:sp>
+      <p:sp>
+        <p:nvSpPr>
+          <p:cNvPr id="283" name="Shape 281"/>
+          <p:cNvSpPr/>
+          <p:nvPr/>
+        </p:nvSpPr>
+        <p:spPr>
+          <a:xfrm>
+            <a:off x="7969615" y="3450717"/>
+            <a:ext cx="106044" cy="0"/>
+          </a:xfrm>
+          <a:prstGeom prst="line">
+            <a:avLst/>
+          </a:prstGeom>
+          <a:noFill/>
+          <a:ln w="13970">
+            <a:solidFill>
+              <a:srgbClr val="2D3338"/>
+            </a:solidFill>
+            <a:prstDash val="solid"/>
+            <a:tailEnd type="triangle"/>
+          </a:ln>
+        </p:spPr>
+      </p:sp>
+      <p:sp>
+        <p:nvSpPr>
+          <p:cNvPr id="284" name="Shape 282"/>
+          <p:cNvSpPr/>
+          <p:nvPr/>
+        </p:nvSpPr>
+        <p:spPr>
+          <a:xfrm>
+            <a:off x="8139666" y="3528723"/>
+            <a:ext cx="0" cy="190980"/>
+          </a:xfrm>
+          <a:prstGeom prst="line">
+            <a:avLst/>
+          </a:prstGeom>
+          <a:noFill/>
+          <a:ln w="13970">
+            <a:solidFill>
+              <a:srgbClr val="2D3338"/>
+            </a:solidFill>
+            <a:prstDash val="solid"/>
+          </a:ln>
+        </p:spPr>
+      </p:sp>
+      <p:sp>
+        <p:nvSpPr>
+          <p:cNvPr id="285" name="Shape 283"/>
+          <p:cNvSpPr/>
+          <p:nvPr/>
+        </p:nvSpPr>
+        <p:spPr>
+          <a:xfrm>
+            <a:off x="8075658" y="3719703"/>
+            <a:ext cx="64008" cy="0"/>
+          </a:xfrm>
+          <a:prstGeom prst="line">
+            <a:avLst/>
+          </a:prstGeom>
+          <a:noFill/>
+          <a:ln w="13970">
+            <a:solidFill>
+              <a:srgbClr val="2D3338"/>
+            </a:solidFill>
+            <a:prstDash val="solid"/>
+            <a:tailEnd type="triangle"/>
+          </a:ln>
+        </p:spPr>
+      </p:sp>
+      <p:sp>
+        <p:nvSpPr>
+          <p:cNvPr id="286" name="Shape 284"/>
+          <p:cNvSpPr/>
+          <p:nvPr/>
+        </p:nvSpPr>
+        <p:spPr>
+          <a:xfrm>
+            <a:off x="7459460" y="2452779"/>
+            <a:ext cx="0" cy="1535910"/>
+          </a:xfrm>
+          <a:prstGeom prst="line">
+            <a:avLst/>
+          </a:prstGeom>
+          <a:noFill/>
+          <a:ln w="13970">
+            <a:solidFill>
+              <a:srgbClr val="2D3338"/>
+            </a:solidFill>
+            <a:prstDash val="solid"/>
+          </a:ln>
+        </p:spPr>
+      </p:sp>
+      <p:sp>
+        <p:nvSpPr>
+          <p:cNvPr id="287" name="Shape 285"/>
+          <p:cNvSpPr/>
+          <p:nvPr/>
+        </p:nvSpPr>
+        <p:spPr>
+          <a:xfrm>
+            <a:off x="7459460" y="3988689"/>
+            <a:ext cx="786250" cy="0"/>
+          </a:xfrm>
+          <a:prstGeom prst="line">
+            <a:avLst/>
+          </a:prstGeom>
+          <a:noFill/>
+          <a:ln w="13970">
+            <a:solidFill>
+              <a:srgbClr val="2D3338"/>
+            </a:solidFill>
+            <a:prstDash val="solid"/>
+            <a:tailEnd type="triangle"/>
+          </a:ln>
+        </p:spPr>
+      </p:sp>
+      <p:sp>
+        <p:nvSpPr>
+          <p:cNvPr id="288" name="Shape 286"/>
+          <p:cNvSpPr/>
+          <p:nvPr/>
+        </p:nvSpPr>
+        <p:spPr>
+          <a:xfrm>
+            <a:off x="8209134" y="2374773"/>
+            <a:ext cx="45720" cy="0"/>
+          </a:xfrm>
+          <a:prstGeom prst="line">
+            <a:avLst/>
+          </a:prstGeom>
+          <a:noFill/>
+          <a:ln w="13970">
+            <a:solidFill>
+              <a:srgbClr val="2D3338"/>
+            </a:solidFill>
+            <a:prstDash val="solid"/>
+          </a:ln>
+        </p:spPr>
+      </p:sp>
+      <p:sp>
+        <p:nvSpPr>
+          <p:cNvPr id="289" name="Shape 287"/>
+          <p:cNvSpPr/>
+          <p:nvPr/>
+        </p:nvSpPr>
+        <p:spPr>
+          <a:xfrm>
+            <a:off x="8209134" y="2374773"/>
+            <a:ext cx="0" cy="1882902"/>
+          </a:xfrm>
+          <a:prstGeom prst="line">
+            <a:avLst/>
+          </a:prstGeom>
+          <a:noFill/>
+          <a:ln w="13970">
+            <a:solidFill>
+              <a:srgbClr val="2D3338"/>
+            </a:solidFill>
+            <a:prstDash val="solid"/>
+          </a:ln>
+        </p:spPr>
+      </p:sp>
+      <p:sp>
+        <p:nvSpPr>
+          <p:cNvPr id="290" name="Shape 288"/>
+          <p:cNvSpPr/>
+          <p:nvPr/>
+        </p:nvSpPr>
+        <p:spPr>
+          <a:xfrm>
+            <a:off x="8209134" y="4257675"/>
+            <a:ext cx="36576" cy="0"/>
+          </a:xfrm>
+          <a:prstGeom prst="line">
+            <a:avLst/>
+          </a:prstGeom>
+          <a:noFill/>
+          <a:ln w="13970">
+            <a:solidFill>
+              <a:srgbClr val="2D3338"/>
+            </a:solidFill>
+            <a:prstDash val="solid"/>
+            <a:tailEnd type="triangle"/>
+          </a:ln>
+        </p:spPr>
+      </p:sp>
+      <p:sp>
+        <p:nvSpPr>
+          <p:cNvPr id="291" name="Shape 289"/>
+          <p:cNvSpPr/>
+          <p:nvPr/>
+        </p:nvSpPr>
+        <p:spPr>
+          <a:xfrm>
+            <a:off x="8549237" y="4257675"/>
+            <a:ext cx="45720" cy="0"/>
+          </a:xfrm>
+          <a:prstGeom prst="line">
+            <a:avLst/>
+          </a:prstGeom>
+          <a:noFill/>
+          <a:ln w="13970">
+            <a:solidFill>
+              <a:srgbClr val="2D3338"/>
+            </a:solidFill>
+            <a:prstDash val="solid"/>
+          </a:ln>
+        </p:spPr>
+      </p:sp>
+      <p:sp>
+        <p:nvSpPr>
+          <p:cNvPr id="292" name="Shape 290"/>
+          <p:cNvSpPr/>
+          <p:nvPr/>
+        </p:nvSpPr>
+        <p:spPr>
+          <a:xfrm>
+            <a:off x="8549237" y="4257675"/>
+            <a:ext cx="0" cy="268986"/>
+          </a:xfrm>
+          <a:prstGeom prst="line">
+            <a:avLst/>
+          </a:prstGeom>
+          <a:noFill/>
+          <a:ln w="13970">
+            <a:solidFill>
+              <a:srgbClr val="2D3338"/>
+            </a:solidFill>
+            <a:prstDash val="solid"/>
+          </a:ln>
+        </p:spPr>
+      </p:sp>
+      <p:sp>
+        <p:nvSpPr>
+          <p:cNvPr id="293" name="Shape 291"/>
+          <p:cNvSpPr/>
+          <p:nvPr/>
+        </p:nvSpPr>
+        <p:spPr>
+          <a:xfrm>
+            <a:off x="8549237" y="4526661"/>
+            <a:ext cx="36576" cy="0"/>
+          </a:xfrm>
+          <a:prstGeom prst="line">
+            <a:avLst/>
+          </a:prstGeom>
+          <a:noFill/>
+          <a:ln w="13970">
+            <a:solidFill>
+              <a:srgbClr val="2D3338"/>
+            </a:solidFill>
+            <a:prstDash val="solid"/>
+            <a:tailEnd type="triangle"/>
+          </a:ln>
+        </p:spPr>
+      </p:sp>
+      <p:sp>
+        <p:nvSpPr>
+          <p:cNvPr id="294" name="Shape 292"/>
+          <p:cNvSpPr/>
+          <p:nvPr/>
+        </p:nvSpPr>
+        <p:spPr>
+          <a:xfrm>
+            <a:off x="9569546" y="4526661"/>
+            <a:ext cx="45720" cy="0"/>
+          </a:xfrm>
+          <a:prstGeom prst="line">
+            <a:avLst/>
+          </a:prstGeom>
+          <a:noFill/>
+          <a:ln w="13970">
+            <a:solidFill>
+              <a:srgbClr val="2D3338"/>
+            </a:solidFill>
+            <a:prstDash val="solid"/>
+          </a:ln>
+        </p:spPr>
+      </p:sp>
+      <p:sp>
+        <p:nvSpPr>
+          <p:cNvPr id="295" name="Shape 293"/>
+          <p:cNvSpPr/>
+          <p:nvPr/>
+        </p:nvSpPr>
+        <p:spPr>
+          <a:xfrm>
+            <a:off x="9569546" y="4526661"/>
+            <a:ext cx="0" cy="268986"/>
+          </a:xfrm>
+          <a:prstGeom prst="line">
+            <a:avLst/>
+          </a:prstGeom>
+          <a:noFill/>
+          <a:ln w="13970">
+            <a:solidFill>
+              <a:srgbClr val="2D3338"/>
+            </a:solidFill>
+            <a:prstDash val="solid"/>
+          </a:ln>
+        </p:spPr>
+      </p:sp>
+      <p:sp>
+        <p:nvSpPr>
           <p:cNvPr id="296" name="Shape 294"/>
           <p:cNvSpPr/>
           <p:nvPr/>
         </p:nvSpPr>
         <p:spPr>
           <a:xfrm>
-            <a:off x="7459460" y="3188566"/>
-            <a:ext cx="0" cy="158519"/>
+            <a:off x="9569546" y="4795647"/>
+            <a:ext cx="36576" cy="0"/>
           </a:xfrm>
           <a:prstGeom prst="line">
             <a:avLst/>
@@ -17117,6 +16892,7 @@
               <a:srgbClr val="2D3338"/>
             </a:solidFill>
             <a:prstDash val="solid"/>
+            <a:tailEnd type="triangle"/>
           </a:ln>
         </p:spPr>
       </p:sp>
@@ -17128,8 +16904,8 @@
         </p:nvSpPr>
         <p:spPr>
           <a:xfrm>
-            <a:off x="7459460" y="3347085"/>
-            <a:ext cx="276095" cy="0"/>
+            <a:off x="9569546" y="4526661"/>
+            <a:ext cx="45720" cy="0"/>
           </a:xfrm>
           <a:prstGeom prst="line">
             <a:avLst/>
@@ -17140,20 +16916,66 @@
               <a:srgbClr val="2D3338"/>
             </a:solidFill>
             <a:prstDash val="solid"/>
+          </a:ln>
+        </p:spPr>
+      </p:sp>
+      <p:sp>
+        <p:nvSpPr>
+          <p:cNvPr id="298" name="Shape 296"/>
+          <p:cNvSpPr/>
+          <p:nvPr/>
+        </p:nvSpPr>
+        <p:spPr>
+          <a:xfrm>
+            <a:off x="9569546" y="4526661"/>
+            <a:ext cx="0" cy="537972"/>
+          </a:xfrm>
+          <a:prstGeom prst="line">
+            <a:avLst/>
+          </a:prstGeom>
+          <a:noFill/>
+          <a:ln w="13970">
+            <a:solidFill>
+              <a:srgbClr val="2D3338"/>
+            </a:solidFill>
+            <a:prstDash val="solid"/>
+          </a:ln>
+        </p:spPr>
+      </p:sp>
+      <p:sp>
+        <p:nvSpPr>
+          <p:cNvPr id="299" name="Shape 297"/>
+          <p:cNvSpPr/>
+          <p:nvPr/>
+        </p:nvSpPr>
+        <p:spPr>
+          <a:xfrm>
+            <a:off x="9569546" y="5064633"/>
+            <a:ext cx="36576" cy="0"/>
+          </a:xfrm>
+          <a:prstGeom prst="line">
+            <a:avLst/>
+          </a:prstGeom>
+          <a:noFill/>
+          <a:ln w="13970">
+            <a:solidFill>
+              <a:srgbClr val="2D3338"/>
+            </a:solidFill>
+            <a:prstDash val="solid"/>
             <a:tailEnd type="triangle"/>
           </a:ln>
         </p:spPr>
       </p:sp>
       <p:sp>
         <p:nvSpPr>
-          <p:cNvPr id="298" name="Shape 296"/>
-          <p:cNvSpPr/>
-          <p:nvPr/>
-        </p:nvSpPr>
-        <p:spPr>
-          <a:xfrm>
-            <a:off x="7799563" y="3411832"/>
-            <a:ext cx="0" cy="158519"/>
+          <p:cNvPr id="300" name="Shape 298"/>
+          <p:cNvSpPr/>
+          <p:nvPr/>
+        </p:nvSpPr>
+        <p:spPr>
+          <a:xfrm>
+            <a:off x="10759906" y="5064633"/>
+            <a:ext cx="45720" cy="0"/>
           </a:xfrm>
           <a:prstGeom prst="line">
             <a:avLst/>
@@ -17169,14 +16991,14 @@
       </p:sp>
       <p:sp>
         <p:nvSpPr>
-          <p:cNvPr id="299" name="Shape 297"/>
-          <p:cNvSpPr/>
-          <p:nvPr/>
-        </p:nvSpPr>
-        <p:spPr>
-          <a:xfrm>
-            <a:off x="7799563" y="3570351"/>
-            <a:ext cx="106044" cy="0"/>
+          <p:cNvPr id="301" name="Shape 299"/>
+          <p:cNvSpPr/>
+          <p:nvPr/>
+        </p:nvSpPr>
+        <p:spPr>
+          <a:xfrm>
+            <a:off x="10759906" y="5064633"/>
+            <a:ext cx="0" cy="268986"/>
           </a:xfrm>
           <a:prstGeom prst="line">
             <a:avLst/>
@@ -17187,504 +17009,36 @@
               <a:srgbClr val="2D3338"/>
             </a:solidFill>
             <a:prstDash val="solid"/>
+          </a:ln>
+        </p:spPr>
+      </p:sp>
+      <p:sp>
+        <p:nvSpPr>
+          <p:cNvPr id="302" name="Shape 300"/>
+          <p:cNvSpPr/>
+          <p:nvPr/>
+        </p:nvSpPr>
+        <p:spPr>
+          <a:xfrm>
+            <a:off x="10759906" y="5333619"/>
+            <a:ext cx="36576" cy="0"/>
+          </a:xfrm>
+          <a:prstGeom prst="line">
+            <a:avLst/>
+          </a:prstGeom>
+          <a:noFill/>
+          <a:ln w="13970">
+            <a:solidFill>
+              <a:srgbClr val="2D3338"/>
+            </a:solidFill>
+            <a:prstDash val="solid"/>
             <a:tailEnd type="triangle"/>
           </a:ln>
         </p:spPr>
       </p:sp>
       <p:sp>
         <p:nvSpPr>
-          <p:cNvPr id="300" name="Shape 298"/>
-          <p:cNvSpPr/>
-          <p:nvPr/>
-        </p:nvSpPr>
-        <p:spPr>
-          <a:xfrm>
-            <a:off x="7969615" y="3635098"/>
-            <a:ext cx="0" cy="158519"/>
-          </a:xfrm>
-          <a:prstGeom prst="line">
-            <a:avLst/>
-          </a:prstGeom>
-          <a:noFill/>
-          <a:ln w="13970">
-            <a:solidFill>
-              <a:srgbClr val="2D3338"/>
-            </a:solidFill>
-            <a:prstDash val="solid"/>
-          </a:ln>
-        </p:spPr>
-      </p:sp>
-      <p:sp>
-        <p:nvSpPr>
-          <p:cNvPr id="301" name="Shape 299"/>
-          <p:cNvSpPr/>
-          <p:nvPr/>
-        </p:nvSpPr>
-        <p:spPr>
-          <a:xfrm>
-            <a:off x="7969615" y="3793617"/>
-            <a:ext cx="106044" cy="0"/>
-          </a:xfrm>
-          <a:prstGeom prst="line">
-            <a:avLst/>
-          </a:prstGeom>
-          <a:noFill/>
-          <a:ln w="13970">
-            <a:solidFill>
-              <a:srgbClr val="2D3338"/>
-            </a:solidFill>
-            <a:prstDash val="solid"/>
-            <a:tailEnd type="triangle"/>
-          </a:ln>
-        </p:spPr>
-      </p:sp>
-      <p:sp>
-        <p:nvSpPr>
-          <p:cNvPr id="302" name="Shape 300"/>
-          <p:cNvSpPr/>
-          <p:nvPr/>
-        </p:nvSpPr>
-        <p:spPr>
-          <a:xfrm>
-            <a:off x="8139666" y="3858364"/>
-            <a:ext cx="0" cy="158519"/>
-          </a:xfrm>
-          <a:prstGeom prst="line">
-            <a:avLst/>
-          </a:prstGeom>
-          <a:noFill/>
-          <a:ln w="13970">
-            <a:solidFill>
-              <a:srgbClr val="2D3338"/>
-            </a:solidFill>
-            <a:prstDash val="solid"/>
-          </a:ln>
-        </p:spPr>
-      </p:sp>
-      <p:sp>
-        <p:nvSpPr>
           <p:cNvPr id="303" name="Shape 301"/>
-          <p:cNvSpPr/>
-          <p:nvPr/>
-        </p:nvSpPr>
-        <p:spPr>
-          <a:xfrm>
-            <a:off x="8075658" y="4016883"/>
-            <a:ext cx="64008" cy="0"/>
-          </a:xfrm>
-          <a:prstGeom prst="line">
-            <a:avLst/>
-          </a:prstGeom>
-          <a:noFill/>
-          <a:ln w="13970">
-            <a:solidFill>
-              <a:srgbClr val="2D3338"/>
-            </a:solidFill>
-            <a:prstDash val="solid"/>
-            <a:tailEnd type="triangle"/>
-          </a:ln>
-        </p:spPr>
-      </p:sp>
-      <p:sp>
-        <p:nvSpPr>
-          <p:cNvPr id="304" name="Shape 302"/>
-          <p:cNvSpPr/>
-          <p:nvPr/>
-        </p:nvSpPr>
-        <p:spPr>
-          <a:xfrm>
-            <a:off x="7459460" y="2965300"/>
-            <a:ext cx="0" cy="1274849"/>
-          </a:xfrm>
-          <a:prstGeom prst="line">
-            <a:avLst/>
-          </a:prstGeom>
-          <a:noFill/>
-          <a:ln w="13970">
-            <a:solidFill>
-              <a:srgbClr val="2D3338"/>
-            </a:solidFill>
-            <a:prstDash val="solid"/>
-          </a:ln>
-        </p:spPr>
-      </p:sp>
-      <p:sp>
-        <p:nvSpPr>
-          <p:cNvPr id="305" name="Shape 303"/>
-          <p:cNvSpPr/>
-          <p:nvPr/>
-        </p:nvSpPr>
-        <p:spPr>
-          <a:xfrm>
-            <a:off x="7459460" y="4240149"/>
-            <a:ext cx="786250" cy="0"/>
-          </a:xfrm>
-          <a:prstGeom prst="line">
-            <a:avLst/>
-          </a:prstGeom>
-          <a:noFill/>
-          <a:ln w="13970">
-            <a:solidFill>
-              <a:srgbClr val="2D3338"/>
-            </a:solidFill>
-            <a:prstDash val="solid"/>
-            <a:tailEnd type="triangle"/>
-          </a:ln>
-        </p:spPr>
-      </p:sp>
-      <p:sp>
-        <p:nvSpPr>
-          <p:cNvPr id="306" name="Shape 304"/>
-          <p:cNvSpPr/>
-          <p:nvPr/>
-        </p:nvSpPr>
-        <p:spPr>
-          <a:xfrm>
-            <a:off x="8209134" y="2900553"/>
-            <a:ext cx="45720" cy="0"/>
-          </a:xfrm>
-          <a:prstGeom prst="line">
-            <a:avLst/>
-          </a:prstGeom>
-          <a:noFill/>
-          <a:ln w="13970">
-            <a:solidFill>
-              <a:srgbClr val="2D3338"/>
-            </a:solidFill>
-            <a:prstDash val="solid"/>
-          </a:ln>
-        </p:spPr>
-      </p:sp>
-      <p:sp>
-        <p:nvSpPr>
-          <p:cNvPr id="307" name="Shape 305"/>
-          <p:cNvSpPr/>
-          <p:nvPr/>
-        </p:nvSpPr>
-        <p:spPr>
-          <a:xfrm>
-            <a:off x="8209134" y="2900553"/>
-            <a:ext cx="0" cy="1562862"/>
-          </a:xfrm>
-          <a:prstGeom prst="line">
-            <a:avLst/>
-          </a:prstGeom>
-          <a:noFill/>
-          <a:ln w="13970">
-            <a:solidFill>
-              <a:srgbClr val="2D3338"/>
-            </a:solidFill>
-            <a:prstDash val="solid"/>
-          </a:ln>
-        </p:spPr>
-      </p:sp>
-      <p:sp>
-        <p:nvSpPr>
-          <p:cNvPr id="308" name="Shape 306"/>
-          <p:cNvSpPr/>
-          <p:nvPr/>
-        </p:nvSpPr>
-        <p:spPr>
-          <a:xfrm>
-            <a:off x="8209134" y="4463415"/>
-            <a:ext cx="36576" cy="0"/>
-          </a:xfrm>
-          <a:prstGeom prst="line">
-            <a:avLst/>
-          </a:prstGeom>
-          <a:noFill/>
-          <a:ln w="13970">
-            <a:solidFill>
-              <a:srgbClr val="2D3338"/>
-            </a:solidFill>
-            <a:prstDash val="solid"/>
-            <a:tailEnd type="triangle"/>
-          </a:ln>
-        </p:spPr>
-      </p:sp>
-      <p:sp>
-        <p:nvSpPr>
-          <p:cNvPr id="309" name="Shape 307"/>
-          <p:cNvSpPr/>
-          <p:nvPr/>
-        </p:nvSpPr>
-        <p:spPr>
-          <a:xfrm>
-            <a:off x="8549237" y="4463415"/>
-            <a:ext cx="45720" cy="0"/>
-          </a:xfrm>
-          <a:prstGeom prst="line">
-            <a:avLst/>
-          </a:prstGeom>
-          <a:noFill/>
-          <a:ln w="13970">
-            <a:solidFill>
-              <a:srgbClr val="2D3338"/>
-            </a:solidFill>
-            <a:prstDash val="solid"/>
-          </a:ln>
-        </p:spPr>
-      </p:sp>
-      <p:sp>
-        <p:nvSpPr>
-          <p:cNvPr id="310" name="Shape 308"/>
-          <p:cNvSpPr/>
-          <p:nvPr/>
-        </p:nvSpPr>
-        <p:spPr>
-          <a:xfrm>
-            <a:off x="8549237" y="4463415"/>
-            <a:ext cx="0" cy="223266"/>
-          </a:xfrm>
-          <a:prstGeom prst="line">
-            <a:avLst/>
-          </a:prstGeom>
-          <a:noFill/>
-          <a:ln w="13970">
-            <a:solidFill>
-              <a:srgbClr val="2D3338"/>
-            </a:solidFill>
-            <a:prstDash val="solid"/>
-          </a:ln>
-        </p:spPr>
-      </p:sp>
-      <p:sp>
-        <p:nvSpPr>
-          <p:cNvPr id="311" name="Shape 309"/>
-          <p:cNvSpPr/>
-          <p:nvPr/>
-        </p:nvSpPr>
-        <p:spPr>
-          <a:xfrm>
-            <a:off x="8549237" y="4686681"/>
-            <a:ext cx="36576" cy="0"/>
-          </a:xfrm>
-          <a:prstGeom prst="line">
-            <a:avLst/>
-          </a:prstGeom>
-          <a:noFill/>
-          <a:ln w="13970">
-            <a:solidFill>
-              <a:srgbClr val="2D3338"/>
-            </a:solidFill>
-            <a:prstDash val="solid"/>
-            <a:tailEnd type="triangle"/>
-          </a:ln>
-        </p:spPr>
-      </p:sp>
-      <p:sp>
-        <p:nvSpPr>
-          <p:cNvPr id="312" name="Shape 310"/>
-          <p:cNvSpPr/>
-          <p:nvPr/>
-        </p:nvSpPr>
-        <p:spPr>
-          <a:xfrm>
-            <a:off x="9569546" y="4686681"/>
-            <a:ext cx="45720" cy="0"/>
-          </a:xfrm>
-          <a:prstGeom prst="line">
-            <a:avLst/>
-          </a:prstGeom>
-          <a:noFill/>
-          <a:ln w="13970">
-            <a:solidFill>
-              <a:srgbClr val="2D3338"/>
-            </a:solidFill>
-            <a:prstDash val="solid"/>
-          </a:ln>
-        </p:spPr>
-      </p:sp>
-      <p:sp>
-        <p:nvSpPr>
-          <p:cNvPr id="313" name="Shape 311"/>
-          <p:cNvSpPr/>
-          <p:nvPr/>
-        </p:nvSpPr>
-        <p:spPr>
-          <a:xfrm>
-            <a:off x="9569546" y="4686681"/>
-            <a:ext cx="0" cy="223266"/>
-          </a:xfrm>
-          <a:prstGeom prst="line">
-            <a:avLst/>
-          </a:prstGeom>
-          <a:noFill/>
-          <a:ln w="13970">
-            <a:solidFill>
-              <a:srgbClr val="2D3338"/>
-            </a:solidFill>
-            <a:prstDash val="solid"/>
-          </a:ln>
-        </p:spPr>
-      </p:sp>
-      <p:sp>
-        <p:nvSpPr>
-          <p:cNvPr id="314" name="Shape 312"/>
-          <p:cNvSpPr/>
-          <p:nvPr/>
-        </p:nvSpPr>
-        <p:spPr>
-          <a:xfrm>
-            <a:off x="9569546" y="4909947"/>
-            <a:ext cx="36576" cy="0"/>
-          </a:xfrm>
-          <a:prstGeom prst="line">
-            <a:avLst/>
-          </a:prstGeom>
-          <a:noFill/>
-          <a:ln w="13970">
-            <a:solidFill>
-              <a:srgbClr val="2D3338"/>
-            </a:solidFill>
-            <a:prstDash val="solid"/>
-            <a:tailEnd type="triangle"/>
-          </a:ln>
-        </p:spPr>
-      </p:sp>
-      <p:sp>
-        <p:nvSpPr>
-          <p:cNvPr id="315" name="Shape 313"/>
-          <p:cNvSpPr/>
-          <p:nvPr/>
-        </p:nvSpPr>
-        <p:spPr>
-          <a:xfrm>
-            <a:off x="9569546" y="4686681"/>
-            <a:ext cx="45720" cy="0"/>
-          </a:xfrm>
-          <a:prstGeom prst="line">
-            <a:avLst/>
-          </a:prstGeom>
-          <a:noFill/>
-          <a:ln w="13970">
-            <a:solidFill>
-              <a:srgbClr val="2D3338"/>
-            </a:solidFill>
-            <a:prstDash val="solid"/>
-          </a:ln>
-        </p:spPr>
-      </p:sp>
-      <p:sp>
-        <p:nvSpPr>
-          <p:cNvPr id="316" name="Shape 314"/>
-          <p:cNvSpPr/>
-          <p:nvPr/>
-        </p:nvSpPr>
-        <p:spPr>
-          <a:xfrm>
-            <a:off x="9569546" y="4686681"/>
-            <a:ext cx="0" cy="446532"/>
-          </a:xfrm>
-          <a:prstGeom prst="line">
-            <a:avLst/>
-          </a:prstGeom>
-          <a:noFill/>
-          <a:ln w="13970">
-            <a:solidFill>
-              <a:srgbClr val="2D3338"/>
-            </a:solidFill>
-            <a:prstDash val="solid"/>
-          </a:ln>
-        </p:spPr>
-      </p:sp>
-      <p:sp>
-        <p:nvSpPr>
-          <p:cNvPr id="317" name="Shape 315"/>
-          <p:cNvSpPr/>
-          <p:nvPr/>
-        </p:nvSpPr>
-        <p:spPr>
-          <a:xfrm>
-            <a:off x="9569546" y="5133213"/>
-            <a:ext cx="36576" cy="0"/>
-          </a:xfrm>
-          <a:prstGeom prst="line">
-            <a:avLst/>
-          </a:prstGeom>
-          <a:noFill/>
-          <a:ln w="13970">
-            <a:solidFill>
-              <a:srgbClr val="2D3338"/>
-            </a:solidFill>
-            <a:prstDash val="solid"/>
-            <a:tailEnd type="triangle"/>
-          </a:ln>
-        </p:spPr>
-      </p:sp>
-      <p:sp>
-        <p:nvSpPr>
-          <p:cNvPr id="318" name="Shape 316"/>
-          <p:cNvSpPr/>
-          <p:nvPr/>
-        </p:nvSpPr>
-        <p:spPr>
-          <a:xfrm>
-            <a:off x="10759906" y="5133213"/>
-            <a:ext cx="45720" cy="0"/>
-          </a:xfrm>
-          <a:prstGeom prst="line">
-            <a:avLst/>
-          </a:prstGeom>
-          <a:noFill/>
-          <a:ln w="13970">
-            <a:solidFill>
-              <a:srgbClr val="2D3338"/>
-            </a:solidFill>
-            <a:prstDash val="solid"/>
-          </a:ln>
-        </p:spPr>
-      </p:sp>
-      <p:sp>
-        <p:nvSpPr>
-          <p:cNvPr id="319" name="Shape 317"/>
-          <p:cNvSpPr/>
-          <p:nvPr/>
-        </p:nvSpPr>
-        <p:spPr>
-          <a:xfrm>
-            <a:off x="10759906" y="5133213"/>
-            <a:ext cx="0" cy="223266"/>
-          </a:xfrm>
-          <a:prstGeom prst="line">
-            <a:avLst/>
-          </a:prstGeom>
-          <a:noFill/>
-          <a:ln w="13970">
-            <a:solidFill>
-              <a:srgbClr val="2D3338"/>
-            </a:solidFill>
-            <a:prstDash val="solid"/>
-          </a:ln>
-        </p:spPr>
-      </p:sp>
-      <p:sp>
-        <p:nvSpPr>
-          <p:cNvPr id="320" name="Shape 318"/>
-          <p:cNvSpPr/>
-          <p:nvPr/>
-        </p:nvSpPr>
-        <p:spPr>
-          <a:xfrm>
-            <a:off x="10759906" y="5356479"/>
-            <a:ext cx="36576" cy="0"/>
-          </a:xfrm>
-          <a:prstGeom prst="line">
-            <a:avLst/>
-          </a:prstGeom>
-          <a:noFill/>
-          <a:ln w="13970">
-            <a:solidFill>
-              <a:srgbClr val="2D3338"/>
-            </a:solidFill>
-            <a:prstDash val="solid"/>
-            <a:tailEnd type="triangle"/>
-          </a:ln>
-        </p:spPr>
-      </p:sp>
-      <p:sp>
-        <p:nvSpPr>
-          <p:cNvPr id="321" name="Shape 319"/>
           <p:cNvSpPr/>
           <p:nvPr/>
         </p:nvSpPr>
@@ -17707,7 +17061,7 @@
       </p:sp>
       <p:sp>
         <p:nvSpPr>
-          <p:cNvPr id="322" name="Shape 320"/>
+          <p:cNvPr id="304" name="Shape 302"/>
           <p:cNvSpPr/>
           <p:nvPr/>
         </p:nvSpPr>
@@ -17734,7 +17088,7 @@
       </p:sp>
       <p:sp>
         <p:nvSpPr>
-          <p:cNvPr id="323" name="Text 321"/>
+          <p:cNvPr id="305" name="Text 303"/>
           <p:cNvSpPr/>
           <p:nvPr/>
         </p:nvSpPr>
@@ -17775,7 +17129,7 @@
       </p:sp>
       <p:sp>
         <p:nvSpPr>
-          <p:cNvPr id="324" name="Shape 322"/>
+          <p:cNvPr id="306" name="Shape 304"/>
           <p:cNvSpPr/>
           <p:nvPr/>
         </p:nvSpPr>
@@ -17802,7 +17156,7 @@
       </p:sp>
       <p:sp>
         <p:nvSpPr>
-          <p:cNvPr id="325" name="Shape 323"/>
+          <p:cNvPr id="307" name="Shape 305"/>
           <p:cNvSpPr/>
           <p:nvPr/>
         </p:nvSpPr>
@@ -17836,7 +17190,7 @@
       </p:sp>
       <p:sp>
         <p:nvSpPr>
-          <p:cNvPr id="326" name="Shape 324"/>
+          <p:cNvPr id="308" name="Shape 306"/>
           <p:cNvSpPr/>
           <p:nvPr/>
         </p:nvSpPr>
@@ -17861,7 +17215,7 @@
       </p:sp>
       <p:sp>
         <p:nvSpPr>
-          <p:cNvPr id="327" name="Text 325"/>
+          <p:cNvPr id="309" name="Text 307"/>
           <p:cNvSpPr/>
           <p:nvPr/>
         </p:nvSpPr>
@@ -17902,7 +17256,7 @@
       </p:sp>
       <p:sp>
         <p:nvSpPr>
-          <p:cNvPr id="328" name="Text 326"/>
+          <p:cNvPr id="310" name="Text 308"/>
           <p:cNvSpPr/>
           <p:nvPr/>
         </p:nvSpPr>
@@ -17943,7 +17297,7 @@
       </p:sp>
       <p:sp>
         <p:nvSpPr>
-          <p:cNvPr id="329" name="Text 327"/>
+          <p:cNvPr id="311" name="Text 309"/>
           <p:cNvSpPr/>
           <p:nvPr/>
         </p:nvSpPr>
@@ -17984,7 +17338,7 @@
       </p:sp>
       <p:sp>
         <p:nvSpPr>
-          <p:cNvPr id="330" name="Shape 328"/>
+          <p:cNvPr id="312" name="Shape 310"/>
           <p:cNvSpPr/>
           <p:nvPr/>
         </p:nvSpPr>
@@ -18018,7 +17372,7 @@
       </p:sp>
       <p:sp>
         <p:nvSpPr>
-          <p:cNvPr id="331" name="Shape 329"/>
+          <p:cNvPr id="313" name="Shape 311"/>
           <p:cNvSpPr/>
           <p:nvPr/>
         </p:nvSpPr>
@@ -18043,7 +17397,7 @@
       </p:sp>
       <p:sp>
         <p:nvSpPr>
-          <p:cNvPr id="332" name="Text 330"/>
+          <p:cNvPr id="314" name="Text 312"/>
           <p:cNvSpPr/>
           <p:nvPr/>
         </p:nvSpPr>
@@ -18084,7 +17438,7 @@
       </p:sp>
       <p:sp>
         <p:nvSpPr>
-          <p:cNvPr id="333" name="Text 331"/>
+          <p:cNvPr id="315" name="Text 313"/>
           <p:cNvSpPr/>
           <p:nvPr/>
         </p:nvSpPr>
@@ -18125,7 +17479,7 @@
       </p:sp>
       <p:sp>
         <p:nvSpPr>
-          <p:cNvPr id="334" name="Text 332"/>
+          <p:cNvPr id="316" name="Text 314"/>
           <p:cNvSpPr/>
           <p:nvPr/>
         </p:nvSpPr>
@@ -18166,7 +17520,7 @@
       </p:sp>
       <p:sp>
         <p:nvSpPr>
-          <p:cNvPr id="335" name="Shape 333"/>
+          <p:cNvPr id="317" name="Shape 315"/>
           <p:cNvSpPr/>
           <p:nvPr/>
         </p:nvSpPr>
@@ -18200,7 +17554,7 @@
       </p:sp>
       <p:sp>
         <p:nvSpPr>
-          <p:cNvPr id="336" name="Shape 334"/>
+          <p:cNvPr id="318" name="Shape 316"/>
           <p:cNvSpPr/>
           <p:nvPr/>
         </p:nvSpPr>
@@ -18225,7 +17579,7 @@
       </p:sp>
       <p:sp>
         <p:nvSpPr>
-          <p:cNvPr id="337" name="Text 335"/>
+          <p:cNvPr id="319" name="Text 317"/>
           <p:cNvSpPr/>
           <p:nvPr/>
         </p:nvSpPr>
@@ -18266,7 +17620,7 @@
       </p:sp>
       <p:sp>
         <p:nvSpPr>
-          <p:cNvPr id="338" name="Text 336"/>
+          <p:cNvPr id="320" name="Text 318"/>
           <p:cNvSpPr/>
           <p:nvPr/>
         </p:nvSpPr>
@@ -18307,7 +17661,7 @@
       </p:sp>
       <p:sp>
         <p:nvSpPr>
-          <p:cNvPr id="339" name="Text 337"/>
+          <p:cNvPr id="321" name="Text 319"/>
           <p:cNvSpPr/>
           <p:nvPr/>
         </p:nvSpPr>
@@ -18348,7 +17702,7 @@
       </p:sp>
       <p:sp>
         <p:nvSpPr>
-          <p:cNvPr id="340" name="Shape 338"/>
+          <p:cNvPr id="322" name="Shape 320"/>
           <p:cNvSpPr/>
           <p:nvPr/>
         </p:nvSpPr>
@@ -18382,7 +17736,7 @@
       </p:sp>
       <p:sp>
         <p:nvSpPr>
-          <p:cNvPr id="341" name="Shape 339"/>
+          <p:cNvPr id="323" name="Shape 321"/>
           <p:cNvSpPr/>
           <p:nvPr/>
         </p:nvSpPr>
@@ -18407,7 +17761,7 @@
       </p:sp>
       <p:sp>
         <p:nvSpPr>
-          <p:cNvPr id="342" name="Text 340"/>
+          <p:cNvPr id="324" name="Text 322"/>
           <p:cNvSpPr/>
           <p:nvPr/>
         </p:nvSpPr>
@@ -18448,7 +17802,7 @@
       </p:sp>
       <p:sp>
         <p:nvSpPr>
-          <p:cNvPr id="343" name="Text 341"/>
+          <p:cNvPr id="325" name="Text 323"/>
           <p:cNvSpPr/>
           <p:nvPr/>
         </p:nvSpPr>
@@ -18489,7 +17843,7 @@
       </p:sp>
       <p:sp>
         <p:nvSpPr>
-          <p:cNvPr id="344" name="Text 342"/>
+          <p:cNvPr id="326" name="Text 324"/>
           <p:cNvSpPr/>
           <p:nvPr/>
         </p:nvSpPr>
@@ -18530,7 +17884,7 @@
       </p:sp>
       <p:sp>
         <p:nvSpPr>
-          <p:cNvPr id="345" name="Shape 343"/>
+          <p:cNvPr id="327" name="Shape 325"/>
           <p:cNvSpPr/>
           <p:nvPr/>
         </p:nvSpPr>
@@ -18564,7 +17918,7 @@
       </p:sp>
       <p:sp>
         <p:nvSpPr>
-          <p:cNvPr id="346" name="Shape 344"/>
+          <p:cNvPr id="328" name="Shape 326"/>
           <p:cNvSpPr/>
           <p:nvPr/>
         </p:nvSpPr>
@@ -18589,7 +17943,7 @@
       </p:sp>
       <p:sp>
         <p:nvSpPr>
-          <p:cNvPr id="347" name="Text 345"/>
+          <p:cNvPr id="329" name="Text 327"/>
           <p:cNvSpPr/>
           <p:nvPr/>
         </p:nvSpPr>
@@ -18630,7 +17984,7 @@
       </p:sp>
       <p:sp>
         <p:nvSpPr>
-          <p:cNvPr id="348" name="Text 346"/>
+          <p:cNvPr id="330" name="Text 328"/>
           <p:cNvSpPr/>
           <p:nvPr/>
         </p:nvSpPr>
@@ -18671,7 +18025,7 @@
       </p:sp>
       <p:sp>
         <p:nvSpPr>
-          <p:cNvPr id="349" name="Text 347"/>
+          <p:cNvPr id="331" name="Text 329"/>
           <p:cNvSpPr/>
           <p:nvPr/>
         </p:nvSpPr>

--- a/ufwl-timeline/UFWL_Presentation_EN.pptx
+++ b/ufwl-timeline/UFWL_Presentation_EN.pptx
@@ -6631,7 +6631,7 @@
                 <a:ea typeface="Calibri" pitchFamily="34" charset="-122"/>
                 <a:cs typeface="Calibri" pitchFamily="34" charset="-120"/>
               </a:rPr>
-              <a:t>Remaining Works – Shoring &amp; Pit Works Programme</a:t>
+              <a:t>Mitigation plan – Shoring, Concrete &amp; Backfilling Schedule</a:t>
             </a:r>
             <a:endParaRPr lang="en-US" sz="2400" dirty="0"/>
           </a:p>
@@ -8180,7 +8180,7 @@
         <p:spPr>
           <a:xfrm>
             <a:off x="6384287" y="1965960"/>
-            <a:ext cx="170052" cy="3502152"/>
+            <a:ext cx="170052" cy="2194560"/>
           </a:xfrm>
           <a:prstGeom prst="rect">
             <a:avLst/>
@@ -8316,7 +8316,7 @@
         <p:spPr>
           <a:xfrm>
             <a:off x="6554339" y="1965960"/>
-            <a:ext cx="0" cy="3502152"/>
+            <a:ext cx="0" cy="2194560"/>
           </a:xfrm>
           <a:prstGeom prst="line">
             <a:avLst/>
@@ -8981,7 +8981,7 @@
         <p:spPr>
           <a:xfrm>
             <a:off x="7574648" y="1965960"/>
-            <a:ext cx="170052" cy="3502152"/>
+            <a:ext cx="170052" cy="2194560"/>
           </a:xfrm>
           <a:prstGeom prst="rect">
             <a:avLst/>
@@ -9117,7 +9117,7 @@
         <p:spPr>
           <a:xfrm>
             <a:off x="7744699" y="1965960"/>
-            <a:ext cx="0" cy="3502152"/>
+            <a:ext cx="0" cy="2194560"/>
           </a:xfrm>
           <a:prstGeom prst="line">
             <a:avLst/>
@@ -9782,7 +9782,7 @@
         <p:spPr>
           <a:xfrm>
             <a:off x="8765008" y="1965960"/>
-            <a:ext cx="170052" cy="3502152"/>
+            <a:ext cx="170052" cy="2194560"/>
           </a:xfrm>
           <a:prstGeom prst="rect">
             <a:avLst/>
@@ -9918,7 +9918,7 @@
         <p:spPr>
           <a:xfrm>
             <a:off x="8935060" y="1965960"/>
-            <a:ext cx="0" cy="3502152"/>
+            <a:ext cx="0" cy="2194560"/>
           </a:xfrm>
           <a:prstGeom prst="line">
             <a:avLst/>
@@ -10583,7 +10583,7 @@
         <p:spPr>
           <a:xfrm>
             <a:off x="9955369" y="1965960"/>
-            <a:ext cx="170052" cy="3502152"/>
+            <a:ext cx="170052" cy="2194560"/>
           </a:xfrm>
           <a:prstGeom prst="rect">
             <a:avLst/>
@@ -10719,7 +10719,7 @@
         <p:spPr>
           <a:xfrm>
             <a:off x="10125420" y="1965960"/>
-            <a:ext cx="0" cy="3502152"/>
+            <a:ext cx="0" cy="2194560"/>
           </a:xfrm>
           <a:prstGeom prst="line">
             <a:avLst/>
@@ -11384,7 +11384,7 @@
         <p:spPr>
           <a:xfrm>
             <a:off x="11145729" y="1965960"/>
-            <a:ext cx="170052" cy="3502152"/>
+            <a:ext cx="170052" cy="2194560"/>
           </a:xfrm>
           <a:prstGeom prst="rect">
             <a:avLst/>
@@ -11520,7 +11520,7 @@
         <p:spPr>
           <a:xfrm>
             <a:off x="11315781" y="1965960"/>
-            <a:ext cx="0" cy="3502152"/>
+            <a:ext cx="0" cy="2194560"/>
           </a:xfrm>
           <a:prstGeom prst="line">
             <a:avLst/>
@@ -12080,7 +12080,7 @@
         <p:spPr>
           <a:xfrm>
             <a:off x="365760" y="2240280"/>
-            <a:ext cx="11460175" cy="268986"/>
+            <a:ext cx="11460175" cy="640080"/>
           </a:xfrm>
           <a:prstGeom prst="rect">
             <a:avLst/>
@@ -12104,7 +12104,7 @@
         </p:nvSpPr>
         <p:spPr>
           <a:xfrm>
-            <a:off x="438912" y="2255901"/>
+            <a:off x="438912" y="2441448"/>
             <a:ext cx="237744" cy="237744"/>
           </a:xfrm>
           <a:prstGeom prst="ellipse">
@@ -12130,7 +12130,7 @@
         <p:spPr>
           <a:xfrm>
             <a:off x="365760" y="2240280"/>
-            <a:ext cx="384048" cy="268986"/>
+            <a:ext cx="384048" cy="640080"/>
           </a:xfrm>
           <a:prstGeom prst="rect">
             <a:avLst/>
@@ -12171,7 +12171,7 @@
         <p:spPr>
           <a:xfrm>
             <a:off x="822960" y="2240280"/>
-            <a:ext cx="2606040" cy="268986"/>
+            <a:ext cx="2606040" cy="640080"/>
           </a:xfrm>
           <a:prstGeom prst="rect">
             <a:avLst/>
@@ -12189,7 +12189,7 @@
               <a:buNone/>
             </a:pPr>
             <a:r>
-              <a:rPr lang="en-US" altLang="en-US" sz="750" b="1" dirty="0">
+              <a:rPr lang="en-US" altLang="en-US" sz="900" b="1" dirty="0">
                 <a:solidFill>
                   <a:srgbClr val="222222"/>
                 </a:solidFill>
@@ -12199,7 +12199,7 @@
               </a:rPr>
               <a:t>Shoring system installation</a:t>
             </a:r>
-            <a:endParaRPr lang="en-US" sz="750" dirty="0"/>
+            <a:endParaRPr lang="en-US" sz="900" dirty="0"/>
           </a:p>
         </p:txBody>
       </p:sp>
@@ -12212,7 +12212,7 @@
         <p:spPr>
           <a:xfrm>
             <a:off x="3447288" y="2240280"/>
-            <a:ext cx="777240" cy="268986"/>
+            <a:ext cx="777240" cy="640080"/>
           </a:xfrm>
           <a:prstGeom prst="rect">
             <a:avLst/>
@@ -12230,7 +12230,7 @@
               <a:buNone/>
             </a:pPr>
             <a:r>
-              <a:rPr lang="en-US" altLang="en-US" sz="700" dirty="0">
+              <a:rPr lang="en-US" altLang="en-US" sz="850" dirty="0">
                 <a:solidFill>
                   <a:srgbClr val="444444"/>
                 </a:solidFill>
@@ -12240,7 +12240,7 @@
               </a:rPr>
               <a:t>—</a:t>
             </a:r>
-            <a:endParaRPr lang="en-US" sz="700" dirty="0"/>
+            <a:endParaRPr lang="en-US" sz="850" dirty="0"/>
           </a:p>
         </p:txBody>
       </p:sp>
@@ -12253,7 +12253,7 @@
         <p:spPr>
           <a:xfrm>
             <a:off x="4224528" y="2240280"/>
-            <a:ext cx="502920" cy="268986"/>
+            <a:ext cx="502920" cy="640080"/>
           </a:xfrm>
           <a:prstGeom prst="rect">
             <a:avLst/>
@@ -12271,7 +12271,7 @@
               <a:buNone/>
             </a:pPr>
             <a:r>
-              <a:rPr lang="en-US" altLang="en-US" sz="900" b="1" dirty="0">
+              <a:rPr lang="en-US" altLang="en-US" sz="1050" b="1" dirty="0">
                 <a:solidFill>
                   <a:srgbClr val="222222"/>
                 </a:solidFill>
@@ -12281,7 +12281,7 @@
               </a:rPr>
               <a:t>4</a:t>
             </a:r>
-            <a:endParaRPr lang="en-US" sz="900" dirty="0"/>
+            <a:endParaRPr lang="en-US" sz="1050" dirty="0"/>
           </a:p>
         </p:txBody>
       </p:sp>
@@ -12294,7 +12294,7 @@
         <p:spPr>
           <a:xfrm>
             <a:off x="4727448" y="2240280"/>
-            <a:ext cx="658368" cy="268986"/>
+            <a:ext cx="658368" cy="640080"/>
           </a:xfrm>
           <a:prstGeom prst="rect">
             <a:avLst/>
@@ -12312,7 +12312,7 @@
               <a:buNone/>
             </a:pPr>
             <a:r>
-              <a:rPr lang="en-US" altLang="en-US" sz="700" b="1" dirty="0">
+              <a:rPr lang="en-US" altLang="en-US" sz="850" b="1" dirty="0">
                 <a:solidFill>
                   <a:srgbClr val="222222"/>
                 </a:solidFill>
@@ -12322,7 +12322,7 @@
               </a:rPr>
               <a:t>22 Oct</a:t>
             </a:r>
-            <a:endParaRPr lang="en-US" sz="700" dirty="0"/>
+            <a:endParaRPr lang="en-US" sz="850" dirty="0"/>
           </a:p>
         </p:txBody>
       </p:sp>
@@ -12335,7 +12335,7 @@
         <p:spPr>
           <a:xfrm>
             <a:off x="5385816" y="2240280"/>
-            <a:ext cx="658368" cy="268986"/>
+            <a:ext cx="658368" cy="640080"/>
           </a:xfrm>
           <a:prstGeom prst="rect">
             <a:avLst/>
@@ -12353,7 +12353,7 @@
               <a:buNone/>
             </a:pPr>
             <a:r>
-              <a:rPr lang="en-US" altLang="en-US" sz="700" b="1" dirty="0">
+              <a:rPr lang="en-US" altLang="en-US" sz="850" b="1" dirty="0">
                 <a:solidFill>
                   <a:srgbClr val="222222"/>
                 </a:solidFill>
@@ -12363,7 +12363,7 @@
               </a:rPr>
               <a:t>26 Oct</a:t>
             </a:r>
-            <a:endParaRPr lang="en-US" sz="700" dirty="0"/>
+            <a:endParaRPr lang="en-US" sz="850" dirty="0"/>
           </a:p>
         </p:txBody>
       </p:sp>
@@ -12375,430 +12375,16 @@
         </p:nvSpPr>
         <p:spPr>
           <a:xfrm>
-            <a:off x="7404596" y="2315337"/>
-            <a:ext cx="850258" cy="64008"/>
-          </a:xfrm>
-          <a:prstGeom prst="rect">
-            <a:avLst/>
-          </a:prstGeom>
-          <a:solidFill>
-            <a:srgbClr val="C8503F"/>
-          </a:solidFill>
-          <a:ln w="12700">
-            <a:solidFill>
-              <a:srgbClr val="C8503F"/>
-            </a:solidFill>
-            <a:prstDash val="solid"/>
-          </a:ln>
-        </p:spPr>
-      </p:sp>
-      <p:sp>
-        <p:nvSpPr>
-          <p:cNvPr id="168" name="Shape 166"/>
-          <p:cNvSpPr/>
-          <p:nvPr/>
-        </p:nvSpPr>
-        <p:spPr>
-          <a:xfrm flipV="1">
-            <a:off x="7404596" y="2379345"/>
-            <a:ext cx="64008" cy="54864"/>
-          </a:xfrm>
-          <a:prstGeom prst="triangle">
-            <a:avLst/>
-          </a:prstGeom>
-          <a:solidFill>
-            <a:srgbClr val="C8503F"/>
-          </a:solidFill>
-          <a:ln w="12700">
-            <a:solidFill>
-              <a:srgbClr val="C8503F"/>
-            </a:solidFill>
-            <a:prstDash val="solid"/>
-          </a:ln>
-        </p:spPr>
-      </p:sp>
-      <p:sp>
-        <p:nvSpPr>
-          <p:cNvPr id="169" name="Shape 167"/>
-          <p:cNvSpPr/>
-          <p:nvPr/>
-        </p:nvSpPr>
-        <p:spPr>
-          <a:xfrm flipV="1">
-            <a:off x="8190846" y="2379345"/>
-            <a:ext cx="64008" cy="54864"/>
-          </a:xfrm>
-          <a:prstGeom prst="triangle">
-            <a:avLst/>
-          </a:prstGeom>
-          <a:solidFill>
-            <a:srgbClr val="C8503F"/>
-          </a:solidFill>
-          <a:ln w="12700">
-            <a:solidFill>
-              <a:srgbClr val="C8503F"/>
-            </a:solidFill>
-            <a:prstDash val="solid"/>
-          </a:ln>
-        </p:spPr>
-      </p:sp>
-      <p:sp>
-        <p:nvSpPr>
-          <p:cNvPr id="170" name="Text 168"/>
-          <p:cNvSpPr/>
-          <p:nvPr/>
-        </p:nvSpPr>
-        <p:spPr>
-          <a:xfrm>
-            <a:off x="8300574" y="2240280"/>
-            <a:ext cx="548640" cy="268986"/>
-          </a:xfrm>
-          <a:prstGeom prst="rect">
-            <a:avLst/>
-          </a:prstGeom>
-          <a:noFill/>
-          <a:ln/>
-        </p:spPr>
-        <p:txBody>
-          <a:bodyPr wrap="square" lIns="0" tIns="0" rIns="0" bIns="0" rtlCol="0" anchor="ctr">
-            <a:normAutofit/>
-          </a:bodyPr>
-          <a:lstStyle/>
-          <a:p>
-            <a:pPr algn="l" indent="0" marL="0">
-              <a:buNone/>
-            </a:pPr>
-            <a:r>
-              <a:rPr lang="en-US" altLang="en-US" sz="750" b="1" dirty="0">
-                <a:solidFill>
-                  <a:srgbClr val="3D3935"/>
-                </a:solidFill>
-                <a:latin typeface="Calibri" pitchFamily="34" charset="0"/>
-                <a:ea typeface="Calibri" pitchFamily="34" charset="-122"/>
-                <a:cs typeface="Calibri" pitchFamily="34" charset="-120"/>
-              </a:rPr>
-              <a:t>4 d</a:t>
-            </a:r>
-            <a:endParaRPr lang="en-US" sz="750" dirty="0"/>
-          </a:p>
-        </p:txBody>
-      </p:sp>
-      <p:sp>
-        <p:nvSpPr>
-          <p:cNvPr id="171" name="Shape 169"/>
-          <p:cNvSpPr/>
-          <p:nvPr/>
-        </p:nvSpPr>
-        <p:spPr>
-          <a:xfrm>
-            <a:off x="365760" y="2509266"/>
-            <a:ext cx="11460175" cy="268986"/>
-          </a:xfrm>
-          <a:prstGeom prst="rect">
-            <a:avLst/>
-          </a:prstGeom>
-          <a:solidFill>
-            <a:srgbClr val="F6F9FA"/>
-          </a:solidFill>
-          <a:ln w="6350">
-            <a:solidFill>
-              <a:srgbClr val="DFE6EA"/>
-            </a:solidFill>
-            <a:prstDash val="solid"/>
-          </a:ln>
-        </p:spPr>
-      </p:sp>
-      <p:sp>
-        <p:nvSpPr>
-          <p:cNvPr id="172" name="Shape 170"/>
-          <p:cNvSpPr/>
-          <p:nvPr/>
-        </p:nvSpPr>
-        <p:spPr>
-          <a:xfrm>
-            <a:off x="420624" y="2566035"/>
-            <a:ext cx="329184" cy="155448"/>
+            <a:off x="7404596" y="2404872"/>
+            <a:ext cx="850258" cy="310896"/>
           </a:xfrm>
           <a:prstGeom prst="roundRect">
             <a:avLst>
-              <a:gd name="adj" fmla="val 50000"/>
+              <a:gd name="adj" fmla="val 11765"/>
             </a:avLst>
           </a:prstGeom>
           <a:solidFill>
-            <a:srgbClr val="D9695A"/>
-          </a:solidFill>
-          <a:ln w="19050">
-            <a:solidFill>
-              <a:srgbClr val="222222"/>
-            </a:solidFill>
-            <a:prstDash val="solid"/>
-          </a:ln>
-        </p:spPr>
-      </p:sp>
-      <p:sp>
-        <p:nvSpPr>
-          <p:cNvPr id="173" name="Text 171"/>
-          <p:cNvSpPr/>
-          <p:nvPr/>
-        </p:nvSpPr>
-        <p:spPr>
-          <a:xfrm>
-            <a:off x="393192" y="2509266"/>
-            <a:ext cx="384048" cy="268986"/>
-          </a:xfrm>
-          <a:prstGeom prst="rect">
-            <a:avLst/>
-          </a:prstGeom>
-          <a:noFill/>
-          <a:ln/>
-        </p:spPr>
-        <p:txBody>
-          <a:bodyPr wrap="square" lIns="0" tIns="0" rIns="0" bIns="0" rtlCol="0" anchor="ctr">
-            <a:normAutofit/>
-          </a:bodyPr>
-          <a:lstStyle/>
-          <a:p>
-            <a:pPr algn="ctr" indent="0" marL="0">
-              <a:buNone/>
-            </a:pPr>
-            <a:r>
-              <a:rPr lang="en-US" altLang="en-US" sz="650" b="1" dirty="0">
-                <a:solidFill>
-                  <a:srgbClr val="FFFFFF"/>
-                </a:solidFill>
-                <a:latin typeface="Calibri" pitchFamily="34" charset="0"/>
-                <a:ea typeface="Calibri" pitchFamily="34" charset="-122"/>
-                <a:cs typeface="Calibri" pitchFamily="34" charset="-120"/>
-              </a:rPr>
-              <a:t>A.1</a:t>
-            </a:r>
-            <a:endParaRPr lang="en-US" sz="650" dirty="0"/>
-          </a:p>
-        </p:txBody>
-      </p:sp>
-      <p:sp>
-        <p:nvSpPr>
-          <p:cNvPr id="174" name="Text 172"/>
-          <p:cNvSpPr/>
-          <p:nvPr/>
-        </p:nvSpPr>
-        <p:spPr>
-          <a:xfrm>
-            <a:off x="987552" y="2509266"/>
-            <a:ext cx="2441448" cy="268986"/>
-          </a:xfrm>
-          <a:prstGeom prst="rect">
-            <a:avLst/>
-          </a:prstGeom>
-          <a:noFill/>
-          <a:ln/>
-        </p:spPr>
-        <p:txBody>
-          <a:bodyPr wrap="square" lIns="0" tIns="0" rIns="0" bIns="0" rtlCol="0" anchor="ctr">
-            <a:normAutofit/>
-          </a:bodyPr>
-          <a:lstStyle/>
-          <a:p>
-            <a:pPr algn="l" indent="0" marL="0">
-              <a:buNone/>
-            </a:pPr>
-            <a:r>
-              <a:rPr lang="en-US" altLang="en-US" sz="700" dirty="0">
-                <a:solidFill>
-                  <a:srgbClr val="222222"/>
-                </a:solidFill>
-                <a:latin typeface="Calibri" pitchFamily="34" charset="0"/>
-                <a:ea typeface="Calibri" pitchFamily="34" charset="-122"/>
-                <a:cs typeface="Calibri" pitchFamily="34" charset="-120"/>
-              </a:rPr>
-              <a:t>Excavation / digging for H-Beam</a:t>
-            </a:r>
-            <a:endParaRPr lang="en-US" sz="700" dirty="0"/>
-          </a:p>
-        </p:txBody>
-      </p:sp>
-      <p:sp>
-        <p:nvSpPr>
-          <p:cNvPr id="175" name="Text 173"/>
-          <p:cNvSpPr/>
-          <p:nvPr/>
-        </p:nvSpPr>
-        <p:spPr>
-          <a:xfrm>
-            <a:off x="3447288" y="2509266"/>
-            <a:ext cx="777240" cy="268986"/>
-          </a:xfrm>
-          <a:prstGeom prst="rect">
-            <a:avLst/>
-          </a:prstGeom>
-          <a:noFill/>
-          <a:ln/>
-        </p:spPr>
-        <p:txBody>
-          <a:bodyPr wrap="square" lIns="0" tIns="0" rIns="0" bIns="0" rtlCol="0" anchor="ctr">
-            <a:normAutofit/>
-          </a:bodyPr>
-          <a:lstStyle/>
-          <a:p>
-            <a:pPr algn="ctr" indent="0" marL="0">
-              <a:buNone/>
-            </a:pPr>
-            <a:r>
-              <a:rPr lang="en-US" altLang="en-US" sz="700" dirty="0">
-                <a:solidFill>
-                  <a:srgbClr val="444444"/>
-                </a:solidFill>
-                <a:latin typeface="Calibri" pitchFamily="34" charset="0"/>
-                <a:ea typeface="Calibri" pitchFamily="34" charset="-122"/>
-                <a:cs typeface="Calibri" pitchFamily="34" charset="-120"/>
-              </a:rPr>
-              <a:t>—</a:t>
-            </a:r>
-            <a:endParaRPr lang="en-US" sz="700" dirty="0"/>
-          </a:p>
-        </p:txBody>
-      </p:sp>
-      <p:sp>
-        <p:nvSpPr>
-          <p:cNvPr id="176" name="Text 174"/>
-          <p:cNvSpPr/>
-          <p:nvPr/>
-        </p:nvSpPr>
-        <p:spPr>
-          <a:xfrm>
-            <a:off x="4224528" y="2509266"/>
-            <a:ext cx="502920" cy="268986"/>
-          </a:xfrm>
-          <a:prstGeom prst="rect">
-            <a:avLst/>
-          </a:prstGeom>
-          <a:noFill/>
-          <a:ln/>
-        </p:spPr>
-        <p:txBody>
-          <a:bodyPr wrap="square" lIns="0" tIns="0" rIns="0" bIns="0" rtlCol="0" anchor="ctr">
-            <a:normAutofit/>
-          </a:bodyPr>
-          <a:lstStyle/>
-          <a:p>
-            <a:pPr algn="ctr" indent="0" marL="0">
-              <a:buNone/>
-            </a:pPr>
-            <a:r>
-              <a:rPr lang="en-US" altLang="en-US" sz="900" b="1" dirty="0">
-                <a:solidFill>
-                  <a:srgbClr val="222222"/>
-                </a:solidFill>
-                <a:latin typeface="Calibri" pitchFamily="34" charset="0"/>
-                <a:ea typeface="Calibri" pitchFamily="34" charset="-122"/>
-                <a:cs typeface="Calibri" pitchFamily="34" charset="-120"/>
-              </a:rPr>
-              <a:t>2</a:t>
-            </a:r>
-            <a:endParaRPr lang="en-US" sz="900" dirty="0"/>
-          </a:p>
-        </p:txBody>
-      </p:sp>
-      <p:sp>
-        <p:nvSpPr>
-          <p:cNvPr id="177" name="Text 175"/>
-          <p:cNvSpPr/>
-          <p:nvPr/>
-        </p:nvSpPr>
-        <p:spPr>
-          <a:xfrm>
-            <a:off x="4727448" y="2509266"/>
-            <a:ext cx="658368" cy="268986"/>
-          </a:xfrm>
-          <a:prstGeom prst="rect">
-            <a:avLst/>
-          </a:prstGeom>
-          <a:noFill/>
-          <a:ln/>
-        </p:spPr>
-        <p:txBody>
-          <a:bodyPr wrap="square" lIns="0" tIns="0" rIns="0" bIns="0" rtlCol="0" anchor="ctr">
-            <a:normAutofit/>
-          </a:bodyPr>
-          <a:lstStyle/>
-          <a:p>
-            <a:pPr algn="ctr" indent="0" marL="0">
-              <a:buNone/>
-            </a:pPr>
-            <a:r>
-              <a:rPr lang="en-US" altLang="en-US" sz="700" b="1" dirty="0">
-                <a:solidFill>
-                  <a:srgbClr val="222222"/>
-                </a:solidFill>
-                <a:latin typeface="Calibri" pitchFamily="34" charset="0"/>
-                <a:ea typeface="Calibri" pitchFamily="34" charset="-122"/>
-                <a:cs typeface="Calibri" pitchFamily="34" charset="-120"/>
-              </a:rPr>
-              <a:t>22 Oct</a:t>
-            </a:r>
-            <a:endParaRPr lang="en-US" sz="700" dirty="0"/>
-          </a:p>
-        </p:txBody>
-      </p:sp>
-      <p:sp>
-        <p:nvSpPr>
-          <p:cNvPr id="178" name="Text 176"/>
-          <p:cNvSpPr/>
-          <p:nvPr/>
-        </p:nvSpPr>
-        <p:spPr>
-          <a:xfrm>
-            <a:off x="5385816" y="2509266"/>
-            <a:ext cx="658368" cy="268986"/>
-          </a:xfrm>
-          <a:prstGeom prst="rect">
-            <a:avLst/>
-          </a:prstGeom>
-          <a:noFill/>
-          <a:ln/>
-        </p:spPr>
-        <p:txBody>
-          <a:bodyPr wrap="square" lIns="0" tIns="0" rIns="0" bIns="0" rtlCol="0" anchor="ctr">
-            <a:normAutofit/>
-          </a:bodyPr>
-          <a:lstStyle/>
-          <a:p>
-            <a:pPr algn="ctr" indent="0" marL="0">
-              <a:buNone/>
-            </a:pPr>
-            <a:r>
-              <a:rPr lang="en-US" altLang="en-US" sz="700" b="1" dirty="0">
-                <a:solidFill>
-                  <a:srgbClr val="222222"/>
-                </a:solidFill>
-                <a:latin typeface="Calibri" pitchFamily="34" charset="0"/>
-                <a:ea typeface="Calibri" pitchFamily="34" charset="-122"/>
-                <a:cs typeface="Calibri" pitchFamily="34" charset="-120"/>
-              </a:rPr>
-              <a:t>24 Oct</a:t>
-            </a:r>
-            <a:endParaRPr lang="en-US" sz="700" dirty="0"/>
-          </a:p>
-        </p:txBody>
-      </p:sp>
-      <p:sp>
-        <p:nvSpPr>
-          <p:cNvPr id="179" name="Shape 177"/>
-          <p:cNvSpPr/>
-          <p:nvPr/>
-        </p:nvSpPr>
-        <p:spPr>
-          <a:xfrm>
-            <a:off x="7404596" y="2565753"/>
-            <a:ext cx="510155" cy="156012"/>
-          </a:xfrm>
-          <a:prstGeom prst="roundRect">
-            <a:avLst>
-              <a:gd name="adj" fmla="val 23444"/>
-            </a:avLst>
-          </a:prstGeom>
-          <a:solidFill>
-            <a:srgbClr val="D9695A"/>
+            <a:srgbClr val="C8503F"/>
           </a:solidFill>
           <a:ln w="19050">
             <a:solidFill>
@@ -12817,14 +12403,14 @@
       </p:sp>
       <p:sp>
         <p:nvSpPr>
-          <p:cNvPr id="180" name="Text 178"/>
-          <p:cNvSpPr/>
-          <p:nvPr/>
-        </p:nvSpPr>
-        <p:spPr>
-          <a:xfrm>
-            <a:off x="7404596" y="2565753"/>
-            <a:ext cx="510155" cy="156012"/>
+          <p:cNvPr id="168" name="Text 166"/>
+          <p:cNvSpPr/>
+          <p:nvPr/>
+        </p:nvSpPr>
+        <p:spPr>
+          <a:xfrm>
+            <a:off x="7404596" y="2404872"/>
+            <a:ext cx="850258" cy="310896"/>
           </a:xfrm>
           <a:prstGeom prst="rect">
             <a:avLst/>
@@ -12850,7 +12436,7 @@
                 <a:ea typeface="Calibri" pitchFamily="34" charset="-122"/>
                 <a:cs typeface="Calibri" pitchFamily="34" charset="-120"/>
               </a:rPr>
-              <a:t>2 d</a:t>
+              <a:t>4 d</a:t>
             </a:r>
             <a:endParaRPr lang="en-US" sz="700" dirty="0"/>
           </a:p>
@@ -12858,20 +12444,20 @@
       </p:sp>
       <p:sp>
         <p:nvSpPr>
-          <p:cNvPr id="181" name="Shape 179"/>
-          <p:cNvSpPr/>
-          <p:nvPr/>
-        </p:nvSpPr>
-        <p:spPr>
-          <a:xfrm>
-            <a:off x="365760" y="2778252"/>
-            <a:ext cx="11460175" cy="268986"/>
-          </a:xfrm>
-          <a:prstGeom prst="rect">
-            <a:avLst/>
-          </a:prstGeom>
-          <a:solidFill>
-            <a:srgbClr val="FFFFFF"/>
+          <p:cNvPr id="169" name="Shape 167"/>
+          <p:cNvSpPr/>
+          <p:nvPr/>
+        </p:nvSpPr>
+        <p:spPr>
+          <a:xfrm>
+            <a:off x="365760" y="2880360"/>
+            <a:ext cx="11460175" cy="640080"/>
+          </a:xfrm>
+          <a:prstGeom prst="rect">
+            <a:avLst/>
+          </a:prstGeom>
+          <a:solidFill>
+            <a:srgbClr val="F6F9FA"/>
           </a:solidFill>
           <a:ln w="6350">
             <a:solidFill>
@@ -12883,295 +12469,293 @@
       </p:sp>
       <p:sp>
         <p:nvSpPr>
-          <p:cNvPr id="182" name="Shape 180"/>
-          <p:cNvSpPr/>
-          <p:nvPr/>
-        </p:nvSpPr>
-        <p:spPr>
-          <a:xfrm>
-            <a:off x="420624" y="2835021"/>
-            <a:ext cx="329184" cy="155448"/>
+          <p:cNvPr id="170" name="Shape 168"/>
+          <p:cNvSpPr/>
+          <p:nvPr/>
+        </p:nvSpPr>
+        <p:spPr>
+          <a:xfrm>
+            <a:off x="438912" y="3081528"/>
+            <a:ext cx="237744" cy="237744"/>
+          </a:xfrm>
+          <a:prstGeom prst="ellipse">
+            <a:avLst/>
+          </a:prstGeom>
+          <a:solidFill>
+            <a:srgbClr val="2E9E6B"/>
+          </a:solidFill>
+          <a:ln w="19050">
+            <a:solidFill>
+              <a:srgbClr val="222222"/>
+            </a:solidFill>
+            <a:prstDash val="solid"/>
+          </a:ln>
+        </p:spPr>
+      </p:sp>
+      <p:sp>
+        <p:nvSpPr>
+          <p:cNvPr id="171" name="Text 169"/>
+          <p:cNvSpPr/>
+          <p:nvPr/>
+        </p:nvSpPr>
+        <p:spPr>
+          <a:xfrm>
+            <a:off x="365760" y="2880360"/>
+            <a:ext cx="384048" cy="640080"/>
+          </a:xfrm>
+          <a:prstGeom prst="rect">
+            <a:avLst/>
+          </a:prstGeom>
+          <a:noFill/>
+          <a:ln/>
+        </p:spPr>
+        <p:txBody>
+          <a:bodyPr wrap="square" lIns="0" tIns="0" rIns="0" bIns="0" rtlCol="0" anchor="ctr">
+            <a:normAutofit/>
+          </a:bodyPr>
+          <a:lstStyle/>
+          <a:p>
+            <a:pPr algn="ctr" indent="0" marL="0">
+              <a:buNone/>
+            </a:pPr>
+            <a:r>
+              <a:rPr lang="en-US" altLang="en-US" sz="850" b="1" dirty="0">
+                <a:solidFill>
+                  <a:srgbClr val="FFFFFF"/>
+                </a:solidFill>
+                <a:latin typeface="Calibri" pitchFamily="34" charset="0"/>
+                <a:ea typeface="Calibri" pitchFamily="34" charset="-122"/>
+                <a:cs typeface="Calibri" pitchFamily="34" charset="-120"/>
+              </a:rPr>
+              <a:t>F</a:t>
+            </a:r>
+            <a:endParaRPr lang="en-US" sz="850" dirty="0"/>
+          </a:p>
+        </p:txBody>
+      </p:sp>
+      <p:sp>
+        <p:nvSpPr>
+          <p:cNvPr id="172" name="Text 170"/>
+          <p:cNvSpPr/>
+          <p:nvPr/>
+        </p:nvSpPr>
+        <p:spPr>
+          <a:xfrm>
+            <a:off x="822960" y="2880360"/>
+            <a:ext cx="2606040" cy="640080"/>
+          </a:xfrm>
+          <a:prstGeom prst="rect">
+            <a:avLst/>
+          </a:prstGeom>
+          <a:noFill/>
+          <a:ln/>
+        </p:spPr>
+        <p:txBody>
+          <a:bodyPr wrap="square" lIns="0" tIns="0" rIns="0" bIns="0" rtlCol="0" anchor="ctr">
+            <a:normAutofit/>
+          </a:bodyPr>
+          <a:lstStyle/>
+          <a:p>
+            <a:pPr algn="l" indent="0" marL="0">
+              <a:buNone/>
+            </a:pPr>
+            <a:r>
+              <a:rPr lang="en-US" altLang="en-US" sz="900" b="1" dirty="0">
+                <a:solidFill>
+                  <a:srgbClr val="222222"/>
+                </a:solidFill>
+                <a:latin typeface="Calibri" pitchFamily="34" charset="0"/>
+                <a:ea typeface="Calibri" pitchFamily="34" charset="-122"/>
+                <a:cs typeface="Calibri" pitchFamily="34" charset="-120"/>
+              </a:rPr>
+              <a:t>Building foundation – excavation, compaction / testing, reinforcement &amp; concrete</a:t>
+            </a:r>
+            <a:endParaRPr lang="en-US" sz="900" dirty="0"/>
+          </a:p>
+        </p:txBody>
+      </p:sp>
+      <p:sp>
+        <p:nvSpPr>
+          <p:cNvPr id="173" name="Text 171"/>
+          <p:cNvSpPr/>
+          <p:nvPr/>
+        </p:nvSpPr>
+        <p:spPr>
+          <a:xfrm>
+            <a:off x="3447288" y="2880360"/>
+            <a:ext cx="777240" cy="640080"/>
+          </a:xfrm>
+          <a:prstGeom prst="rect">
+            <a:avLst/>
+          </a:prstGeom>
+          <a:noFill/>
+          <a:ln/>
+        </p:spPr>
+        <p:txBody>
+          <a:bodyPr wrap="square" lIns="0" tIns="0" rIns="0" bIns="0" rtlCol="0" anchor="ctr">
+            <a:normAutofit/>
+          </a:bodyPr>
+          <a:lstStyle/>
+          <a:p>
+            <a:pPr algn="ctr" indent="0" marL="0">
+              <a:buNone/>
+            </a:pPr>
+            <a:r>
+              <a:rPr lang="en-US" altLang="en-US" sz="850" dirty="0">
+                <a:solidFill>
+                  <a:srgbClr val="444444"/>
+                </a:solidFill>
+                <a:latin typeface="Calibri" pitchFamily="34" charset="0"/>
+                <a:ea typeface="Calibri" pitchFamily="34" charset="-122"/>
+                <a:cs typeface="Calibri" pitchFamily="34" charset="-120"/>
+              </a:rPr>
+              <a:t>A · FS</a:t>
+            </a:r>
+            <a:endParaRPr lang="en-US" sz="850" dirty="0"/>
+          </a:p>
+        </p:txBody>
+      </p:sp>
+      <p:sp>
+        <p:nvSpPr>
+          <p:cNvPr id="174" name="Text 172"/>
+          <p:cNvSpPr/>
+          <p:nvPr/>
+        </p:nvSpPr>
+        <p:spPr>
+          <a:xfrm>
+            <a:off x="4224528" y="2880360"/>
+            <a:ext cx="502920" cy="640080"/>
+          </a:xfrm>
+          <a:prstGeom prst="rect">
+            <a:avLst/>
+          </a:prstGeom>
+          <a:noFill/>
+          <a:ln/>
+        </p:spPr>
+        <p:txBody>
+          <a:bodyPr wrap="square" lIns="0" tIns="0" rIns="0" bIns="0" rtlCol="0" anchor="ctr">
+            <a:normAutofit/>
+          </a:bodyPr>
+          <a:lstStyle/>
+          <a:p>
+            <a:pPr algn="ctr" indent="0" marL="0">
+              <a:buNone/>
+            </a:pPr>
+            <a:r>
+              <a:rPr lang="en-US" altLang="en-US" sz="1050" b="1" dirty="0">
+                <a:solidFill>
+                  <a:srgbClr val="222222"/>
+                </a:solidFill>
+                <a:latin typeface="Calibri" pitchFamily="34" charset="0"/>
+                <a:ea typeface="Calibri" pitchFamily="34" charset="-122"/>
+                <a:cs typeface="Calibri" pitchFamily="34" charset="-120"/>
+              </a:rPr>
+              <a:t>14</a:t>
+            </a:r>
+            <a:endParaRPr lang="en-US" sz="1050" dirty="0"/>
+          </a:p>
+        </p:txBody>
+      </p:sp>
+      <p:sp>
+        <p:nvSpPr>
+          <p:cNvPr id="175" name="Text 173"/>
+          <p:cNvSpPr/>
+          <p:nvPr/>
+        </p:nvSpPr>
+        <p:spPr>
+          <a:xfrm>
+            <a:off x="4727448" y="2880360"/>
+            <a:ext cx="658368" cy="640080"/>
+          </a:xfrm>
+          <a:prstGeom prst="rect">
+            <a:avLst/>
+          </a:prstGeom>
+          <a:noFill/>
+          <a:ln/>
+        </p:spPr>
+        <p:txBody>
+          <a:bodyPr wrap="square" lIns="0" tIns="0" rIns="0" bIns="0" rtlCol="0" anchor="ctr">
+            <a:normAutofit/>
+          </a:bodyPr>
+          <a:lstStyle/>
+          <a:p>
+            <a:pPr algn="ctr" indent="0" marL="0">
+              <a:buNone/>
+            </a:pPr>
+            <a:r>
+              <a:rPr lang="en-US" altLang="en-US" sz="850" b="1" dirty="0">
+                <a:solidFill>
+                  <a:srgbClr val="222222"/>
+                </a:solidFill>
+                <a:latin typeface="Calibri" pitchFamily="34" charset="0"/>
+                <a:ea typeface="Calibri" pitchFamily="34" charset="-122"/>
+                <a:cs typeface="Calibri" pitchFamily="34" charset="-120"/>
+              </a:rPr>
+              <a:t>27 Oct</a:t>
+            </a:r>
+            <a:endParaRPr lang="en-US" sz="850" dirty="0"/>
+          </a:p>
+        </p:txBody>
+      </p:sp>
+      <p:sp>
+        <p:nvSpPr>
+          <p:cNvPr id="176" name="Text 174"/>
+          <p:cNvSpPr/>
+          <p:nvPr/>
+        </p:nvSpPr>
+        <p:spPr>
+          <a:xfrm>
+            <a:off x="5385816" y="2880360"/>
+            <a:ext cx="658368" cy="640080"/>
+          </a:xfrm>
+          <a:prstGeom prst="rect">
+            <a:avLst/>
+          </a:prstGeom>
+          <a:noFill/>
+          <a:ln/>
+        </p:spPr>
+        <p:txBody>
+          <a:bodyPr wrap="square" lIns="0" tIns="0" rIns="0" bIns="0" rtlCol="0" anchor="ctr">
+            <a:normAutofit/>
+          </a:bodyPr>
+          <a:lstStyle/>
+          <a:p>
+            <a:pPr algn="ctr" indent="0" marL="0">
+              <a:buNone/>
+            </a:pPr>
+            <a:r>
+              <a:rPr lang="en-US" altLang="en-US" sz="850" b="1" dirty="0">
+                <a:solidFill>
+                  <a:srgbClr val="222222"/>
+                </a:solidFill>
+                <a:latin typeface="Calibri" pitchFamily="34" charset="0"/>
+                <a:ea typeface="Calibri" pitchFamily="34" charset="-122"/>
+                <a:cs typeface="Calibri" pitchFamily="34" charset="-120"/>
+              </a:rPr>
+              <a:t>11 Nov</a:t>
+            </a:r>
+            <a:endParaRPr lang="en-US" sz="850" dirty="0"/>
+          </a:p>
+        </p:txBody>
+      </p:sp>
+      <p:sp>
+        <p:nvSpPr>
+          <p:cNvPr id="177" name="Shape 175"/>
+          <p:cNvSpPr/>
+          <p:nvPr/>
+        </p:nvSpPr>
+        <p:spPr>
+          <a:xfrm>
+            <a:off x="8254854" y="3044952"/>
+            <a:ext cx="2720824" cy="310896"/>
           </a:xfrm>
           <a:prstGeom prst="roundRect">
             <a:avLst>
-              <a:gd name="adj" fmla="val 50000"/>
+              <a:gd name="adj" fmla="val 11765"/>
             </a:avLst>
           </a:prstGeom>
           <a:solidFill>
-            <a:srgbClr val="D9695A"/>
-          </a:solidFill>
-          <a:ln w="19050">
-            <a:solidFill>
-              <a:srgbClr val="222222"/>
-            </a:solidFill>
-            <a:prstDash val="solid"/>
-          </a:ln>
-        </p:spPr>
-      </p:sp>
-      <p:sp>
-        <p:nvSpPr>
-          <p:cNvPr id="183" name="Text 181"/>
-          <p:cNvSpPr/>
-          <p:nvPr/>
-        </p:nvSpPr>
-        <p:spPr>
-          <a:xfrm>
-            <a:off x="393192" y="2778252"/>
-            <a:ext cx="384048" cy="268986"/>
-          </a:xfrm>
-          <a:prstGeom prst="rect">
-            <a:avLst/>
-          </a:prstGeom>
-          <a:noFill/>
-          <a:ln/>
-        </p:spPr>
-        <p:txBody>
-          <a:bodyPr wrap="square" lIns="0" tIns="0" rIns="0" bIns="0" rtlCol="0" anchor="ctr">
-            <a:normAutofit/>
-          </a:bodyPr>
-          <a:lstStyle/>
-          <a:p>
-            <a:pPr algn="ctr" indent="0" marL="0">
-              <a:buNone/>
-            </a:pPr>
-            <a:r>
-              <a:rPr lang="en-US" altLang="en-US" sz="650" b="1" dirty="0">
-                <a:solidFill>
-                  <a:srgbClr val="FFFFFF"/>
-                </a:solidFill>
-                <a:latin typeface="Calibri" pitchFamily="34" charset="0"/>
-                <a:ea typeface="Calibri" pitchFamily="34" charset="-122"/>
-                <a:cs typeface="Calibri" pitchFamily="34" charset="-120"/>
-              </a:rPr>
-              <a:t>A.2</a:t>
-            </a:r>
-            <a:endParaRPr lang="en-US" sz="650" dirty="0"/>
-          </a:p>
-        </p:txBody>
-      </p:sp>
-      <p:sp>
-        <p:nvSpPr>
-          <p:cNvPr id="184" name="Text 182"/>
-          <p:cNvSpPr/>
-          <p:nvPr/>
-        </p:nvSpPr>
-        <p:spPr>
-          <a:xfrm>
-            <a:off x="987552" y="2778252"/>
-            <a:ext cx="2441448" cy="268986"/>
-          </a:xfrm>
-          <a:prstGeom prst="rect">
-            <a:avLst/>
-          </a:prstGeom>
-          <a:noFill/>
-          <a:ln/>
-        </p:spPr>
-        <p:txBody>
-          <a:bodyPr wrap="square" lIns="0" tIns="0" rIns="0" bIns="0" rtlCol="0" anchor="ctr">
-            <a:normAutofit/>
-          </a:bodyPr>
-          <a:lstStyle/>
-          <a:p>
-            <a:pPr algn="l" indent="0" marL="0">
-              <a:buNone/>
-            </a:pPr>
-            <a:r>
-              <a:rPr lang="en-US" altLang="en-US" sz="700" dirty="0">
-                <a:solidFill>
-                  <a:srgbClr val="222222"/>
-                </a:solidFill>
-                <a:latin typeface="Calibri" pitchFamily="34" charset="0"/>
-                <a:ea typeface="Calibri" pitchFamily="34" charset="-122"/>
-                <a:cs typeface="Calibri" pitchFamily="34" charset="-120"/>
-              </a:rPr>
-              <a:t>Installation of H-Beam</a:t>
-            </a:r>
-            <a:endParaRPr lang="en-US" sz="700" dirty="0"/>
-          </a:p>
-        </p:txBody>
-      </p:sp>
-      <p:sp>
-        <p:nvSpPr>
-          <p:cNvPr id="185" name="Text 183"/>
-          <p:cNvSpPr/>
-          <p:nvPr/>
-        </p:nvSpPr>
-        <p:spPr>
-          <a:xfrm>
-            <a:off x="3447288" y="2778252"/>
-            <a:ext cx="777240" cy="268986"/>
-          </a:xfrm>
-          <a:prstGeom prst="rect">
-            <a:avLst/>
-          </a:prstGeom>
-          <a:noFill/>
-          <a:ln/>
-        </p:spPr>
-        <p:txBody>
-          <a:bodyPr wrap="square" lIns="0" tIns="0" rIns="0" bIns="0" rtlCol="0" anchor="ctr">
-            <a:normAutofit/>
-          </a:bodyPr>
-          <a:lstStyle/>
-          <a:p>
-            <a:pPr algn="ctr" indent="0" marL="0">
-              <a:buNone/>
-            </a:pPr>
-            <a:r>
-              <a:rPr lang="en-US" altLang="en-US" sz="700" dirty="0">
-                <a:solidFill>
-                  <a:srgbClr val="444444"/>
-                </a:solidFill>
-                <a:latin typeface="Calibri" pitchFamily="34" charset="0"/>
-                <a:ea typeface="Calibri" pitchFamily="34" charset="-122"/>
-                <a:cs typeface="Calibri" pitchFamily="34" charset="-120"/>
-              </a:rPr>
-              <a:t>A1 · SS +1</a:t>
-            </a:r>
-            <a:endParaRPr lang="en-US" sz="700" dirty="0"/>
-          </a:p>
-        </p:txBody>
-      </p:sp>
-      <p:sp>
-        <p:nvSpPr>
-          <p:cNvPr id="186" name="Text 184"/>
-          <p:cNvSpPr/>
-          <p:nvPr/>
-        </p:nvSpPr>
-        <p:spPr>
-          <a:xfrm>
-            <a:off x="4224528" y="2778252"/>
-            <a:ext cx="502920" cy="268986"/>
-          </a:xfrm>
-          <a:prstGeom prst="rect">
-            <a:avLst/>
-          </a:prstGeom>
-          <a:noFill/>
-          <a:ln/>
-        </p:spPr>
-        <p:txBody>
-          <a:bodyPr wrap="square" lIns="0" tIns="0" rIns="0" bIns="0" rtlCol="0" anchor="ctr">
-            <a:normAutofit/>
-          </a:bodyPr>
-          <a:lstStyle/>
-          <a:p>
-            <a:pPr algn="ctr" indent="0" marL="0">
-              <a:buNone/>
-            </a:pPr>
-            <a:r>
-              <a:rPr lang="en-US" altLang="en-US" sz="900" b="1" dirty="0">
-                <a:solidFill>
-                  <a:srgbClr val="222222"/>
-                </a:solidFill>
-                <a:latin typeface="Calibri" pitchFamily="34" charset="0"/>
-                <a:ea typeface="Calibri" pitchFamily="34" charset="-122"/>
-                <a:cs typeface="Calibri" pitchFamily="34" charset="-120"/>
-              </a:rPr>
-              <a:t>2</a:t>
-            </a:r>
-            <a:endParaRPr lang="en-US" sz="900" dirty="0"/>
-          </a:p>
-        </p:txBody>
-      </p:sp>
-      <p:sp>
-        <p:nvSpPr>
-          <p:cNvPr id="187" name="Text 185"/>
-          <p:cNvSpPr/>
-          <p:nvPr/>
-        </p:nvSpPr>
-        <p:spPr>
-          <a:xfrm>
-            <a:off x="4727448" y="2778252"/>
-            <a:ext cx="658368" cy="268986"/>
-          </a:xfrm>
-          <a:prstGeom prst="rect">
-            <a:avLst/>
-          </a:prstGeom>
-          <a:noFill/>
-          <a:ln/>
-        </p:spPr>
-        <p:txBody>
-          <a:bodyPr wrap="square" lIns="0" tIns="0" rIns="0" bIns="0" rtlCol="0" anchor="ctr">
-            <a:normAutofit/>
-          </a:bodyPr>
-          <a:lstStyle/>
-          <a:p>
-            <a:pPr algn="ctr" indent="0" marL="0">
-              <a:buNone/>
-            </a:pPr>
-            <a:r>
-              <a:rPr lang="en-US" altLang="en-US" sz="700" b="1" dirty="0">
-                <a:solidFill>
-                  <a:srgbClr val="222222"/>
-                </a:solidFill>
-                <a:latin typeface="Calibri" pitchFamily="34" charset="0"/>
-                <a:ea typeface="Calibri" pitchFamily="34" charset="-122"/>
-                <a:cs typeface="Calibri" pitchFamily="34" charset="-120"/>
-              </a:rPr>
-              <a:t>24 Oct</a:t>
-            </a:r>
-            <a:endParaRPr lang="en-US" sz="700" dirty="0"/>
-          </a:p>
-        </p:txBody>
-      </p:sp>
-      <p:sp>
-        <p:nvSpPr>
-          <p:cNvPr id="188" name="Text 186"/>
-          <p:cNvSpPr/>
-          <p:nvPr/>
-        </p:nvSpPr>
-        <p:spPr>
-          <a:xfrm>
-            <a:off x="5385816" y="2778252"/>
-            <a:ext cx="658368" cy="268986"/>
-          </a:xfrm>
-          <a:prstGeom prst="rect">
-            <a:avLst/>
-          </a:prstGeom>
-          <a:noFill/>
-          <a:ln/>
-        </p:spPr>
-        <p:txBody>
-          <a:bodyPr wrap="square" lIns="0" tIns="0" rIns="0" bIns="0" rtlCol="0" anchor="ctr">
-            <a:normAutofit/>
-          </a:bodyPr>
-          <a:lstStyle/>
-          <a:p>
-            <a:pPr algn="ctr" indent="0" marL="0">
-              <a:buNone/>
-            </a:pPr>
-            <a:r>
-              <a:rPr lang="en-US" altLang="en-US" sz="700" b="1" dirty="0">
-                <a:solidFill>
-                  <a:srgbClr val="222222"/>
-                </a:solidFill>
-                <a:latin typeface="Calibri" pitchFamily="34" charset="0"/>
-                <a:ea typeface="Calibri" pitchFamily="34" charset="-122"/>
-                <a:cs typeface="Calibri" pitchFamily="34" charset="-120"/>
-              </a:rPr>
-              <a:t>25 Oct</a:t>
-            </a:r>
-            <a:endParaRPr lang="en-US" sz="700" dirty="0"/>
-          </a:p>
-        </p:txBody>
-      </p:sp>
-      <p:sp>
-        <p:nvSpPr>
-          <p:cNvPr id="189" name="Shape 187"/>
-          <p:cNvSpPr/>
-          <p:nvPr/>
-        </p:nvSpPr>
-        <p:spPr>
-          <a:xfrm>
-            <a:off x="7744699" y="2834739"/>
-            <a:ext cx="340103" cy="156012"/>
-          </a:xfrm>
-          <a:prstGeom prst="roundRect">
-            <a:avLst>
-              <a:gd name="adj" fmla="val 23444"/>
-            </a:avLst>
-          </a:prstGeom>
-          <a:solidFill>
-            <a:srgbClr val="D9695A"/>
+            <a:srgbClr val="2E9E6B"/>
           </a:solidFill>
           <a:ln w="19050">
             <a:solidFill>
@@ -13190,14 +12774,14 @@
       </p:sp>
       <p:sp>
         <p:nvSpPr>
-          <p:cNvPr id="190" name="Text 188"/>
-          <p:cNvSpPr/>
-          <p:nvPr/>
-        </p:nvSpPr>
-        <p:spPr>
-          <a:xfrm>
-            <a:off x="7744699" y="2834739"/>
-            <a:ext cx="340103" cy="156012"/>
+          <p:cNvPr id="178" name="Text 176"/>
+          <p:cNvSpPr/>
+          <p:nvPr/>
+        </p:nvSpPr>
+        <p:spPr>
+          <a:xfrm>
+            <a:off x="8254854" y="3044952"/>
+            <a:ext cx="2720824" cy="310896"/>
           </a:xfrm>
           <a:prstGeom prst="rect">
             <a:avLst/>
@@ -13223,7 +12807,7 @@
                 <a:ea typeface="Calibri" pitchFamily="34" charset="-122"/>
                 <a:cs typeface="Calibri" pitchFamily="34" charset="-120"/>
               </a:rPr>
-              <a:t>2 d</a:t>
+              <a:t>14 d</a:t>
             </a:r>
             <a:endParaRPr lang="en-US" sz="700" dirty="0"/>
           </a:p>
@@ -13231,20 +12815,20 @@
       </p:sp>
       <p:sp>
         <p:nvSpPr>
-          <p:cNvPr id="191" name="Shape 189"/>
-          <p:cNvSpPr/>
-          <p:nvPr/>
-        </p:nvSpPr>
-        <p:spPr>
-          <a:xfrm>
-            <a:off x="365760" y="3047238"/>
-            <a:ext cx="11460175" cy="268986"/>
-          </a:xfrm>
-          <a:prstGeom prst="rect">
-            <a:avLst/>
-          </a:prstGeom>
-          <a:solidFill>
-            <a:srgbClr val="F6F9FA"/>
+          <p:cNvPr id="179" name="Shape 177"/>
+          <p:cNvSpPr/>
+          <p:nvPr/>
+        </p:nvSpPr>
+        <p:spPr>
+          <a:xfrm>
+            <a:off x="365760" y="3520440"/>
+            <a:ext cx="11460175" cy="640080"/>
+          </a:xfrm>
+          <a:prstGeom prst="rect">
+            <a:avLst/>
+          </a:prstGeom>
+          <a:solidFill>
+            <a:srgbClr val="FFFFFF"/>
           </a:solidFill>
           <a:ln w="6350">
             <a:solidFill>
@@ -13256,295 +12840,293 @@
       </p:sp>
       <p:sp>
         <p:nvSpPr>
-          <p:cNvPr id="192" name="Shape 190"/>
-          <p:cNvSpPr/>
-          <p:nvPr/>
-        </p:nvSpPr>
-        <p:spPr>
-          <a:xfrm>
-            <a:off x="420624" y="3104007"/>
-            <a:ext cx="329184" cy="155448"/>
+          <p:cNvPr id="180" name="Shape 178"/>
+          <p:cNvSpPr/>
+          <p:nvPr/>
+        </p:nvSpPr>
+        <p:spPr>
+          <a:xfrm>
+            <a:off x="438912" y="3721608"/>
+            <a:ext cx="237744" cy="237744"/>
+          </a:xfrm>
+          <a:prstGeom prst="ellipse">
+            <a:avLst/>
+          </a:prstGeom>
+          <a:solidFill>
+            <a:srgbClr val="D68A00"/>
+          </a:solidFill>
+          <a:ln w="19050">
+            <a:solidFill>
+              <a:srgbClr val="222222"/>
+            </a:solidFill>
+            <a:prstDash val="solid"/>
+          </a:ln>
+        </p:spPr>
+      </p:sp>
+      <p:sp>
+        <p:nvSpPr>
+          <p:cNvPr id="181" name="Text 179"/>
+          <p:cNvSpPr/>
+          <p:nvPr/>
+        </p:nvSpPr>
+        <p:spPr>
+          <a:xfrm>
+            <a:off x="365760" y="3520440"/>
+            <a:ext cx="384048" cy="640080"/>
+          </a:xfrm>
+          <a:prstGeom prst="rect">
+            <a:avLst/>
+          </a:prstGeom>
+          <a:noFill/>
+          <a:ln/>
+        </p:spPr>
+        <p:txBody>
+          <a:bodyPr wrap="square" lIns="0" tIns="0" rIns="0" bIns="0" rtlCol="0" anchor="ctr">
+            <a:normAutofit/>
+          </a:bodyPr>
+          <a:lstStyle/>
+          <a:p>
+            <a:pPr algn="ctr" indent="0" marL="0">
+              <a:buNone/>
+            </a:pPr>
+            <a:r>
+              <a:rPr lang="en-US" altLang="en-US" sz="850" b="1" dirty="0">
+                <a:solidFill>
+                  <a:srgbClr val="FFFFFF"/>
+                </a:solidFill>
+                <a:latin typeface="Calibri" pitchFamily="34" charset="0"/>
+                <a:ea typeface="Calibri" pitchFamily="34" charset="-122"/>
+                <a:cs typeface="Calibri" pitchFamily="34" charset="-120"/>
+              </a:rPr>
+              <a:t>G</a:t>
+            </a:r>
+            <a:endParaRPr lang="en-US" sz="850" dirty="0"/>
+          </a:p>
+        </p:txBody>
+      </p:sp>
+      <p:sp>
+        <p:nvSpPr>
+          <p:cNvPr id="182" name="Text 180"/>
+          <p:cNvSpPr/>
+          <p:nvPr/>
+        </p:nvSpPr>
+        <p:spPr>
+          <a:xfrm>
+            <a:off x="822960" y="3520440"/>
+            <a:ext cx="2606040" cy="640080"/>
+          </a:xfrm>
+          <a:prstGeom prst="rect">
+            <a:avLst/>
+          </a:prstGeom>
+          <a:noFill/>
+          <a:ln/>
+        </p:spPr>
+        <p:txBody>
+          <a:bodyPr wrap="square" lIns="0" tIns="0" rIns="0" bIns="0" rtlCol="0" anchor="ctr">
+            <a:normAutofit/>
+          </a:bodyPr>
+          <a:lstStyle/>
+          <a:p>
+            <a:pPr algn="l" indent="0" marL="0">
+              <a:buNone/>
+            </a:pPr>
+            <a:r>
+              <a:rPr lang="en-US" altLang="en-US" sz="900" b="1" dirty="0">
+                <a:solidFill>
+                  <a:srgbClr val="222222"/>
+                </a:solidFill>
+                <a:latin typeface="Calibri" pitchFamily="34" charset="0"/>
+                <a:ea typeface="Calibri" pitchFamily="34" charset="-122"/>
+                <a:cs typeface="Calibri" pitchFamily="34" charset="-120"/>
+              </a:rPr>
+              <a:t>Backfilling works for the building</a:t>
+            </a:r>
+            <a:endParaRPr lang="en-US" sz="900" dirty="0"/>
+          </a:p>
+        </p:txBody>
+      </p:sp>
+      <p:sp>
+        <p:nvSpPr>
+          <p:cNvPr id="183" name="Text 181"/>
+          <p:cNvSpPr/>
+          <p:nvPr/>
+        </p:nvSpPr>
+        <p:spPr>
+          <a:xfrm>
+            <a:off x="3447288" y="3520440"/>
+            <a:ext cx="777240" cy="640080"/>
+          </a:xfrm>
+          <a:prstGeom prst="rect">
+            <a:avLst/>
+          </a:prstGeom>
+          <a:noFill/>
+          <a:ln/>
+        </p:spPr>
+        <p:txBody>
+          <a:bodyPr wrap="square" lIns="0" tIns="0" rIns="0" bIns="0" rtlCol="0" anchor="ctr">
+            <a:normAutofit/>
+          </a:bodyPr>
+          <a:lstStyle/>
+          <a:p>
+            <a:pPr algn="ctr" indent="0" marL="0">
+              <a:buNone/>
+            </a:pPr>
+            <a:r>
+              <a:rPr lang="en-US" altLang="en-US" sz="850" dirty="0">
+                <a:solidFill>
+                  <a:srgbClr val="444444"/>
+                </a:solidFill>
+                <a:latin typeface="Calibri" pitchFamily="34" charset="0"/>
+                <a:ea typeface="Calibri" pitchFamily="34" charset="-122"/>
+                <a:cs typeface="Calibri" pitchFamily="34" charset="-120"/>
+              </a:rPr>
+              <a:t>F · FS</a:t>
+            </a:r>
+            <a:endParaRPr lang="en-US" sz="850" dirty="0"/>
+          </a:p>
+        </p:txBody>
+      </p:sp>
+      <p:sp>
+        <p:nvSpPr>
+          <p:cNvPr id="184" name="Text 182"/>
+          <p:cNvSpPr/>
+          <p:nvPr/>
+        </p:nvSpPr>
+        <p:spPr>
+          <a:xfrm>
+            <a:off x="4224528" y="3520440"/>
+            <a:ext cx="502920" cy="640080"/>
+          </a:xfrm>
+          <a:prstGeom prst="rect">
+            <a:avLst/>
+          </a:prstGeom>
+          <a:noFill/>
+          <a:ln/>
+        </p:spPr>
+        <p:txBody>
+          <a:bodyPr wrap="square" lIns="0" tIns="0" rIns="0" bIns="0" rtlCol="0" anchor="ctr">
+            <a:normAutofit/>
+          </a:bodyPr>
+          <a:lstStyle/>
+          <a:p>
+            <a:pPr algn="ctr" indent="0" marL="0">
+              <a:buNone/>
+            </a:pPr>
+            <a:r>
+              <a:rPr lang="en-US" altLang="en-US" sz="1050" b="1" dirty="0">
+                <a:solidFill>
+                  <a:srgbClr val="222222"/>
+                </a:solidFill>
+                <a:latin typeface="Calibri" pitchFamily="34" charset="0"/>
+                <a:ea typeface="Calibri" pitchFamily="34" charset="-122"/>
+                <a:cs typeface="Calibri" pitchFamily="34" charset="-120"/>
+              </a:rPr>
+              <a:t>2</a:t>
+            </a:r>
+            <a:endParaRPr lang="en-US" sz="1050" dirty="0"/>
+          </a:p>
+        </p:txBody>
+      </p:sp>
+      <p:sp>
+        <p:nvSpPr>
+          <p:cNvPr id="185" name="Text 183"/>
+          <p:cNvSpPr/>
+          <p:nvPr/>
+        </p:nvSpPr>
+        <p:spPr>
+          <a:xfrm>
+            <a:off x="4727448" y="3520440"/>
+            <a:ext cx="658368" cy="640080"/>
+          </a:xfrm>
+          <a:prstGeom prst="rect">
+            <a:avLst/>
+          </a:prstGeom>
+          <a:noFill/>
+          <a:ln/>
+        </p:spPr>
+        <p:txBody>
+          <a:bodyPr wrap="square" lIns="0" tIns="0" rIns="0" bIns="0" rtlCol="0" anchor="ctr">
+            <a:normAutofit/>
+          </a:bodyPr>
+          <a:lstStyle/>
+          <a:p>
+            <a:pPr algn="ctr" indent="0" marL="0">
+              <a:buNone/>
+            </a:pPr>
+            <a:r>
+              <a:rPr lang="en-US" altLang="en-US" sz="850" b="1" dirty="0">
+                <a:solidFill>
+                  <a:srgbClr val="222222"/>
+                </a:solidFill>
+                <a:latin typeface="Calibri" pitchFamily="34" charset="0"/>
+                <a:ea typeface="Calibri" pitchFamily="34" charset="-122"/>
+                <a:cs typeface="Calibri" pitchFamily="34" charset="-120"/>
+              </a:rPr>
+              <a:t>12 Nov</a:t>
+            </a:r>
+            <a:endParaRPr lang="en-US" sz="850" dirty="0"/>
+          </a:p>
+        </p:txBody>
+      </p:sp>
+      <p:sp>
+        <p:nvSpPr>
+          <p:cNvPr id="186" name="Text 184"/>
+          <p:cNvSpPr/>
+          <p:nvPr/>
+        </p:nvSpPr>
+        <p:spPr>
+          <a:xfrm>
+            <a:off x="5385816" y="3520440"/>
+            <a:ext cx="658368" cy="640080"/>
+          </a:xfrm>
+          <a:prstGeom prst="rect">
+            <a:avLst/>
+          </a:prstGeom>
+          <a:noFill/>
+          <a:ln/>
+        </p:spPr>
+        <p:txBody>
+          <a:bodyPr wrap="square" lIns="0" tIns="0" rIns="0" bIns="0" rtlCol="0" anchor="ctr">
+            <a:normAutofit/>
+          </a:bodyPr>
+          <a:lstStyle/>
+          <a:p>
+            <a:pPr algn="ctr" indent="0" marL="0">
+              <a:buNone/>
+            </a:pPr>
+            <a:r>
+              <a:rPr lang="en-US" altLang="en-US" sz="850" b="1" dirty="0">
+                <a:solidFill>
+                  <a:srgbClr val="222222"/>
+                </a:solidFill>
+                <a:latin typeface="Calibri" pitchFamily="34" charset="0"/>
+                <a:ea typeface="Calibri" pitchFamily="34" charset="-122"/>
+                <a:cs typeface="Calibri" pitchFamily="34" charset="-120"/>
+              </a:rPr>
+              <a:t>14 Nov</a:t>
+            </a:r>
+            <a:endParaRPr lang="en-US" sz="850" dirty="0"/>
+          </a:p>
+        </p:txBody>
+      </p:sp>
+      <p:sp>
+        <p:nvSpPr>
+          <p:cNvPr id="187" name="Shape 185"/>
+          <p:cNvSpPr/>
+          <p:nvPr/>
+        </p:nvSpPr>
+        <p:spPr>
+          <a:xfrm>
+            <a:off x="10975678" y="3685032"/>
+            <a:ext cx="510155" cy="310896"/>
           </a:xfrm>
           <a:prstGeom prst="roundRect">
             <a:avLst>
-              <a:gd name="adj" fmla="val 50000"/>
+              <a:gd name="adj" fmla="val 11765"/>
             </a:avLst>
           </a:prstGeom>
           <a:solidFill>
-            <a:srgbClr val="D9695A"/>
-          </a:solidFill>
-          <a:ln w="19050">
-            <a:solidFill>
-              <a:srgbClr val="222222"/>
-            </a:solidFill>
-            <a:prstDash val="solid"/>
-          </a:ln>
-        </p:spPr>
-      </p:sp>
-      <p:sp>
-        <p:nvSpPr>
-          <p:cNvPr id="193" name="Text 191"/>
-          <p:cNvSpPr/>
-          <p:nvPr/>
-        </p:nvSpPr>
-        <p:spPr>
-          <a:xfrm>
-            <a:off x="393192" y="3047238"/>
-            <a:ext cx="384048" cy="268986"/>
-          </a:xfrm>
-          <a:prstGeom prst="rect">
-            <a:avLst/>
-          </a:prstGeom>
-          <a:noFill/>
-          <a:ln/>
-        </p:spPr>
-        <p:txBody>
-          <a:bodyPr wrap="square" lIns="0" tIns="0" rIns="0" bIns="0" rtlCol="0" anchor="ctr">
-            <a:normAutofit/>
-          </a:bodyPr>
-          <a:lstStyle/>
-          <a:p>
-            <a:pPr algn="ctr" indent="0" marL="0">
-              <a:buNone/>
-            </a:pPr>
-            <a:r>
-              <a:rPr lang="en-US" altLang="en-US" sz="650" b="1" dirty="0">
-                <a:solidFill>
-                  <a:srgbClr val="FFFFFF"/>
-                </a:solidFill>
-                <a:latin typeface="Calibri" pitchFamily="34" charset="0"/>
-                <a:ea typeface="Calibri" pitchFamily="34" charset="-122"/>
-                <a:cs typeface="Calibri" pitchFamily="34" charset="-120"/>
-              </a:rPr>
-              <a:t>A.3</a:t>
-            </a:r>
-            <a:endParaRPr lang="en-US" sz="650" dirty="0"/>
-          </a:p>
-        </p:txBody>
-      </p:sp>
-      <p:sp>
-        <p:nvSpPr>
-          <p:cNvPr id="194" name="Text 192"/>
-          <p:cNvSpPr/>
-          <p:nvPr/>
-        </p:nvSpPr>
-        <p:spPr>
-          <a:xfrm>
-            <a:off x="987552" y="3047238"/>
-            <a:ext cx="2441448" cy="268986"/>
-          </a:xfrm>
-          <a:prstGeom prst="rect">
-            <a:avLst/>
-          </a:prstGeom>
-          <a:noFill/>
-          <a:ln/>
-        </p:spPr>
-        <p:txBody>
-          <a:bodyPr wrap="square" lIns="0" tIns="0" rIns="0" bIns="0" rtlCol="0" anchor="ctr">
-            <a:normAutofit/>
-          </a:bodyPr>
-          <a:lstStyle/>
-          <a:p>
-            <a:pPr algn="l" indent="0" marL="0">
-              <a:buNone/>
-            </a:pPr>
-            <a:r>
-              <a:rPr lang="en-US" altLang="en-US" sz="700" dirty="0">
-                <a:solidFill>
-                  <a:srgbClr val="222222"/>
-                </a:solidFill>
-                <a:latin typeface="Calibri" pitchFamily="34" charset="0"/>
-                <a:ea typeface="Calibri" pitchFamily="34" charset="-122"/>
-                <a:cs typeface="Calibri" pitchFamily="34" charset="-120"/>
-              </a:rPr>
-              <a:t>Concrete work for H-Beam</a:t>
-            </a:r>
-            <a:endParaRPr lang="en-US" sz="700" dirty="0"/>
-          </a:p>
-        </p:txBody>
-      </p:sp>
-      <p:sp>
-        <p:nvSpPr>
-          <p:cNvPr id="195" name="Text 193"/>
-          <p:cNvSpPr/>
-          <p:nvPr/>
-        </p:nvSpPr>
-        <p:spPr>
-          <a:xfrm>
-            <a:off x="3447288" y="3047238"/>
-            <a:ext cx="777240" cy="268986"/>
-          </a:xfrm>
-          <a:prstGeom prst="rect">
-            <a:avLst/>
-          </a:prstGeom>
-          <a:noFill/>
-          <a:ln/>
-        </p:spPr>
-        <p:txBody>
-          <a:bodyPr wrap="square" lIns="0" tIns="0" rIns="0" bIns="0" rtlCol="0" anchor="ctr">
-            <a:normAutofit/>
-          </a:bodyPr>
-          <a:lstStyle/>
-          <a:p>
-            <a:pPr algn="ctr" indent="0" marL="0">
-              <a:buNone/>
-            </a:pPr>
-            <a:r>
-              <a:rPr lang="en-US" altLang="en-US" sz="700" dirty="0">
-                <a:solidFill>
-                  <a:srgbClr val="444444"/>
-                </a:solidFill>
-                <a:latin typeface="Calibri" pitchFamily="34" charset="0"/>
-                <a:ea typeface="Calibri" pitchFamily="34" charset="-122"/>
-                <a:cs typeface="Calibri" pitchFamily="34" charset="-120"/>
-              </a:rPr>
-              <a:t>A2 · SS +1</a:t>
-            </a:r>
-            <a:endParaRPr lang="en-US" sz="700" dirty="0"/>
-          </a:p>
-        </p:txBody>
-      </p:sp>
-      <p:sp>
-        <p:nvSpPr>
-          <p:cNvPr id="196" name="Text 194"/>
-          <p:cNvSpPr/>
-          <p:nvPr/>
-        </p:nvSpPr>
-        <p:spPr>
-          <a:xfrm>
-            <a:off x="4224528" y="3047238"/>
-            <a:ext cx="502920" cy="268986"/>
-          </a:xfrm>
-          <a:prstGeom prst="rect">
-            <a:avLst/>
-          </a:prstGeom>
-          <a:noFill/>
-          <a:ln/>
-        </p:spPr>
-        <p:txBody>
-          <a:bodyPr wrap="square" lIns="0" tIns="0" rIns="0" bIns="0" rtlCol="0" anchor="ctr">
-            <a:normAutofit/>
-          </a:bodyPr>
-          <a:lstStyle/>
-          <a:p>
-            <a:pPr algn="ctr" indent="0" marL="0">
-              <a:buNone/>
-            </a:pPr>
-            <a:r>
-              <a:rPr lang="en-US" altLang="en-US" sz="900" b="1" dirty="0">
-                <a:solidFill>
-                  <a:srgbClr val="222222"/>
-                </a:solidFill>
-                <a:latin typeface="Calibri" pitchFamily="34" charset="0"/>
-                <a:ea typeface="Calibri" pitchFamily="34" charset="-122"/>
-                <a:cs typeface="Calibri" pitchFamily="34" charset="-120"/>
-              </a:rPr>
-              <a:t>2</a:t>
-            </a:r>
-            <a:endParaRPr lang="en-US" sz="900" dirty="0"/>
-          </a:p>
-        </p:txBody>
-      </p:sp>
-      <p:sp>
-        <p:nvSpPr>
-          <p:cNvPr id="197" name="Text 195"/>
-          <p:cNvSpPr/>
-          <p:nvPr/>
-        </p:nvSpPr>
-        <p:spPr>
-          <a:xfrm>
-            <a:off x="4727448" y="3047238"/>
-            <a:ext cx="658368" cy="268986"/>
-          </a:xfrm>
-          <a:prstGeom prst="rect">
-            <a:avLst/>
-          </a:prstGeom>
-          <a:noFill/>
-          <a:ln/>
-        </p:spPr>
-        <p:txBody>
-          <a:bodyPr wrap="square" lIns="0" tIns="0" rIns="0" bIns="0" rtlCol="0" anchor="ctr">
-            <a:normAutofit/>
-          </a:bodyPr>
-          <a:lstStyle/>
-          <a:p>
-            <a:pPr algn="ctr" indent="0" marL="0">
-              <a:buNone/>
-            </a:pPr>
-            <a:r>
-              <a:rPr lang="en-US" altLang="en-US" sz="700" b="1" dirty="0">
-                <a:solidFill>
-                  <a:srgbClr val="222222"/>
-                </a:solidFill>
-                <a:latin typeface="Calibri" pitchFamily="34" charset="0"/>
-                <a:ea typeface="Calibri" pitchFamily="34" charset="-122"/>
-                <a:cs typeface="Calibri" pitchFamily="34" charset="-120"/>
-              </a:rPr>
-              <a:t>25 Oct</a:t>
-            </a:r>
-            <a:endParaRPr lang="en-US" sz="700" dirty="0"/>
-          </a:p>
-        </p:txBody>
-      </p:sp>
-      <p:sp>
-        <p:nvSpPr>
-          <p:cNvPr id="198" name="Text 196"/>
-          <p:cNvSpPr/>
-          <p:nvPr/>
-        </p:nvSpPr>
-        <p:spPr>
-          <a:xfrm>
-            <a:off x="5385816" y="3047238"/>
-            <a:ext cx="658368" cy="268986"/>
-          </a:xfrm>
-          <a:prstGeom prst="rect">
-            <a:avLst/>
-          </a:prstGeom>
-          <a:noFill/>
-          <a:ln/>
-        </p:spPr>
-        <p:txBody>
-          <a:bodyPr wrap="square" lIns="0" tIns="0" rIns="0" bIns="0" rtlCol="0" anchor="ctr">
-            <a:normAutofit/>
-          </a:bodyPr>
-          <a:lstStyle/>
-          <a:p>
-            <a:pPr algn="ctr" indent="0" marL="0">
-              <a:buNone/>
-            </a:pPr>
-            <a:r>
-              <a:rPr lang="en-US" altLang="en-US" sz="700" b="1" dirty="0">
-                <a:solidFill>
-                  <a:srgbClr val="222222"/>
-                </a:solidFill>
-                <a:latin typeface="Calibri" pitchFamily="34" charset="0"/>
-                <a:ea typeface="Calibri" pitchFamily="34" charset="-122"/>
-                <a:cs typeface="Calibri" pitchFamily="34" charset="-120"/>
-              </a:rPr>
-              <a:t>26 Oct</a:t>
-            </a:r>
-            <a:endParaRPr lang="en-US" sz="700" dirty="0"/>
-          </a:p>
-        </p:txBody>
-      </p:sp>
-      <p:sp>
-        <p:nvSpPr>
-          <p:cNvPr id="199" name="Shape 197"/>
-          <p:cNvSpPr/>
-          <p:nvPr/>
-        </p:nvSpPr>
-        <p:spPr>
-          <a:xfrm>
-            <a:off x="7914751" y="3103725"/>
-            <a:ext cx="340103" cy="156012"/>
-          </a:xfrm>
-          <a:prstGeom prst="roundRect">
-            <a:avLst>
-              <a:gd name="adj" fmla="val 23444"/>
-            </a:avLst>
-          </a:prstGeom>
-          <a:solidFill>
-            <a:srgbClr val="D9695A"/>
+            <a:srgbClr val="D68A00"/>
           </a:solidFill>
           <a:ln w="19050">
             <a:solidFill>
@@ -13563,14 +13145,14 @@
       </p:sp>
       <p:sp>
         <p:nvSpPr>
-          <p:cNvPr id="200" name="Text 198"/>
-          <p:cNvSpPr/>
-          <p:nvPr/>
-        </p:nvSpPr>
-        <p:spPr>
-          <a:xfrm>
-            <a:off x="7914751" y="3103725"/>
-            <a:ext cx="340103" cy="156012"/>
+          <p:cNvPr id="188" name="Text 186"/>
+          <p:cNvSpPr/>
+          <p:nvPr/>
+        </p:nvSpPr>
+        <p:spPr>
+          <a:xfrm>
+            <a:off x="10975678" y="3685032"/>
+            <a:ext cx="510155" cy="310896"/>
           </a:xfrm>
           <a:prstGeom prst="rect">
             <a:avLst/>
@@ -13604,2863 +13186,14 @@
       </p:sp>
       <p:sp>
         <p:nvSpPr>
-          <p:cNvPr id="201" name="Shape 199"/>
-          <p:cNvSpPr/>
-          <p:nvPr/>
-        </p:nvSpPr>
-        <p:spPr>
-          <a:xfrm>
-            <a:off x="365760" y="3316224"/>
-            <a:ext cx="11460175" cy="268986"/>
-          </a:xfrm>
-          <a:prstGeom prst="rect">
-            <a:avLst/>
-          </a:prstGeom>
-          <a:solidFill>
-            <a:srgbClr val="FFFFFF"/>
-          </a:solidFill>
-          <a:ln w="6350">
-            <a:solidFill>
-              <a:srgbClr val="DFE6EA"/>
-            </a:solidFill>
-            <a:prstDash val="solid"/>
-          </a:ln>
-        </p:spPr>
-      </p:sp>
-      <p:sp>
-        <p:nvSpPr>
-          <p:cNvPr id="202" name="Shape 200"/>
-          <p:cNvSpPr/>
-          <p:nvPr/>
-        </p:nvSpPr>
-        <p:spPr>
-          <a:xfrm>
-            <a:off x="420624" y="3372993"/>
-            <a:ext cx="329184" cy="155448"/>
-          </a:xfrm>
-          <a:prstGeom prst="roundRect">
-            <a:avLst>
-              <a:gd name="adj" fmla="val 50000"/>
-            </a:avLst>
-          </a:prstGeom>
-          <a:solidFill>
-            <a:srgbClr val="D9695A"/>
-          </a:solidFill>
-          <a:ln w="19050">
-            <a:solidFill>
-              <a:srgbClr val="222222"/>
-            </a:solidFill>
-            <a:prstDash val="solid"/>
-          </a:ln>
-        </p:spPr>
-      </p:sp>
-      <p:sp>
-        <p:nvSpPr>
-          <p:cNvPr id="203" name="Text 201"/>
-          <p:cNvSpPr/>
-          <p:nvPr/>
-        </p:nvSpPr>
-        <p:spPr>
-          <a:xfrm>
-            <a:off x="393192" y="3316224"/>
-            <a:ext cx="384048" cy="268986"/>
-          </a:xfrm>
-          <a:prstGeom prst="rect">
-            <a:avLst/>
-          </a:prstGeom>
-          <a:noFill/>
-          <a:ln/>
-        </p:spPr>
-        <p:txBody>
-          <a:bodyPr wrap="square" lIns="0" tIns="0" rIns="0" bIns="0" rtlCol="0" anchor="ctr">
-            <a:normAutofit/>
-          </a:bodyPr>
-          <a:lstStyle/>
-          <a:p>
-            <a:pPr algn="ctr" indent="0" marL="0">
-              <a:buNone/>
-            </a:pPr>
-            <a:r>
-              <a:rPr lang="en-US" altLang="en-US" sz="650" b="1" dirty="0">
-                <a:solidFill>
-                  <a:srgbClr val="FFFFFF"/>
-                </a:solidFill>
-                <a:latin typeface="Calibri" pitchFamily="34" charset="0"/>
-                <a:ea typeface="Calibri" pitchFamily="34" charset="-122"/>
-                <a:cs typeface="Calibri" pitchFamily="34" charset="-120"/>
-              </a:rPr>
-              <a:t>A.4</a:t>
-            </a:r>
-            <a:endParaRPr lang="en-US" sz="650" dirty="0"/>
-          </a:p>
-        </p:txBody>
-      </p:sp>
-      <p:sp>
-        <p:nvSpPr>
-          <p:cNvPr id="204" name="Text 202"/>
-          <p:cNvSpPr/>
-          <p:nvPr/>
-        </p:nvSpPr>
-        <p:spPr>
-          <a:xfrm>
-            <a:off x="987552" y="3316224"/>
-            <a:ext cx="2441448" cy="268986"/>
-          </a:xfrm>
-          <a:prstGeom prst="rect">
-            <a:avLst/>
-          </a:prstGeom>
-          <a:noFill/>
-          <a:ln/>
-        </p:spPr>
-        <p:txBody>
-          <a:bodyPr wrap="square" lIns="0" tIns="0" rIns="0" bIns="0" rtlCol="0" anchor="ctr">
-            <a:normAutofit/>
-          </a:bodyPr>
-          <a:lstStyle/>
-          <a:p>
-            <a:pPr algn="l" indent="0" marL="0">
-              <a:buNone/>
-            </a:pPr>
-            <a:r>
-              <a:rPr lang="en-US" altLang="en-US" sz="700" dirty="0">
-                <a:solidFill>
-                  <a:srgbClr val="222222"/>
-                </a:solidFill>
-                <a:latin typeface="Calibri" pitchFamily="34" charset="0"/>
-                <a:ea typeface="Calibri" pitchFamily="34" charset="-122"/>
-                <a:cs typeface="Calibri" pitchFamily="34" charset="-120"/>
-              </a:rPr>
-              <a:t>Bracing for shoring</a:t>
-            </a:r>
-            <a:endParaRPr lang="en-US" sz="700" dirty="0"/>
-          </a:p>
-        </p:txBody>
-      </p:sp>
-      <p:sp>
-        <p:nvSpPr>
-          <p:cNvPr id="205" name="Text 203"/>
-          <p:cNvSpPr/>
-          <p:nvPr/>
-        </p:nvSpPr>
-        <p:spPr>
-          <a:xfrm>
-            <a:off x="3447288" y="3316224"/>
-            <a:ext cx="777240" cy="268986"/>
-          </a:xfrm>
-          <a:prstGeom prst="rect">
-            <a:avLst/>
-          </a:prstGeom>
-          <a:noFill/>
-          <a:ln/>
-        </p:spPr>
-        <p:txBody>
-          <a:bodyPr wrap="square" lIns="0" tIns="0" rIns="0" bIns="0" rtlCol="0" anchor="ctr">
-            <a:normAutofit/>
-          </a:bodyPr>
-          <a:lstStyle/>
-          <a:p>
-            <a:pPr algn="ctr" indent="0" marL="0">
-              <a:buNone/>
-            </a:pPr>
-            <a:r>
-              <a:rPr lang="en-US" altLang="en-US" sz="700" dirty="0">
-                <a:solidFill>
-                  <a:srgbClr val="444444"/>
-                </a:solidFill>
-                <a:latin typeface="Calibri" pitchFamily="34" charset="0"/>
-                <a:ea typeface="Calibri" pitchFamily="34" charset="-122"/>
-                <a:cs typeface="Calibri" pitchFamily="34" charset="-120"/>
-              </a:rPr>
-              <a:t>A3 · SS +1</a:t>
-            </a:r>
-            <a:endParaRPr lang="en-US" sz="700" dirty="0"/>
-          </a:p>
-        </p:txBody>
-      </p:sp>
-      <p:sp>
-        <p:nvSpPr>
-          <p:cNvPr id="206" name="Text 204"/>
-          <p:cNvSpPr/>
-          <p:nvPr/>
-        </p:nvSpPr>
-        <p:spPr>
-          <a:xfrm>
-            <a:off x="4224528" y="3316224"/>
-            <a:ext cx="502920" cy="268986"/>
-          </a:xfrm>
-          <a:prstGeom prst="rect">
-            <a:avLst/>
-          </a:prstGeom>
-          <a:noFill/>
-          <a:ln/>
-        </p:spPr>
-        <p:txBody>
-          <a:bodyPr wrap="square" lIns="0" tIns="0" rIns="0" bIns="0" rtlCol="0" anchor="ctr">
-            <a:normAutofit/>
-          </a:bodyPr>
-          <a:lstStyle/>
-          <a:p>
-            <a:pPr algn="ctr" indent="0" marL="0">
-              <a:buNone/>
-            </a:pPr>
-            <a:r>
-              <a:rPr lang="en-US" altLang="en-US" sz="900" b="1" dirty="0">
-                <a:solidFill>
-                  <a:srgbClr val="222222"/>
-                </a:solidFill>
-                <a:latin typeface="Calibri" pitchFamily="34" charset="0"/>
-                <a:ea typeface="Calibri" pitchFamily="34" charset="-122"/>
-                <a:cs typeface="Calibri" pitchFamily="34" charset="-120"/>
-              </a:rPr>
-              <a:t>1</a:t>
-            </a:r>
-            <a:endParaRPr lang="en-US" sz="900" dirty="0"/>
-          </a:p>
-        </p:txBody>
-      </p:sp>
-      <p:sp>
-        <p:nvSpPr>
-          <p:cNvPr id="207" name="Text 205"/>
-          <p:cNvSpPr/>
-          <p:nvPr/>
-        </p:nvSpPr>
-        <p:spPr>
-          <a:xfrm>
-            <a:off x="4727448" y="3316224"/>
-            <a:ext cx="658368" cy="268986"/>
-          </a:xfrm>
-          <a:prstGeom prst="rect">
-            <a:avLst/>
-          </a:prstGeom>
-          <a:noFill/>
-          <a:ln/>
-        </p:spPr>
-        <p:txBody>
-          <a:bodyPr wrap="square" lIns="0" tIns="0" rIns="0" bIns="0" rtlCol="0" anchor="ctr">
-            <a:normAutofit/>
-          </a:bodyPr>
-          <a:lstStyle/>
-          <a:p>
-            <a:pPr algn="ctr" indent="0" marL="0">
-              <a:buNone/>
-            </a:pPr>
-            <a:r>
-              <a:rPr lang="en-US" altLang="en-US" sz="700" b="1" dirty="0">
-                <a:solidFill>
-                  <a:srgbClr val="222222"/>
-                </a:solidFill>
-                <a:latin typeface="Calibri" pitchFamily="34" charset="0"/>
-                <a:ea typeface="Calibri" pitchFamily="34" charset="-122"/>
-                <a:cs typeface="Calibri" pitchFamily="34" charset="-120"/>
-              </a:rPr>
-              <a:t>26 Oct</a:t>
-            </a:r>
-            <a:endParaRPr lang="en-US" sz="700" dirty="0"/>
-          </a:p>
-        </p:txBody>
-      </p:sp>
-      <p:sp>
-        <p:nvSpPr>
-          <p:cNvPr id="208" name="Text 206"/>
-          <p:cNvSpPr/>
-          <p:nvPr/>
-        </p:nvSpPr>
-        <p:spPr>
-          <a:xfrm>
-            <a:off x="5385816" y="3316224"/>
-            <a:ext cx="658368" cy="268986"/>
-          </a:xfrm>
-          <a:prstGeom prst="rect">
-            <a:avLst/>
-          </a:prstGeom>
-          <a:noFill/>
-          <a:ln/>
-        </p:spPr>
-        <p:txBody>
-          <a:bodyPr wrap="square" lIns="0" tIns="0" rIns="0" bIns="0" rtlCol="0" anchor="ctr">
-            <a:normAutofit/>
-          </a:bodyPr>
-          <a:lstStyle/>
-          <a:p>
-            <a:pPr algn="ctr" indent="0" marL="0">
-              <a:buNone/>
-            </a:pPr>
-            <a:r>
-              <a:rPr lang="en-US" altLang="en-US" sz="700" b="1" dirty="0">
-                <a:solidFill>
-                  <a:srgbClr val="222222"/>
-                </a:solidFill>
-                <a:latin typeface="Calibri" pitchFamily="34" charset="0"/>
-                <a:ea typeface="Calibri" pitchFamily="34" charset="-122"/>
-                <a:cs typeface="Calibri" pitchFamily="34" charset="-120"/>
-              </a:rPr>
-              <a:t>26 Oct</a:t>
-            </a:r>
-            <a:endParaRPr lang="en-US" sz="700" dirty="0"/>
-          </a:p>
-        </p:txBody>
-      </p:sp>
-      <p:sp>
-        <p:nvSpPr>
-          <p:cNvPr id="209" name="Shape 207"/>
-          <p:cNvSpPr/>
-          <p:nvPr/>
-        </p:nvSpPr>
-        <p:spPr>
-          <a:xfrm>
-            <a:off x="8084802" y="3372711"/>
-            <a:ext cx="170052" cy="156012"/>
-          </a:xfrm>
-          <a:prstGeom prst="roundRect">
-            <a:avLst>
-              <a:gd name="adj" fmla="val 23444"/>
-            </a:avLst>
-          </a:prstGeom>
-          <a:solidFill>
-            <a:srgbClr val="D9695A"/>
-          </a:solidFill>
-          <a:ln w="19050">
-            <a:solidFill>
-              <a:srgbClr val="222222"/>
-            </a:solidFill>
-            <a:prstDash val="solid"/>
-          </a:ln>
-          <a:effectLst>
-            <a:outerShdw sx="100000" sy="100000" kx="0" ky="0" algn="bl" rotWithShape="0" blurRad="38100" dist="12700" dir="5400000">
-              <a:srgbClr val="000000">
-                <a:alpha val="20000"/>
-              </a:srgbClr>
-            </a:outerShdw>
-          </a:effectLst>
-        </p:spPr>
-      </p:sp>
-      <p:sp>
-        <p:nvSpPr>
-          <p:cNvPr id="210" name="Shape 208"/>
-          <p:cNvSpPr/>
-          <p:nvPr/>
-        </p:nvSpPr>
-        <p:spPr>
-          <a:xfrm>
-            <a:off x="365760" y="3585210"/>
-            <a:ext cx="11460175" cy="268986"/>
-          </a:xfrm>
-          <a:prstGeom prst="rect">
-            <a:avLst/>
-          </a:prstGeom>
-          <a:solidFill>
-            <a:srgbClr val="F6F9FA"/>
-          </a:solidFill>
-          <a:ln w="6350">
-            <a:solidFill>
-              <a:srgbClr val="DFE6EA"/>
-            </a:solidFill>
-            <a:prstDash val="solid"/>
-          </a:ln>
-        </p:spPr>
-      </p:sp>
-      <p:sp>
-        <p:nvSpPr>
-          <p:cNvPr id="211" name="Shape 209"/>
-          <p:cNvSpPr/>
-          <p:nvPr/>
-        </p:nvSpPr>
-        <p:spPr>
-          <a:xfrm>
-            <a:off x="420624" y="3641979"/>
-            <a:ext cx="329184" cy="155448"/>
-          </a:xfrm>
-          <a:prstGeom prst="roundRect">
-            <a:avLst>
-              <a:gd name="adj" fmla="val 50000"/>
-            </a:avLst>
-          </a:prstGeom>
-          <a:solidFill>
-            <a:srgbClr val="D9695A"/>
-          </a:solidFill>
-          <a:ln w="19050">
-            <a:solidFill>
-              <a:srgbClr val="222222"/>
-            </a:solidFill>
-            <a:prstDash val="solid"/>
-          </a:ln>
-        </p:spPr>
-      </p:sp>
-      <p:sp>
-        <p:nvSpPr>
-          <p:cNvPr id="212" name="Text 210"/>
-          <p:cNvSpPr/>
-          <p:nvPr/>
-        </p:nvSpPr>
-        <p:spPr>
-          <a:xfrm>
-            <a:off x="393192" y="3585210"/>
-            <a:ext cx="384048" cy="268986"/>
-          </a:xfrm>
-          <a:prstGeom prst="rect">
-            <a:avLst/>
-          </a:prstGeom>
-          <a:noFill/>
-          <a:ln/>
-        </p:spPr>
-        <p:txBody>
-          <a:bodyPr wrap="square" lIns="0" tIns="0" rIns="0" bIns="0" rtlCol="0" anchor="ctr">
-            <a:normAutofit/>
-          </a:bodyPr>
-          <a:lstStyle/>
-          <a:p>
-            <a:pPr algn="ctr" indent="0" marL="0">
-              <a:buNone/>
-            </a:pPr>
-            <a:r>
-              <a:rPr lang="en-US" altLang="en-US" sz="650" b="1" dirty="0">
-                <a:solidFill>
-                  <a:srgbClr val="FFFFFF"/>
-                </a:solidFill>
-                <a:latin typeface="Calibri" pitchFamily="34" charset="0"/>
-                <a:ea typeface="Calibri" pitchFamily="34" charset="-122"/>
-                <a:cs typeface="Calibri" pitchFamily="34" charset="-120"/>
-              </a:rPr>
-              <a:t>A.5</a:t>
-            </a:r>
-            <a:endParaRPr lang="en-US" sz="650" dirty="0"/>
-          </a:p>
-        </p:txBody>
-      </p:sp>
-      <p:sp>
-        <p:nvSpPr>
-          <p:cNvPr id="213" name="Text 211"/>
-          <p:cNvSpPr/>
-          <p:nvPr/>
-        </p:nvSpPr>
-        <p:spPr>
-          <a:xfrm>
-            <a:off x="987552" y="3585210"/>
-            <a:ext cx="2441448" cy="268986"/>
-          </a:xfrm>
-          <a:prstGeom prst="rect">
-            <a:avLst/>
-          </a:prstGeom>
-          <a:noFill/>
-          <a:ln/>
-        </p:spPr>
-        <p:txBody>
-          <a:bodyPr wrap="square" lIns="0" tIns="0" rIns="0" bIns="0" rtlCol="0" anchor="ctr">
-            <a:normAutofit/>
-          </a:bodyPr>
-          <a:lstStyle/>
-          <a:p>
-            <a:pPr algn="l" indent="0" marL="0">
-              <a:buNone/>
-            </a:pPr>
-            <a:r>
-              <a:rPr lang="en-US" altLang="en-US" sz="700" dirty="0">
-                <a:solidFill>
-                  <a:srgbClr val="222222"/>
-                </a:solidFill>
-                <a:latin typeface="Calibri" pitchFamily="34" charset="0"/>
-                <a:ea typeface="Calibri" pitchFamily="34" charset="-122"/>
-                <a:cs typeface="Calibri" pitchFamily="34" charset="-120"/>
-              </a:rPr>
-              <a:t>Corrugated sheets installation / insertion</a:t>
-            </a:r>
-            <a:endParaRPr lang="en-US" sz="700" dirty="0"/>
-          </a:p>
-        </p:txBody>
-      </p:sp>
-      <p:sp>
-        <p:nvSpPr>
-          <p:cNvPr id="214" name="Text 212"/>
-          <p:cNvSpPr/>
-          <p:nvPr/>
-        </p:nvSpPr>
-        <p:spPr>
-          <a:xfrm>
-            <a:off x="3447288" y="3585210"/>
-            <a:ext cx="777240" cy="268986"/>
-          </a:xfrm>
-          <a:prstGeom prst="rect">
-            <a:avLst/>
-          </a:prstGeom>
-          <a:noFill/>
-          <a:ln/>
-        </p:spPr>
-        <p:txBody>
-          <a:bodyPr wrap="square" lIns="0" tIns="0" rIns="0" bIns="0" rtlCol="0" anchor="ctr">
-            <a:normAutofit/>
-          </a:bodyPr>
-          <a:lstStyle/>
-          <a:p>
-            <a:pPr algn="ctr" indent="0" marL="0">
-              <a:buNone/>
-            </a:pPr>
-            <a:r>
-              <a:rPr lang="en-US" altLang="en-US" sz="700" dirty="0">
-                <a:solidFill>
-                  <a:srgbClr val="444444"/>
-                </a:solidFill>
-                <a:latin typeface="Calibri" pitchFamily="34" charset="0"/>
-                <a:ea typeface="Calibri" pitchFamily="34" charset="-122"/>
-                <a:cs typeface="Calibri" pitchFamily="34" charset="-120"/>
-              </a:rPr>
-              <a:t>A4 · SS +0</a:t>
-            </a:r>
-            <a:endParaRPr lang="en-US" sz="700" dirty="0"/>
-          </a:p>
-        </p:txBody>
-      </p:sp>
-      <p:sp>
-        <p:nvSpPr>
-          <p:cNvPr id="215" name="Text 213"/>
-          <p:cNvSpPr/>
-          <p:nvPr/>
-        </p:nvSpPr>
-        <p:spPr>
-          <a:xfrm>
-            <a:off x="4224528" y="3585210"/>
-            <a:ext cx="502920" cy="268986"/>
-          </a:xfrm>
-          <a:prstGeom prst="rect">
-            <a:avLst/>
-          </a:prstGeom>
-          <a:noFill/>
-          <a:ln/>
-        </p:spPr>
-        <p:txBody>
-          <a:bodyPr wrap="square" lIns="0" tIns="0" rIns="0" bIns="0" rtlCol="0" anchor="ctr">
-            <a:normAutofit/>
-          </a:bodyPr>
-          <a:lstStyle/>
-          <a:p>
-            <a:pPr algn="ctr" indent="0" marL="0">
-              <a:buNone/>
-            </a:pPr>
-            <a:r>
-              <a:rPr lang="en-US" altLang="en-US" sz="900" b="1" dirty="0">
-                <a:solidFill>
-                  <a:srgbClr val="222222"/>
-                </a:solidFill>
-                <a:latin typeface="Calibri" pitchFamily="34" charset="0"/>
-                <a:ea typeface="Calibri" pitchFamily="34" charset="-122"/>
-                <a:cs typeface="Calibri" pitchFamily="34" charset="-120"/>
-              </a:rPr>
-              <a:t>1</a:t>
-            </a:r>
-            <a:endParaRPr lang="en-US" sz="900" dirty="0"/>
-          </a:p>
-        </p:txBody>
-      </p:sp>
-      <p:sp>
-        <p:nvSpPr>
-          <p:cNvPr id="216" name="Text 214"/>
-          <p:cNvSpPr/>
-          <p:nvPr/>
-        </p:nvSpPr>
-        <p:spPr>
-          <a:xfrm>
-            <a:off x="4727448" y="3585210"/>
-            <a:ext cx="658368" cy="268986"/>
-          </a:xfrm>
-          <a:prstGeom prst="rect">
-            <a:avLst/>
-          </a:prstGeom>
-          <a:noFill/>
-          <a:ln/>
-        </p:spPr>
-        <p:txBody>
-          <a:bodyPr wrap="square" lIns="0" tIns="0" rIns="0" bIns="0" rtlCol="0" anchor="ctr">
-            <a:normAutofit/>
-          </a:bodyPr>
-          <a:lstStyle/>
-          <a:p>
-            <a:pPr algn="ctr" indent="0" marL="0">
-              <a:buNone/>
-            </a:pPr>
-            <a:r>
-              <a:rPr lang="en-US" altLang="en-US" sz="700" b="1" dirty="0">
-                <a:solidFill>
-                  <a:srgbClr val="222222"/>
-                </a:solidFill>
-                <a:latin typeface="Calibri" pitchFamily="34" charset="0"/>
-                <a:ea typeface="Calibri" pitchFamily="34" charset="-122"/>
-                <a:cs typeface="Calibri" pitchFamily="34" charset="-120"/>
-              </a:rPr>
-              <a:t>26 Oct</a:t>
-            </a:r>
-            <a:endParaRPr lang="en-US" sz="700" dirty="0"/>
-          </a:p>
-        </p:txBody>
-      </p:sp>
-      <p:sp>
-        <p:nvSpPr>
-          <p:cNvPr id="217" name="Text 215"/>
-          <p:cNvSpPr/>
-          <p:nvPr/>
-        </p:nvSpPr>
-        <p:spPr>
-          <a:xfrm>
-            <a:off x="5385816" y="3585210"/>
-            <a:ext cx="658368" cy="268986"/>
-          </a:xfrm>
-          <a:prstGeom prst="rect">
-            <a:avLst/>
-          </a:prstGeom>
-          <a:noFill/>
-          <a:ln/>
-        </p:spPr>
-        <p:txBody>
-          <a:bodyPr wrap="square" lIns="0" tIns="0" rIns="0" bIns="0" rtlCol="0" anchor="ctr">
-            <a:normAutofit/>
-          </a:bodyPr>
-          <a:lstStyle/>
-          <a:p>
-            <a:pPr algn="ctr" indent="0" marL="0">
-              <a:buNone/>
-            </a:pPr>
-            <a:r>
-              <a:rPr lang="en-US" altLang="en-US" sz="700" b="1" dirty="0">
-                <a:solidFill>
-                  <a:srgbClr val="222222"/>
-                </a:solidFill>
-                <a:latin typeface="Calibri" pitchFamily="34" charset="0"/>
-                <a:ea typeface="Calibri" pitchFamily="34" charset="-122"/>
-                <a:cs typeface="Calibri" pitchFamily="34" charset="-120"/>
-              </a:rPr>
-              <a:t>26 Oct</a:t>
-            </a:r>
-            <a:endParaRPr lang="en-US" sz="700" dirty="0"/>
-          </a:p>
-        </p:txBody>
-      </p:sp>
-      <p:sp>
-        <p:nvSpPr>
-          <p:cNvPr id="218" name="Shape 216"/>
-          <p:cNvSpPr/>
-          <p:nvPr/>
-        </p:nvSpPr>
-        <p:spPr>
-          <a:xfrm>
-            <a:off x="8084802" y="3641697"/>
-            <a:ext cx="170052" cy="156012"/>
-          </a:xfrm>
-          <a:prstGeom prst="roundRect">
-            <a:avLst>
-              <a:gd name="adj" fmla="val 23444"/>
-            </a:avLst>
-          </a:prstGeom>
-          <a:solidFill>
-            <a:srgbClr val="D9695A"/>
-          </a:solidFill>
-          <a:ln w="19050">
-            <a:solidFill>
-              <a:srgbClr val="222222"/>
-            </a:solidFill>
-            <a:prstDash val="solid"/>
-          </a:ln>
-          <a:effectLst>
-            <a:outerShdw sx="100000" sy="100000" kx="0" ky="0" algn="bl" rotWithShape="0" blurRad="38100" dist="12700" dir="5400000">
-              <a:srgbClr val="000000">
-                <a:alpha val="20000"/>
-              </a:srgbClr>
-            </a:outerShdw>
-          </a:effectLst>
-        </p:spPr>
-      </p:sp>
-      <p:sp>
-        <p:nvSpPr>
-          <p:cNvPr id="219" name="Shape 217"/>
-          <p:cNvSpPr/>
-          <p:nvPr/>
-        </p:nvSpPr>
-        <p:spPr>
-          <a:xfrm>
-            <a:off x="365760" y="3854196"/>
-            <a:ext cx="11460175" cy="268986"/>
-          </a:xfrm>
-          <a:prstGeom prst="rect">
-            <a:avLst/>
-          </a:prstGeom>
-          <a:solidFill>
-            <a:srgbClr val="FFFFFF"/>
-          </a:solidFill>
-          <a:ln w="6350">
-            <a:solidFill>
-              <a:srgbClr val="DFE6EA"/>
-            </a:solidFill>
-            <a:prstDash val="solid"/>
-          </a:ln>
-        </p:spPr>
-      </p:sp>
-      <p:sp>
-        <p:nvSpPr>
-          <p:cNvPr id="220" name="Shape 218"/>
-          <p:cNvSpPr/>
-          <p:nvPr/>
-        </p:nvSpPr>
-        <p:spPr>
-          <a:xfrm>
-            <a:off x="438912" y="3869817"/>
-            <a:ext cx="237744" cy="237744"/>
-          </a:xfrm>
-          <a:prstGeom prst="ellipse">
-            <a:avLst/>
-          </a:prstGeom>
-          <a:solidFill>
-            <a:srgbClr val="00778B"/>
-          </a:solidFill>
-          <a:ln w="6350">
-            <a:solidFill>
-              <a:srgbClr val="00778B"/>
-            </a:solidFill>
-            <a:prstDash val="solid"/>
-          </a:ln>
-        </p:spPr>
-      </p:sp>
-      <p:sp>
-        <p:nvSpPr>
-          <p:cNvPr id="221" name="Text 219"/>
-          <p:cNvSpPr/>
-          <p:nvPr/>
-        </p:nvSpPr>
-        <p:spPr>
-          <a:xfrm>
-            <a:off x="365760" y="3854196"/>
-            <a:ext cx="384048" cy="268986"/>
-          </a:xfrm>
-          <a:prstGeom prst="rect">
-            <a:avLst/>
-          </a:prstGeom>
-          <a:noFill/>
-          <a:ln/>
-        </p:spPr>
-        <p:txBody>
-          <a:bodyPr wrap="square" lIns="0" tIns="0" rIns="0" bIns="0" rtlCol="0" anchor="ctr">
-            <a:normAutofit/>
-          </a:bodyPr>
-          <a:lstStyle/>
-          <a:p>
-            <a:pPr algn="ctr" indent="0" marL="0">
-              <a:buNone/>
-            </a:pPr>
-            <a:r>
-              <a:rPr lang="en-US" altLang="en-US" sz="850" b="1" dirty="0">
-                <a:solidFill>
-                  <a:srgbClr val="FFFFFF"/>
-                </a:solidFill>
-                <a:latin typeface="Calibri" pitchFamily="34" charset="0"/>
-                <a:ea typeface="Calibri" pitchFamily="34" charset="-122"/>
-                <a:cs typeface="Calibri" pitchFamily="34" charset="-120"/>
-              </a:rPr>
-              <a:t>B</a:t>
-            </a:r>
-            <a:endParaRPr lang="en-US" sz="850" dirty="0"/>
-          </a:p>
-        </p:txBody>
-      </p:sp>
-      <p:sp>
-        <p:nvSpPr>
-          <p:cNvPr id="222" name="Text 220"/>
-          <p:cNvSpPr/>
-          <p:nvPr/>
-        </p:nvSpPr>
-        <p:spPr>
-          <a:xfrm>
-            <a:off x="822960" y="3854196"/>
-            <a:ext cx="2606040" cy="268986"/>
-          </a:xfrm>
-          <a:prstGeom prst="rect">
-            <a:avLst/>
-          </a:prstGeom>
-          <a:noFill/>
-          <a:ln/>
-        </p:spPr>
-        <p:txBody>
-          <a:bodyPr wrap="square" lIns="0" tIns="0" rIns="0" bIns="0" rtlCol="0" anchor="ctr">
-            <a:normAutofit/>
-          </a:bodyPr>
-          <a:lstStyle/>
-          <a:p>
-            <a:pPr algn="l" indent="0" marL="0">
-              <a:buNone/>
-            </a:pPr>
-            <a:r>
-              <a:rPr lang="en-US" altLang="en-US" sz="750" b="1" dirty="0">
-                <a:solidFill>
-                  <a:srgbClr val="222222"/>
-                </a:solidFill>
-                <a:latin typeface="Calibri" pitchFamily="34" charset="0"/>
-                <a:ea typeface="Calibri" pitchFamily="34" charset="-122"/>
-                <a:cs typeface="Calibri" pitchFamily="34" charset="-120"/>
-              </a:rPr>
-              <a:t>Lean concrete</a:t>
-            </a:r>
-            <a:endParaRPr lang="en-US" sz="750" dirty="0"/>
-          </a:p>
-        </p:txBody>
-      </p:sp>
-      <p:sp>
-        <p:nvSpPr>
-          <p:cNvPr id="223" name="Text 221"/>
-          <p:cNvSpPr/>
-          <p:nvPr/>
-        </p:nvSpPr>
-        <p:spPr>
-          <a:xfrm>
-            <a:off x="3447288" y="3854196"/>
-            <a:ext cx="777240" cy="268986"/>
-          </a:xfrm>
-          <a:prstGeom prst="rect">
-            <a:avLst/>
-          </a:prstGeom>
-          <a:noFill/>
-          <a:ln/>
-        </p:spPr>
-        <p:txBody>
-          <a:bodyPr wrap="square" lIns="0" tIns="0" rIns="0" bIns="0" rtlCol="0" anchor="ctr">
-            <a:normAutofit/>
-          </a:bodyPr>
-          <a:lstStyle/>
-          <a:p>
-            <a:pPr algn="ctr" indent="0" marL="0">
-              <a:buNone/>
-            </a:pPr>
-            <a:r>
-              <a:rPr lang="en-US" altLang="en-US" sz="700" dirty="0">
-                <a:solidFill>
-                  <a:srgbClr val="444444"/>
-                </a:solidFill>
-                <a:latin typeface="Calibri" pitchFamily="34" charset="0"/>
-                <a:ea typeface="Calibri" pitchFamily="34" charset="-122"/>
-                <a:cs typeface="Calibri" pitchFamily="34" charset="-120"/>
-              </a:rPr>
-              <a:t>A · SS +4</a:t>
-            </a:r>
-            <a:endParaRPr lang="en-US" sz="700" dirty="0"/>
-          </a:p>
-        </p:txBody>
-      </p:sp>
-      <p:sp>
-        <p:nvSpPr>
-          <p:cNvPr id="224" name="Text 222"/>
-          <p:cNvSpPr/>
-          <p:nvPr/>
-        </p:nvSpPr>
-        <p:spPr>
-          <a:xfrm>
-            <a:off x="4224528" y="3854196"/>
-            <a:ext cx="502920" cy="268986"/>
-          </a:xfrm>
-          <a:prstGeom prst="rect">
-            <a:avLst/>
-          </a:prstGeom>
-          <a:noFill/>
-          <a:ln/>
-        </p:spPr>
-        <p:txBody>
-          <a:bodyPr wrap="square" lIns="0" tIns="0" rIns="0" bIns="0" rtlCol="0" anchor="ctr">
-            <a:normAutofit/>
-          </a:bodyPr>
-          <a:lstStyle/>
-          <a:p>
-            <a:pPr algn="ctr" indent="0" marL="0">
-              <a:buNone/>
-            </a:pPr>
-            <a:r>
-              <a:rPr lang="en-US" altLang="en-US" sz="900" b="1" dirty="0">
-                <a:solidFill>
-                  <a:srgbClr val="222222"/>
-                </a:solidFill>
-                <a:latin typeface="Calibri" pitchFamily="34" charset="0"/>
-                <a:ea typeface="Calibri" pitchFamily="34" charset="-122"/>
-                <a:cs typeface="Calibri" pitchFamily="34" charset="-120"/>
-              </a:rPr>
-              <a:t>1</a:t>
-            </a:r>
-            <a:endParaRPr lang="en-US" sz="900" dirty="0"/>
-          </a:p>
-        </p:txBody>
-      </p:sp>
-      <p:sp>
-        <p:nvSpPr>
-          <p:cNvPr id="225" name="Text 223"/>
-          <p:cNvSpPr/>
-          <p:nvPr/>
-        </p:nvSpPr>
-        <p:spPr>
-          <a:xfrm>
-            <a:off x="4727448" y="3854196"/>
-            <a:ext cx="658368" cy="268986"/>
-          </a:xfrm>
-          <a:prstGeom prst="rect">
-            <a:avLst/>
-          </a:prstGeom>
-          <a:noFill/>
-          <a:ln/>
-        </p:spPr>
-        <p:txBody>
-          <a:bodyPr wrap="square" lIns="0" tIns="0" rIns="0" bIns="0" rtlCol="0" anchor="ctr">
-            <a:normAutofit/>
-          </a:bodyPr>
-          <a:lstStyle/>
-          <a:p>
-            <a:pPr algn="ctr" indent="0" marL="0">
-              <a:buNone/>
-            </a:pPr>
-            <a:r>
-              <a:rPr lang="en-US" altLang="en-US" sz="700" b="1" dirty="0">
-                <a:solidFill>
-                  <a:srgbClr val="222222"/>
-                </a:solidFill>
-                <a:latin typeface="Calibri" pitchFamily="34" charset="0"/>
-                <a:ea typeface="Calibri" pitchFamily="34" charset="-122"/>
-                <a:cs typeface="Calibri" pitchFamily="34" charset="-120"/>
-              </a:rPr>
-              <a:t>27 Oct</a:t>
-            </a:r>
-            <a:endParaRPr lang="en-US" sz="700" dirty="0"/>
-          </a:p>
-        </p:txBody>
-      </p:sp>
-      <p:sp>
-        <p:nvSpPr>
-          <p:cNvPr id="226" name="Text 224"/>
-          <p:cNvSpPr/>
-          <p:nvPr/>
-        </p:nvSpPr>
-        <p:spPr>
-          <a:xfrm>
-            <a:off x="5385816" y="3854196"/>
-            <a:ext cx="658368" cy="268986"/>
-          </a:xfrm>
-          <a:prstGeom prst="rect">
-            <a:avLst/>
-          </a:prstGeom>
-          <a:noFill/>
-          <a:ln/>
-        </p:spPr>
-        <p:txBody>
-          <a:bodyPr wrap="square" lIns="0" tIns="0" rIns="0" bIns="0" rtlCol="0" anchor="ctr">
-            <a:normAutofit/>
-          </a:bodyPr>
-          <a:lstStyle/>
-          <a:p>
-            <a:pPr algn="ctr" indent="0" marL="0">
-              <a:buNone/>
-            </a:pPr>
-            <a:r>
-              <a:rPr lang="en-US" altLang="en-US" sz="700" b="1" dirty="0">
-                <a:solidFill>
-                  <a:srgbClr val="222222"/>
-                </a:solidFill>
-                <a:latin typeface="Calibri" pitchFamily="34" charset="0"/>
-                <a:ea typeface="Calibri" pitchFamily="34" charset="-122"/>
-                <a:cs typeface="Calibri" pitchFamily="34" charset="-120"/>
-              </a:rPr>
-              <a:t>27 Oct</a:t>
-            </a:r>
-            <a:endParaRPr lang="en-US" sz="700" dirty="0"/>
-          </a:p>
-        </p:txBody>
-      </p:sp>
-      <p:sp>
-        <p:nvSpPr>
-          <p:cNvPr id="227" name="Shape 225"/>
-          <p:cNvSpPr/>
-          <p:nvPr/>
-        </p:nvSpPr>
-        <p:spPr>
-          <a:xfrm>
-            <a:off x="8254854" y="3910683"/>
-            <a:ext cx="170052" cy="156012"/>
-          </a:xfrm>
-          <a:prstGeom prst="roundRect">
-            <a:avLst>
-              <a:gd name="adj" fmla="val 23444"/>
-            </a:avLst>
-          </a:prstGeom>
-          <a:solidFill>
-            <a:srgbClr val="00778B"/>
-          </a:solidFill>
-          <a:ln w="6350">
-            <a:solidFill>
-              <a:srgbClr val="00778B"/>
-            </a:solidFill>
-            <a:prstDash val="solid"/>
-          </a:ln>
-          <a:effectLst>
-            <a:outerShdw sx="100000" sy="100000" kx="0" ky="0" algn="bl" rotWithShape="0" blurRad="38100" dist="12700" dir="5400000">
-              <a:srgbClr val="000000">
-                <a:alpha val="20000"/>
-              </a:srgbClr>
-            </a:outerShdw>
-          </a:effectLst>
-        </p:spPr>
-      </p:sp>
-      <p:sp>
-        <p:nvSpPr>
-          <p:cNvPr id="228" name="Shape 226"/>
-          <p:cNvSpPr/>
-          <p:nvPr/>
-        </p:nvSpPr>
-        <p:spPr>
-          <a:xfrm>
-            <a:off x="365760" y="4123182"/>
-            <a:ext cx="11460175" cy="268986"/>
-          </a:xfrm>
-          <a:prstGeom prst="rect">
-            <a:avLst/>
-          </a:prstGeom>
-          <a:solidFill>
-            <a:srgbClr val="F6F9FA"/>
-          </a:solidFill>
-          <a:ln w="6350">
-            <a:solidFill>
-              <a:srgbClr val="DFE6EA"/>
-            </a:solidFill>
-            <a:prstDash val="solid"/>
-          </a:ln>
-        </p:spPr>
-      </p:sp>
-      <p:sp>
-        <p:nvSpPr>
-          <p:cNvPr id="229" name="Shape 227"/>
-          <p:cNvSpPr/>
-          <p:nvPr/>
-        </p:nvSpPr>
-        <p:spPr>
-          <a:xfrm>
-            <a:off x="438912" y="4138803"/>
-            <a:ext cx="237744" cy="237744"/>
-          </a:xfrm>
-          <a:prstGeom prst="ellipse">
-            <a:avLst/>
-          </a:prstGeom>
-          <a:solidFill>
-            <a:srgbClr val="00778B"/>
-          </a:solidFill>
-          <a:ln w="19050">
-            <a:solidFill>
-              <a:srgbClr val="222222"/>
-            </a:solidFill>
-            <a:prstDash val="solid"/>
-          </a:ln>
-        </p:spPr>
-      </p:sp>
-      <p:sp>
-        <p:nvSpPr>
-          <p:cNvPr id="230" name="Text 228"/>
-          <p:cNvSpPr/>
-          <p:nvPr/>
-        </p:nvSpPr>
-        <p:spPr>
-          <a:xfrm>
-            <a:off x="365760" y="4123182"/>
-            <a:ext cx="384048" cy="268986"/>
-          </a:xfrm>
-          <a:prstGeom prst="rect">
-            <a:avLst/>
-          </a:prstGeom>
-          <a:noFill/>
-          <a:ln/>
-        </p:spPr>
-        <p:txBody>
-          <a:bodyPr wrap="square" lIns="0" tIns="0" rIns="0" bIns="0" rtlCol="0" anchor="ctr">
-            <a:normAutofit/>
-          </a:bodyPr>
-          <a:lstStyle/>
-          <a:p>
-            <a:pPr algn="ctr" indent="0" marL="0">
-              <a:buNone/>
-            </a:pPr>
-            <a:r>
-              <a:rPr lang="en-US" altLang="en-US" sz="850" b="1" dirty="0">
-                <a:solidFill>
-                  <a:srgbClr val="FFFFFF"/>
-                </a:solidFill>
-                <a:latin typeface="Calibri" pitchFamily="34" charset="0"/>
-                <a:ea typeface="Calibri" pitchFamily="34" charset="-122"/>
-                <a:cs typeface="Calibri" pitchFamily="34" charset="-120"/>
-              </a:rPr>
-              <a:t>C</a:t>
-            </a:r>
-            <a:endParaRPr lang="en-US" sz="850" dirty="0"/>
-          </a:p>
-        </p:txBody>
-      </p:sp>
-      <p:sp>
-        <p:nvSpPr>
-          <p:cNvPr id="231" name="Text 229"/>
-          <p:cNvSpPr/>
-          <p:nvPr/>
-        </p:nvSpPr>
-        <p:spPr>
-          <a:xfrm>
-            <a:off x="822960" y="4123182"/>
-            <a:ext cx="2606040" cy="268986"/>
-          </a:xfrm>
-          <a:prstGeom prst="rect">
-            <a:avLst/>
-          </a:prstGeom>
-          <a:noFill/>
-          <a:ln/>
-        </p:spPr>
-        <p:txBody>
-          <a:bodyPr wrap="square" lIns="0" tIns="0" rIns="0" bIns="0" rtlCol="0" anchor="ctr">
-            <a:normAutofit/>
-          </a:bodyPr>
-          <a:lstStyle/>
-          <a:p>
-            <a:pPr algn="l" indent="0" marL="0">
-              <a:buNone/>
-            </a:pPr>
-            <a:r>
-              <a:rPr lang="en-US" altLang="en-US" sz="750" b="1" dirty="0">
-                <a:solidFill>
-                  <a:srgbClr val="222222"/>
-                </a:solidFill>
-                <a:latin typeface="Calibri" pitchFamily="34" charset="0"/>
-                <a:ea typeface="Calibri" pitchFamily="34" charset="-122"/>
-                <a:cs typeface="Calibri" pitchFamily="34" charset="-120"/>
-              </a:rPr>
-              <a:t>Pit trench – reinforcement, formwork &amp; concrete</a:t>
-            </a:r>
-            <a:endParaRPr lang="en-US" sz="750" dirty="0"/>
-          </a:p>
-        </p:txBody>
-      </p:sp>
-      <p:sp>
-        <p:nvSpPr>
-          <p:cNvPr id="232" name="Text 230"/>
-          <p:cNvSpPr/>
-          <p:nvPr/>
-        </p:nvSpPr>
-        <p:spPr>
-          <a:xfrm>
-            <a:off x="3447288" y="4123182"/>
-            <a:ext cx="777240" cy="268986"/>
-          </a:xfrm>
-          <a:prstGeom prst="rect">
-            <a:avLst/>
-          </a:prstGeom>
-          <a:noFill/>
-          <a:ln/>
-        </p:spPr>
-        <p:txBody>
-          <a:bodyPr wrap="square" lIns="0" tIns="0" rIns="0" bIns="0" rtlCol="0" anchor="ctr">
-            <a:normAutofit/>
-          </a:bodyPr>
-          <a:lstStyle/>
-          <a:p>
-            <a:pPr algn="ctr" indent="0" marL="0">
-              <a:buNone/>
-            </a:pPr>
-            <a:r>
-              <a:rPr lang="en-US" altLang="en-US" sz="700" dirty="0">
-                <a:solidFill>
-                  <a:srgbClr val="444444"/>
-                </a:solidFill>
-                <a:latin typeface="Calibri" pitchFamily="34" charset="0"/>
-                <a:ea typeface="Calibri" pitchFamily="34" charset="-122"/>
-                <a:cs typeface="Calibri" pitchFamily="34" charset="-120"/>
-              </a:rPr>
-              <a:t>A · FS</a:t>
-            </a:r>
-            <a:endParaRPr lang="en-US" sz="700" dirty="0"/>
-          </a:p>
-        </p:txBody>
-      </p:sp>
-      <p:sp>
-        <p:nvSpPr>
-          <p:cNvPr id="233" name="Text 231"/>
-          <p:cNvSpPr/>
-          <p:nvPr/>
-        </p:nvSpPr>
-        <p:spPr>
-          <a:xfrm>
-            <a:off x="4224528" y="4123182"/>
-            <a:ext cx="502920" cy="268986"/>
-          </a:xfrm>
-          <a:prstGeom prst="rect">
-            <a:avLst/>
-          </a:prstGeom>
-          <a:noFill/>
-          <a:ln/>
-        </p:spPr>
-        <p:txBody>
-          <a:bodyPr wrap="square" lIns="0" tIns="0" rIns="0" bIns="0" rtlCol="0" anchor="ctr">
-            <a:normAutofit/>
-          </a:bodyPr>
-          <a:lstStyle/>
-          <a:p>
-            <a:pPr algn="ctr" indent="0" marL="0">
-              <a:buNone/>
-            </a:pPr>
-            <a:r>
-              <a:rPr lang="en-US" altLang="en-US" sz="900" b="1" dirty="0">
-                <a:solidFill>
-                  <a:srgbClr val="222222"/>
-                </a:solidFill>
-                <a:latin typeface="Calibri" pitchFamily="34" charset="0"/>
-                <a:ea typeface="Calibri" pitchFamily="34" charset="-122"/>
-                <a:cs typeface="Calibri" pitchFamily="34" charset="-120"/>
-              </a:rPr>
-              <a:t>2</a:t>
-            </a:r>
-            <a:endParaRPr lang="en-US" sz="900" dirty="0"/>
-          </a:p>
-        </p:txBody>
-      </p:sp>
-      <p:sp>
-        <p:nvSpPr>
-          <p:cNvPr id="234" name="Text 232"/>
-          <p:cNvSpPr/>
-          <p:nvPr/>
-        </p:nvSpPr>
-        <p:spPr>
-          <a:xfrm>
-            <a:off x="4727448" y="4123182"/>
-            <a:ext cx="658368" cy="268986"/>
-          </a:xfrm>
-          <a:prstGeom prst="rect">
-            <a:avLst/>
-          </a:prstGeom>
-          <a:noFill/>
-          <a:ln/>
-        </p:spPr>
-        <p:txBody>
-          <a:bodyPr wrap="square" lIns="0" tIns="0" rIns="0" bIns="0" rtlCol="0" anchor="ctr">
-            <a:normAutofit/>
-          </a:bodyPr>
-          <a:lstStyle/>
-          <a:p>
-            <a:pPr algn="ctr" indent="0" marL="0">
-              <a:buNone/>
-            </a:pPr>
-            <a:r>
-              <a:rPr lang="en-US" altLang="en-US" sz="700" b="1" dirty="0">
-                <a:solidFill>
-                  <a:srgbClr val="222222"/>
-                </a:solidFill>
-                <a:latin typeface="Calibri" pitchFamily="34" charset="0"/>
-                <a:ea typeface="Calibri" pitchFamily="34" charset="-122"/>
-                <a:cs typeface="Calibri" pitchFamily="34" charset="-120"/>
-              </a:rPr>
-              <a:t>27 Oct</a:t>
-            </a:r>
-            <a:endParaRPr lang="en-US" sz="700" dirty="0"/>
-          </a:p>
-        </p:txBody>
-      </p:sp>
-      <p:sp>
-        <p:nvSpPr>
-          <p:cNvPr id="235" name="Text 233"/>
-          <p:cNvSpPr/>
-          <p:nvPr/>
-        </p:nvSpPr>
-        <p:spPr>
-          <a:xfrm>
-            <a:off x="5385816" y="4123182"/>
-            <a:ext cx="658368" cy="268986"/>
-          </a:xfrm>
-          <a:prstGeom prst="rect">
-            <a:avLst/>
-          </a:prstGeom>
-          <a:noFill/>
-          <a:ln/>
-        </p:spPr>
-        <p:txBody>
-          <a:bodyPr wrap="square" lIns="0" tIns="0" rIns="0" bIns="0" rtlCol="0" anchor="ctr">
-            <a:normAutofit/>
-          </a:bodyPr>
-          <a:lstStyle/>
-          <a:p>
-            <a:pPr algn="ctr" indent="0" marL="0">
-              <a:buNone/>
-            </a:pPr>
-            <a:r>
-              <a:rPr lang="en-US" altLang="en-US" sz="700" b="1" dirty="0">
-                <a:solidFill>
-                  <a:srgbClr val="222222"/>
-                </a:solidFill>
-                <a:latin typeface="Calibri" pitchFamily="34" charset="0"/>
-                <a:ea typeface="Calibri" pitchFamily="34" charset="-122"/>
-                <a:cs typeface="Calibri" pitchFamily="34" charset="-120"/>
-              </a:rPr>
-              <a:t>28 Oct</a:t>
-            </a:r>
-            <a:endParaRPr lang="en-US" sz="700" dirty="0"/>
-          </a:p>
-        </p:txBody>
-      </p:sp>
-      <p:sp>
-        <p:nvSpPr>
-          <p:cNvPr id="236" name="Shape 234"/>
-          <p:cNvSpPr/>
-          <p:nvPr/>
-        </p:nvSpPr>
-        <p:spPr>
-          <a:xfrm>
-            <a:off x="8254854" y="4179669"/>
-            <a:ext cx="340103" cy="156012"/>
-          </a:xfrm>
-          <a:prstGeom prst="roundRect">
-            <a:avLst>
-              <a:gd name="adj" fmla="val 23444"/>
-            </a:avLst>
-          </a:prstGeom>
-          <a:solidFill>
-            <a:srgbClr val="00778B"/>
-          </a:solidFill>
-          <a:ln w="19050">
-            <a:solidFill>
-              <a:srgbClr val="222222"/>
-            </a:solidFill>
-            <a:prstDash val="solid"/>
-          </a:ln>
-          <a:effectLst>
-            <a:outerShdw sx="100000" sy="100000" kx="0" ky="0" algn="bl" rotWithShape="0" blurRad="38100" dist="12700" dir="5400000">
-              <a:srgbClr val="000000">
-                <a:alpha val="20000"/>
-              </a:srgbClr>
-            </a:outerShdw>
-          </a:effectLst>
-        </p:spPr>
-      </p:sp>
-      <p:sp>
-        <p:nvSpPr>
-          <p:cNvPr id="237" name="Text 235"/>
-          <p:cNvSpPr/>
-          <p:nvPr/>
-        </p:nvSpPr>
-        <p:spPr>
-          <a:xfrm>
-            <a:off x="8254854" y="4179669"/>
-            <a:ext cx="340103" cy="156012"/>
-          </a:xfrm>
-          <a:prstGeom prst="rect">
-            <a:avLst/>
-          </a:prstGeom>
-          <a:noFill/>
-          <a:ln/>
-        </p:spPr>
-        <p:txBody>
-          <a:bodyPr wrap="square" lIns="0" tIns="0" rIns="0" bIns="0" rtlCol="0" anchor="ctr">
-            <a:normAutofit/>
-          </a:bodyPr>
-          <a:lstStyle/>
-          <a:p>
-            <a:pPr algn="ctr" indent="0" marL="0">
-              <a:buNone/>
-            </a:pPr>
-            <a:r>
-              <a:rPr lang="en-US" altLang="en-US" sz="700" b="1" dirty="0">
-                <a:solidFill>
-                  <a:srgbClr val="FFFFFF"/>
-                </a:solidFill>
-                <a:latin typeface="Calibri" pitchFamily="34" charset="0"/>
-                <a:ea typeface="Calibri" pitchFamily="34" charset="-122"/>
-                <a:cs typeface="Calibri" pitchFamily="34" charset="-120"/>
-              </a:rPr>
-              <a:t>2 d</a:t>
-            </a:r>
-            <a:endParaRPr lang="en-US" sz="700" dirty="0"/>
-          </a:p>
-        </p:txBody>
-      </p:sp>
-      <p:sp>
-        <p:nvSpPr>
-          <p:cNvPr id="238" name="Shape 236"/>
-          <p:cNvSpPr/>
-          <p:nvPr/>
-        </p:nvSpPr>
-        <p:spPr>
-          <a:xfrm>
-            <a:off x="365760" y="4392168"/>
-            <a:ext cx="11460175" cy="268986"/>
-          </a:xfrm>
-          <a:prstGeom prst="rect">
-            <a:avLst/>
-          </a:prstGeom>
-          <a:solidFill>
-            <a:srgbClr val="FFFFFF"/>
-          </a:solidFill>
-          <a:ln w="6350">
-            <a:solidFill>
-              <a:srgbClr val="DFE6EA"/>
-            </a:solidFill>
-            <a:prstDash val="solid"/>
-          </a:ln>
-        </p:spPr>
-      </p:sp>
-      <p:sp>
-        <p:nvSpPr>
-          <p:cNvPr id="239" name="Shape 237"/>
-          <p:cNvSpPr/>
-          <p:nvPr/>
-        </p:nvSpPr>
-        <p:spPr>
-          <a:xfrm>
-            <a:off x="438912" y="4407789"/>
-            <a:ext cx="237744" cy="237744"/>
-          </a:xfrm>
-          <a:prstGeom prst="ellipse">
-            <a:avLst/>
-          </a:prstGeom>
-          <a:solidFill>
-            <a:srgbClr val="00778B"/>
-          </a:solidFill>
-          <a:ln w="19050">
-            <a:solidFill>
-              <a:srgbClr val="222222"/>
-            </a:solidFill>
-            <a:prstDash val="solid"/>
-          </a:ln>
-        </p:spPr>
-      </p:sp>
-      <p:sp>
-        <p:nvSpPr>
-          <p:cNvPr id="240" name="Text 238"/>
-          <p:cNvSpPr/>
-          <p:nvPr/>
-        </p:nvSpPr>
-        <p:spPr>
-          <a:xfrm>
-            <a:off x="365760" y="4392168"/>
-            <a:ext cx="384048" cy="268986"/>
-          </a:xfrm>
-          <a:prstGeom prst="rect">
-            <a:avLst/>
-          </a:prstGeom>
-          <a:noFill/>
-          <a:ln/>
-        </p:spPr>
-        <p:txBody>
-          <a:bodyPr wrap="square" lIns="0" tIns="0" rIns="0" bIns="0" rtlCol="0" anchor="ctr">
-            <a:normAutofit/>
-          </a:bodyPr>
-          <a:lstStyle/>
-          <a:p>
-            <a:pPr algn="ctr" indent="0" marL="0">
-              <a:buNone/>
-            </a:pPr>
-            <a:r>
-              <a:rPr lang="en-US" altLang="en-US" sz="850" b="1" dirty="0">
-                <a:solidFill>
-                  <a:srgbClr val="FFFFFF"/>
-                </a:solidFill>
-                <a:latin typeface="Calibri" pitchFamily="34" charset="0"/>
-                <a:ea typeface="Calibri" pitchFamily="34" charset="-122"/>
-                <a:cs typeface="Calibri" pitchFamily="34" charset="-120"/>
-              </a:rPr>
-              <a:t>D</a:t>
-            </a:r>
-            <a:endParaRPr lang="en-US" sz="850" dirty="0"/>
-          </a:p>
-        </p:txBody>
-      </p:sp>
-      <p:sp>
-        <p:nvSpPr>
-          <p:cNvPr id="241" name="Text 239"/>
-          <p:cNvSpPr/>
-          <p:nvPr/>
-        </p:nvSpPr>
-        <p:spPr>
-          <a:xfrm>
-            <a:off x="822960" y="4392168"/>
-            <a:ext cx="2606040" cy="268986"/>
-          </a:xfrm>
-          <a:prstGeom prst="rect">
-            <a:avLst/>
-          </a:prstGeom>
-          <a:noFill/>
-          <a:ln/>
-        </p:spPr>
-        <p:txBody>
-          <a:bodyPr wrap="square" lIns="0" tIns="0" rIns="0" bIns="0" rtlCol="0" anchor="ctr">
-            <a:normAutofit/>
-          </a:bodyPr>
-          <a:lstStyle/>
-          <a:p>
-            <a:pPr algn="l" indent="0" marL="0">
-              <a:buNone/>
-            </a:pPr>
-            <a:r>
-              <a:rPr lang="en-US" altLang="en-US" sz="750" b="1" dirty="0">
-                <a:solidFill>
-                  <a:srgbClr val="222222"/>
-                </a:solidFill>
-                <a:latin typeface="Calibri" pitchFamily="34" charset="0"/>
-                <a:ea typeface="Calibri" pitchFamily="34" charset="-122"/>
-                <a:cs typeface="Calibri" pitchFamily="34" charset="-120"/>
-              </a:rPr>
-              <a:t>Pit slab / raft – reinforcement, formwork &amp; concrete</a:t>
-            </a:r>
-            <a:endParaRPr lang="en-US" sz="750" dirty="0"/>
-          </a:p>
-        </p:txBody>
-      </p:sp>
-      <p:sp>
-        <p:nvSpPr>
-          <p:cNvPr id="242" name="Text 240"/>
-          <p:cNvSpPr/>
-          <p:nvPr/>
-        </p:nvSpPr>
-        <p:spPr>
-          <a:xfrm>
-            <a:off x="3447288" y="4392168"/>
-            <a:ext cx="777240" cy="268986"/>
-          </a:xfrm>
-          <a:prstGeom prst="rect">
-            <a:avLst/>
-          </a:prstGeom>
-          <a:noFill/>
-          <a:ln/>
-        </p:spPr>
-        <p:txBody>
-          <a:bodyPr wrap="square" lIns="0" tIns="0" rIns="0" bIns="0" rtlCol="0" anchor="ctr">
-            <a:normAutofit/>
-          </a:bodyPr>
-          <a:lstStyle/>
-          <a:p>
-            <a:pPr algn="ctr" indent="0" marL="0">
-              <a:buNone/>
-            </a:pPr>
-            <a:r>
-              <a:rPr lang="en-US" altLang="en-US" sz="700" dirty="0">
-                <a:solidFill>
-                  <a:srgbClr val="444444"/>
-                </a:solidFill>
-                <a:latin typeface="Calibri" pitchFamily="34" charset="0"/>
-                <a:ea typeface="Calibri" pitchFamily="34" charset="-122"/>
-                <a:cs typeface="Calibri" pitchFamily="34" charset="-120"/>
-              </a:rPr>
-              <a:t>C · FS</a:t>
-            </a:r>
-            <a:endParaRPr lang="en-US" sz="700" dirty="0"/>
-          </a:p>
-        </p:txBody>
-      </p:sp>
-      <p:sp>
-        <p:nvSpPr>
-          <p:cNvPr id="243" name="Text 241"/>
-          <p:cNvSpPr/>
-          <p:nvPr/>
-        </p:nvSpPr>
-        <p:spPr>
-          <a:xfrm>
-            <a:off x="4224528" y="4392168"/>
-            <a:ext cx="502920" cy="268986"/>
-          </a:xfrm>
-          <a:prstGeom prst="rect">
-            <a:avLst/>
-          </a:prstGeom>
-          <a:noFill/>
-          <a:ln/>
-        </p:spPr>
-        <p:txBody>
-          <a:bodyPr wrap="square" lIns="0" tIns="0" rIns="0" bIns="0" rtlCol="0" anchor="ctr">
-            <a:normAutofit/>
-          </a:bodyPr>
-          <a:lstStyle/>
-          <a:p>
-            <a:pPr algn="ctr" indent="0" marL="0">
-              <a:buNone/>
-            </a:pPr>
-            <a:r>
-              <a:rPr lang="en-US" altLang="en-US" sz="900" b="1" dirty="0">
-                <a:solidFill>
-                  <a:srgbClr val="222222"/>
-                </a:solidFill>
-                <a:latin typeface="Calibri" pitchFamily="34" charset="0"/>
-                <a:ea typeface="Calibri" pitchFamily="34" charset="-122"/>
-                <a:cs typeface="Calibri" pitchFamily="34" charset="-120"/>
-              </a:rPr>
-              <a:t>5</a:t>
-            </a:r>
-            <a:endParaRPr lang="en-US" sz="900" dirty="0"/>
-          </a:p>
-        </p:txBody>
-      </p:sp>
-      <p:sp>
-        <p:nvSpPr>
-          <p:cNvPr id="244" name="Text 242"/>
-          <p:cNvSpPr/>
-          <p:nvPr/>
-        </p:nvSpPr>
-        <p:spPr>
-          <a:xfrm>
-            <a:off x="4727448" y="4392168"/>
-            <a:ext cx="658368" cy="268986"/>
-          </a:xfrm>
-          <a:prstGeom prst="rect">
-            <a:avLst/>
-          </a:prstGeom>
-          <a:noFill/>
-          <a:ln/>
-        </p:spPr>
-        <p:txBody>
-          <a:bodyPr wrap="square" lIns="0" tIns="0" rIns="0" bIns="0" rtlCol="0" anchor="ctr">
-            <a:normAutofit/>
-          </a:bodyPr>
-          <a:lstStyle/>
-          <a:p>
-            <a:pPr algn="ctr" indent="0" marL="0">
-              <a:buNone/>
-            </a:pPr>
-            <a:r>
-              <a:rPr lang="en-US" altLang="en-US" sz="700" b="1" dirty="0">
-                <a:solidFill>
-                  <a:srgbClr val="222222"/>
-                </a:solidFill>
-                <a:latin typeface="Calibri" pitchFamily="34" charset="0"/>
-                <a:ea typeface="Calibri" pitchFamily="34" charset="-122"/>
-                <a:cs typeface="Calibri" pitchFamily="34" charset="-120"/>
-              </a:rPr>
-              <a:t>29 Oct</a:t>
-            </a:r>
-            <a:endParaRPr lang="en-US" sz="700" dirty="0"/>
-          </a:p>
-        </p:txBody>
-      </p:sp>
-      <p:sp>
-        <p:nvSpPr>
-          <p:cNvPr id="245" name="Text 243"/>
-          <p:cNvSpPr/>
-          <p:nvPr/>
-        </p:nvSpPr>
-        <p:spPr>
-          <a:xfrm>
-            <a:off x="5385816" y="4392168"/>
-            <a:ext cx="658368" cy="268986"/>
-          </a:xfrm>
-          <a:prstGeom prst="rect">
-            <a:avLst/>
-          </a:prstGeom>
-          <a:noFill/>
-          <a:ln/>
-        </p:spPr>
-        <p:txBody>
-          <a:bodyPr wrap="square" lIns="0" tIns="0" rIns="0" bIns="0" rtlCol="0" anchor="ctr">
-            <a:normAutofit/>
-          </a:bodyPr>
-          <a:lstStyle/>
-          <a:p>
-            <a:pPr algn="ctr" indent="0" marL="0">
-              <a:buNone/>
-            </a:pPr>
-            <a:r>
-              <a:rPr lang="en-US" altLang="en-US" sz="700" b="1" dirty="0">
-                <a:solidFill>
-                  <a:srgbClr val="222222"/>
-                </a:solidFill>
-                <a:latin typeface="Calibri" pitchFamily="34" charset="0"/>
-                <a:ea typeface="Calibri" pitchFamily="34" charset="-122"/>
-                <a:cs typeface="Calibri" pitchFamily="34" charset="-120"/>
-              </a:rPr>
-              <a:t>3 Nov</a:t>
-            </a:r>
-            <a:endParaRPr lang="en-US" sz="700" dirty="0"/>
-          </a:p>
-        </p:txBody>
-      </p:sp>
-      <p:sp>
-        <p:nvSpPr>
-          <p:cNvPr id="246" name="Shape 244"/>
-          <p:cNvSpPr/>
-          <p:nvPr/>
-        </p:nvSpPr>
-        <p:spPr>
-          <a:xfrm>
-            <a:off x="8594957" y="4448655"/>
-            <a:ext cx="1020309" cy="156012"/>
-          </a:xfrm>
-          <a:prstGeom prst="roundRect">
-            <a:avLst>
-              <a:gd name="adj" fmla="val 23444"/>
-            </a:avLst>
-          </a:prstGeom>
-          <a:solidFill>
-            <a:srgbClr val="00778B"/>
-          </a:solidFill>
-          <a:ln w="19050">
-            <a:solidFill>
-              <a:srgbClr val="222222"/>
-            </a:solidFill>
-            <a:prstDash val="solid"/>
-          </a:ln>
-          <a:effectLst>
-            <a:outerShdw sx="100000" sy="100000" kx="0" ky="0" algn="bl" rotWithShape="0" blurRad="38100" dist="12700" dir="5400000">
-              <a:srgbClr val="000000">
-                <a:alpha val="20000"/>
-              </a:srgbClr>
-            </a:outerShdw>
-          </a:effectLst>
-        </p:spPr>
-      </p:sp>
-      <p:sp>
-        <p:nvSpPr>
-          <p:cNvPr id="247" name="Text 245"/>
-          <p:cNvSpPr/>
-          <p:nvPr/>
-        </p:nvSpPr>
-        <p:spPr>
-          <a:xfrm>
-            <a:off x="8594957" y="4448655"/>
-            <a:ext cx="1020309" cy="156012"/>
-          </a:xfrm>
-          <a:prstGeom prst="rect">
-            <a:avLst/>
-          </a:prstGeom>
-          <a:noFill/>
-          <a:ln/>
-        </p:spPr>
-        <p:txBody>
-          <a:bodyPr wrap="square" lIns="0" tIns="0" rIns="0" bIns="0" rtlCol="0" anchor="ctr">
-            <a:normAutofit/>
-          </a:bodyPr>
-          <a:lstStyle/>
-          <a:p>
-            <a:pPr algn="ctr" indent="0" marL="0">
-              <a:buNone/>
-            </a:pPr>
-            <a:r>
-              <a:rPr lang="en-US" altLang="en-US" sz="700" b="1" dirty="0">
-                <a:solidFill>
-                  <a:srgbClr val="FFFFFF"/>
-                </a:solidFill>
-                <a:latin typeface="Calibri" pitchFamily="34" charset="0"/>
-                <a:ea typeface="Calibri" pitchFamily="34" charset="-122"/>
-                <a:cs typeface="Calibri" pitchFamily="34" charset="-120"/>
-              </a:rPr>
-              <a:t>5 d</a:t>
-            </a:r>
-            <a:endParaRPr lang="en-US" sz="700" dirty="0"/>
-          </a:p>
-        </p:txBody>
-      </p:sp>
-      <p:sp>
-        <p:nvSpPr>
-          <p:cNvPr id="248" name="Shape 246"/>
-          <p:cNvSpPr/>
-          <p:nvPr/>
-        </p:nvSpPr>
-        <p:spPr>
-          <a:xfrm>
-            <a:off x="365760" y="4661154"/>
-            <a:ext cx="11460175" cy="268986"/>
-          </a:xfrm>
-          <a:prstGeom prst="rect">
-            <a:avLst/>
-          </a:prstGeom>
-          <a:solidFill>
-            <a:srgbClr val="F6F9FA"/>
-          </a:solidFill>
-          <a:ln w="6350">
-            <a:solidFill>
-              <a:srgbClr val="DFE6EA"/>
-            </a:solidFill>
-            <a:prstDash val="solid"/>
-          </a:ln>
-        </p:spPr>
-      </p:sp>
-      <p:sp>
-        <p:nvSpPr>
-          <p:cNvPr id="249" name="Shape 247"/>
-          <p:cNvSpPr/>
-          <p:nvPr/>
-        </p:nvSpPr>
-        <p:spPr>
-          <a:xfrm>
-            <a:off x="438912" y="4676775"/>
-            <a:ext cx="237744" cy="237744"/>
-          </a:xfrm>
-          <a:prstGeom prst="ellipse">
-            <a:avLst/>
-          </a:prstGeom>
-          <a:solidFill>
-            <a:srgbClr val="00778B"/>
-          </a:solidFill>
-          <a:ln w="6350">
-            <a:solidFill>
-              <a:srgbClr val="00778B"/>
-            </a:solidFill>
-            <a:prstDash val="solid"/>
-          </a:ln>
-        </p:spPr>
-      </p:sp>
-      <p:sp>
-        <p:nvSpPr>
-          <p:cNvPr id="250" name="Text 248"/>
-          <p:cNvSpPr/>
-          <p:nvPr/>
-        </p:nvSpPr>
-        <p:spPr>
-          <a:xfrm>
-            <a:off x="365760" y="4661154"/>
-            <a:ext cx="384048" cy="268986"/>
-          </a:xfrm>
-          <a:prstGeom prst="rect">
-            <a:avLst/>
-          </a:prstGeom>
-          <a:noFill/>
-          <a:ln/>
-        </p:spPr>
-        <p:txBody>
-          <a:bodyPr wrap="square" lIns="0" tIns="0" rIns="0" bIns="0" rtlCol="0" anchor="ctr">
-            <a:normAutofit/>
-          </a:bodyPr>
-          <a:lstStyle/>
-          <a:p>
-            <a:pPr algn="ctr" indent="0" marL="0">
-              <a:buNone/>
-            </a:pPr>
-            <a:r>
-              <a:rPr lang="en-US" altLang="en-US" sz="850" b="1" dirty="0">
-                <a:solidFill>
-                  <a:srgbClr val="FFFFFF"/>
-                </a:solidFill>
-                <a:latin typeface="Calibri" pitchFamily="34" charset="0"/>
-                <a:ea typeface="Calibri" pitchFamily="34" charset="-122"/>
-                <a:cs typeface="Calibri" pitchFamily="34" charset="-120"/>
-              </a:rPr>
-              <a:t>E</a:t>
-            </a:r>
-            <a:endParaRPr lang="en-US" sz="850" dirty="0"/>
-          </a:p>
-        </p:txBody>
-      </p:sp>
-      <p:sp>
-        <p:nvSpPr>
-          <p:cNvPr id="251" name="Text 249"/>
-          <p:cNvSpPr/>
-          <p:nvPr/>
-        </p:nvSpPr>
-        <p:spPr>
-          <a:xfrm>
-            <a:off x="822960" y="4661154"/>
-            <a:ext cx="2606040" cy="268986"/>
-          </a:xfrm>
-          <a:prstGeom prst="rect">
-            <a:avLst/>
-          </a:prstGeom>
-          <a:noFill/>
-          <a:ln/>
-        </p:spPr>
-        <p:txBody>
-          <a:bodyPr wrap="square" lIns="0" tIns="0" rIns="0" bIns="0" rtlCol="0" anchor="ctr">
-            <a:normAutofit/>
-          </a:bodyPr>
-          <a:lstStyle/>
-          <a:p>
-            <a:pPr algn="l" indent="0" marL="0">
-              <a:buNone/>
-            </a:pPr>
-            <a:r>
-              <a:rPr lang="en-US" altLang="en-US" sz="750" b="1" dirty="0">
-                <a:solidFill>
-                  <a:srgbClr val="222222"/>
-                </a:solidFill>
-                <a:latin typeface="Calibri" pitchFamily="34" charset="0"/>
-                <a:ea typeface="Calibri" pitchFamily="34" charset="-122"/>
-                <a:cs typeface="Calibri" pitchFamily="34" charset="-120"/>
-              </a:rPr>
-              <a:t>Pit wall – reinforcement, formwork &amp; concrete</a:t>
-            </a:r>
-            <a:endParaRPr lang="en-US" sz="750" dirty="0"/>
-          </a:p>
-        </p:txBody>
-      </p:sp>
-      <p:sp>
-        <p:nvSpPr>
-          <p:cNvPr id="252" name="Text 250"/>
-          <p:cNvSpPr/>
-          <p:nvPr/>
-        </p:nvSpPr>
-        <p:spPr>
-          <a:xfrm>
-            <a:off x="3447288" y="4661154"/>
-            <a:ext cx="777240" cy="268986"/>
-          </a:xfrm>
-          <a:prstGeom prst="rect">
-            <a:avLst/>
-          </a:prstGeom>
-          <a:noFill/>
-          <a:ln/>
-        </p:spPr>
-        <p:txBody>
-          <a:bodyPr wrap="square" lIns="0" tIns="0" rIns="0" bIns="0" rtlCol="0" anchor="ctr">
-            <a:normAutofit/>
-          </a:bodyPr>
-          <a:lstStyle/>
-          <a:p>
-            <a:pPr algn="ctr" indent="0" marL="0">
-              <a:buNone/>
-            </a:pPr>
-            <a:r>
-              <a:rPr lang="en-US" altLang="en-US" sz="700" dirty="0">
-                <a:solidFill>
-                  <a:srgbClr val="444444"/>
-                </a:solidFill>
-                <a:latin typeface="Calibri" pitchFamily="34" charset="0"/>
-                <a:ea typeface="Calibri" pitchFamily="34" charset="-122"/>
-                <a:cs typeface="Calibri" pitchFamily="34" charset="-120"/>
-              </a:rPr>
-              <a:t>D · FS</a:t>
-            </a:r>
-            <a:endParaRPr lang="en-US" sz="700" dirty="0"/>
-          </a:p>
-        </p:txBody>
-      </p:sp>
-      <p:sp>
-        <p:nvSpPr>
-          <p:cNvPr id="253" name="Text 251"/>
-          <p:cNvSpPr/>
-          <p:nvPr/>
-        </p:nvSpPr>
-        <p:spPr>
-          <a:xfrm>
-            <a:off x="4224528" y="4661154"/>
-            <a:ext cx="502920" cy="268986"/>
-          </a:xfrm>
-          <a:prstGeom prst="rect">
-            <a:avLst/>
-          </a:prstGeom>
-          <a:noFill/>
-          <a:ln/>
-        </p:spPr>
-        <p:txBody>
-          <a:bodyPr wrap="square" lIns="0" tIns="0" rIns="0" bIns="0" rtlCol="0" anchor="ctr">
-            <a:normAutofit/>
-          </a:bodyPr>
-          <a:lstStyle/>
-          <a:p>
-            <a:pPr algn="ctr" indent="0" marL="0">
-              <a:buNone/>
-            </a:pPr>
-            <a:r>
-              <a:rPr lang="en-US" altLang="en-US" sz="900" b="1" dirty="0">
-                <a:solidFill>
-                  <a:srgbClr val="222222"/>
-                </a:solidFill>
-                <a:latin typeface="Calibri" pitchFamily="34" charset="0"/>
-                <a:ea typeface="Calibri" pitchFamily="34" charset="-122"/>
-                <a:cs typeface="Calibri" pitchFamily="34" charset="-120"/>
-              </a:rPr>
-              <a:t>3</a:t>
-            </a:r>
-            <a:endParaRPr lang="en-US" sz="900" dirty="0"/>
-          </a:p>
-        </p:txBody>
-      </p:sp>
-      <p:sp>
-        <p:nvSpPr>
-          <p:cNvPr id="254" name="Text 252"/>
-          <p:cNvSpPr/>
-          <p:nvPr/>
-        </p:nvSpPr>
-        <p:spPr>
-          <a:xfrm>
-            <a:off x="4727448" y="4661154"/>
-            <a:ext cx="658368" cy="268986"/>
-          </a:xfrm>
-          <a:prstGeom prst="rect">
-            <a:avLst/>
-          </a:prstGeom>
-          <a:noFill/>
-          <a:ln/>
-        </p:spPr>
-        <p:txBody>
-          <a:bodyPr wrap="square" lIns="0" tIns="0" rIns="0" bIns="0" rtlCol="0" anchor="ctr">
-            <a:normAutofit/>
-          </a:bodyPr>
-          <a:lstStyle/>
-          <a:p>
-            <a:pPr algn="ctr" indent="0" marL="0">
-              <a:buNone/>
-            </a:pPr>
-            <a:r>
-              <a:rPr lang="en-US" altLang="en-US" sz="700" b="1" dirty="0">
-                <a:solidFill>
-                  <a:srgbClr val="222222"/>
-                </a:solidFill>
-                <a:latin typeface="Calibri" pitchFamily="34" charset="0"/>
-                <a:ea typeface="Calibri" pitchFamily="34" charset="-122"/>
-                <a:cs typeface="Calibri" pitchFamily="34" charset="-120"/>
-              </a:rPr>
-              <a:t>4 Nov</a:t>
-            </a:r>
-            <a:endParaRPr lang="en-US" sz="700" dirty="0"/>
-          </a:p>
-        </p:txBody>
-      </p:sp>
-      <p:sp>
-        <p:nvSpPr>
-          <p:cNvPr id="255" name="Text 253"/>
-          <p:cNvSpPr/>
-          <p:nvPr/>
-        </p:nvSpPr>
-        <p:spPr>
-          <a:xfrm>
-            <a:off x="5385816" y="4661154"/>
-            <a:ext cx="658368" cy="268986"/>
-          </a:xfrm>
-          <a:prstGeom prst="rect">
-            <a:avLst/>
-          </a:prstGeom>
-          <a:noFill/>
-          <a:ln/>
-        </p:spPr>
-        <p:txBody>
-          <a:bodyPr wrap="square" lIns="0" tIns="0" rIns="0" bIns="0" rtlCol="0" anchor="ctr">
-            <a:normAutofit/>
-          </a:bodyPr>
-          <a:lstStyle/>
-          <a:p>
-            <a:pPr algn="ctr" indent="0" marL="0">
-              <a:buNone/>
-            </a:pPr>
-            <a:r>
-              <a:rPr lang="en-US" altLang="en-US" sz="700" b="1" dirty="0">
-                <a:solidFill>
-                  <a:srgbClr val="222222"/>
-                </a:solidFill>
-                <a:latin typeface="Calibri" pitchFamily="34" charset="0"/>
-                <a:ea typeface="Calibri" pitchFamily="34" charset="-122"/>
-                <a:cs typeface="Calibri" pitchFamily="34" charset="-120"/>
-              </a:rPr>
-              <a:t>7 Nov</a:t>
-            </a:r>
-            <a:endParaRPr lang="en-US" sz="700" dirty="0"/>
-          </a:p>
-        </p:txBody>
-      </p:sp>
-      <p:sp>
-        <p:nvSpPr>
-          <p:cNvPr id="256" name="Shape 254"/>
-          <p:cNvSpPr/>
-          <p:nvPr/>
-        </p:nvSpPr>
-        <p:spPr>
-          <a:xfrm>
-            <a:off x="9615266" y="4717641"/>
-            <a:ext cx="680206" cy="156012"/>
-          </a:xfrm>
-          <a:prstGeom prst="roundRect">
-            <a:avLst>
-              <a:gd name="adj" fmla="val 23444"/>
-            </a:avLst>
-          </a:prstGeom>
-          <a:solidFill>
-            <a:srgbClr val="00778B"/>
-          </a:solidFill>
-          <a:ln w="6350">
-            <a:solidFill>
-              <a:srgbClr val="00778B"/>
-            </a:solidFill>
-            <a:prstDash val="solid"/>
-          </a:ln>
-          <a:effectLst>
-            <a:outerShdw sx="100000" sy="100000" kx="0" ky="0" algn="bl" rotWithShape="0" blurRad="38100" dist="12700" dir="5400000">
-              <a:srgbClr val="000000">
-                <a:alpha val="20000"/>
-              </a:srgbClr>
-            </a:outerShdw>
-          </a:effectLst>
-        </p:spPr>
-      </p:sp>
-      <p:sp>
-        <p:nvSpPr>
-          <p:cNvPr id="257" name="Text 255"/>
-          <p:cNvSpPr/>
-          <p:nvPr/>
-        </p:nvSpPr>
-        <p:spPr>
-          <a:xfrm>
-            <a:off x="9615266" y="4717641"/>
-            <a:ext cx="680206" cy="156012"/>
-          </a:xfrm>
-          <a:prstGeom prst="rect">
-            <a:avLst/>
-          </a:prstGeom>
-          <a:noFill/>
-          <a:ln/>
-        </p:spPr>
-        <p:txBody>
-          <a:bodyPr wrap="square" lIns="0" tIns="0" rIns="0" bIns="0" rtlCol="0" anchor="ctr">
-            <a:normAutofit/>
-          </a:bodyPr>
-          <a:lstStyle/>
-          <a:p>
-            <a:pPr algn="ctr" indent="0" marL="0">
-              <a:buNone/>
-            </a:pPr>
-            <a:r>
-              <a:rPr lang="en-US" altLang="en-US" sz="700" b="1" dirty="0">
-                <a:solidFill>
-                  <a:srgbClr val="FFFFFF"/>
-                </a:solidFill>
-                <a:latin typeface="Calibri" pitchFamily="34" charset="0"/>
-                <a:ea typeface="Calibri" pitchFamily="34" charset="-122"/>
-                <a:cs typeface="Calibri" pitchFamily="34" charset="-120"/>
-              </a:rPr>
-              <a:t>3 d</a:t>
-            </a:r>
-            <a:endParaRPr lang="en-US" sz="700" dirty="0"/>
-          </a:p>
-        </p:txBody>
-      </p:sp>
-      <p:sp>
-        <p:nvSpPr>
-          <p:cNvPr id="258" name="Shape 256"/>
-          <p:cNvSpPr/>
-          <p:nvPr/>
-        </p:nvSpPr>
-        <p:spPr>
-          <a:xfrm>
-            <a:off x="365760" y="4930140"/>
-            <a:ext cx="11460175" cy="268986"/>
-          </a:xfrm>
-          <a:prstGeom prst="rect">
-            <a:avLst/>
-          </a:prstGeom>
-          <a:solidFill>
-            <a:srgbClr val="FFFFFF"/>
-          </a:solidFill>
-          <a:ln w="6350">
-            <a:solidFill>
-              <a:srgbClr val="DFE6EA"/>
-            </a:solidFill>
-            <a:prstDash val="solid"/>
-          </a:ln>
-        </p:spPr>
-      </p:sp>
-      <p:sp>
-        <p:nvSpPr>
-          <p:cNvPr id="259" name="Shape 257"/>
-          <p:cNvSpPr/>
-          <p:nvPr/>
-        </p:nvSpPr>
-        <p:spPr>
-          <a:xfrm>
-            <a:off x="438912" y="4945761"/>
-            <a:ext cx="237744" cy="237744"/>
-          </a:xfrm>
-          <a:prstGeom prst="ellipse">
-            <a:avLst/>
-          </a:prstGeom>
-          <a:solidFill>
-            <a:srgbClr val="2E9E6B"/>
-          </a:solidFill>
-          <a:ln w="19050">
-            <a:solidFill>
-              <a:srgbClr val="222222"/>
-            </a:solidFill>
-            <a:prstDash val="solid"/>
-          </a:ln>
-        </p:spPr>
-      </p:sp>
-      <p:sp>
-        <p:nvSpPr>
-          <p:cNvPr id="260" name="Text 258"/>
-          <p:cNvSpPr/>
-          <p:nvPr/>
-        </p:nvSpPr>
-        <p:spPr>
-          <a:xfrm>
-            <a:off x="365760" y="4930140"/>
-            <a:ext cx="384048" cy="268986"/>
-          </a:xfrm>
-          <a:prstGeom prst="rect">
-            <a:avLst/>
-          </a:prstGeom>
-          <a:noFill/>
-          <a:ln/>
-        </p:spPr>
-        <p:txBody>
-          <a:bodyPr wrap="square" lIns="0" tIns="0" rIns="0" bIns="0" rtlCol="0" anchor="ctr">
-            <a:normAutofit/>
-          </a:bodyPr>
-          <a:lstStyle/>
-          <a:p>
-            <a:pPr algn="ctr" indent="0" marL="0">
-              <a:buNone/>
-            </a:pPr>
-            <a:r>
-              <a:rPr lang="en-US" altLang="en-US" sz="850" b="1" dirty="0">
-                <a:solidFill>
-                  <a:srgbClr val="FFFFFF"/>
-                </a:solidFill>
-                <a:latin typeface="Calibri" pitchFamily="34" charset="0"/>
-                <a:ea typeface="Calibri" pitchFamily="34" charset="-122"/>
-                <a:cs typeface="Calibri" pitchFamily="34" charset="-120"/>
-              </a:rPr>
-              <a:t>F</a:t>
-            </a:r>
-            <a:endParaRPr lang="en-US" sz="850" dirty="0"/>
-          </a:p>
-        </p:txBody>
-      </p:sp>
-      <p:sp>
-        <p:nvSpPr>
-          <p:cNvPr id="261" name="Text 259"/>
-          <p:cNvSpPr/>
-          <p:nvPr/>
-        </p:nvSpPr>
-        <p:spPr>
-          <a:xfrm>
-            <a:off x="822960" y="4930140"/>
-            <a:ext cx="2606040" cy="268986"/>
-          </a:xfrm>
-          <a:prstGeom prst="rect">
-            <a:avLst/>
-          </a:prstGeom>
-          <a:noFill/>
-          <a:ln/>
-        </p:spPr>
-        <p:txBody>
-          <a:bodyPr wrap="square" lIns="0" tIns="0" rIns="0" bIns="0" rtlCol="0" anchor="ctr">
-            <a:normAutofit/>
-          </a:bodyPr>
-          <a:lstStyle/>
-          <a:p>
-            <a:pPr algn="l" indent="0" marL="0">
-              <a:buNone/>
-            </a:pPr>
-            <a:r>
-              <a:rPr lang="en-US" altLang="en-US" sz="750" b="1" dirty="0">
-                <a:solidFill>
-                  <a:srgbClr val="222222"/>
-                </a:solidFill>
-                <a:latin typeface="Calibri" pitchFamily="34" charset="0"/>
-                <a:ea typeface="Calibri" pitchFamily="34" charset="-122"/>
-                <a:cs typeface="Calibri" pitchFamily="34" charset="-120"/>
-              </a:rPr>
-              <a:t>Building foundation – excavation, compaction / testing, reinforcement &amp; concrete</a:t>
-            </a:r>
-            <a:endParaRPr lang="en-US" sz="750" dirty="0"/>
-          </a:p>
-        </p:txBody>
-      </p:sp>
-      <p:sp>
-        <p:nvSpPr>
-          <p:cNvPr id="262" name="Text 260"/>
-          <p:cNvSpPr/>
-          <p:nvPr/>
-        </p:nvSpPr>
-        <p:spPr>
-          <a:xfrm>
-            <a:off x="3447288" y="4930140"/>
-            <a:ext cx="777240" cy="268986"/>
-          </a:xfrm>
-          <a:prstGeom prst="rect">
-            <a:avLst/>
-          </a:prstGeom>
-          <a:noFill/>
-          <a:ln/>
-        </p:spPr>
-        <p:txBody>
-          <a:bodyPr wrap="square" lIns="0" tIns="0" rIns="0" bIns="0" rtlCol="0" anchor="ctr">
-            <a:normAutofit/>
-          </a:bodyPr>
-          <a:lstStyle/>
-          <a:p>
-            <a:pPr algn="ctr" indent="0" marL="0">
-              <a:buNone/>
-            </a:pPr>
-            <a:r>
-              <a:rPr lang="en-US" altLang="en-US" sz="700" dirty="0">
-                <a:solidFill>
-                  <a:srgbClr val="444444"/>
-                </a:solidFill>
-                <a:latin typeface="Calibri" pitchFamily="34" charset="0"/>
-                <a:ea typeface="Calibri" pitchFamily="34" charset="-122"/>
-                <a:cs typeface="Calibri" pitchFamily="34" charset="-120"/>
-              </a:rPr>
-              <a:t>D · FS</a:t>
-            </a:r>
-            <a:endParaRPr lang="en-US" sz="700" dirty="0"/>
-          </a:p>
-        </p:txBody>
-      </p:sp>
-      <p:sp>
-        <p:nvSpPr>
-          <p:cNvPr id="263" name="Text 261"/>
-          <p:cNvSpPr/>
-          <p:nvPr/>
-        </p:nvSpPr>
-        <p:spPr>
-          <a:xfrm>
-            <a:off x="4224528" y="4930140"/>
-            <a:ext cx="502920" cy="268986"/>
-          </a:xfrm>
-          <a:prstGeom prst="rect">
-            <a:avLst/>
-          </a:prstGeom>
-          <a:noFill/>
-          <a:ln/>
-        </p:spPr>
-        <p:txBody>
-          <a:bodyPr wrap="square" lIns="0" tIns="0" rIns="0" bIns="0" rtlCol="0" anchor="ctr">
-            <a:normAutofit/>
-          </a:bodyPr>
-          <a:lstStyle/>
-          <a:p>
-            <a:pPr algn="ctr" indent="0" marL="0">
-              <a:buNone/>
-            </a:pPr>
-            <a:r>
-              <a:rPr lang="en-US" altLang="en-US" sz="900" b="1" dirty="0">
-                <a:solidFill>
-                  <a:srgbClr val="222222"/>
-                </a:solidFill>
-                <a:latin typeface="Calibri" pitchFamily="34" charset="0"/>
-                <a:ea typeface="Calibri" pitchFamily="34" charset="-122"/>
-                <a:cs typeface="Calibri" pitchFamily="34" charset="-120"/>
-              </a:rPr>
-              <a:t>6</a:t>
-            </a:r>
-            <a:endParaRPr lang="en-US" sz="900" dirty="0"/>
-          </a:p>
-        </p:txBody>
-      </p:sp>
-      <p:sp>
-        <p:nvSpPr>
-          <p:cNvPr id="264" name="Text 262"/>
-          <p:cNvSpPr/>
-          <p:nvPr/>
-        </p:nvSpPr>
-        <p:spPr>
-          <a:xfrm>
-            <a:off x="4727448" y="4930140"/>
-            <a:ext cx="658368" cy="268986"/>
-          </a:xfrm>
-          <a:prstGeom prst="rect">
-            <a:avLst/>
-          </a:prstGeom>
-          <a:noFill/>
-          <a:ln/>
-        </p:spPr>
-        <p:txBody>
-          <a:bodyPr wrap="square" lIns="0" tIns="0" rIns="0" bIns="0" rtlCol="0" anchor="ctr">
-            <a:normAutofit/>
-          </a:bodyPr>
-          <a:lstStyle/>
-          <a:p>
-            <a:pPr algn="ctr" indent="0" marL="0">
-              <a:buNone/>
-            </a:pPr>
-            <a:r>
-              <a:rPr lang="en-US" altLang="en-US" sz="700" b="1" dirty="0">
-                <a:solidFill>
-                  <a:srgbClr val="222222"/>
-                </a:solidFill>
-                <a:latin typeface="Calibri" pitchFamily="34" charset="0"/>
-                <a:ea typeface="Calibri" pitchFamily="34" charset="-122"/>
-                <a:cs typeface="Calibri" pitchFamily="34" charset="-120"/>
-              </a:rPr>
-              <a:t>4 Nov</a:t>
-            </a:r>
-            <a:endParaRPr lang="en-US" sz="700" dirty="0"/>
-          </a:p>
-        </p:txBody>
-      </p:sp>
-      <p:sp>
-        <p:nvSpPr>
-          <p:cNvPr id="265" name="Text 263"/>
-          <p:cNvSpPr/>
-          <p:nvPr/>
-        </p:nvSpPr>
-        <p:spPr>
-          <a:xfrm>
-            <a:off x="5385816" y="4930140"/>
-            <a:ext cx="658368" cy="268986"/>
-          </a:xfrm>
-          <a:prstGeom prst="rect">
-            <a:avLst/>
-          </a:prstGeom>
-          <a:noFill/>
-          <a:ln/>
-        </p:spPr>
-        <p:txBody>
-          <a:bodyPr wrap="square" lIns="0" tIns="0" rIns="0" bIns="0" rtlCol="0" anchor="ctr">
-            <a:normAutofit/>
-          </a:bodyPr>
-          <a:lstStyle/>
-          <a:p>
-            <a:pPr algn="ctr" indent="0" marL="0">
-              <a:buNone/>
-            </a:pPr>
-            <a:r>
-              <a:rPr lang="en-US" altLang="en-US" sz="700" b="1" dirty="0">
-                <a:solidFill>
-                  <a:srgbClr val="222222"/>
-                </a:solidFill>
-                <a:latin typeface="Calibri" pitchFamily="34" charset="0"/>
-                <a:ea typeface="Calibri" pitchFamily="34" charset="-122"/>
-                <a:cs typeface="Calibri" pitchFamily="34" charset="-120"/>
-              </a:rPr>
-              <a:t>10 Nov</a:t>
-            </a:r>
-            <a:endParaRPr lang="en-US" sz="700" dirty="0"/>
-          </a:p>
-        </p:txBody>
-      </p:sp>
-      <p:sp>
-        <p:nvSpPr>
-          <p:cNvPr id="266" name="Shape 264"/>
-          <p:cNvSpPr/>
-          <p:nvPr/>
-        </p:nvSpPr>
-        <p:spPr>
-          <a:xfrm>
-            <a:off x="9615266" y="4986627"/>
-            <a:ext cx="1190361" cy="156012"/>
-          </a:xfrm>
-          <a:prstGeom prst="roundRect">
-            <a:avLst>
-              <a:gd name="adj" fmla="val 23444"/>
-            </a:avLst>
-          </a:prstGeom>
-          <a:solidFill>
-            <a:srgbClr val="2E9E6B"/>
-          </a:solidFill>
-          <a:ln w="19050">
-            <a:solidFill>
-              <a:srgbClr val="222222"/>
-            </a:solidFill>
-            <a:prstDash val="solid"/>
-          </a:ln>
-          <a:effectLst>
-            <a:outerShdw sx="100000" sy="100000" kx="0" ky="0" algn="bl" rotWithShape="0" blurRad="38100" dist="12700" dir="5400000">
-              <a:srgbClr val="000000">
-                <a:alpha val="20000"/>
-              </a:srgbClr>
-            </a:outerShdw>
-          </a:effectLst>
-        </p:spPr>
-      </p:sp>
-      <p:sp>
-        <p:nvSpPr>
-          <p:cNvPr id="267" name="Text 265"/>
-          <p:cNvSpPr/>
-          <p:nvPr/>
-        </p:nvSpPr>
-        <p:spPr>
-          <a:xfrm>
-            <a:off x="9615266" y="4986627"/>
-            <a:ext cx="1190361" cy="156012"/>
-          </a:xfrm>
-          <a:prstGeom prst="rect">
-            <a:avLst/>
-          </a:prstGeom>
-          <a:noFill/>
-          <a:ln/>
-        </p:spPr>
-        <p:txBody>
-          <a:bodyPr wrap="square" lIns="0" tIns="0" rIns="0" bIns="0" rtlCol="0" anchor="ctr">
-            <a:normAutofit/>
-          </a:bodyPr>
-          <a:lstStyle/>
-          <a:p>
-            <a:pPr algn="ctr" indent="0" marL="0">
-              <a:buNone/>
-            </a:pPr>
-            <a:r>
-              <a:rPr lang="en-US" altLang="en-US" sz="700" b="1" dirty="0">
-                <a:solidFill>
-                  <a:srgbClr val="FFFFFF"/>
-                </a:solidFill>
-                <a:latin typeface="Calibri" pitchFamily="34" charset="0"/>
-                <a:ea typeface="Calibri" pitchFamily="34" charset="-122"/>
-                <a:cs typeface="Calibri" pitchFamily="34" charset="-120"/>
-              </a:rPr>
-              <a:t>6 d</a:t>
-            </a:r>
-            <a:endParaRPr lang="en-US" sz="700" dirty="0"/>
-          </a:p>
-        </p:txBody>
-      </p:sp>
-      <p:sp>
-        <p:nvSpPr>
-          <p:cNvPr id="268" name="Shape 266"/>
-          <p:cNvSpPr/>
-          <p:nvPr/>
-        </p:nvSpPr>
-        <p:spPr>
-          <a:xfrm>
-            <a:off x="365760" y="5199126"/>
-            <a:ext cx="11460175" cy="268986"/>
-          </a:xfrm>
-          <a:prstGeom prst="rect">
-            <a:avLst/>
-          </a:prstGeom>
-          <a:solidFill>
-            <a:srgbClr val="F6F9FA"/>
-          </a:solidFill>
-          <a:ln w="6350">
-            <a:solidFill>
-              <a:srgbClr val="DFE6EA"/>
-            </a:solidFill>
-            <a:prstDash val="solid"/>
-          </a:ln>
-        </p:spPr>
-      </p:sp>
-      <p:sp>
-        <p:nvSpPr>
-          <p:cNvPr id="269" name="Shape 267"/>
-          <p:cNvSpPr/>
-          <p:nvPr/>
-        </p:nvSpPr>
-        <p:spPr>
-          <a:xfrm>
-            <a:off x="438912" y="5214747"/>
-            <a:ext cx="237744" cy="237744"/>
-          </a:xfrm>
-          <a:prstGeom prst="ellipse">
-            <a:avLst/>
-          </a:prstGeom>
-          <a:solidFill>
-            <a:srgbClr val="D68A00"/>
-          </a:solidFill>
-          <a:ln w="19050">
-            <a:solidFill>
-              <a:srgbClr val="222222"/>
-            </a:solidFill>
-            <a:prstDash val="solid"/>
-          </a:ln>
-        </p:spPr>
-      </p:sp>
-      <p:sp>
-        <p:nvSpPr>
-          <p:cNvPr id="270" name="Text 268"/>
-          <p:cNvSpPr/>
-          <p:nvPr/>
-        </p:nvSpPr>
-        <p:spPr>
-          <a:xfrm>
-            <a:off x="365760" y="5199126"/>
-            <a:ext cx="384048" cy="268986"/>
-          </a:xfrm>
-          <a:prstGeom prst="rect">
-            <a:avLst/>
-          </a:prstGeom>
-          <a:noFill/>
-          <a:ln/>
-        </p:spPr>
-        <p:txBody>
-          <a:bodyPr wrap="square" lIns="0" tIns="0" rIns="0" bIns="0" rtlCol="0" anchor="ctr">
-            <a:normAutofit/>
-          </a:bodyPr>
-          <a:lstStyle/>
-          <a:p>
-            <a:pPr algn="ctr" indent="0" marL="0">
-              <a:buNone/>
-            </a:pPr>
-            <a:r>
-              <a:rPr lang="en-US" altLang="en-US" sz="850" b="1" dirty="0">
-                <a:solidFill>
-                  <a:srgbClr val="FFFFFF"/>
-                </a:solidFill>
-                <a:latin typeface="Calibri" pitchFamily="34" charset="0"/>
-                <a:ea typeface="Calibri" pitchFamily="34" charset="-122"/>
-                <a:cs typeface="Calibri" pitchFamily="34" charset="-120"/>
-              </a:rPr>
-              <a:t>G</a:t>
-            </a:r>
-            <a:endParaRPr lang="en-US" sz="850" dirty="0"/>
-          </a:p>
-        </p:txBody>
-      </p:sp>
-      <p:sp>
-        <p:nvSpPr>
-          <p:cNvPr id="271" name="Text 269"/>
-          <p:cNvSpPr/>
-          <p:nvPr/>
-        </p:nvSpPr>
-        <p:spPr>
-          <a:xfrm>
-            <a:off x="822960" y="5199126"/>
-            <a:ext cx="2606040" cy="268986"/>
-          </a:xfrm>
-          <a:prstGeom prst="rect">
-            <a:avLst/>
-          </a:prstGeom>
-          <a:noFill/>
-          <a:ln/>
-        </p:spPr>
-        <p:txBody>
-          <a:bodyPr wrap="square" lIns="0" tIns="0" rIns="0" bIns="0" rtlCol="0" anchor="ctr">
-            <a:normAutofit/>
-          </a:bodyPr>
-          <a:lstStyle/>
-          <a:p>
-            <a:pPr algn="l" indent="0" marL="0">
-              <a:buNone/>
-            </a:pPr>
-            <a:r>
-              <a:rPr lang="en-US" altLang="en-US" sz="750" b="1" dirty="0">
-                <a:solidFill>
-                  <a:srgbClr val="222222"/>
-                </a:solidFill>
-                <a:latin typeface="Calibri" pitchFamily="34" charset="0"/>
-                <a:ea typeface="Calibri" pitchFamily="34" charset="-122"/>
-                <a:cs typeface="Calibri" pitchFamily="34" charset="-120"/>
-              </a:rPr>
-              <a:t>Backfilling works for the building</a:t>
-            </a:r>
-            <a:endParaRPr lang="en-US" sz="750" dirty="0"/>
-          </a:p>
-        </p:txBody>
-      </p:sp>
-      <p:sp>
-        <p:nvSpPr>
-          <p:cNvPr id="272" name="Text 270"/>
-          <p:cNvSpPr/>
-          <p:nvPr/>
-        </p:nvSpPr>
-        <p:spPr>
-          <a:xfrm>
-            <a:off x="3447288" y="5199126"/>
-            <a:ext cx="777240" cy="268986"/>
-          </a:xfrm>
-          <a:prstGeom prst="rect">
-            <a:avLst/>
-          </a:prstGeom>
-          <a:noFill/>
-          <a:ln/>
-        </p:spPr>
-        <p:txBody>
-          <a:bodyPr wrap="square" lIns="0" tIns="0" rIns="0" bIns="0" rtlCol="0" anchor="ctr">
-            <a:normAutofit/>
-          </a:bodyPr>
-          <a:lstStyle/>
-          <a:p>
-            <a:pPr algn="ctr" indent="0" marL="0">
-              <a:buNone/>
-            </a:pPr>
-            <a:r>
-              <a:rPr lang="en-US" altLang="en-US" sz="700" dirty="0">
-                <a:solidFill>
-                  <a:srgbClr val="444444"/>
-                </a:solidFill>
-                <a:latin typeface="Calibri" pitchFamily="34" charset="0"/>
-                <a:ea typeface="Calibri" pitchFamily="34" charset="-122"/>
-                <a:cs typeface="Calibri" pitchFamily="34" charset="-120"/>
-              </a:rPr>
-              <a:t>F · FS</a:t>
-            </a:r>
-            <a:endParaRPr lang="en-US" sz="700" dirty="0"/>
-          </a:p>
-        </p:txBody>
-      </p:sp>
-      <p:sp>
-        <p:nvSpPr>
-          <p:cNvPr id="273" name="Text 271"/>
-          <p:cNvSpPr/>
-          <p:nvPr/>
-        </p:nvSpPr>
-        <p:spPr>
-          <a:xfrm>
-            <a:off x="4224528" y="5199126"/>
-            <a:ext cx="502920" cy="268986"/>
-          </a:xfrm>
-          <a:prstGeom prst="rect">
-            <a:avLst/>
-          </a:prstGeom>
-          <a:noFill/>
-          <a:ln/>
-        </p:spPr>
-        <p:txBody>
-          <a:bodyPr wrap="square" lIns="0" tIns="0" rIns="0" bIns="0" rtlCol="0" anchor="ctr">
-            <a:normAutofit/>
-          </a:bodyPr>
-          <a:lstStyle/>
-          <a:p>
-            <a:pPr algn="ctr" indent="0" marL="0">
-              <a:buNone/>
-            </a:pPr>
-            <a:r>
-              <a:rPr lang="en-US" altLang="en-US" sz="900" b="1" dirty="0">
-                <a:solidFill>
-                  <a:srgbClr val="222222"/>
-                </a:solidFill>
-                <a:latin typeface="Calibri" pitchFamily="34" charset="0"/>
-                <a:ea typeface="Calibri" pitchFamily="34" charset="-122"/>
-                <a:cs typeface="Calibri" pitchFamily="34" charset="-120"/>
-              </a:rPr>
-              <a:t>3</a:t>
-            </a:r>
-            <a:endParaRPr lang="en-US" sz="900" dirty="0"/>
-          </a:p>
-        </p:txBody>
-      </p:sp>
-      <p:sp>
-        <p:nvSpPr>
-          <p:cNvPr id="274" name="Text 272"/>
-          <p:cNvSpPr/>
-          <p:nvPr/>
-        </p:nvSpPr>
-        <p:spPr>
-          <a:xfrm>
-            <a:off x="4727448" y="5199126"/>
-            <a:ext cx="658368" cy="268986"/>
-          </a:xfrm>
-          <a:prstGeom prst="rect">
-            <a:avLst/>
-          </a:prstGeom>
-          <a:noFill/>
-          <a:ln/>
-        </p:spPr>
-        <p:txBody>
-          <a:bodyPr wrap="square" lIns="0" tIns="0" rIns="0" bIns="0" rtlCol="0" anchor="ctr">
-            <a:normAutofit/>
-          </a:bodyPr>
-          <a:lstStyle/>
-          <a:p>
-            <a:pPr algn="ctr" indent="0" marL="0">
-              <a:buNone/>
-            </a:pPr>
-            <a:r>
-              <a:rPr lang="en-US" altLang="en-US" sz="700" b="1" dirty="0">
-                <a:solidFill>
-                  <a:srgbClr val="222222"/>
-                </a:solidFill>
-                <a:latin typeface="Calibri" pitchFamily="34" charset="0"/>
-                <a:ea typeface="Calibri" pitchFamily="34" charset="-122"/>
-                <a:cs typeface="Calibri" pitchFamily="34" charset="-120"/>
-              </a:rPr>
-              <a:t>11 Nov</a:t>
-            </a:r>
-            <a:endParaRPr lang="en-US" sz="700" dirty="0"/>
-          </a:p>
-        </p:txBody>
-      </p:sp>
-      <p:sp>
-        <p:nvSpPr>
-          <p:cNvPr id="275" name="Text 273"/>
-          <p:cNvSpPr/>
-          <p:nvPr/>
-        </p:nvSpPr>
-        <p:spPr>
-          <a:xfrm>
-            <a:off x="5385816" y="5199126"/>
-            <a:ext cx="658368" cy="268986"/>
-          </a:xfrm>
-          <a:prstGeom prst="rect">
-            <a:avLst/>
-          </a:prstGeom>
-          <a:noFill/>
-          <a:ln/>
-        </p:spPr>
-        <p:txBody>
-          <a:bodyPr wrap="square" lIns="0" tIns="0" rIns="0" bIns="0" rtlCol="0" anchor="ctr">
-            <a:normAutofit/>
-          </a:bodyPr>
-          <a:lstStyle/>
-          <a:p>
-            <a:pPr algn="ctr" indent="0" marL="0">
-              <a:buNone/>
-            </a:pPr>
-            <a:r>
-              <a:rPr lang="en-US" altLang="en-US" sz="700" b="1" dirty="0">
-                <a:solidFill>
-                  <a:srgbClr val="222222"/>
-                </a:solidFill>
-                <a:latin typeface="Calibri" pitchFamily="34" charset="0"/>
-                <a:ea typeface="Calibri" pitchFamily="34" charset="-122"/>
-                <a:cs typeface="Calibri" pitchFamily="34" charset="-120"/>
-              </a:rPr>
-              <a:t>14 Nov</a:t>
-            </a:r>
-            <a:endParaRPr lang="en-US" sz="700" dirty="0"/>
-          </a:p>
-        </p:txBody>
-      </p:sp>
-      <p:sp>
-        <p:nvSpPr>
-          <p:cNvPr id="276" name="Shape 274"/>
-          <p:cNvSpPr/>
-          <p:nvPr/>
-        </p:nvSpPr>
-        <p:spPr>
-          <a:xfrm>
-            <a:off x="10805626" y="5255613"/>
-            <a:ext cx="680206" cy="156012"/>
-          </a:xfrm>
-          <a:prstGeom prst="roundRect">
-            <a:avLst>
-              <a:gd name="adj" fmla="val 23444"/>
-            </a:avLst>
-          </a:prstGeom>
-          <a:solidFill>
-            <a:srgbClr val="D68A00"/>
-          </a:solidFill>
-          <a:ln w="19050">
-            <a:solidFill>
-              <a:srgbClr val="222222"/>
-            </a:solidFill>
-            <a:prstDash val="solid"/>
-          </a:ln>
-          <a:effectLst>
-            <a:outerShdw sx="100000" sy="100000" kx="0" ky="0" algn="bl" rotWithShape="0" blurRad="38100" dist="12700" dir="5400000">
-              <a:srgbClr val="000000">
-                <a:alpha val="20000"/>
-              </a:srgbClr>
-            </a:outerShdw>
-          </a:effectLst>
-        </p:spPr>
-      </p:sp>
-      <p:sp>
-        <p:nvSpPr>
-          <p:cNvPr id="277" name="Text 275"/>
-          <p:cNvSpPr/>
-          <p:nvPr/>
-        </p:nvSpPr>
-        <p:spPr>
-          <a:xfrm>
-            <a:off x="10805626" y="5255613"/>
-            <a:ext cx="680206" cy="156012"/>
-          </a:xfrm>
-          <a:prstGeom prst="rect">
-            <a:avLst/>
-          </a:prstGeom>
-          <a:noFill/>
-          <a:ln/>
-        </p:spPr>
-        <p:txBody>
-          <a:bodyPr wrap="square" lIns="0" tIns="0" rIns="0" bIns="0" rtlCol="0" anchor="ctr">
-            <a:normAutofit/>
-          </a:bodyPr>
-          <a:lstStyle/>
-          <a:p>
-            <a:pPr algn="ctr" indent="0" marL="0">
-              <a:buNone/>
-            </a:pPr>
-            <a:r>
-              <a:rPr lang="en-US" altLang="en-US" sz="700" b="1" dirty="0">
-                <a:solidFill>
-                  <a:srgbClr val="FFFFFF"/>
-                </a:solidFill>
-                <a:latin typeface="Calibri" pitchFamily="34" charset="0"/>
-                <a:ea typeface="Calibri" pitchFamily="34" charset="-122"/>
-                <a:cs typeface="Calibri" pitchFamily="34" charset="-120"/>
-              </a:rPr>
-              <a:t>3 d</a:t>
-            </a:r>
-            <a:endParaRPr lang="en-US" sz="700" dirty="0"/>
-          </a:p>
-        </p:txBody>
-      </p:sp>
-      <p:sp>
-        <p:nvSpPr>
-          <p:cNvPr id="278" name="Shape 276"/>
-          <p:cNvSpPr/>
-          <p:nvPr/>
-        </p:nvSpPr>
-        <p:spPr>
-          <a:xfrm>
-            <a:off x="7459460" y="2721765"/>
-            <a:ext cx="0" cy="190980"/>
+          <p:cNvPr id="189" name="Shape 187"/>
+          <p:cNvSpPr/>
+          <p:nvPr/>
+        </p:nvSpPr>
+        <p:spPr>
+          <a:xfrm>
+            <a:off x="8209134" y="2560320"/>
+            <a:ext cx="45720" cy="0"/>
           </a:xfrm>
           <a:prstGeom prst="line">
             <a:avLst/>
@@ -16476,14 +13209,14 @@
       </p:sp>
       <p:sp>
         <p:nvSpPr>
-          <p:cNvPr id="279" name="Shape 277"/>
-          <p:cNvSpPr/>
-          <p:nvPr/>
-        </p:nvSpPr>
-        <p:spPr>
-          <a:xfrm>
-            <a:off x="7459460" y="2912745"/>
-            <a:ext cx="276095" cy="0"/>
+          <p:cNvPr id="190" name="Shape 188"/>
+          <p:cNvSpPr/>
+          <p:nvPr/>
+        </p:nvSpPr>
+        <p:spPr>
+          <a:xfrm>
+            <a:off x="8209134" y="2560320"/>
+            <a:ext cx="0" cy="640080"/>
           </a:xfrm>
           <a:prstGeom prst="line">
             <a:avLst/>
@@ -16494,20 +13227,43 @@
               <a:srgbClr val="2D3338"/>
             </a:solidFill>
             <a:prstDash val="solid"/>
+          </a:ln>
+        </p:spPr>
+      </p:sp>
+      <p:sp>
+        <p:nvSpPr>
+          <p:cNvPr id="191" name="Shape 189"/>
+          <p:cNvSpPr/>
+          <p:nvPr/>
+        </p:nvSpPr>
+        <p:spPr>
+          <a:xfrm>
+            <a:off x="8209134" y="3200400"/>
+            <a:ext cx="36576" cy="0"/>
+          </a:xfrm>
+          <a:prstGeom prst="line">
+            <a:avLst/>
+          </a:prstGeom>
+          <a:noFill/>
+          <a:ln w="13970">
+            <a:solidFill>
+              <a:srgbClr val="2D3338"/>
+            </a:solidFill>
+            <a:prstDash val="solid"/>
             <a:tailEnd type="triangle"/>
           </a:ln>
         </p:spPr>
       </p:sp>
       <p:sp>
         <p:nvSpPr>
-          <p:cNvPr id="280" name="Shape 278"/>
-          <p:cNvSpPr/>
-          <p:nvPr/>
-        </p:nvSpPr>
-        <p:spPr>
-          <a:xfrm>
-            <a:off x="7799563" y="2990751"/>
-            <a:ext cx="0" cy="190980"/>
+          <p:cNvPr id="192" name="Shape 190"/>
+          <p:cNvSpPr/>
+          <p:nvPr/>
+        </p:nvSpPr>
+        <p:spPr>
+          <a:xfrm>
+            <a:off x="10929958" y="3200400"/>
+            <a:ext cx="45720" cy="0"/>
           </a:xfrm>
           <a:prstGeom prst="line">
             <a:avLst/>
@@ -16523,14 +13279,14 @@
       </p:sp>
       <p:sp>
         <p:nvSpPr>
-          <p:cNvPr id="281" name="Shape 279"/>
-          <p:cNvSpPr/>
-          <p:nvPr/>
-        </p:nvSpPr>
-        <p:spPr>
-          <a:xfrm>
-            <a:off x="7799563" y="3181731"/>
-            <a:ext cx="106044" cy="0"/>
+          <p:cNvPr id="193" name="Shape 191"/>
+          <p:cNvSpPr/>
+          <p:nvPr/>
+        </p:nvSpPr>
+        <p:spPr>
+          <a:xfrm>
+            <a:off x="10929958" y="3200400"/>
+            <a:ext cx="0" cy="640080"/>
           </a:xfrm>
           <a:prstGeom prst="line">
             <a:avLst/>
@@ -16541,516 +13297,48 @@
               <a:srgbClr val="2D3338"/>
             </a:solidFill>
             <a:prstDash val="solid"/>
+          </a:ln>
+        </p:spPr>
+      </p:sp>
+      <p:sp>
+        <p:nvSpPr>
+          <p:cNvPr id="194" name="Shape 192"/>
+          <p:cNvSpPr/>
+          <p:nvPr/>
+        </p:nvSpPr>
+        <p:spPr>
+          <a:xfrm>
+            <a:off x="10929958" y="3840480"/>
+            <a:ext cx="36576" cy="0"/>
+          </a:xfrm>
+          <a:prstGeom prst="line">
+            <a:avLst/>
+          </a:prstGeom>
+          <a:noFill/>
+          <a:ln w="13970">
+            <a:solidFill>
+              <a:srgbClr val="2D3338"/>
+            </a:solidFill>
+            <a:prstDash val="solid"/>
             <a:tailEnd type="triangle"/>
           </a:ln>
         </p:spPr>
       </p:sp>
       <p:sp>
         <p:nvSpPr>
-          <p:cNvPr id="282" name="Shape 280"/>
-          <p:cNvSpPr/>
-          <p:nvPr/>
-        </p:nvSpPr>
-        <p:spPr>
-          <a:xfrm>
-            <a:off x="7969615" y="3259737"/>
-            <a:ext cx="0" cy="190980"/>
+          <p:cNvPr id="195" name="Shape 193"/>
+          <p:cNvSpPr/>
+          <p:nvPr/>
+        </p:nvSpPr>
+        <p:spPr>
+          <a:xfrm>
+            <a:off x="7319570" y="1947672"/>
+            <a:ext cx="0" cy="2212848"/>
           </a:xfrm>
           <a:prstGeom prst="line">
             <a:avLst/>
           </a:prstGeom>
           <a:noFill/>
-          <a:ln w="13970">
-            <a:solidFill>
-              <a:srgbClr val="2D3338"/>
-            </a:solidFill>
-            <a:prstDash val="solid"/>
-          </a:ln>
-        </p:spPr>
-      </p:sp>
-      <p:sp>
-        <p:nvSpPr>
-          <p:cNvPr id="283" name="Shape 281"/>
-          <p:cNvSpPr/>
-          <p:nvPr/>
-        </p:nvSpPr>
-        <p:spPr>
-          <a:xfrm>
-            <a:off x="7969615" y="3450717"/>
-            <a:ext cx="106044" cy="0"/>
-          </a:xfrm>
-          <a:prstGeom prst="line">
-            <a:avLst/>
-          </a:prstGeom>
-          <a:noFill/>
-          <a:ln w="13970">
-            <a:solidFill>
-              <a:srgbClr val="2D3338"/>
-            </a:solidFill>
-            <a:prstDash val="solid"/>
-            <a:tailEnd type="triangle"/>
-          </a:ln>
-        </p:spPr>
-      </p:sp>
-      <p:sp>
-        <p:nvSpPr>
-          <p:cNvPr id="284" name="Shape 282"/>
-          <p:cNvSpPr/>
-          <p:nvPr/>
-        </p:nvSpPr>
-        <p:spPr>
-          <a:xfrm>
-            <a:off x="8139666" y="3528723"/>
-            <a:ext cx="0" cy="190980"/>
-          </a:xfrm>
-          <a:prstGeom prst="line">
-            <a:avLst/>
-          </a:prstGeom>
-          <a:noFill/>
-          <a:ln w="13970">
-            <a:solidFill>
-              <a:srgbClr val="2D3338"/>
-            </a:solidFill>
-            <a:prstDash val="solid"/>
-          </a:ln>
-        </p:spPr>
-      </p:sp>
-      <p:sp>
-        <p:nvSpPr>
-          <p:cNvPr id="285" name="Shape 283"/>
-          <p:cNvSpPr/>
-          <p:nvPr/>
-        </p:nvSpPr>
-        <p:spPr>
-          <a:xfrm>
-            <a:off x="8075658" y="3719703"/>
-            <a:ext cx="64008" cy="0"/>
-          </a:xfrm>
-          <a:prstGeom prst="line">
-            <a:avLst/>
-          </a:prstGeom>
-          <a:noFill/>
-          <a:ln w="13970">
-            <a:solidFill>
-              <a:srgbClr val="2D3338"/>
-            </a:solidFill>
-            <a:prstDash val="solid"/>
-            <a:tailEnd type="triangle"/>
-          </a:ln>
-        </p:spPr>
-      </p:sp>
-      <p:sp>
-        <p:nvSpPr>
-          <p:cNvPr id="286" name="Shape 284"/>
-          <p:cNvSpPr/>
-          <p:nvPr/>
-        </p:nvSpPr>
-        <p:spPr>
-          <a:xfrm>
-            <a:off x="7459460" y="2452779"/>
-            <a:ext cx="0" cy="1535910"/>
-          </a:xfrm>
-          <a:prstGeom prst="line">
-            <a:avLst/>
-          </a:prstGeom>
-          <a:noFill/>
-          <a:ln w="13970">
-            <a:solidFill>
-              <a:srgbClr val="2D3338"/>
-            </a:solidFill>
-            <a:prstDash val="solid"/>
-          </a:ln>
-        </p:spPr>
-      </p:sp>
-      <p:sp>
-        <p:nvSpPr>
-          <p:cNvPr id="287" name="Shape 285"/>
-          <p:cNvSpPr/>
-          <p:nvPr/>
-        </p:nvSpPr>
-        <p:spPr>
-          <a:xfrm>
-            <a:off x="7459460" y="3988689"/>
-            <a:ext cx="786250" cy="0"/>
-          </a:xfrm>
-          <a:prstGeom prst="line">
-            <a:avLst/>
-          </a:prstGeom>
-          <a:noFill/>
-          <a:ln w="13970">
-            <a:solidFill>
-              <a:srgbClr val="2D3338"/>
-            </a:solidFill>
-            <a:prstDash val="solid"/>
-            <a:tailEnd type="triangle"/>
-          </a:ln>
-        </p:spPr>
-      </p:sp>
-      <p:sp>
-        <p:nvSpPr>
-          <p:cNvPr id="288" name="Shape 286"/>
-          <p:cNvSpPr/>
-          <p:nvPr/>
-        </p:nvSpPr>
-        <p:spPr>
-          <a:xfrm>
-            <a:off x="8209134" y="2374773"/>
-            <a:ext cx="45720" cy="0"/>
-          </a:xfrm>
-          <a:prstGeom prst="line">
-            <a:avLst/>
-          </a:prstGeom>
-          <a:noFill/>
-          <a:ln w="13970">
-            <a:solidFill>
-              <a:srgbClr val="2D3338"/>
-            </a:solidFill>
-            <a:prstDash val="solid"/>
-          </a:ln>
-        </p:spPr>
-      </p:sp>
-      <p:sp>
-        <p:nvSpPr>
-          <p:cNvPr id="289" name="Shape 287"/>
-          <p:cNvSpPr/>
-          <p:nvPr/>
-        </p:nvSpPr>
-        <p:spPr>
-          <a:xfrm>
-            <a:off x="8209134" y="2374773"/>
-            <a:ext cx="0" cy="1882902"/>
-          </a:xfrm>
-          <a:prstGeom prst="line">
-            <a:avLst/>
-          </a:prstGeom>
-          <a:noFill/>
-          <a:ln w="13970">
-            <a:solidFill>
-              <a:srgbClr val="2D3338"/>
-            </a:solidFill>
-            <a:prstDash val="solid"/>
-          </a:ln>
-        </p:spPr>
-      </p:sp>
-      <p:sp>
-        <p:nvSpPr>
-          <p:cNvPr id="290" name="Shape 288"/>
-          <p:cNvSpPr/>
-          <p:nvPr/>
-        </p:nvSpPr>
-        <p:spPr>
-          <a:xfrm>
-            <a:off x="8209134" y="4257675"/>
-            <a:ext cx="36576" cy="0"/>
-          </a:xfrm>
-          <a:prstGeom prst="line">
-            <a:avLst/>
-          </a:prstGeom>
-          <a:noFill/>
-          <a:ln w="13970">
-            <a:solidFill>
-              <a:srgbClr val="2D3338"/>
-            </a:solidFill>
-            <a:prstDash val="solid"/>
-            <a:tailEnd type="triangle"/>
-          </a:ln>
-        </p:spPr>
-      </p:sp>
-      <p:sp>
-        <p:nvSpPr>
-          <p:cNvPr id="291" name="Shape 289"/>
-          <p:cNvSpPr/>
-          <p:nvPr/>
-        </p:nvSpPr>
-        <p:spPr>
-          <a:xfrm>
-            <a:off x="8549237" y="4257675"/>
-            <a:ext cx="45720" cy="0"/>
-          </a:xfrm>
-          <a:prstGeom prst="line">
-            <a:avLst/>
-          </a:prstGeom>
-          <a:noFill/>
-          <a:ln w="13970">
-            <a:solidFill>
-              <a:srgbClr val="2D3338"/>
-            </a:solidFill>
-            <a:prstDash val="solid"/>
-          </a:ln>
-        </p:spPr>
-      </p:sp>
-      <p:sp>
-        <p:nvSpPr>
-          <p:cNvPr id="292" name="Shape 290"/>
-          <p:cNvSpPr/>
-          <p:nvPr/>
-        </p:nvSpPr>
-        <p:spPr>
-          <a:xfrm>
-            <a:off x="8549237" y="4257675"/>
-            <a:ext cx="0" cy="268986"/>
-          </a:xfrm>
-          <a:prstGeom prst="line">
-            <a:avLst/>
-          </a:prstGeom>
-          <a:noFill/>
-          <a:ln w="13970">
-            <a:solidFill>
-              <a:srgbClr val="2D3338"/>
-            </a:solidFill>
-            <a:prstDash val="solid"/>
-          </a:ln>
-        </p:spPr>
-      </p:sp>
-      <p:sp>
-        <p:nvSpPr>
-          <p:cNvPr id="293" name="Shape 291"/>
-          <p:cNvSpPr/>
-          <p:nvPr/>
-        </p:nvSpPr>
-        <p:spPr>
-          <a:xfrm>
-            <a:off x="8549237" y="4526661"/>
-            <a:ext cx="36576" cy="0"/>
-          </a:xfrm>
-          <a:prstGeom prst="line">
-            <a:avLst/>
-          </a:prstGeom>
-          <a:noFill/>
-          <a:ln w="13970">
-            <a:solidFill>
-              <a:srgbClr val="2D3338"/>
-            </a:solidFill>
-            <a:prstDash val="solid"/>
-            <a:tailEnd type="triangle"/>
-          </a:ln>
-        </p:spPr>
-      </p:sp>
-      <p:sp>
-        <p:nvSpPr>
-          <p:cNvPr id="294" name="Shape 292"/>
-          <p:cNvSpPr/>
-          <p:nvPr/>
-        </p:nvSpPr>
-        <p:spPr>
-          <a:xfrm>
-            <a:off x="9569546" y="4526661"/>
-            <a:ext cx="45720" cy="0"/>
-          </a:xfrm>
-          <a:prstGeom prst="line">
-            <a:avLst/>
-          </a:prstGeom>
-          <a:noFill/>
-          <a:ln w="13970">
-            <a:solidFill>
-              <a:srgbClr val="2D3338"/>
-            </a:solidFill>
-            <a:prstDash val="solid"/>
-          </a:ln>
-        </p:spPr>
-      </p:sp>
-      <p:sp>
-        <p:nvSpPr>
-          <p:cNvPr id="295" name="Shape 293"/>
-          <p:cNvSpPr/>
-          <p:nvPr/>
-        </p:nvSpPr>
-        <p:spPr>
-          <a:xfrm>
-            <a:off x="9569546" y="4526661"/>
-            <a:ext cx="0" cy="268986"/>
-          </a:xfrm>
-          <a:prstGeom prst="line">
-            <a:avLst/>
-          </a:prstGeom>
-          <a:noFill/>
-          <a:ln w="13970">
-            <a:solidFill>
-              <a:srgbClr val="2D3338"/>
-            </a:solidFill>
-            <a:prstDash val="solid"/>
-          </a:ln>
-        </p:spPr>
-      </p:sp>
-      <p:sp>
-        <p:nvSpPr>
-          <p:cNvPr id="296" name="Shape 294"/>
-          <p:cNvSpPr/>
-          <p:nvPr/>
-        </p:nvSpPr>
-        <p:spPr>
-          <a:xfrm>
-            <a:off x="9569546" y="4795647"/>
-            <a:ext cx="36576" cy="0"/>
-          </a:xfrm>
-          <a:prstGeom prst="line">
-            <a:avLst/>
-          </a:prstGeom>
-          <a:noFill/>
-          <a:ln w="13970">
-            <a:solidFill>
-              <a:srgbClr val="2D3338"/>
-            </a:solidFill>
-            <a:prstDash val="solid"/>
-            <a:tailEnd type="triangle"/>
-          </a:ln>
-        </p:spPr>
-      </p:sp>
-      <p:sp>
-        <p:nvSpPr>
-          <p:cNvPr id="297" name="Shape 295"/>
-          <p:cNvSpPr/>
-          <p:nvPr/>
-        </p:nvSpPr>
-        <p:spPr>
-          <a:xfrm>
-            <a:off x="9569546" y="4526661"/>
-            <a:ext cx="45720" cy="0"/>
-          </a:xfrm>
-          <a:prstGeom prst="line">
-            <a:avLst/>
-          </a:prstGeom>
-          <a:noFill/>
-          <a:ln w="13970">
-            <a:solidFill>
-              <a:srgbClr val="2D3338"/>
-            </a:solidFill>
-            <a:prstDash val="solid"/>
-          </a:ln>
-        </p:spPr>
-      </p:sp>
-      <p:sp>
-        <p:nvSpPr>
-          <p:cNvPr id="298" name="Shape 296"/>
-          <p:cNvSpPr/>
-          <p:nvPr/>
-        </p:nvSpPr>
-        <p:spPr>
-          <a:xfrm>
-            <a:off x="9569546" y="4526661"/>
-            <a:ext cx="0" cy="537972"/>
-          </a:xfrm>
-          <a:prstGeom prst="line">
-            <a:avLst/>
-          </a:prstGeom>
-          <a:noFill/>
-          <a:ln w="13970">
-            <a:solidFill>
-              <a:srgbClr val="2D3338"/>
-            </a:solidFill>
-            <a:prstDash val="solid"/>
-          </a:ln>
-        </p:spPr>
-      </p:sp>
-      <p:sp>
-        <p:nvSpPr>
-          <p:cNvPr id="299" name="Shape 297"/>
-          <p:cNvSpPr/>
-          <p:nvPr/>
-        </p:nvSpPr>
-        <p:spPr>
-          <a:xfrm>
-            <a:off x="9569546" y="5064633"/>
-            <a:ext cx="36576" cy="0"/>
-          </a:xfrm>
-          <a:prstGeom prst="line">
-            <a:avLst/>
-          </a:prstGeom>
-          <a:noFill/>
-          <a:ln w="13970">
-            <a:solidFill>
-              <a:srgbClr val="2D3338"/>
-            </a:solidFill>
-            <a:prstDash val="solid"/>
-            <a:tailEnd type="triangle"/>
-          </a:ln>
-        </p:spPr>
-      </p:sp>
-      <p:sp>
-        <p:nvSpPr>
-          <p:cNvPr id="300" name="Shape 298"/>
-          <p:cNvSpPr/>
-          <p:nvPr/>
-        </p:nvSpPr>
-        <p:spPr>
-          <a:xfrm>
-            <a:off x="10759906" y="5064633"/>
-            <a:ext cx="45720" cy="0"/>
-          </a:xfrm>
-          <a:prstGeom prst="line">
-            <a:avLst/>
-          </a:prstGeom>
-          <a:noFill/>
-          <a:ln w="13970">
-            <a:solidFill>
-              <a:srgbClr val="2D3338"/>
-            </a:solidFill>
-            <a:prstDash val="solid"/>
-          </a:ln>
-        </p:spPr>
-      </p:sp>
-      <p:sp>
-        <p:nvSpPr>
-          <p:cNvPr id="301" name="Shape 299"/>
-          <p:cNvSpPr/>
-          <p:nvPr/>
-        </p:nvSpPr>
-        <p:spPr>
-          <a:xfrm>
-            <a:off x="10759906" y="5064633"/>
-            <a:ext cx="0" cy="268986"/>
-          </a:xfrm>
-          <a:prstGeom prst="line">
-            <a:avLst/>
-          </a:prstGeom>
-          <a:noFill/>
-          <a:ln w="13970">
-            <a:solidFill>
-              <a:srgbClr val="2D3338"/>
-            </a:solidFill>
-            <a:prstDash val="solid"/>
-          </a:ln>
-        </p:spPr>
-      </p:sp>
-      <p:sp>
-        <p:nvSpPr>
-          <p:cNvPr id="302" name="Shape 300"/>
-          <p:cNvSpPr/>
-          <p:nvPr/>
-        </p:nvSpPr>
-        <p:spPr>
-          <a:xfrm>
-            <a:off x="10759906" y="5333619"/>
-            <a:ext cx="36576" cy="0"/>
-          </a:xfrm>
-          <a:prstGeom prst="line">
-            <a:avLst/>
-          </a:prstGeom>
-          <a:noFill/>
-          <a:ln w="13970">
-            <a:solidFill>
-              <a:srgbClr val="2D3338"/>
-            </a:solidFill>
-            <a:prstDash val="solid"/>
-            <a:tailEnd type="triangle"/>
-          </a:ln>
-        </p:spPr>
-      </p:sp>
-      <p:sp>
-        <p:nvSpPr>
-          <p:cNvPr id="303" name="Shape 301"/>
-          <p:cNvSpPr/>
-          <p:nvPr/>
-        </p:nvSpPr>
-        <p:spPr>
-          <a:xfrm>
-            <a:off x="7319570" y="1947672"/>
-            <a:ext cx="0" cy="3520440"/>
-          </a:xfrm>
-          <a:prstGeom prst="line">
-            <a:avLst/>
-          </a:prstGeom>
-          <a:noFill/>
           <a:ln w="22225">
             <a:solidFill>
               <a:srgbClr val="C8503F"/>
@@ -17061,7 +13349,7 @@
       </p:sp>
       <p:sp>
         <p:nvSpPr>
-          <p:cNvPr id="304" name="Shape 302"/>
+          <p:cNvPr id="196" name="Shape 194"/>
           <p:cNvSpPr/>
           <p:nvPr/>
         </p:nvSpPr>
@@ -17088,7 +13376,7 @@
       </p:sp>
       <p:sp>
         <p:nvSpPr>
-          <p:cNvPr id="305" name="Text 303"/>
+          <p:cNvPr id="197" name="Text 195"/>
           <p:cNvSpPr/>
           <p:nvPr/>
         </p:nvSpPr>
@@ -17129,14 +13417,14 @@
       </p:sp>
       <p:sp>
         <p:nvSpPr>
-          <p:cNvPr id="306" name="Shape 304"/>
+          <p:cNvPr id="198" name="Shape 196"/>
           <p:cNvSpPr/>
           <p:nvPr/>
         </p:nvSpPr>
         <p:spPr>
           <a:xfrm>
             <a:off x="365760" y="1325880"/>
-            <a:ext cx="11460175" cy="4142232"/>
+            <a:ext cx="11460175" cy="2834640"/>
           </a:xfrm>
           <a:prstGeom prst="rect">
             <a:avLst/>
@@ -17156,14 +13444,14 @@
       </p:sp>
       <p:sp>
         <p:nvSpPr>
-          <p:cNvPr id="307" name="Shape 305"/>
-          <p:cNvSpPr/>
-          <p:nvPr/>
-        </p:nvSpPr>
-        <p:spPr>
-          <a:xfrm>
-            <a:off x="365760" y="5577840"/>
-            <a:ext cx="2204253" cy="822960"/>
+          <p:cNvPr id="199" name="Shape 197"/>
+          <p:cNvSpPr/>
+          <p:nvPr/>
+        </p:nvSpPr>
+        <p:spPr>
+          <a:xfrm>
+            <a:off x="365760" y="5486400"/>
+            <a:ext cx="2782748" cy="822960"/>
           </a:xfrm>
           <a:prstGeom prst="roundRect">
             <a:avLst>
@@ -17190,14 +13478,14 @@
       </p:sp>
       <p:sp>
         <p:nvSpPr>
-          <p:cNvPr id="308" name="Shape 306"/>
-          <p:cNvSpPr/>
-          <p:nvPr/>
-        </p:nvSpPr>
-        <p:spPr>
-          <a:xfrm>
-            <a:off x="420624" y="5577840"/>
-            <a:ext cx="2094525" cy="54864"/>
+          <p:cNvPr id="200" name="Shape 198"/>
+          <p:cNvSpPr/>
+          <p:nvPr/>
+        </p:nvSpPr>
+        <p:spPr>
+          <a:xfrm>
+            <a:off x="420624" y="5486400"/>
+            <a:ext cx="2673020" cy="54864"/>
           </a:xfrm>
           <a:prstGeom prst="rect">
             <a:avLst/>
@@ -17215,14 +13503,14 @@
       </p:sp>
       <p:sp>
         <p:nvSpPr>
-          <p:cNvPr id="309" name="Text 307"/>
-          <p:cNvSpPr/>
-          <p:nvPr/>
-        </p:nvSpPr>
-        <p:spPr>
-          <a:xfrm>
-            <a:off x="475488" y="5669280"/>
-            <a:ext cx="1984797" cy="201168"/>
+          <p:cNvPr id="201" name="Text 199"/>
+          <p:cNvSpPr/>
+          <p:nvPr/>
+        </p:nvSpPr>
+        <p:spPr>
+          <a:xfrm>
+            <a:off x="475488" y="5577840"/>
+            <a:ext cx="2563292" cy="201168"/>
           </a:xfrm>
           <a:prstGeom prst="rect">
             <a:avLst/>
@@ -17256,14 +13544,14 @@
       </p:sp>
       <p:sp>
         <p:nvSpPr>
-          <p:cNvPr id="310" name="Text 308"/>
-          <p:cNvSpPr/>
-          <p:nvPr/>
-        </p:nvSpPr>
-        <p:spPr>
-          <a:xfrm>
-            <a:off x="475488" y="5870448"/>
-            <a:ext cx="1984797" cy="292608"/>
+          <p:cNvPr id="202" name="Text 200"/>
+          <p:cNvSpPr/>
+          <p:nvPr/>
+        </p:nvSpPr>
+        <p:spPr>
+          <a:xfrm>
+            <a:off x="475488" y="5779008"/>
+            <a:ext cx="2563292" cy="292608"/>
           </a:xfrm>
           <a:prstGeom prst="rect">
             <a:avLst/>
@@ -17297,14 +13585,14 @@
       </p:sp>
       <p:sp>
         <p:nvSpPr>
-          <p:cNvPr id="311" name="Text 309"/>
-          <p:cNvSpPr/>
-          <p:nvPr/>
-        </p:nvSpPr>
-        <p:spPr>
-          <a:xfrm>
-            <a:off x="475488" y="6163056"/>
-            <a:ext cx="1984797" cy="182880"/>
+          <p:cNvPr id="203" name="Text 201"/>
+          <p:cNvSpPr/>
+          <p:nvPr/>
+        </p:nvSpPr>
+        <p:spPr>
+          <a:xfrm>
+            <a:off x="475488" y="6071616"/>
+            <a:ext cx="2563292" cy="182880"/>
           </a:xfrm>
           <a:prstGeom prst="rect">
             <a:avLst/>
@@ -17338,14 +13626,14 @@
       </p:sp>
       <p:sp>
         <p:nvSpPr>
-          <p:cNvPr id="312" name="Shape 310"/>
-          <p:cNvSpPr/>
-          <p:nvPr/>
-        </p:nvSpPr>
-        <p:spPr>
-          <a:xfrm>
-            <a:off x="2679741" y="5577840"/>
-            <a:ext cx="2204253" cy="822960"/>
+          <p:cNvPr id="204" name="Shape 202"/>
+          <p:cNvSpPr/>
+          <p:nvPr/>
+        </p:nvSpPr>
+        <p:spPr>
+          <a:xfrm>
+            <a:off x="3258236" y="5486400"/>
+            <a:ext cx="2782748" cy="822960"/>
           </a:xfrm>
           <a:prstGeom prst="roundRect">
             <a:avLst>
@@ -17372,14 +13660,14 @@
       </p:sp>
       <p:sp>
         <p:nvSpPr>
-          <p:cNvPr id="313" name="Shape 311"/>
-          <p:cNvSpPr/>
-          <p:nvPr/>
-        </p:nvSpPr>
-        <p:spPr>
-          <a:xfrm>
-            <a:off x="2734605" y="5577840"/>
-            <a:ext cx="2094525" cy="54864"/>
+          <p:cNvPr id="205" name="Shape 203"/>
+          <p:cNvSpPr/>
+          <p:nvPr/>
+        </p:nvSpPr>
+        <p:spPr>
+          <a:xfrm>
+            <a:off x="3313100" y="5486400"/>
+            <a:ext cx="2673020" cy="54864"/>
           </a:xfrm>
           <a:prstGeom prst="rect">
             <a:avLst/>
@@ -17397,14 +13685,14 @@
       </p:sp>
       <p:sp>
         <p:nvSpPr>
-          <p:cNvPr id="314" name="Text 312"/>
-          <p:cNvSpPr/>
-          <p:nvPr/>
-        </p:nvSpPr>
-        <p:spPr>
-          <a:xfrm>
-            <a:off x="2789469" y="5669280"/>
-            <a:ext cx="1984797" cy="201168"/>
+          <p:cNvPr id="206" name="Text 204"/>
+          <p:cNvSpPr/>
+          <p:nvPr/>
+        </p:nvSpPr>
+        <p:spPr>
+          <a:xfrm>
+            <a:off x="3367964" y="5577840"/>
+            <a:ext cx="2563292" cy="201168"/>
           </a:xfrm>
           <a:prstGeom prst="rect">
             <a:avLst/>
@@ -17438,14 +13726,14 @@
       </p:sp>
       <p:sp>
         <p:nvSpPr>
-          <p:cNvPr id="315" name="Text 313"/>
-          <p:cNvSpPr/>
-          <p:nvPr/>
-        </p:nvSpPr>
-        <p:spPr>
-          <a:xfrm>
-            <a:off x="2789469" y="5870448"/>
-            <a:ext cx="1984797" cy="292608"/>
+          <p:cNvPr id="207" name="Text 205"/>
+          <p:cNvSpPr/>
+          <p:nvPr/>
+        </p:nvSpPr>
+        <p:spPr>
+          <a:xfrm>
+            <a:off x="3367964" y="5779008"/>
+            <a:ext cx="2563292" cy="292608"/>
           </a:xfrm>
           <a:prstGeom prst="rect">
             <a:avLst/>
@@ -17479,14 +13767,14 @@
       </p:sp>
       <p:sp>
         <p:nvSpPr>
-          <p:cNvPr id="316" name="Text 314"/>
-          <p:cNvSpPr/>
-          <p:nvPr/>
-        </p:nvSpPr>
-        <p:spPr>
-          <a:xfrm>
-            <a:off x="2789469" y="6163056"/>
-            <a:ext cx="1984797" cy="182880"/>
+          <p:cNvPr id="208" name="Text 206"/>
+          <p:cNvSpPr/>
+          <p:nvPr/>
+        </p:nvSpPr>
+        <p:spPr>
+          <a:xfrm>
+            <a:off x="3367964" y="6071616"/>
+            <a:ext cx="2563292" cy="182880"/>
           </a:xfrm>
           <a:prstGeom prst="rect">
             <a:avLst/>
@@ -17520,14 +13808,14 @@
       </p:sp>
       <p:sp>
         <p:nvSpPr>
-          <p:cNvPr id="317" name="Shape 315"/>
-          <p:cNvSpPr/>
-          <p:nvPr/>
-        </p:nvSpPr>
-        <p:spPr>
-          <a:xfrm>
-            <a:off x="4993721" y="5577840"/>
-            <a:ext cx="2204253" cy="822960"/>
+          <p:cNvPr id="209" name="Shape 207"/>
+          <p:cNvSpPr/>
+          <p:nvPr/>
+        </p:nvSpPr>
+        <p:spPr>
+          <a:xfrm>
+            <a:off x="6150712" y="5486400"/>
+            <a:ext cx="2782748" cy="822960"/>
           </a:xfrm>
           <a:prstGeom prst="roundRect">
             <a:avLst>
@@ -17554,14 +13842,14 @@
       </p:sp>
       <p:sp>
         <p:nvSpPr>
-          <p:cNvPr id="318" name="Shape 316"/>
-          <p:cNvSpPr/>
-          <p:nvPr/>
-        </p:nvSpPr>
-        <p:spPr>
-          <a:xfrm>
-            <a:off x="5048585" y="5577840"/>
-            <a:ext cx="2094525" cy="54864"/>
+          <p:cNvPr id="210" name="Shape 208"/>
+          <p:cNvSpPr/>
+          <p:nvPr/>
+        </p:nvSpPr>
+        <p:spPr>
+          <a:xfrm>
+            <a:off x="6205576" y="5486400"/>
+            <a:ext cx="2673020" cy="54864"/>
           </a:xfrm>
           <a:prstGeom prst="rect">
             <a:avLst/>
@@ -17579,14 +13867,14 @@
       </p:sp>
       <p:sp>
         <p:nvSpPr>
-          <p:cNvPr id="319" name="Text 317"/>
-          <p:cNvSpPr/>
-          <p:nvPr/>
-        </p:nvSpPr>
-        <p:spPr>
-          <a:xfrm>
-            <a:off x="5103449" y="5669280"/>
-            <a:ext cx="1984797" cy="201168"/>
+          <p:cNvPr id="211" name="Text 209"/>
+          <p:cNvSpPr/>
+          <p:nvPr/>
+        </p:nvSpPr>
+        <p:spPr>
+          <a:xfrm>
+            <a:off x="6260440" y="5577840"/>
+            <a:ext cx="2563292" cy="201168"/>
           </a:xfrm>
           <a:prstGeom prst="rect">
             <a:avLst/>
@@ -17612,7 +13900,7 @@
                 <a:ea typeface="Calibri" pitchFamily="34" charset="-122"/>
                 <a:cs typeface="Calibri" pitchFamily="34" charset="-120"/>
               </a:rPr>
-              <a:t>Pit works complete (pit wall)</a:t>
+              <a:t>Building foundation complete</a:t>
             </a:r>
             <a:endParaRPr lang="en-US" sz="850" dirty="0"/>
           </a:p>
@@ -17620,14 +13908,14 @@
       </p:sp>
       <p:sp>
         <p:nvSpPr>
-          <p:cNvPr id="320" name="Text 318"/>
-          <p:cNvSpPr/>
-          <p:nvPr/>
-        </p:nvSpPr>
-        <p:spPr>
-          <a:xfrm>
-            <a:off x="5103449" y="5870448"/>
-            <a:ext cx="1984797" cy="292608"/>
+          <p:cNvPr id="212" name="Text 210"/>
+          <p:cNvSpPr/>
+          <p:nvPr/>
+        </p:nvSpPr>
+        <p:spPr>
+          <a:xfrm>
+            <a:off x="6260440" y="5779008"/>
+            <a:ext cx="2563292" cy="292608"/>
           </a:xfrm>
           <a:prstGeom prst="rect">
             <a:avLst/>
@@ -17653,7 +13941,7 @@
                 <a:ea typeface="Calibri" pitchFamily="34" charset="-122"/>
                 <a:cs typeface="Calibri" pitchFamily="34" charset="-120"/>
               </a:rPr>
-              <a:t>Sat 7 Nov 2026</a:t>
+              <a:t>Wed 11 Nov 2026</a:t>
             </a:r>
             <a:endParaRPr lang="en-US" sz="1300" dirty="0"/>
           </a:p>
@@ -17661,14 +13949,14 @@
       </p:sp>
       <p:sp>
         <p:nvSpPr>
-          <p:cNvPr id="321" name="Text 319"/>
-          <p:cNvSpPr/>
-          <p:nvPr/>
-        </p:nvSpPr>
-        <p:spPr>
-          <a:xfrm>
-            <a:off x="5103449" y="6163056"/>
-            <a:ext cx="1984797" cy="182880"/>
+          <p:cNvPr id="213" name="Text 211"/>
+          <p:cNvSpPr/>
+          <p:nvPr/>
+        </p:nvSpPr>
+        <p:spPr>
+          <a:xfrm>
+            <a:off x="6260440" y="6071616"/>
+            <a:ext cx="2563292" cy="182880"/>
           </a:xfrm>
           <a:prstGeom prst="rect">
             <a:avLst/>
@@ -17694,7 +13982,7 @@
                 <a:ea typeface="Calibri" pitchFamily="34" charset="-122"/>
                 <a:cs typeface="Calibri" pitchFamily="34" charset="-120"/>
               </a:rPr>
-              <a:t>Working day 14 / 20</a:t>
+              <a:t>Working day 18 / 20</a:t>
             </a:r>
             <a:endParaRPr lang="en-US" sz="750" dirty="0"/>
           </a:p>
@@ -17702,14 +13990,14 @@
       </p:sp>
       <p:sp>
         <p:nvSpPr>
-          <p:cNvPr id="322" name="Shape 320"/>
-          <p:cNvSpPr/>
-          <p:nvPr/>
-        </p:nvSpPr>
-        <p:spPr>
-          <a:xfrm>
-            <a:off x="7307702" y="5577840"/>
-            <a:ext cx="2204253" cy="822960"/>
+          <p:cNvPr id="214" name="Shape 212"/>
+          <p:cNvSpPr/>
+          <p:nvPr/>
+        </p:nvSpPr>
+        <p:spPr>
+          <a:xfrm>
+            <a:off x="9043187" y="5486400"/>
+            <a:ext cx="2782748" cy="822960"/>
           </a:xfrm>
           <a:prstGeom prst="roundRect">
             <a:avLst>
@@ -17717,7 +14005,7 @@
             </a:avLst>
           </a:prstGeom>
           <a:solidFill>
-            <a:srgbClr val="FFFFFF"/>
+            <a:srgbClr val="3D3935"/>
           </a:solidFill>
           <a:ln w="9525">
             <a:solidFill>
@@ -17736,14 +14024,14 @@
       </p:sp>
       <p:sp>
         <p:nvSpPr>
-          <p:cNvPr id="323" name="Shape 321"/>
-          <p:cNvSpPr/>
-          <p:nvPr/>
-        </p:nvSpPr>
-        <p:spPr>
-          <a:xfrm>
-            <a:off x="7362566" y="5577840"/>
-            <a:ext cx="2094525" cy="54864"/>
+          <p:cNvPr id="215" name="Shape 213"/>
+          <p:cNvSpPr/>
+          <p:nvPr/>
+        </p:nvSpPr>
+        <p:spPr>
+          <a:xfrm>
+            <a:off x="9098051" y="5486400"/>
+            <a:ext cx="2673020" cy="54864"/>
           </a:xfrm>
           <a:prstGeom prst="rect">
             <a:avLst/>
@@ -17761,14 +14049,14 @@
       </p:sp>
       <p:sp>
         <p:nvSpPr>
-          <p:cNvPr id="324" name="Text 322"/>
-          <p:cNvSpPr/>
-          <p:nvPr/>
-        </p:nvSpPr>
-        <p:spPr>
-          <a:xfrm>
-            <a:off x="7417430" y="5669280"/>
-            <a:ext cx="1984797" cy="201168"/>
+          <p:cNvPr id="216" name="Text 214"/>
+          <p:cNvSpPr/>
+          <p:nvPr/>
+        </p:nvSpPr>
+        <p:spPr>
+          <a:xfrm>
+            <a:off x="9152915" y="5577840"/>
+            <a:ext cx="2563292" cy="201168"/>
           </a:xfrm>
           <a:prstGeom prst="rect">
             <a:avLst/>
@@ -17788,13 +14076,13 @@
             <a:r>
               <a:rPr lang="en-US" altLang="en-US" sz="850" b="1" dirty="0">
                 <a:solidFill>
-                  <a:srgbClr val="66707A"/>
-                </a:solidFill>
-                <a:latin typeface="Calibri" pitchFamily="34" charset="0"/>
-                <a:ea typeface="Calibri" pitchFamily="34" charset="-122"/>
-                <a:cs typeface="Calibri" pitchFamily="34" charset="-120"/>
-              </a:rPr>
-              <a:t>Building foundation complete</a:t>
+                  <a:srgbClr val="CFD8DC"/>
+                </a:solidFill>
+                <a:latin typeface="Calibri" pitchFamily="34" charset="0"/>
+                <a:ea typeface="Calibri" pitchFamily="34" charset="-122"/>
+                <a:cs typeface="Calibri" pitchFamily="34" charset="-120"/>
+              </a:rPr>
+              <a:t>Overall completion</a:t>
             </a:r>
             <a:endParaRPr lang="en-US" sz="850" dirty="0"/>
           </a:p>
@@ -17802,14 +14090,14 @@
       </p:sp>
       <p:sp>
         <p:nvSpPr>
-          <p:cNvPr id="325" name="Text 323"/>
-          <p:cNvSpPr/>
-          <p:nvPr/>
-        </p:nvSpPr>
-        <p:spPr>
-          <a:xfrm>
-            <a:off x="7417430" y="5870448"/>
-            <a:ext cx="1984797" cy="292608"/>
+          <p:cNvPr id="217" name="Text 215"/>
+          <p:cNvSpPr/>
+          <p:nvPr/>
+        </p:nvSpPr>
+        <p:spPr>
+          <a:xfrm>
+            <a:off x="9152915" y="5779008"/>
+            <a:ext cx="2563292" cy="292608"/>
           </a:xfrm>
           <a:prstGeom prst="rect">
             <a:avLst/>
@@ -17829,13 +14117,13 @@
             <a:r>
               <a:rPr lang="en-US" altLang="en-US" sz="1300" b="1" dirty="0">
                 <a:solidFill>
-                  <a:srgbClr val="3D3935"/>
-                </a:solidFill>
-                <a:latin typeface="Calibri" pitchFamily="34" charset="0"/>
-                <a:ea typeface="Calibri" pitchFamily="34" charset="-122"/>
-                <a:cs typeface="Calibri" pitchFamily="34" charset="-120"/>
-              </a:rPr>
-              <a:t>Tue 10 Nov 2026</a:t>
+                  <a:srgbClr val="FFFFFF"/>
+                </a:solidFill>
+                <a:latin typeface="Calibri" pitchFamily="34" charset="0"/>
+                <a:ea typeface="Calibri" pitchFamily="34" charset="-122"/>
+                <a:cs typeface="Calibri" pitchFamily="34" charset="-120"/>
+              </a:rPr>
+              <a:t>Sat 14 Nov 2026</a:t>
             </a:r>
             <a:endParaRPr lang="en-US" sz="1300" dirty="0"/>
           </a:p>
@@ -17843,196 +14131,14 @@
       </p:sp>
       <p:sp>
         <p:nvSpPr>
-          <p:cNvPr id="326" name="Text 324"/>
-          <p:cNvSpPr/>
-          <p:nvPr/>
-        </p:nvSpPr>
-        <p:spPr>
-          <a:xfrm>
-            <a:off x="7417430" y="6163056"/>
-            <a:ext cx="1984797" cy="182880"/>
-          </a:xfrm>
-          <a:prstGeom prst="rect">
-            <a:avLst/>
-          </a:prstGeom>
-          <a:noFill/>
-          <a:ln/>
-        </p:spPr>
-        <p:txBody>
-          <a:bodyPr wrap="square" lIns="0" tIns="0" rIns="0" bIns="0" rtlCol="0" anchor="ctr">
-            <a:normAutofit/>
-          </a:bodyPr>
-          <a:lstStyle/>
-          <a:p>
-            <a:pPr algn="l" indent="0" marL="0">
-              <a:buNone/>
-            </a:pPr>
-            <a:r>
-              <a:rPr lang="en-US" altLang="en-US" sz="750" b="1" dirty="0">
-                <a:solidFill>
-                  <a:srgbClr val="66707A"/>
-                </a:solidFill>
-                <a:latin typeface="Calibri" pitchFamily="34" charset="0"/>
-                <a:ea typeface="Calibri" pitchFamily="34" charset="-122"/>
-                <a:cs typeface="Calibri" pitchFamily="34" charset="-120"/>
-              </a:rPr>
-              <a:t>Working day 17 / 20</a:t>
-            </a:r>
-            <a:endParaRPr lang="en-US" sz="750" dirty="0"/>
-          </a:p>
-        </p:txBody>
-      </p:sp>
-      <p:sp>
-        <p:nvSpPr>
-          <p:cNvPr id="327" name="Shape 325"/>
-          <p:cNvSpPr/>
-          <p:nvPr/>
-        </p:nvSpPr>
-        <p:spPr>
-          <a:xfrm>
-            <a:off x="9621683" y="5577840"/>
-            <a:ext cx="2204253" cy="822960"/>
-          </a:xfrm>
-          <a:prstGeom prst="roundRect">
-            <a:avLst>
-              <a:gd name="adj" fmla="val 7778"/>
-            </a:avLst>
-          </a:prstGeom>
-          <a:solidFill>
-            <a:srgbClr val="3D3935"/>
-          </a:solidFill>
-          <a:ln w="9525">
-            <a:solidFill>
-              <a:srgbClr val="DFE6EA"/>
-            </a:solidFill>
-            <a:prstDash val="solid"/>
-          </a:ln>
-          <a:effectLst>
-            <a:outerShdw sx="100000" sy="100000" kx="0" ky="0" algn="bl" rotWithShape="0" blurRad="63500" dist="25400" dir="5400000">
-              <a:srgbClr val="000000">
-                <a:alpha val="12000"/>
-              </a:srgbClr>
-            </a:outerShdw>
-          </a:effectLst>
-        </p:spPr>
-      </p:sp>
-      <p:sp>
-        <p:nvSpPr>
-          <p:cNvPr id="328" name="Shape 326"/>
-          <p:cNvSpPr/>
-          <p:nvPr/>
-        </p:nvSpPr>
-        <p:spPr>
-          <a:xfrm>
-            <a:off x="9676547" y="5577840"/>
-            <a:ext cx="2094525" cy="54864"/>
-          </a:xfrm>
-          <a:prstGeom prst="rect">
-            <a:avLst/>
-          </a:prstGeom>
-          <a:solidFill>
-            <a:srgbClr val="D68A00"/>
-          </a:solidFill>
-          <a:ln w="12700">
-            <a:solidFill>
-              <a:srgbClr val="D68A00"/>
-            </a:solidFill>
-            <a:prstDash val="solid"/>
-          </a:ln>
-        </p:spPr>
-      </p:sp>
-      <p:sp>
-        <p:nvSpPr>
-          <p:cNvPr id="329" name="Text 327"/>
-          <p:cNvSpPr/>
-          <p:nvPr/>
-        </p:nvSpPr>
-        <p:spPr>
-          <a:xfrm>
-            <a:off x="9731411" y="5669280"/>
-            <a:ext cx="1984797" cy="201168"/>
-          </a:xfrm>
-          <a:prstGeom prst="rect">
-            <a:avLst/>
-          </a:prstGeom>
-          <a:noFill/>
-          <a:ln/>
-        </p:spPr>
-        <p:txBody>
-          <a:bodyPr wrap="square" lIns="0" tIns="0" rIns="0" bIns="0" rtlCol="0" anchor="ctr">
-            <a:normAutofit/>
-          </a:bodyPr>
-          <a:lstStyle/>
-          <a:p>
-            <a:pPr algn="l" indent="0" marL="0">
-              <a:buNone/>
-            </a:pPr>
-            <a:r>
-              <a:rPr lang="en-US" altLang="en-US" sz="850" b="1" dirty="0">
-                <a:solidFill>
-                  <a:srgbClr val="CFD8DC"/>
-                </a:solidFill>
-                <a:latin typeface="Calibri" pitchFamily="34" charset="0"/>
-                <a:ea typeface="Calibri" pitchFamily="34" charset="-122"/>
-                <a:cs typeface="Calibri" pitchFamily="34" charset="-120"/>
-              </a:rPr>
-              <a:t>Overall completion</a:t>
-            </a:r>
-            <a:endParaRPr lang="en-US" sz="850" dirty="0"/>
-          </a:p>
-        </p:txBody>
-      </p:sp>
-      <p:sp>
-        <p:nvSpPr>
-          <p:cNvPr id="330" name="Text 328"/>
-          <p:cNvSpPr/>
-          <p:nvPr/>
-        </p:nvSpPr>
-        <p:spPr>
-          <a:xfrm>
-            <a:off x="9731411" y="5870448"/>
-            <a:ext cx="1984797" cy="292608"/>
-          </a:xfrm>
-          <a:prstGeom prst="rect">
-            <a:avLst/>
-          </a:prstGeom>
-          <a:noFill/>
-          <a:ln/>
-        </p:spPr>
-        <p:txBody>
-          <a:bodyPr wrap="square" lIns="0" tIns="0" rIns="0" bIns="0" rtlCol="0" anchor="ctr">
-            <a:normAutofit/>
-          </a:bodyPr>
-          <a:lstStyle/>
-          <a:p>
-            <a:pPr algn="l" indent="0" marL="0">
-              <a:buNone/>
-            </a:pPr>
-            <a:r>
-              <a:rPr lang="en-US" altLang="en-US" sz="1300" b="1" dirty="0">
-                <a:solidFill>
-                  <a:srgbClr val="FFFFFF"/>
-                </a:solidFill>
-                <a:latin typeface="Calibri" pitchFamily="34" charset="0"/>
-                <a:ea typeface="Calibri" pitchFamily="34" charset="-122"/>
-                <a:cs typeface="Calibri" pitchFamily="34" charset="-120"/>
-              </a:rPr>
-              <a:t>Sat 14 Nov 2026</a:t>
-            </a:r>
-            <a:endParaRPr lang="en-US" sz="1300" dirty="0"/>
-          </a:p>
-        </p:txBody>
-      </p:sp>
-      <p:sp>
-        <p:nvSpPr>
-          <p:cNvPr id="331" name="Text 329"/>
-          <p:cNvSpPr/>
-          <p:nvPr/>
-        </p:nvSpPr>
-        <p:spPr>
-          <a:xfrm>
-            <a:off x="9731411" y="6163056"/>
-            <a:ext cx="1984797" cy="182880"/>
+          <p:cNvPr id="218" name="Text 216"/>
+          <p:cNvSpPr/>
+          <p:nvPr/>
+        </p:nvSpPr>
+        <p:spPr>
+          <a:xfrm>
+            <a:off x="9152915" y="6071616"/>
+            <a:ext cx="2563292" cy="182880"/>
           </a:xfrm>
           <a:prstGeom prst="rect">
             <a:avLst/>

--- a/ufwl-timeline/UFWL_Presentation_EN.pptx
+++ b/ufwl-timeline/UFWL_Presentation_EN.pptx
@@ -7331,7 +7331,7 @@
         <p:spPr>
           <a:xfrm>
             <a:off x="6044184" y="1325880"/>
-            <a:ext cx="3060927" cy="182880"/>
+            <a:ext cx="3469051" cy="182880"/>
           </a:xfrm>
           <a:prstGeom prst="rect">
             <a:avLst/>
@@ -7356,7 +7356,7 @@
         <p:spPr>
           <a:xfrm>
             <a:off x="6044184" y="1325880"/>
-            <a:ext cx="3060927" cy="182880"/>
+            <a:ext cx="3469051" cy="182880"/>
           </a:xfrm>
           <a:prstGeom prst="rect">
             <a:avLst/>
@@ -7396,8 +7396,8 @@
         </p:nvSpPr>
         <p:spPr>
           <a:xfrm>
-            <a:off x="9105111" y="1325880"/>
-            <a:ext cx="2720824" cy="182880"/>
+            <a:off x="9513235" y="1325880"/>
+            <a:ext cx="2312700" cy="182880"/>
           </a:xfrm>
           <a:prstGeom prst="rect">
             <a:avLst/>
@@ -7421,8 +7421,8 @@
         </p:nvSpPr>
         <p:spPr>
           <a:xfrm>
-            <a:off x="9105111" y="1325880"/>
-            <a:ext cx="2720824" cy="182880"/>
+            <a:off x="9513235" y="1325880"/>
+            <a:ext cx="2312700" cy="182880"/>
           </a:xfrm>
           <a:prstGeom prst="rect">
             <a:avLst/>
@@ -7463,7 +7463,7 @@
         <p:spPr>
           <a:xfrm>
             <a:off x="6044184" y="1508760"/>
-            <a:ext cx="510155" cy="155448"/>
+            <a:ext cx="578175" cy="155448"/>
           </a:xfrm>
           <a:prstGeom prst="rect">
             <a:avLst/>
@@ -7488,7 +7488,7 @@
         <p:spPr>
           <a:xfrm>
             <a:off x="6044184" y="1508760"/>
-            <a:ext cx="510155" cy="155448"/>
+            <a:ext cx="578175" cy="155448"/>
           </a:xfrm>
           <a:prstGeom prst="rect">
             <a:avLst/>
@@ -7528,8 +7528,8 @@
         </p:nvSpPr>
         <p:spPr>
           <a:xfrm>
-            <a:off x="6554339" y="1508760"/>
-            <a:ext cx="1190361" cy="155448"/>
+            <a:off x="6622359" y="1508760"/>
+            <a:ext cx="1349075" cy="155448"/>
           </a:xfrm>
           <a:prstGeom prst="rect">
             <a:avLst/>
@@ -7553,8 +7553,8 @@
         </p:nvSpPr>
         <p:spPr>
           <a:xfrm>
-            <a:off x="6554339" y="1508760"/>
-            <a:ext cx="1190361" cy="155448"/>
+            <a:off x="6622359" y="1508760"/>
+            <a:ext cx="1349075" cy="155448"/>
           </a:xfrm>
           <a:prstGeom prst="rect">
             <a:avLst/>
@@ -7594,8 +7594,8 @@
         </p:nvSpPr>
         <p:spPr>
           <a:xfrm>
-            <a:off x="7744699" y="1508760"/>
-            <a:ext cx="1190361" cy="155448"/>
+            <a:off x="7971434" y="1508760"/>
+            <a:ext cx="1349075" cy="155448"/>
           </a:xfrm>
           <a:prstGeom prst="rect">
             <a:avLst/>
@@ -7619,8 +7619,8 @@
         </p:nvSpPr>
         <p:spPr>
           <a:xfrm>
-            <a:off x="7744699" y="1508760"/>
-            <a:ext cx="1190361" cy="155448"/>
+            <a:off x="7971434" y="1508760"/>
+            <a:ext cx="1349075" cy="155448"/>
           </a:xfrm>
           <a:prstGeom prst="rect">
             <a:avLst/>
@@ -7660,8 +7660,8 @@
         </p:nvSpPr>
         <p:spPr>
           <a:xfrm>
-            <a:off x="8935060" y="1508760"/>
-            <a:ext cx="1190361" cy="155448"/>
+            <a:off x="9320510" y="1508760"/>
+            <a:ext cx="1349075" cy="155448"/>
           </a:xfrm>
           <a:prstGeom prst="rect">
             <a:avLst/>
@@ -7685,8 +7685,8 @@
         </p:nvSpPr>
         <p:spPr>
           <a:xfrm>
-            <a:off x="8935060" y="1508760"/>
-            <a:ext cx="1190361" cy="155448"/>
+            <a:off x="9320510" y="1508760"/>
+            <a:ext cx="1349075" cy="155448"/>
           </a:xfrm>
           <a:prstGeom prst="rect">
             <a:avLst/>
@@ -7726,8 +7726,8 @@
         </p:nvSpPr>
         <p:spPr>
           <a:xfrm>
-            <a:off x="10125420" y="1508760"/>
-            <a:ext cx="1190361" cy="155448"/>
+            <a:off x="10669585" y="1508760"/>
+            <a:ext cx="1156350" cy="155448"/>
           </a:xfrm>
           <a:prstGeom prst="rect">
             <a:avLst/>
@@ -7751,8 +7751,8 @@
         </p:nvSpPr>
         <p:spPr>
           <a:xfrm>
-            <a:off x="10125420" y="1508760"/>
-            <a:ext cx="1190361" cy="155448"/>
+            <a:off x="10669585" y="1508760"/>
+            <a:ext cx="1156350" cy="155448"/>
           </a:xfrm>
           <a:prstGeom prst="rect">
             <a:avLst/>
@@ -7792,16 +7792,16 @@
         </p:nvSpPr>
         <p:spPr>
           <a:xfrm>
-            <a:off x="11315781" y="1508760"/>
-            <a:ext cx="510155" cy="155448"/>
-          </a:xfrm>
-          <a:prstGeom prst="rect">
-            <a:avLst/>
-          </a:prstGeom>
-          <a:solidFill>
-            <a:srgbClr val="E4F0F3"/>
-          </a:solidFill>
-          <a:ln w="12700">
+            <a:off x="6044184" y="1664208"/>
+            <a:ext cx="192725" cy="301752"/>
+          </a:xfrm>
+          <a:prstGeom prst="rect">
+            <a:avLst/>
+          </a:prstGeom>
+          <a:solidFill>
+            <a:srgbClr val="F4F7F8"/>
+          </a:solidFill>
+          <a:ln w="6350">
             <a:solidFill>
               <a:srgbClr val="FFFFFF"/>
             </a:solidFill>
@@ -7817,8 +7817,8 @@
         </p:nvSpPr>
         <p:spPr>
           <a:xfrm>
-            <a:off x="11315781" y="1508760"/>
-            <a:ext cx="510155" cy="155448"/>
+            <a:off x="6044184" y="1664208"/>
+            <a:ext cx="192725" cy="137160"/>
           </a:xfrm>
           <a:prstGeom prst="rect">
             <a:avLst/>
@@ -7836,30 +7836,71 @@
               <a:buNone/>
             </a:pPr>
             <a:r>
-              <a:rPr lang="en-US" altLang="en-US" sz="650" b="1" dirty="0">
-                <a:solidFill>
-                  <a:srgbClr val="34505A"/>
-                </a:solidFill>
-                <a:latin typeface="Calibri" pitchFamily="34" charset="0"/>
-                <a:ea typeface="Calibri" pitchFamily="34" charset="-122"/>
-                <a:cs typeface="Calibri" pitchFamily="34" charset="-120"/>
-              </a:rPr>
-              <a:t>Week 6</a:t>
-            </a:r>
-            <a:endParaRPr lang="en-US" sz="650" dirty="0"/>
-          </a:p>
-        </p:txBody>
-      </p:sp>
-      <p:sp>
-        <p:nvSpPr>
-          <p:cNvPr id="38" name="Shape 36"/>
-          <p:cNvSpPr/>
-          <p:nvPr/>
-        </p:nvSpPr>
-        <p:spPr>
-          <a:xfrm>
-            <a:off x="6044184" y="1664208"/>
-            <a:ext cx="170052" cy="301752"/>
+              <a:rPr lang="en-US" altLang="en-US" sz="500" b="1" dirty="0">
+                <a:solidFill>
+                  <a:srgbClr val="5A6A73"/>
+                </a:solidFill>
+                <a:latin typeface="Calibri" pitchFamily="34" charset="0"/>
+                <a:ea typeface="Calibri" pitchFamily="34" charset="-122"/>
+                <a:cs typeface="Calibri" pitchFamily="34" charset="-120"/>
+              </a:rPr>
+              <a:t>W</a:t>
+            </a:r>
+            <a:endParaRPr lang="en-US" sz="500" dirty="0"/>
+          </a:p>
+        </p:txBody>
+      </p:sp>
+      <p:sp>
+        <p:nvSpPr>
+          <p:cNvPr id="38" name="Text 36"/>
+          <p:cNvSpPr/>
+          <p:nvPr/>
+        </p:nvSpPr>
+        <p:spPr>
+          <a:xfrm>
+            <a:off x="6044184" y="1801368"/>
+            <a:ext cx="192725" cy="164592"/>
+          </a:xfrm>
+          <a:prstGeom prst="rect">
+            <a:avLst/>
+          </a:prstGeom>
+          <a:noFill/>
+          <a:ln/>
+        </p:spPr>
+        <p:txBody>
+          <a:bodyPr wrap="square" lIns="0" tIns="0" rIns="0" bIns="0" rtlCol="0" anchor="ctr">
+            <a:normAutofit/>
+          </a:bodyPr>
+          <a:lstStyle/>
+          <a:p>
+            <a:pPr algn="ctr" indent="0" marL="0">
+              <a:buNone/>
+            </a:pPr>
+            <a:r>
+              <a:rPr lang="en-US" altLang="en-US" sz="550" b="1" dirty="0">
+                <a:solidFill>
+                  <a:srgbClr val="222222"/>
+                </a:solidFill>
+                <a:latin typeface="Calibri" pitchFamily="34" charset="0"/>
+                <a:ea typeface="Calibri" pitchFamily="34" charset="-122"/>
+                <a:cs typeface="Calibri" pitchFamily="34" charset="-120"/>
+              </a:rPr>
+              <a:t>14</a:t>
+            </a:r>
+            <a:endParaRPr lang="en-US" sz="550" dirty="0"/>
+          </a:p>
+        </p:txBody>
+      </p:sp>
+      <p:sp>
+        <p:nvSpPr>
+          <p:cNvPr id="39" name="Shape 37"/>
+          <p:cNvSpPr/>
+          <p:nvPr/>
+        </p:nvSpPr>
+        <p:spPr>
+          <a:xfrm>
+            <a:off x="6236909" y="1664208"/>
+            <a:ext cx="192725" cy="301752"/>
           </a:xfrm>
           <a:prstGeom prst="rect">
             <a:avLst/>
@@ -7877,14 +7918,14 @@
       </p:sp>
       <p:sp>
         <p:nvSpPr>
-          <p:cNvPr id="39" name="Text 37"/>
-          <p:cNvSpPr/>
-          <p:nvPr/>
-        </p:nvSpPr>
-        <p:spPr>
-          <a:xfrm>
-            <a:off x="6044184" y="1664208"/>
-            <a:ext cx="170052" cy="137160"/>
+          <p:cNvPr id="40" name="Text 38"/>
+          <p:cNvSpPr/>
+          <p:nvPr/>
+        </p:nvSpPr>
+        <p:spPr>
+          <a:xfrm>
+            <a:off x="6236909" y="1664208"/>
+            <a:ext cx="192725" cy="137160"/>
           </a:xfrm>
           <a:prstGeom prst="rect">
             <a:avLst/>
@@ -7910,6 +7951,671 @@
                 <a:ea typeface="Calibri" pitchFamily="34" charset="-122"/>
                 <a:cs typeface="Calibri" pitchFamily="34" charset="-120"/>
               </a:rPr>
+              <a:t>T</a:t>
+            </a:r>
+            <a:endParaRPr lang="en-US" sz="500" dirty="0"/>
+          </a:p>
+        </p:txBody>
+      </p:sp>
+      <p:sp>
+        <p:nvSpPr>
+          <p:cNvPr id="41" name="Text 39"/>
+          <p:cNvSpPr/>
+          <p:nvPr/>
+        </p:nvSpPr>
+        <p:spPr>
+          <a:xfrm>
+            <a:off x="6236909" y="1801368"/>
+            <a:ext cx="192725" cy="164592"/>
+          </a:xfrm>
+          <a:prstGeom prst="rect">
+            <a:avLst/>
+          </a:prstGeom>
+          <a:noFill/>
+          <a:ln/>
+        </p:spPr>
+        <p:txBody>
+          <a:bodyPr wrap="square" lIns="0" tIns="0" rIns="0" bIns="0" rtlCol="0" anchor="ctr">
+            <a:normAutofit/>
+          </a:bodyPr>
+          <a:lstStyle/>
+          <a:p>
+            <a:pPr algn="ctr" indent="0" marL="0">
+              <a:buNone/>
+            </a:pPr>
+            <a:r>
+              <a:rPr lang="en-US" altLang="en-US" sz="550" b="1" dirty="0">
+                <a:solidFill>
+                  <a:srgbClr val="222222"/>
+                </a:solidFill>
+                <a:latin typeface="Calibri" pitchFamily="34" charset="0"/>
+                <a:ea typeface="Calibri" pitchFamily="34" charset="-122"/>
+                <a:cs typeface="Calibri" pitchFamily="34" charset="-120"/>
+              </a:rPr>
+              <a:t>15</a:t>
+            </a:r>
+            <a:endParaRPr lang="en-US" sz="550" dirty="0"/>
+          </a:p>
+        </p:txBody>
+      </p:sp>
+      <p:sp>
+        <p:nvSpPr>
+          <p:cNvPr id="42" name="Shape 40"/>
+          <p:cNvSpPr/>
+          <p:nvPr/>
+        </p:nvSpPr>
+        <p:spPr>
+          <a:xfrm>
+            <a:off x="6429634" y="1664208"/>
+            <a:ext cx="192725" cy="301752"/>
+          </a:xfrm>
+          <a:prstGeom prst="rect">
+            <a:avLst/>
+          </a:prstGeom>
+          <a:solidFill>
+            <a:srgbClr val="F4F7F8"/>
+          </a:solidFill>
+          <a:ln w="6350">
+            <a:solidFill>
+              <a:srgbClr val="FFFFFF"/>
+            </a:solidFill>
+            <a:prstDash val="solid"/>
+          </a:ln>
+        </p:spPr>
+      </p:sp>
+      <p:sp>
+        <p:nvSpPr>
+          <p:cNvPr id="43" name="Text 41"/>
+          <p:cNvSpPr/>
+          <p:nvPr/>
+        </p:nvSpPr>
+        <p:spPr>
+          <a:xfrm>
+            <a:off x="6429634" y="1664208"/>
+            <a:ext cx="192725" cy="137160"/>
+          </a:xfrm>
+          <a:prstGeom prst="rect">
+            <a:avLst/>
+          </a:prstGeom>
+          <a:noFill/>
+          <a:ln/>
+        </p:spPr>
+        <p:txBody>
+          <a:bodyPr wrap="square" lIns="0" tIns="0" rIns="0" bIns="0" rtlCol="0" anchor="ctr">
+            <a:normAutofit/>
+          </a:bodyPr>
+          <a:lstStyle/>
+          <a:p>
+            <a:pPr algn="ctr" indent="0" marL="0">
+              <a:buNone/>
+            </a:pPr>
+            <a:r>
+              <a:rPr lang="en-US" altLang="en-US" sz="500" b="1" dirty="0">
+                <a:solidFill>
+                  <a:srgbClr val="5A6A73"/>
+                </a:solidFill>
+                <a:latin typeface="Calibri" pitchFamily="34" charset="0"/>
+                <a:ea typeface="Calibri" pitchFamily="34" charset="-122"/>
+                <a:cs typeface="Calibri" pitchFamily="34" charset="-120"/>
+              </a:rPr>
+              <a:t>F</a:t>
+            </a:r>
+            <a:endParaRPr lang="en-US" sz="500" dirty="0"/>
+          </a:p>
+        </p:txBody>
+      </p:sp>
+      <p:sp>
+        <p:nvSpPr>
+          <p:cNvPr id="44" name="Text 42"/>
+          <p:cNvSpPr/>
+          <p:nvPr/>
+        </p:nvSpPr>
+        <p:spPr>
+          <a:xfrm>
+            <a:off x="6429634" y="1801368"/>
+            <a:ext cx="192725" cy="164592"/>
+          </a:xfrm>
+          <a:prstGeom prst="rect">
+            <a:avLst/>
+          </a:prstGeom>
+          <a:noFill/>
+          <a:ln/>
+        </p:spPr>
+        <p:txBody>
+          <a:bodyPr wrap="square" lIns="0" tIns="0" rIns="0" bIns="0" rtlCol="0" anchor="ctr">
+            <a:normAutofit/>
+          </a:bodyPr>
+          <a:lstStyle/>
+          <a:p>
+            <a:pPr algn="ctr" indent="0" marL="0">
+              <a:buNone/>
+            </a:pPr>
+            <a:r>
+              <a:rPr lang="en-US" altLang="en-US" sz="550" b="1" dirty="0">
+                <a:solidFill>
+                  <a:srgbClr val="222222"/>
+                </a:solidFill>
+                <a:latin typeface="Calibri" pitchFamily="34" charset="0"/>
+                <a:ea typeface="Calibri" pitchFamily="34" charset="-122"/>
+                <a:cs typeface="Calibri" pitchFamily="34" charset="-120"/>
+              </a:rPr>
+              <a:t>16</a:t>
+            </a:r>
+            <a:endParaRPr lang="en-US" sz="550" dirty="0"/>
+          </a:p>
+        </p:txBody>
+      </p:sp>
+      <p:sp>
+        <p:nvSpPr>
+          <p:cNvPr id="45" name="Shape 43"/>
+          <p:cNvSpPr/>
+          <p:nvPr/>
+        </p:nvSpPr>
+        <p:spPr>
+          <a:xfrm>
+            <a:off x="6622359" y="1664208"/>
+            <a:ext cx="192725" cy="301752"/>
+          </a:xfrm>
+          <a:prstGeom prst="rect">
+            <a:avLst/>
+          </a:prstGeom>
+          <a:solidFill>
+            <a:srgbClr val="F4F7F8"/>
+          </a:solidFill>
+          <a:ln w="6350">
+            <a:solidFill>
+              <a:srgbClr val="FFFFFF"/>
+            </a:solidFill>
+            <a:prstDash val="solid"/>
+          </a:ln>
+        </p:spPr>
+      </p:sp>
+      <p:sp>
+        <p:nvSpPr>
+          <p:cNvPr id="46" name="Text 44"/>
+          <p:cNvSpPr/>
+          <p:nvPr/>
+        </p:nvSpPr>
+        <p:spPr>
+          <a:xfrm>
+            <a:off x="6622359" y="1664208"/>
+            <a:ext cx="192725" cy="137160"/>
+          </a:xfrm>
+          <a:prstGeom prst="rect">
+            <a:avLst/>
+          </a:prstGeom>
+          <a:noFill/>
+          <a:ln/>
+        </p:spPr>
+        <p:txBody>
+          <a:bodyPr wrap="square" lIns="0" tIns="0" rIns="0" bIns="0" rtlCol="0" anchor="ctr">
+            <a:normAutofit/>
+          </a:bodyPr>
+          <a:lstStyle/>
+          <a:p>
+            <a:pPr algn="ctr" indent="0" marL="0">
+              <a:buNone/>
+            </a:pPr>
+            <a:r>
+              <a:rPr lang="en-US" altLang="en-US" sz="500" b="1" dirty="0">
+                <a:solidFill>
+                  <a:srgbClr val="5A6A73"/>
+                </a:solidFill>
+                <a:latin typeface="Calibri" pitchFamily="34" charset="0"/>
+                <a:ea typeface="Calibri" pitchFamily="34" charset="-122"/>
+                <a:cs typeface="Calibri" pitchFamily="34" charset="-120"/>
+              </a:rPr>
+              <a:t>S</a:t>
+            </a:r>
+            <a:endParaRPr lang="en-US" sz="500" dirty="0"/>
+          </a:p>
+        </p:txBody>
+      </p:sp>
+      <p:sp>
+        <p:nvSpPr>
+          <p:cNvPr id="47" name="Text 45"/>
+          <p:cNvSpPr/>
+          <p:nvPr/>
+        </p:nvSpPr>
+        <p:spPr>
+          <a:xfrm>
+            <a:off x="6622359" y="1801368"/>
+            <a:ext cx="192725" cy="164592"/>
+          </a:xfrm>
+          <a:prstGeom prst="rect">
+            <a:avLst/>
+          </a:prstGeom>
+          <a:noFill/>
+          <a:ln/>
+        </p:spPr>
+        <p:txBody>
+          <a:bodyPr wrap="square" lIns="0" tIns="0" rIns="0" bIns="0" rtlCol="0" anchor="ctr">
+            <a:normAutofit/>
+          </a:bodyPr>
+          <a:lstStyle/>
+          <a:p>
+            <a:pPr algn="ctr" indent="0" marL="0">
+              <a:buNone/>
+            </a:pPr>
+            <a:r>
+              <a:rPr lang="en-US" altLang="en-US" sz="550" b="1" dirty="0">
+                <a:solidFill>
+                  <a:srgbClr val="222222"/>
+                </a:solidFill>
+                <a:latin typeface="Calibri" pitchFamily="34" charset="0"/>
+                <a:ea typeface="Calibri" pitchFamily="34" charset="-122"/>
+                <a:cs typeface="Calibri" pitchFamily="34" charset="-120"/>
+              </a:rPr>
+              <a:t>17</a:t>
+            </a:r>
+            <a:endParaRPr lang="en-US" sz="550" dirty="0"/>
+          </a:p>
+        </p:txBody>
+      </p:sp>
+      <p:sp>
+        <p:nvSpPr>
+          <p:cNvPr id="48" name="Shape 46"/>
+          <p:cNvSpPr/>
+          <p:nvPr/>
+        </p:nvSpPr>
+        <p:spPr>
+          <a:xfrm>
+            <a:off x="6622359" y="1965960"/>
+            <a:ext cx="0" cy="2194560"/>
+          </a:xfrm>
+          <a:prstGeom prst="line">
+            <a:avLst/>
+          </a:prstGeom>
+          <a:noFill/>
+          <a:ln w="6350">
+            <a:solidFill>
+              <a:srgbClr val="9DB2BB"/>
+            </a:solidFill>
+            <a:prstDash val="solid"/>
+          </a:ln>
+        </p:spPr>
+      </p:sp>
+      <p:sp>
+        <p:nvSpPr>
+          <p:cNvPr id="49" name="Shape 47"/>
+          <p:cNvSpPr/>
+          <p:nvPr/>
+        </p:nvSpPr>
+        <p:spPr>
+          <a:xfrm>
+            <a:off x="6815084" y="1664208"/>
+            <a:ext cx="192725" cy="301752"/>
+          </a:xfrm>
+          <a:prstGeom prst="rect">
+            <a:avLst/>
+          </a:prstGeom>
+          <a:solidFill>
+            <a:srgbClr val="F4F7F8"/>
+          </a:solidFill>
+          <a:ln w="6350">
+            <a:solidFill>
+              <a:srgbClr val="FFFFFF"/>
+            </a:solidFill>
+            <a:prstDash val="solid"/>
+          </a:ln>
+        </p:spPr>
+      </p:sp>
+      <p:sp>
+        <p:nvSpPr>
+          <p:cNvPr id="50" name="Text 48"/>
+          <p:cNvSpPr/>
+          <p:nvPr/>
+        </p:nvSpPr>
+        <p:spPr>
+          <a:xfrm>
+            <a:off x="6815084" y="1664208"/>
+            <a:ext cx="192725" cy="137160"/>
+          </a:xfrm>
+          <a:prstGeom prst="rect">
+            <a:avLst/>
+          </a:prstGeom>
+          <a:noFill/>
+          <a:ln/>
+        </p:spPr>
+        <p:txBody>
+          <a:bodyPr wrap="square" lIns="0" tIns="0" rIns="0" bIns="0" rtlCol="0" anchor="ctr">
+            <a:normAutofit/>
+          </a:bodyPr>
+          <a:lstStyle/>
+          <a:p>
+            <a:pPr algn="ctr" indent="0" marL="0">
+              <a:buNone/>
+            </a:pPr>
+            <a:r>
+              <a:rPr lang="en-US" altLang="en-US" sz="500" b="1" dirty="0">
+                <a:solidFill>
+                  <a:srgbClr val="5A6A73"/>
+                </a:solidFill>
+                <a:latin typeface="Calibri" pitchFamily="34" charset="0"/>
+                <a:ea typeface="Calibri" pitchFamily="34" charset="-122"/>
+                <a:cs typeface="Calibri" pitchFamily="34" charset="-120"/>
+              </a:rPr>
+              <a:t>S</a:t>
+            </a:r>
+            <a:endParaRPr lang="en-US" sz="500" dirty="0"/>
+          </a:p>
+        </p:txBody>
+      </p:sp>
+      <p:sp>
+        <p:nvSpPr>
+          <p:cNvPr id="51" name="Text 49"/>
+          <p:cNvSpPr/>
+          <p:nvPr/>
+        </p:nvSpPr>
+        <p:spPr>
+          <a:xfrm>
+            <a:off x="6815084" y="1801368"/>
+            <a:ext cx="192725" cy="164592"/>
+          </a:xfrm>
+          <a:prstGeom prst="rect">
+            <a:avLst/>
+          </a:prstGeom>
+          <a:noFill/>
+          <a:ln/>
+        </p:spPr>
+        <p:txBody>
+          <a:bodyPr wrap="square" lIns="0" tIns="0" rIns="0" bIns="0" rtlCol="0" anchor="ctr">
+            <a:normAutofit/>
+          </a:bodyPr>
+          <a:lstStyle/>
+          <a:p>
+            <a:pPr algn="ctr" indent="0" marL="0">
+              <a:buNone/>
+            </a:pPr>
+            <a:r>
+              <a:rPr lang="en-US" altLang="en-US" sz="550" b="1" dirty="0">
+                <a:solidFill>
+                  <a:srgbClr val="222222"/>
+                </a:solidFill>
+                <a:latin typeface="Calibri" pitchFamily="34" charset="0"/>
+                <a:ea typeface="Calibri" pitchFamily="34" charset="-122"/>
+                <a:cs typeface="Calibri" pitchFamily="34" charset="-120"/>
+              </a:rPr>
+              <a:t>18</a:t>
+            </a:r>
+            <a:endParaRPr lang="en-US" sz="550" dirty="0"/>
+          </a:p>
+        </p:txBody>
+      </p:sp>
+      <p:sp>
+        <p:nvSpPr>
+          <p:cNvPr id="52" name="Shape 50"/>
+          <p:cNvSpPr/>
+          <p:nvPr/>
+        </p:nvSpPr>
+        <p:spPr>
+          <a:xfrm>
+            <a:off x="7007809" y="1664208"/>
+            <a:ext cx="192725" cy="301752"/>
+          </a:xfrm>
+          <a:prstGeom prst="rect">
+            <a:avLst/>
+          </a:prstGeom>
+          <a:solidFill>
+            <a:srgbClr val="F4F7F8"/>
+          </a:solidFill>
+          <a:ln w="6350">
+            <a:solidFill>
+              <a:srgbClr val="FFFFFF"/>
+            </a:solidFill>
+            <a:prstDash val="solid"/>
+          </a:ln>
+        </p:spPr>
+      </p:sp>
+      <p:sp>
+        <p:nvSpPr>
+          <p:cNvPr id="53" name="Text 51"/>
+          <p:cNvSpPr/>
+          <p:nvPr/>
+        </p:nvSpPr>
+        <p:spPr>
+          <a:xfrm>
+            <a:off x="7007809" y="1664208"/>
+            <a:ext cx="192725" cy="137160"/>
+          </a:xfrm>
+          <a:prstGeom prst="rect">
+            <a:avLst/>
+          </a:prstGeom>
+          <a:noFill/>
+          <a:ln/>
+        </p:spPr>
+        <p:txBody>
+          <a:bodyPr wrap="square" lIns="0" tIns="0" rIns="0" bIns="0" rtlCol="0" anchor="ctr">
+            <a:normAutofit/>
+          </a:bodyPr>
+          <a:lstStyle/>
+          <a:p>
+            <a:pPr algn="ctr" indent="0" marL="0">
+              <a:buNone/>
+            </a:pPr>
+            <a:r>
+              <a:rPr lang="en-US" altLang="en-US" sz="500" b="1" dirty="0">
+                <a:solidFill>
+                  <a:srgbClr val="5A6A73"/>
+                </a:solidFill>
+                <a:latin typeface="Calibri" pitchFamily="34" charset="0"/>
+                <a:ea typeface="Calibri" pitchFamily="34" charset="-122"/>
+                <a:cs typeface="Calibri" pitchFamily="34" charset="-120"/>
+              </a:rPr>
+              <a:t>M</a:t>
+            </a:r>
+            <a:endParaRPr lang="en-US" sz="500" dirty="0"/>
+          </a:p>
+        </p:txBody>
+      </p:sp>
+      <p:sp>
+        <p:nvSpPr>
+          <p:cNvPr id="54" name="Text 52"/>
+          <p:cNvSpPr/>
+          <p:nvPr/>
+        </p:nvSpPr>
+        <p:spPr>
+          <a:xfrm>
+            <a:off x="7007809" y="1801368"/>
+            <a:ext cx="192725" cy="164592"/>
+          </a:xfrm>
+          <a:prstGeom prst="rect">
+            <a:avLst/>
+          </a:prstGeom>
+          <a:noFill/>
+          <a:ln/>
+        </p:spPr>
+        <p:txBody>
+          <a:bodyPr wrap="square" lIns="0" tIns="0" rIns="0" bIns="0" rtlCol="0" anchor="ctr">
+            <a:normAutofit/>
+          </a:bodyPr>
+          <a:lstStyle/>
+          <a:p>
+            <a:pPr algn="ctr" indent="0" marL="0">
+              <a:buNone/>
+            </a:pPr>
+            <a:r>
+              <a:rPr lang="en-US" altLang="en-US" sz="550" b="1" dirty="0">
+                <a:solidFill>
+                  <a:srgbClr val="222222"/>
+                </a:solidFill>
+                <a:latin typeface="Calibri" pitchFamily="34" charset="0"/>
+                <a:ea typeface="Calibri" pitchFamily="34" charset="-122"/>
+                <a:cs typeface="Calibri" pitchFamily="34" charset="-120"/>
+              </a:rPr>
+              <a:t>19</a:t>
+            </a:r>
+            <a:endParaRPr lang="en-US" sz="550" dirty="0"/>
+          </a:p>
+        </p:txBody>
+      </p:sp>
+      <p:sp>
+        <p:nvSpPr>
+          <p:cNvPr id="55" name="Shape 53"/>
+          <p:cNvSpPr/>
+          <p:nvPr/>
+        </p:nvSpPr>
+        <p:spPr>
+          <a:xfrm>
+            <a:off x="7200534" y="1664208"/>
+            <a:ext cx="192725" cy="301752"/>
+          </a:xfrm>
+          <a:prstGeom prst="rect">
+            <a:avLst/>
+          </a:prstGeom>
+          <a:solidFill>
+            <a:srgbClr val="F4F7F8"/>
+          </a:solidFill>
+          <a:ln w="6350">
+            <a:solidFill>
+              <a:srgbClr val="FFFFFF"/>
+            </a:solidFill>
+            <a:prstDash val="solid"/>
+          </a:ln>
+        </p:spPr>
+      </p:sp>
+      <p:sp>
+        <p:nvSpPr>
+          <p:cNvPr id="56" name="Text 54"/>
+          <p:cNvSpPr/>
+          <p:nvPr/>
+        </p:nvSpPr>
+        <p:spPr>
+          <a:xfrm>
+            <a:off x="7200534" y="1664208"/>
+            <a:ext cx="192725" cy="137160"/>
+          </a:xfrm>
+          <a:prstGeom prst="rect">
+            <a:avLst/>
+          </a:prstGeom>
+          <a:noFill/>
+          <a:ln/>
+        </p:spPr>
+        <p:txBody>
+          <a:bodyPr wrap="square" lIns="0" tIns="0" rIns="0" bIns="0" rtlCol="0" anchor="ctr">
+            <a:normAutofit/>
+          </a:bodyPr>
+          <a:lstStyle/>
+          <a:p>
+            <a:pPr algn="ctr" indent="0" marL="0">
+              <a:buNone/>
+            </a:pPr>
+            <a:r>
+              <a:rPr lang="en-US" altLang="en-US" sz="500" b="1" dirty="0">
+                <a:solidFill>
+                  <a:srgbClr val="5A6A73"/>
+                </a:solidFill>
+                <a:latin typeface="Calibri" pitchFamily="34" charset="0"/>
+                <a:ea typeface="Calibri" pitchFamily="34" charset="-122"/>
+                <a:cs typeface="Calibri" pitchFamily="34" charset="-120"/>
+              </a:rPr>
+              <a:t>T</a:t>
+            </a:r>
+            <a:endParaRPr lang="en-US" sz="500" dirty="0"/>
+          </a:p>
+        </p:txBody>
+      </p:sp>
+      <p:sp>
+        <p:nvSpPr>
+          <p:cNvPr id="57" name="Text 55"/>
+          <p:cNvSpPr/>
+          <p:nvPr/>
+        </p:nvSpPr>
+        <p:spPr>
+          <a:xfrm>
+            <a:off x="7200534" y="1801368"/>
+            <a:ext cx="192725" cy="164592"/>
+          </a:xfrm>
+          <a:prstGeom prst="rect">
+            <a:avLst/>
+          </a:prstGeom>
+          <a:noFill/>
+          <a:ln/>
+        </p:spPr>
+        <p:txBody>
+          <a:bodyPr wrap="square" lIns="0" tIns="0" rIns="0" bIns="0" rtlCol="0" anchor="ctr">
+            <a:normAutofit/>
+          </a:bodyPr>
+          <a:lstStyle/>
+          <a:p>
+            <a:pPr algn="ctr" indent="0" marL="0">
+              <a:buNone/>
+            </a:pPr>
+            <a:r>
+              <a:rPr lang="en-US" altLang="en-US" sz="550" b="1" dirty="0">
+                <a:solidFill>
+                  <a:srgbClr val="222222"/>
+                </a:solidFill>
+                <a:latin typeface="Calibri" pitchFamily="34" charset="0"/>
+                <a:ea typeface="Calibri" pitchFamily="34" charset="-122"/>
+                <a:cs typeface="Calibri" pitchFamily="34" charset="-120"/>
+              </a:rPr>
+              <a:t>20</a:t>
+            </a:r>
+            <a:endParaRPr lang="en-US" sz="550" dirty="0"/>
+          </a:p>
+        </p:txBody>
+      </p:sp>
+      <p:sp>
+        <p:nvSpPr>
+          <p:cNvPr id="58" name="Shape 56"/>
+          <p:cNvSpPr/>
+          <p:nvPr/>
+        </p:nvSpPr>
+        <p:spPr>
+          <a:xfrm>
+            <a:off x="7393259" y="1664208"/>
+            <a:ext cx="192725" cy="301752"/>
+          </a:xfrm>
+          <a:prstGeom prst="rect">
+            <a:avLst/>
+          </a:prstGeom>
+          <a:solidFill>
+            <a:srgbClr val="F4F7F8"/>
+          </a:solidFill>
+          <a:ln w="6350">
+            <a:solidFill>
+              <a:srgbClr val="FFFFFF"/>
+            </a:solidFill>
+            <a:prstDash val="solid"/>
+          </a:ln>
+        </p:spPr>
+      </p:sp>
+      <p:sp>
+        <p:nvSpPr>
+          <p:cNvPr id="59" name="Text 57"/>
+          <p:cNvSpPr/>
+          <p:nvPr/>
+        </p:nvSpPr>
+        <p:spPr>
+          <a:xfrm>
+            <a:off x="7393259" y="1664208"/>
+            <a:ext cx="192725" cy="137160"/>
+          </a:xfrm>
+          <a:prstGeom prst="rect">
+            <a:avLst/>
+          </a:prstGeom>
+          <a:noFill/>
+          <a:ln/>
+        </p:spPr>
+        <p:txBody>
+          <a:bodyPr wrap="square" lIns="0" tIns="0" rIns="0" bIns="0" rtlCol="0" anchor="ctr">
+            <a:normAutofit/>
+          </a:bodyPr>
+          <a:lstStyle/>
+          <a:p>
+            <a:pPr algn="ctr" indent="0" marL="0">
+              <a:buNone/>
+            </a:pPr>
+            <a:r>
+              <a:rPr lang="en-US" altLang="en-US" sz="500" b="1" dirty="0">
+                <a:solidFill>
+                  <a:srgbClr val="5A6A73"/>
+                </a:solidFill>
+                <a:latin typeface="Calibri" pitchFamily="34" charset="0"/>
+                <a:ea typeface="Calibri" pitchFamily="34" charset="-122"/>
+                <a:cs typeface="Calibri" pitchFamily="34" charset="-120"/>
+              </a:rPr>
               <a:t>W</a:t>
             </a:r>
             <a:endParaRPr lang="en-US" sz="500" dirty="0"/>
@@ -7918,14 +8624,14 @@
       </p:sp>
       <p:sp>
         <p:nvSpPr>
-          <p:cNvPr id="40" name="Text 38"/>
-          <p:cNvSpPr/>
-          <p:nvPr/>
-        </p:nvSpPr>
-        <p:spPr>
-          <a:xfrm>
-            <a:off x="6044184" y="1801368"/>
-            <a:ext cx="170052" cy="164592"/>
+          <p:cNvPr id="60" name="Text 58"/>
+          <p:cNvSpPr/>
+          <p:nvPr/>
+        </p:nvSpPr>
+        <p:spPr>
+          <a:xfrm>
+            <a:off x="7393259" y="1801368"/>
+            <a:ext cx="192725" cy="164592"/>
           </a:xfrm>
           <a:prstGeom prst="rect">
             <a:avLst/>
@@ -7951,7 +8657,7 @@
                 <a:ea typeface="Calibri" pitchFamily="34" charset="-122"/>
                 <a:cs typeface="Calibri" pitchFamily="34" charset="-120"/>
               </a:rPr>
-              <a:t>14</a:t>
+              <a:t>21</a:t>
             </a:r>
             <a:endParaRPr lang="en-US" sz="550" dirty="0"/>
           </a:p>
@@ -7959,14 +8665,14 @@
       </p:sp>
       <p:sp>
         <p:nvSpPr>
-          <p:cNvPr id="41" name="Shape 39"/>
-          <p:cNvSpPr/>
-          <p:nvPr/>
-        </p:nvSpPr>
-        <p:spPr>
-          <a:xfrm>
-            <a:off x="6214236" y="1664208"/>
-            <a:ext cx="170052" cy="301752"/>
+          <p:cNvPr id="61" name="Shape 59"/>
+          <p:cNvSpPr/>
+          <p:nvPr/>
+        </p:nvSpPr>
+        <p:spPr>
+          <a:xfrm>
+            <a:off x="7585984" y="1664208"/>
+            <a:ext cx="192725" cy="301752"/>
           </a:xfrm>
           <a:prstGeom prst="rect">
             <a:avLst/>
@@ -7984,14 +8690,14 @@
       </p:sp>
       <p:sp>
         <p:nvSpPr>
-          <p:cNvPr id="42" name="Text 40"/>
-          <p:cNvSpPr/>
-          <p:nvPr/>
-        </p:nvSpPr>
-        <p:spPr>
-          <a:xfrm>
-            <a:off x="6214236" y="1664208"/>
-            <a:ext cx="170052" cy="137160"/>
+          <p:cNvPr id="62" name="Text 60"/>
+          <p:cNvSpPr/>
+          <p:nvPr/>
+        </p:nvSpPr>
+        <p:spPr>
+          <a:xfrm>
+            <a:off x="7585984" y="1664208"/>
+            <a:ext cx="192725" cy="137160"/>
           </a:xfrm>
           <a:prstGeom prst="rect">
             <a:avLst/>
@@ -8025,14 +8731,14 @@
       </p:sp>
       <p:sp>
         <p:nvSpPr>
-          <p:cNvPr id="43" name="Text 41"/>
-          <p:cNvSpPr/>
-          <p:nvPr/>
-        </p:nvSpPr>
-        <p:spPr>
-          <a:xfrm>
-            <a:off x="6214236" y="1801368"/>
-            <a:ext cx="170052" cy="164592"/>
+          <p:cNvPr id="63" name="Text 61"/>
+          <p:cNvSpPr/>
+          <p:nvPr/>
+        </p:nvSpPr>
+        <p:spPr>
+          <a:xfrm>
+            <a:off x="7585984" y="1801368"/>
+            <a:ext cx="192725" cy="164592"/>
           </a:xfrm>
           <a:prstGeom prst="rect">
             <a:avLst/>
@@ -8058,7 +8764,7 @@
                 <a:ea typeface="Calibri" pitchFamily="34" charset="-122"/>
                 <a:cs typeface="Calibri" pitchFamily="34" charset="-120"/>
               </a:rPr>
-              <a:t>15</a:t>
+              <a:t>22</a:t>
             </a:r>
             <a:endParaRPr lang="en-US" sz="550" dirty="0"/>
           </a:p>
@@ -8066,20 +8772,20 @@
       </p:sp>
       <p:sp>
         <p:nvSpPr>
-          <p:cNvPr id="44" name="Shape 42"/>
-          <p:cNvSpPr/>
-          <p:nvPr/>
-        </p:nvSpPr>
-        <p:spPr>
-          <a:xfrm>
-            <a:off x="6384287" y="1664208"/>
-            <a:ext cx="170052" cy="301752"/>
-          </a:xfrm>
-          <a:prstGeom prst="rect">
-            <a:avLst/>
-          </a:prstGeom>
-          <a:solidFill>
-            <a:srgbClr val="DBE3E6"/>
+          <p:cNvPr id="64" name="Shape 62"/>
+          <p:cNvSpPr/>
+          <p:nvPr/>
+        </p:nvSpPr>
+        <p:spPr>
+          <a:xfrm>
+            <a:off x="7778709" y="1664208"/>
+            <a:ext cx="192725" cy="301752"/>
+          </a:xfrm>
+          <a:prstGeom prst="rect">
+            <a:avLst/>
+          </a:prstGeom>
+          <a:solidFill>
+            <a:srgbClr val="F4F7F8"/>
           </a:solidFill>
           <a:ln w="6350">
             <a:solidFill>
@@ -8091,14 +8797,14 @@
       </p:sp>
       <p:sp>
         <p:nvSpPr>
-          <p:cNvPr id="45" name="Text 43"/>
-          <p:cNvSpPr/>
-          <p:nvPr/>
-        </p:nvSpPr>
-        <p:spPr>
-          <a:xfrm>
-            <a:off x="6384287" y="1664208"/>
-            <a:ext cx="170052" cy="137160"/>
+          <p:cNvPr id="65" name="Text 63"/>
+          <p:cNvSpPr/>
+          <p:nvPr/>
+        </p:nvSpPr>
+        <p:spPr>
+          <a:xfrm>
+            <a:off x="7778709" y="1664208"/>
+            <a:ext cx="192725" cy="137160"/>
           </a:xfrm>
           <a:prstGeom prst="rect">
             <a:avLst/>
@@ -8118,7 +8824,7 @@
             <a:r>
               <a:rPr lang="en-US" altLang="en-US" sz="500" b="1" dirty="0">
                 <a:solidFill>
-                  <a:srgbClr val="8A959C"/>
+                  <a:srgbClr val="5A6A73"/>
                 </a:solidFill>
                 <a:latin typeface="Calibri" pitchFamily="34" charset="0"/>
                 <a:ea typeface="Calibri" pitchFamily="34" charset="-122"/>
@@ -8132,14 +8838,14 @@
       </p:sp>
       <p:sp>
         <p:nvSpPr>
-          <p:cNvPr id="46" name="Text 44"/>
-          <p:cNvSpPr/>
-          <p:nvPr/>
-        </p:nvSpPr>
-        <p:spPr>
-          <a:xfrm>
-            <a:off x="6384287" y="1801368"/>
-            <a:ext cx="170052" cy="164592"/>
+          <p:cNvPr id="66" name="Text 64"/>
+          <p:cNvSpPr/>
+          <p:nvPr/>
+        </p:nvSpPr>
+        <p:spPr>
+          <a:xfrm>
+            <a:off x="7778709" y="1801368"/>
+            <a:ext cx="192725" cy="164592"/>
           </a:xfrm>
           <a:prstGeom prst="rect">
             <a:avLst/>
@@ -8159,13 +8865,13 @@
             <a:r>
               <a:rPr lang="en-US" altLang="en-US" sz="550" b="1" dirty="0">
                 <a:solidFill>
-                  <a:srgbClr val="8A959C"/>
-                </a:solidFill>
-                <a:latin typeface="Calibri" pitchFamily="34" charset="0"/>
-                <a:ea typeface="Calibri" pitchFamily="34" charset="-122"/>
-                <a:cs typeface="Calibri" pitchFamily="34" charset="-120"/>
-              </a:rPr>
-              <a:t>16</a:t>
+                  <a:srgbClr val="222222"/>
+                </a:solidFill>
+                <a:latin typeface="Calibri" pitchFamily="34" charset="0"/>
+                <a:ea typeface="Calibri" pitchFamily="34" charset="-122"/>
+                <a:cs typeface="Calibri" pitchFamily="34" charset="-120"/>
+              </a:rPr>
+              <a:t>23</a:t>
             </a:r>
             <a:endParaRPr lang="en-US" sz="550" dirty="0"/>
           </a:p>
@@ -8173,43 +8879,14 @@
       </p:sp>
       <p:sp>
         <p:nvSpPr>
-          <p:cNvPr id="47" name="Shape 45"/>
-          <p:cNvSpPr/>
-          <p:nvPr/>
-        </p:nvSpPr>
-        <p:spPr>
-          <a:xfrm>
-            <a:off x="6384287" y="1965960"/>
-            <a:ext cx="170052" cy="2194560"/>
-          </a:xfrm>
-          <a:prstGeom prst="rect">
-            <a:avLst/>
-          </a:prstGeom>
-          <a:solidFill>
-            <a:srgbClr val="000000">
-              <a:alpha val="6000"/>
-            </a:srgbClr>
-          </a:solidFill>
-          <a:ln w="12700">
-            <a:solidFill>
-              <a:srgbClr val="000000">
-                <a:alpha val="0"/>
-              </a:srgbClr>
-            </a:solidFill>
-            <a:prstDash val="solid"/>
-          </a:ln>
-        </p:spPr>
-      </p:sp>
-      <p:sp>
-        <p:nvSpPr>
-          <p:cNvPr id="48" name="Shape 46"/>
-          <p:cNvSpPr/>
-          <p:nvPr/>
-        </p:nvSpPr>
-        <p:spPr>
-          <a:xfrm>
-            <a:off x="6554339" y="1664208"/>
-            <a:ext cx="170052" cy="301752"/>
+          <p:cNvPr id="67" name="Shape 65"/>
+          <p:cNvSpPr/>
+          <p:nvPr/>
+        </p:nvSpPr>
+        <p:spPr>
+          <a:xfrm>
+            <a:off x="7971434" y="1664208"/>
+            <a:ext cx="192725" cy="301752"/>
           </a:xfrm>
           <a:prstGeom prst="rect">
             <a:avLst/>
@@ -8227,14 +8904,14 @@
       </p:sp>
       <p:sp>
         <p:nvSpPr>
-          <p:cNvPr id="49" name="Text 47"/>
-          <p:cNvSpPr/>
-          <p:nvPr/>
-        </p:nvSpPr>
-        <p:spPr>
-          <a:xfrm>
-            <a:off x="6554339" y="1664208"/>
-            <a:ext cx="170052" cy="137160"/>
+          <p:cNvPr id="68" name="Text 66"/>
+          <p:cNvSpPr/>
+          <p:nvPr/>
+        </p:nvSpPr>
+        <p:spPr>
+          <a:xfrm>
+            <a:off x="7971434" y="1664208"/>
+            <a:ext cx="192725" cy="137160"/>
           </a:xfrm>
           <a:prstGeom prst="rect">
             <a:avLst/>
@@ -8268,14 +8945,14 @@
       </p:sp>
       <p:sp>
         <p:nvSpPr>
-          <p:cNvPr id="50" name="Text 48"/>
-          <p:cNvSpPr/>
-          <p:nvPr/>
-        </p:nvSpPr>
-        <p:spPr>
-          <a:xfrm>
-            <a:off x="6554339" y="1801368"/>
-            <a:ext cx="170052" cy="164592"/>
+          <p:cNvPr id="69" name="Text 67"/>
+          <p:cNvSpPr/>
+          <p:nvPr/>
+        </p:nvSpPr>
+        <p:spPr>
+          <a:xfrm>
+            <a:off x="7971434" y="1801368"/>
+            <a:ext cx="192725" cy="164592"/>
           </a:xfrm>
           <a:prstGeom prst="rect">
             <a:avLst/>
@@ -8301,7 +8978,7 @@
                 <a:ea typeface="Calibri" pitchFamily="34" charset="-122"/>
                 <a:cs typeface="Calibri" pitchFamily="34" charset="-120"/>
               </a:rPr>
-              <a:t>17</a:t>
+              <a:t>24</a:t>
             </a:r>
             <a:endParaRPr lang="en-US" sz="550" dirty="0"/>
           </a:p>
@@ -8309,13 +8986,13 @@
       </p:sp>
       <p:sp>
         <p:nvSpPr>
-          <p:cNvPr id="51" name="Shape 49"/>
-          <p:cNvSpPr/>
-          <p:nvPr/>
-        </p:nvSpPr>
-        <p:spPr>
-          <a:xfrm>
-            <a:off x="6554339" y="1965960"/>
+          <p:cNvPr id="70" name="Shape 68"/>
+          <p:cNvSpPr/>
+          <p:nvPr/>
+        </p:nvSpPr>
+        <p:spPr>
+          <a:xfrm>
+            <a:off x="7971434" y="1965960"/>
             <a:ext cx="0" cy="2194560"/>
           </a:xfrm>
           <a:prstGeom prst="line">
@@ -8332,14 +9009,14 @@
       </p:sp>
       <p:sp>
         <p:nvSpPr>
-          <p:cNvPr id="52" name="Shape 50"/>
-          <p:cNvSpPr/>
-          <p:nvPr/>
-        </p:nvSpPr>
-        <p:spPr>
-          <a:xfrm>
-            <a:off x="6724390" y="1664208"/>
-            <a:ext cx="170052" cy="301752"/>
+          <p:cNvPr id="71" name="Shape 69"/>
+          <p:cNvSpPr/>
+          <p:nvPr/>
+        </p:nvSpPr>
+        <p:spPr>
+          <a:xfrm>
+            <a:off x="8164159" y="1664208"/>
+            <a:ext cx="192725" cy="301752"/>
           </a:xfrm>
           <a:prstGeom prst="rect">
             <a:avLst/>
@@ -8357,14 +9034,14 @@
       </p:sp>
       <p:sp>
         <p:nvSpPr>
-          <p:cNvPr id="53" name="Text 51"/>
-          <p:cNvSpPr/>
-          <p:nvPr/>
-        </p:nvSpPr>
-        <p:spPr>
-          <a:xfrm>
-            <a:off x="6724390" y="1664208"/>
-            <a:ext cx="170052" cy="137160"/>
+          <p:cNvPr id="72" name="Text 70"/>
+          <p:cNvSpPr/>
+          <p:nvPr/>
+        </p:nvSpPr>
+        <p:spPr>
+          <a:xfrm>
+            <a:off x="8164159" y="1664208"/>
+            <a:ext cx="192725" cy="137160"/>
           </a:xfrm>
           <a:prstGeom prst="rect">
             <a:avLst/>
@@ -8398,14 +9075,14 @@
       </p:sp>
       <p:sp>
         <p:nvSpPr>
-          <p:cNvPr id="54" name="Text 52"/>
-          <p:cNvSpPr/>
-          <p:nvPr/>
-        </p:nvSpPr>
-        <p:spPr>
-          <a:xfrm>
-            <a:off x="6724390" y="1801368"/>
-            <a:ext cx="170052" cy="164592"/>
+          <p:cNvPr id="73" name="Text 71"/>
+          <p:cNvSpPr/>
+          <p:nvPr/>
+        </p:nvSpPr>
+        <p:spPr>
+          <a:xfrm>
+            <a:off x="8164159" y="1801368"/>
+            <a:ext cx="192725" cy="164592"/>
           </a:xfrm>
           <a:prstGeom prst="rect">
             <a:avLst/>
@@ -8431,7 +9108,7 @@
                 <a:ea typeface="Calibri" pitchFamily="34" charset="-122"/>
                 <a:cs typeface="Calibri" pitchFamily="34" charset="-120"/>
               </a:rPr>
-              <a:t>18</a:t>
+              <a:t>25</a:t>
             </a:r>
             <a:endParaRPr lang="en-US" sz="550" dirty="0"/>
           </a:p>
@@ -8439,14 +9116,14 @@
       </p:sp>
       <p:sp>
         <p:nvSpPr>
-          <p:cNvPr id="55" name="Shape 53"/>
-          <p:cNvSpPr/>
-          <p:nvPr/>
-        </p:nvSpPr>
-        <p:spPr>
-          <a:xfrm>
-            <a:off x="6894442" y="1664208"/>
-            <a:ext cx="170052" cy="301752"/>
+          <p:cNvPr id="74" name="Shape 72"/>
+          <p:cNvSpPr/>
+          <p:nvPr/>
+        </p:nvSpPr>
+        <p:spPr>
+          <a:xfrm>
+            <a:off x="8356884" y="1664208"/>
+            <a:ext cx="192725" cy="301752"/>
           </a:xfrm>
           <a:prstGeom prst="rect">
             <a:avLst/>
@@ -8464,14 +9141,14 @@
       </p:sp>
       <p:sp>
         <p:nvSpPr>
-          <p:cNvPr id="56" name="Text 54"/>
-          <p:cNvSpPr/>
-          <p:nvPr/>
-        </p:nvSpPr>
-        <p:spPr>
-          <a:xfrm>
-            <a:off x="6894442" y="1664208"/>
-            <a:ext cx="170052" cy="137160"/>
+          <p:cNvPr id="75" name="Text 73"/>
+          <p:cNvSpPr/>
+          <p:nvPr/>
+        </p:nvSpPr>
+        <p:spPr>
+          <a:xfrm>
+            <a:off x="8356884" y="1664208"/>
+            <a:ext cx="192725" cy="137160"/>
           </a:xfrm>
           <a:prstGeom prst="rect">
             <a:avLst/>
@@ -8505,14 +9182,14 @@
       </p:sp>
       <p:sp>
         <p:nvSpPr>
-          <p:cNvPr id="57" name="Text 55"/>
-          <p:cNvSpPr/>
-          <p:nvPr/>
-        </p:nvSpPr>
-        <p:spPr>
-          <a:xfrm>
-            <a:off x="6894442" y="1801368"/>
-            <a:ext cx="170052" cy="164592"/>
+          <p:cNvPr id="76" name="Text 74"/>
+          <p:cNvSpPr/>
+          <p:nvPr/>
+        </p:nvSpPr>
+        <p:spPr>
+          <a:xfrm>
+            <a:off x="8356884" y="1801368"/>
+            <a:ext cx="192725" cy="164592"/>
           </a:xfrm>
           <a:prstGeom prst="rect">
             <a:avLst/>
@@ -8538,7 +9215,7 @@
                 <a:ea typeface="Calibri" pitchFamily="34" charset="-122"/>
                 <a:cs typeface="Calibri" pitchFamily="34" charset="-120"/>
               </a:rPr>
-              <a:t>19</a:t>
+              <a:t>26</a:t>
             </a:r>
             <a:endParaRPr lang="en-US" sz="550" dirty="0"/>
           </a:p>
@@ -8546,14 +9223,14 @@
       </p:sp>
       <p:sp>
         <p:nvSpPr>
-          <p:cNvPr id="58" name="Shape 56"/>
-          <p:cNvSpPr/>
-          <p:nvPr/>
-        </p:nvSpPr>
-        <p:spPr>
-          <a:xfrm>
-            <a:off x="7064493" y="1664208"/>
-            <a:ext cx="170052" cy="301752"/>
+          <p:cNvPr id="77" name="Shape 75"/>
+          <p:cNvSpPr/>
+          <p:nvPr/>
+        </p:nvSpPr>
+        <p:spPr>
+          <a:xfrm>
+            <a:off x="8549610" y="1664208"/>
+            <a:ext cx="192725" cy="301752"/>
           </a:xfrm>
           <a:prstGeom prst="rect">
             <a:avLst/>
@@ -8571,14 +9248,14 @@
       </p:sp>
       <p:sp>
         <p:nvSpPr>
-          <p:cNvPr id="59" name="Text 57"/>
-          <p:cNvSpPr/>
-          <p:nvPr/>
-        </p:nvSpPr>
-        <p:spPr>
-          <a:xfrm>
-            <a:off x="7064493" y="1664208"/>
-            <a:ext cx="170052" cy="137160"/>
+          <p:cNvPr id="78" name="Text 76"/>
+          <p:cNvSpPr/>
+          <p:nvPr/>
+        </p:nvSpPr>
+        <p:spPr>
+          <a:xfrm>
+            <a:off x="8549610" y="1664208"/>
+            <a:ext cx="192725" cy="137160"/>
           </a:xfrm>
           <a:prstGeom prst="rect">
             <a:avLst/>
@@ -8612,14 +9289,14 @@
       </p:sp>
       <p:sp>
         <p:nvSpPr>
-          <p:cNvPr id="60" name="Text 58"/>
-          <p:cNvSpPr/>
-          <p:nvPr/>
-        </p:nvSpPr>
-        <p:spPr>
-          <a:xfrm>
-            <a:off x="7064493" y="1801368"/>
-            <a:ext cx="170052" cy="164592"/>
+          <p:cNvPr id="79" name="Text 77"/>
+          <p:cNvSpPr/>
+          <p:nvPr/>
+        </p:nvSpPr>
+        <p:spPr>
+          <a:xfrm>
+            <a:off x="8549610" y="1801368"/>
+            <a:ext cx="192725" cy="164592"/>
           </a:xfrm>
           <a:prstGeom prst="rect">
             <a:avLst/>
@@ -8645,7 +9322,7 @@
                 <a:ea typeface="Calibri" pitchFamily="34" charset="-122"/>
                 <a:cs typeface="Calibri" pitchFamily="34" charset="-120"/>
               </a:rPr>
-              <a:t>20</a:t>
+              <a:t>27</a:t>
             </a:r>
             <a:endParaRPr lang="en-US" sz="550" dirty="0"/>
           </a:p>
@@ -8653,14 +9330,14 @@
       </p:sp>
       <p:sp>
         <p:nvSpPr>
-          <p:cNvPr id="61" name="Shape 59"/>
-          <p:cNvSpPr/>
-          <p:nvPr/>
-        </p:nvSpPr>
-        <p:spPr>
-          <a:xfrm>
-            <a:off x="7234545" y="1664208"/>
-            <a:ext cx="170052" cy="301752"/>
+          <p:cNvPr id="80" name="Shape 78"/>
+          <p:cNvSpPr/>
+          <p:nvPr/>
+        </p:nvSpPr>
+        <p:spPr>
+          <a:xfrm>
+            <a:off x="8742335" y="1664208"/>
+            <a:ext cx="192725" cy="301752"/>
           </a:xfrm>
           <a:prstGeom prst="rect">
             <a:avLst/>
@@ -8678,14 +9355,14 @@
       </p:sp>
       <p:sp>
         <p:nvSpPr>
-          <p:cNvPr id="62" name="Text 60"/>
-          <p:cNvSpPr/>
-          <p:nvPr/>
-        </p:nvSpPr>
-        <p:spPr>
-          <a:xfrm>
-            <a:off x="7234545" y="1664208"/>
-            <a:ext cx="170052" cy="137160"/>
+          <p:cNvPr id="81" name="Text 79"/>
+          <p:cNvSpPr/>
+          <p:nvPr/>
+        </p:nvSpPr>
+        <p:spPr>
+          <a:xfrm>
+            <a:off x="8742335" y="1664208"/>
+            <a:ext cx="192725" cy="137160"/>
           </a:xfrm>
           <a:prstGeom prst="rect">
             <a:avLst/>
@@ -8719,14 +9396,14 @@
       </p:sp>
       <p:sp>
         <p:nvSpPr>
-          <p:cNvPr id="63" name="Text 61"/>
-          <p:cNvSpPr/>
-          <p:nvPr/>
-        </p:nvSpPr>
-        <p:spPr>
-          <a:xfrm>
-            <a:off x="7234545" y="1801368"/>
-            <a:ext cx="170052" cy="164592"/>
+          <p:cNvPr id="82" name="Text 80"/>
+          <p:cNvSpPr/>
+          <p:nvPr/>
+        </p:nvSpPr>
+        <p:spPr>
+          <a:xfrm>
+            <a:off x="8742335" y="1801368"/>
+            <a:ext cx="192725" cy="164592"/>
           </a:xfrm>
           <a:prstGeom prst="rect">
             <a:avLst/>
@@ -8752,7 +9429,7 @@
                 <a:ea typeface="Calibri" pitchFamily="34" charset="-122"/>
                 <a:cs typeface="Calibri" pitchFamily="34" charset="-120"/>
               </a:rPr>
-              <a:t>21</a:t>
+              <a:t>28</a:t>
             </a:r>
             <a:endParaRPr lang="en-US" sz="550" dirty="0"/>
           </a:p>
@@ -8760,14 +9437,14 @@
       </p:sp>
       <p:sp>
         <p:nvSpPr>
-          <p:cNvPr id="64" name="Shape 62"/>
-          <p:cNvSpPr/>
-          <p:nvPr/>
-        </p:nvSpPr>
-        <p:spPr>
-          <a:xfrm>
-            <a:off x="7404596" y="1664208"/>
-            <a:ext cx="170052" cy="301752"/>
+          <p:cNvPr id="83" name="Shape 81"/>
+          <p:cNvSpPr/>
+          <p:nvPr/>
+        </p:nvSpPr>
+        <p:spPr>
+          <a:xfrm>
+            <a:off x="8935060" y="1664208"/>
+            <a:ext cx="192725" cy="301752"/>
           </a:xfrm>
           <a:prstGeom prst="rect">
             <a:avLst/>
@@ -8785,14 +9462,14 @@
       </p:sp>
       <p:sp>
         <p:nvSpPr>
-          <p:cNvPr id="65" name="Text 63"/>
-          <p:cNvSpPr/>
-          <p:nvPr/>
-        </p:nvSpPr>
-        <p:spPr>
-          <a:xfrm>
-            <a:off x="7404596" y="1664208"/>
-            <a:ext cx="170052" cy="137160"/>
+          <p:cNvPr id="84" name="Text 82"/>
+          <p:cNvSpPr/>
+          <p:nvPr/>
+        </p:nvSpPr>
+        <p:spPr>
+          <a:xfrm>
+            <a:off x="8935060" y="1664208"/>
+            <a:ext cx="192725" cy="137160"/>
           </a:xfrm>
           <a:prstGeom prst="rect">
             <a:avLst/>
@@ -8826,14 +9503,14 @@
       </p:sp>
       <p:sp>
         <p:nvSpPr>
-          <p:cNvPr id="66" name="Text 64"/>
-          <p:cNvSpPr/>
-          <p:nvPr/>
-        </p:nvSpPr>
-        <p:spPr>
-          <a:xfrm>
-            <a:off x="7404596" y="1801368"/>
-            <a:ext cx="170052" cy="164592"/>
+          <p:cNvPr id="85" name="Text 83"/>
+          <p:cNvSpPr/>
+          <p:nvPr/>
+        </p:nvSpPr>
+        <p:spPr>
+          <a:xfrm>
+            <a:off x="8935060" y="1801368"/>
+            <a:ext cx="192725" cy="164592"/>
           </a:xfrm>
           <a:prstGeom prst="rect">
             <a:avLst/>
@@ -8859,7 +9536,7 @@
                 <a:ea typeface="Calibri" pitchFamily="34" charset="-122"/>
                 <a:cs typeface="Calibri" pitchFamily="34" charset="-120"/>
               </a:rPr>
-              <a:t>22</a:t>
+              <a:t>29</a:t>
             </a:r>
             <a:endParaRPr lang="en-US" sz="550" dirty="0"/>
           </a:p>
@@ -8867,20 +9544,20 @@
       </p:sp>
       <p:sp>
         <p:nvSpPr>
-          <p:cNvPr id="67" name="Shape 65"/>
-          <p:cNvSpPr/>
-          <p:nvPr/>
-        </p:nvSpPr>
-        <p:spPr>
-          <a:xfrm>
-            <a:off x="7574648" y="1664208"/>
-            <a:ext cx="170052" cy="301752"/>
-          </a:xfrm>
-          <a:prstGeom prst="rect">
-            <a:avLst/>
-          </a:prstGeom>
-          <a:solidFill>
-            <a:srgbClr val="DBE3E6"/>
+          <p:cNvPr id="86" name="Shape 84"/>
+          <p:cNvSpPr/>
+          <p:nvPr/>
+        </p:nvSpPr>
+        <p:spPr>
+          <a:xfrm>
+            <a:off x="9127785" y="1664208"/>
+            <a:ext cx="192725" cy="301752"/>
+          </a:xfrm>
+          <a:prstGeom prst="rect">
+            <a:avLst/>
+          </a:prstGeom>
+          <a:solidFill>
+            <a:srgbClr val="F4F7F8"/>
           </a:solidFill>
           <a:ln w="6350">
             <a:solidFill>
@@ -8892,14 +9569,14 @@
       </p:sp>
       <p:sp>
         <p:nvSpPr>
-          <p:cNvPr id="68" name="Text 66"/>
-          <p:cNvSpPr/>
-          <p:nvPr/>
-        </p:nvSpPr>
-        <p:spPr>
-          <a:xfrm>
-            <a:off x="7574648" y="1664208"/>
-            <a:ext cx="170052" cy="137160"/>
+          <p:cNvPr id="87" name="Text 85"/>
+          <p:cNvSpPr/>
+          <p:nvPr/>
+        </p:nvSpPr>
+        <p:spPr>
+          <a:xfrm>
+            <a:off x="9127785" y="1664208"/>
+            <a:ext cx="192725" cy="137160"/>
           </a:xfrm>
           <a:prstGeom prst="rect">
             <a:avLst/>
@@ -8919,7 +9596,7 @@
             <a:r>
               <a:rPr lang="en-US" altLang="en-US" sz="500" b="1" dirty="0">
                 <a:solidFill>
-                  <a:srgbClr val="8A959C"/>
+                  <a:srgbClr val="5A6A73"/>
                 </a:solidFill>
                 <a:latin typeface="Calibri" pitchFamily="34" charset="0"/>
                 <a:ea typeface="Calibri" pitchFamily="34" charset="-122"/>
@@ -8933,14 +9610,14 @@
       </p:sp>
       <p:sp>
         <p:nvSpPr>
-          <p:cNvPr id="69" name="Text 67"/>
-          <p:cNvSpPr/>
-          <p:nvPr/>
-        </p:nvSpPr>
-        <p:spPr>
-          <a:xfrm>
-            <a:off x="7574648" y="1801368"/>
-            <a:ext cx="170052" cy="164592"/>
+          <p:cNvPr id="88" name="Text 86"/>
+          <p:cNvSpPr/>
+          <p:nvPr/>
+        </p:nvSpPr>
+        <p:spPr>
+          <a:xfrm>
+            <a:off x="9127785" y="1801368"/>
+            <a:ext cx="192725" cy="164592"/>
           </a:xfrm>
           <a:prstGeom prst="rect">
             <a:avLst/>
@@ -8960,13 +9637,13 @@
             <a:r>
               <a:rPr lang="en-US" altLang="en-US" sz="550" b="1" dirty="0">
                 <a:solidFill>
-                  <a:srgbClr val="8A959C"/>
-                </a:solidFill>
-                <a:latin typeface="Calibri" pitchFamily="34" charset="0"/>
-                <a:ea typeface="Calibri" pitchFamily="34" charset="-122"/>
-                <a:cs typeface="Calibri" pitchFamily="34" charset="-120"/>
-              </a:rPr>
-              <a:t>23</a:t>
+                  <a:srgbClr val="222222"/>
+                </a:solidFill>
+                <a:latin typeface="Calibri" pitchFamily="34" charset="0"/>
+                <a:ea typeface="Calibri" pitchFamily="34" charset="-122"/>
+                <a:cs typeface="Calibri" pitchFamily="34" charset="-120"/>
+              </a:rPr>
+              <a:t>30</a:t>
             </a:r>
             <a:endParaRPr lang="en-US" sz="550" dirty="0"/>
           </a:p>
@@ -8974,43 +9651,14 @@
       </p:sp>
       <p:sp>
         <p:nvSpPr>
-          <p:cNvPr id="70" name="Shape 68"/>
-          <p:cNvSpPr/>
-          <p:nvPr/>
-        </p:nvSpPr>
-        <p:spPr>
-          <a:xfrm>
-            <a:off x="7574648" y="1965960"/>
-            <a:ext cx="170052" cy="2194560"/>
-          </a:xfrm>
-          <a:prstGeom prst="rect">
-            <a:avLst/>
-          </a:prstGeom>
-          <a:solidFill>
-            <a:srgbClr val="000000">
-              <a:alpha val="6000"/>
-            </a:srgbClr>
-          </a:solidFill>
-          <a:ln w="12700">
-            <a:solidFill>
-              <a:srgbClr val="000000">
-                <a:alpha val="0"/>
-              </a:srgbClr>
-            </a:solidFill>
-            <a:prstDash val="solid"/>
-          </a:ln>
-        </p:spPr>
-      </p:sp>
-      <p:sp>
-        <p:nvSpPr>
-          <p:cNvPr id="71" name="Shape 69"/>
-          <p:cNvSpPr/>
-          <p:nvPr/>
-        </p:nvSpPr>
-        <p:spPr>
-          <a:xfrm>
-            <a:off x="7744699" y="1664208"/>
-            <a:ext cx="170052" cy="301752"/>
+          <p:cNvPr id="89" name="Shape 87"/>
+          <p:cNvSpPr/>
+          <p:nvPr/>
+        </p:nvSpPr>
+        <p:spPr>
+          <a:xfrm>
+            <a:off x="9320510" y="1664208"/>
+            <a:ext cx="192725" cy="301752"/>
           </a:xfrm>
           <a:prstGeom prst="rect">
             <a:avLst/>
@@ -9028,14 +9676,14 @@
       </p:sp>
       <p:sp>
         <p:nvSpPr>
-          <p:cNvPr id="72" name="Text 70"/>
-          <p:cNvSpPr/>
-          <p:nvPr/>
-        </p:nvSpPr>
-        <p:spPr>
-          <a:xfrm>
-            <a:off x="7744699" y="1664208"/>
-            <a:ext cx="170052" cy="137160"/>
+          <p:cNvPr id="90" name="Text 88"/>
+          <p:cNvSpPr/>
+          <p:nvPr/>
+        </p:nvSpPr>
+        <p:spPr>
+          <a:xfrm>
+            <a:off x="9320510" y="1664208"/>
+            <a:ext cx="192725" cy="137160"/>
           </a:xfrm>
           <a:prstGeom prst="rect">
             <a:avLst/>
@@ -9069,14 +9717,14 @@
       </p:sp>
       <p:sp>
         <p:nvSpPr>
-          <p:cNvPr id="73" name="Text 71"/>
-          <p:cNvSpPr/>
-          <p:nvPr/>
-        </p:nvSpPr>
-        <p:spPr>
-          <a:xfrm>
-            <a:off x="7744699" y="1801368"/>
-            <a:ext cx="170052" cy="164592"/>
+          <p:cNvPr id="91" name="Text 89"/>
+          <p:cNvSpPr/>
+          <p:nvPr/>
+        </p:nvSpPr>
+        <p:spPr>
+          <a:xfrm>
+            <a:off x="9320510" y="1801368"/>
+            <a:ext cx="192725" cy="164592"/>
           </a:xfrm>
           <a:prstGeom prst="rect">
             <a:avLst/>
@@ -9102,7 +9750,7 @@
                 <a:ea typeface="Calibri" pitchFamily="34" charset="-122"/>
                 <a:cs typeface="Calibri" pitchFamily="34" charset="-120"/>
               </a:rPr>
-              <a:t>24</a:t>
+              <a:t>31</a:t>
             </a:r>
             <a:endParaRPr lang="en-US" sz="550" dirty="0"/>
           </a:p>
@@ -9110,13 +9758,13 @@
       </p:sp>
       <p:sp>
         <p:nvSpPr>
-          <p:cNvPr id="74" name="Shape 72"/>
-          <p:cNvSpPr/>
-          <p:nvPr/>
-        </p:nvSpPr>
-        <p:spPr>
-          <a:xfrm>
-            <a:off x="7744699" y="1965960"/>
+          <p:cNvPr id="92" name="Shape 90"/>
+          <p:cNvSpPr/>
+          <p:nvPr/>
+        </p:nvSpPr>
+        <p:spPr>
+          <a:xfrm>
+            <a:off x="9320510" y="1965960"/>
             <a:ext cx="0" cy="2194560"/>
           </a:xfrm>
           <a:prstGeom prst="line">
@@ -9133,14 +9781,14 @@
       </p:sp>
       <p:sp>
         <p:nvSpPr>
-          <p:cNvPr id="75" name="Shape 73"/>
-          <p:cNvSpPr/>
-          <p:nvPr/>
-        </p:nvSpPr>
-        <p:spPr>
-          <a:xfrm>
-            <a:off x="7914751" y="1664208"/>
-            <a:ext cx="170052" cy="301752"/>
+          <p:cNvPr id="93" name="Shape 91"/>
+          <p:cNvSpPr/>
+          <p:nvPr/>
+        </p:nvSpPr>
+        <p:spPr>
+          <a:xfrm>
+            <a:off x="9513235" y="1664208"/>
+            <a:ext cx="192725" cy="301752"/>
           </a:xfrm>
           <a:prstGeom prst="rect">
             <a:avLst/>
@@ -9158,14 +9806,14 @@
       </p:sp>
       <p:sp>
         <p:nvSpPr>
-          <p:cNvPr id="76" name="Text 74"/>
-          <p:cNvSpPr/>
-          <p:nvPr/>
-        </p:nvSpPr>
-        <p:spPr>
-          <a:xfrm>
-            <a:off x="7914751" y="1664208"/>
-            <a:ext cx="170052" cy="137160"/>
+          <p:cNvPr id="94" name="Text 92"/>
+          <p:cNvSpPr/>
+          <p:nvPr/>
+        </p:nvSpPr>
+        <p:spPr>
+          <a:xfrm>
+            <a:off x="9513235" y="1664208"/>
+            <a:ext cx="192725" cy="137160"/>
           </a:xfrm>
           <a:prstGeom prst="rect">
             <a:avLst/>
@@ -9199,14 +9847,14 @@
       </p:sp>
       <p:sp>
         <p:nvSpPr>
-          <p:cNvPr id="77" name="Text 75"/>
-          <p:cNvSpPr/>
-          <p:nvPr/>
-        </p:nvSpPr>
-        <p:spPr>
-          <a:xfrm>
-            <a:off x="7914751" y="1801368"/>
-            <a:ext cx="170052" cy="164592"/>
+          <p:cNvPr id="95" name="Text 93"/>
+          <p:cNvSpPr/>
+          <p:nvPr/>
+        </p:nvSpPr>
+        <p:spPr>
+          <a:xfrm>
+            <a:off x="9513235" y="1801368"/>
+            <a:ext cx="192725" cy="164592"/>
           </a:xfrm>
           <a:prstGeom prst="rect">
             <a:avLst/>
@@ -9232,7 +9880,7 @@
                 <a:ea typeface="Calibri" pitchFamily="34" charset="-122"/>
                 <a:cs typeface="Calibri" pitchFamily="34" charset="-120"/>
               </a:rPr>
-              <a:t>25</a:t>
+              <a:t>1</a:t>
             </a:r>
             <a:endParaRPr lang="en-US" sz="550" dirty="0"/>
           </a:p>
@@ -9240,14 +9888,14 @@
       </p:sp>
       <p:sp>
         <p:nvSpPr>
-          <p:cNvPr id="78" name="Shape 76"/>
-          <p:cNvSpPr/>
-          <p:nvPr/>
-        </p:nvSpPr>
-        <p:spPr>
-          <a:xfrm>
-            <a:off x="8084802" y="1664208"/>
-            <a:ext cx="170052" cy="301752"/>
+          <p:cNvPr id="96" name="Shape 94"/>
+          <p:cNvSpPr/>
+          <p:nvPr/>
+        </p:nvSpPr>
+        <p:spPr>
+          <a:xfrm>
+            <a:off x="9705960" y="1664208"/>
+            <a:ext cx="192725" cy="301752"/>
           </a:xfrm>
           <a:prstGeom prst="rect">
             <a:avLst/>
@@ -9265,14 +9913,14 @@
       </p:sp>
       <p:sp>
         <p:nvSpPr>
-          <p:cNvPr id="79" name="Text 77"/>
-          <p:cNvSpPr/>
-          <p:nvPr/>
-        </p:nvSpPr>
-        <p:spPr>
-          <a:xfrm>
-            <a:off x="8084802" y="1664208"/>
-            <a:ext cx="170052" cy="137160"/>
+          <p:cNvPr id="97" name="Text 95"/>
+          <p:cNvSpPr/>
+          <p:nvPr/>
+        </p:nvSpPr>
+        <p:spPr>
+          <a:xfrm>
+            <a:off x="9705960" y="1664208"/>
+            <a:ext cx="192725" cy="137160"/>
           </a:xfrm>
           <a:prstGeom prst="rect">
             <a:avLst/>
@@ -9306,14 +9954,14 @@
       </p:sp>
       <p:sp>
         <p:nvSpPr>
-          <p:cNvPr id="80" name="Text 78"/>
-          <p:cNvSpPr/>
-          <p:nvPr/>
-        </p:nvSpPr>
-        <p:spPr>
-          <a:xfrm>
-            <a:off x="8084802" y="1801368"/>
-            <a:ext cx="170052" cy="164592"/>
+          <p:cNvPr id="98" name="Text 96"/>
+          <p:cNvSpPr/>
+          <p:nvPr/>
+        </p:nvSpPr>
+        <p:spPr>
+          <a:xfrm>
+            <a:off x="9705960" y="1801368"/>
+            <a:ext cx="192725" cy="164592"/>
           </a:xfrm>
           <a:prstGeom prst="rect">
             <a:avLst/>
@@ -9339,7 +9987,7 @@
                 <a:ea typeface="Calibri" pitchFamily="34" charset="-122"/>
                 <a:cs typeface="Calibri" pitchFamily="34" charset="-120"/>
               </a:rPr>
-              <a:t>26</a:t>
+              <a:t>2</a:t>
             </a:r>
             <a:endParaRPr lang="en-US" sz="550" dirty="0"/>
           </a:p>
@@ -9347,14 +9995,14 @@
       </p:sp>
       <p:sp>
         <p:nvSpPr>
-          <p:cNvPr id="81" name="Shape 79"/>
-          <p:cNvSpPr/>
-          <p:nvPr/>
-        </p:nvSpPr>
-        <p:spPr>
-          <a:xfrm>
-            <a:off x="8254854" y="1664208"/>
-            <a:ext cx="170052" cy="301752"/>
+          <p:cNvPr id="99" name="Shape 97"/>
+          <p:cNvSpPr/>
+          <p:nvPr/>
+        </p:nvSpPr>
+        <p:spPr>
+          <a:xfrm>
+            <a:off x="9898685" y="1664208"/>
+            <a:ext cx="192725" cy="301752"/>
           </a:xfrm>
           <a:prstGeom prst="rect">
             <a:avLst/>
@@ -9372,14 +10020,14 @@
       </p:sp>
       <p:sp>
         <p:nvSpPr>
-          <p:cNvPr id="82" name="Text 80"/>
-          <p:cNvSpPr/>
-          <p:nvPr/>
-        </p:nvSpPr>
-        <p:spPr>
-          <a:xfrm>
-            <a:off x="8254854" y="1664208"/>
-            <a:ext cx="170052" cy="137160"/>
+          <p:cNvPr id="100" name="Text 98"/>
+          <p:cNvSpPr/>
+          <p:nvPr/>
+        </p:nvSpPr>
+        <p:spPr>
+          <a:xfrm>
+            <a:off x="9898685" y="1664208"/>
+            <a:ext cx="192725" cy="137160"/>
           </a:xfrm>
           <a:prstGeom prst="rect">
             <a:avLst/>
@@ -9413,14 +10061,14 @@
       </p:sp>
       <p:sp>
         <p:nvSpPr>
-          <p:cNvPr id="83" name="Text 81"/>
-          <p:cNvSpPr/>
-          <p:nvPr/>
-        </p:nvSpPr>
-        <p:spPr>
-          <a:xfrm>
-            <a:off x="8254854" y="1801368"/>
-            <a:ext cx="170052" cy="164592"/>
+          <p:cNvPr id="101" name="Text 99"/>
+          <p:cNvSpPr/>
+          <p:nvPr/>
+        </p:nvSpPr>
+        <p:spPr>
+          <a:xfrm>
+            <a:off x="9898685" y="1801368"/>
+            <a:ext cx="192725" cy="164592"/>
           </a:xfrm>
           <a:prstGeom prst="rect">
             <a:avLst/>
@@ -9446,7 +10094,7 @@
                 <a:ea typeface="Calibri" pitchFamily="34" charset="-122"/>
                 <a:cs typeface="Calibri" pitchFamily="34" charset="-120"/>
               </a:rPr>
-              <a:t>27</a:t>
+              <a:t>3</a:t>
             </a:r>
             <a:endParaRPr lang="en-US" sz="550" dirty="0"/>
           </a:p>
@@ -9454,14 +10102,14 @@
       </p:sp>
       <p:sp>
         <p:nvSpPr>
-          <p:cNvPr id="84" name="Shape 82"/>
-          <p:cNvSpPr/>
-          <p:nvPr/>
-        </p:nvSpPr>
-        <p:spPr>
-          <a:xfrm>
-            <a:off x="8424905" y="1664208"/>
-            <a:ext cx="170052" cy="301752"/>
+          <p:cNvPr id="102" name="Shape 100"/>
+          <p:cNvSpPr/>
+          <p:nvPr/>
+        </p:nvSpPr>
+        <p:spPr>
+          <a:xfrm>
+            <a:off x="10091410" y="1664208"/>
+            <a:ext cx="192725" cy="301752"/>
           </a:xfrm>
           <a:prstGeom prst="rect">
             <a:avLst/>
@@ -9479,14 +10127,14 @@
       </p:sp>
       <p:sp>
         <p:nvSpPr>
-          <p:cNvPr id="85" name="Text 83"/>
-          <p:cNvSpPr/>
-          <p:nvPr/>
-        </p:nvSpPr>
-        <p:spPr>
-          <a:xfrm>
-            <a:off x="8424905" y="1664208"/>
-            <a:ext cx="170052" cy="137160"/>
+          <p:cNvPr id="103" name="Text 101"/>
+          <p:cNvSpPr/>
+          <p:nvPr/>
+        </p:nvSpPr>
+        <p:spPr>
+          <a:xfrm>
+            <a:off x="10091410" y="1664208"/>
+            <a:ext cx="192725" cy="137160"/>
           </a:xfrm>
           <a:prstGeom prst="rect">
             <a:avLst/>
@@ -9520,14 +10168,14 @@
       </p:sp>
       <p:sp>
         <p:nvSpPr>
-          <p:cNvPr id="86" name="Text 84"/>
-          <p:cNvSpPr/>
-          <p:nvPr/>
-        </p:nvSpPr>
-        <p:spPr>
-          <a:xfrm>
-            <a:off x="8424905" y="1801368"/>
-            <a:ext cx="170052" cy="164592"/>
+          <p:cNvPr id="104" name="Text 102"/>
+          <p:cNvSpPr/>
+          <p:nvPr/>
+        </p:nvSpPr>
+        <p:spPr>
+          <a:xfrm>
+            <a:off x="10091410" y="1801368"/>
+            <a:ext cx="192725" cy="164592"/>
           </a:xfrm>
           <a:prstGeom prst="rect">
             <a:avLst/>
@@ -9553,7 +10201,7 @@
                 <a:ea typeface="Calibri" pitchFamily="34" charset="-122"/>
                 <a:cs typeface="Calibri" pitchFamily="34" charset="-120"/>
               </a:rPr>
-              <a:t>28</a:t>
+              <a:t>4</a:t>
             </a:r>
             <a:endParaRPr lang="en-US" sz="550" dirty="0"/>
           </a:p>
@@ -9561,14 +10209,14 @@
       </p:sp>
       <p:sp>
         <p:nvSpPr>
-          <p:cNvPr id="87" name="Shape 85"/>
-          <p:cNvSpPr/>
-          <p:nvPr/>
-        </p:nvSpPr>
-        <p:spPr>
-          <a:xfrm>
-            <a:off x="8594957" y="1664208"/>
-            <a:ext cx="170052" cy="301752"/>
+          <p:cNvPr id="105" name="Shape 103"/>
+          <p:cNvSpPr/>
+          <p:nvPr/>
+        </p:nvSpPr>
+        <p:spPr>
+          <a:xfrm>
+            <a:off x="10284135" y="1664208"/>
+            <a:ext cx="192725" cy="301752"/>
           </a:xfrm>
           <a:prstGeom prst="rect">
             <a:avLst/>
@@ -9586,14 +10234,14 @@
       </p:sp>
       <p:sp>
         <p:nvSpPr>
-          <p:cNvPr id="88" name="Text 86"/>
-          <p:cNvSpPr/>
-          <p:nvPr/>
-        </p:nvSpPr>
-        <p:spPr>
-          <a:xfrm>
-            <a:off x="8594957" y="1664208"/>
-            <a:ext cx="170052" cy="137160"/>
+          <p:cNvPr id="106" name="Text 104"/>
+          <p:cNvSpPr/>
+          <p:nvPr/>
+        </p:nvSpPr>
+        <p:spPr>
+          <a:xfrm>
+            <a:off x="10284135" y="1664208"/>
+            <a:ext cx="192725" cy="137160"/>
           </a:xfrm>
           <a:prstGeom prst="rect">
             <a:avLst/>
@@ -9627,14 +10275,14 @@
       </p:sp>
       <p:sp>
         <p:nvSpPr>
-          <p:cNvPr id="89" name="Text 87"/>
-          <p:cNvSpPr/>
-          <p:nvPr/>
-        </p:nvSpPr>
-        <p:spPr>
-          <a:xfrm>
-            <a:off x="8594957" y="1801368"/>
-            <a:ext cx="170052" cy="164592"/>
+          <p:cNvPr id="107" name="Text 105"/>
+          <p:cNvSpPr/>
+          <p:nvPr/>
+        </p:nvSpPr>
+        <p:spPr>
+          <a:xfrm>
+            <a:off x="10284135" y="1801368"/>
+            <a:ext cx="192725" cy="164592"/>
           </a:xfrm>
           <a:prstGeom prst="rect">
             <a:avLst/>
@@ -9660,7 +10308,7 @@
                 <a:ea typeface="Calibri" pitchFamily="34" charset="-122"/>
                 <a:cs typeface="Calibri" pitchFamily="34" charset="-120"/>
               </a:rPr>
-              <a:t>29</a:t>
+              <a:t>5</a:t>
             </a:r>
             <a:endParaRPr lang="en-US" sz="550" dirty="0"/>
           </a:p>
@@ -9668,20 +10316,20 @@
       </p:sp>
       <p:sp>
         <p:nvSpPr>
-          <p:cNvPr id="90" name="Shape 88"/>
-          <p:cNvSpPr/>
-          <p:nvPr/>
-        </p:nvSpPr>
-        <p:spPr>
-          <a:xfrm>
-            <a:off x="8765008" y="1664208"/>
-            <a:ext cx="170052" cy="301752"/>
-          </a:xfrm>
-          <a:prstGeom prst="rect">
-            <a:avLst/>
-          </a:prstGeom>
-          <a:solidFill>
-            <a:srgbClr val="DBE3E6"/>
+          <p:cNvPr id="108" name="Shape 106"/>
+          <p:cNvSpPr/>
+          <p:nvPr/>
+        </p:nvSpPr>
+        <p:spPr>
+          <a:xfrm>
+            <a:off x="10476860" y="1664208"/>
+            <a:ext cx="192725" cy="301752"/>
+          </a:xfrm>
+          <a:prstGeom prst="rect">
+            <a:avLst/>
+          </a:prstGeom>
+          <a:solidFill>
+            <a:srgbClr val="F4F7F8"/>
           </a:solidFill>
           <a:ln w="6350">
             <a:solidFill>
@@ -9693,14 +10341,14 @@
       </p:sp>
       <p:sp>
         <p:nvSpPr>
-          <p:cNvPr id="91" name="Text 89"/>
-          <p:cNvSpPr/>
-          <p:nvPr/>
-        </p:nvSpPr>
-        <p:spPr>
-          <a:xfrm>
-            <a:off x="8765008" y="1664208"/>
-            <a:ext cx="170052" cy="137160"/>
+          <p:cNvPr id="109" name="Text 107"/>
+          <p:cNvSpPr/>
+          <p:nvPr/>
+        </p:nvSpPr>
+        <p:spPr>
+          <a:xfrm>
+            <a:off x="10476860" y="1664208"/>
+            <a:ext cx="192725" cy="137160"/>
           </a:xfrm>
           <a:prstGeom prst="rect">
             <a:avLst/>
@@ -9720,7 +10368,7 @@
             <a:r>
               <a:rPr lang="en-US" altLang="en-US" sz="500" b="1" dirty="0">
                 <a:solidFill>
-                  <a:srgbClr val="8A959C"/>
+                  <a:srgbClr val="5A6A73"/>
                 </a:solidFill>
                 <a:latin typeface="Calibri" pitchFamily="34" charset="0"/>
                 <a:ea typeface="Calibri" pitchFamily="34" charset="-122"/>
@@ -9734,14 +10382,14 @@
       </p:sp>
       <p:sp>
         <p:nvSpPr>
-          <p:cNvPr id="92" name="Text 90"/>
-          <p:cNvSpPr/>
-          <p:nvPr/>
-        </p:nvSpPr>
-        <p:spPr>
-          <a:xfrm>
-            <a:off x="8765008" y="1801368"/>
-            <a:ext cx="170052" cy="164592"/>
+          <p:cNvPr id="110" name="Text 108"/>
+          <p:cNvSpPr/>
+          <p:nvPr/>
+        </p:nvSpPr>
+        <p:spPr>
+          <a:xfrm>
+            <a:off x="10476860" y="1801368"/>
+            <a:ext cx="192725" cy="164592"/>
           </a:xfrm>
           <a:prstGeom prst="rect">
             <a:avLst/>
@@ -9761,13 +10409,13 @@
             <a:r>
               <a:rPr lang="en-US" altLang="en-US" sz="550" b="1" dirty="0">
                 <a:solidFill>
-                  <a:srgbClr val="8A959C"/>
-                </a:solidFill>
-                <a:latin typeface="Calibri" pitchFamily="34" charset="0"/>
-                <a:ea typeface="Calibri" pitchFamily="34" charset="-122"/>
-                <a:cs typeface="Calibri" pitchFamily="34" charset="-120"/>
-              </a:rPr>
-              <a:t>30</a:t>
+                  <a:srgbClr val="222222"/>
+                </a:solidFill>
+                <a:latin typeface="Calibri" pitchFamily="34" charset="0"/>
+                <a:ea typeface="Calibri" pitchFamily="34" charset="-122"/>
+                <a:cs typeface="Calibri" pitchFamily="34" charset="-120"/>
+              </a:rPr>
+              <a:t>6</a:t>
             </a:r>
             <a:endParaRPr lang="en-US" sz="550" dirty="0"/>
           </a:p>
@@ -9775,43 +10423,14 @@
       </p:sp>
       <p:sp>
         <p:nvSpPr>
-          <p:cNvPr id="93" name="Shape 91"/>
-          <p:cNvSpPr/>
-          <p:nvPr/>
-        </p:nvSpPr>
-        <p:spPr>
-          <a:xfrm>
-            <a:off x="8765008" y="1965960"/>
-            <a:ext cx="170052" cy="2194560"/>
-          </a:xfrm>
-          <a:prstGeom prst="rect">
-            <a:avLst/>
-          </a:prstGeom>
-          <a:solidFill>
-            <a:srgbClr val="000000">
-              <a:alpha val="6000"/>
-            </a:srgbClr>
-          </a:solidFill>
-          <a:ln w="12700">
-            <a:solidFill>
-              <a:srgbClr val="000000">
-                <a:alpha val="0"/>
-              </a:srgbClr>
-            </a:solidFill>
-            <a:prstDash val="solid"/>
-          </a:ln>
-        </p:spPr>
-      </p:sp>
-      <p:sp>
-        <p:nvSpPr>
-          <p:cNvPr id="94" name="Shape 92"/>
-          <p:cNvSpPr/>
-          <p:nvPr/>
-        </p:nvSpPr>
-        <p:spPr>
-          <a:xfrm>
-            <a:off x="8935060" y="1664208"/>
-            <a:ext cx="170052" cy="301752"/>
+          <p:cNvPr id="111" name="Shape 109"/>
+          <p:cNvSpPr/>
+          <p:nvPr/>
+        </p:nvSpPr>
+        <p:spPr>
+          <a:xfrm>
+            <a:off x="10669585" y="1664208"/>
+            <a:ext cx="192725" cy="301752"/>
           </a:xfrm>
           <a:prstGeom prst="rect">
             <a:avLst/>
@@ -9829,14 +10448,14 @@
       </p:sp>
       <p:sp>
         <p:nvSpPr>
-          <p:cNvPr id="95" name="Text 93"/>
-          <p:cNvSpPr/>
-          <p:nvPr/>
-        </p:nvSpPr>
-        <p:spPr>
-          <a:xfrm>
-            <a:off x="8935060" y="1664208"/>
-            <a:ext cx="170052" cy="137160"/>
+          <p:cNvPr id="112" name="Text 110"/>
+          <p:cNvSpPr/>
+          <p:nvPr/>
+        </p:nvSpPr>
+        <p:spPr>
+          <a:xfrm>
+            <a:off x="10669585" y="1664208"/>
+            <a:ext cx="192725" cy="137160"/>
           </a:xfrm>
           <a:prstGeom prst="rect">
             <a:avLst/>
@@ -9870,14 +10489,14 @@
       </p:sp>
       <p:sp>
         <p:nvSpPr>
-          <p:cNvPr id="96" name="Text 94"/>
-          <p:cNvSpPr/>
-          <p:nvPr/>
-        </p:nvSpPr>
-        <p:spPr>
-          <a:xfrm>
-            <a:off x="8935060" y="1801368"/>
-            <a:ext cx="170052" cy="164592"/>
+          <p:cNvPr id="113" name="Text 111"/>
+          <p:cNvSpPr/>
+          <p:nvPr/>
+        </p:nvSpPr>
+        <p:spPr>
+          <a:xfrm>
+            <a:off x="10669585" y="1801368"/>
+            <a:ext cx="192725" cy="164592"/>
           </a:xfrm>
           <a:prstGeom prst="rect">
             <a:avLst/>
@@ -9903,7 +10522,7 @@
                 <a:ea typeface="Calibri" pitchFamily="34" charset="-122"/>
                 <a:cs typeface="Calibri" pitchFamily="34" charset="-120"/>
               </a:rPr>
-              <a:t>31</a:t>
+              <a:t>7</a:t>
             </a:r>
             <a:endParaRPr lang="en-US" sz="550" dirty="0"/>
           </a:p>
@@ -9911,13 +10530,13 @@
       </p:sp>
       <p:sp>
         <p:nvSpPr>
-          <p:cNvPr id="97" name="Shape 95"/>
-          <p:cNvSpPr/>
-          <p:nvPr/>
-        </p:nvSpPr>
-        <p:spPr>
-          <a:xfrm>
-            <a:off x="8935060" y="1965960"/>
+          <p:cNvPr id="114" name="Shape 112"/>
+          <p:cNvSpPr/>
+          <p:nvPr/>
+        </p:nvSpPr>
+        <p:spPr>
+          <a:xfrm>
+            <a:off x="10669585" y="1965960"/>
             <a:ext cx="0" cy="2194560"/>
           </a:xfrm>
           <a:prstGeom prst="line">
@@ -9934,14 +10553,14 @@
       </p:sp>
       <p:sp>
         <p:nvSpPr>
-          <p:cNvPr id="98" name="Shape 96"/>
-          <p:cNvSpPr/>
-          <p:nvPr/>
-        </p:nvSpPr>
-        <p:spPr>
-          <a:xfrm>
-            <a:off x="9105111" y="1664208"/>
-            <a:ext cx="170052" cy="301752"/>
+          <p:cNvPr id="115" name="Shape 113"/>
+          <p:cNvSpPr/>
+          <p:nvPr/>
+        </p:nvSpPr>
+        <p:spPr>
+          <a:xfrm>
+            <a:off x="10862310" y="1664208"/>
+            <a:ext cx="192725" cy="301752"/>
           </a:xfrm>
           <a:prstGeom prst="rect">
             <a:avLst/>
@@ -9959,14 +10578,14 @@
       </p:sp>
       <p:sp>
         <p:nvSpPr>
-          <p:cNvPr id="99" name="Text 97"/>
-          <p:cNvSpPr/>
-          <p:nvPr/>
-        </p:nvSpPr>
-        <p:spPr>
-          <a:xfrm>
-            <a:off x="9105111" y="1664208"/>
-            <a:ext cx="170052" cy="137160"/>
+          <p:cNvPr id="116" name="Text 114"/>
+          <p:cNvSpPr/>
+          <p:nvPr/>
+        </p:nvSpPr>
+        <p:spPr>
+          <a:xfrm>
+            <a:off x="10862310" y="1664208"/>
+            <a:ext cx="192725" cy="137160"/>
           </a:xfrm>
           <a:prstGeom prst="rect">
             <a:avLst/>
@@ -10000,14 +10619,14 @@
       </p:sp>
       <p:sp>
         <p:nvSpPr>
-          <p:cNvPr id="100" name="Text 98"/>
-          <p:cNvSpPr/>
-          <p:nvPr/>
-        </p:nvSpPr>
-        <p:spPr>
-          <a:xfrm>
-            <a:off x="9105111" y="1801368"/>
-            <a:ext cx="170052" cy="164592"/>
+          <p:cNvPr id="117" name="Text 115"/>
+          <p:cNvSpPr/>
+          <p:nvPr/>
+        </p:nvSpPr>
+        <p:spPr>
+          <a:xfrm>
+            <a:off x="10862310" y="1801368"/>
+            <a:ext cx="192725" cy="164592"/>
           </a:xfrm>
           <a:prstGeom prst="rect">
             <a:avLst/>
@@ -10033,7 +10652,7 @@
                 <a:ea typeface="Calibri" pitchFamily="34" charset="-122"/>
                 <a:cs typeface="Calibri" pitchFamily="34" charset="-120"/>
               </a:rPr>
-              <a:t>1</a:t>
+              <a:t>8</a:t>
             </a:r>
             <a:endParaRPr lang="en-US" sz="550" dirty="0"/>
           </a:p>
@@ -10041,14 +10660,14 @@
       </p:sp>
       <p:sp>
         <p:nvSpPr>
-          <p:cNvPr id="101" name="Shape 99"/>
-          <p:cNvSpPr/>
-          <p:nvPr/>
-        </p:nvSpPr>
-        <p:spPr>
-          <a:xfrm>
-            <a:off x="9275163" y="1664208"/>
-            <a:ext cx="170052" cy="301752"/>
+          <p:cNvPr id="118" name="Shape 116"/>
+          <p:cNvSpPr/>
+          <p:nvPr/>
+        </p:nvSpPr>
+        <p:spPr>
+          <a:xfrm>
+            <a:off x="11055035" y="1664208"/>
+            <a:ext cx="192725" cy="301752"/>
           </a:xfrm>
           <a:prstGeom prst="rect">
             <a:avLst/>
@@ -10066,14 +10685,14 @@
       </p:sp>
       <p:sp>
         <p:nvSpPr>
-          <p:cNvPr id="102" name="Text 100"/>
-          <p:cNvSpPr/>
-          <p:nvPr/>
-        </p:nvSpPr>
-        <p:spPr>
-          <a:xfrm>
-            <a:off x="9275163" y="1664208"/>
-            <a:ext cx="170052" cy="137160"/>
+          <p:cNvPr id="119" name="Text 117"/>
+          <p:cNvSpPr/>
+          <p:nvPr/>
+        </p:nvSpPr>
+        <p:spPr>
+          <a:xfrm>
+            <a:off x="11055035" y="1664208"/>
+            <a:ext cx="192725" cy="137160"/>
           </a:xfrm>
           <a:prstGeom prst="rect">
             <a:avLst/>
@@ -10107,14 +10726,14 @@
       </p:sp>
       <p:sp>
         <p:nvSpPr>
-          <p:cNvPr id="103" name="Text 101"/>
-          <p:cNvSpPr/>
-          <p:nvPr/>
-        </p:nvSpPr>
-        <p:spPr>
-          <a:xfrm>
-            <a:off x="9275163" y="1801368"/>
-            <a:ext cx="170052" cy="164592"/>
+          <p:cNvPr id="120" name="Text 118"/>
+          <p:cNvSpPr/>
+          <p:nvPr/>
+        </p:nvSpPr>
+        <p:spPr>
+          <a:xfrm>
+            <a:off x="11055035" y="1801368"/>
+            <a:ext cx="192725" cy="164592"/>
           </a:xfrm>
           <a:prstGeom prst="rect">
             <a:avLst/>
@@ -10140,7 +10759,7 @@
                 <a:ea typeface="Calibri" pitchFamily="34" charset="-122"/>
                 <a:cs typeface="Calibri" pitchFamily="34" charset="-120"/>
               </a:rPr>
-              <a:t>2</a:t>
+              <a:t>9</a:t>
             </a:r>
             <a:endParaRPr lang="en-US" sz="550" dirty="0"/>
           </a:p>
@@ -10148,14 +10767,14 @@
       </p:sp>
       <p:sp>
         <p:nvSpPr>
-          <p:cNvPr id="104" name="Shape 102"/>
-          <p:cNvSpPr/>
-          <p:nvPr/>
-        </p:nvSpPr>
-        <p:spPr>
-          <a:xfrm>
-            <a:off x="9445214" y="1664208"/>
-            <a:ext cx="170052" cy="301752"/>
+          <p:cNvPr id="121" name="Shape 119"/>
+          <p:cNvSpPr/>
+          <p:nvPr/>
+        </p:nvSpPr>
+        <p:spPr>
+          <a:xfrm>
+            <a:off x="11247760" y="1664208"/>
+            <a:ext cx="192725" cy="301752"/>
           </a:xfrm>
           <a:prstGeom prst="rect">
             <a:avLst/>
@@ -10173,14 +10792,14 @@
       </p:sp>
       <p:sp>
         <p:nvSpPr>
-          <p:cNvPr id="105" name="Text 103"/>
-          <p:cNvSpPr/>
-          <p:nvPr/>
-        </p:nvSpPr>
-        <p:spPr>
-          <a:xfrm>
-            <a:off x="9445214" y="1664208"/>
-            <a:ext cx="170052" cy="137160"/>
+          <p:cNvPr id="122" name="Text 120"/>
+          <p:cNvSpPr/>
+          <p:nvPr/>
+        </p:nvSpPr>
+        <p:spPr>
+          <a:xfrm>
+            <a:off x="11247760" y="1664208"/>
+            <a:ext cx="192725" cy="137160"/>
           </a:xfrm>
           <a:prstGeom prst="rect">
             <a:avLst/>
@@ -10214,14 +10833,14 @@
       </p:sp>
       <p:sp>
         <p:nvSpPr>
-          <p:cNvPr id="106" name="Text 104"/>
-          <p:cNvSpPr/>
-          <p:nvPr/>
-        </p:nvSpPr>
-        <p:spPr>
-          <a:xfrm>
-            <a:off x="9445214" y="1801368"/>
-            <a:ext cx="170052" cy="164592"/>
+          <p:cNvPr id="123" name="Text 121"/>
+          <p:cNvSpPr/>
+          <p:nvPr/>
+        </p:nvSpPr>
+        <p:spPr>
+          <a:xfrm>
+            <a:off x="11247760" y="1801368"/>
+            <a:ext cx="192725" cy="164592"/>
           </a:xfrm>
           <a:prstGeom prst="rect">
             <a:avLst/>
@@ -10247,7 +10866,7 @@
                 <a:ea typeface="Calibri" pitchFamily="34" charset="-122"/>
                 <a:cs typeface="Calibri" pitchFamily="34" charset="-120"/>
               </a:rPr>
-              <a:t>3</a:t>
+              <a:t>10</a:t>
             </a:r>
             <a:endParaRPr lang="en-US" sz="550" dirty="0"/>
           </a:p>
@@ -10255,14 +10874,14 @@
       </p:sp>
       <p:sp>
         <p:nvSpPr>
-          <p:cNvPr id="107" name="Shape 105"/>
-          <p:cNvSpPr/>
-          <p:nvPr/>
-        </p:nvSpPr>
-        <p:spPr>
-          <a:xfrm>
-            <a:off x="9615266" y="1664208"/>
-            <a:ext cx="170052" cy="301752"/>
+          <p:cNvPr id="124" name="Shape 122"/>
+          <p:cNvSpPr/>
+          <p:nvPr/>
+        </p:nvSpPr>
+        <p:spPr>
+          <a:xfrm>
+            <a:off x="11440485" y="1664208"/>
+            <a:ext cx="192725" cy="301752"/>
           </a:xfrm>
           <a:prstGeom prst="rect">
             <a:avLst/>
@@ -10280,14 +10899,14 @@
       </p:sp>
       <p:sp>
         <p:nvSpPr>
-          <p:cNvPr id="108" name="Text 106"/>
-          <p:cNvSpPr/>
-          <p:nvPr/>
-        </p:nvSpPr>
-        <p:spPr>
-          <a:xfrm>
-            <a:off x="9615266" y="1664208"/>
-            <a:ext cx="170052" cy="137160"/>
+          <p:cNvPr id="125" name="Text 123"/>
+          <p:cNvSpPr/>
+          <p:nvPr/>
+        </p:nvSpPr>
+        <p:spPr>
+          <a:xfrm>
+            <a:off x="11440485" y="1664208"/>
+            <a:ext cx="192725" cy="137160"/>
           </a:xfrm>
           <a:prstGeom prst="rect">
             <a:avLst/>
@@ -10321,14 +10940,14 @@
       </p:sp>
       <p:sp>
         <p:nvSpPr>
-          <p:cNvPr id="109" name="Text 107"/>
-          <p:cNvSpPr/>
-          <p:nvPr/>
-        </p:nvSpPr>
-        <p:spPr>
-          <a:xfrm>
-            <a:off x="9615266" y="1801368"/>
-            <a:ext cx="170052" cy="164592"/>
+          <p:cNvPr id="126" name="Text 124"/>
+          <p:cNvSpPr/>
+          <p:nvPr/>
+        </p:nvSpPr>
+        <p:spPr>
+          <a:xfrm>
+            <a:off x="11440485" y="1801368"/>
+            <a:ext cx="192725" cy="164592"/>
           </a:xfrm>
           <a:prstGeom prst="rect">
             <a:avLst/>
@@ -10354,7 +10973,7 @@
                 <a:ea typeface="Calibri" pitchFamily="34" charset="-122"/>
                 <a:cs typeface="Calibri" pitchFamily="34" charset="-120"/>
               </a:rPr>
-              <a:t>4</a:t>
+              <a:t>11</a:t>
             </a:r>
             <a:endParaRPr lang="en-US" sz="550" dirty="0"/>
           </a:p>
@@ -10362,14 +10981,14 @@
       </p:sp>
       <p:sp>
         <p:nvSpPr>
-          <p:cNvPr id="110" name="Shape 108"/>
-          <p:cNvSpPr/>
-          <p:nvPr/>
-        </p:nvSpPr>
-        <p:spPr>
-          <a:xfrm>
-            <a:off x="9785317" y="1664208"/>
-            <a:ext cx="170052" cy="301752"/>
+          <p:cNvPr id="127" name="Shape 125"/>
+          <p:cNvSpPr/>
+          <p:nvPr/>
+        </p:nvSpPr>
+        <p:spPr>
+          <a:xfrm>
+            <a:off x="11633210" y="1664208"/>
+            <a:ext cx="192725" cy="301752"/>
           </a:xfrm>
           <a:prstGeom prst="rect">
             <a:avLst/>
@@ -10387,14 +11006,14 @@
       </p:sp>
       <p:sp>
         <p:nvSpPr>
-          <p:cNvPr id="111" name="Text 109"/>
-          <p:cNvSpPr/>
-          <p:nvPr/>
-        </p:nvSpPr>
-        <p:spPr>
-          <a:xfrm>
-            <a:off x="9785317" y="1664208"/>
-            <a:ext cx="170052" cy="137160"/>
+          <p:cNvPr id="128" name="Text 126"/>
+          <p:cNvSpPr/>
+          <p:nvPr/>
+        </p:nvSpPr>
+        <p:spPr>
+          <a:xfrm>
+            <a:off x="11633210" y="1664208"/>
+            <a:ext cx="192725" cy="137160"/>
           </a:xfrm>
           <a:prstGeom prst="rect">
             <a:avLst/>
@@ -10428,14 +11047,14 @@
       </p:sp>
       <p:sp>
         <p:nvSpPr>
-          <p:cNvPr id="112" name="Text 110"/>
-          <p:cNvSpPr/>
-          <p:nvPr/>
-        </p:nvSpPr>
-        <p:spPr>
-          <a:xfrm>
-            <a:off x="9785317" y="1801368"/>
-            <a:ext cx="170052" cy="164592"/>
+          <p:cNvPr id="129" name="Text 127"/>
+          <p:cNvSpPr/>
+          <p:nvPr/>
+        </p:nvSpPr>
+        <p:spPr>
+          <a:xfrm>
+            <a:off x="11633210" y="1801368"/>
+            <a:ext cx="192725" cy="164592"/>
           </a:xfrm>
           <a:prstGeom prst="rect">
             <a:avLst/>
@@ -10461,7 +11080,7 @@
                 <a:ea typeface="Calibri" pitchFamily="34" charset="-122"/>
                 <a:cs typeface="Calibri" pitchFamily="34" charset="-120"/>
               </a:rPr>
-              <a:t>5</a:t>
+              <a:t>12</a:t>
             </a:r>
             <a:endParaRPr lang="en-US" sz="550" dirty="0"/>
           </a:p>
@@ -10469,1288 +11088,7 @@
       </p:sp>
       <p:sp>
         <p:nvSpPr>
-          <p:cNvPr id="113" name="Shape 111"/>
-          <p:cNvSpPr/>
-          <p:nvPr/>
-        </p:nvSpPr>
-        <p:spPr>
-          <a:xfrm>
-            <a:off x="9955369" y="1664208"/>
-            <a:ext cx="170052" cy="301752"/>
-          </a:xfrm>
-          <a:prstGeom prst="rect">
-            <a:avLst/>
-          </a:prstGeom>
-          <a:solidFill>
-            <a:srgbClr val="DBE3E6"/>
-          </a:solidFill>
-          <a:ln w="6350">
-            <a:solidFill>
-              <a:srgbClr val="FFFFFF"/>
-            </a:solidFill>
-            <a:prstDash val="solid"/>
-          </a:ln>
-        </p:spPr>
-      </p:sp>
-      <p:sp>
-        <p:nvSpPr>
-          <p:cNvPr id="114" name="Text 112"/>
-          <p:cNvSpPr/>
-          <p:nvPr/>
-        </p:nvSpPr>
-        <p:spPr>
-          <a:xfrm>
-            <a:off x="9955369" y="1664208"/>
-            <a:ext cx="170052" cy="137160"/>
-          </a:xfrm>
-          <a:prstGeom prst="rect">
-            <a:avLst/>
-          </a:prstGeom>
-          <a:noFill/>
-          <a:ln/>
-        </p:spPr>
-        <p:txBody>
-          <a:bodyPr wrap="square" lIns="0" tIns="0" rIns="0" bIns="0" rtlCol="0" anchor="ctr">
-            <a:normAutofit/>
-          </a:bodyPr>
-          <a:lstStyle/>
-          <a:p>
-            <a:pPr algn="ctr" indent="0" marL="0">
-              <a:buNone/>
-            </a:pPr>
-            <a:r>
-              <a:rPr lang="en-US" altLang="en-US" sz="500" b="1" dirty="0">
-                <a:solidFill>
-                  <a:srgbClr val="8A959C"/>
-                </a:solidFill>
-                <a:latin typeface="Calibri" pitchFamily="34" charset="0"/>
-                <a:ea typeface="Calibri" pitchFamily="34" charset="-122"/>
-                <a:cs typeface="Calibri" pitchFamily="34" charset="-120"/>
-              </a:rPr>
-              <a:t>F</a:t>
-            </a:r>
-            <a:endParaRPr lang="en-US" sz="500" dirty="0"/>
-          </a:p>
-        </p:txBody>
-      </p:sp>
-      <p:sp>
-        <p:nvSpPr>
-          <p:cNvPr id="115" name="Text 113"/>
-          <p:cNvSpPr/>
-          <p:nvPr/>
-        </p:nvSpPr>
-        <p:spPr>
-          <a:xfrm>
-            <a:off x="9955369" y="1801368"/>
-            <a:ext cx="170052" cy="164592"/>
-          </a:xfrm>
-          <a:prstGeom prst="rect">
-            <a:avLst/>
-          </a:prstGeom>
-          <a:noFill/>
-          <a:ln/>
-        </p:spPr>
-        <p:txBody>
-          <a:bodyPr wrap="square" lIns="0" tIns="0" rIns="0" bIns="0" rtlCol="0" anchor="ctr">
-            <a:normAutofit/>
-          </a:bodyPr>
-          <a:lstStyle/>
-          <a:p>
-            <a:pPr algn="ctr" indent="0" marL="0">
-              <a:buNone/>
-            </a:pPr>
-            <a:r>
-              <a:rPr lang="en-US" altLang="en-US" sz="550" b="1" dirty="0">
-                <a:solidFill>
-                  <a:srgbClr val="8A959C"/>
-                </a:solidFill>
-                <a:latin typeface="Calibri" pitchFamily="34" charset="0"/>
-                <a:ea typeface="Calibri" pitchFamily="34" charset="-122"/>
-                <a:cs typeface="Calibri" pitchFamily="34" charset="-120"/>
-              </a:rPr>
-              <a:t>6</a:t>
-            </a:r>
-            <a:endParaRPr lang="en-US" sz="550" dirty="0"/>
-          </a:p>
-        </p:txBody>
-      </p:sp>
-      <p:sp>
-        <p:nvSpPr>
-          <p:cNvPr id="116" name="Shape 114"/>
-          <p:cNvSpPr/>
-          <p:nvPr/>
-        </p:nvSpPr>
-        <p:spPr>
-          <a:xfrm>
-            <a:off x="9955369" y="1965960"/>
-            <a:ext cx="170052" cy="2194560"/>
-          </a:xfrm>
-          <a:prstGeom prst="rect">
-            <a:avLst/>
-          </a:prstGeom>
-          <a:solidFill>
-            <a:srgbClr val="000000">
-              <a:alpha val="6000"/>
-            </a:srgbClr>
-          </a:solidFill>
-          <a:ln w="12700">
-            <a:solidFill>
-              <a:srgbClr val="000000">
-                <a:alpha val="0"/>
-              </a:srgbClr>
-            </a:solidFill>
-            <a:prstDash val="solid"/>
-          </a:ln>
-        </p:spPr>
-      </p:sp>
-      <p:sp>
-        <p:nvSpPr>
-          <p:cNvPr id="117" name="Shape 115"/>
-          <p:cNvSpPr/>
-          <p:nvPr/>
-        </p:nvSpPr>
-        <p:spPr>
-          <a:xfrm>
-            <a:off x="10125420" y="1664208"/>
-            <a:ext cx="170052" cy="301752"/>
-          </a:xfrm>
-          <a:prstGeom prst="rect">
-            <a:avLst/>
-          </a:prstGeom>
-          <a:solidFill>
-            <a:srgbClr val="F4F7F8"/>
-          </a:solidFill>
-          <a:ln w="6350">
-            <a:solidFill>
-              <a:srgbClr val="FFFFFF"/>
-            </a:solidFill>
-            <a:prstDash val="solid"/>
-          </a:ln>
-        </p:spPr>
-      </p:sp>
-      <p:sp>
-        <p:nvSpPr>
-          <p:cNvPr id="118" name="Text 116"/>
-          <p:cNvSpPr/>
-          <p:nvPr/>
-        </p:nvSpPr>
-        <p:spPr>
-          <a:xfrm>
-            <a:off x="10125420" y="1664208"/>
-            <a:ext cx="170052" cy="137160"/>
-          </a:xfrm>
-          <a:prstGeom prst="rect">
-            <a:avLst/>
-          </a:prstGeom>
-          <a:noFill/>
-          <a:ln/>
-        </p:spPr>
-        <p:txBody>
-          <a:bodyPr wrap="square" lIns="0" tIns="0" rIns="0" bIns="0" rtlCol="0" anchor="ctr">
-            <a:normAutofit/>
-          </a:bodyPr>
-          <a:lstStyle/>
-          <a:p>
-            <a:pPr algn="ctr" indent="0" marL="0">
-              <a:buNone/>
-            </a:pPr>
-            <a:r>
-              <a:rPr lang="en-US" altLang="en-US" sz="500" b="1" dirty="0">
-                <a:solidFill>
-                  <a:srgbClr val="5A6A73"/>
-                </a:solidFill>
-                <a:latin typeface="Calibri" pitchFamily="34" charset="0"/>
-                <a:ea typeface="Calibri" pitchFamily="34" charset="-122"/>
-                <a:cs typeface="Calibri" pitchFamily="34" charset="-120"/>
-              </a:rPr>
-              <a:t>S</a:t>
-            </a:r>
-            <a:endParaRPr lang="en-US" sz="500" dirty="0"/>
-          </a:p>
-        </p:txBody>
-      </p:sp>
-      <p:sp>
-        <p:nvSpPr>
-          <p:cNvPr id="119" name="Text 117"/>
-          <p:cNvSpPr/>
-          <p:nvPr/>
-        </p:nvSpPr>
-        <p:spPr>
-          <a:xfrm>
-            <a:off x="10125420" y="1801368"/>
-            <a:ext cx="170052" cy="164592"/>
-          </a:xfrm>
-          <a:prstGeom prst="rect">
-            <a:avLst/>
-          </a:prstGeom>
-          <a:noFill/>
-          <a:ln/>
-        </p:spPr>
-        <p:txBody>
-          <a:bodyPr wrap="square" lIns="0" tIns="0" rIns="0" bIns="0" rtlCol="0" anchor="ctr">
-            <a:normAutofit/>
-          </a:bodyPr>
-          <a:lstStyle/>
-          <a:p>
-            <a:pPr algn="ctr" indent="0" marL="0">
-              <a:buNone/>
-            </a:pPr>
-            <a:r>
-              <a:rPr lang="en-US" altLang="en-US" sz="550" b="1" dirty="0">
-                <a:solidFill>
-                  <a:srgbClr val="222222"/>
-                </a:solidFill>
-                <a:latin typeface="Calibri" pitchFamily="34" charset="0"/>
-                <a:ea typeface="Calibri" pitchFamily="34" charset="-122"/>
-                <a:cs typeface="Calibri" pitchFamily="34" charset="-120"/>
-              </a:rPr>
-              <a:t>7</a:t>
-            </a:r>
-            <a:endParaRPr lang="en-US" sz="550" dirty="0"/>
-          </a:p>
-        </p:txBody>
-      </p:sp>
-      <p:sp>
-        <p:nvSpPr>
-          <p:cNvPr id="120" name="Shape 118"/>
-          <p:cNvSpPr/>
-          <p:nvPr/>
-        </p:nvSpPr>
-        <p:spPr>
-          <a:xfrm>
-            <a:off x="10125420" y="1965960"/>
-            <a:ext cx="0" cy="2194560"/>
-          </a:xfrm>
-          <a:prstGeom prst="line">
-            <a:avLst/>
-          </a:prstGeom>
-          <a:noFill/>
-          <a:ln w="6350">
-            <a:solidFill>
-              <a:srgbClr val="9DB2BB"/>
-            </a:solidFill>
-            <a:prstDash val="solid"/>
-          </a:ln>
-        </p:spPr>
-      </p:sp>
-      <p:sp>
-        <p:nvSpPr>
-          <p:cNvPr id="121" name="Shape 119"/>
-          <p:cNvSpPr/>
-          <p:nvPr/>
-        </p:nvSpPr>
-        <p:spPr>
-          <a:xfrm>
-            <a:off x="10295472" y="1664208"/>
-            <a:ext cx="170052" cy="301752"/>
-          </a:xfrm>
-          <a:prstGeom prst="rect">
-            <a:avLst/>
-          </a:prstGeom>
-          <a:solidFill>
-            <a:srgbClr val="F4F7F8"/>
-          </a:solidFill>
-          <a:ln w="6350">
-            <a:solidFill>
-              <a:srgbClr val="FFFFFF"/>
-            </a:solidFill>
-            <a:prstDash val="solid"/>
-          </a:ln>
-        </p:spPr>
-      </p:sp>
-      <p:sp>
-        <p:nvSpPr>
-          <p:cNvPr id="122" name="Text 120"/>
-          <p:cNvSpPr/>
-          <p:nvPr/>
-        </p:nvSpPr>
-        <p:spPr>
-          <a:xfrm>
-            <a:off x="10295472" y="1664208"/>
-            <a:ext cx="170052" cy="137160"/>
-          </a:xfrm>
-          <a:prstGeom prst="rect">
-            <a:avLst/>
-          </a:prstGeom>
-          <a:noFill/>
-          <a:ln/>
-        </p:spPr>
-        <p:txBody>
-          <a:bodyPr wrap="square" lIns="0" tIns="0" rIns="0" bIns="0" rtlCol="0" anchor="ctr">
-            <a:normAutofit/>
-          </a:bodyPr>
-          <a:lstStyle/>
-          <a:p>
-            <a:pPr algn="ctr" indent="0" marL="0">
-              <a:buNone/>
-            </a:pPr>
-            <a:r>
-              <a:rPr lang="en-US" altLang="en-US" sz="500" b="1" dirty="0">
-                <a:solidFill>
-                  <a:srgbClr val="5A6A73"/>
-                </a:solidFill>
-                <a:latin typeface="Calibri" pitchFamily="34" charset="0"/>
-                <a:ea typeface="Calibri" pitchFamily="34" charset="-122"/>
-                <a:cs typeface="Calibri" pitchFamily="34" charset="-120"/>
-              </a:rPr>
-              <a:t>S</a:t>
-            </a:r>
-            <a:endParaRPr lang="en-US" sz="500" dirty="0"/>
-          </a:p>
-        </p:txBody>
-      </p:sp>
-      <p:sp>
-        <p:nvSpPr>
-          <p:cNvPr id="123" name="Text 121"/>
-          <p:cNvSpPr/>
-          <p:nvPr/>
-        </p:nvSpPr>
-        <p:spPr>
-          <a:xfrm>
-            <a:off x="10295472" y="1801368"/>
-            <a:ext cx="170052" cy="164592"/>
-          </a:xfrm>
-          <a:prstGeom prst="rect">
-            <a:avLst/>
-          </a:prstGeom>
-          <a:noFill/>
-          <a:ln/>
-        </p:spPr>
-        <p:txBody>
-          <a:bodyPr wrap="square" lIns="0" tIns="0" rIns="0" bIns="0" rtlCol="0" anchor="ctr">
-            <a:normAutofit/>
-          </a:bodyPr>
-          <a:lstStyle/>
-          <a:p>
-            <a:pPr algn="ctr" indent="0" marL="0">
-              <a:buNone/>
-            </a:pPr>
-            <a:r>
-              <a:rPr lang="en-US" altLang="en-US" sz="550" b="1" dirty="0">
-                <a:solidFill>
-                  <a:srgbClr val="222222"/>
-                </a:solidFill>
-                <a:latin typeface="Calibri" pitchFamily="34" charset="0"/>
-                <a:ea typeface="Calibri" pitchFamily="34" charset="-122"/>
-                <a:cs typeface="Calibri" pitchFamily="34" charset="-120"/>
-              </a:rPr>
-              <a:t>8</a:t>
-            </a:r>
-            <a:endParaRPr lang="en-US" sz="550" dirty="0"/>
-          </a:p>
-        </p:txBody>
-      </p:sp>
-      <p:sp>
-        <p:nvSpPr>
-          <p:cNvPr id="124" name="Shape 122"/>
-          <p:cNvSpPr/>
-          <p:nvPr/>
-        </p:nvSpPr>
-        <p:spPr>
-          <a:xfrm>
-            <a:off x="10465523" y="1664208"/>
-            <a:ext cx="170052" cy="301752"/>
-          </a:xfrm>
-          <a:prstGeom prst="rect">
-            <a:avLst/>
-          </a:prstGeom>
-          <a:solidFill>
-            <a:srgbClr val="F4F7F8"/>
-          </a:solidFill>
-          <a:ln w="6350">
-            <a:solidFill>
-              <a:srgbClr val="FFFFFF"/>
-            </a:solidFill>
-            <a:prstDash val="solid"/>
-          </a:ln>
-        </p:spPr>
-      </p:sp>
-      <p:sp>
-        <p:nvSpPr>
-          <p:cNvPr id="125" name="Text 123"/>
-          <p:cNvSpPr/>
-          <p:nvPr/>
-        </p:nvSpPr>
-        <p:spPr>
-          <a:xfrm>
-            <a:off x="10465523" y="1664208"/>
-            <a:ext cx="170052" cy="137160"/>
-          </a:xfrm>
-          <a:prstGeom prst="rect">
-            <a:avLst/>
-          </a:prstGeom>
-          <a:noFill/>
-          <a:ln/>
-        </p:spPr>
-        <p:txBody>
-          <a:bodyPr wrap="square" lIns="0" tIns="0" rIns="0" bIns="0" rtlCol="0" anchor="ctr">
-            <a:normAutofit/>
-          </a:bodyPr>
-          <a:lstStyle/>
-          <a:p>
-            <a:pPr algn="ctr" indent="0" marL="0">
-              <a:buNone/>
-            </a:pPr>
-            <a:r>
-              <a:rPr lang="en-US" altLang="en-US" sz="500" b="1" dirty="0">
-                <a:solidFill>
-                  <a:srgbClr val="5A6A73"/>
-                </a:solidFill>
-                <a:latin typeface="Calibri" pitchFamily="34" charset="0"/>
-                <a:ea typeface="Calibri" pitchFamily="34" charset="-122"/>
-                <a:cs typeface="Calibri" pitchFamily="34" charset="-120"/>
-              </a:rPr>
-              <a:t>M</a:t>
-            </a:r>
-            <a:endParaRPr lang="en-US" sz="500" dirty="0"/>
-          </a:p>
-        </p:txBody>
-      </p:sp>
-      <p:sp>
-        <p:nvSpPr>
-          <p:cNvPr id="126" name="Text 124"/>
-          <p:cNvSpPr/>
-          <p:nvPr/>
-        </p:nvSpPr>
-        <p:spPr>
-          <a:xfrm>
-            <a:off x="10465523" y="1801368"/>
-            <a:ext cx="170052" cy="164592"/>
-          </a:xfrm>
-          <a:prstGeom prst="rect">
-            <a:avLst/>
-          </a:prstGeom>
-          <a:noFill/>
-          <a:ln/>
-        </p:spPr>
-        <p:txBody>
-          <a:bodyPr wrap="square" lIns="0" tIns="0" rIns="0" bIns="0" rtlCol="0" anchor="ctr">
-            <a:normAutofit/>
-          </a:bodyPr>
-          <a:lstStyle/>
-          <a:p>
-            <a:pPr algn="ctr" indent="0" marL="0">
-              <a:buNone/>
-            </a:pPr>
-            <a:r>
-              <a:rPr lang="en-US" altLang="en-US" sz="550" b="1" dirty="0">
-                <a:solidFill>
-                  <a:srgbClr val="222222"/>
-                </a:solidFill>
-                <a:latin typeface="Calibri" pitchFamily="34" charset="0"/>
-                <a:ea typeface="Calibri" pitchFamily="34" charset="-122"/>
-                <a:cs typeface="Calibri" pitchFamily="34" charset="-120"/>
-              </a:rPr>
-              <a:t>9</a:t>
-            </a:r>
-            <a:endParaRPr lang="en-US" sz="550" dirty="0"/>
-          </a:p>
-        </p:txBody>
-      </p:sp>
-      <p:sp>
-        <p:nvSpPr>
-          <p:cNvPr id="127" name="Shape 125"/>
-          <p:cNvSpPr/>
-          <p:nvPr/>
-        </p:nvSpPr>
-        <p:spPr>
-          <a:xfrm>
-            <a:off x="10635575" y="1664208"/>
-            <a:ext cx="170052" cy="301752"/>
-          </a:xfrm>
-          <a:prstGeom prst="rect">
-            <a:avLst/>
-          </a:prstGeom>
-          <a:solidFill>
-            <a:srgbClr val="F4F7F8"/>
-          </a:solidFill>
-          <a:ln w="6350">
-            <a:solidFill>
-              <a:srgbClr val="FFFFFF"/>
-            </a:solidFill>
-            <a:prstDash val="solid"/>
-          </a:ln>
-        </p:spPr>
-      </p:sp>
-      <p:sp>
-        <p:nvSpPr>
-          <p:cNvPr id="128" name="Text 126"/>
-          <p:cNvSpPr/>
-          <p:nvPr/>
-        </p:nvSpPr>
-        <p:spPr>
-          <a:xfrm>
-            <a:off x="10635575" y="1664208"/>
-            <a:ext cx="170052" cy="137160"/>
-          </a:xfrm>
-          <a:prstGeom prst="rect">
-            <a:avLst/>
-          </a:prstGeom>
-          <a:noFill/>
-          <a:ln/>
-        </p:spPr>
-        <p:txBody>
-          <a:bodyPr wrap="square" lIns="0" tIns="0" rIns="0" bIns="0" rtlCol="0" anchor="ctr">
-            <a:normAutofit/>
-          </a:bodyPr>
-          <a:lstStyle/>
-          <a:p>
-            <a:pPr algn="ctr" indent="0" marL="0">
-              <a:buNone/>
-            </a:pPr>
-            <a:r>
-              <a:rPr lang="en-US" altLang="en-US" sz="500" b="1" dirty="0">
-                <a:solidFill>
-                  <a:srgbClr val="5A6A73"/>
-                </a:solidFill>
-                <a:latin typeface="Calibri" pitchFamily="34" charset="0"/>
-                <a:ea typeface="Calibri" pitchFamily="34" charset="-122"/>
-                <a:cs typeface="Calibri" pitchFamily="34" charset="-120"/>
-              </a:rPr>
-              <a:t>T</a:t>
-            </a:r>
-            <a:endParaRPr lang="en-US" sz="500" dirty="0"/>
-          </a:p>
-        </p:txBody>
-      </p:sp>
-      <p:sp>
-        <p:nvSpPr>
-          <p:cNvPr id="129" name="Text 127"/>
-          <p:cNvSpPr/>
-          <p:nvPr/>
-        </p:nvSpPr>
-        <p:spPr>
-          <a:xfrm>
-            <a:off x="10635575" y="1801368"/>
-            <a:ext cx="170052" cy="164592"/>
-          </a:xfrm>
-          <a:prstGeom prst="rect">
-            <a:avLst/>
-          </a:prstGeom>
-          <a:noFill/>
-          <a:ln/>
-        </p:spPr>
-        <p:txBody>
-          <a:bodyPr wrap="square" lIns="0" tIns="0" rIns="0" bIns="0" rtlCol="0" anchor="ctr">
-            <a:normAutofit/>
-          </a:bodyPr>
-          <a:lstStyle/>
-          <a:p>
-            <a:pPr algn="ctr" indent="0" marL="0">
-              <a:buNone/>
-            </a:pPr>
-            <a:r>
-              <a:rPr lang="en-US" altLang="en-US" sz="550" b="1" dirty="0">
-                <a:solidFill>
-                  <a:srgbClr val="222222"/>
-                </a:solidFill>
-                <a:latin typeface="Calibri" pitchFamily="34" charset="0"/>
-                <a:ea typeface="Calibri" pitchFamily="34" charset="-122"/>
-                <a:cs typeface="Calibri" pitchFamily="34" charset="-120"/>
-              </a:rPr>
-              <a:t>10</a:t>
-            </a:r>
-            <a:endParaRPr lang="en-US" sz="550" dirty="0"/>
-          </a:p>
-        </p:txBody>
-      </p:sp>
-      <p:sp>
-        <p:nvSpPr>
           <p:cNvPr id="130" name="Shape 128"/>
-          <p:cNvSpPr/>
-          <p:nvPr/>
-        </p:nvSpPr>
-        <p:spPr>
-          <a:xfrm>
-            <a:off x="10805626" y="1664208"/>
-            <a:ext cx="170052" cy="301752"/>
-          </a:xfrm>
-          <a:prstGeom prst="rect">
-            <a:avLst/>
-          </a:prstGeom>
-          <a:solidFill>
-            <a:srgbClr val="F4F7F8"/>
-          </a:solidFill>
-          <a:ln w="6350">
-            <a:solidFill>
-              <a:srgbClr val="FFFFFF"/>
-            </a:solidFill>
-            <a:prstDash val="solid"/>
-          </a:ln>
-        </p:spPr>
-      </p:sp>
-      <p:sp>
-        <p:nvSpPr>
-          <p:cNvPr id="131" name="Text 129"/>
-          <p:cNvSpPr/>
-          <p:nvPr/>
-        </p:nvSpPr>
-        <p:spPr>
-          <a:xfrm>
-            <a:off x="10805626" y="1664208"/>
-            <a:ext cx="170052" cy="137160"/>
-          </a:xfrm>
-          <a:prstGeom prst="rect">
-            <a:avLst/>
-          </a:prstGeom>
-          <a:noFill/>
-          <a:ln/>
-        </p:spPr>
-        <p:txBody>
-          <a:bodyPr wrap="square" lIns="0" tIns="0" rIns="0" bIns="0" rtlCol="0" anchor="ctr">
-            <a:normAutofit/>
-          </a:bodyPr>
-          <a:lstStyle/>
-          <a:p>
-            <a:pPr algn="ctr" indent="0" marL="0">
-              <a:buNone/>
-            </a:pPr>
-            <a:r>
-              <a:rPr lang="en-US" altLang="en-US" sz="500" b="1" dirty="0">
-                <a:solidFill>
-                  <a:srgbClr val="5A6A73"/>
-                </a:solidFill>
-                <a:latin typeface="Calibri" pitchFamily="34" charset="0"/>
-                <a:ea typeface="Calibri" pitchFamily="34" charset="-122"/>
-                <a:cs typeface="Calibri" pitchFamily="34" charset="-120"/>
-              </a:rPr>
-              <a:t>W</a:t>
-            </a:r>
-            <a:endParaRPr lang="en-US" sz="500" dirty="0"/>
-          </a:p>
-        </p:txBody>
-      </p:sp>
-      <p:sp>
-        <p:nvSpPr>
-          <p:cNvPr id="132" name="Text 130"/>
-          <p:cNvSpPr/>
-          <p:nvPr/>
-        </p:nvSpPr>
-        <p:spPr>
-          <a:xfrm>
-            <a:off x="10805626" y="1801368"/>
-            <a:ext cx="170052" cy="164592"/>
-          </a:xfrm>
-          <a:prstGeom prst="rect">
-            <a:avLst/>
-          </a:prstGeom>
-          <a:noFill/>
-          <a:ln/>
-        </p:spPr>
-        <p:txBody>
-          <a:bodyPr wrap="square" lIns="0" tIns="0" rIns="0" bIns="0" rtlCol="0" anchor="ctr">
-            <a:normAutofit/>
-          </a:bodyPr>
-          <a:lstStyle/>
-          <a:p>
-            <a:pPr algn="ctr" indent="0" marL="0">
-              <a:buNone/>
-            </a:pPr>
-            <a:r>
-              <a:rPr lang="en-US" altLang="en-US" sz="550" b="1" dirty="0">
-                <a:solidFill>
-                  <a:srgbClr val="222222"/>
-                </a:solidFill>
-                <a:latin typeface="Calibri" pitchFamily="34" charset="0"/>
-                <a:ea typeface="Calibri" pitchFamily="34" charset="-122"/>
-                <a:cs typeface="Calibri" pitchFamily="34" charset="-120"/>
-              </a:rPr>
-              <a:t>11</a:t>
-            </a:r>
-            <a:endParaRPr lang="en-US" sz="550" dirty="0"/>
-          </a:p>
-        </p:txBody>
-      </p:sp>
-      <p:sp>
-        <p:nvSpPr>
-          <p:cNvPr id="133" name="Shape 131"/>
-          <p:cNvSpPr/>
-          <p:nvPr/>
-        </p:nvSpPr>
-        <p:spPr>
-          <a:xfrm>
-            <a:off x="10975678" y="1664208"/>
-            <a:ext cx="170052" cy="301752"/>
-          </a:xfrm>
-          <a:prstGeom prst="rect">
-            <a:avLst/>
-          </a:prstGeom>
-          <a:solidFill>
-            <a:srgbClr val="F4F7F8"/>
-          </a:solidFill>
-          <a:ln w="6350">
-            <a:solidFill>
-              <a:srgbClr val="FFFFFF"/>
-            </a:solidFill>
-            <a:prstDash val="solid"/>
-          </a:ln>
-        </p:spPr>
-      </p:sp>
-      <p:sp>
-        <p:nvSpPr>
-          <p:cNvPr id="134" name="Text 132"/>
-          <p:cNvSpPr/>
-          <p:nvPr/>
-        </p:nvSpPr>
-        <p:spPr>
-          <a:xfrm>
-            <a:off x="10975678" y="1664208"/>
-            <a:ext cx="170052" cy="137160"/>
-          </a:xfrm>
-          <a:prstGeom prst="rect">
-            <a:avLst/>
-          </a:prstGeom>
-          <a:noFill/>
-          <a:ln/>
-        </p:spPr>
-        <p:txBody>
-          <a:bodyPr wrap="square" lIns="0" tIns="0" rIns="0" bIns="0" rtlCol="0" anchor="ctr">
-            <a:normAutofit/>
-          </a:bodyPr>
-          <a:lstStyle/>
-          <a:p>
-            <a:pPr algn="ctr" indent="0" marL="0">
-              <a:buNone/>
-            </a:pPr>
-            <a:r>
-              <a:rPr lang="en-US" altLang="en-US" sz="500" b="1" dirty="0">
-                <a:solidFill>
-                  <a:srgbClr val="5A6A73"/>
-                </a:solidFill>
-                <a:latin typeface="Calibri" pitchFamily="34" charset="0"/>
-                <a:ea typeface="Calibri" pitchFamily="34" charset="-122"/>
-                <a:cs typeface="Calibri" pitchFamily="34" charset="-120"/>
-              </a:rPr>
-              <a:t>T</a:t>
-            </a:r>
-            <a:endParaRPr lang="en-US" sz="500" dirty="0"/>
-          </a:p>
-        </p:txBody>
-      </p:sp>
-      <p:sp>
-        <p:nvSpPr>
-          <p:cNvPr id="135" name="Text 133"/>
-          <p:cNvSpPr/>
-          <p:nvPr/>
-        </p:nvSpPr>
-        <p:spPr>
-          <a:xfrm>
-            <a:off x="10975678" y="1801368"/>
-            <a:ext cx="170052" cy="164592"/>
-          </a:xfrm>
-          <a:prstGeom prst="rect">
-            <a:avLst/>
-          </a:prstGeom>
-          <a:noFill/>
-          <a:ln/>
-        </p:spPr>
-        <p:txBody>
-          <a:bodyPr wrap="square" lIns="0" tIns="0" rIns="0" bIns="0" rtlCol="0" anchor="ctr">
-            <a:normAutofit/>
-          </a:bodyPr>
-          <a:lstStyle/>
-          <a:p>
-            <a:pPr algn="ctr" indent="0" marL="0">
-              <a:buNone/>
-            </a:pPr>
-            <a:r>
-              <a:rPr lang="en-US" altLang="en-US" sz="550" b="1" dirty="0">
-                <a:solidFill>
-                  <a:srgbClr val="222222"/>
-                </a:solidFill>
-                <a:latin typeface="Calibri" pitchFamily="34" charset="0"/>
-                <a:ea typeface="Calibri" pitchFamily="34" charset="-122"/>
-                <a:cs typeface="Calibri" pitchFamily="34" charset="-120"/>
-              </a:rPr>
-              <a:t>12</a:t>
-            </a:r>
-            <a:endParaRPr lang="en-US" sz="550" dirty="0"/>
-          </a:p>
-        </p:txBody>
-      </p:sp>
-      <p:sp>
-        <p:nvSpPr>
-          <p:cNvPr id="136" name="Shape 134"/>
-          <p:cNvSpPr/>
-          <p:nvPr/>
-        </p:nvSpPr>
-        <p:spPr>
-          <a:xfrm>
-            <a:off x="11145729" y="1664208"/>
-            <a:ext cx="170052" cy="301752"/>
-          </a:xfrm>
-          <a:prstGeom prst="rect">
-            <a:avLst/>
-          </a:prstGeom>
-          <a:solidFill>
-            <a:srgbClr val="DBE3E6"/>
-          </a:solidFill>
-          <a:ln w="6350">
-            <a:solidFill>
-              <a:srgbClr val="FFFFFF"/>
-            </a:solidFill>
-            <a:prstDash val="solid"/>
-          </a:ln>
-        </p:spPr>
-      </p:sp>
-      <p:sp>
-        <p:nvSpPr>
-          <p:cNvPr id="137" name="Text 135"/>
-          <p:cNvSpPr/>
-          <p:nvPr/>
-        </p:nvSpPr>
-        <p:spPr>
-          <a:xfrm>
-            <a:off x="11145729" y="1664208"/>
-            <a:ext cx="170052" cy="137160"/>
-          </a:xfrm>
-          <a:prstGeom prst="rect">
-            <a:avLst/>
-          </a:prstGeom>
-          <a:noFill/>
-          <a:ln/>
-        </p:spPr>
-        <p:txBody>
-          <a:bodyPr wrap="square" lIns="0" tIns="0" rIns="0" bIns="0" rtlCol="0" anchor="ctr">
-            <a:normAutofit/>
-          </a:bodyPr>
-          <a:lstStyle/>
-          <a:p>
-            <a:pPr algn="ctr" indent="0" marL="0">
-              <a:buNone/>
-            </a:pPr>
-            <a:r>
-              <a:rPr lang="en-US" altLang="en-US" sz="500" b="1" dirty="0">
-                <a:solidFill>
-                  <a:srgbClr val="8A959C"/>
-                </a:solidFill>
-                <a:latin typeface="Calibri" pitchFamily="34" charset="0"/>
-                <a:ea typeface="Calibri" pitchFamily="34" charset="-122"/>
-                <a:cs typeface="Calibri" pitchFamily="34" charset="-120"/>
-              </a:rPr>
-              <a:t>F</a:t>
-            </a:r>
-            <a:endParaRPr lang="en-US" sz="500" dirty="0"/>
-          </a:p>
-        </p:txBody>
-      </p:sp>
-      <p:sp>
-        <p:nvSpPr>
-          <p:cNvPr id="138" name="Text 136"/>
-          <p:cNvSpPr/>
-          <p:nvPr/>
-        </p:nvSpPr>
-        <p:spPr>
-          <a:xfrm>
-            <a:off x="11145729" y="1801368"/>
-            <a:ext cx="170052" cy="164592"/>
-          </a:xfrm>
-          <a:prstGeom prst="rect">
-            <a:avLst/>
-          </a:prstGeom>
-          <a:noFill/>
-          <a:ln/>
-        </p:spPr>
-        <p:txBody>
-          <a:bodyPr wrap="square" lIns="0" tIns="0" rIns="0" bIns="0" rtlCol="0" anchor="ctr">
-            <a:normAutofit/>
-          </a:bodyPr>
-          <a:lstStyle/>
-          <a:p>
-            <a:pPr algn="ctr" indent="0" marL="0">
-              <a:buNone/>
-            </a:pPr>
-            <a:r>
-              <a:rPr lang="en-US" altLang="en-US" sz="550" b="1" dirty="0">
-                <a:solidFill>
-                  <a:srgbClr val="8A959C"/>
-                </a:solidFill>
-                <a:latin typeface="Calibri" pitchFamily="34" charset="0"/>
-                <a:ea typeface="Calibri" pitchFamily="34" charset="-122"/>
-                <a:cs typeface="Calibri" pitchFamily="34" charset="-120"/>
-              </a:rPr>
-              <a:t>13</a:t>
-            </a:r>
-            <a:endParaRPr lang="en-US" sz="550" dirty="0"/>
-          </a:p>
-        </p:txBody>
-      </p:sp>
-      <p:sp>
-        <p:nvSpPr>
-          <p:cNvPr id="139" name="Shape 137"/>
-          <p:cNvSpPr/>
-          <p:nvPr/>
-        </p:nvSpPr>
-        <p:spPr>
-          <a:xfrm>
-            <a:off x="11145729" y="1965960"/>
-            <a:ext cx="170052" cy="2194560"/>
-          </a:xfrm>
-          <a:prstGeom prst="rect">
-            <a:avLst/>
-          </a:prstGeom>
-          <a:solidFill>
-            <a:srgbClr val="000000">
-              <a:alpha val="6000"/>
-            </a:srgbClr>
-          </a:solidFill>
-          <a:ln w="12700">
-            <a:solidFill>
-              <a:srgbClr val="000000">
-                <a:alpha val="0"/>
-              </a:srgbClr>
-            </a:solidFill>
-            <a:prstDash val="solid"/>
-          </a:ln>
-        </p:spPr>
-      </p:sp>
-      <p:sp>
-        <p:nvSpPr>
-          <p:cNvPr id="140" name="Shape 138"/>
-          <p:cNvSpPr/>
-          <p:nvPr/>
-        </p:nvSpPr>
-        <p:spPr>
-          <a:xfrm>
-            <a:off x="11315781" y="1664208"/>
-            <a:ext cx="170052" cy="301752"/>
-          </a:xfrm>
-          <a:prstGeom prst="rect">
-            <a:avLst/>
-          </a:prstGeom>
-          <a:solidFill>
-            <a:srgbClr val="F4F7F8"/>
-          </a:solidFill>
-          <a:ln w="6350">
-            <a:solidFill>
-              <a:srgbClr val="FFFFFF"/>
-            </a:solidFill>
-            <a:prstDash val="solid"/>
-          </a:ln>
-        </p:spPr>
-      </p:sp>
-      <p:sp>
-        <p:nvSpPr>
-          <p:cNvPr id="141" name="Text 139"/>
-          <p:cNvSpPr/>
-          <p:nvPr/>
-        </p:nvSpPr>
-        <p:spPr>
-          <a:xfrm>
-            <a:off x="11315781" y="1664208"/>
-            <a:ext cx="170052" cy="137160"/>
-          </a:xfrm>
-          <a:prstGeom prst="rect">
-            <a:avLst/>
-          </a:prstGeom>
-          <a:noFill/>
-          <a:ln/>
-        </p:spPr>
-        <p:txBody>
-          <a:bodyPr wrap="square" lIns="0" tIns="0" rIns="0" bIns="0" rtlCol="0" anchor="ctr">
-            <a:normAutofit/>
-          </a:bodyPr>
-          <a:lstStyle/>
-          <a:p>
-            <a:pPr algn="ctr" indent="0" marL="0">
-              <a:buNone/>
-            </a:pPr>
-            <a:r>
-              <a:rPr lang="en-US" altLang="en-US" sz="500" b="1" dirty="0">
-                <a:solidFill>
-                  <a:srgbClr val="5A6A73"/>
-                </a:solidFill>
-                <a:latin typeface="Calibri" pitchFamily="34" charset="0"/>
-                <a:ea typeface="Calibri" pitchFamily="34" charset="-122"/>
-                <a:cs typeface="Calibri" pitchFamily="34" charset="-120"/>
-              </a:rPr>
-              <a:t>S</a:t>
-            </a:r>
-            <a:endParaRPr lang="en-US" sz="500" dirty="0"/>
-          </a:p>
-        </p:txBody>
-      </p:sp>
-      <p:sp>
-        <p:nvSpPr>
-          <p:cNvPr id="142" name="Text 140"/>
-          <p:cNvSpPr/>
-          <p:nvPr/>
-        </p:nvSpPr>
-        <p:spPr>
-          <a:xfrm>
-            <a:off x="11315781" y="1801368"/>
-            <a:ext cx="170052" cy="164592"/>
-          </a:xfrm>
-          <a:prstGeom prst="rect">
-            <a:avLst/>
-          </a:prstGeom>
-          <a:noFill/>
-          <a:ln/>
-        </p:spPr>
-        <p:txBody>
-          <a:bodyPr wrap="square" lIns="0" tIns="0" rIns="0" bIns="0" rtlCol="0" anchor="ctr">
-            <a:normAutofit/>
-          </a:bodyPr>
-          <a:lstStyle/>
-          <a:p>
-            <a:pPr algn="ctr" indent="0" marL="0">
-              <a:buNone/>
-            </a:pPr>
-            <a:r>
-              <a:rPr lang="en-US" altLang="en-US" sz="550" b="1" dirty="0">
-                <a:solidFill>
-                  <a:srgbClr val="222222"/>
-                </a:solidFill>
-                <a:latin typeface="Calibri" pitchFamily="34" charset="0"/>
-                <a:ea typeface="Calibri" pitchFamily="34" charset="-122"/>
-                <a:cs typeface="Calibri" pitchFamily="34" charset="-120"/>
-              </a:rPr>
-              <a:t>14</a:t>
-            </a:r>
-            <a:endParaRPr lang="en-US" sz="550" dirty="0"/>
-          </a:p>
-        </p:txBody>
-      </p:sp>
-      <p:sp>
-        <p:nvSpPr>
-          <p:cNvPr id="143" name="Shape 141"/>
-          <p:cNvSpPr/>
-          <p:nvPr/>
-        </p:nvSpPr>
-        <p:spPr>
-          <a:xfrm>
-            <a:off x="11315781" y="1965960"/>
-            <a:ext cx="0" cy="2194560"/>
-          </a:xfrm>
-          <a:prstGeom prst="line">
-            <a:avLst/>
-          </a:prstGeom>
-          <a:noFill/>
-          <a:ln w="6350">
-            <a:solidFill>
-              <a:srgbClr val="9DB2BB"/>
-            </a:solidFill>
-            <a:prstDash val="solid"/>
-          </a:ln>
-        </p:spPr>
-      </p:sp>
-      <p:sp>
-        <p:nvSpPr>
-          <p:cNvPr id="144" name="Shape 142"/>
-          <p:cNvSpPr/>
-          <p:nvPr/>
-        </p:nvSpPr>
-        <p:spPr>
-          <a:xfrm>
-            <a:off x="11485832" y="1664208"/>
-            <a:ext cx="170052" cy="301752"/>
-          </a:xfrm>
-          <a:prstGeom prst="rect">
-            <a:avLst/>
-          </a:prstGeom>
-          <a:solidFill>
-            <a:srgbClr val="F4F7F8"/>
-          </a:solidFill>
-          <a:ln w="6350">
-            <a:solidFill>
-              <a:srgbClr val="FFFFFF"/>
-            </a:solidFill>
-            <a:prstDash val="solid"/>
-          </a:ln>
-        </p:spPr>
-      </p:sp>
-      <p:sp>
-        <p:nvSpPr>
-          <p:cNvPr id="145" name="Text 143"/>
-          <p:cNvSpPr/>
-          <p:nvPr/>
-        </p:nvSpPr>
-        <p:spPr>
-          <a:xfrm>
-            <a:off x="11485832" y="1664208"/>
-            <a:ext cx="170052" cy="137160"/>
-          </a:xfrm>
-          <a:prstGeom prst="rect">
-            <a:avLst/>
-          </a:prstGeom>
-          <a:noFill/>
-          <a:ln/>
-        </p:spPr>
-        <p:txBody>
-          <a:bodyPr wrap="square" lIns="0" tIns="0" rIns="0" bIns="0" rtlCol="0" anchor="ctr">
-            <a:normAutofit/>
-          </a:bodyPr>
-          <a:lstStyle/>
-          <a:p>
-            <a:pPr algn="ctr" indent="0" marL="0">
-              <a:buNone/>
-            </a:pPr>
-            <a:r>
-              <a:rPr lang="en-US" altLang="en-US" sz="500" b="1" dirty="0">
-                <a:solidFill>
-                  <a:srgbClr val="5A6A73"/>
-                </a:solidFill>
-                <a:latin typeface="Calibri" pitchFamily="34" charset="0"/>
-                <a:ea typeface="Calibri" pitchFamily="34" charset="-122"/>
-                <a:cs typeface="Calibri" pitchFamily="34" charset="-120"/>
-              </a:rPr>
-              <a:t>S</a:t>
-            </a:r>
-            <a:endParaRPr lang="en-US" sz="500" dirty="0"/>
-          </a:p>
-        </p:txBody>
-      </p:sp>
-      <p:sp>
-        <p:nvSpPr>
-          <p:cNvPr id="146" name="Text 144"/>
-          <p:cNvSpPr/>
-          <p:nvPr/>
-        </p:nvSpPr>
-        <p:spPr>
-          <a:xfrm>
-            <a:off x="11485832" y="1801368"/>
-            <a:ext cx="170052" cy="164592"/>
-          </a:xfrm>
-          <a:prstGeom prst="rect">
-            <a:avLst/>
-          </a:prstGeom>
-          <a:noFill/>
-          <a:ln/>
-        </p:spPr>
-        <p:txBody>
-          <a:bodyPr wrap="square" lIns="0" tIns="0" rIns="0" bIns="0" rtlCol="0" anchor="ctr">
-            <a:normAutofit/>
-          </a:bodyPr>
-          <a:lstStyle/>
-          <a:p>
-            <a:pPr algn="ctr" indent="0" marL="0">
-              <a:buNone/>
-            </a:pPr>
-            <a:r>
-              <a:rPr lang="en-US" altLang="en-US" sz="550" b="1" dirty="0">
-                <a:solidFill>
-                  <a:srgbClr val="222222"/>
-                </a:solidFill>
-                <a:latin typeface="Calibri" pitchFamily="34" charset="0"/>
-                <a:ea typeface="Calibri" pitchFamily="34" charset="-122"/>
-                <a:cs typeface="Calibri" pitchFamily="34" charset="-120"/>
-              </a:rPr>
-              <a:t>15</a:t>
-            </a:r>
-            <a:endParaRPr lang="en-US" sz="550" dirty="0"/>
-          </a:p>
-        </p:txBody>
-      </p:sp>
-      <p:sp>
-        <p:nvSpPr>
-          <p:cNvPr id="147" name="Shape 145"/>
-          <p:cNvSpPr/>
-          <p:nvPr/>
-        </p:nvSpPr>
-        <p:spPr>
-          <a:xfrm>
-            <a:off x="11655884" y="1664208"/>
-            <a:ext cx="170052" cy="301752"/>
-          </a:xfrm>
-          <a:prstGeom prst="rect">
-            <a:avLst/>
-          </a:prstGeom>
-          <a:solidFill>
-            <a:srgbClr val="F4F7F8"/>
-          </a:solidFill>
-          <a:ln w="6350">
-            <a:solidFill>
-              <a:srgbClr val="FFFFFF"/>
-            </a:solidFill>
-            <a:prstDash val="solid"/>
-          </a:ln>
-        </p:spPr>
-      </p:sp>
-      <p:sp>
-        <p:nvSpPr>
-          <p:cNvPr id="148" name="Text 146"/>
-          <p:cNvSpPr/>
-          <p:nvPr/>
-        </p:nvSpPr>
-        <p:spPr>
-          <a:xfrm>
-            <a:off x="11655884" y="1664208"/>
-            <a:ext cx="170052" cy="137160"/>
-          </a:xfrm>
-          <a:prstGeom prst="rect">
-            <a:avLst/>
-          </a:prstGeom>
-          <a:noFill/>
-          <a:ln/>
-        </p:spPr>
-        <p:txBody>
-          <a:bodyPr wrap="square" lIns="0" tIns="0" rIns="0" bIns="0" rtlCol="0" anchor="ctr">
-            <a:normAutofit/>
-          </a:bodyPr>
-          <a:lstStyle/>
-          <a:p>
-            <a:pPr algn="ctr" indent="0" marL="0">
-              <a:buNone/>
-            </a:pPr>
-            <a:r>
-              <a:rPr lang="en-US" altLang="en-US" sz="500" b="1" dirty="0">
-                <a:solidFill>
-                  <a:srgbClr val="5A6A73"/>
-                </a:solidFill>
-                <a:latin typeface="Calibri" pitchFamily="34" charset="0"/>
-                <a:ea typeface="Calibri" pitchFamily="34" charset="-122"/>
-                <a:cs typeface="Calibri" pitchFamily="34" charset="-120"/>
-              </a:rPr>
-              <a:t>M</a:t>
-            </a:r>
-            <a:endParaRPr lang="en-US" sz="500" dirty="0"/>
-          </a:p>
-        </p:txBody>
-      </p:sp>
-      <p:sp>
-        <p:nvSpPr>
-          <p:cNvPr id="149" name="Text 147"/>
-          <p:cNvSpPr/>
-          <p:nvPr/>
-        </p:nvSpPr>
-        <p:spPr>
-          <a:xfrm>
-            <a:off x="11655884" y="1801368"/>
-            <a:ext cx="170052" cy="164592"/>
-          </a:xfrm>
-          <a:prstGeom prst="rect">
-            <a:avLst/>
-          </a:prstGeom>
-          <a:noFill/>
-          <a:ln/>
-        </p:spPr>
-        <p:txBody>
-          <a:bodyPr wrap="square" lIns="0" tIns="0" rIns="0" bIns="0" rtlCol="0" anchor="ctr">
-            <a:normAutofit/>
-          </a:bodyPr>
-          <a:lstStyle/>
-          <a:p>
-            <a:pPr algn="ctr" indent="0" marL="0">
-              <a:buNone/>
-            </a:pPr>
-            <a:r>
-              <a:rPr lang="en-US" altLang="en-US" sz="550" b="1" dirty="0">
-                <a:solidFill>
-                  <a:srgbClr val="222222"/>
-                </a:solidFill>
-                <a:latin typeface="Calibri" pitchFamily="34" charset="0"/>
-                <a:ea typeface="Calibri" pitchFamily="34" charset="-122"/>
-                <a:cs typeface="Calibri" pitchFamily="34" charset="-120"/>
-              </a:rPr>
-              <a:t>16</a:t>
-            </a:r>
-            <a:endParaRPr lang="en-US" sz="550" dirty="0"/>
-          </a:p>
-        </p:txBody>
-      </p:sp>
-      <p:sp>
-        <p:nvSpPr>
-          <p:cNvPr id="150" name="Shape 148"/>
           <p:cNvSpPr/>
           <p:nvPr/>
         </p:nvSpPr>
@@ -11775,7 +11113,7 @@
       </p:sp>
       <p:sp>
         <p:nvSpPr>
-          <p:cNvPr id="151" name="Shape 149"/>
+          <p:cNvPr id="131" name="Shape 129"/>
           <p:cNvSpPr/>
           <p:nvPr/>
         </p:nvSpPr>
@@ -11800,7 +11138,7 @@
       </p:sp>
       <p:sp>
         <p:nvSpPr>
-          <p:cNvPr id="152" name="Text 150"/>
+          <p:cNvPr id="132" name="Text 130"/>
           <p:cNvSpPr/>
           <p:nvPr/>
         </p:nvSpPr>
@@ -11841,7 +11179,7 @@
       </p:sp>
       <p:sp>
         <p:nvSpPr>
-          <p:cNvPr id="153" name="Text 151"/>
+          <p:cNvPr id="133" name="Text 131"/>
           <p:cNvSpPr/>
           <p:nvPr/>
         </p:nvSpPr>
@@ -11882,7 +11220,7 @@
       </p:sp>
       <p:sp>
         <p:nvSpPr>
-          <p:cNvPr id="154" name="Text 152"/>
+          <p:cNvPr id="134" name="Text 132"/>
           <p:cNvSpPr/>
           <p:nvPr/>
         </p:nvSpPr>
@@ -11923,7 +11261,7 @@
       </p:sp>
       <p:sp>
         <p:nvSpPr>
-          <p:cNvPr id="155" name="Text 153"/>
+          <p:cNvPr id="135" name="Text 133"/>
           <p:cNvSpPr/>
           <p:nvPr/>
         </p:nvSpPr>
@@ -11964,7 +11302,7 @@
       </p:sp>
       <p:sp>
         <p:nvSpPr>
-          <p:cNvPr id="156" name="Text 154"/>
+          <p:cNvPr id="136" name="Text 134"/>
           <p:cNvSpPr/>
           <p:nvPr/>
         </p:nvSpPr>
@@ -11997,7 +11335,7 @@
                 <a:ea typeface="Calibri" pitchFamily="34" charset="-122"/>
                 <a:cs typeface="Calibri" pitchFamily="34" charset="-120"/>
               </a:rPr>
-              <a:t>14 Nov</a:t>
+              <a:t>10 Nov</a:t>
             </a:r>
             <a:endParaRPr lang="en-US" sz="850" dirty="0"/>
           </a:p>
@@ -12005,14 +11343,14 @@
       </p:sp>
       <p:sp>
         <p:nvSpPr>
-          <p:cNvPr id="157" name="Shape 155"/>
-          <p:cNvSpPr/>
-          <p:nvPr/>
-        </p:nvSpPr>
-        <p:spPr>
-          <a:xfrm>
-            <a:off x="7404596" y="2011680"/>
-            <a:ext cx="4081236" cy="182880"/>
+          <p:cNvPr id="137" name="Shape 135"/>
+          <p:cNvSpPr/>
+          <p:nvPr/>
+        </p:nvSpPr>
+        <p:spPr>
+          <a:xfrm>
+            <a:off x="7585984" y="2011680"/>
+            <a:ext cx="3854501" cy="182880"/>
           </a:xfrm>
           <a:prstGeom prst="roundRect">
             <a:avLst>
@@ -12032,14 +11370,14 @@
       </p:sp>
       <p:sp>
         <p:nvSpPr>
-          <p:cNvPr id="158" name="Text 156"/>
-          <p:cNvSpPr/>
-          <p:nvPr/>
-        </p:nvSpPr>
-        <p:spPr>
-          <a:xfrm>
-            <a:off x="7404596" y="2011680"/>
-            <a:ext cx="4081236" cy="182880"/>
+          <p:cNvPr id="138" name="Text 136"/>
+          <p:cNvSpPr/>
+          <p:nvPr/>
+        </p:nvSpPr>
+        <p:spPr>
+          <a:xfrm>
+            <a:off x="7585984" y="2011680"/>
+            <a:ext cx="3854501" cy="182880"/>
           </a:xfrm>
           <a:prstGeom prst="rect">
             <a:avLst/>
@@ -12065,7 +11403,7 @@
                 <a:ea typeface="Calibri" pitchFamily="34" charset="-122"/>
                 <a:cs typeface="Calibri" pitchFamily="34" charset="-120"/>
               </a:rPr>
-              <a:t>20 working days · 22 Oct → 14 Nov</a:t>
+              <a:t>20 working days · 22 Oct → 10 Nov</a:t>
             </a:r>
             <a:endParaRPr lang="en-US" sz="850" dirty="0"/>
           </a:p>
@@ -12073,7 +11411,7 @@
       </p:sp>
       <p:sp>
         <p:nvSpPr>
-          <p:cNvPr id="159" name="Shape 157"/>
+          <p:cNvPr id="139" name="Shape 137"/>
           <p:cNvSpPr/>
           <p:nvPr/>
         </p:nvSpPr>
@@ -12098,7 +11436,7 @@
       </p:sp>
       <p:sp>
         <p:nvSpPr>
-          <p:cNvPr id="160" name="Shape 158"/>
+          <p:cNvPr id="140" name="Shape 138"/>
           <p:cNvSpPr/>
           <p:nvPr/>
         </p:nvSpPr>
@@ -12123,7 +11461,7 @@
       </p:sp>
       <p:sp>
         <p:nvSpPr>
-          <p:cNvPr id="161" name="Text 159"/>
+          <p:cNvPr id="141" name="Text 139"/>
           <p:cNvSpPr/>
           <p:nvPr/>
         </p:nvSpPr>
@@ -12164,7 +11502,7 @@
       </p:sp>
       <p:sp>
         <p:nvSpPr>
-          <p:cNvPr id="162" name="Text 160"/>
+          <p:cNvPr id="142" name="Text 140"/>
           <p:cNvSpPr/>
           <p:nvPr/>
         </p:nvSpPr>
@@ -12205,7 +11543,7 @@
       </p:sp>
       <p:sp>
         <p:nvSpPr>
-          <p:cNvPr id="163" name="Text 161"/>
+          <p:cNvPr id="143" name="Text 141"/>
           <p:cNvSpPr/>
           <p:nvPr/>
         </p:nvSpPr>
@@ -12246,7 +11584,7 @@
       </p:sp>
       <p:sp>
         <p:nvSpPr>
-          <p:cNvPr id="164" name="Text 162"/>
+          <p:cNvPr id="144" name="Text 142"/>
           <p:cNvSpPr/>
           <p:nvPr/>
         </p:nvSpPr>
@@ -12287,7 +11625,7 @@
       </p:sp>
       <p:sp>
         <p:nvSpPr>
-          <p:cNvPr id="165" name="Text 163"/>
+          <p:cNvPr id="145" name="Text 143"/>
           <p:cNvSpPr/>
           <p:nvPr/>
         </p:nvSpPr>
@@ -12328,7 +11666,7 @@
       </p:sp>
       <p:sp>
         <p:nvSpPr>
-          <p:cNvPr id="166" name="Text 164"/>
+          <p:cNvPr id="146" name="Text 144"/>
           <p:cNvSpPr/>
           <p:nvPr/>
         </p:nvSpPr>
@@ -12361,7 +11699,7 @@
                 <a:ea typeface="Calibri" pitchFamily="34" charset="-122"/>
                 <a:cs typeface="Calibri" pitchFamily="34" charset="-120"/>
               </a:rPr>
-              <a:t>26 Oct</a:t>
+              <a:t>25 Oct</a:t>
             </a:r>
             <a:endParaRPr lang="en-US" sz="850" dirty="0"/>
           </a:p>
@@ -12369,14 +11707,14 @@
       </p:sp>
       <p:sp>
         <p:nvSpPr>
-          <p:cNvPr id="167" name="Shape 165"/>
-          <p:cNvSpPr/>
-          <p:nvPr/>
-        </p:nvSpPr>
-        <p:spPr>
-          <a:xfrm>
-            <a:off x="7404596" y="2404872"/>
-            <a:ext cx="850258" cy="310896"/>
+          <p:cNvPr id="147" name="Shape 145"/>
+          <p:cNvSpPr/>
+          <p:nvPr/>
+        </p:nvSpPr>
+        <p:spPr>
+          <a:xfrm>
+            <a:off x="7585984" y="2404872"/>
+            <a:ext cx="770900" cy="310896"/>
           </a:xfrm>
           <a:prstGeom prst="roundRect">
             <a:avLst>
@@ -12403,14 +11741,14 @@
       </p:sp>
       <p:sp>
         <p:nvSpPr>
-          <p:cNvPr id="168" name="Text 166"/>
-          <p:cNvSpPr/>
-          <p:nvPr/>
-        </p:nvSpPr>
-        <p:spPr>
-          <a:xfrm>
-            <a:off x="7404596" y="2404872"/>
-            <a:ext cx="850258" cy="310896"/>
+          <p:cNvPr id="148" name="Text 146"/>
+          <p:cNvSpPr/>
+          <p:nvPr/>
+        </p:nvSpPr>
+        <p:spPr>
+          <a:xfrm>
+            <a:off x="7585984" y="2404872"/>
+            <a:ext cx="770900" cy="310896"/>
           </a:xfrm>
           <a:prstGeom prst="rect">
             <a:avLst/>
@@ -12444,7 +11782,7 @@
       </p:sp>
       <p:sp>
         <p:nvSpPr>
-          <p:cNvPr id="169" name="Shape 167"/>
+          <p:cNvPr id="149" name="Shape 147"/>
           <p:cNvSpPr/>
           <p:nvPr/>
         </p:nvSpPr>
@@ -12469,7 +11807,7 @@
       </p:sp>
       <p:sp>
         <p:nvSpPr>
-          <p:cNvPr id="170" name="Shape 168"/>
+          <p:cNvPr id="150" name="Shape 148"/>
           <p:cNvSpPr/>
           <p:nvPr/>
         </p:nvSpPr>
@@ -12494,7 +11832,7 @@
       </p:sp>
       <p:sp>
         <p:nvSpPr>
-          <p:cNvPr id="171" name="Text 169"/>
+          <p:cNvPr id="151" name="Text 149"/>
           <p:cNvSpPr/>
           <p:nvPr/>
         </p:nvSpPr>
@@ -12535,7 +11873,7 @@
       </p:sp>
       <p:sp>
         <p:nvSpPr>
-          <p:cNvPr id="172" name="Text 170"/>
+          <p:cNvPr id="152" name="Text 150"/>
           <p:cNvSpPr/>
           <p:nvPr/>
         </p:nvSpPr>
@@ -12576,7 +11914,7 @@
       </p:sp>
       <p:sp>
         <p:nvSpPr>
-          <p:cNvPr id="173" name="Text 171"/>
+          <p:cNvPr id="153" name="Text 151"/>
           <p:cNvSpPr/>
           <p:nvPr/>
         </p:nvSpPr>
@@ -12617,7 +11955,7 @@
       </p:sp>
       <p:sp>
         <p:nvSpPr>
-          <p:cNvPr id="174" name="Text 172"/>
+          <p:cNvPr id="154" name="Text 152"/>
           <p:cNvSpPr/>
           <p:nvPr/>
         </p:nvSpPr>
@@ -12658,7 +11996,7 @@
       </p:sp>
       <p:sp>
         <p:nvSpPr>
-          <p:cNvPr id="175" name="Text 173"/>
+          <p:cNvPr id="155" name="Text 153"/>
           <p:cNvSpPr/>
           <p:nvPr/>
         </p:nvSpPr>
@@ -12691,7 +12029,7 @@
                 <a:ea typeface="Calibri" pitchFamily="34" charset="-122"/>
                 <a:cs typeface="Calibri" pitchFamily="34" charset="-120"/>
               </a:rPr>
-              <a:t>27 Oct</a:t>
+              <a:t>26 Oct</a:t>
             </a:r>
             <a:endParaRPr lang="en-US" sz="850" dirty="0"/>
           </a:p>
@@ -12699,7 +12037,7 @@
       </p:sp>
       <p:sp>
         <p:nvSpPr>
-          <p:cNvPr id="176" name="Text 174"/>
+          <p:cNvPr id="156" name="Text 154"/>
           <p:cNvSpPr/>
           <p:nvPr/>
         </p:nvSpPr>
@@ -12732,7 +12070,7 @@
                 <a:ea typeface="Calibri" pitchFamily="34" charset="-122"/>
                 <a:cs typeface="Calibri" pitchFamily="34" charset="-120"/>
               </a:rPr>
-              <a:t>11 Nov</a:t>
+              <a:t>8 Nov</a:t>
             </a:r>
             <a:endParaRPr lang="en-US" sz="850" dirty="0"/>
           </a:p>
@@ -12740,14 +12078,14 @@
       </p:sp>
       <p:sp>
         <p:nvSpPr>
-          <p:cNvPr id="177" name="Shape 175"/>
-          <p:cNvSpPr/>
-          <p:nvPr/>
-        </p:nvSpPr>
-        <p:spPr>
-          <a:xfrm>
-            <a:off x="8254854" y="3044952"/>
-            <a:ext cx="2720824" cy="310896"/>
+          <p:cNvPr id="157" name="Shape 155"/>
+          <p:cNvSpPr/>
+          <p:nvPr/>
+        </p:nvSpPr>
+        <p:spPr>
+          <a:xfrm>
+            <a:off x="8356884" y="3044952"/>
+            <a:ext cx="2698151" cy="310896"/>
           </a:xfrm>
           <a:prstGeom prst="roundRect">
             <a:avLst>
@@ -12774,14 +12112,14 @@
       </p:sp>
       <p:sp>
         <p:nvSpPr>
-          <p:cNvPr id="178" name="Text 176"/>
-          <p:cNvSpPr/>
-          <p:nvPr/>
-        </p:nvSpPr>
-        <p:spPr>
-          <a:xfrm>
-            <a:off x="8254854" y="3044952"/>
-            <a:ext cx="2720824" cy="310896"/>
+          <p:cNvPr id="158" name="Text 156"/>
+          <p:cNvSpPr/>
+          <p:nvPr/>
+        </p:nvSpPr>
+        <p:spPr>
+          <a:xfrm>
+            <a:off x="8356884" y="3044952"/>
+            <a:ext cx="2698151" cy="310896"/>
           </a:xfrm>
           <a:prstGeom prst="rect">
             <a:avLst/>
@@ -12815,7 +12153,7 @@
       </p:sp>
       <p:sp>
         <p:nvSpPr>
-          <p:cNvPr id="179" name="Shape 177"/>
+          <p:cNvPr id="159" name="Shape 157"/>
           <p:cNvSpPr/>
           <p:nvPr/>
         </p:nvSpPr>
@@ -12840,7 +12178,7 @@
       </p:sp>
       <p:sp>
         <p:nvSpPr>
-          <p:cNvPr id="180" name="Shape 178"/>
+          <p:cNvPr id="160" name="Shape 158"/>
           <p:cNvSpPr/>
           <p:nvPr/>
         </p:nvSpPr>
@@ -12865,7 +12203,7 @@
       </p:sp>
       <p:sp>
         <p:nvSpPr>
-          <p:cNvPr id="181" name="Text 179"/>
+          <p:cNvPr id="161" name="Text 159"/>
           <p:cNvSpPr/>
           <p:nvPr/>
         </p:nvSpPr>
@@ -12906,7 +12244,7 @@
       </p:sp>
       <p:sp>
         <p:nvSpPr>
-          <p:cNvPr id="182" name="Text 180"/>
+          <p:cNvPr id="162" name="Text 160"/>
           <p:cNvSpPr/>
           <p:nvPr/>
         </p:nvSpPr>
@@ -12947,7 +12285,7 @@
       </p:sp>
       <p:sp>
         <p:nvSpPr>
-          <p:cNvPr id="183" name="Text 181"/>
+          <p:cNvPr id="163" name="Text 161"/>
           <p:cNvSpPr/>
           <p:nvPr/>
         </p:nvSpPr>
@@ -12988,7 +12326,7 @@
       </p:sp>
       <p:sp>
         <p:nvSpPr>
-          <p:cNvPr id="184" name="Text 182"/>
+          <p:cNvPr id="164" name="Text 162"/>
           <p:cNvSpPr/>
           <p:nvPr/>
         </p:nvSpPr>
@@ -13029,7 +12367,7 @@
       </p:sp>
       <p:sp>
         <p:nvSpPr>
-          <p:cNvPr id="185" name="Text 183"/>
+          <p:cNvPr id="165" name="Text 163"/>
           <p:cNvSpPr/>
           <p:nvPr/>
         </p:nvSpPr>
@@ -13062,7 +12400,7 @@
                 <a:ea typeface="Calibri" pitchFamily="34" charset="-122"/>
                 <a:cs typeface="Calibri" pitchFamily="34" charset="-120"/>
               </a:rPr>
-              <a:t>12 Nov</a:t>
+              <a:t>9 Nov</a:t>
             </a:r>
             <a:endParaRPr lang="en-US" sz="850" dirty="0"/>
           </a:p>
@@ -13070,7 +12408,7 @@
       </p:sp>
       <p:sp>
         <p:nvSpPr>
-          <p:cNvPr id="186" name="Text 184"/>
+          <p:cNvPr id="166" name="Text 164"/>
           <p:cNvSpPr/>
           <p:nvPr/>
         </p:nvSpPr>
@@ -13103,7 +12441,7 @@
                 <a:ea typeface="Calibri" pitchFamily="34" charset="-122"/>
                 <a:cs typeface="Calibri" pitchFamily="34" charset="-120"/>
               </a:rPr>
-              <a:t>14 Nov</a:t>
+              <a:t>10 Nov</a:t>
             </a:r>
             <a:endParaRPr lang="en-US" sz="850" dirty="0"/>
           </a:p>
@@ -13111,14 +12449,14 @@
       </p:sp>
       <p:sp>
         <p:nvSpPr>
-          <p:cNvPr id="187" name="Shape 185"/>
-          <p:cNvSpPr/>
-          <p:nvPr/>
-        </p:nvSpPr>
-        <p:spPr>
-          <a:xfrm>
-            <a:off x="10975678" y="3685032"/>
-            <a:ext cx="510155" cy="310896"/>
+          <p:cNvPr id="167" name="Shape 165"/>
+          <p:cNvSpPr/>
+          <p:nvPr/>
+        </p:nvSpPr>
+        <p:spPr>
+          <a:xfrm>
+            <a:off x="11055035" y="3685032"/>
+            <a:ext cx="385450" cy="310896"/>
           </a:xfrm>
           <a:prstGeom prst="roundRect">
             <a:avLst>
@@ -13145,14 +12483,14 @@
       </p:sp>
       <p:sp>
         <p:nvSpPr>
-          <p:cNvPr id="188" name="Text 186"/>
-          <p:cNvSpPr/>
-          <p:nvPr/>
-        </p:nvSpPr>
-        <p:spPr>
-          <a:xfrm>
-            <a:off x="10975678" y="3685032"/>
-            <a:ext cx="510155" cy="310896"/>
+          <p:cNvPr id="168" name="Text 166"/>
+          <p:cNvSpPr/>
+          <p:nvPr/>
+        </p:nvSpPr>
+        <p:spPr>
+          <a:xfrm>
+            <a:off x="11055035" y="3685032"/>
+            <a:ext cx="385450" cy="310896"/>
           </a:xfrm>
           <a:prstGeom prst="rect">
             <a:avLst/>
@@ -13186,13 +12524,13 @@
       </p:sp>
       <p:sp>
         <p:nvSpPr>
-          <p:cNvPr id="189" name="Shape 187"/>
-          <p:cNvSpPr/>
-          <p:nvPr/>
-        </p:nvSpPr>
-        <p:spPr>
-          <a:xfrm>
-            <a:off x="8209134" y="2560320"/>
+          <p:cNvPr id="169" name="Shape 167"/>
+          <p:cNvSpPr/>
+          <p:nvPr/>
+        </p:nvSpPr>
+        <p:spPr>
+          <a:xfrm>
+            <a:off x="8311164" y="2560320"/>
             <a:ext cx="45720" cy="0"/>
           </a:xfrm>
           <a:prstGeom prst="line">
@@ -13209,13 +12547,13 @@
       </p:sp>
       <p:sp>
         <p:nvSpPr>
-          <p:cNvPr id="190" name="Shape 188"/>
-          <p:cNvSpPr/>
-          <p:nvPr/>
-        </p:nvSpPr>
-        <p:spPr>
-          <a:xfrm>
-            <a:off x="8209134" y="2560320"/>
+          <p:cNvPr id="170" name="Shape 168"/>
+          <p:cNvSpPr/>
+          <p:nvPr/>
+        </p:nvSpPr>
+        <p:spPr>
+          <a:xfrm>
+            <a:off x="8311164" y="2560320"/>
             <a:ext cx="0" cy="640080"/>
           </a:xfrm>
           <a:prstGeom prst="line">
@@ -13232,13 +12570,13 @@
       </p:sp>
       <p:sp>
         <p:nvSpPr>
-          <p:cNvPr id="191" name="Shape 189"/>
-          <p:cNvSpPr/>
-          <p:nvPr/>
-        </p:nvSpPr>
-        <p:spPr>
-          <a:xfrm>
-            <a:off x="8209134" y="3200400"/>
+          <p:cNvPr id="171" name="Shape 169"/>
+          <p:cNvSpPr/>
+          <p:nvPr/>
+        </p:nvSpPr>
+        <p:spPr>
+          <a:xfrm>
+            <a:off x="8311164" y="3200400"/>
             <a:ext cx="36576" cy="0"/>
           </a:xfrm>
           <a:prstGeom prst="line">
@@ -13256,13 +12594,13 @@
       </p:sp>
       <p:sp>
         <p:nvSpPr>
-          <p:cNvPr id="192" name="Shape 190"/>
-          <p:cNvSpPr/>
-          <p:nvPr/>
-        </p:nvSpPr>
-        <p:spPr>
-          <a:xfrm>
-            <a:off x="10929958" y="3200400"/>
+          <p:cNvPr id="172" name="Shape 170"/>
+          <p:cNvSpPr/>
+          <p:nvPr/>
+        </p:nvSpPr>
+        <p:spPr>
+          <a:xfrm>
+            <a:off x="11009315" y="3200400"/>
             <a:ext cx="45720" cy="0"/>
           </a:xfrm>
           <a:prstGeom prst="line">
@@ -13279,13 +12617,13 @@
       </p:sp>
       <p:sp>
         <p:nvSpPr>
-          <p:cNvPr id="193" name="Shape 191"/>
-          <p:cNvSpPr/>
-          <p:nvPr/>
-        </p:nvSpPr>
-        <p:spPr>
-          <a:xfrm>
-            <a:off x="10929958" y="3200400"/>
+          <p:cNvPr id="173" name="Shape 171"/>
+          <p:cNvSpPr/>
+          <p:nvPr/>
+        </p:nvSpPr>
+        <p:spPr>
+          <a:xfrm>
+            <a:off x="11009315" y="3200400"/>
             <a:ext cx="0" cy="640080"/>
           </a:xfrm>
           <a:prstGeom prst="line">
@@ -13302,13 +12640,13 @@
       </p:sp>
       <p:sp>
         <p:nvSpPr>
-          <p:cNvPr id="194" name="Shape 192"/>
-          <p:cNvSpPr/>
-          <p:nvPr/>
-        </p:nvSpPr>
-        <p:spPr>
-          <a:xfrm>
-            <a:off x="10929958" y="3840480"/>
+          <p:cNvPr id="174" name="Shape 172"/>
+          <p:cNvSpPr/>
+          <p:nvPr/>
+        </p:nvSpPr>
+        <p:spPr>
+          <a:xfrm>
+            <a:off x="11009315" y="3840480"/>
             <a:ext cx="36576" cy="0"/>
           </a:xfrm>
           <a:prstGeom prst="line">
@@ -13326,13 +12664,13 @@
       </p:sp>
       <p:sp>
         <p:nvSpPr>
-          <p:cNvPr id="195" name="Shape 193"/>
-          <p:cNvSpPr/>
-          <p:nvPr/>
-        </p:nvSpPr>
-        <p:spPr>
-          <a:xfrm>
-            <a:off x="7319570" y="1947672"/>
+          <p:cNvPr id="175" name="Shape 173"/>
+          <p:cNvSpPr/>
+          <p:nvPr/>
+        </p:nvSpPr>
+        <p:spPr>
+          <a:xfrm>
+            <a:off x="7489622" y="1947672"/>
             <a:ext cx="0" cy="2212848"/>
           </a:xfrm>
           <a:prstGeom prst="line">
@@ -13349,13 +12687,13 @@
       </p:sp>
       <p:sp>
         <p:nvSpPr>
-          <p:cNvPr id="196" name="Shape 194"/>
-          <p:cNvSpPr/>
-          <p:nvPr/>
-        </p:nvSpPr>
-        <p:spPr>
-          <a:xfrm>
-            <a:off x="6450890" y="2020824"/>
+          <p:cNvPr id="176" name="Shape 174"/>
+          <p:cNvSpPr/>
+          <p:nvPr/>
+        </p:nvSpPr>
+        <p:spPr>
+          <a:xfrm>
+            <a:off x="6620942" y="2020824"/>
             <a:ext cx="841248" cy="155448"/>
           </a:xfrm>
           <a:prstGeom prst="roundRect">
@@ -13376,13 +12714,13 @@
       </p:sp>
       <p:sp>
         <p:nvSpPr>
-          <p:cNvPr id="197" name="Text 195"/>
-          <p:cNvSpPr/>
-          <p:nvPr/>
-        </p:nvSpPr>
-        <p:spPr>
-          <a:xfrm>
-            <a:off x="6450890" y="2020824"/>
+          <p:cNvPr id="177" name="Text 175"/>
+          <p:cNvSpPr/>
+          <p:nvPr/>
+        </p:nvSpPr>
+        <p:spPr>
+          <a:xfrm>
+            <a:off x="6620942" y="2020824"/>
             <a:ext cx="841248" cy="155448"/>
           </a:xfrm>
           <a:prstGeom prst="rect">
@@ -13417,7 +12755,7 @@
       </p:sp>
       <p:sp>
         <p:nvSpPr>
-          <p:cNvPr id="198" name="Shape 196"/>
+          <p:cNvPr id="178" name="Shape 176"/>
           <p:cNvSpPr/>
           <p:nvPr/>
         </p:nvSpPr>
@@ -13444,7 +12782,7 @@
       </p:sp>
       <p:sp>
         <p:nvSpPr>
-          <p:cNvPr id="199" name="Shape 197"/>
+          <p:cNvPr id="179" name="Shape 177"/>
           <p:cNvSpPr/>
           <p:nvPr/>
         </p:nvSpPr>
@@ -13478,7 +12816,7 @@
       </p:sp>
       <p:sp>
         <p:nvSpPr>
-          <p:cNvPr id="200" name="Shape 198"/>
+          <p:cNvPr id="180" name="Shape 178"/>
           <p:cNvSpPr/>
           <p:nvPr/>
         </p:nvSpPr>
@@ -13503,7 +12841,7 @@
       </p:sp>
       <p:sp>
         <p:nvSpPr>
-          <p:cNvPr id="201" name="Text 199"/>
+          <p:cNvPr id="181" name="Text 179"/>
           <p:cNvSpPr/>
           <p:nvPr/>
         </p:nvSpPr>
@@ -13544,7 +12882,7 @@
       </p:sp>
       <p:sp>
         <p:nvSpPr>
-          <p:cNvPr id="202" name="Text 200"/>
+          <p:cNvPr id="182" name="Text 180"/>
           <p:cNvSpPr/>
           <p:nvPr/>
         </p:nvSpPr>
@@ -13585,7 +12923,7 @@
       </p:sp>
       <p:sp>
         <p:nvSpPr>
-          <p:cNvPr id="203" name="Text 201"/>
+          <p:cNvPr id="183" name="Text 181"/>
           <p:cNvSpPr/>
           <p:nvPr/>
         </p:nvSpPr>
@@ -13626,7 +12964,7 @@
       </p:sp>
       <p:sp>
         <p:nvSpPr>
-          <p:cNvPr id="204" name="Shape 202"/>
+          <p:cNvPr id="184" name="Shape 182"/>
           <p:cNvSpPr/>
           <p:nvPr/>
         </p:nvSpPr>
@@ -13660,7 +12998,7 @@
       </p:sp>
       <p:sp>
         <p:nvSpPr>
-          <p:cNvPr id="205" name="Shape 203"/>
+          <p:cNvPr id="185" name="Shape 183"/>
           <p:cNvSpPr/>
           <p:nvPr/>
         </p:nvSpPr>
@@ -13685,7 +13023,7 @@
       </p:sp>
       <p:sp>
         <p:nvSpPr>
-          <p:cNvPr id="206" name="Text 204"/>
+          <p:cNvPr id="186" name="Text 184"/>
           <p:cNvSpPr/>
           <p:nvPr/>
         </p:nvSpPr>
@@ -13726,7 +13064,7 @@
       </p:sp>
       <p:sp>
         <p:nvSpPr>
-          <p:cNvPr id="207" name="Text 205"/>
+          <p:cNvPr id="187" name="Text 185"/>
           <p:cNvSpPr/>
           <p:nvPr/>
         </p:nvSpPr>
@@ -13759,7 +13097,7 @@
                 <a:ea typeface="Calibri" pitchFamily="34" charset="-122"/>
                 <a:cs typeface="Calibri" pitchFamily="34" charset="-120"/>
               </a:rPr>
-              <a:t>Mon 26 Oct 2026</a:t>
+              <a:t>Sun 25 Oct 2026</a:t>
             </a:r>
             <a:endParaRPr lang="en-US" sz="1300" dirty="0"/>
           </a:p>
@@ -13767,7 +13105,7 @@
       </p:sp>
       <p:sp>
         <p:nvSpPr>
-          <p:cNvPr id="208" name="Text 206"/>
+          <p:cNvPr id="188" name="Text 186"/>
           <p:cNvSpPr/>
           <p:nvPr/>
         </p:nvSpPr>
@@ -13808,7 +13146,7 @@
       </p:sp>
       <p:sp>
         <p:nvSpPr>
-          <p:cNvPr id="209" name="Shape 207"/>
+          <p:cNvPr id="189" name="Shape 187"/>
           <p:cNvSpPr/>
           <p:nvPr/>
         </p:nvSpPr>
@@ -13842,7 +13180,7 @@
       </p:sp>
       <p:sp>
         <p:nvSpPr>
-          <p:cNvPr id="210" name="Shape 208"/>
+          <p:cNvPr id="190" name="Shape 188"/>
           <p:cNvSpPr/>
           <p:nvPr/>
         </p:nvSpPr>
@@ -13867,7 +13205,7 @@
       </p:sp>
       <p:sp>
         <p:nvSpPr>
-          <p:cNvPr id="211" name="Text 209"/>
+          <p:cNvPr id="191" name="Text 189"/>
           <p:cNvSpPr/>
           <p:nvPr/>
         </p:nvSpPr>
@@ -13908,7 +13246,7 @@
       </p:sp>
       <p:sp>
         <p:nvSpPr>
-          <p:cNvPr id="212" name="Text 210"/>
+          <p:cNvPr id="192" name="Text 190"/>
           <p:cNvSpPr/>
           <p:nvPr/>
         </p:nvSpPr>
@@ -13941,7 +13279,7 @@
                 <a:ea typeface="Calibri" pitchFamily="34" charset="-122"/>
                 <a:cs typeface="Calibri" pitchFamily="34" charset="-120"/>
               </a:rPr>
-              <a:t>Wed 11 Nov 2026</a:t>
+              <a:t>Sun 8 Nov 2026</a:t>
             </a:r>
             <a:endParaRPr lang="en-US" sz="1300" dirty="0"/>
           </a:p>
@@ -13949,7 +13287,7 @@
       </p:sp>
       <p:sp>
         <p:nvSpPr>
-          <p:cNvPr id="213" name="Text 211"/>
+          <p:cNvPr id="193" name="Text 191"/>
           <p:cNvSpPr/>
           <p:nvPr/>
         </p:nvSpPr>
@@ -13990,7 +13328,7 @@
       </p:sp>
       <p:sp>
         <p:nvSpPr>
-          <p:cNvPr id="214" name="Shape 212"/>
+          <p:cNvPr id="194" name="Shape 192"/>
           <p:cNvSpPr/>
           <p:nvPr/>
         </p:nvSpPr>
@@ -14024,7 +13362,7 @@
       </p:sp>
       <p:sp>
         <p:nvSpPr>
-          <p:cNvPr id="215" name="Shape 213"/>
+          <p:cNvPr id="195" name="Shape 193"/>
           <p:cNvSpPr/>
           <p:nvPr/>
         </p:nvSpPr>
@@ -14049,7 +13387,7 @@
       </p:sp>
       <p:sp>
         <p:nvSpPr>
-          <p:cNvPr id="216" name="Text 214"/>
+          <p:cNvPr id="196" name="Text 194"/>
           <p:cNvSpPr/>
           <p:nvPr/>
         </p:nvSpPr>
@@ -14090,7 +13428,7 @@
       </p:sp>
       <p:sp>
         <p:nvSpPr>
-          <p:cNvPr id="217" name="Text 215"/>
+          <p:cNvPr id="197" name="Text 195"/>
           <p:cNvSpPr/>
           <p:nvPr/>
         </p:nvSpPr>
@@ -14123,7 +13461,7 @@
                 <a:ea typeface="Calibri" pitchFamily="34" charset="-122"/>
                 <a:cs typeface="Calibri" pitchFamily="34" charset="-120"/>
               </a:rPr>
-              <a:t>Sat 14 Nov 2026</a:t>
+              <a:t>Tue 10 Nov 2026</a:t>
             </a:r>
             <a:endParaRPr lang="en-US" sz="1300" dirty="0"/>
           </a:p>
@@ -14131,7 +13469,7 @@
       </p:sp>
       <p:sp>
         <p:nvSpPr>
-          <p:cNvPr id="218" name="Text 216"/>
+          <p:cNvPr id="198" name="Text 196"/>
           <p:cNvSpPr/>
           <p:nvPr/>
         </p:nvSpPr>
